--- a/slides/LUAN_VAN_SLIDE_BAO_VE_CONCISE.pptx
+++ b/slides/LUAN_VAN_SLIDE_BAO_VE_CONCISE.pptx
@@ -15504,8 +15504,8 @@
         </p:nvSpPr>
         <p:spPr>
           <a:xfrm>
-            <a:off x="502920" y="932688"/>
-            <a:ext cx="8138160" cy="566928"/>
+            <a:off x="502920" y="841248"/>
+            <a:ext cx="8138160" cy="438912"/>
           </a:xfrm>
           <a:prstGeom prst="rect">
             <a:avLst/>
@@ -15523,7 +15523,7 @@
               <a:buNone/>
             </a:pPr>
             <a:r>
-              <a:rPr lang="en-US" sz="1650" b="1" dirty="0">
+              <a:rPr lang="en-US" sz="1550" b="1" dirty="0">
                 <a:solidFill>
                   <a:srgbClr val="25194B"/>
                 </a:solidFill>
@@ -15531,50 +15531,38 @@
                 <a:ea typeface="Cambria" pitchFamily="34" charset="-122"/>
                 <a:cs typeface="Cambria" pitchFamily="34" charset="-120"/>
               </a:rPr>
-              <a:t>So với GRPO + SPICE, sau ACE điểm quan sát của cả 7 thước đo dựa trên câu tham chiếu đều tăng.</a:t>
-            </a:r>
-            <a:endParaRPr lang="en-US" sz="1650" dirty="0"/>
-          </a:p>
-        </p:txBody>
-      </p:sp>
-      <p:sp>
-        <p:nvSpPr>
-          <p:cNvPr id="5" name="Text 3"/>
-          <p:cNvSpPr/>
-          <p:nvPr/>
-        </p:nvSpPr>
-        <p:spPr>
-          <a:xfrm>
-            <a:off x="777240" y="1874520"/>
-            <a:ext cx="2057400" cy="502920"/>
-          </a:xfrm>
-          <a:prstGeom prst="rect">
-            <a:avLst/>
-          </a:prstGeom>
-          <a:noFill/>
-          <a:ln/>
-        </p:spPr>
-        <p:txBody>
-          <a:bodyPr wrap="square" lIns="0" tIns="0" rIns="0" bIns="0" rtlCol="0" anchor="ctr"/>
-          <a:lstStyle/>
-          <a:p>
-            <a:pPr algn="ctr" indent="0" marL="0">
-              <a:buNone/>
-            </a:pPr>
-            <a:r>
-              <a:rPr lang="en-US" sz="2400" b="1" dirty="0">
-                <a:solidFill>
-                  <a:srgbClr val="4F417A"/>
-                </a:solidFill>
-                <a:latin typeface="Cambria" pitchFamily="34" charset="0"/>
-                <a:ea typeface="Cambria" pitchFamily="34" charset="-122"/>
-                <a:cs typeface="Cambria" pitchFamily="34" charset="-120"/>
-              </a:rPr>
-              <a:t>+11,98</a:t>
-            </a:r>
-            <a:endParaRPr lang="en-US" sz="2400" dirty="0"/>
-          </a:p>
-        </p:txBody>
+              <a:t>Sau ACE, điểm quan sát của cả 7 thước đo dựa trên câu tham chiếu đều tăng so với GRPO + SPICE.</a:t>
+            </a:r>
+            <a:endParaRPr lang="en-US" sz="1550" dirty="0"/>
+          </a:p>
+        </p:txBody>
+      </p:sp>
+      <p:sp>
+        <p:nvSpPr>
+          <p:cNvPr id="5" name="Shape 3"/>
+          <p:cNvSpPr/>
+          <p:nvPr/>
+        </p:nvSpPr>
+        <p:spPr>
+          <a:xfrm>
+            <a:off x="502920" y="1389888"/>
+            <a:ext cx="7662672" cy="384048"/>
+          </a:xfrm>
+          <a:prstGeom prst="rect">
+            <a:avLst/>
+          </a:prstGeom>
+          <a:solidFill>
+            <a:srgbClr val="25194B"/>
+          </a:solidFill>
+          <a:ln w="12700">
+            <a:solidFill>
+              <a:srgbClr val="25194B">
+                <a:alpha val="0"/>
+              </a:srgbClr>
+            </a:solidFill>
+            <a:prstDash val="solid"/>
+          </a:ln>
+        </p:spPr>
       </p:sp>
       <p:sp>
         <p:nvSpPr>
@@ -15584,8 +15572,8 @@
         </p:nvSpPr>
         <p:spPr>
           <a:xfrm>
-            <a:off x="777240" y="2404872"/>
-            <a:ext cx="2057400" cy="475488"/>
+            <a:off x="502920" y="1389888"/>
+            <a:ext cx="1691640" cy="384048"/>
           </a:xfrm>
           <a:prstGeom prst="rect">
             <a:avLst/>
@@ -15599,21 +15587,21 @@
           </a:bodyPr>
           <a:lstStyle/>
           <a:p>
-            <a:pPr algn="ctr" indent="0" marL="0">
-              <a:buNone/>
-            </a:pPr>
-            <a:r>
-              <a:rPr lang="en-US" sz="1250" b="1" dirty="0">
-                <a:solidFill>
-                  <a:srgbClr val="1A1A1A"/>
-                </a:solidFill>
-                <a:latin typeface="Cambria" pitchFamily="34" charset="0"/>
-                <a:ea typeface="Cambria" pitchFamily="34" charset="-122"/>
-                <a:cs typeface="Cambria" pitchFamily="34" charset="-120"/>
-              </a:rPr>
-              <a:t>CIDEr-D</a:t>
-            </a:r>
-            <a:endParaRPr lang="en-US" sz="1250" dirty="0"/>
+            <a:pPr algn="l" indent="0" marL="0">
+              <a:buNone/>
+            </a:pPr>
+            <a:r>
+              <a:rPr lang="en-US" sz="1180" b="1" dirty="0">
+                <a:solidFill>
+                  <a:srgbClr val="FFFFFF"/>
+                </a:solidFill>
+                <a:latin typeface="Cambria" pitchFamily="34" charset="0"/>
+                <a:ea typeface="Cambria" pitchFamily="34" charset="-122"/>
+                <a:cs typeface="Cambria" pitchFamily="34" charset="-120"/>
+              </a:rPr>
+              <a:t>Thước đo</a:t>
+            </a:r>
+            <a:endParaRPr lang="en-US" sz="1180" dirty="0"/>
           </a:p>
         </p:txBody>
       </p:sp>
@@ -15625,47 +15613,8 @@
         </p:nvSpPr>
         <p:spPr>
           <a:xfrm>
-            <a:off x="3547872" y="1874520"/>
-            <a:ext cx="2057400" cy="502920"/>
-          </a:xfrm>
-          <a:prstGeom prst="rect">
-            <a:avLst/>
-          </a:prstGeom>
-          <a:noFill/>
-          <a:ln/>
-        </p:spPr>
-        <p:txBody>
-          <a:bodyPr wrap="square" lIns="0" tIns="0" rIns="0" bIns="0" rtlCol="0" anchor="ctr"/>
-          <a:lstStyle/>
-          <a:p>
-            <a:pPr algn="ctr" indent="0" marL="0">
-              <a:buNone/>
-            </a:pPr>
-            <a:r>
-              <a:rPr lang="en-US" sz="2400" b="1" dirty="0">
-                <a:solidFill>
-                  <a:srgbClr val="4F417A"/>
-                </a:solidFill>
-                <a:latin typeface="Cambria" pitchFamily="34" charset="0"/>
-                <a:ea typeface="Cambria" pitchFamily="34" charset="-122"/>
-                <a:cs typeface="Cambria" pitchFamily="34" charset="-120"/>
-              </a:rPr>
-              <a:t>+1,34</a:t>
-            </a:r>
-            <a:endParaRPr lang="en-US" sz="2400" dirty="0"/>
-          </a:p>
-        </p:txBody>
-      </p:sp>
-      <p:sp>
-        <p:nvSpPr>
-          <p:cNvPr id="8" name="Text 6"/>
-          <p:cNvSpPr/>
-          <p:nvPr/>
-        </p:nvSpPr>
-        <p:spPr>
-          <a:xfrm>
-            <a:off x="3547872" y="2404872"/>
-            <a:ext cx="2057400" cy="475488"/>
+            <a:off x="2194560" y="1389888"/>
+            <a:ext cx="1024128" cy="384048"/>
           </a:xfrm>
           <a:prstGeom prst="rect">
             <a:avLst/>
@@ -15683,69 +15632,30 @@
               <a:buNone/>
             </a:pPr>
             <a:r>
-              <a:rPr lang="en-US" sz="1250" b="1" dirty="0">
-                <a:solidFill>
-                  <a:srgbClr val="1A1A1A"/>
-                </a:solidFill>
-                <a:latin typeface="Cambria" pitchFamily="34" charset="0"/>
-                <a:ea typeface="Cambria" pitchFamily="34" charset="-122"/>
-                <a:cs typeface="Cambria" pitchFamily="34" charset="-120"/>
-              </a:rPr>
-              <a:t>SPICE</a:t>
-            </a:r>
-            <a:endParaRPr lang="en-US" sz="1250" dirty="0"/>
-          </a:p>
-        </p:txBody>
-      </p:sp>
-      <p:sp>
-        <p:nvSpPr>
-          <p:cNvPr id="9" name="Text 7"/>
-          <p:cNvSpPr/>
-          <p:nvPr/>
-        </p:nvSpPr>
-        <p:spPr>
-          <a:xfrm>
-            <a:off x="6309360" y="1874520"/>
-            <a:ext cx="2057400" cy="502920"/>
-          </a:xfrm>
-          <a:prstGeom prst="rect">
-            <a:avLst/>
-          </a:prstGeom>
-          <a:noFill/>
-          <a:ln/>
-        </p:spPr>
-        <p:txBody>
-          <a:bodyPr wrap="square" lIns="0" tIns="0" rIns="0" bIns="0" rtlCol="0" anchor="ctr"/>
-          <a:lstStyle/>
-          <a:p>
-            <a:pPr algn="ctr" indent="0" marL="0">
-              <a:buNone/>
-            </a:pPr>
-            <a:r>
-              <a:rPr lang="en-US" sz="2400" b="1" dirty="0">
-                <a:solidFill>
-                  <a:srgbClr val="4F417A"/>
-                </a:solidFill>
-                <a:latin typeface="Cambria" pitchFamily="34" charset="0"/>
-                <a:ea typeface="Cambria" pitchFamily="34" charset="-122"/>
-                <a:cs typeface="Cambria" pitchFamily="34" charset="-120"/>
-              </a:rPr>
-              <a:t>+0,66</a:t>
-            </a:r>
-            <a:endParaRPr lang="en-US" sz="2400" dirty="0"/>
-          </a:p>
-        </p:txBody>
-      </p:sp>
-      <p:sp>
-        <p:nvSpPr>
-          <p:cNvPr id="10" name="Text 8"/>
-          <p:cNvSpPr/>
-          <p:nvPr/>
-        </p:nvSpPr>
-        <p:spPr>
-          <a:xfrm>
-            <a:off x="6309360" y="2404872"/>
-            <a:ext cx="2057400" cy="475488"/>
+              <a:rPr lang="en-US" sz="1180" b="1" dirty="0">
+                <a:solidFill>
+                  <a:srgbClr val="FFFFFF"/>
+                </a:solidFill>
+                <a:latin typeface="Cambria" pitchFamily="34" charset="0"/>
+                <a:ea typeface="Cambria" pitchFamily="34" charset="-122"/>
+                <a:cs typeface="Cambria" pitchFamily="34" charset="-120"/>
+              </a:rPr>
+              <a:t>Base</a:t>
+            </a:r>
+            <a:endParaRPr lang="en-US" sz="1180" dirty="0"/>
+          </a:p>
+        </p:txBody>
+      </p:sp>
+      <p:sp>
+        <p:nvSpPr>
+          <p:cNvPr id="8" name="Text 6"/>
+          <p:cNvSpPr/>
+          <p:nvPr/>
+        </p:nvSpPr>
+        <p:spPr>
+          <a:xfrm>
+            <a:off x="3218688" y="1389888"/>
+            <a:ext cx="1024128" cy="384048"/>
           </a:xfrm>
           <a:prstGeom prst="rect">
             <a:avLst/>
@@ -15763,7 +15673,171 @@
               <a:buNone/>
             </a:pPr>
             <a:r>
-              <a:rPr lang="en-US" sz="1250" b="1" dirty="0">
+              <a:rPr lang="en-US" sz="1180" b="1" dirty="0">
+                <a:solidFill>
+                  <a:srgbClr val="FFFFFF"/>
+                </a:solidFill>
+                <a:latin typeface="Cambria" pitchFamily="34" charset="0"/>
+                <a:ea typeface="Cambria" pitchFamily="34" charset="-122"/>
+                <a:cs typeface="Cambria" pitchFamily="34" charset="-120"/>
+              </a:rPr>
+              <a:t>S1</a:t>
+            </a:r>
+            <a:endParaRPr lang="en-US" sz="1180" dirty="0"/>
+          </a:p>
+        </p:txBody>
+      </p:sp>
+      <p:sp>
+        <p:nvSpPr>
+          <p:cNvPr id="9" name="Text 7"/>
+          <p:cNvSpPr/>
+          <p:nvPr/>
+        </p:nvSpPr>
+        <p:spPr>
+          <a:xfrm>
+            <a:off x="4242816" y="1389888"/>
+            <a:ext cx="1298448" cy="384048"/>
+          </a:xfrm>
+          <a:prstGeom prst="rect">
+            <a:avLst/>
+          </a:prstGeom>
+          <a:noFill/>
+          <a:ln/>
+        </p:spPr>
+        <p:txBody>
+          <a:bodyPr wrap="square" lIns="0" tIns="0" rIns="0" bIns="0" rtlCol="0" anchor="ctr">
+            <a:normAutofit/>
+          </a:bodyPr>
+          <a:lstStyle/>
+          <a:p>
+            <a:pPr algn="ctr" indent="0" marL="0">
+              <a:buNone/>
+            </a:pPr>
+            <a:r>
+              <a:rPr lang="en-US" sz="1180" b="1" dirty="0">
+                <a:solidFill>
+                  <a:srgbClr val="FFFFFF"/>
+                </a:solidFill>
+                <a:latin typeface="Cambria" pitchFamily="34" charset="0"/>
+                <a:ea typeface="Cambria" pitchFamily="34" charset="-122"/>
+                <a:cs typeface="Cambria" pitchFamily="34" charset="-120"/>
+              </a:rPr>
+              <a:t>GRPO</a:t>
+            </a:r>
+            <a:endParaRPr lang="en-US" sz="1180" dirty="0"/>
+          </a:p>
+        </p:txBody>
+      </p:sp>
+      <p:sp>
+        <p:nvSpPr>
+          <p:cNvPr id="10" name="Text 8"/>
+          <p:cNvSpPr/>
+          <p:nvPr/>
+        </p:nvSpPr>
+        <p:spPr>
+          <a:xfrm>
+            <a:off x="5541264" y="1389888"/>
+            <a:ext cx="1389888" cy="384048"/>
+          </a:xfrm>
+          <a:prstGeom prst="rect">
+            <a:avLst/>
+          </a:prstGeom>
+          <a:noFill/>
+          <a:ln/>
+        </p:spPr>
+        <p:txBody>
+          <a:bodyPr wrap="square" lIns="0" tIns="0" rIns="0" bIns="0" rtlCol="0" anchor="ctr">
+            <a:normAutofit/>
+          </a:bodyPr>
+          <a:lstStyle/>
+          <a:p>
+            <a:pPr algn="ctr" indent="0" marL="0">
+              <a:buNone/>
+            </a:pPr>
+            <a:r>
+              <a:rPr lang="en-US" sz="1180" b="1" dirty="0">
+                <a:solidFill>
+                  <a:srgbClr val="FFFFFF"/>
+                </a:solidFill>
+                <a:latin typeface="Cambria" pitchFamily="34" charset="0"/>
+                <a:ea typeface="Cambria" pitchFamily="34" charset="-122"/>
+                <a:cs typeface="Cambria" pitchFamily="34" charset="-120"/>
+              </a:rPr>
+              <a:t>Đề xuất</a:t>
+            </a:r>
+            <a:endParaRPr lang="en-US" sz="1180" dirty="0"/>
+          </a:p>
+        </p:txBody>
+      </p:sp>
+      <p:sp>
+        <p:nvSpPr>
+          <p:cNvPr id="11" name="Text 9"/>
+          <p:cNvSpPr/>
+          <p:nvPr/>
+        </p:nvSpPr>
+        <p:spPr>
+          <a:xfrm>
+            <a:off x="6931152" y="1389888"/>
+            <a:ext cx="1234440" cy="384048"/>
+          </a:xfrm>
+          <a:prstGeom prst="rect">
+            <a:avLst/>
+          </a:prstGeom>
+          <a:noFill/>
+          <a:ln/>
+        </p:spPr>
+        <p:txBody>
+          <a:bodyPr wrap="square" lIns="0" tIns="0" rIns="0" bIns="0" rtlCol="0" anchor="ctr">
+            <a:normAutofit/>
+          </a:bodyPr>
+          <a:lstStyle/>
+          <a:p>
+            <a:pPr algn="ctr" indent="0" marL="0">
+              <a:buNone/>
+            </a:pPr>
+            <a:r>
+              <a:rPr lang="en-US" sz="1180" b="1" dirty="0">
+                <a:solidFill>
+                  <a:srgbClr val="FFFFFF"/>
+                </a:solidFill>
+                <a:latin typeface="Cambria" pitchFamily="34" charset="0"/>
+                <a:ea typeface="Cambria" pitchFamily="34" charset="-122"/>
+                <a:cs typeface="Cambria" pitchFamily="34" charset="-120"/>
+              </a:rPr>
+              <a:t>Δ ACE</a:t>
+            </a:r>
+            <a:endParaRPr lang="en-US" sz="1180" dirty="0"/>
+          </a:p>
+        </p:txBody>
+      </p:sp>
+      <p:sp>
+        <p:nvSpPr>
+          <p:cNvPr id="12" name="Text 10"/>
+          <p:cNvSpPr/>
+          <p:nvPr/>
+        </p:nvSpPr>
+        <p:spPr>
+          <a:xfrm>
+            <a:off x="502920" y="1773936"/>
+            <a:ext cx="1691640" cy="429768"/>
+          </a:xfrm>
+          <a:prstGeom prst="rect">
+            <a:avLst/>
+          </a:prstGeom>
+          <a:noFill/>
+          <a:ln/>
+        </p:spPr>
+        <p:txBody>
+          <a:bodyPr wrap="square" lIns="0" tIns="0" rIns="0" bIns="0" rtlCol="0" anchor="ctr">
+            <a:normAutofit/>
+          </a:bodyPr>
+          <a:lstStyle/>
+          <a:p>
+            <a:pPr algn="l" indent="0" marL="0">
+              <a:buNone/>
+            </a:pPr>
+            <a:r>
+              <a:rPr lang="en-US" sz="1190" dirty="0">
                 <a:solidFill>
                   <a:srgbClr val="1A1A1A"/>
                 </a:solidFill>
@@ -15771,22 +15845,1847 @@
                 <a:ea typeface="Cambria" pitchFamily="34" charset="-122"/>
                 <a:cs typeface="Cambria" pitchFamily="34" charset="-120"/>
               </a:rPr>
+              <a:t>BLEU-4</a:t>
+            </a:r>
+            <a:endParaRPr lang="en-US" sz="1190" dirty="0"/>
+          </a:p>
+        </p:txBody>
+      </p:sp>
+      <p:sp>
+        <p:nvSpPr>
+          <p:cNvPr id="13" name="Text 11"/>
+          <p:cNvSpPr/>
+          <p:nvPr/>
+        </p:nvSpPr>
+        <p:spPr>
+          <a:xfrm>
+            <a:off x="2194560" y="1773936"/>
+            <a:ext cx="1024128" cy="429768"/>
+          </a:xfrm>
+          <a:prstGeom prst="rect">
+            <a:avLst/>
+          </a:prstGeom>
+          <a:noFill/>
+          <a:ln/>
+        </p:spPr>
+        <p:txBody>
+          <a:bodyPr wrap="square" lIns="0" tIns="0" rIns="0" bIns="0" rtlCol="0" anchor="ctr">
+            <a:normAutofit/>
+          </a:bodyPr>
+          <a:lstStyle/>
+          <a:p>
+            <a:pPr algn="ctr" indent="0" marL="0">
+              <a:buNone/>
+            </a:pPr>
+            <a:r>
+              <a:rPr lang="en-US" sz="1190" dirty="0">
+                <a:solidFill>
+                  <a:srgbClr val="1A1A1A"/>
+                </a:solidFill>
+                <a:latin typeface="Cambria" pitchFamily="34" charset="0"/>
+                <a:ea typeface="Cambria" pitchFamily="34" charset="-122"/>
+                <a:cs typeface="Cambria" pitchFamily="34" charset="-120"/>
+              </a:rPr>
+              <a:t>15,30</a:t>
+            </a:r>
+            <a:endParaRPr lang="en-US" sz="1190" dirty="0"/>
+          </a:p>
+        </p:txBody>
+      </p:sp>
+      <p:sp>
+        <p:nvSpPr>
+          <p:cNvPr id="14" name="Text 12"/>
+          <p:cNvSpPr/>
+          <p:nvPr/>
+        </p:nvSpPr>
+        <p:spPr>
+          <a:xfrm>
+            <a:off x="3218688" y="1773936"/>
+            <a:ext cx="1024128" cy="429768"/>
+          </a:xfrm>
+          <a:prstGeom prst="rect">
+            <a:avLst/>
+          </a:prstGeom>
+          <a:noFill/>
+          <a:ln/>
+        </p:spPr>
+        <p:txBody>
+          <a:bodyPr wrap="square" lIns="0" tIns="0" rIns="0" bIns="0" rtlCol="0" anchor="ctr">
+            <a:normAutofit/>
+          </a:bodyPr>
+          <a:lstStyle/>
+          <a:p>
+            <a:pPr algn="ctr" indent="0" marL="0">
+              <a:buNone/>
+            </a:pPr>
+            <a:r>
+              <a:rPr lang="en-US" sz="1190" dirty="0">
+                <a:solidFill>
+                  <a:srgbClr val="1A1A1A"/>
+                </a:solidFill>
+                <a:latin typeface="Cambria" pitchFamily="34" charset="0"/>
+                <a:ea typeface="Cambria" pitchFamily="34" charset="-122"/>
+                <a:cs typeface="Cambria" pitchFamily="34" charset="-120"/>
+              </a:rPr>
+              <a:t>51,56</a:t>
+            </a:r>
+            <a:endParaRPr lang="en-US" sz="1190" dirty="0"/>
+          </a:p>
+        </p:txBody>
+      </p:sp>
+      <p:sp>
+        <p:nvSpPr>
+          <p:cNvPr id="15" name="Text 13"/>
+          <p:cNvSpPr/>
+          <p:nvPr/>
+        </p:nvSpPr>
+        <p:spPr>
+          <a:xfrm>
+            <a:off x="4242816" y="1773936"/>
+            <a:ext cx="1298448" cy="429768"/>
+          </a:xfrm>
+          <a:prstGeom prst="rect">
+            <a:avLst/>
+          </a:prstGeom>
+          <a:noFill/>
+          <a:ln/>
+        </p:spPr>
+        <p:txBody>
+          <a:bodyPr wrap="square" lIns="0" tIns="0" rIns="0" bIns="0" rtlCol="0" anchor="ctr">
+            <a:normAutofit/>
+          </a:bodyPr>
+          <a:lstStyle/>
+          <a:p>
+            <a:pPr algn="ctr" indent="0" marL="0">
+              <a:buNone/>
+            </a:pPr>
+            <a:r>
+              <a:rPr lang="en-US" sz="1190" dirty="0">
+                <a:solidFill>
+                  <a:srgbClr val="1A1A1A"/>
+                </a:solidFill>
+                <a:latin typeface="Cambria" pitchFamily="34" charset="0"/>
+                <a:ea typeface="Cambria" pitchFamily="34" charset="-122"/>
+                <a:cs typeface="Cambria" pitchFamily="34" charset="-120"/>
+              </a:rPr>
+              <a:t>52,36</a:t>
+            </a:r>
+            <a:endParaRPr lang="en-US" sz="1190" dirty="0"/>
+          </a:p>
+        </p:txBody>
+      </p:sp>
+      <p:sp>
+        <p:nvSpPr>
+          <p:cNvPr id="16" name="Text 14"/>
+          <p:cNvSpPr/>
+          <p:nvPr/>
+        </p:nvSpPr>
+        <p:spPr>
+          <a:xfrm>
+            <a:off x="5541264" y="1773936"/>
+            <a:ext cx="1389888" cy="429768"/>
+          </a:xfrm>
+          <a:prstGeom prst="rect">
+            <a:avLst/>
+          </a:prstGeom>
+          <a:noFill/>
+          <a:ln/>
+        </p:spPr>
+        <p:txBody>
+          <a:bodyPr wrap="square" lIns="0" tIns="0" rIns="0" bIns="0" rtlCol="0" anchor="ctr">
+            <a:normAutofit/>
+          </a:bodyPr>
+          <a:lstStyle/>
+          <a:p>
+            <a:pPr algn="ctr" indent="0" marL="0">
+              <a:buNone/>
+            </a:pPr>
+            <a:r>
+              <a:rPr lang="en-US" sz="1190" dirty="0">
+                <a:solidFill>
+                  <a:srgbClr val="1A1A1A"/>
+                </a:solidFill>
+                <a:latin typeface="Cambria" pitchFamily="34" charset="0"/>
+                <a:ea typeface="Cambria" pitchFamily="34" charset="-122"/>
+                <a:cs typeface="Cambria" pitchFamily="34" charset="-120"/>
+              </a:rPr>
+              <a:t>53,47</a:t>
+            </a:r>
+            <a:endParaRPr lang="en-US" sz="1190" dirty="0"/>
+          </a:p>
+        </p:txBody>
+      </p:sp>
+      <p:sp>
+        <p:nvSpPr>
+          <p:cNvPr id="17" name="Text 15"/>
+          <p:cNvSpPr/>
+          <p:nvPr/>
+        </p:nvSpPr>
+        <p:spPr>
+          <a:xfrm>
+            <a:off x="6931152" y="1773936"/>
+            <a:ext cx="1234440" cy="429768"/>
+          </a:xfrm>
+          <a:prstGeom prst="rect">
+            <a:avLst/>
+          </a:prstGeom>
+          <a:noFill/>
+          <a:ln/>
+        </p:spPr>
+        <p:txBody>
+          <a:bodyPr wrap="square" lIns="0" tIns="0" rIns="0" bIns="0" rtlCol="0" anchor="ctr">
+            <a:normAutofit/>
+          </a:bodyPr>
+          <a:lstStyle/>
+          <a:p>
+            <a:pPr algn="ctr" indent="0" marL="0">
+              <a:buNone/>
+            </a:pPr>
+            <a:r>
+              <a:rPr lang="en-US" sz="1190" dirty="0">
+                <a:solidFill>
+                  <a:srgbClr val="1A1A1A"/>
+                </a:solidFill>
+                <a:latin typeface="Cambria" pitchFamily="34" charset="0"/>
+                <a:ea typeface="Cambria" pitchFamily="34" charset="-122"/>
+                <a:cs typeface="Cambria" pitchFamily="34" charset="-120"/>
+              </a:rPr>
+              <a:t>+1,11</a:t>
+            </a:r>
+            <a:endParaRPr lang="en-US" sz="1190" dirty="0"/>
+          </a:p>
+        </p:txBody>
+      </p:sp>
+      <p:sp>
+        <p:nvSpPr>
+          <p:cNvPr id="18" name="Shape 16"/>
+          <p:cNvSpPr/>
+          <p:nvPr/>
+        </p:nvSpPr>
+        <p:spPr>
+          <a:xfrm>
+            <a:off x="502920" y="2203704"/>
+            <a:ext cx="7662672" cy="0"/>
+          </a:xfrm>
+          <a:prstGeom prst="line">
+            <a:avLst/>
+          </a:prstGeom>
+          <a:noFill/>
+          <a:ln w="12700">
+            <a:solidFill>
+              <a:srgbClr val="D9D6DF"/>
+            </a:solidFill>
+            <a:prstDash val="solid"/>
+            <a:tailEnd type="none"/>
+          </a:ln>
+        </p:spPr>
+      </p:sp>
+      <p:sp>
+        <p:nvSpPr>
+          <p:cNvPr id="19" name="Text 17"/>
+          <p:cNvSpPr/>
+          <p:nvPr/>
+        </p:nvSpPr>
+        <p:spPr>
+          <a:xfrm>
+            <a:off x="502920" y="2203704"/>
+            <a:ext cx="1691640" cy="429768"/>
+          </a:xfrm>
+          <a:prstGeom prst="rect">
+            <a:avLst/>
+          </a:prstGeom>
+          <a:noFill/>
+          <a:ln/>
+        </p:spPr>
+        <p:txBody>
+          <a:bodyPr wrap="square" lIns="0" tIns="0" rIns="0" bIns="0" rtlCol="0" anchor="ctr">
+            <a:normAutofit/>
+          </a:bodyPr>
+          <a:lstStyle/>
+          <a:p>
+            <a:pPr algn="l" indent="0" marL="0">
+              <a:buNone/>
+            </a:pPr>
+            <a:r>
+              <a:rPr lang="en-US" sz="1190" dirty="0">
+                <a:solidFill>
+                  <a:srgbClr val="1A1A1A"/>
+                </a:solidFill>
+                <a:latin typeface="Cambria" pitchFamily="34" charset="0"/>
+                <a:ea typeface="Cambria" pitchFamily="34" charset="-122"/>
+                <a:cs typeface="Cambria" pitchFamily="34" charset="-120"/>
+              </a:rPr>
+              <a:t>METEOR</a:t>
+            </a:r>
+            <a:endParaRPr lang="en-US" sz="1190" dirty="0"/>
+          </a:p>
+        </p:txBody>
+      </p:sp>
+      <p:sp>
+        <p:nvSpPr>
+          <p:cNvPr id="20" name="Text 18"/>
+          <p:cNvSpPr/>
+          <p:nvPr/>
+        </p:nvSpPr>
+        <p:spPr>
+          <a:xfrm>
+            <a:off x="2194560" y="2203704"/>
+            <a:ext cx="1024128" cy="429768"/>
+          </a:xfrm>
+          <a:prstGeom prst="rect">
+            <a:avLst/>
+          </a:prstGeom>
+          <a:noFill/>
+          <a:ln/>
+        </p:spPr>
+        <p:txBody>
+          <a:bodyPr wrap="square" lIns="0" tIns="0" rIns="0" bIns="0" rtlCol="0" anchor="ctr">
+            <a:normAutofit/>
+          </a:bodyPr>
+          <a:lstStyle/>
+          <a:p>
+            <a:pPr algn="ctr" indent="0" marL="0">
+              <a:buNone/>
+            </a:pPr>
+            <a:r>
+              <a:rPr lang="en-US" sz="1190" dirty="0">
+                <a:solidFill>
+                  <a:srgbClr val="1A1A1A"/>
+                </a:solidFill>
+                <a:latin typeface="Cambria" pitchFamily="34" charset="0"/>
+                <a:ea typeface="Cambria" pitchFamily="34" charset="-122"/>
+                <a:cs typeface="Cambria" pitchFamily="34" charset="-120"/>
+              </a:rPr>
+              <a:t>24,60</a:t>
+            </a:r>
+            <a:endParaRPr lang="en-US" sz="1190" dirty="0"/>
+          </a:p>
+        </p:txBody>
+      </p:sp>
+      <p:sp>
+        <p:nvSpPr>
+          <p:cNvPr id="21" name="Text 19"/>
+          <p:cNvSpPr/>
+          <p:nvPr/>
+        </p:nvSpPr>
+        <p:spPr>
+          <a:xfrm>
+            <a:off x="3218688" y="2203704"/>
+            <a:ext cx="1024128" cy="429768"/>
+          </a:xfrm>
+          <a:prstGeom prst="rect">
+            <a:avLst/>
+          </a:prstGeom>
+          <a:noFill/>
+          <a:ln/>
+        </p:spPr>
+        <p:txBody>
+          <a:bodyPr wrap="square" lIns="0" tIns="0" rIns="0" bIns="0" rtlCol="0" anchor="ctr">
+            <a:normAutofit/>
+          </a:bodyPr>
+          <a:lstStyle/>
+          <a:p>
+            <a:pPr algn="ctr" indent="0" marL="0">
+              <a:buNone/>
+            </a:pPr>
+            <a:r>
+              <a:rPr lang="en-US" sz="1190" dirty="0">
+                <a:solidFill>
+                  <a:srgbClr val="1A1A1A"/>
+                </a:solidFill>
+                <a:latin typeface="Cambria" pitchFamily="34" charset="0"/>
+                <a:ea typeface="Cambria" pitchFamily="34" charset="-122"/>
+                <a:cs typeface="Cambria" pitchFamily="34" charset="-120"/>
+              </a:rPr>
+              <a:t>36,79</a:t>
+            </a:r>
+            <a:endParaRPr lang="en-US" sz="1190" dirty="0"/>
+          </a:p>
+        </p:txBody>
+      </p:sp>
+      <p:sp>
+        <p:nvSpPr>
+          <p:cNvPr id="22" name="Text 20"/>
+          <p:cNvSpPr/>
+          <p:nvPr/>
+        </p:nvSpPr>
+        <p:spPr>
+          <a:xfrm>
+            <a:off x="4242816" y="2203704"/>
+            <a:ext cx="1298448" cy="429768"/>
+          </a:xfrm>
+          <a:prstGeom prst="rect">
+            <a:avLst/>
+          </a:prstGeom>
+          <a:noFill/>
+          <a:ln/>
+        </p:spPr>
+        <p:txBody>
+          <a:bodyPr wrap="square" lIns="0" tIns="0" rIns="0" bIns="0" rtlCol="0" anchor="ctr">
+            <a:normAutofit/>
+          </a:bodyPr>
+          <a:lstStyle/>
+          <a:p>
+            <a:pPr algn="ctr" indent="0" marL="0">
+              <a:buNone/>
+            </a:pPr>
+            <a:r>
+              <a:rPr lang="en-US" sz="1190" dirty="0">
+                <a:solidFill>
+                  <a:srgbClr val="1A1A1A"/>
+                </a:solidFill>
+                <a:latin typeface="Cambria" pitchFamily="34" charset="0"/>
+                <a:ea typeface="Cambria" pitchFamily="34" charset="-122"/>
+                <a:cs typeface="Cambria" pitchFamily="34" charset="-120"/>
+              </a:rPr>
+              <a:t>37,92</a:t>
+            </a:r>
+            <a:endParaRPr lang="en-US" sz="1190" dirty="0"/>
+          </a:p>
+        </p:txBody>
+      </p:sp>
+      <p:sp>
+        <p:nvSpPr>
+          <p:cNvPr id="23" name="Text 21"/>
+          <p:cNvSpPr/>
+          <p:nvPr/>
+        </p:nvSpPr>
+        <p:spPr>
+          <a:xfrm>
+            <a:off x="5541264" y="2203704"/>
+            <a:ext cx="1389888" cy="429768"/>
+          </a:xfrm>
+          <a:prstGeom prst="rect">
+            <a:avLst/>
+          </a:prstGeom>
+          <a:noFill/>
+          <a:ln/>
+        </p:spPr>
+        <p:txBody>
+          <a:bodyPr wrap="square" lIns="0" tIns="0" rIns="0" bIns="0" rtlCol="0" anchor="ctr">
+            <a:normAutofit/>
+          </a:bodyPr>
+          <a:lstStyle/>
+          <a:p>
+            <a:pPr algn="ctr" indent="0" marL="0">
+              <a:buNone/>
+            </a:pPr>
+            <a:r>
+              <a:rPr lang="en-US" sz="1190" dirty="0">
+                <a:solidFill>
+                  <a:srgbClr val="1A1A1A"/>
+                </a:solidFill>
+                <a:latin typeface="Cambria" pitchFamily="34" charset="0"/>
+                <a:ea typeface="Cambria" pitchFamily="34" charset="-122"/>
+                <a:cs typeface="Cambria" pitchFamily="34" charset="-120"/>
+              </a:rPr>
+              <a:t>38,37</a:t>
+            </a:r>
+            <a:endParaRPr lang="en-US" sz="1190" dirty="0"/>
+          </a:p>
+        </p:txBody>
+      </p:sp>
+      <p:sp>
+        <p:nvSpPr>
+          <p:cNvPr id="24" name="Text 22"/>
+          <p:cNvSpPr/>
+          <p:nvPr/>
+        </p:nvSpPr>
+        <p:spPr>
+          <a:xfrm>
+            <a:off x="6931152" y="2203704"/>
+            <a:ext cx="1234440" cy="429768"/>
+          </a:xfrm>
+          <a:prstGeom prst="rect">
+            <a:avLst/>
+          </a:prstGeom>
+          <a:noFill/>
+          <a:ln/>
+        </p:spPr>
+        <p:txBody>
+          <a:bodyPr wrap="square" lIns="0" tIns="0" rIns="0" bIns="0" rtlCol="0" anchor="ctr">
+            <a:normAutofit/>
+          </a:bodyPr>
+          <a:lstStyle/>
+          <a:p>
+            <a:pPr algn="ctr" indent="0" marL="0">
+              <a:buNone/>
+            </a:pPr>
+            <a:r>
+              <a:rPr lang="en-US" sz="1190" dirty="0">
+                <a:solidFill>
+                  <a:srgbClr val="1A1A1A"/>
+                </a:solidFill>
+                <a:latin typeface="Cambria" pitchFamily="34" charset="0"/>
+                <a:ea typeface="Cambria" pitchFamily="34" charset="-122"/>
+                <a:cs typeface="Cambria" pitchFamily="34" charset="-120"/>
+              </a:rPr>
+              <a:t>+0,46</a:t>
+            </a:r>
+            <a:endParaRPr lang="en-US" sz="1190" dirty="0"/>
+          </a:p>
+        </p:txBody>
+      </p:sp>
+      <p:sp>
+        <p:nvSpPr>
+          <p:cNvPr id="25" name="Shape 23"/>
+          <p:cNvSpPr/>
+          <p:nvPr/>
+        </p:nvSpPr>
+        <p:spPr>
+          <a:xfrm>
+            <a:off x="502920" y="2633472"/>
+            <a:ext cx="7662672" cy="0"/>
+          </a:xfrm>
+          <a:prstGeom prst="line">
+            <a:avLst/>
+          </a:prstGeom>
+          <a:noFill/>
+          <a:ln w="12700">
+            <a:solidFill>
+              <a:srgbClr val="D9D6DF"/>
+            </a:solidFill>
+            <a:prstDash val="solid"/>
+            <a:tailEnd type="none"/>
+          </a:ln>
+        </p:spPr>
+      </p:sp>
+      <p:sp>
+        <p:nvSpPr>
+          <p:cNvPr id="26" name="Text 24"/>
+          <p:cNvSpPr/>
+          <p:nvPr/>
+        </p:nvSpPr>
+        <p:spPr>
+          <a:xfrm>
+            <a:off x="502920" y="2633472"/>
+            <a:ext cx="1691640" cy="429768"/>
+          </a:xfrm>
+          <a:prstGeom prst="rect">
+            <a:avLst/>
+          </a:prstGeom>
+          <a:noFill/>
+          <a:ln/>
+        </p:spPr>
+        <p:txBody>
+          <a:bodyPr wrap="square" lIns="0" tIns="0" rIns="0" bIns="0" rtlCol="0" anchor="ctr">
+            <a:normAutofit/>
+          </a:bodyPr>
+          <a:lstStyle/>
+          <a:p>
+            <a:pPr algn="l" indent="0" marL="0">
+              <a:buNone/>
+            </a:pPr>
+            <a:r>
+              <a:rPr lang="en-US" sz="1190" dirty="0">
+                <a:solidFill>
+                  <a:srgbClr val="1A1A1A"/>
+                </a:solidFill>
+                <a:latin typeface="Cambria" pitchFamily="34" charset="0"/>
+                <a:ea typeface="Cambria" pitchFamily="34" charset="-122"/>
+                <a:cs typeface="Cambria" pitchFamily="34" charset="-120"/>
+              </a:rPr>
+              <a:t>ROUGE-L</a:t>
+            </a:r>
+            <a:endParaRPr lang="en-US" sz="1190" dirty="0"/>
+          </a:p>
+        </p:txBody>
+      </p:sp>
+      <p:sp>
+        <p:nvSpPr>
+          <p:cNvPr id="27" name="Text 25"/>
+          <p:cNvSpPr/>
+          <p:nvPr/>
+        </p:nvSpPr>
+        <p:spPr>
+          <a:xfrm>
+            <a:off x="2194560" y="2633472"/>
+            <a:ext cx="1024128" cy="429768"/>
+          </a:xfrm>
+          <a:prstGeom prst="rect">
+            <a:avLst/>
+          </a:prstGeom>
+          <a:noFill/>
+          <a:ln/>
+        </p:spPr>
+        <p:txBody>
+          <a:bodyPr wrap="square" lIns="0" tIns="0" rIns="0" bIns="0" rtlCol="0" anchor="ctr">
+            <a:normAutofit/>
+          </a:bodyPr>
+          <a:lstStyle/>
+          <a:p>
+            <a:pPr algn="ctr" indent="0" marL="0">
+              <a:buNone/>
+            </a:pPr>
+            <a:r>
+              <a:rPr lang="en-US" sz="1190" dirty="0">
+                <a:solidFill>
+                  <a:srgbClr val="1A1A1A"/>
+                </a:solidFill>
+                <a:latin typeface="Cambria" pitchFamily="34" charset="0"/>
+                <a:ea typeface="Cambria" pitchFamily="34" charset="-122"/>
+                <a:cs typeface="Cambria" pitchFamily="34" charset="-120"/>
+              </a:rPr>
+              <a:t>42,30</a:t>
+            </a:r>
+            <a:endParaRPr lang="en-US" sz="1190" dirty="0"/>
+          </a:p>
+        </p:txBody>
+      </p:sp>
+      <p:sp>
+        <p:nvSpPr>
+          <p:cNvPr id="28" name="Text 26"/>
+          <p:cNvSpPr/>
+          <p:nvPr/>
+        </p:nvSpPr>
+        <p:spPr>
+          <a:xfrm>
+            <a:off x="3218688" y="2633472"/>
+            <a:ext cx="1024128" cy="429768"/>
+          </a:xfrm>
+          <a:prstGeom prst="rect">
+            <a:avLst/>
+          </a:prstGeom>
+          <a:noFill/>
+          <a:ln/>
+        </p:spPr>
+        <p:txBody>
+          <a:bodyPr wrap="square" lIns="0" tIns="0" rIns="0" bIns="0" rtlCol="0" anchor="ctr">
+            <a:normAutofit/>
+          </a:bodyPr>
+          <a:lstStyle/>
+          <a:p>
+            <a:pPr algn="ctr" indent="0" marL="0">
+              <a:buNone/>
+            </a:pPr>
+            <a:r>
+              <a:rPr lang="en-US" sz="1190" dirty="0">
+                <a:solidFill>
+                  <a:srgbClr val="1A1A1A"/>
+                </a:solidFill>
+                <a:latin typeface="Cambria" pitchFamily="34" charset="0"/>
+                <a:ea typeface="Cambria" pitchFamily="34" charset="-122"/>
+                <a:cs typeface="Cambria" pitchFamily="34" charset="-120"/>
+              </a:rPr>
+              <a:t>67,35</a:t>
+            </a:r>
+            <a:endParaRPr lang="en-US" sz="1190" dirty="0"/>
+          </a:p>
+        </p:txBody>
+      </p:sp>
+      <p:sp>
+        <p:nvSpPr>
+          <p:cNvPr id="29" name="Text 27"/>
+          <p:cNvSpPr/>
+          <p:nvPr/>
+        </p:nvSpPr>
+        <p:spPr>
+          <a:xfrm>
+            <a:off x="4242816" y="2633472"/>
+            <a:ext cx="1298448" cy="429768"/>
+          </a:xfrm>
+          <a:prstGeom prst="rect">
+            <a:avLst/>
+          </a:prstGeom>
+          <a:noFill/>
+          <a:ln/>
+        </p:spPr>
+        <p:txBody>
+          <a:bodyPr wrap="square" lIns="0" tIns="0" rIns="0" bIns="0" rtlCol="0" anchor="ctr">
+            <a:normAutofit/>
+          </a:bodyPr>
+          <a:lstStyle/>
+          <a:p>
+            <a:pPr algn="ctr" indent="0" marL="0">
+              <a:buNone/>
+            </a:pPr>
+            <a:r>
+              <a:rPr lang="en-US" sz="1190" dirty="0">
+                <a:solidFill>
+                  <a:srgbClr val="1A1A1A"/>
+                </a:solidFill>
+                <a:latin typeface="Cambria" pitchFamily="34" charset="0"/>
+                <a:ea typeface="Cambria" pitchFamily="34" charset="-122"/>
+                <a:cs typeface="Cambria" pitchFamily="34" charset="-120"/>
+              </a:rPr>
+              <a:t>68,36</a:t>
+            </a:r>
+            <a:endParaRPr lang="en-US" sz="1190" dirty="0"/>
+          </a:p>
+        </p:txBody>
+      </p:sp>
+      <p:sp>
+        <p:nvSpPr>
+          <p:cNvPr id="30" name="Text 28"/>
+          <p:cNvSpPr/>
+          <p:nvPr/>
+        </p:nvSpPr>
+        <p:spPr>
+          <a:xfrm>
+            <a:off x="5541264" y="2633472"/>
+            <a:ext cx="1389888" cy="429768"/>
+          </a:xfrm>
+          <a:prstGeom prst="rect">
+            <a:avLst/>
+          </a:prstGeom>
+          <a:noFill/>
+          <a:ln/>
+        </p:spPr>
+        <p:txBody>
+          <a:bodyPr wrap="square" lIns="0" tIns="0" rIns="0" bIns="0" rtlCol="0" anchor="ctr">
+            <a:normAutofit/>
+          </a:bodyPr>
+          <a:lstStyle/>
+          <a:p>
+            <a:pPr algn="ctr" indent="0" marL="0">
+              <a:buNone/>
+            </a:pPr>
+            <a:r>
+              <a:rPr lang="en-US" sz="1190" dirty="0">
+                <a:solidFill>
+                  <a:srgbClr val="1A1A1A"/>
+                </a:solidFill>
+                <a:latin typeface="Cambria" pitchFamily="34" charset="0"/>
+                <a:ea typeface="Cambria" pitchFamily="34" charset="-122"/>
+                <a:cs typeface="Cambria" pitchFamily="34" charset="-120"/>
+              </a:rPr>
+              <a:t>69,08</a:t>
+            </a:r>
+            <a:endParaRPr lang="en-US" sz="1190" dirty="0"/>
+          </a:p>
+        </p:txBody>
+      </p:sp>
+      <p:sp>
+        <p:nvSpPr>
+          <p:cNvPr id="31" name="Text 29"/>
+          <p:cNvSpPr/>
+          <p:nvPr/>
+        </p:nvSpPr>
+        <p:spPr>
+          <a:xfrm>
+            <a:off x="6931152" y="2633472"/>
+            <a:ext cx="1234440" cy="429768"/>
+          </a:xfrm>
+          <a:prstGeom prst="rect">
+            <a:avLst/>
+          </a:prstGeom>
+          <a:noFill/>
+          <a:ln/>
+        </p:spPr>
+        <p:txBody>
+          <a:bodyPr wrap="square" lIns="0" tIns="0" rIns="0" bIns="0" rtlCol="0" anchor="ctr">
+            <a:normAutofit/>
+          </a:bodyPr>
+          <a:lstStyle/>
+          <a:p>
+            <a:pPr algn="ctr" indent="0" marL="0">
+              <a:buNone/>
+            </a:pPr>
+            <a:r>
+              <a:rPr lang="en-US" sz="1190" dirty="0">
+                <a:solidFill>
+                  <a:srgbClr val="1A1A1A"/>
+                </a:solidFill>
+                <a:latin typeface="Cambria" pitchFamily="34" charset="0"/>
+                <a:ea typeface="Cambria" pitchFamily="34" charset="-122"/>
+                <a:cs typeface="Cambria" pitchFamily="34" charset="-120"/>
+              </a:rPr>
+              <a:t>+0,74</a:t>
+            </a:r>
+            <a:endParaRPr lang="en-US" sz="1190" dirty="0"/>
+          </a:p>
+        </p:txBody>
+      </p:sp>
+      <p:sp>
+        <p:nvSpPr>
+          <p:cNvPr id="32" name="Shape 30"/>
+          <p:cNvSpPr/>
+          <p:nvPr/>
+        </p:nvSpPr>
+        <p:spPr>
+          <a:xfrm>
+            <a:off x="502920" y="3063240"/>
+            <a:ext cx="7662672" cy="0"/>
+          </a:xfrm>
+          <a:prstGeom prst="line">
+            <a:avLst/>
+          </a:prstGeom>
+          <a:noFill/>
+          <a:ln w="12700">
+            <a:solidFill>
+              <a:srgbClr val="D9D6DF"/>
+            </a:solidFill>
+            <a:prstDash val="solid"/>
+            <a:tailEnd type="none"/>
+          </a:ln>
+        </p:spPr>
+      </p:sp>
+      <p:sp>
+        <p:nvSpPr>
+          <p:cNvPr id="33" name="Text 31"/>
+          <p:cNvSpPr/>
+          <p:nvPr/>
+        </p:nvSpPr>
+        <p:spPr>
+          <a:xfrm>
+            <a:off x="502920" y="3063240"/>
+            <a:ext cx="1691640" cy="429768"/>
+          </a:xfrm>
+          <a:prstGeom prst="rect">
+            <a:avLst/>
+          </a:prstGeom>
+          <a:noFill/>
+          <a:ln/>
+        </p:spPr>
+        <p:txBody>
+          <a:bodyPr wrap="square" lIns="0" tIns="0" rIns="0" bIns="0" rtlCol="0" anchor="ctr">
+            <a:normAutofit/>
+          </a:bodyPr>
+          <a:lstStyle/>
+          <a:p>
+            <a:pPr algn="l" indent="0" marL="0">
+              <a:buNone/>
+            </a:pPr>
+            <a:r>
+              <a:rPr lang="en-US" sz="1190" dirty="0">
+                <a:solidFill>
+                  <a:srgbClr val="1A1A1A"/>
+                </a:solidFill>
+                <a:latin typeface="Cambria" pitchFamily="34" charset="0"/>
+                <a:ea typeface="Cambria" pitchFamily="34" charset="-122"/>
+                <a:cs typeface="Cambria" pitchFamily="34" charset="-120"/>
+              </a:rPr>
+              <a:t>CIDEr-D</a:t>
+            </a:r>
+            <a:endParaRPr lang="en-US" sz="1190" dirty="0"/>
+          </a:p>
+        </p:txBody>
+      </p:sp>
+      <p:sp>
+        <p:nvSpPr>
+          <p:cNvPr id="34" name="Text 32"/>
+          <p:cNvSpPr/>
+          <p:nvPr/>
+        </p:nvSpPr>
+        <p:spPr>
+          <a:xfrm>
+            <a:off x="2194560" y="3063240"/>
+            <a:ext cx="1024128" cy="429768"/>
+          </a:xfrm>
+          <a:prstGeom prst="rect">
+            <a:avLst/>
+          </a:prstGeom>
+          <a:noFill/>
+          <a:ln/>
+        </p:spPr>
+        <p:txBody>
+          <a:bodyPr wrap="square" lIns="0" tIns="0" rIns="0" bIns="0" rtlCol="0" anchor="ctr">
+            <a:normAutofit/>
+          </a:bodyPr>
+          <a:lstStyle/>
+          <a:p>
+            <a:pPr algn="ctr" indent="0" marL="0">
+              <a:buNone/>
+            </a:pPr>
+            <a:r>
+              <a:rPr lang="en-US" sz="1190" dirty="0">
+                <a:solidFill>
+                  <a:srgbClr val="1A1A1A"/>
+                </a:solidFill>
+                <a:latin typeface="Cambria" pitchFamily="34" charset="0"/>
+                <a:ea typeface="Cambria" pitchFamily="34" charset="-122"/>
+                <a:cs typeface="Cambria" pitchFamily="34" charset="-120"/>
+              </a:rPr>
+              <a:t>88,00</a:t>
+            </a:r>
+            <a:endParaRPr lang="en-US" sz="1190" dirty="0"/>
+          </a:p>
+        </p:txBody>
+      </p:sp>
+      <p:sp>
+        <p:nvSpPr>
+          <p:cNvPr id="35" name="Text 33"/>
+          <p:cNvSpPr/>
+          <p:nvPr/>
+        </p:nvSpPr>
+        <p:spPr>
+          <a:xfrm>
+            <a:off x="3218688" y="3063240"/>
+            <a:ext cx="1024128" cy="429768"/>
+          </a:xfrm>
+          <a:prstGeom prst="rect">
+            <a:avLst/>
+          </a:prstGeom>
+          <a:noFill/>
+          <a:ln/>
+        </p:spPr>
+        <p:txBody>
+          <a:bodyPr wrap="square" lIns="0" tIns="0" rIns="0" bIns="0" rtlCol="0" anchor="ctr">
+            <a:normAutofit/>
+          </a:bodyPr>
+          <a:lstStyle/>
+          <a:p>
+            <a:pPr algn="ctr" indent="0" marL="0">
+              <a:buNone/>
+            </a:pPr>
+            <a:r>
+              <a:rPr lang="en-US" sz="1190" dirty="0">
+                <a:solidFill>
+                  <a:srgbClr val="1A1A1A"/>
+                </a:solidFill>
+                <a:latin typeface="Cambria" pitchFamily="34" charset="0"/>
+                <a:ea typeface="Cambria" pitchFamily="34" charset="-122"/>
+                <a:cs typeface="Cambria" pitchFamily="34" charset="-120"/>
+              </a:rPr>
+              <a:t>416,12</a:t>
+            </a:r>
+            <a:endParaRPr lang="en-US" sz="1190" dirty="0"/>
+          </a:p>
+        </p:txBody>
+      </p:sp>
+      <p:sp>
+        <p:nvSpPr>
+          <p:cNvPr id="36" name="Text 34"/>
+          <p:cNvSpPr/>
+          <p:nvPr/>
+        </p:nvSpPr>
+        <p:spPr>
+          <a:xfrm>
+            <a:off x="4242816" y="3063240"/>
+            <a:ext cx="1298448" cy="429768"/>
+          </a:xfrm>
+          <a:prstGeom prst="rect">
+            <a:avLst/>
+          </a:prstGeom>
+          <a:noFill/>
+          <a:ln/>
+        </p:spPr>
+        <p:txBody>
+          <a:bodyPr wrap="square" lIns="0" tIns="0" rIns="0" bIns="0" rtlCol="0" anchor="ctr">
+            <a:normAutofit/>
+          </a:bodyPr>
+          <a:lstStyle/>
+          <a:p>
+            <a:pPr algn="ctr" indent="0" marL="0">
+              <a:buNone/>
+            </a:pPr>
+            <a:r>
+              <a:rPr lang="en-US" sz="1190" dirty="0">
+                <a:solidFill>
+                  <a:srgbClr val="1A1A1A"/>
+                </a:solidFill>
+                <a:latin typeface="Cambria" pitchFamily="34" charset="0"/>
+                <a:ea typeface="Cambria" pitchFamily="34" charset="-122"/>
+                <a:cs typeface="Cambria" pitchFamily="34" charset="-120"/>
+              </a:rPr>
+              <a:t>430,05</a:t>
+            </a:r>
+            <a:endParaRPr lang="en-US" sz="1190" dirty="0"/>
+          </a:p>
+        </p:txBody>
+      </p:sp>
+      <p:sp>
+        <p:nvSpPr>
+          <p:cNvPr id="37" name="Text 35"/>
+          <p:cNvSpPr/>
+          <p:nvPr/>
+        </p:nvSpPr>
+        <p:spPr>
+          <a:xfrm>
+            <a:off x="5541264" y="3063240"/>
+            <a:ext cx="1389888" cy="429768"/>
+          </a:xfrm>
+          <a:prstGeom prst="rect">
+            <a:avLst/>
+          </a:prstGeom>
+          <a:noFill/>
+          <a:ln/>
+        </p:spPr>
+        <p:txBody>
+          <a:bodyPr wrap="square" lIns="0" tIns="0" rIns="0" bIns="0" rtlCol="0" anchor="ctr">
+            <a:normAutofit/>
+          </a:bodyPr>
+          <a:lstStyle/>
+          <a:p>
+            <a:pPr algn="ctr" indent="0" marL="0">
+              <a:buNone/>
+            </a:pPr>
+            <a:r>
+              <a:rPr lang="en-US" sz="1190" dirty="0">
+                <a:solidFill>
+                  <a:srgbClr val="1A1A1A"/>
+                </a:solidFill>
+                <a:latin typeface="Cambria" pitchFamily="34" charset="0"/>
+                <a:ea typeface="Cambria" pitchFamily="34" charset="-122"/>
+                <a:cs typeface="Cambria" pitchFamily="34" charset="-120"/>
+              </a:rPr>
+              <a:t>442,02</a:t>
+            </a:r>
+            <a:endParaRPr lang="en-US" sz="1190" dirty="0"/>
+          </a:p>
+        </p:txBody>
+      </p:sp>
+      <p:sp>
+        <p:nvSpPr>
+          <p:cNvPr id="38" name="Text 36"/>
+          <p:cNvSpPr/>
+          <p:nvPr/>
+        </p:nvSpPr>
+        <p:spPr>
+          <a:xfrm>
+            <a:off x="6931152" y="3063240"/>
+            <a:ext cx="1234440" cy="429768"/>
+          </a:xfrm>
+          <a:prstGeom prst="rect">
+            <a:avLst/>
+          </a:prstGeom>
+          <a:noFill/>
+          <a:ln/>
+        </p:spPr>
+        <p:txBody>
+          <a:bodyPr wrap="square" lIns="0" tIns="0" rIns="0" bIns="0" rtlCol="0" anchor="ctr">
+            <a:normAutofit/>
+          </a:bodyPr>
+          <a:lstStyle/>
+          <a:p>
+            <a:pPr algn="ctr" indent="0" marL="0">
+              <a:buNone/>
+            </a:pPr>
+            <a:r>
+              <a:rPr lang="en-US" sz="1190" dirty="0">
+                <a:solidFill>
+                  <a:srgbClr val="1A1A1A"/>
+                </a:solidFill>
+                <a:latin typeface="Cambria" pitchFamily="34" charset="0"/>
+                <a:ea typeface="Cambria" pitchFamily="34" charset="-122"/>
+                <a:cs typeface="Cambria" pitchFamily="34" charset="-120"/>
+              </a:rPr>
+              <a:t>+11,98</a:t>
+            </a:r>
+            <a:endParaRPr lang="en-US" sz="1190" dirty="0"/>
+          </a:p>
+        </p:txBody>
+      </p:sp>
+      <p:sp>
+        <p:nvSpPr>
+          <p:cNvPr id="39" name="Shape 37"/>
+          <p:cNvSpPr/>
+          <p:nvPr/>
+        </p:nvSpPr>
+        <p:spPr>
+          <a:xfrm>
+            <a:off x="502920" y="3493008"/>
+            <a:ext cx="7662672" cy="0"/>
+          </a:xfrm>
+          <a:prstGeom prst="line">
+            <a:avLst/>
+          </a:prstGeom>
+          <a:noFill/>
+          <a:ln w="12700">
+            <a:solidFill>
+              <a:srgbClr val="D9D6DF"/>
+            </a:solidFill>
+            <a:prstDash val="solid"/>
+            <a:tailEnd type="none"/>
+          </a:ln>
+        </p:spPr>
+      </p:sp>
+      <p:sp>
+        <p:nvSpPr>
+          <p:cNvPr id="40" name="Text 38"/>
+          <p:cNvSpPr/>
+          <p:nvPr/>
+        </p:nvSpPr>
+        <p:spPr>
+          <a:xfrm>
+            <a:off x="502920" y="3493008"/>
+            <a:ext cx="1691640" cy="429768"/>
+          </a:xfrm>
+          <a:prstGeom prst="rect">
+            <a:avLst/>
+          </a:prstGeom>
+          <a:noFill/>
+          <a:ln/>
+        </p:spPr>
+        <p:txBody>
+          <a:bodyPr wrap="square" lIns="0" tIns="0" rIns="0" bIns="0" rtlCol="0" anchor="ctr">
+            <a:normAutofit/>
+          </a:bodyPr>
+          <a:lstStyle/>
+          <a:p>
+            <a:pPr algn="l" indent="0" marL="0">
+              <a:buNone/>
+            </a:pPr>
+            <a:r>
+              <a:rPr lang="en-US" sz="1190" dirty="0">
+                <a:solidFill>
+                  <a:srgbClr val="1A1A1A"/>
+                </a:solidFill>
+                <a:latin typeface="Cambria" pitchFamily="34" charset="0"/>
+                <a:ea typeface="Cambria" pitchFamily="34" charset="-122"/>
+                <a:cs typeface="Cambria" pitchFamily="34" charset="-120"/>
+              </a:rPr>
+              <a:t>SPICE</a:t>
+            </a:r>
+            <a:endParaRPr lang="en-US" sz="1190" dirty="0"/>
+          </a:p>
+        </p:txBody>
+      </p:sp>
+      <p:sp>
+        <p:nvSpPr>
+          <p:cNvPr id="41" name="Text 39"/>
+          <p:cNvSpPr/>
+          <p:nvPr/>
+        </p:nvSpPr>
+        <p:spPr>
+          <a:xfrm>
+            <a:off x="2194560" y="3493008"/>
+            <a:ext cx="1024128" cy="429768"/>
+          </a:xfrm>
+          <a:prstGeom prst="rect">
+            <a:avLst/>
+          </a:prstGeom>
+          <a:noFill/>
+          <a:ln/>
+        </p:spPr>
+        <p:txBody>
+          <a:bodyPr wrap="square" lIns="0" tIns="0" rIns="0" bIns="0" rtlCol="0" anchor="ctr">
+            <a:normAutofit/>
+          </a:bodyPr>
+          <a:lstStyle/>
+          <a:p>
+            <a:pPr algn="ctr" indent="0" marL="0">
+              <a:buNone/>
+            </a:pPr>
+            <a:r>
+              <a:rPr lang="en-US" sz="1190" dirty="0">
+                <a:solidFill>
+                  <a:srgbClr val="1A1A1A"/>
+                </a:solidFill>
+                <a:latin typeface="Cambria" pitchFamily="34" charset="0"/>
+                <a:ea typeface="Cambria" pitchFamily="34" charset="-122"/>
+                <a:cs typeface="Cambria" pitchFamily="34" charset="-120"/>
+              </a:rPr>
+              <a:t>18,50</a:t>
+            </a:r>
+            <a:endParaRPr lang="en-US" sz="1190" dirty="0"/>
+          </a:p>
+        </p:txBody>
+      </p:sp>
+      <p:sp>
+        <p:nvSpPr>
+          <p:cNvPr id="42" name="Text 40"/>
+          <p:cNvSpPr/>
+          <p:nvPr/>
+        </p:nvSpPr>
+        <p:spPr>
+          <a:xfrm>
+            <a:off x="3218688" y="3493008"/>
+            <a:ext cx="1024128" cy="429768"/>
+          </a:xfrm>
+          <a:prstGeom prst="rect">
+            <a:avLst/>
+          </a:prstGeom>
+          <a:noFill/>
+          <a:ln/>
+        </p:spPr>
+        <p:txBody>
+          <a:bodyPr wrap="square" lIns="0" tIns="0" rIns="0" bIns="0" rtlCol="0" anchor="ctr">
+            <a:normAutofit/>
+          </a:bodyPr>
+          <a:lstStyle/>
+          <a:p>
+            <a:pPr algn="ctr" indent="0" marL="0">
+              <a:buNone/>
+            </a:pPr>
+            <a:r>
+              <a:rPr lang="en-US" sz="1190" dirty="0">
+                <a:solidFill>
+                  <a:srgbClr val="1A1A1A"/>
+                </a:solidFill>
+                <a:latin typeface="Cambria" pitchFamily="34" charset="0"/>
+                <a:ea typeface="Cambria" pitchFamily="34" charset="-122"/>
+                <a:cs typeface="Cambria" pitchFamily="34" charset="-120"/>
+              </a:rPr>
+              <a:t>44,37</a:t>
+            </a:r>
+            <a:endParaRPr lang="en-US" sz="1190" dirty="0"/>
+          </a:p>
+        </p:txBody>
+      </p:sp>
+      <p:sp>
+        <p:nvSpPr>
+          <p:cNvPr id="43" name="Text 41"/>
+          <p:cNvSpPr/>
+          <p:nvPr/>
+        </p:nvSpPr>
+        <p:spPr>
+          <a:xfrm>
+            <a:off x="4242816" y="3493008"/>
+            <a:ext cx="1298448" cy="429768"/>
+          </a:xfrm>
+          <a:prstGeom prst="rect">
+            <a:avLst/>
+          </a:prstGeom>
+          <a:noFill/>
+          <a:ln/>
+        </p:spPr>
+        <p:txBody>
+          <a:bodyPr wrap="square" lIns="0" tIns="0" rIns="0" bIns="0" rtlCol="0" anchor="ctr">
+            <a:normAutofit/>
+          </a:bodyPr>
+          <a:lstStyle/>
+          <a:p>
+            <a:pPr algn="ctr" indent="0" marL="0">
+              <a:buNone/>
+            </a:pPr>
+            <a:r>
+              <a:rPr lang="en-US" sz="1190" dirty="0">
+                <a:solidFill>
+                  <a:srgbClr val="1A1A1A"/>
+                </a:solidFill>
+                <a:latin typeface="Cambria" pitchFamily="34" charset="0"/>
+                <a:ea typeface="Cambria" pitchFamily="34" charset="-122"/>
+                <a:cs typeface="Cambria" pitchFamily="34" charset="-120"/>
+              </a:rPr>
+              <a:t>45,79</a:t>
+            </a:r>
+            <a:endParaRPr lang="en-US" sz="1190" dirty="0"/>
+          </a:p>
+        </p:txBody>
+      </p:sp>
+      <p:sp>
+        <p:nvSpPr>
+          <p:cNvPr id="44" name="Text 42"/>
+          <p:cNvSpPr/>
+          <p:nvPr/>
+        </p:nvSpPr>
+        <p:spPr>
+          <a:xfrm>
+            <a:off x="5541264" y="3493008"/>
+            <a:ext cx="1389888" cy="429768"/>
+          </a:xfrm>
+          <a:prstGeom prst="rect">
+            <a:avLst/>
+          </a:prstGeom>
+          <a:noFill/>
+          <a:ln/>
+        </p:spPr>
+        <p:txBody>
+          <a:bodyPr wrap="square" lIns="0" tIns="0" rIns="0" bIns="0" rtlCol="0" anchor="ctr">
+            <a:normAutofit/>
+          </a:bodyPr>
+          <a:lstStyle/>
+          <a:p>
+            <a:pPr algn="ctr" indent="0" marL="0">
+              <a:buNone/>
+            </a:pPr>
+            <a:r>
+              <a:rPr lang="en-US" sz="1190" dirty="0">
+                <a:solidFill>
+                  <a:srgbClr val="1A1A1A"/>
+                </a:solidFill>
+                <a:latin typeface="Cambria" pitchFamily="34" charset="0"/>
+                <a:ea typeface="Cambria" pitchFamily="34" charset="-122"/>
+                <a:cs typeface="Cambria" pitchFamily="34" charset="-120"/>
+              </a:rPr>
+              <a:t>47,13</a:t>
+            </a:r>
+            <a:endParaRPr lang="en-US" sz="1190" dirty="0"/>
+          </a:p>
+        </p:txBody>
+      </p:sp>
+      <p:sp>
+        <p:nvSpPr>
+          <p:cNvPr id="45" name="Text 43"/>
+          <p:cNvSpPr/>
+          <p:nvPr/>
+        </p:nvSpPr>
+        <p:spPr>
+          <a:xfrm>
+            <a:off x="6931152" y="3493008"/>
+            <a:ext cx="1234440" cy="429768"/>
+          </a:xfrm>
+          <a:prstGeom prst="rect">
+            <a:avLst/>
+          </a:prstGeom>
+          <a:noFill/>
+          <a:ln/>
+        </p:spPr>
+        <p:txBody>
+          <a:bodyPr wrap="square" lIns="0" tIns="0" rIns="0" bIns="0" rtlCol="0" anchor="ctr">
+            <a:normAutofit/>
+          </a:bodyPr>
+          <a:lstStyle/>
+          <a:p>
+            <a:pPr algn="ctr" indent="0" marL="0">
+              <a:buNone/>
+            </a:pPr>
+            <a:r>
+              <a:rPr lang="en-US" sz="1190" dirty="0">
+                <a:solidFill>
+                  <a:srgbClr val="1A1A1A"/>
+                </a:solidFill>
+                <a:latin typeface="Cambria" pitchFamily="34" charset="0"/>
+                <a:ea typeface="Cambria" pitchFamily="34" charset="-122"/>
+                <a:cs typeface="Cambria" pitchFamily="34" charset="-120"/>
+              </a:rPr>
+              <a:t>+1,34</a:t>
+            </a:r>
+            <a:endParaRPr lang="en-US" sz="1190" dirty="0"/>
+          </a:p>
+        </p:txBody>
+      </p:sp>
+      <p:sp>
+        <p:nvSpPr>
+          <p:cNvPr id="46" name="Shape 44"/>
+          <p:cNvSpPr/>
+          <p:nvPr/>
+        </p:nvSpPr>
+        <p:spPr>
+          <a:xfrm>
+            <a:off x="502920" y="3922776"/>
+            <a:ext cx="7662672" cy="0"/>
+          </a:xfrm>
+          <a:prstGeom prst="line">
+            <a:avLst/>
+          </a:prstGeom>
+          <a:noFill/>
+          <a:ln w="12700">
+            <a:solidFill>
+              <a:srgbClr val="D9D6DF"/>
+            </a:solidFill>
+            <a:prstDash val="solid"/>
+            <a:tailEnd type="none"/>
+          </a:ln>
+        </p:spPr>
+      </p:sp>
+      <p:sp>
+        <p:nvSpPr>
+          <p:cNvPr id="47" name="Text 45"/>
+          <p:cNvSpPr/>
+          <p:nvPr/>
+        </p:nvSpPr>
+        <p:spPr>
+          <a:xfrm>
+            <a:off x="502920" y="3922776"/>
+            <a:ext cx="1691640" cy="429768"/>
+          </a:xfrm>
+          <a:prstGeom prst="rect">
+            <a:avLst/>
+          </a:prstGeom>
+          <a:noFill/>
+          <a:ln/>
+        </p:spPr>
+        <p:txBody>
+          <a:bodyPr wrap="square" lIns="0" tIns="0" rIns="0" bIns="0" rtlCol="0" anchor="ctr">
+            <a:normAutofit/>
+          </a:bodyPr>
+          <a:lstStyle/>
+          <a:p>
+            <a:pPr algn="l" indent="0" marL="0">
+              <a:buNone/>
+            </a:pPr>
+            <a:r>
+              <a:rPr lang="en-US" sz="1190" dirty="0">
+                <a:solidFill>
+                  <a:srgbClr val="1A1A1A"/>
+                </a:solidFill>
+                <a:latin typeface="Cambria" pitchFamily="34" charset="0"/>
+                <a:ea typeface="Cambria" pitchFamily="34" charset="-122"/>
+                <a:cs typeface="Cambria" pitchFamily="34" charset="-120"/>
+              </a:rPr>
+              <a:t>chrF</a:t>
+            </a:r>
+            <a:endParaRPr lang="en-US" sz="1190" dirty="0"/>
+          </a:p>
+        </p:txBody>
+      </p:sp>
+      <p:sp>
+        <p:nvSpPr>
+          <p:cNvPr id="48" name="Text 46"/>
+          <p:cNvSpPr/>
+          <p:nvPr/>
+        </p:nvSpPr>
+        <p:spPr>
+          <a:xfrm>
+            <a:off x="2194560" y="3922776"/>
+            <a:ext cx="1024128" cy="429768"/>
+          </a:xfrm>
+          <a:prstGeom prst="rect">
+            <a:avLst/>
+          </a:prstGeom>
+          <a:noFill/>
+          <a:ln/>
+        </p:spPr>
+        <p:txBody>
+          <a:bodyPr wrap="square" lIns="0" tIns="0" rIns="0" bIns="0" rtlCol="0" anchor="ctr">
+            <a:normAutofit/>
+          </a:bodyPr>
+          <a:lstStyle/>
+          <a:p>
+            <a:pPr algn="ctr" indent="0" marL="0">
+              <a:buNone/>
+            </a:pPr>
+            <a:r>
+              <a:rPr lang="en-US" sz="1190" dirty="0">
+                <a:solidFill>
+                  <a:srgbClr val="1A1A1A"/>
+                </a:solidFill>
+                <a:latin typeface="Cambria" pitchFamily="34" charset="0"/>
+                <a:ea typeface="Cambria" pitchFamily="34" charset="-122"/>
+                <a:cs typeface="Cambria" pitchFamily="34" charset="-120"/>
+              </a:rPr>
+              <a:t>40,20</a:t>
+            </a:r>
+            <a:endParaRPr lang="en-US" sz="1190" dirty="0"/>
+          </a:p>
+        </p:txBody>
+      </p:sp>
+      <p:sp>
+        <p:nvSpPr>
+          <p:cNvPr id="49" name="Text 47"/>
+          <p:cNvSpPr/>
+          <p:nvPr/>
+        </p:nvSpPr>
+        <p:spPr>
+          <a:xfrm>
+            <a:off x="3218688" y="3922776"/>
+            <a:ext cx="1024128" cy="429768"/>
+          </a:xfrm>
+          <a:prstGeom prst="rect">
+            <a:avLst/>
+          </a:prstGeom>
+          <a:noFill/>
+          <a:ln/>
+        </p:spPr>
+        <p:txBody>
+          <a:bodyPr wrap="square" lIns="0" tIns="0" rIns="0" bIns="0" rtlCol="0" anchor="ctr">
+            <a:normAutofit/>
+          </a:bodyPr>
+          <a:lstStyle/>
+          <a:p>
+            <a:pPr algn="ctr" indent="0" marL="0">
+              <a:buNone/>
+            </a:pPr>
+            <a:r>
+              <a:rPr lang="en-US" sz="1190" dirty="0">
+                <a:solidFill>
+                  <a:srgbClr val="1A1A1A"/>
+                </a:solidFill>
+                <a:latin typeface="Cambria" pitchFamily="34" charset="0"/>
+                <a:ea typeface="Cambria" pitchFamily="34" charset="-122"/>
+                <a:cs typeface="Cambria" pitchFamily="34" charset="-120"/>
+              </a:rPr>
+              <a:t>61,26</a:t>
+            </a:r>
+            <a:endParaRPr lang="en-US" sz="1190" dirty="0"/>
+          </a:p>
+        </p:txBody>
+      </p:sp>
+      <p:sp>
+        <p:nvSpPr>
+          <p:cNvPr id="50" name="Text 48"/>
+          <p:cNvSpPr/>
+          <p:nvPr/>
+        </p:nvSpPr>
+        <p:spPr>
+          <a:xfrm>
+            <a:off x="4242816" y="3922776"/>
+            <a:ext cx="1298448" cy="429768"/>
+          </a:xfrm>
+          <a:prstGeom prst="rect">
+            <a:avLst/>
+          </a:prstGeom>
+          <a:noFill/>
+          <a:ln/>
+        </p:spPr>
+        <p:txBody>
+          <a:bodyPr wrap="square" lIns="0" tIns="0" rIns="0" bIns="0" rtlCol="0" anchor="ctr">
+            <a:normAutofit/>
+          </a:bodyPr>
+          <a:lstStyle/>
+          <a:p>
+            <a:pPr algn="ctr" indent="0" marL="0">
+              <a:buNone/>
+            </a:pPr>
+            <a:r>
+              <a:rPr lang="en-US" sz="1190" dirty="0">
+                <a:solidFill>
+                  <a:srgbClr val="1A1A1A"/>
+                </a:solidFill>
+                <a:latin typeface="Cambria" pitchFamily="34" charset="0"/>
+                <a:ea typeface="Cambria" pitchFamily="34" charset="-122"/>
+                <a:cs typeface="Cambria" pitchFamily="34" charset="-120"/>
+              </a:rPr>
+              <a:t>62,87</a:t>
+            </a:r>
+            <a:endParaRPr lang="en-US" sz="1190" dirty="0"/>
+          </a:p>
+        </p:txBody>
+      </p:sp>
+      <p:sp>
+        <p:nvSpPr>
+          <p:cNvPr id="51" name="Text 49"/>
+          <p:cNvSpPr/>
+          <p:nvPr/>
+        </p:nvSpPr>
+        <p:spPr>
+          <a:xfrm>
+            <a:off x="5541264" y="3922776"/>
+            <a:ext cx="1389888" cy="429768"/>
+          </a:xfrm>
+          <a:prstGeom prst="rect">
+            <a:avLst/>
+          </a:prstGeom>
+          <a:noFill/>
+          <a:ln/>
+        </p:spPr>
+        <p:txBody>
+          <a:bodyPr wrap="square" lIns="0" tIns="0" rIns="0" bIns="0" rtlCol="0" anchor="ctr">
+            <a:normAutofit/>
+          </a:bodyPr>
+          <a:lstStyle/>
+          <a:p>
+            <a:pPr algn="ctr" indent="0" marL="0">
+              <a:buNone/>
+            </a:pPr>
+            <a:r>
+              <a:rPr lang="en-US" sz="1190" dirty="0">
+                <a:solidFill>
+                  <a:srgbClr val="1A1A1A"/>
+                </a:solidFill>
+                <a:latin typeface="Cambria" pitchFamily="34" charset="0"/>
+                <a:ea typeface="Cambria" pitchFamily="34" charset="-122"/>
+                <a:cs typeface="Cambria" pitchFamily="34" charset="-120"/>
+              </a:rPr>
+              <a:t>63,44</a:t>
+            </a:r>
+            <a:endParaRPr lang="en-US" sz="1190" dirty="0"/>
+          </a:p>
+        </p:txBody>
+      </p:sp>
+      <p:sp>
+        <p:nvSpPr>
+          <p:cNvPr id="52" name="Text 50"/>
+          <p:cNvSpPr/>
+          <p:nvPr/>
+        </p:nvSpPr>
+        <p:spPr>
+          <a:xfrm>
+            <a:off x="6931152" y="3922776"/>
+            <a:ext cx="1234440" cy="429768"/>
+          </a:xfrm>
+          <a:prstGeom prst="rect">
+            <a:avLst/>
+          </a:prstGeom>
+          <a:noFill/>
+          <a:ln/>
+        </p:spPr>
+        <p:txBody>
+          <a:bodyPr wrap="square" lIns="0" tIns="0" rIns="0" bIns="0" rtlCol="0" anchor="ctr">
+            <a:normAutofit/>
+          </a:bodyPr>
+          <a:lstStyle/>
+          <a:p>
+            <a:pPr algn="ctr" indent="0" marL="0">
+              <a:buNone/>
+            </a:pPr>
+            <a:r>
+              <a:rPr lang="en-US" sz="1190" dirty="0">
+                <a:solidFill>
+                  <a:srgbClr val="1A1A1A"/>
+                </a:solidFill>
+                <a:latin typeface="Cambria" pitchFamily="34" charset="0"/>
+                <a:ea typeface="Cambria" pitchFamily="34" charset="-122"/>
+                <a:cs typeface="Cambria" pitchFamily="34" charset="-120"/>
+              </a:rPr>
+              <a:t>+0,58</a:t>
+            </a:r>
+            <a:endParaRPr lang="en-US" sz="1190" dirty="0"/>
+          </a:p>
+        </p:txBody>
+      </p:sp>
+      <p:sp>
+        <p:nvSpPr>
+          <p:cNvPr id="53" name="Shape 51"/>
+          <p:cNvSpPr/>
+          <p:nvPr/>
+        </p:nvSpPr>
+        <p:spPr>
+          <a:xfrm>
+            <a:off x="502920" y="4352544"/>
+            <a:ext cx="7662672" cy="0"/>
+          </a:xfrm>
+          <a:prstGeom prst="line">
+            <a:avLst/>
+          </a:prstGeom>
+          <a:noFill/>
+          <a:ln w="12700">
+            <a:solidFill>
+              <a:srgbClr val="D9D6DF"/>
+            </a:solidFill>
+            <a:prstDash val="solid"/>
+            <a:tailEnd type="none"/>
+          </a:ln>
+        </p:spPr>
+      </p:sp>
+      <p:sp>
+        <p:nvSpPr>
+          <p:cNvPr id="54" name="Text 52"/>
+          <p:cNvSpPr/>
+          <p:nvPr/>
+        </p:nvSpPr>
+        <p:spPr>
+          <a:xfrm>
+            <a:off x="502920" y="4352544"/>
+            <a:ext cx="1691640" cy="429768"/>
+          </a:xfrm>
+          <a:prstGeom prst="rect">
+            <a:avLst/>
+          </a:prstGeom>
+          <a:noFill/>
+          <a:ln/>
+        </p:spPr>
+        <p:txBody>
+          <a:bodyPr wrap="square" lIns="0" tIns="0" rIns="0" bIns="0" rtlCol="0" anchor="ctr">
+            <a:normAutofit/>
+          </a:bodyPr>
+          <a:lstStyle/>
+          <a:p>
+            <a:pPr algn="l" indent="0" marL="0">
+              <a:buNone/>
+            </a:pPr>
+            <a:r>
+              <a:rPr lang="en-US" sz="1190" dirty="0">
+                <a:solidFill>
+                  <a:srgbClr val="1A1A1A"/>
+                </a:solidFill>
+                <a:latin typeface="Cambria" pitchFamily="34" charset="0"/>
+                <a:ea typeface="Cambria" pitchFamily="34" charset="-122"/>
+                <a:cs typeface="Cambria" pitchFamily="34" charset="-120"/>
+              </a:rPr>
               <a:t>BERTScore</a:t>
             </a:r>
-            <a:endParaRPr lang="en-US" sz="1250" dirty="0"/>
-          </a:p>
-        </p:txBody>
-      </p:sp>
-      <p:sp>
-        <p:nvSpPr>
-          <p:cNvPr id="11" name="Shape 9"/>
-          <p:cNvSpPr/>
-          <p:nvPr/>
-        </p:nvSpPr>
-        <p:spPr>
-          <a:xfrm>
-            <a:off x="960120" y="3383280"/>
-            <a:ext cx="7223760" cy="960120"/>
+            <a:endParaRPr lang="en-US" sz="1190" dirty="0"/>
+          </a:p>
+        </p:txBody>
+      </p:sp>
+      <p:sp>
+        <p:nvSpPr>
+          <p:cNvPr id="55" name="Text 53"/>
+          <p:cNvSpPr/>
+          <p:nvPr/>
+        </p:nvSpPr>
+        <p:spPr>
+          <a:xfrm>
+            <a:off x="2194560" y="4352544"/>
+            <a:ext cx="1024128" cy="429768"/>
+          </a:xfrm>
+          <a:prstGeom prst="rect">
+            <a:avLst/>
+          </a:prstGeom>
+          <a:noFill/>
+          <a:ln/>
+        </p:spPr>
+        <p:txBody>
+          <a:bodyPr wrap="square" lIns="0" tIns="0" rIns="0" bIns="0" rtlCol="0" anchor="ctr">
+            <a:normAutofit/>
+          </a:bodyPr>
+          <a:lstStyle/>
+          <a:p>
+            <a:pPr algn="ctr" indent="0" marL="0">
+              <a:buNone/>
+            </a:pPr>
+            <a:r>
+              <a:rPr lang="en-US" sz="1190" dirty="0">
+                <a:solidFill>
+                  <a:srgbClr val="1A1A1A"/>
+                </a:solidFill>
+                <a:latin typeface="Cambria" pitchFamily="34" charset="0"/>
+                <a:ea typeface="Cambria" pitchFamily="34" charset="-122"/>
+                <a:cs typeface="Cambria" pitchFamily="34" charset="-120"/>
+              </a:rPr>
+              <a:t>40,10</a:t>
+            </a:r>
+            <a:endParaRPr lang="en-US" sz="1190" dirty="0"/>
+          </a:p>
+        </p:txBody>
+      </p:sp>
+      <p:sp>
+        <p:nvSpPr>
+          <p:cNvPr id="56" name="Text 54"/>
+          <p:cNvSpPr/>
+          <p:nvPr/>
+        </p:nvSpPr>
+        <p:spPr>
+          <a:xfrm>
+            <a:off x="3218688" y="4352544"/>
+            <a:ext cx="1024128" cy="429768"/>
+          </a:xfrm>
+          <a:prstGeom prst="rect">
+            <a:avLst/>
+          </a:prstGeom>
+          <a:noFill/>
+          <a:ln/>
+        </p:spPr>
+        <p:txBody>
+          <a:bodyPr wrap="square" lIns="0" tIns="0" rIns="0" bIns="0" rtlCol="0" anchor="ctr">
+            <a:normAutofit/>
+          </a:bodyPr>
+          <a:lstStyle/>
+          <a:p>
+            <a:pPr algn="ctr" indent="0" marL="0">
+              <a:buNone/>
+            </a:pPr>
+            <a:r>
+              <a:rPr lang="en-US" sz="1190" dirty="0">
+                <a:solidFill>
+                  <a:srgbClr val="1A1A1A"/>
+                </a:solidFill>
+                <a:latin typeface="Cambria" pitchFamily="34" charset="0"/>
+                <a:ea typeface="Cambria" pitchFamily="34" charset="-122"/>
+                <a:cs typeface="Cambria" pitchFamily="34" charset="-120"/>
+              </a:rPr>
+              <a:t>66,33</a:t>
+            </a:r>
+            <a:endParaRPr lang="en-US" sz="1190" dirty="0"/>
+          </a:p>
+        </p:txBody>
+      </p:sp>
+      <p:sp>
+        <p:nvSpPr>
+          <p:cNvPr id="57" name="Text 55"/>
+          <p:cNvSpPr/>
+          <p:nvPr/>
+        </p:nvSpPr>
+        <p:spPr>
+          <a:xfrm>
+            <a:off x="4242816" y="4352544"/>
+            <a:ext cx="1298448" cy="429768"/>
+          </a:xfrm>
+          <a:prstGeom prst="rect">
+            <a:avLst/>
+          </a:prstGeom>
+          <a:noFill/>
+          <a:ln/>
+        </p:spPr>
+        <p:txBody>
+          <a:bodyPr wrap="square" lIns="0" tIns="0" rIns="0" bIns="0" rtlCol="0" anchor="ctr">
+            <a:normAutofit/>
+          </a:bodyPr>
+          <a:lstStyle/>
+          <a:p>
+            <a:pPr algn="ctr" indent="0" marL="0">
+              <a:buNone/>
+            </a:pPr>
+            <a:r>
+              <a:rPr lang="en-US" sz="1190" dirty="0">
+                <a:solidFill>
+                  <a:srgbClr val="1A1A1A"/>
+                </a:solidFill>
+                <a:latin typeface="Cambria" pitchFamily="34" charset="0"/>
+                <a:ea typeface="Cambria" pitchFamily="34" charset="-122"/>
+                <a:cs typeface="Cambria" pitchFamily="34" charset="-120"/>
+              </a:rPr>
+              <a:t>67,07</a:t>
+            </a:r>
+            <a:endParaRPr lang="en-US" sz="1190" dirty="0"/>
+          </a:p>
+        </p:txBody>
+      </p:sp>
+      <p:sp>
+        <p:nvSpPr>
+          <p:cNvPr id="58" name="Text 56"/>
+          <p:cNvSpPr/>
+          <p:nvPr/>
+        </p:nvSpPr>
+        <p:spPr>
+          <a:xfrm>
+            <a:off x="5541264" y="4352544"/>
+            <a:ext cx="1389888" cy="429768"/>
+          </a:xfrm>
+          <a:prstGeom prst="rect">
+            <a:avLst/>
+          </a:prstGeom>
+          <a:noFill/>
+          <a:ln/>
+        </p:spPr>
+        <p:txBody>
+          <a:bodyPr wrap="square" lIns="0" tIns="0" rIns="0" bIns="0" rtlCol="0" anchor="ctr">
+            <a:normAutofit/>
+          </a:bodyPr>
+          <a:lstStyle/>
+          <a:p>
+            <a:pPr algn="ctr" indent="0" marL="0">
+              <a:buNone/>
+            </a:pPr>
+            <a:r>
+              <a:rPr lang="en-US" sz="1190" dirty="0">
+                <a:solidFill>
+                  <a:srgbClr val="1A1A1A"/>
+                </a:solidFill>
+                <a:latin typeface="Cambria" pitchFamily="34" charset="0"/>
+                <a:ea typeface="Cambria" pitchFamily="34" charset="-122"/>
+                <a:cs typeface="Cambria" pitchFamily="34" charset="-120"/>
+              </a:rPr>
+              <a:t>67,73</a:t>
+            </a:r>
+            <a:endParaRPr lang="en-US" sz="1190" dirty="0"/>
+          </a:p>
+        </p:txBody>
+      </p:sp>
+      <p:sp>
+        <p:nvSpPr>
+          <p:cNvPr id="59" name="Text 57"/>
+          <p:cNvSpPr/>
+          <p:nvPr/>
+        </p:nvSpPr>
+        <p:spPr>
+          <a:xfrm>
+            <a:off x="6931152" y="4352544"/>
+            <a:ext cx="1234440" cy="429768"/>
+          </a:xfrm>
+          <a:prstGeom prst="rect">
+            <a:avLst/>
+          </a:prstGeom>
+          <a:noFill/>
+          <a:ln/>
+        </p:spPr>
+        <p:txBody>
+          <a:bodyPr wrap="square" lIns="0" tIns="0" rIns="0" bIns="0" rtlCol="0" anchor="ctr">
+            <a:normAutofit/>
+          </a:bodyPr>
+          <a:lstStyle/>
+          <a:p>
+            <a:pPr algn="ctr" indent="0" marL="0">
+              <a:buNone/>
+            </a:pPr>
+            <a:r>
+              <a:rPr lang="en-US" sz="1190" dirty="0">
+                <a:solidFill>
+                  <a:srgbClr val="1A1A1A"/>
+                </a:solidFill>
+                <a:latin typeface="Cambria" pitchFamily="34" charset="0"/>
+                <a:ea typeface="Cambria" pitchFamily="34" charset="-122"/>
+                <a:cs typeface="Cambria" pitchFamily="34" charset="-120"/>
+              </a:rPr>
+              <a:t>+0,66</a:t>
+            </a:r>
+            <a:endParaRPr lang="en-US" sz="1190" dirty="0"/>
+          </a:p>
+        </p:txBody>
+      </p:sp>
+      <p:sp>
+        <p:nvSpPr>
+          <p:cNvPr id="60" name="Shape 58"/>
+          <p:cNvSpPr/>
+          <p:nvPr/>
+        </p:nvSpPr>
+        <p:spPr>
+          <a:xfrm>
+            <a:off x="502920" y="5010912"/>
+            <a:ext cx="8138160" cy="749808"/>
           </a:xfrm>
           <a:prstGeom prst="roundRect">
             <a:avLst/>
@@ -15804,14 +17703,14 @@
       </p:sp>
       <p:sp>
         <p:nvSpPr>
-          <p:cNvPr id="12" name="Text 10"/>
-          <p:cNvSpPr/>
-          <p:nvPr/>
-        </p:nvSpPr>
-        <p:spPr>
-          <a:xfrm>
-            <a:off x="1170432" y="3383280"/>
-            <a:ext cx="6803136" cy="960120"/>
+          <p:cNvPr id="61" name="Text 59"/>
+          <p:cNvSpPr/>
+          <p:nvPr/>
+        </p:nvSpPr>
+        <p:spPr>
+          <a:xfrm>
+            <a:off x="667512" y="5010912"/>
+            <a:ext cx="7808976" cy="749808"/>
           </a:xfrm>
           <a:prstGeom prst="rect">
             <a:avLst/>
@@ -15829,7 +17728,7 @@
               <a:buNone/>
             </a:pPr>
             <a:r>
-              <a:rPr lang="en-US" sz="1550" b="1" dirty="0">
+              <a:rPr lang="en-US" sz="1340" b="1" dirty="0">
                 <a:solidFill>
                   <a:srgbClr val="25194B"/>
                 </a:solidFill>
@@ -15837,22 +17736,22 @@
                 <a:ea typeface="Cambria" pitchFamily="34" charset="-122"/>
                 <a:cs typeface="Cambria" pitchFamily="34" charset="-120"/>
               </a:rPr>
-              <a:t>BLEU-4, METEOR, ROUGE-L và chrF cũng tăng → 7/7 thước đo dựa trên câu tham chiếu đều tăng.</a:t>
-            </a:r>
-            <a:endParaRPr lang="en-US" sz="1550" dirty="0"/>
-          </a:p>
-        </p:txBody>
-      </p:sp>
-      <p:sp>
-        <p:nvSpPr>
-          <p:cNvPr id="13" name="Text 11"/>
-          <p:cNvSpPr/>
-          <p:nvPr/>
-        </p:nvSpPr>
-        <p:spPr>
-          <a:xfrm>
-            <a:off x="502920" y="4828032"/>
-            <a:ext cx="8138160" cy="713232"/>
+              <a:t>ACE làm cả 7 thước đo văn bản tăng; Executability gần như giữ nguyên: +0,02 điểm, KTC 95% [−0,21; +0,26].</a:t>
+            </a:r>
+            <a:endParaRPr lang="en-US" sz="1340" dirty="0"/>
+          </a:p>
+        </p:txBody>
+      </p:sp>
+      <p:sp>
+        <p:nvSpPr>
+          <p:cNvPr id="62" name="Text 60"/>
+          <p:cNvSpPr/>
+          <p:nvPr/>
+        </p:nvSpPr>
+        <p:spPr>
+          <a:xfrm>
+            <a:off x="502920" y="5879592"/>
+            <a:ext cx="8138160" cy="274320"/>
           </a:xfrm>
           <a:prstGeom prst="rect">
             <a:avLst/>
@@ -15870,23 +17769,23 @@
               <a:buNone/>
             </a:pPr>
             <a:r>
-              <a:rPr lang="en-US" sz="1460" dirty="0">
-                <a:solidFill>
-                  <a:srgbClr val="1A1A1A"/>
-                </a:solidFill>
-                <a:latin typeface="Cambria" pitchFamily="34" charset="0"/>
-                <a:ea typeface="Cambria" pitchFamily="34" charset="-122"/>
-                <a:cs typeface="Cambria" pitchFamily="34" charset="-120"/>
-              </a:rPr>
-              <a:t>Executability chỉ thay đổi +0,02 điểm [−0,21; +0,26]. Các mức tăng của 7 thước đo văn bản hiện chưa có khoảng tin cậy.</a:t>
-            </a:r>
-            <a:endParaRPr lang="en-US" sz="1460" dirty="0"/>
-          </a:p>
-        </p:txBody>
-      </p:sp>
-      <p:sp>
-        <p:nvSpPr>
-          <p:cNvPr id="14" name="Text 12"/>
+              <a:rPr lang="en-US" sz="1080" dirty="0">
+                <a:solidFill>
+                  <a:srgbClr val="5A5A66"/>
+                </a:solidFill>
+                <a:latin typeface="Cambria" pitchFamily="34" charset="0"/>
+                <a:ea typeface="Cambria" pitchFamily="34" charset="-122"/>
+                <a:cs typeface="Cambria" pitchFamily="34" charset="-120"/>
+              </a:rPr>
+              <a:t>Lưu ý: các mức tăng của 7 thước đo văn bản hiện chưa có khoảng tin cậy.</a:t>
+            </a:r>
+            <a:endParaRPr lang="en-US" sz="1080" dirty="0"/>
+          </a:p>
+        </p:txBody>
+      </p:sp>
+      <p:sp>
+        <p:nvSpPr>
+          <p:cNvPr id="63" name="Text 61"/>
           <p:cNvSpPr/>
           <p:nvPr/>
         </p:nvSpPr>
@@ -15917,7 +17816,7 @@
                 <a:ea typeface="Cambria" pitchFamily="34" charset="-122"/>
                 <a:cs typeface="Cambria" pitchFamily="34" charset="-120"/>
               </a:rPr>
-              <a:t>Bảng đầy đủ ở slide bổ sung · Luận văn §6.4, §6.6</a:t>
+              <a:t>Luận văn §6.4, §6.6</a:t>
             </a:r>
             <a:endParaRPr lang="en-US" sz="800" dirty="0"/>
           </a:p>
@@ -15925,7 +17824,7 @@
       </p:sp>
       <p:sp>
         <p:nvSpPr>
-          <p:cNvPr id="15" name="Shape 13"/>
+          <p:cNvPr id="64" name="Shape 62"/>
           <p:cNvSpPr/>
           <p:nvPr/>
         </p:nvSpPr>
@@ -15952,7 +17851,7 @@
       </p:sp>
       <p:sp>
         <p:nvSpPr>
-          <p:cNvPr id="16" name="Shape 14"/>
+          <p:cNvPr id="65" name="Shape 63"/>
           <p:cNvSpPr/>
           <p:nvPr/>
         </p:nvSpPr>
@@ -15979,7 +17878,7 @@
       </p:sp>
       <p:sp>
         <p:nvSpPr>
-          <p:cNvPr id="17" name="Shape 15"/>
+          <p:cNvPr id="66" name="Shape 64"/>
           <p:cNvSpPr/>
           <p:nvPr/>
         </p:nvSpPr>
@@ -16006,7 +17905,7 @@
       </p:sp>
       <p:sp>
         <p:nvSpPr>
-          <p:cNvPr id="18" name="Shape 16"/>
+          <p:cNvPr id="67" name="Shape 65"/>
           <p:cNvSpPr/>
           <p:nvPr/>
         </p:nvSpPr>
@@ -16033,7 +17932,7 @@
       </p:sp>
       <p:sp>
         <p:nvSpPr>
-          <p:cNvPr id="19" name="Text 17"/>
+          <p:cNvPr id="68" name="Text 66"/>
           <p:cNvSpPr/>
           <p:nvPr/>
         </p:nvSpPr>
@@ -16072,7 +17971,7 @@
       </p:sp>
       <p:sp>
         <p:nvSpPr>
-          <p:cNvPr id="20" name="Text 18"/>
+          <p:cNvPr id="69" name="Text 67"/>
           <p:cNvSpPr/>
           <p:nvPr/>
         </p:nvSpPr>
@@ -16111,7 +18010,7 @@
       </p:sp>
       <p:sp>
         <p:nvSpPr>
-          <p:cNvPr id="21" name="Text 19"/>
+          <p:cNvPr id="70" name="Text 68"/>
           <p:cNvSpPr/>
           <p:nvPr/>
         </p:nvSpPr>
@@ -16150,7 +18049,7 @@
       </p:sp>
       <p:sp>
         <p:nvSpPr>
-          <p:cNvPr id="22" name="Text 20"/>
+          <p:cNvPr id="71" name="Text 69"/>
           <p:cNvSpPr/>
           <p:nvPr/>
         </p:nvSpPr>

--- a/slides/LUAN_VAN_SLIDE_BAO_VE_CONCISE.pptx
+++ b/slides/LUAN_VAN_SLIDE_BAO_VE_CONCISE.pptx
@@ -7405,8 +7405,8 @@
         </p:nvSpPr>
         <p:spPr>
           <a:xfrm>
-            <a:off x="502920" y="5010912"/>
-            <a:ext cx="8138160" cy="512064"/>
+            <a:off x="502920" y="4919472"/>
+            <a:ext cx="8138160" cy="658368"/>
           </a:xfrm>
           <a:prstGeom prst="rect">
             <a:avLst/>
@@ -7424,7 +7424,7 @@
               <a:buNone/>
             </a:pPr>
             <a:r>
-              <a:rPr lang="en-US" sz="1420" b="1" dirty="0">
+              <a:rPr lang="en-US" sz="1280" b="1" dirty="0">
                 <a:solidFill>
                   <a:srgbClr val="25194B"/>
                 </a:solidFill>
@@ -7432,9 +7432,9 @@
                 <a:ea typeface="Cambria" pitchFamily="34" charset="-122"/>
                 <a:cs typeface="Cambria" pitchFamily="34" charset="-120"/>
               </a:rPr>
-              <a:t>Lượt GRPO thứ hai cũng cao hơn S1 về executability (+0,83) và 6/6 thước chữ có KTC.</a:t>
-            </a:r>
-            <a:endParaRPr lang="en-US" sz="1420" dirty="0"/>
+              <a:t>Hai lượt S1: 59,11 / 59,62 · Hai lượt GRPO-SPICE: 60,65 / 59,94 · Lượt GRPO thứ hai vẫn cao hơn S1 lượt đầu +0,83 điểm.</a:t>
+            </a:r>
+            <a:endParaRPr lang="en-US" sz="1280" dirty="0"/>
           </a:p>
         </p:txBody>
       </p:sp>
@@ -8311,6 +8311,47 @@
         </p:nvSpPr>
         <p:spPr>
           <a:xfrm>
+            <a:off x="502920" y="5705856"/>
+            <a:ext cx="8138160" cy="274320"/>
+          </a:xfrm>
+          <a:prstGeom prst="rect">
+            <a:avLst/>
+          </a:prstGeom>
+          <a:noFill/>
+          <a:ln/>
+        </p:spPr>
+        <p:txBody>
+          <a:bodyPr wrap="square" lIns="0" tIns="0" rIns="0" bIns="0" rtlCol="0" anchor="ctr">
+            <a:normAutofit/>
+          </a:bodyPr>
+          <a:lstStyle/>
+          <a:p>
+            <a:pPr algn="ctr" indent="0" marL="0">
+              <a:buNone/>
+            </a:pPr>
+            <a:r>
+              <a:rPr lang="en-US" sz="1080" dirty="0">
+                <a:solidFill>
+                  <a:srgbClr val="5A5A66"/>
+                </a:solidFill>
+                <a:latin typeface="Cambria" pitchFamily="34" charset="0"/>
+                <a:ea typeface="Cambria" pitchFamily="34" charset="-122"/>
+                <a:cs typeface="Cambria" pitchFamily="34" charset="-120"/>
+              </a:rPr>
+              <a:t>ACU là tập bổ sung theo tác vụ để kiểm tra tổng quát hóa, không thay thế tập kiểm chính.</a:t>
+            </a:r>
+            <a:endParaRPr lang="en-US" sz="1080" dirty="0"/>
+          </a:p>
+        </p:txBody>
+      </p:sp>
+      <p:sp>
+        <p:nvSpPr>
+          <p:cNvPr id="17" name="Text 15"/>
+          <p:cNvSpPr/>
+          <p:nvPr/>
+        </p:nvSpPr>
+        <p:spPr>
+          <a:xfrm>
             <a:off x="502920" y="6327648"/>
             <a:ext cx="8138160" cy="137160"/>
           </a:xfrm>
@@ -8344,7 +8385,7 @@
       </p:sp>
       <p:sp>
         <p:nvSpPr>
-          <p:cNvPr id="17" name="Shape 15"/>
+          <p:cNvPr id="18" name="Shape 16"/>
           <p:cNvSpPr/>
           <p:nvPr/>
         </p:nvSpPr>
@@ -8371,7 +8412,7 @@
       </p:sp>
       <p:sp>
         <p:nvSpPr>
-          <p:cNvPr id="18" name="Shape 16"/>
+          <p:cNvPr id="19" name="Shape 17"/>
           <p:cNvSpPr/>
           <p:nvPr/>
         </p:nvSpPr>
@@ -8398,7 +8439,7 @@
       </p:sp>
       <p:sp>
         <p:nvSpPr>
-          <p:cNvPr id="19" name="Shape 17"/>
+          <p:cNvPr id="20" name="Shape 18"/>
           <p:cNvSpPr/>
           <p:nvPr/>
         </p:nvSpPr>
@@ -8425,7 +8466,7 @@
       </p:sp>
       <p:sp>
         <p:nvSpPr>
-          <p:cNvPr id="20" name="Shape 18"/>
+          <p:cNvPr id="21" name="Shape 19"/>
           <p:cNvSpPr/>
           <p:nvPr/>
         </p:nvSpPr>
@@ -8452,7 +8493,7 @@
       </p:sp>
       <p:sp>
         <p:nvSpPr>
-          <p:cNvPr id="21" name="Text 19"/>
+          <p:cNvPr id="22" name="Text 20"/>
           <p:cNvSpPr/>
           <p:nvPr/>
         </p:nvSpPr>
@@ -8491,7 +8532,7 @@
       </p:sp>
       <p:sp>
         <p:nvSpPr>
-          <p:cNvPr id="22" name="Text 20"/>
+          <p:cNvPr id="23" name="Text 21"/>
           <p:cNvSpPr/>
           <p:nvPr/>
         </p:nvSpPr>
@@ -8530,7 +8571,7 @@
       </p:sp>
       <p:sp>
         <p:nvSpPr>
-          <p:cNvPr id="23" name="Text 21"/>
+          <p:cNvPr id="24" name="Text 22"/>
           <p:cNvSpPr/>
           <p:nvPr/>
         </p:nvSpPr>
@@ -8569,7 +8610,7 @@
       </p:sp>
       <p:sp>
         <p:nvSpPr>
-          <p:cNvPr id="24" name="Text 22"/>
+          <p:cNvPr id="25" name="Text 23"/>
           <p:cNvSpPr/>
           <p:nvPr/>
         </p:nvSpPr>
@@ -9151,7 +9192,7 @@
                 <a:ea typeface="Cambria" pitchFamily="34" charset="-122"/>
                 <a:cs typeface="Cambria" pitchFamily="34" charset="-120"/>
               </a:rPr>
-              <a:t>1 · Câu ứng viên phải đúng bằng một trong bốn câu ví dụ được truy hồi.</a:t>
+              <a:t>1 · Câu ứng viên phải giống hoàn toàn một trong bốn câu ví dụ được truy hồi.</a:t>
             </a:r>
             <a:endParaRPr lang="en-US" sz="1400" dirty="0"/>
           </a:p>
@@ -12824,7 +12865,7 @@
                 <a:ea typeface="Cambria" pitchFamily="34" charset="-122"/>
                 <a:cs typeface="Cambria" pitchFamily="34" charset="-120"/>
               </a:rPr>
-              <a:t>Thứ tự chung Base &lt; S1 &lt; GRPO-SPICE ≈ ACE &lt; câu chuẩn được giữ qua các công cụ.</a:t>
+              <a:t>Quan hệ S1 &lt; GRPO-SPICE ≈ ACE được giữ ở cả bốn công cụ đánh giá.</a:t>
             </a:r>
             <a:endParaRPr lang="en-US" sz="1440" dirty="0"/>
           </a:p>
@@ -13675,7 +13716,7 @@
                 <a:ea typeface="Cambria" pitchFamily="34" charset="-122"/>
                 <a:cs typeface="Cambria" pitchFamily="34" charset="-120"/>
               </a:rPr>
-              <a:t>GRPO-SPICE vẫn cao hơn S1 ở 6/7 điểm thước chữ; SPICE, chrF và BLEU-4 có KTC nằm trên 0.</a:t>
+              <a:t>Về thước chữ, GRPO-SPICE và S1 nhìn chung gần tương đương; BLEU-4, SPICE và chrF là ba thước có KTC nằm trên 0.</a:t>
             </a:r>
             <a:endParaRPr lang="en-US" sz="1310" dirty="0"/>
           </a:p>
@@ -17647,7 +17688,7 @@
         </p:nvSpPr>
         <p:spPr>
           <a:xfrm>
-            <a:off x="521208" y="1417320"/>
+            <a:off x="521208" y="1380744"/>
             <a:ext cx="64008" cy="64008"/>
           </a:xfrm>
           <a:prstGeom prst="ellipse">
@@ -17674,8 +17715,8 @@
         </p:nvSpPr>
         <p:spPr>
           <a:xfrm>
-            <a:off x="713232" y="1280160"/>
-            <a:ext cx="7927848" cy="548640"/>
+            <a:off x="713232" y="1243584"/>
+            <a:ext cx="7927848" cy="457200"/>
           </a:xfrm>
           <a:prstGeom prst="rect">
             <a:avLst/>
@@ -17696,7 +17737,7 @@
               <a:buNone/>
             </a:pPr>
             <a:r>
-              <a:rPr lang="en-US" sz="1380" dirty="0">
+              <a:rPr lang="en-US" sz="1290" dirty="0">
                 <a:solidFill>
                   <a:srgbClr val="1A1A1A"/>
                 </a:solidFill>
@@ -17706,7 +17747,7 @@
               </a:rPr>
               <a:t>Kết luận chính về executability tập trung vào các bước có thao tác chạm.</a:t>
             </a:r>
-            <a:endParaRPr lang="en-US" sz="1380" dirty="0"/>
+            <a:endParaRPr lang="en-US" sz="1290" dirty="0"/>
           </a:p>
         </p:txBody>
       </p:sp>
@@ -17718,7 +17759,7 @@
         </p:nvSpPr>
         <p:spPr>
           <a:xfrm>
-            <a:off x="521208" y="2075688"/>
+            <a:off x="521208" y="1892808"/>
             <a:ext cx="64008" cy="64008"/>
           </a:xfrm>
           <a:prstGeom prst="ellipse">
@@ -17745,8 +17786,8 @@
         </p:nvSpPr>
         <p:spPr>
           <a:xfrm>
-            <a:off x="713232" y="1938528"/>
-            <a:ext cx="7927848" cy="548640"/>
+            <a:off x="713232" y="1755648"/>
+            <a:ext cx="7927848" cy="457200"/>
           </a:xfrm>
           <a:prstGeom prst="rect">
             <a:avLst/>
@@ -17767,7 +17808,7 @@
               <a:buNone/>
             </a:pPr>
             <a:r>
-              <a:rPr lang="en-US" sz="1380" dirty="0">
+              <a:rPr lang="en-US" sz="1290" dirty="0">
                 <a:solidFill>
                   <a:srgbClr val="1A1A1A"/>
                 </a:solidFill>
@@ -17777,7 +17818,7 @@
               </a:rPr>
               <a:t>Thực nghiệm chính dùng AndroidControl tiếng Anh và backbone Qwen2.5-VL-3B.</a:t>
             </a:r>
-            <a:endParaRPr lang="en-US" sz="1380" dirty="0"/>
+            <a:endParaRPr lang="en-US" sz="1290" dirty="0"/>
           </a:p>
         </p:txBody>
       </p:sp>
@@ -17789,7 +17830,7 @@
         </p:nvSpPr>
         <p:spPr>
           <a:xfrm>
-            <a:off x="521208" y="2734056"/>
+            <a:off x="521208" y="2404872"/>
             <a:ext cx="64008" cy="64008"/>
           </a:xfrm>
           <a:prstGeom prst="ellipse">
@@ -17816,8 +17857,8 @@
         </p:nvSpPr>
         <p:spPr>
           <a:xfrm>
-            <a:off x="713232" y="2596896"/>
-            <a:ext cx="7927848" cy="548640"/>
+            <a:off x="713232" y="2267712"/>
+            <a:ext cx="7927848" cy="457200"/>
           </a:xfrm>
           <a:prstGeom prst="rect">
             <a:avLst/>
@@ -17838,7 +17879,7 @@
               <a:buNone/>
             </a:pPr>
             <a:r>
-              <a:rPr lang="en-US" sz="1380" dirty="0">
+              <a:rPr lang="en-US" sz="1290" dirty="0">
                 <a:solidFill>
                   <a:srgbClr val="1A1A1A"/>
                 </a:solidFill>
@@ -17846,60 +17887,21 @@
                 <a:ea typeface="Cambria" pitchFamily="34" charset="-122"/>
                 <a:cs typeface="Cambria" pitchFamily="34" charset="-120"/>
               </a:rPr>
-              <a:t>AitZ cho thấy lợi ích bổ sung của SPICE phụ thuộc vào phân phối câu chuẩn.</a:t>
-            </a:r>
-            <a:endParaRPr lang="en-US" sz="1380" dirty="0"/>
-          </a:p>
-        </p:txBody>
-      </p:sp>
-      <p:sp>
-        <p:nvSpPr>
-          <p:cNvPr id="11" name="Text 9"/>
-          <p:cNvSpPr/>
-          <p:nvPr/>
-        </p:nvSpPr>
-        <p:spPr>
-          <a:xfrm>
-            <a:off x="502920" y="3429000"/>
-            <a:ext cx="1828800" cy="320040"/>
-          </a:xfrm>
-          <a:prstGeom prst="rect">
-            <a:avLst/>
-          </a:prstGeom>
-          <a:noFill/>
-          <a:ln/>
-        </p:spPr>
-        <p:txBody>
-          <a:bodyPr wrap="square" lIns="0" tIns="0" rIns="0" bIns="0" rtlCol="0" anchor="ctr"/>
-          <a:lstStyle/>
-          <a:p>
-            <a:pPr indent="0" marL="0">
-              <a:buNone/>
-            </a:pPr>
-            <a:r>
-              <a:rPr lang="en-US" sz="1700" b="1" dirty="0">
-                <a:solidFill>
-                  <a:srgbClr val="25194B"/>
-                </a:solidFill>
-                <a:latin typeface="Cambria" pitchFamily="34" charset="0"/>
-                <a:ea typeface="Cambria" pitchFamily="34" charset="-122"/>
-                <a:cs typeface="Cambria" pitchFamily="34" charset="-120"/>
-              </a:rPr>
-              <a:t>Hướng mở rộng</a:t>
-            </a:r>
-            <a:endParaRPr lang="en-US" sz="1700" dirty="0"/>
-          </a:p>
-        </p:txBody>
-      </p:sp>
-      <p:sp>
-        <p:nvSpPr>
-          <p:cNvPr id="12" name="Shape 10"/>
-          <p:cNvSpPr/>
-          <p:nvPr/>
-        </p:nvSpPr>
-        <p:spPr>
-          <a:xfrm>
-            <a:off x="521208" y="3977640"/>
+              <a:t>Đa số nhánh được chạy một lượt; S1 và GRPO-SPICE có hai lượt để kiểm tra độ ổn định về hướng.</a:t>
+            </a:r>
+            <a:endParaRPr lang="en-US" sz="1290" dirty="0"/>
+          </a:p>
+        </p:txBody>
+      </p:sp>
+      <p:sp>
+        <p:nvSpPr>
+          <p:cNvPr id="11" name="Shape 9"/>
+          <p:cNvSpPr/>
+          <p:nvPr/>
+        </p:nvSpPr>
+        <p:spPr>
+          <a:xfrm>
+            <a:off x="521208" y="2916936"/>
             <a:ext cx="64008" cy="64008"/>
           </a:xfrm>
           <a:prstGeom prst="ellipse">
@@ -17920,14 +17922,14 @@
       </p:sp>
       <p:sp>
         <p:nvSpPr>
-          <p:cNvPr id="13" name="Text 11"/>
-          <p:cNvSpPr/>
-          <p:nvPr/>
-        </p:nvSpPr>
-        <p:spPr>
-          <a:xfrm>
-            <a:off x="713232" y="3840480"/>
-            <a:ext cx="7927848" cy="548640"/>
+          <p:cNvPr id="12" name="Text 10"/>
+          <p:cNvSpPr/>
+          <p:nvPr/>
+        </p:nvSpPr>
+        <p:spPr>
+          <a:xfrm>
+            <a:off x="713232" y="2779776"/>
+            <a:ext cx="7927848" cy="457200"/>
           </a:xfrm>
           <a:prstGeom prst="rect">
             <a:avLst/>
@@ -17948,7 +17950,7 @@
               <a:buNone/>
             </a:pPr>
             <a:r>
-              <a:rPr lang="en-US" sz="1380" dirty="0">
+              <a:rPr lang="en-US" sz="1290" dirty="0">
                 <a:solidFill>
                   <a:srgbClr val="1A1A1A"/>
                 </a:solidFill>
@@ -17956,9 +17958,48 @@
                 <a:ea typeface="Cambria" pitchFamily="34" charset="-122"/>
                 <a:cs typeface="Cambria" pitchFamily="34" charset="-120"/>
               </a:rPr>
-              <a:t>Mở rộng sang nhiều miền giao diện, câu chuẩn do người viết và giao diện tiếng Việt.</a:t>
-            </a:r>
-            <a:endParaRPr lang="en-US" sz="1380" dirty="0"/>
+              <a:t>AitZ cho thấy lợi ích bổ sung của SPICE phụ thuộc vào phân phối câu chuẩn.</a:t>
+            </a:r>
+            <a:endParaRPr lang="en-US" sz="1290" dirty="0"/>
+          </a:p>
+        </p:txBody>
+      </p:sp>
+      <p:sp>
+        <p:nvSpPr>
+          <p:cNvPr id="13" name="Text 11"/>
+          <p:cNvSpPr/>
+          <p:nvPr/>
+        </p:nvSpPr>
+        <p:spPr>
+          <a:xfrm>
+            <a:off x="502920" y="3429000"/>
+            <a:ext cx="1828800" cy="320040"/>
+          </a:xfrm>
+          <a:prstGeom prst="rect">
+            <a:avLst/>
+          </a:prstGeom>
+          <a:noFill/>
+          <a:ln/>
+        </p:spPr>
+        <p:txBody>
+          <a:bodyPr wrap="square" lIns="0" tIns="0" rIns="0" bIns="0" rtlCol="0" anchor="ctr"/>
+          <a:lstStyle/>
+          <a:p>
+            <a:pPr indent="0" marL="0">
+              <a:buNone/>
+            </a:pPr>
+            <a:r>
+              <a:rPr lang="en-US" sz="1700" b="1" dirty="0">
+                <a:solidFill>
+                  <a:srgbClr val="25194B"/>
+                </a:solidFill>
+                <a:latin typeface="Cambria" pitchFamily="34" charset="0"/>
+                <a:ea typeface="Cambria" pitchFamily="34" charset="-122"/>
+                <a:cs typeface="Cambria" pitchFamily="34" charset="-120"/>
+              </a:rPr>
+              <a:t>Hướng mở rộng</a:t>
+            </a:r>
+            <a:endParaRPr lang="en-US" sz="1700" dirty="0"/>
           </a:p>
         </p:txBody>
       </p:sp>
@@ -17970,7 +18011,7 @@
         </p:nvSpPr>
         <p:spPr>
           <a:xfrm>
-            <a:off x="521208" y="4636008"/>
+            <a:off x="521208" y="3977640"/>
             <a:ext cx="64008" cy="64008"/>
           </a:xfrm>
           <a:prstGeom prst="ellipse">
@@ -17997,7 +18038,7 @@
         </p:nvSpPr>
         <p:spPr>
           <a:xfrm>
-            <a:off x="713232" y="4498848"/>
+            <a:off x="713232" y="3840480"/>
             <a:ext cx="7927848" cy="548640"/>
           </a:xfrm>
           <a:prstGeom prst="rect">
@@ -18027,7 +18068,7 @@
                 <a:ea typeface="Cambria" pitchFamily="34" charset="-122"/>
                 <a:cs typeface="Cambria" pitchFamily="34" charset="-120"/>
               </a:rPr>
-              <a:t>Tăng độ bao phủ cho thao tác ngoài thao tác chạm và chuỗi nhiều màn hình.</a:t>
+              <a:t>Mở rộng sang nhiều miền giao diện, câu chuẩn do người viết và giao diện tiếng Việt.</a:t>
             </a:r>
             <a:endParaRPr lang="en-US" sz="1380" dirty="0"/>
           </a:p>
@@ -18041,7 +18082,7 @@
         </p:nvSpPr>
         <p:spPr>
           <a:xfrm>
-            <a:off x="521208" y="5294376"/>
+            <a:off x="521208" y="4636008"/>
             <a:ext cx="64008" cy="64008"/>
           </a:xfrm>
           <a:prstGeom prst="ellipse">
@@ -18068,7 +18109,7 @@
         </p:nvSpPr>
         <p:spPr>
           <a:xfrm>
-            <a:off x="713232" y="5157216"/>
+            <a:off x="713232" y="4498848"/>
             <a:ext cx="7927848" cy="548640"/>
           </a:xfrm>
           <a:prstGeom prst="rect">
@@ -18098,6 +18139,77 @@
                 <a:ea typeface="Cambria" pitchFamily="34" charset="-122"/>
                 <a:cs typeface="Cambria" pitchFamily="34" charset="-120"/>
               </a:rPr>
+              <a:t>Tăng độ bao phủ cho thao tác ngoài thao tác chạm và chuỗi nhiều màn hình.</a:t>
+            </a:r>
+            <a:endParaRPr lang="en-US" sz="1380" dirty="0"/>
+          </a:p>
+        </p:txBody>
+      </p:sp>
+      <p:sp>
+        <p:nvSpPr>
+          <p:cNvPr id="18" name="Shape 16"/>
+          <p:cNvSpPr/>
+          <p:nvPr/>
+        </p:nvSpPr>
+        <p:spPr>
+          <a:xfrm>
+            <a:off x="521208" y="5294376"/>
+            <a:ext cx="64008" cy="64008"/>
+          </a:xfrm>
+          <a:prstGeom prst="ellipse">
+            <a:avLst/>
+          </a:prstGeom>
+          <a:solidFill>
+            <a:srgbClr val="4F417A"/>
+          </a:solidFill>
+          <a:ln w="12700">
+            <a:solidFill>
+              <a:srgbClr val="4F417A">
+                <a:alpha val="0"/>
+              </a:srgbClr>
+            </a:solidFill>
+            <a:prstDash val="solid"/>
+          </a:ln>
+        </p:spPr>
+      </p:sp>
+      <p:sp>
+        <p:nvSpPr>
+          <p:cNvPr id="19" name="Text 17"/>
+          <p:cNvSpPr/>
+          <p:nvPr/>
+        </p:nvSpPr>
+        <p:spPr>
+          <a:xfrm>
+            <a:off x="713232" y="5157216"/>
+            <a:ext cx="7927848" cy="548640"/>
+          </a:xfrm>
+          <a:prstGeom prst="rect">
+            <a:avLst/>
+          </a:prstGeom>
+          <a:noFill/>
+          <a:ln/>
+        </p:spPr>
+        <p:txBody>
+          <a:bodyPr wrap="square" lIns="0" tIns="0" rIns="0" bIns="0" rtlCol="0" anchor="t">
+            <a:normAutofit/>
+          </a:bodyPr>
+          <a:lstStyle/>
+          <a:p>
+            <a:pPr indent="0" marL="0">
+              <a:lnSpc>
+                <a:spcPct val="112000"/>
+              </a:lnSpc>
+              <a:buNone/>
+            </a:pPr>
+            <a:r>
+              <a:rPr lang="en-US" sz="1380" dirty="0">
+                <a:solidFill>
+                  <a:srgbClr val="1A1A1A"/>
+                </a:solidFill>
+                <a:latin typeface="Cambria" pitchFamily="34" charset="0"/>
+                <a:ea typeface="Cambria" pitchFamily="34" charset="-122"/>
+                <a:cs typeface="Cambria" pitchFamily="34" charset="-120"/>
+              </a:rPr>
               <a:t>Lặp thêm lượt huấn luyện để ước lượng chính xác hơn độ biến thiên của mức tăng.</a:t>
             </a:r>
             <a:endParaRPr lang="en-US" sz="1380" dirty="0"/>
@@ -18106,7 +18218,7 @@
       </p:sp>
       <p:sp>
         <p:nvSpPr>
-          <p:cNvPr id="18" name="Text 16"/>
+          <p:cNvPr id="20" name="Text 18"/>
           <p:cNvSpPr/>
           <p:nvPr/>
         </p:nvSpPr>
@@ -18145,7 +18257,7 @@
       </p:sp>
       <p:sp>
         <p:nvSpPr>
-          <p:cNvPr id="19" name="Shape 17"/>
+          <p:cNvPr id="21" name="Shape 19"/>
           <p:cNvSpPr/>
           <p:nvPr/>
         </p:nvSpPr>
@@ -18172,7 +18284,7 @@
       </p:sp>
       <p:sp>
         <p:nvSpPr>
-          <p:cNvPr id="20" name="Shape 18"/>
+          <p:cNvPr id="22" name="Shape 20"/>
           <p:cNvSpPr/>
           <p:nvPr/>
         </p:nvSpPr>
@@ -18199,7 +18311,7 @@
       </p:sp>
       <p:sp>
         <p:nvSpPr>
-          <p:cNvPr id="21" name="Shape 19"/>
+          <p:cNvPr id="23" name="Shape 21"/>
           <p:cNvSpPr/>
           <p:nvPr/>
         </p:nvSpPr>
@@ -18226,7 +18338,7 @@
       </p:sp>
       <p:sp>
         <p:nvSpPr>
-          <p:cNvPr id="22" name="Shape 20"/>
+          <p:cNvPr id="24" name="Shape 22"/>
           <p:cNvSpPr/>
           <p:nvPr/>
         </p:nvSpPr>
@@ -18253,7 +18365,7 @@
       </p:sp>
       <p:sp>
         <p:nvSpPr>
-          <p:cNvPr id="23" name="Text 21"/>
+          <p:cNvPr id="25" name="Text 23"/>
           <p:cNvSpPr/>
           <p:nvPr/>
         </p:nvSpPr>
@@ -18292,7 +18404,7 @@
       </p:sp>
       <p:sp>
         <p:nvSpPr>
-          <p:cNvPr id="24" name="Text 22"/>
+          <p:cNvPr id="26" name="Text 24"/>
           <p:cNvSpPr/>
           <p:nvPr/>
         </p:nvSpPr>
@@ -18331,7 +18443,7 @@
       </p:sp>
       <p:sp>
         <p:nvSpPr>
-          <p:cNvPr id="25" name="Text 23"/>
+          <p:cNvPr id="27" name="Text 25"/>
           <p:cNvSpPr/>
           <p:nvPr/>
         </p:nvSpPr>
@@ -18370,7 +18482,7 @@
       </p:sp>
       <p:sp>
         <p:nvSpPr>
-          <p:cNvPr id="26" name="Text 24"/>
+          <p:cNvPr id="28" name="Text 26"/>
           <p:cNvSpPr/>
           <p:nvPr/>
         </p:nvSpPr>
@@ -18855,7 +18967,7 @@
                 <a:ea typeface="Cambria" pitchFamily="34" charset="-122"/>
                 <a:cs typeface="Cambria" pitchFamily="34" charset="-120"/>
               </a:rPr>
-              <a:t>Điểm mạnh của luận văn không chỉ là một con số, mà là chuỗi bằng chứng giải thích được con số đó.</a:t>
+              <a:t>Các thí nghiệm bổ sung giúp làm rõ mức tăng giữ được ở đâu và giới hạn xuất hiện khi nào.</a:t>
             </a:r>
             <a:endParaRPr lang="en-US" sz="1550" dirty="0"/>
           </a:p>
@@ -19870,7 +19982,7 @@
                 <a:ea typeface="Cambria" pitchFamily="34" charset="-122"/>
                 <a:cs typeface="Cambria" pitchFamily="34" charset="-120"/>
               </a:rPr>
-              <a:t>Kết luận chính: tối ưu trực tiếp chất lượng câu giúp tăng khả năng người dùng xác định đúng phần tử cần thao tác.</a:t>
+              <a:t>Kết luận chính: trong thiết lập AndroidControl, GRPO-SPICE làm tăng đồng thời chất lượng câu và executability.</a:t>
             </a:r>
             <a:endParaRPr lang="en-US" sz="1320" dirty="0"/>
           </a:p>
@@ -30211,7 +30323,7 @@
                 <a:ea typeface="Cambria" pitchFamily="34" charset="-122"/>
                 <a:cs typeface="Cambria" pitchFamily="34" charset="-120"/>
               </a:rPr>
-              <a:t>6. Tinh chỉnh dữ liệu phù hợp quan trọng hơn chỉ tăng kích thước mô hình</a:t>
+              <a:t>6. Trong thiết lập đã thử, 3B sau tinh chỉnh vượt 7B chỉ prompting</a:t>
             </a:r>
             <a:endParaRPr lang="en-US" sz="2000" dirty="0"/>
           </a:p>
@@ -31758,7 +31870,7 @@
                 <a:ea typeface="Cambria" pitchFamily="34" charset="-122"/>
                 <a:cs typeface="Cambria" pitchFamily="34" charset="-120"/>
               </a:rPr>
-              <a:t>không mô tả trạng thái theo nghĩa ngược</a:t>
+              <a:t>không diễn đạt ngược thao tác cần làm</a:t>
             </a:r>
             <a:endParaRPr lang="en-US" sz="1500" dirty="0"/>
           </a:p>

--- a/slides/LUAN_VAN_SLIDE_BAO_VE_CONCISE.pptx
+++ b/slides/LUAN_VAN_SLIDE_BAO_VE_CONCISE.pptx
@@ -4185,51 +4185,7 @@
       </p:sp>
       <p:sp>
         <p:nvSpPr>
-          <p:cNvPr id="4" name="Text 2"/>
-          <p:cNvSpPr/>
-          <p:nvPr/>
-        </p:nvSpPr>
-        <p:spPr>
-          <a:xfrm>
-            <a:off x="502920" y="603504"/>
-            <a:ext cx="8138160" cy="219456"/>
-          </a:xfrm>
-          <a:prstGeom prst="rect">
-            <a:avLst/>
-          </a:prstGeom>
-          <a:noFill/>
-          <a:ln/>
-        </p:spPr>
-        <p:txBody>
-          <a:bodyPr wrap="square" lIns="0" tIns="0" rIns="0" bIns="0" rtlCol="0" anchor="ctr">
-            <a:normAutofit/>
-          </a:bodyPr>
-          <a:lstStyle/>
-          <a:p>
-            <a:pPr indent="0" marL="0">
-              <a:lnSpc>
-                <a:spcPct val="125000"/>
-              </a:lnSpc>
-              <a:buNone/>
-            </a:pPr>
-            <a:r>
-              <a:rPr lang="en-US" sz="1260" b="1" dirty="0">
-                <a:solidFill>
-                  <a:srgbClr val="25194B"/>
-                </a:solidFill>
-                <a:latin typeface="Cambria" pitchFamily="34" charset="0"/>
-                <a:ea typeface="Cambria" pitchFamily="34" charset="-122"/>
-                <a:cs typeface="Cambria" pitchFamily="34" charset="-120"/>
-              </a:rPr>
-              <a:t>Quy trình tổng thể</a:t>
-            </a:r>
-            <a:endParaRPr lang="en-US" sz="1260" dirty="0"/>
-          </a:p>
-        </p:txBody>
-      </p:sp>
-      <p:sp>
-        <p:nvSpPr>
-          <p:cNvPr id="5" name="Shape 3"/>
+          <p:cNvPr id="4" name="Shape 2"/>
           <p:cNvSpPr/>
           <p:nvPr/>
         </p:nvSpPr>
@@ -4254,7 +4210,7 @@
       </p:sp>
       <p:sp>
         <p:nvSpPr>
-          <p:cNvPr id="6" name="Text 4"/>
+          <p:cNvPr id="5" name="Text 3"/>
           <p:cNvSpPr/>
           <p:nvPr/>
         </p:nvSpPr>
@@ -4298,7 +4254,7 @@
       </p:sp>
       <p:sp>
         <p:nvSpPr>
-          <p:cNvPr id="7" name="Shape 5"/>
+          <p:cNvPr id="6" name="Shape 4"/>
           <p:cNvSpPr/>
           <p:nvPr/>
         </p:nvSpPr>
@@ -4322,7 +4278,7 @@
       </p:sp>
       <p:sp>
         <p:nvSpPr>
-          <p:cNvPr id="8" name="Shape 6"/>
+          <p:cNvPr id="7" name="Shape 5"/>
           <p:cNvSpPr/>
           <p:nvPr/>
         </p:nvSpPr>
@@ -4347,7 +4303,7 @@
       </p:sp>
       <p:sp>
         <p:nvSpPr>
-          <p:cNvPr id="9" name="Text 7"/>
+          <p:cNvPr id="8" name="Text 6"/>
           <p:cNvSpPr/>
           <p:nvPr/>
         </p:nvSpPr>
@@ -4411,7 +4367,7 @@
       </p:sp>
       <p:sp>
         <p:nvSpPr>
-          <p:cNvPr id="10" name="Shape 8"/>
+          <p:cNvPr id="9" name="Shape 7"/>
           <p:cNvSpPr/>
           <p:nvPr/>
         </p:nvSpPr>
@@ -4435,7 +4391,7 @@
       </p:sp>
       <p:sp>
         <p:nvSpPr>
-          <p:cNvPr id="11" name="Shape 9"/>
+          <p:cNvPr id="10" name="Shape 8"/>
           <p:cNvSpPr/>
           <p:nvPr/>
         </p:nvSpPr>
@@ -4460,7 +4416,7 @@
       </p:sp>
       <p:sp>
         <p:nvSpPr>
-          <p:cNvPr id="12" name="Text 10"/>
+          <p:cNvPr id="11" name="Text 9"/>
           <p:cNvSpPr/>
           <p:nvPr/>
         </p:nvSpPr>
@@ -4524,7 +4480,7 @@
       </p:sp>
       <p:sp>
         <p:nvSpPr>
-          <p:cNvPr id="13" name="Shape 11"/>
+          <p:cNvPr id="12" name="Shape 10"/>
           <p:cNvSpPr/>
           <p:nvPr/>
         </p:nvSpPr>
@@ -4548,7 +4504,7 @@
       </p:sp>
       <p:sp>
         <p:nvSpPr>
-          <p:cNvPr id="14" name="Shape 12"/>
+          <p:cNvPr id="13" name="Shape 11"/>
           <p:cNvSpPr/>
           <p:nvPr/>
         </p:nvSpPr>
@@ -4573,7 +4529,7 @@
       </p:sp>
       <p:sp>
         <p:nvSpPr>
-          <p:cNvPr id="15" name="Text 13"/>
+          <p:cNvPr id="14" name="Text 12"/>
           <p:cNvSpPr/>
           <p:nvPr/>
         </p:nvSpPr>
@@ -4637,7 +4593,7 @@
       </p:sp>
       <p:sp>
         <p:nvSpPr>
-          <p:cNvPr id="16" name="Text 14"/>
+          <p:cNvPr id="15" name="Text 13"/>
           <p:cNvSpPr/>
           <p:nvPr/>
         </p:nvSpPr>
@@ -4679,7 +4635,7 @@
       </p:sp>
       <p:sp>
         <p:nvSpPr>
-          <p:cNvPr id="17" name="Shape 15"/>
+          <p:cNvPr id="16" name="Shape 14"/>
           <p:cNvSpPr/>
           <p:nvPr/>
         </p:nvSpPr>
@@ -4706,7 +4662,7 @@
       </p:sp>
       <p:sp>
         <p:nvSpPr>
-          <p:cNvPr id="18" name="Text 16"/>
+          <p:cNvPr id="17" name="Text 15"/>
           <p:cNvSpPr/>
           <p:nvPr/>
         </p:nvSpPr>
@@ -4750,7 +4706,7 @@
       </p:sp>
       <p:sp>
         <p:nvSpPr>
-          <p:cNvPr id="19" name="Shape 17"/>
+          <p:cNvPr id="18" name="Shape 16"/>
           <p:cNvSpPr/>
           <p:nvPr/>
         </p:nvSpPr>
@@ -4777,7 +4733,7 @@
       </p:sp>
       <p:sp>
         <p:nvSpPr>
-          <p:cNvPr id="20" name="Text 18"/>
+          <p:cNvPr id="19" name="Text 17"/>
           <p:cNvSpPr/>
           <p:nvPr/>
         </p:nvSpPr>
@@ -4821,7 +4777,7 @@
       </p:sp>
       <p:sp>
         <p:nvSpPr>
-          <p:cNvPr id="21" name="Text 19"/>
+          <p:cNvPr id="20" name="Text 18"/>
           <p:cNvSpPr/>
           <p:nvPr/>
         </p:nvSpPr>
@@ -4863,7 +4819,7 @@
       </p:sp>
       <p:sp>
         <p:nvSpPr>
-          <p:cNvPr id="22" name="Shape 20"/>
+          <p:cNvPr id="21" name="Shape 19"/>
           <p:cNvSpPr/>
           <p:nvPr/>
         </p:nvSpPr>
@@ -4890,7 +4846,7 @@
       </p:sp>
       <p:sp>
         <p:nvSpPr>
-          <p:cNvPr id="23" name="Text 21"/>
+          <p:cNvPr id="22" name="Text 20"/>
           <p:cNvSpPr/>
           <p:nvPr/>
         </p:nvSpPr>
@@ -4934,7 +4890,7 @@
       </p:sp>
       <p:sp>
         <p:nvSpPr>
-          <p:cNvPr id="24" name="Shape 22"/>
+          <p:cNvPr id="23" name="Shape 21"/>
           <p:cNvSpPr/>
           <p:nvPr/>
         </p:nvSpPr>
@@ -4961,7 +4917,7 @@
       </p:sp>
       <p:sp>
         <p:nvSpPr>
-          <p:cNvPr id="25" name="Text 23"/>
+          <p:cNvPr id="24" name="Text 22"/>
           <p:cNvSpPr/>
           <p:nvPr/>
         </p:nvSpPr>
@@ -5005,7 +4961,7 @@
       </p:sp>
       <p:sp>
         <p:nvSpPr>
-          <p:cNvPr id="26" name="Text 24"/>
+          <p:cNvPr id="25" name="Text 23"/>
           <p:cNvSpPr/>
           <p:nvPr/>
         </p:nvSpPr>
@@ -5047,49 +5003,7 @@
       </p:sp>
       <p:sp>
         <p:nvSpPr>
-          <p:cNvPr id="27" name="Text 25"/>
-          <p:cNvSpPr/>
-          <p:nvPr/>
-        </p:nvSpPr>
-        <p:spPr>
-          <a:xfrm>
-            <a:off x="502920" y="6327648"/>
-            <a:ext cx="8138160" cy="137160"/>
-          </a:xfrm>
-          <a:prstGeom prst="rect">
-            <a:avLst/>
-          </a:prstGeom>
-          <a:noFill/>
-          <a:ln/>
-        </p:spPr>
-        <p:txBody>
-          <a:bodyPr wrap="square" lIns="0" tIns="0" rIns="0" bIns="0" rtlCol="0" anchor="ctr"/>
-          <a:lstStyle/>
-          <a:p>
-            <a:pPr algn="r" indent="0" marL="0">
-              <a:lnSpc>
-                <a:spcPct val="125000"/>
-              </a:lnSpc>
-              <a:buNone/>
-            </a:pPr>
-            <a:r>
-              <a:rPr lang="en-US" sz="800" i="1" dirty="0">
-                <a:solidFill>
-                  <a:srgbClr val="5A5A66"/>
-                </a:solidFill>
-                <a:latin typeface="Cambria" pitchFamily="34" charset="0"/>
-                <a:ea typeface="Cambria" pitchFamily="34" charset="-122"/>
-                <a:cs typeface="Cambria" pitchFamily="34" charset="-120"/>
-              </a:rPr>
-              <a:t>Luận văn Chương 4</a:t>
-            </a:r>
-            <a:endParaRPr lang="en-US" sz="800" dirty="0"/>
-          </a:p>
-        </p:txBody>
-      </p:sp>
-      <p:sp>
-        <p:nvSpPr>
-          <p:cNvPr id="28" name="Shape 26"/>
+          <p:cNvPr id="26" name="Shape 24"/>
           <p:cNvSpPr/>
           <p:nvPr/>
         </p:nvSpPr>
@@ -5116,7 +5030,7 @@
       </p:sp>
       <p:sp>
         <p:nvSpPr>
-          <p:cNvPr id="29" name="Shape 27"/>
+          <p:cNvPr id="27" name="Shape 25"/>
           <p:cNvSpPr/>
           <p:nvPr/>
         </p:nvSpPr>
@@ -5143,7 +5057,7 @@
       </p:sp>
       <p:sp>
         <p:nvSpPr>
-          <p:cNvPr id="30" name="Shape 28"/>
+          <p:cNvPr id="28" name="Shape 26"/>
           <p:cNvSpPr/>
           <p:nvPr/>
         </p:nvSpPr>
@@ -5170,7 +5084,7 @@
       </p:sp>
       <p:sp>
         <p:nvSpPr>
-          <p:cNvPr id="31" name="Shape 29"/>
+          <p:cNvPr id="29" name="Shape 27"/>
           <p:cNvSpPr/>
           <p:nvPr/>
         </p:nvSpPr>
@@ -5197,7 +5111,7 @@
       </p:sp>
       <p:sp>
         <p:nvSpPr>
-          <p:cNvPr id="32" name="Text 30"/>
+          <p:cNvPr id="30" name="Text 28"/>
           <p:cNvSpPr/>
           <p:nvPr/>
         </p:nvSpPr>
@@ -5239,7 +5153,7 @@
       </p:sp>
       <p:sp>
         <p:nvSpPr>
-          <p:cNvPr id="33" name="Text 31"/>
+          <p:cNvPr id="31" name="Text 29"/>
           <p:cNvSpPr/>
           <p:nvPr/>
         </p:nvSpPr>
@@ -5281,7 +5195,7 @@
       </p:sp>
       <p:sp>
         <p:nvSpPr>
-          <p:cNvPr id="34" name="Text 32"/>
+          <p:cNvPr id="32" name="Text 30"/>
           <p:cNvSpPr/>
           <p:nvPr/>
         </p:nvSpPr>
@@ -5323,7 +5237,7 @@
       </p:sp>
       <p:sp>
         <p:nvSpPr>
-          <p:cNvPr id="35" name="Text 33"/>
+          <p:cNvPr id="33" name="Text 31"/>
           <p:cNvSpPr/>
           <p:nvPr/>
         </p:nvSpPr>
@@ -5468,51 +5382,7 @@
       </p:sp>
       <p:sp>
         <p:nvSpPr>
-          <p:cNvPr id="4" name="Text 2"/>
-          <p:cNvSpPr/>
-          <p:nvPr/>
-        </p:nvSpPr>
-        <p:spPr>
-          <a:xfrm>
-            <a:off x="502920" y="603504"/>
-            <a:ext cx="8138160" cy="219456"/>
-          </a:xfrm>
-          <a:prstGeom prst="rect">
-            <a:avLst/>
-          </a:prstGeom>
-          <a:noFill/>
-          <a:ln/>
-        </p:spPr>
-        <p:txBody>
-          <a:bodyPr wrap="square" lIns="0" tIns="0" rIns="0" bIns="0" rtlCol="0" anchor="ctr">
-            <a:normAutofit/>
-          </a:bodyPr>
-          <a:lstStyle/>
-          <a:p>
-            <a:pPr indent="0" marL="0">
-              <a:lnSpc>
-                <a:spcPct val="125000"/>
-              </a:lnSpc>
-              <a:buNone/>
-            </a:pPr>
-            <a:r>
-              <a:rPr lang="en-US" sz="1260" b="1" dirty="0">
-                <a:solidFill>
-                  <a:srgbClr val="25194B"/>
-                </a:solidFill>
-                <a:latin typeface="Cambria" pitchFamily="34" charset="0"/>
-                <a:ea typeface="Cambria" pitchFamily="34" charset="-122"/>
-                <a:cs typeface="Cambria" pitchFamily="34" charset="-120"/>
-              </a:rPr>
-              <a:t>Thành phần thứ nhất: GRPO-SPICE</a:t>
-            </a:r>
-            <a:endParaRPr lang="en-US" sz="1260" dirty="0"/>
-          </a:p>
-        </p:txBody>
-      </p:sp>
-      <p:sp>
-        <p:nvSpPr>
-          <p:cNvPr id="5" name="Shape 3"/>
+          <p:cNvPr id="4" name="Shape 2"/>
           <p:cNvSpPr/>
           <p:nvPr/>
         </p:nvSpPr>
@@ -5537,7 +5407,7 @@
       </p:sp>
       <p:sp>
         <p:nvSpPr>
-          <p:cNvPr id="6" name="Text 4"/>
+          <p:cNvPr id="5" name="Text 3"/>
           <p:cNvSpPr/>
           <p:nvPr/>
         </p:nvSpPr>
@@ -5581,7 +5451,7 @@
       </p:sp>
       <p:sp>
         <p:nvSpPr>
-          <p:cNvPr id="7" name="Shape 5"/>
+          <p:cNvPr id="6" name="Shape 4"/>
           <p:cNvSpPr/>
           <p:nvPr/>
         </p:nvSpPr>
@@ -5605,7 +5475,7 @@
       </p:sp>
       <p:sp>
         <p:nvSpPr>
-          <p:cNvPr id="8" name="Shape 6"/>
+          <p:cNvPr id="7" name="Shape 5"/>
           <p:cNvSpPr/>
           <p:nvPr/>
         </p:nvSpPr>
@@ -5630,7 +5500,7 @@
       </p:sp>
       <p:sp>
         <p:nvSpPr>
-          <p:cNvPr id="9" name="Text 7"/>
+          <p:cNvPr id="8" name="Text 6"/>
           <p:cNvSpPr/>
           <p:nvPr/>
         </p:nvSpPr>
@@ -5694,7 +5564,7 @@
       </p:sp>
       <p:sp>
         <p:nvSpPr>
-          <p:cNvPr id="10" name="Shape 8"/>
+          <p:cNvPr id="9" name="Shape 7"/>
           <p:cNvSpPr/>
           <p:nvPr/>
         </p:nvSpPr>
@@ -5718,7 +5588,7 @@
       </p:sp>
       <p:sp>
         <p:nvSpPr>
-          <p:cNvPr id="11" name="Shape 9"/>
+          <p:cNvPr id="10" name="Shape 8"/>
           <p:cNvSpPr/>
           <p:nvPr/>
         </p:nvSpPr>
@@ -5743,7 +5613,7 @@
       </p:sp>
       <p:sp>
         <p:nvSpPr>
-          <p:cNvPr id="12" name="Text 10"/>
+          <p:cNvPr id="11" name="Text 9"/>
           <p:cNvSpPr/>
           <p:nvPr/>
         </p:nvSpPr>
@@ -5807,7 +5677,7 @@
       </p:sp>
       <p:sp>
         <p:nvSpPr>
-          <p:cNvPr id="13" name="Shape 11"/>
+          <p:cNvPr id="12" name="Shape 10"/>
           <p:cNvSpPr/>
           <p:nvPr/>
         </p:nvSpPr>
@@ -5831,7 +5701,7 @@
       </p:sp>
       <p:sp>
         <p:nvSpPr>
-          <p:cNvPr id="14" name="Shape 12"/>
+          <p:cNvPr id="13" name="Shape 11"/>
           <p:cNvSpPr/>
           <p:nvPr/>
         </p:nvSpPr>
@@ -5856,7 +5726,7 @@
       </p:sp>
       <p:sp>
         <p:nvSpPr>
-          <p:cNvPr id="15" name="Text 13"/>
+          <p:cNvPr id="14" name="Text 12"/>
           <p:cNvSpPr/>
           <p:nvPr/>
         </p:nvSpPr>
@@ -5920,7 +5790,7 @@
       </p:sp>
       <p:sp>
         <p:nvSpPr>
-          <p:cNvPr id="16" name="Shape 14"/>
+          <p:cNvPr id="15" name="Shape 13"/>
           <p:cNvSpPr/>
           <p:nvPr/>
         </p:nvSpPr>
@@ -5945,7 +5815,7 @@
       </p:sp>
       <p:sp>
         <p:nvSpPr>
-          <p:cNvPr id="17" name="Text 15"/>
+          <p:cNvPr id="16" name="Text 14"/>
           <p:cNvSpPr/>
           <p:nvPr/>
         </p:nvSpPr>
@@ -5987,7 +5857,7 @@
       </p:sp>
       <p:sp>
         <p:nvSpPr>
-          <p:cNvPr id="18" name="Text 16"/>
+          <p:cNvPr id="17" name="Text 15"/>
           <p:cNvSpPr/>
           <p:nvPr/>
         </p:nvSpPr>
@@ -6031,7 +5901,7 @@
       </p:sp>
       <p:sp>
         <p:nvSpPr>
-          <p:cNvPr id="19" name="Text 17"/>
+          <p:cNvPr id="18" name="Text 16"/>
           <p:cNvSpPr/>
           <p:nvPr/>
         </p:nvSpPr>
@@ -6073,49 +5943,7 @@
       </p:sp>
       <p:sp>
         <p:nvSpPr>
-          <p:cNvPr id="20" name="Text 18"/>
-          <p:cNvSpPr/>
-          <p:nvPr/>
-        </p:nvSpPr>
-        <p:spPr>
-          <a:xfrm>
-            <a:off x="502920" y="6327648"/>
-            <a:ext cx="8138160" cy="137160"/>
-          </a:xfrm>
-          <a:prstGeom prst="rect">
-            <a:avLst/>
-          </a:prstGeom>
-          <a:noFill/>
-          <a:ln/>
-        </p:spPr>
-        <p:txBody>
-          <a:bodyPr wrap="square" lIns="0" tIns="0" rIns="0" bIns="0" rtlCol="0" anchor="ctr"/>
-          <a:lstStyle/>
-          <a:p>
-            <a:pPr algn="r" indent="0" marL="0">
-              <a:lnSpc>
-                <a:spcPct val="125000"/>
-              </a:lnSpc>
-              <a:buNone/>
-            </a:pPr>
-            <a:r>
-              <a:rPr lang="en-US" sz="800" i="1" dirty="0">
-                <a:solidFill>
-                  <a:srgbClr val="5A5A66"/>
-                </a:solidFill>
-                <a:latin typeface="Cambria" pitchFamily="34" charset="0"/>
-                <a:ea typeface="Cambria" pitchFamily="34" charset="-122"/>
-                <a:cs typeface="Cambria" pitchFamily="34" charset="-120"/>
-              </a:rPr>
-              <a:t>Luận văn §4.5</a:t>
-            </a:r>
-            <a:endParaRPr lang="en-US" sz="800" dirty="0"/>
-          </a:p>
-        </p:txBody>
-      </p:sp>
-      <p:sp>
-        <p:nvSpPr>
-          <p:cNvPr id="21" name="Shape 19"/>
+          <p:cNvPr id="19" name="Shape 17"/>
           <p:cNvSpPr/>
           <p:nvPr/>
         </p:nvSpPr>
@@ -6142,7 +5970,7 @@
       </p:sp>
       <p:sp>
         <p:nvSpPr>
-          <p:cNvPr id="22" name="Shape 20"/>
+          <p:cNvPr id="20" name="Shape 18"/>
           <p:cNvSpPr/>
           <p:nvPr/>
         </p:nvSpPr>
@@ -6169,7 +5997,7 @@
       </p:sp>
       <p:sp>
         <p:nvSpPr>
-          <p:cNvPr id="23" name="Shape 21"/>
+          <p:cNvPr id="21" name="Shape 19"/>
           <p:cNvSpPr/>
           <p:nvPr/>
         </p:nvSpPr>
@@ -6196,7 +6024,7 @@
       </p:sp>
       <p:sp>
         <p:nvSpPr>
-          <p:cNvPr id="24" name="Shape 22"/>
+          <p:cNvPr id="22" name="Shape 20"/>
           <p:cNvSpPr/>
           <p:nvPr/>
         </p:nvSpPr>
@@ -6223,7 +6051,7 @@
       </p:sp>
       <p:sp>
         <p:nvSpPr>
-          <p:cNvPr id="25" name="Text 23"/>
+          <p:cNvPr id="23" name="Text 21"/>
           <p:cNvSpPr/>
           <p:nvPr/>
         </p:nvSpPr>
@@ -6265,7 +6093,7 @@
       </p:sp>
       <p:sp>
         <p:nvSpPr>
-          <p:cNvPr id="26" name="Text 24"/>
+          <p:cNvPr id="24" name="Text 22"/>
           <p:cNvSpPr/>
           <p:nvPr/>
         </p:nvSpPr>
@@ -6307,7 +6135,7 @@
       </p:sp>
       <p:sp>
         <p:nvSpPr>
-          <p:cNvPr id="27" name="Text 25"/>
+          <p:cNvPr id="25" name="Text 23"/>
           <p:cNvSpPr/>
           <p:nvPr/>
         </p:nvSpPr>
@@ -6349,7 +6177,7 @@
       </p:sp>
       <p:sp>
         <p:nvSpPr>
-          <p:cNvPr id="28" name="Text 26"/>
+          <p:cNvPr id="26" name="Text 24"/>
           <p:cNvSpPr/>
           <p:nvPr/>
         </p:nvSpPr>
@@ -6500,8 +6328,8 @@
         </p:nvSpPr>
         <p:spPr>
           <a:xfrm>
-            <a:off x="502920" y="603504"/>
-            <a:ext cx="8138160" cy="219456"/>
+            <a:off x="502920" y="868680"/>
+            <a:ext cx="8138160" cy="502920"/>
           </a:xfrm>
           <a:prstGeom prst="rect">
             <a:avLst/>
@@ -6515,14 +6343,14 @@
           </a:bodyPr>
           <a:lstStyle/>
           <a:p>
-            <a:pPr indent="0" marL="0">
-              <a:lnSpc>
-                <a:spcPct val="125000"/>
-              </a:lnSpc>
-              <a:buNone/>
-            </a:pPr>
-            <a:r>
-              <a:rPr lang="en-US" sz="1260" b="1" dirty="0">
+            <a:pPr algn="ctr" indent="0" marL="0">
+              <a:lnSpc>
+                <a:spcPct val="125000"/>
+              </a:lnSpc>
+              <a:buNone/>
+            </a:pPr>
+            <a:r>
+              <a:rPr lang="en-US" sz="1630" b="1" dirty="0">
                 <a:solidFill>
                   <a:srgbClr val="25194B"/>
                 </a:solidFill>
@@ -6530,9 +6358,9 @@
                 <a:ea typeface="Cambria" pitchFamily="34" charset="-122"/>
                 <a:cs typeface="Cambria" pitchFamily="34" charset="-120"/>
               </a:rPr>
-              <a:t>Vai trò của tín hiệu SPICE</a:t>
-            </a:r>
-            <a:endParaRPr lang="en-US" sz="1260" dirty="0"/>
+              <a:t>Nhánh đối chứng dùng cùng cấu hình huấn luyện nhưng không giữ đúng tín hiệu SPICE.</a:t>
+            </a:r>
+            <a:endParaRPr lang="en-US" sz="1630" dirty="0"/>
           </a:p>
         </p:txBody>
       </p:sp>
@@ -6544,8 +6372,50 @@
         </p:nvSpPr>
         <p:spPr>
           <a:xfrm>
-            <a:off x="502920" y="868680"/>
-            <a:ext cx="8138160" cy="502920"/>
+            <a:off x="713232" y="1664208"/>
+            <a:ext cx="2240280" cy="502920"/>
+          </a:xfrm>
+          <a:prstGeom prst="rect">
+            <a:avLst/>
+          </a:prstGeom>
+          <a:noFill/>
+          <a:ln/>
+        </p:spPr>
+        <p:txBody>
+          <a:bodyPr wrap="square" lIns="0" tIns="0" rIns="0" bIns="0" rtlCol="0" anchor="ctr"/>
+          <a:lstStyle/>
+          <a:p>
+            <a:pPr algn="ctr" indent="0" marL="0">
+              <a:lnSpc>
+                <a:spcPct val="125000"/>
+              </a:lnSpc>
+              <a:buNone/>
+            </a:pPr>
+            <a:r>
+              <a:rPr lang="en-US" sz="2400" b="1" dirty="0">
+                <a:solidFill>
+                  <a:srgbClr val="7A7099"/>
+                </a:solidFill>
+                <a:latin typeface="Cambria" pitchFamily="34" charset="0"/>
+                <a:ea typeface="Cambria" pitchFamily="34" charset="-122"/>
+                <a:cs typeface="Cambria" pitchFamily="34" charset="-120"/>
+              </a:rPr>
+              <a:t>59,11%</a:t>
+            </a:r>
+            <a:endParaRPr lang="en-US" sz="2400" dirty="0"/>
+          </a:p>
+        </p:txBody>
+      </p:sp>
+      <p:sp>
+        <p:nvSpPr>
+          <p:cNvPr id="6" name="Text 4"/>
+          <p:cNvSpPr/>
+          <p:nvPr/>
+        </p:nvSpPr>
+        <p:spPr>
+          <a:xfrm>
+            <a:off x="713232" y="2194560"/>
+            <a:ext cx="2240280" cy="475488"/>
           </a:xfrm>
           <a:prstGeom prst="rect">
             <a:avLst/>
@@ -6566,29 +6436,29 @@
               <a:buNone/>
             </a:pPr>
             <a:r>
-              <a:rPr lang="en-US" sz="1630" b="1" dirty="0">
-                <a:solidFill>
-                  <a:srgbClr val="25194B"/>
-                </a:solidFill>
-                <a:latin typeface="Cambria" pitchFamily="34" charset="0"/>
-                <a:ea typeface="Cambria" pitchFamily="34" charset="-122"/>
-                <a:cs typeface="Cambria" pitchFamily="34" charset="-120"/>
-              </a:rPr>
-              <a:t>Nhánh đối chứng dùng cùng cấu hình huấn luyện nhưng không giữ đúng tín hiệu SPICE.</a:t>
-            </a:r>
-            <a:endParaRPr lang="en-US" sz="1630" dirty="0"/>
-          </a:p>
-        </p:txBody>
-      </p:sp>
-      <p:sp>
-        <p:nvSpPr>
-          <p:cNvPr id="6" name="Text 4"/>
-          <p:cNvSpPr/>
-          <p:nvPr/>
-        </p:nvSpPr>
-        <p:spPr>
-          <a:xfrm>
-            <a:off x="713232" y="1664208"/>
+              <a:rPr lang="en-US" sz="1250" b="1" dirty="0">
+                <a:solidFill>
+                  <a:srgbClr val="1A1A1A"/>
+                </a:solidFill>
+                <a:latin typeface="Cambria" pitchFamily="34" charset="0"/>
+                <a:ea typeface="Cambria" pitchFamily="34" charset="-122"/>
+                <a:cs typeface="Cambria" pitchFamily="34" charset="-120"/>
+              </a:rPr>
+              <a:t>S1</a:t>
+            </a:r>
+            <a:endParaRPr lang="en-US" sz="1250" dirty="0"/>
+          </a:p>
+        </p:txBody>
+      </p:sp>
+      <p:sp>
+        <p:nvSpPr>
+          <p:cNvPr id="7" name="Text 5"/>
+          <p:cNvSpPr/>
+          <p:nvPr/>
+        </p:nvSpPr>
+        <p:spPr>
+          <a:xfrm>
+            <a:off x="3456432" y="1664208"/>
             <a:ext cx="2240280" cy="502920"/>
           </a:xfrm>
           <a:prstGeom prst="rect">
@@ -6624,13 +6494,13 @@
       </p:sp>
       <p:sp>
         <p:nvSpPr>
-          <p:cNvPr id="7" name="Text 5"/>
-          <p:cNvSpPr/>
-          <p:nvPr/>
-        </p:nvSpPr>
-        <p:spPr>
-          <a:xfrm>
-            <a:off x="713232" y="2194560"/>
+          <p:cNvPr id="8" name="Text 6"/>
+          <p:cNvSpPr/>
+          <p:nvPr/>
+        </p:nvSpPr>
+        <p:spPr>
+          <a:xfrm>
+            <a:off x="3456432" y="2194560"/>
             <a:ext cx="2240280" cy="475488"/>
           </a:xfrm>
           <a:prstGeom prst="rect">
@@ -6660,7 +6530,7 @@
                 <a:ea typeface="Cambria" pitchFamily="34" charset="-122"/>
                 <a:cs typeface="Cambria" pitchFamily="34" charset="-120"/>
               </a:rPr>
-              <a:t>S1</a:t>
+              <a:t>GRPO · đối chứng</a:t>
             </a:r>
             <a:endParaRPr lang="en-US" sz="1250" dirty="0"/>
           </a:p>
@@ -6668,13 +6538,13 @@
       </p:sp>
       <p:sp>
         <p:nvSpPr>
-          <p:cNvPr id="8" name="Text 6"/>
-          <p:cNvSpPr/>
-          <p:nvPr/>
-        </p:nvSpPr>
-        <p:spPr>
-          <a:xfrm>
-            <a:off x="3456432" y="1664208"/>
+          <p:cNvPr id="9" name="Text 7"/>
+          <p:cNvSpPr/>
+          <p:nvPr/>
+        </p:nvSpPr>
+        <p:spPr>
+          <a:xfrm>
+            <a:off x="6199632" y="1664208"/>
             <a:ext cx="2240280" cy="502920"/>
           </a:xfrm>
           <a:prstGeom prst="rect">
@@ -6696,13 +6566,13 @@
             <a:r>
               <a:rPr lang="en-US" sz="2400" b="1" dirty="0">
                 <a:solidFill>
-                  <a:srgbClr val="7A7099"/>
-                </a:solidFill>
-                <a:latin typeface="Cambria" pitchFamily="34" charset="0"/>
-                <a:ea typeface="Cambria" pitchFamily="34" charset="-122"/>
-                <a:cs typeface="Cambria" pitchFamily="34" charset="-120"/>
-              </a:rPr>
-              <a:t>59,11%</a:t>
+                  <a:srgbClr val="4F417A"/>
+                </a:solidFill>
+                <a:latin typeface="Cambria" pitchFamily="34" charset="0"/>
+                <a:ea typeface="Cambria" pitchFamily="34" charset="-122"/>
+                <a:cs typeface="Cambria" pitchFamily="34" charset="-120"/>
+              </a:rPr>
+              <a:t>60,65%</a:t>
             </a:r>
             <a:endParaRPr lang="en-US" sz="2400" dirty="0"/>
           </a:p>
@@ -6710,13 +6580,13 @@
       </p:sp>
       <p:sp>
         <p:nvSpPr>
-          <p:cNvPr id="9" name="Text 7"/>
-          <p:cNvSpPr/>
-          <p:nvPr/>
-        </p:nvSpPr>
-        <p:spPr>
-          <a:xfrm>
-            <a:off x="3456432" y="2194560"/>
+          <p:cNvPr id="10" name="Text 8"/>
+          <p:cNvSpPr/>
+          <p:nvPr/>
+        </p:nvSpPr>
+        <p:spPr>
+          <a:xfrm>
+            <a:off x="6199632" y="2194560"/>
             <a:ext cx="2240280" cy="475488"/>
           </a:xfrm>
           <a:prstGeom prst="rect">
@@ -6746,7 +6616,7 @@
                 <a:ea typeface="Cambria" pitchFamily="34" charset="-122"/>
                 <a:cs typeface="Cambria" pitchFamily="34" charset="-120"/>
               </a:rPr>
-              <a:t>GRPO · đối chứng</a:t>
+              <a:t>GRPO-SPICE</a:t>
             </a:r>
             <a:endParaRPr lang="en-US" sz="1250" dirty="0"/>
           </a:p>
@@ -6754,93 +6624,7 @@
       </p:sp>
       <p:sp>
         <p:nvSpPr>
-          <p:cNvPr id="10" name="Text 8"/>
-          <p:cNvSpPr/>
-          <p:nvPr/>
-        </p:nvSpPr>
-        <p:spPr>
-          <a:xfrm>
-            <a:off x="6199632" y="1664208"/>
-            <a:ext cx="2240280" cy="502920"/>
-          </a:xfrm>
-          <a:prstGeom prst="rect">
-            <a:avLst/>
-          </a:prstGeom>
-          <a:noFill/>
-          <a:ln/>
-        </p:spPr>
-        <p:txBody>
-          <a:bodyPr wrap="square" lIns="0" tIns="0" rIns="0" bIns="0" rtlCol="0" anchor="ctr"/>
-          <a:lstStyle/>
-          <a:p>
-            <a:pPr algn="ctr" indent="0" marL="0">
-              <a:lnSpc>
-                <a:spcPct val="125000"/>
-              </a:lnSpc>
-              <a:buNone/>
-            </a:pPr>
-            <a:r>
-              <a:rPr lang="en-US" sz="2400" b="1" dirty="0">
-                <a:solidFill>
-                  <a:srgbClr val="4F417A"/>
-                </a:solidFill>
-                <a:latin typeface="Cambria" pitchFamily="34" charset="0"/>
-                <a:ea typeface="Cambria" pitchFamily="34" charset="-122"/>
-                <a:cs typeface="Cambria" pitchFamily="34" charset="-120"/>
-              </a:rPr>
-              <a:t>60,65%</a:t>
-            </a:r>
-            <a:endParaRPr lang="en-US" sz="2400" dirty="0"/>
-          </a:p>
-        </p:txBody>
-      </p:sp>
-      <p:sp>
-        <p:nvSpPr>
-          <p:cNvPr id="11" name="Text 9"/>
-          <p:cNvSpPr/>
-          <p:nvPr/>
-        </p:nvSpPr>
-        <p:spPr>
-          <a:xfrm>
-            <a:off x="6199632" y="2194560"/>
-            <a:ext cx="2240280" cy="475488"/>
-          </a:xfrm>
-          <a:prstGeom prst="rect">
-            <a:avLst/>
-          </a:prstGeom>
-          <a:noFill/>
-          <a:ln/>
-        </p:spPr>
-        <p:txBody>
-          <a:bodyPr wrap="square" lIns="0" tIns="0" rIns="0" bIns="0" rtlCol="0" anchor="ctr">
-            <a:normAutofit/>
-          </a:bodyPr>
-          <a:lstStyle/>
-          <a:p>
-            <a:pPr algn="ctr" indent="0" marL="0">
-              <a:lnSpc>
-                <a:spcPct val="125000"/>
-              </a:lnSpc>
-              <a:buNone/>
-            </a:pPr>
-            <a:r>
-              <a:rPr lang="en-US" sz="1250" b="1" dirty="0">
-                <a:solidFill>
-                  <a:srgbClr val="1A1A1A"/>
-                </a:solidFill>
-                <a:latin typeface="Cambria" pitchFamily="34" charset="0"/>
-                <a:ea typeface="Cambria" pitchFamily="34" charset="-122"/>
-                <a:cs typeface="Cambria" pitchFamily="34" charset="-120"/>
-              </a:rPr>
-              <a:t>GRPO-SPICE</a:t>
-            </a:r>
-            <a:endParaRPr lang="en-US" sz="1250" dirty="0"/>
-          </a:p>
-        </p:txBody>
-      </p:sp>
-      <p:sp>
-        <p:nvSpPr>
-          <p:cNvPr id="12" name="Shape 10"/>
+          <p:cNvPr id="11" name="Shape 9"/>
           <p:cNvSpPr/>
           <p:nvPr/>
         </p:nvSpPr>
@@ -6864,7 +6648,7 @@
       </p:sp>
       <p:sp>
         <p:nvSpPr>
-          <p:cNvPr id="13" name="Shape 11"/>
+          <p:cNvPr id="12" name="Shape 10"/>
           <p:cNvSpPr/>
           <p:nvPr/>
         </p:nvSpPr>
@@ -6889,7 +6673,7 @@
       </p:sp>
       <p:sp>
         <p:nvSpPr>
-          <p:cNvPr id="14" name="Text 12"/>
+          <p:cNvPr id="13" name="Text 11"/>
           <p:cNvSpPr/>
           <p:nvPr/>
         </p:nvSpPr>
@@ -6931,7 +6715,7 @@
       </p:sp>
       <p:sp>
         <p:nvSpPr>
-          <p:cNvPr id="15" name="Text 13"/>
+          <p:cNvPr id="14" name="Text 12"/>
           <p:cNvSpPr/>
           <p:nvPr/>
         </p:nvSpPr>
@@ -6973,7 +6757,7 @@
       </p:sp>
       <p:sp>
         <p:nvSpPr>
-          <p:cNvPr id="16" name="Text 14"/>
+          <p:cNvPr id="15" name="Text 13"/>
           <p:cNvSpPr/>
           <p:nvPr/>
         </p:nvSpPr>
@@ -7015,49 +6799,7 @@
       </p:sp>
       <p:sp>
         <p:nvSpPr>
-          <p:cNvPr id="17" name="Text 15"/>
-          <p:cNvSpPr/>
-          <p:nvPr/>
-        </p:nvSpPr>
-        <p:spPr>
-          <a:xfrm>
-            <a:off x="502920" y="6327648"/>
-            <a:ext cx="8138160" cy="137160"/>
-          </a:xfrm>
-          <a:prstGeom prst="rect">
-            <a:avLst/>
-          </a:prstGeom>
-          <a:noFill/>
-          <a:ln/>
-        </p:spPr>
-        <p:txBody>
-          <a:bodyPr wrap="square" lIns="0" tIns="0" rIns="0" bIns="0" rtlCol="0" anchor="ctr"/>
-          <a:lstStyle/>
-          <a:p>
-            <a:pPr algn="r" indent="0" marL="0">
-              <a:lnSpc>
-                <a:spcPct val="125000"/>
-              </a:lnSpc>
-              <a:buNone/>
-            </a:pPr>
-            <a:r>
-              <a:rPr lang="en-US" sz="800" i="1" dirty="0">
-                <a:solidFill>
-                  <a:srgbClr val="5A5A66"/>
-                </a:solidFill>
-                <a:latin typeface="Cambria" pitchFamily="34" charset="0"/>
-                <a:ea typeface="Cambria" pitchFamily="34" charset="-122"/>
-                <a:cs typeface="Cambria" pitchFamily="34" charset="-120"/>
-              </a:rPr>
-              <a:t>Luận văn §6.2–§6.5</a:t>
-            </a:r>
-            <a:endParaRPr lang="en-US" sz="800" dirty="0"/>
-          </a:p>
-        </p:txBody>
-      </p:sp>
-      <p:sp>
-        <p:nvSpPr>
-          <p:cNvPr id="18" name="Shape 16"/>
+          <p:cNvPr id="16" name="Shape 14"/>
           <p:cNvSpPr/>
           <p:nvPr/>
         </p:nvSpPr>
@@ -7084,7 +6826,7 @@
       </p:sp>
       <p:sp>
         <p:nvSpPr>
-          <p:cNvPr id="19" name="Shape 17"/>
+          <p:cNvPr id="17" name="Shape 15"/>
           <p:cNvSpPr/>
           <p:nvPr/>
         </p:nvSpPr>
@@ -7111,7 +6853,7 @@
       </p:sp>
       <p:sp>
         <p:nvSpPr>
-          <p:cNvPr id="20" name="Shape 18"/>
+          <p:cNvPr id="18" name="Shape 16"/>
           <p:cNvSpPr/>
           <p:nvPr/>
         </p:nvSpPr>
@@ -7138,7 +6880,7 @@
       </p:sp>
       <p:sp>
         <p:nvSpPr>
-          <p:cNvPr id="21" name="Shape 19"/>
+          <p:cNvPr id="19" name="Shape 17"/>
           <p:cNvSpPr/>
           <p:nvPr/>
         </p:nvSpPr>
@@ -7165,7 +6907,7 @@
       </p:sp>
       <p:sp>
         <p:nvSpPr>
-          <p:cNvPr id="22" name="Text 20"/>
+          <p:cNvPr id="20" name="Text 18"/>
           <p:cNvSpPr/>
           <p:nvPr/>
         </p:nvSpPr>
@@ -7207,7 +6949,7 @@
       </p:sp>
       <p:sp>
         <p:nvSpPr>
-          <p:cNvPr id="23" name="Text 21"/>
+          <p:cNvPr id="21" name="Text 19"/>
           <p:cNvSpPr/>
           <p:nvPr/>
         </p:nvSpPr>
@@ -7249,7 +6991,7 @@
       </p:sp>
       <p:sp>
         <p:nvSpPr>
-          <p:cNvPr id="24" name="Text 22"/>
+          <p:cNvPr id="22" name="Text 20"/>
           <p:cNvSpPr/>
           <p:nvPr/>
         </p:nvSpPr>
@@ -7291,7 +7033,7 @@
       </p:sp>
       <p:sp>
         <p:nvSpPr>
-          <p:cNvPr id="25" name="Text 23"/>
+          <p:cNvPr id="23" name="Text 21"/>
           <p:cNvSpPr/>
           <p:nvPr/>
         </p:nvSpPr>
@@ -7442,8 +7184,92 @@
         </p:nvSpPr>
         <p:spPr>
           <a:xfrm>
-            <a:off x="502920" y="603504"/>
-            <a:ext cx="8138160" cy="219456"/>
+            <a:off x="502920" y="868680"/>
+            <a:ext cx="8138160" cy="475488"/>
+          </a:xfrm>
+          <a:prstGeom prst="rect">
+            <a:avLst/>
+          </a:prstGeom>
+          <a:noFill/>
+          <a:ln/>
+        </p:spPr>
+        <p:txBody>
+          <a:bodyPr wrap="square" lIns="0" tIns="0" rIns="0" bIns="0" rtlCol="0" anchor="ctr"/>
+          <a:lstStyle/>
+          <a:p>
+            <a:pPr algn="ctr" indent="0" marL="0">
+              <a:lnSpc>
+                <a:spcPct val="125000"/>
+              </a:lnSpc>
+              <a:buNone/>
+            </a:pPr>
+            <a:r>
+              <a:rPr lang="en-US" sz="1680" b="1" dirty="0">
+                <a:solidFill>
+                  <a:srgbClr val="25194B"/>
+                </a:solidFill>
+                <a:latin typeface="Cambria" pitchFamily="34" charset="0"/>
+                <a:ea typeface="Cambria" pitchFamily="34" charset="-122"/>
+                <a:cs typeface="Cambria" pitchFamily="34" charset="-120"/>
+              </a:rPr>
+              <a:t>So với S1, GRPO-SPICE cao hơn ở toàn bộ 13 độ đo được báo cáo.</a:t>
+            </a:r>
+            <a:endParaRPr lang="en-US" sz="1680" dirty="0"/>
+          </a:p>
+        </p:txBody>
+      </p:sp>
+      <p:sp>
+        <p:nvSpPr>
+          <p:cNvPr id="5" name="Text 3"/>
+          <p:cNvSpPr/>
+          <p:nvPr/>
+        </p:nvSpPr>
+        <p:spPr>
+          <a:xfrm>
+            <a:off x="566928" y="1572768"/>
+            <a:ext cx="2057400" cy="502920"/>
+          </a:xfrm>
+          <a:prstGeom prst="rect">
+            <a:avLst/>
+          </a:prstGeom>
+          <a:noFill/>
+          <a:ln/>
+        </p:spPr>
+        <p:txBody>
+          <a:bodyPr wrap="square" lIns="0" tIns="0" rIns="0" bIns="0" rtlCol="0" anchor="ctr"/>
+          <a:lstStyle/>
+          <a:p>
+            <a:pPr algn="ctr" indent="0" marL="0">
+              <a:lnSpc>
+                <a:spcPct val="125000"/>
+              </a:lnSpc>
+              <a:buNone/>
+            </a:pPr>
+            <a:r>
+              <a:rPr lang="en-US" sz="2400" b="1" dirty="0">
+                <a:solidFill>
+                  <a:srgbClr val="4F417A"/>
+                </a:solidFill>
+                <a:latin typeface="Cambria" pitchFamily="34" charset="0"/>
+                <a:ea typeface="Cambria" pitchFamily="34" charset="-122"/>
+                <a:cs typeface="Cambria" pitchFamily="34" charset="-120"/>
+              </a:rPr>
+              <a:t>+1,55</a:t>
+            </a:r>
+            <a:endParaRPr lang="en-US" sz="2400" dirty="0"/>
+          </a:p>
+        </p:txBody>
+      </p:sp>
+      <p:sp>
+        <p:nvSpPr>
+          <p:cNvPr id="6" name="Text 4"/>
+          <p:cNvSpPr/>
+          <p:nvPr/>
+        </p:nvSpPr>
+        <p:spPr>
+          <a:xfrm>
+            <a:off x="566928" y="2103120"/>
+            <a:ext cx="2057400" cy="475488"/>
           </a:xfrm>
           <a:prstGeom prst="rect">
             <a:avLst/>
@@ -7457,37 +7283,37 @@
           </a:bodyPr>
           <a:lstStyle/>
           <a:p>
-            <a:pPr indent="0" marL="0">
-              <a:lnSpc>
-                <a:spcPct val="125000"/>
-              </a:lnSpc>
-              <a:buNone/>
-            </a:pPr>
-            <a:r>
-              <a:rPr lang="en-US" sz="1260" b="1" dirty="0">
-                <a:solidFill>
-                  <a:srgbClr val="25194B"/>
-                </a:solidFill>
-                <a:latin typeface="Cambria" pitchFamily="34" charset="0"/>
-                <a:ea typeface="Cambria" pitchFamily="34" charset="-122"/>
-                <a:cs typeface="Cambria" pitchFamily="34" charset="-120"/>
-              </a:rPr>
-              <a:t>Kết quả trên tập kiểm chính</a:t>
-            </a:r>
-            <a:endParaRPr lang="en-US" sz="1260" dirty="0"/>
-          </a:p>
-        </p:txBody>
-      </p:sp>
-      <p:sp>
-        <p:nvSpPr>
-          <p:cNvPr id="5" name="Text 3"/>
-          <p:cNvSpPr/>
-          <p:nvPr/>
-        </p:nvSpPr>
-        <p:spPr>
-          <a:xfrm>
-            <a:off x="502920" y="868680"/>
-            <a:ext cx="8138160" cy="475488"/>
+            <a:pPr algn="ctr" indent="0" marL="0">
+              <a:lnSpc>
+                <a:spcPct val="125000"/>
+              </a:lnSpc>
+              <a:buNone/>
+            </a:pPr>
+            <a:r>
+              <a:rPr lang="en-US" sz="1250" b="1" dirty="0">
+                <a:solidFill>
+                  <a:srgbClr val="1A1A1A"/>
+                </a:solidFill>
+                <a:latin typeface="Cambria" pitchFamily="34" charset="0"/>
+                <a:ea typeface="Cambria" pitchFamily="34" charset="-122"/>
+                <a:cs typeface="Cambria" pitchFamily="34" charset="-120"/>
+              </a:rPr>
+              <a:t>Executability</a:t>
+            </a:r>
+            <a:endParaRPr lang="en-US" sz="1250" dirty="0"/>
+          </a:p>
+        </p:txBody>
+      </p:sp>
+      <p:sp>
+        <p:nvSpPr>
+          <p:cNvPr id="7" name="Text 5"/>
+          <p:cNvSpPr/>
+          <p:nvPr/>
+        </p:nvSpPr>
+        <p:spPr>
+          <a:xfrm>
+            <a:off x="2706624" y="1572768"/>
+            <a:ext cx="2057400" cy="502920"/>
           </a:xfrm>
           <a:prstGeom prst="rect">
             <a:avLst/>
@@ -7506,48 +7332,6 @@
               <a:buNone/>
             </a:pPr>
             <a:r>
-              <a:rPr lang="en-US" sz="1680" b="1" dirty="0">
-                <a:solidFill>
-                  <a:srgbClr val="25194B"/>
-                </a:solidFill>
-                <a:latin typeface="Cambria" pitchFamily="34" charset="0"/>
-                <a:ea typeface="Cambria" pitchFamily="34" charset="-122"/>
-                <a:cs typeface="Cambria" pitchFamily="34" charset="-120"/>
-              </a:rPr>
-              <a:t>So với S1, GRPO-SPICE cao hơn ở toàn bộ 13 độ đo được báo cáo.</a:t>
-            </a:r>
-            <a:endParaRPr lang="en-US" sz="1680" dirty="0"/>
-          </a:p>
-        </p:txBody>
-      </p:sp>
-      <p:sp>
-        <p:nvSpPr>
-          <p:cNvPr id="6" name="Text 4"/>
-          <p:cNvSpPr/>
-          <p:nvPr/>
-        </p:nvSpPr>
-        <p:spPr>
-          <a:xfrm>
-            <a:off x="566928" y="1572768"/>
-            <a:ext cx="2057400" cy="502920"/>
-          </a:xfrm>
-          <a:prstGeom prst="rect">
-            <a:avLst/>
-          </a:prstGeom>
-          <a:noFill/>
-          <a:ln/>
-        </p:spPr>
-        <p:txBody>
-          <a:bodyPr wrap="square" lIns="0" tIns="0" rIns="0" bIns="0" rtlCol="0" anchor="ctr"/>
-          <a:lstStyle/>
-          <a:p>
-            <a:pPr algn="ctr" indent="0" marL="0">
-              <a:lnSpc>
-                <a:spcPct val="125000"/>
-              </a:lnSpc>
-              <a:buNone/>
-            </a:pPr>
-            <a:r>
               <a:rPr lang="en-US" sz="2400" b="1" dirty="0">
                 <a:solidFill>
                   <a:srgbClr val="4F417A"/>
@@ -7556,7 +7340,7 @@
                 <a:ea typeface="Cambria" pitchFamily="34" charset="-122"/>
                 <a:cs typeface="Cambria" pitchFamily="34" charset="-120"/>
               </a:rPr>
-              <a:t>+1,55</a:t>
+              <a:t>+1,52</a:t>
             </a:r>
             <a:endParaRPr lang="en-US" sz="2400" dirty="0"/>
           </a:p>
@@ -7564,13 +7348,13 @@
       </p:sp>
       <p:sp>
         <p:nvSpPr>
-          <p:cNvPr id="7" name="Text 5"/>
-          <p:cNvSpPr/>
-          <p:nvPr/>
-        </p:nvSpPr>
-        <p:spPr>
-          <a:xfrm>
-            <a:off x="566928" y="2103120"/>
+          <p:cNvPr id="8" name="Text 6"/>
+          <p:cNvSpPr/>
+          <p:nvPr/>
+        </p:nvSpPr>
+        <p:spPr>
+          <a:xfrm>
+            <a:off x="2706624" y="2103120"/>
             <a:ext cx="2057400" cy="475488"/>
           </a:xfrm>
           <a:prstGeom prst="rect">
@@ -7600,7 +7384,7 @@
                 <a:ea typeface="Cambria" pitchFamily="34" charset="-122"/>
                 <a:cs typeface="Cambria" pitchFamily="34" charset="-120"/>
               </a:rPr>
-              <a:t>Executability</a:t>
+              <a:t>Hộp phần tử</a:t>
             </a:r>
             <a:endParaRPr lang="en-US" sz="1250" dirty="0"/>
           </a:p>
@@ -7608,13 +7392,13 @@
       </p:sp>
       <p:sp>
         <p:nvSpPr>
-          <p:cNvPr id="8" name="Text 6"/>
-          <p:cNvSpPr/>
-          <p:nvPr/>
-        </p:nvSpPr>
-        <p:spPr>
-          <a:xfrm>
-            <a:off x="2706624" y="1572768"/>
+          <p:cNvPr id="9" name="Text 7"/>
+          <p:cNvSpPr/>
+          <p:nvPr/>
+        </p:nvSpPr>
+        <p:spPr>
+          <a:xfrm>
+            <a:off x="4846320" y="1572768"/>
             <a:ext cx="2057400" cy="502920"/>
           </a:xfrm>
           <a:prstGeom prst="rect">
@@ -7642,7 +7426,7 @@
                 <a:ea typeface="Cambria" pitchFamily="34" charset="-122"/>
                 <a:cs typeface="Cambria" pitchFamily="34" charset="-120"/>
               </a:rPr>
-              <a:t>+1,52</a:t>
+              <a:t>+1,88</a:t>
             </a:r>
             <a:endParaRPr lang="en-US" sz="2400" dirty="0"/>
           </a:p>
@@ -7650,13 +7434,13 @@
       </p:sp>
       <p:sp>
         <p:nvSpPr>
-          <p:cNvPr id="9" name="Text 7"/>
-          <p:cNvSpPr/>
-          <p:nvPr/>
-        </p:nvSpPr>
-        <p:spPr>
-          <a:xfrm>
-            <a:off x="2706624" y="2103120"/>
+          <p:cNvPr id="10" name="Text 8"/>
+          <p:cNvSpPr/>
+          <p:nvPr/>
+        </p:nvSpPr>
+        <p:spPr>
+          <a:xfrm>
+            <a:off x="4846320" y="2103120"/>
             <a:ext cx="2057400" cy="475488"/>
           </a:xfrm>
           <a:prstGeom prst="rect">
@@ -7686,7 +7470,7 @@
                 <a:ea typeface="Cambria" pitchFamily="34" charset="-122"/>
                 <a:cs typeface="Cambria" pitchFamily="34" charset="-120"/>
               </a:rPr>
-              <a:t>Hộp phần tử</a:t>
+              <a:t>AitW đầy đủ</a:t>
             </a:r>
             <a:endParaRPr lang="en-US" sz="1250" dirty="0"/>
           </a:p>
@@ -7694,14 +7478,14 @@
       </p:sp>
       <p:sp>
         <p:nvSpPr>
-          <p:cNvPr id="10" name="Text 8"/>
-          <p:cNvSpPr/>
-          <p:nvPr/>
-        </p:nvSpPr>
-        <p:spPr>
-          <a:xfrm>
-            <a:off x="4846320" y="1572768"/>
-            <a:ext cx="2057400" cy="502920"/>
+          <p:cNvPr id="11" name="Text 9"/>
+          <p:cNvSpPr/>
+          <p:nvPr/>
+        </p:nvSpPr>
+        <p:spPr>
+          <a:xfrm>
+            <a:off x="6986016" y="1572768"/>
+            <a:ext cx="1627632" cy="502920"/>
           </a:xfrm>
           <a:prstGeom prst="rect">
             <a:avLst/>
@@ -7722,13 +7506,13 @@
             <a:r>
               <a:rPr lang="en-US" sz="2400" b="1" dirty="0">
                 <a:solidFill>
-                  <a:srgbClr val="4F417A"/>
-                </a:solidFill>
-                <a:latin typeface="Cambria" pitchFamily="34" charset="0"/>
-                <a:ea typeface="Cambria" pitchFamily="34" charset="-122"/>
-                <a:cs typeface="Cambria" pitchFamily="34" charset="-120"/>
-              </a:rPr>
-              <a:t>+1,88</a:t>
+                  <a:srgbClr val="7A7099"/>
+                </a:solidFill>
+                <a:latin typeface="Cambria" pitchFamily="34" charset="0"/>
+                <a:ea typeface="Cambria" pitchFamily="34" charset="-122"/>
+                <a:cs typeface="Cambria" pitchFamily="34" charset="-120"/>
+              </a:rPr>
+              <a:t>7/7</a:t>
             </a:r>
             <a:endParaRPr lang="en-US" sz="2400" dirty="0"/>
           </a:p>
@@ -7736,14 +7520,14 @@
       </p:sp>
       <p:sp>
         <p:nvSpPr>
-          <p:cNvPr id="11" name="Text 9"/>
-          <p:cNvSpPr/>
-          <p:nvPr/>
-        </p:nvSpPr>
-        <p:spPr>
-          <a:xfrm>
-            <a:off x="4846320" y="2103120"/>
-            <a:ext cx="2057400" cy="475488"/>
+          <p:cNvPr id="12" name="Text 10"/>
+          <p:cNvSpPr/>
+          <p:nvPr/>
+        </p:nvSpPr>
+        <p:spPr>
+          <a:xfrm>
+            <a:off x="6986016" y="2103120"/>
+            <a:ext cx="1627632" cy="475488"/>
           </a:xfrm>
           <a:prstGeom prst="rect">
             <a:avLst/>
@@ -7772,7 +7556,7 @@
                 <a:ea typeface="Cambria" pitchFamily="34" charset="-122"/>
                 <a:cs typeface="Cambria" pitchFamily="34" charset="-120"/>
               </a:rPr>
-              <a:t>AitW đầy đủ</a:t>
+              <a:t>chỉ số câu tăng</a:t>
             </a:r>
             <a:endParaRPr lang="en-US" sz="1250" dirty="0"/>
           </a:p>
@@ -7780,93 +7564,7 @@
       </p:sp>
       <p:sp>
         <p:nvSpPr>
-          <p:cNvPr id="12" name="Text 10"/>
-          <p:cNvSpPr/>
-          <p:nvPr/>
-        </p:nvSpPr>
-        <p:spPr>
-          <a:xfrm>
-            <a:off x="6986016" y="1572768"/>
-            <a:ext cx="1627632" cy="502920"/>
-          </a:xfrm>
-          <a:prstGeom prst="rect">
-            <a:avLst/>
-          </a:prstGeom>
-          <a:noFill/>
-          <a:ln/>
-        </p:spPr>
-        <p:txBody>
-          <a:bodyPr wrap="square" lIns="0" tIns="0" rIns="0" bIns="0" rtlCol="0" anchor="ctr"/>
-          <a:lstStyle/>
-          <a:p>
-            <a:pPr algn="ctr" indent="0" marL="0">
-              <a:lnSpc>
-                <a:spcPct val="125000"/>
-              </a:lnSpc>
-              <a:buNone/>
-            </a:pPr>
-            <a:r>
-              <a:rPr lang="en-US" sz="2400" b="1" dirty="0">
-                <a:solidFill>
-                  <a:srgbClr val="7A7099"/>
-                </a:solidFill>
-                <a:latin typeface="Cambria" pitchFamily="34" charset="0"/>
-                <a:ea typeface="Cambria" pitchFamily="34" charset="-122"/>
-                <a:cs typeface="Cambria" pitchFamily="34" charset="-120"/>
-              </a:rPr>
-              <a:t>7/7</a:t>
-            </a:r>
-            <a:endParaRPr lang="en-US" sz="2400" dirty="0"/>
-          </a:p>
-        </p:txBody>
-      </p:sp>
-      <p:sp>
-        <p:nvSpPr>
-          <p:cNvPr id="13" name="Text 11"/>
-          <p:cNvSpPr/>
-          <p:nvPr/>
-        </p:nvSpPr>
-        <p:spPr>
-          <a:xfrm>
-            <a:off x="6986016" y="2103120"/>
-            <a:ext cx="1627632" cy="475488"/>
-          </a:xfrm>
-          <a:prstGeom prst="rect">
-            <a:avLst/>
-          </a:prstGeom>
-          <a:noFill/>
-          <a:ln/>
-        </p:spPr>
-        <p:txBody>
-          <a:bodyPr wrap="square" lIns="0" tIns="0" rIns="0" bIns="0" rtlCol="0" anchor="ctr">
-            <a:normAutofit/>
-          </a:bodyPr>
-          <a:lstStyle/>
-          <a:p>
-            <a:pPr algn="ctr" indent="0" marL="0">
-              <a:lnSpc>
-                <a:spcPct val="125000"/>
-              </a:lnSpc>
-              <a:buNone/>
-            </a:pPr>
-            <a:r>
-              <a:rPr lang="en-US" sz="1250" b="1" dirty="0">
-                <a:solidFill>
-                  <a:srgbClr val="1A1A1A"/>
-                </a:solidFill>
-                <a:latin typeface="Cambria" pitchFamily="34" charset="0"/>
-                <a:ea typeface="Cambria" pitchFamily="34" charset="-122"/>
-                <a:cs typeface="Cambria" pitchFamily="34" charset="-120"/>
-              </a:rPr>
-              <a:t>chỉ số câu tăng</a:t>
-            </a:r>
-            <a:endParaRPr lang="en-US" sz="1250" dirty="0"/>
-          </a:p>
-        </p:txBody>
-      </p:sp>
-      <p:sp>
-        <p:nvSpPr>
-          <p:cNvPr id="14" name="Shape 12"/>
+          <p:cNvPr id="13" name="Shape 11"/>
           <p:cNvSpPr/>
           <p:nvPr/>
         </p:nvSpPr>
@@ -7891,7 +7589,7 @@
       </p:sp>
       <p:sp>
         <p:nvSpPr>
-          <p:cNvPr id="15" name="Text 13"/>
+          <p:cNvPr id="14" name="Text 12"/>
           <p:cNvSpPr/>
           <p:nvPr/>
         </p:nvSpPr>
@@ -7933,7 +7631,7 @@
       </p:sp>
       <p:sp>
         <p:nvSpPr>
-          <p:cNvPr id="16" name="Text 14"/>
+          <p:cNvPr id="15" name="Text 13"/>
           <p:cNvSpPr/>
           <p:nvPr/>
         </p:nvSpPr>
@@ -7977,7 +7675,7 @@
       </p:sp>
       <p:sp>
         <p:nvSpPr>
-          <p:cNvPr id="17" name="Text 15"/>
+          <p:cNvPr id="16" name="Text 14"/>
           <p:cNvSpPr/>
           <p:nvPr/>
         </p:nvSpPr>
@@ -8021,49 +7719,7 @@
       </p:sp>
       <p:sp>
         <p:nvSpPr>
-          <p:cNvPr id="18" name="Text 16"/>
-          <p:cNvSpPr/>
-          <p:nvPr/>
-        </p:nvSpPr>
-        <p:spPr>
-          <a:xfrm>
-            <a:off x="502920" y="6327648"/>
-            <a:ext cx="8138160" cy="137160"/>
-          </a:xfrm>
-          <a:prstGeom prst="rect">
-            <a:avLst/>
-          </a:prstGeom>
-          <a:noFill/>
-          <a:ln/>
-        </p:spPr>
-        <p:txBody>
-          <a:bodyPr wrap="square" lIns="0" tIns="0" rIns="0" bIns="0" rtlCol="0" anchor="ctr"/>
-          <a:lstStyle/>
-          <a:p>
-            <a:pPr algn="r" indent="0" marL="0">
-              <a:lnSpc>
-                <a:spcPct val="125000"/>
-              </a:lnSpc>
-              <a:buNone/>
-            </a:pPr>
-            <a:r>
-              <a:rPr lang="en-US" sz="800" i="1" dirty="0">
-                <a:solidFill>
-                  <a:srgbClr val="5A5A66"/>
-                </a:solidFill>
-                <a:latin typeface="Cambria" pitchFamily="34" charset="0"/>
-                <a:ea typeface="Cambria" pitchFamily="34" charset="-122"/>
-                <a:cs typeface="Cambria" pitchFamily="34" charset="-120"/>
-              </a:rPr>
-              <a:t>Luận văn §6.2, §6.5–§6.7</a:t>
-            </a:r>
-            <a:endParaRPr lang="en-US" sz="800" dirty="0"/>
-          </a:p>
-        </p:txBody>
-      </p:sp>
-      <p:sp>
-        <p:nvSpPr>
-          <p:cNvPr id="19" name="Shape 17"/>
+          <p:cNvPr id="17" name="Shape 15"/>
           <p:cNvSpPr/>
           <p:nvPr/>
         </p:nvSpPr>
@@ -8090,7 +7746,7 @@
       </p:sp>
       <p:sp>
         <p:nvSpPr>
-          <p:cNvPr id="20" name="Shape 18"/>
+          <p:cNvPr id="18" name="Shape 16"/>
           <p:cNvSpPr/>
           <p:nvPr/>
         </p:nvSpPr>
@@ -8117,7 +7773,7 @@
       </p:sp>
       <p:sp>
         <p:nvSpPr>
-          <p:cNvPr id="21" name="Shape 19"/>
+          <p:cNvPr id="19" name="Shape 17"/>
           <p:cNvSpPr/>
           <p:nvPr/>
         </p:nvSpPr>
@@ -8144,7 +7800,7 @@
       </p:sp>
       <p:sp>
         <p:nvSpPr>
-          <p:cNvPr id="22" name="Shape 20"/>
+          <p:cNvPr id="20" name="Shape 18"/>
           <p:cNvSpPr/>
           <p:nvPr/>
         </p:nvSpPr>
@@ -8171,7 +7827,7 @@
       </p:sp>
       <p:sp>
         <p:nvSpPr>
-          <p:cNvPr id="23" name="Text 21"/>
+          <p:cNvPr id="21" name="Text 19"/>
           <p:cNvSpPr/>
           <p:nvPr/>
         </p:nvSpPr>
@@ -8213,7 +7869,7 @@
       </p:sp>
       <p:sp>
         <p:nvSpPr>
-          <p:cNvPr id="24" name="Text 22"/>
+          <p:cNvPr id="22" name="Text 20"/>
           <p:cNvSpPr/>
           <p:nvPr/>
         </p:nvSpPr>
@@ -8255,7 +7911,7 @@
       </p:sp>
       <p:sp>
         <p:nvSpPr>
-          <p:cNvPr id="25" name="Text 23"/>
+          <p:cNvPr id="23" name="Text 21"/>
           <p:cNvSpPr/>
           <p:nvPr/>
         </p:nvSpPr>
@@ -8297,7 +7953,7 @@
       </p:sp>
       <p:sp>
         <p:nvSpPr>
-          <p:cNvPr id="26" name="Text 24"/>
+          <p:cNvPr id="24" name="Text 22"/>
           <p:cNvSpPr/>
           <p:nvPr/>
         </p:nvSpPr>
@@ -8448,8 +8104,92 @@
         </p:nvSpPr>
         <p:spPr>
           <a:xfrm>
-            <a:off x="502920" y="603504"/>
-            <a:ext cx="8138160" cy="219456"/>
+            <a:off x="502920" y="868680"/>
+            <a:ext cx="8138160" cy="457200"/>
+          </a:xfrm>
+          <a:prstGeom prst="rect">
+            <a:avLst/>
+          </a:prstGeom>
+          <a:noFill/>
+          <a:ln/>
+        </p:spPr>
+        <p:txBody>
+          <a:bodyPr wrap="square" lIns="0" tIns="0" rIns="0" bIns="0" rtlCol="0" anchor="ctr"/>
+          <a:lstStyle/>
+          <a:p>
+            <a:pPr algn="ctr" indent="0" marL="0">
+              <a:lnSpc>
+                <a:spcPct val="125000"/>
+              </a:lnSpc>
+              <a:buNone/>
+            </a:pPr>
+            <a:r>
+              <a:rPr lang="en-US" sz="1600" b="1" dirty="0">
+                <a:solidFill>
+                  <a:srgbClr val="25194B"/>
+                </a:solidFill>
+                <a:latin typeface="Cambria" pitchFamily="34" charset="0"/>
+                <a:ea typeface="Cambria" pitchFamily="34" charset="-122"/>
+                <a:cs typeface="Cambria" pitchFamily="34" charset="-120"/>
+              </a:rPr>
+              <a:t>ACU gồm 1.484 bước thuộc các tác vụ không xuất hiện trong tập huấn luyện của S1.</a:t>
+            </a:r>
+            <a:endParaRPr lang="en-US" sz="1600" dirty="0"/>
+          </a:p>
+        </p:txBody>
+      </p:sp>
+      <p:sp>
+        <p:nvSpPr>
+          <p:cNvPr id="5" name="Text 3"/>
+          <p:cNvSpPr/>
+          <p:nvPr/>
+        </p:nvSpPr>
+        <p:spPr>
+          <a:xfrm>
+            <a:off x="731520" y="1572768"/>
+            <a:ext cx="2286000" cy="502920"/>
+          </a:xfrm>
+          <a:prstGeom prst="rect">
+            <a:avLst/>
+          </a:prstGeom>
+          <a:noFill/>
+          <a:ln/>
+        </p:spPr>
+        <p:txBody>
+          <a:bodyPr wrap="square" lIns="0" tIns="0" rIns="0" bIns="0" rtlCol="0" anchor="ctr"/>
+          <a:lstStyle/>
+          <a:p>
+            <a:pPr algn="ctr" indent="0" marL="0">
+              <a:lnSpc>
+                <a:spcPct val="125000"/>
+              </a:lnSpc>
+              <a:buNone/>
+            </a:pPr>
+            <a:r>
+              <a:rPr lang="en-US" sz="2400" b="1" dirty="0">
+                <a:solidFill>
+                  <a:srgbClr val="4F417A"/>
+                </a:solidFill>
+                <a:latin typeface="Cambria" pitchFamily="34" charset="0"/>
+                <a:ea typeface="Cambria" pitchFamily="34" charset="-122"/>
+                <a:cs typeface="Cambria" pitchFamily="34" charset="-120"/>
+              </a:rPr>
+              <a:t>+4,58</a:t>
+            </a:r>
+            <a:endParaRPr lang="en-US" sz="2400" dirty="0"/>
+          </a:p>
+        </p:txBody>
+      </p:sp>
+      <p:sp>
+        <p:nvSpPr>
+          <p:cNvPr id="6" name="Text 4"/>
+          <p:cNvSpPr/>
+          <p:nvPr/>
+        </p:nvSpPr>
+        <p:spPr>
+          <a:xfrm>
+            <a:off x="731520" y="2103120"/>
+            <a:ext cx="2286000" cy="475488"/>
           </a:xfrm>
           <a:prstGeom prst="rect">
             <a:avLst/>
@@ -8463,37 +8203,37 @@
           </a:bodyPr>
           <a:lstStyle/>
           <a:p>
-            <a:pPr indent="0" marL="0">
-              <a:lnSpc>
-                <a:spcPct val="125000"/>
-              </a:lnSpc>
-              <a:buNone/>
-            </a:pPr>
-            <a:r>
-              <a:rPr lang="en-US" sz="1260" b="1" dirty="0">
-                <a:solidFill>
-                  <a:srgbClr val="25194B"/>
-                </a:solidFill>
-                <a:latin typeface="Cambria" pitchFamily="34" charset="0"/>
-                <a:ea typeface="Cambria" pitchFamily="34" charset="-122"/>
-                <a:cs typeface="Cambria" pitchFamily="34" charset="-120"/>
-              </a:rPr>
-              <a:t>Kết quả trên tác vụ mới (ACU)</a:t>
-            </a:r>
-            <a:endParaRPr lang="en-US" sz="1260" dirty="0"/>
-          </a:p>
-        </p:txBody>
-      </p:sp>
-      <p:sp>
-        <p:nvSpPr>
-          <p:cNvPr id="5" name="Text 3"/>
-          <p:cNvSpPr/>
-          <p:nvPr/>
-        </p:nvSpPr>
-        <p:spPr>
-          <a:xfrm>
-            <a:off x="502920" y="868680"/>
-            <a:ext cx="8138160" cy="457200"/>
+            <a:pPr algn="ctr" indent="0" marL="0">
+              <a:lnSpc>
+                <a:spcPct val="125000"/>
+              </a:lnSpc>
+              <a:buNone/>
+            </a:pPr>
+            <a:r>
+              <a:rPr lang="en-US" sz="1250" b="1" dirty="0">
+                <a:solidFill>
+                  <a:srgbClr val="1A1A1A"/>
+                </a:solidFill>
+                <a:latin typeface="Cambria" pitchFamily="34" charset="0"/>
+                <a:ea typeface="Cambria" pitchFamily="34" charset="-122"/>
+                <a:cs typeface="Cambria" pitchFamily="34" charset="-120"/>
+              </a:rPr>
+              <a:t>GRPO-SPICE − S1</a:t>
+            </a:r>
+            <a:endParaRPr lang="en-US" sz="1250" dirty="0"/>
+          </a:p>
+        </p:txBody>
+      </p:sp>
+      <p:sp>
+        <p:nvSpPr>
+          <p:cNvPr id="7" name="Text 5"/>
+          <p:cNvSpPr/>
+          <p:nvPr/>
+        </p:nvSpPr>
+        <p:spPr>
+          <a:xfrm>
+            <a:off x="3429000" y="1572768"/>
+            <a:ext cx="2286000" cy="502920"/>
           </a:xfrm>
           <a:prstGeom prst="rect">
             <a:avLst/>
@@ -8512,48 +8252,6 @@
               <a:buNone/>
             </a:pPr>
             <a:r>
-              <a:rPr lang="en-US" sz="1600" b="1" dirty="0">
-                <a:solidFill>
-                  <a:srgbClr val="25194B"/>
-                </a:solidFill>
-                <a:latin typeface="Cambria" pitchFamily="34" charset="0"/>
-                <a:ea typeface="Cambria" pitchFamily="34" charset="-122"/>
-                <a:cs typeface="Cambria" pitchFamily="34" charset="-120"/>
-              </a:rPr>
-              <a:t>ACU gồm 1.484 bước thuộc các tác vụ không xuất hiện trong tập huấn luyện của S1.</a:t>
-            </a:r>
-            <a:endParaRPr lang="en-US" sz="1600" dirty="0"/>
-          </a:p>
-        </p:txBody>
-      </p:sp>
-      <p:sp>
-        <p:nvSpPr>
-          <p:cNvPr id="6" name="Text 4"/>
-          <p:cNvSpPr/>
-          <p:nvPr/>
-        </p:nvSpPr>
-        <p:spPr>
-          <a:xfrm>
-            <a:off x="731520" y="1572768"/>
-            <a:ext cx="2286000" cy="502920"/>
-          </a:xfrm>
-          <a:prstGeom prst="rect">
-            <a:avLst/>
-          </a:prstGeom>
-          <a:noFill/>
-          <a:ln/>
-        </p:spPr>
-        <p:txBody>
-          <a:bodyPr wrap="square" lIns="0" tIns="0" rIns="0" bIns="0" rtlCol="0" anchor="ctr"/>
-          <a:lstStyle/>
-          <a:p>
-            <a:pPr algn="ctr" indent="0" marL="0">
-              <a:lnSpc>
-                <a:spcPct val="125000"/>
-              </a:lnSpc>
-              <a:buNone/>
-            </a:pPr>
-            <a:r>
               <a:rPr lang="en-US" sz="2400" b="1" dirty="0">
                 <a:solidFill>
                   <a:srgbClr val="4F417A"/>
@@ -8562,7 +8260,7 @@
                 <a:ea typeface="Cambria" pitchFamily="34" charset="-122"/>
                 <a:cs typeface="Cambria" pitchFamily="34" charset="-120"/>
               </a:rPr>
-              <a:t>+4,58</a:t>
+              <a:t>+4,04</a:t>
             </a:r>
             <a:endParaRPr lang="en-US" sz="2400" dirty="0"/>
           </a:p>
@@ -8570,13 +8268,13 @@
       </p:sp>
       <p:sp>
         <p:nvSpPr>
-          <p:cNvPr id="7" name="Text 5"/>
-          <p:cNvSpPr/>
-          <p:nvPr/>
-        </p:nvSpPr>
-        <p:spPr>
-          <a:xfrm>
-            <a:off x="731520" y="2103120"/>
+          <p:cNvPr id="8" name="Text 6"/>
+          <p:cNvSpPr/>
+          <p:nvPr/>
+        </p:nvSpPr>
+        <p:spPr>
+          <a:xfrm>
+            <a:off x="3429000" y="2103120"/>
             <a:ext cx="2286000" cy="475488"/>
           </a:xfrm>
           <a:prstGeom prst="rect">
@@ -8606,7 +8304,7 @@
                 <a:ea typeface="Cambria" pitchFamily="34" charset="-122"/>
                 <a:cs typeface="Cambria" pitchFamily="34" charset="-120"/>
               </a:rPr>
-              <a:t>GRPO-SPICE − S1</a:t>
+              <a:t>lượt GRPO thứ hai − S1</a:t>
             </a:r>
             <a:endParaRPr lang="en-US" sz="1250" dirty="0"/>
           </a:p>
@@ -8614,13 +8312,13 @@
       </p:sp>
       <p:sp>
         <p:nvSpPr>
-          <p:cNvPr id="8" name="Text 6"/>
-          <p:cNvSpPr/>
-          <p:nvPr/>
-        </p:nvSpPr>
-        <p:spPr>
-          <a:xfrm>
-            <a:off x="3429000" y="1572768"/>
+          <p:cNvPr id="9" name="Text 7"/>
+          <p:cNvSpPr/>
+          <p:nvPr/>
+        </p:nvSpPr>
+        <p:spPr>
+          <a:xfrm>
+            <a:off x="6126480" y="1572768"/>
             <a:ext cx="2286000" cy="502920"/>
           </a:xfrm>
           <a:prstGeom prst="rect">
@@ -8642,13 +8340,13 @@
             <a:r>
               <a:rPr lang="en-US" sz="2400" b="1" dirty="0">
                 <a:solidFill>
-                  <a:srgbClr val="4F417A"/>
-                </a:solidFill>
-                <a:latin typeface="Cambria" pitchFamily="34" charset="0"/>
-                <a:ea typeface="Cambria" pitchFamily="34" charset="-122"/>
-                <a:cs typeface="Cambria" pitchFamily="34" charset="-120"/>
-              </a:rPr>
-              <a:t>+4,04</a:t>
+                  <a:srgbClr val="7A7099"/>
+                </a:solidFill>
+                <a:latin typeface="Cambria" pitchFamily="34" charset="0"/>
+                <a:ea typeface="Cambria" pitchFamily="34" charset="-122"/>
+                <a:cs typeface="Cambria" pitchFamily="34" charset="-120"/>
+              </a:rPr>
+              <a:t>+4,85</a:t>
             </a:r>
             <a:endParaRPr lang="en-US" sz="2400" dirty="0"/>
           </a:p>
@@ -8656,13 +8354,13 @@
       </p:sp>
       <p:sp>
         <p:nvSpPr>
-          <p:cNvPr id="9" name="Text 7"/>
-          <p:cNvSpPr/>
-          <p:nvPr/>
-        </p:nvSpPr>
-        <p:spPr>
-          <a:xfrm>
-            <a:off x="3429000" y="2103120"/>
+          <p:cNvPr id="10" name="Text 8"/>
+          <p:cNvSpPr/>
+          <p:nvPr/>
+        </p:nvSpPr>
+        <p:spPr>
+          <a:xfrm>
+            <a:off x="6126480" y="2103120"/>
             <a:ext cx="2286000" cy="475488"/>
           </a:xfrm>
           <a:prstGeom prst="rect">
@@ -8692,7 +8390,7 @@
                 <a:ea typeface="Cambria" pitchFamily="34" charset="-122"/>
                 <a:cs typeface="Cambria" pitchFamily="34" charset="-120"/>
               </a:rPr>
-              <a:t>lượt GRPO thứ hai − S1</a:t>
+              <a:t>ACE − S1</a:t>
             </a:r>
             <a:endParaRPr lang="en-US" sz="1250" dirty="0"/>
           </a:p>
@@ -8700,56 +8398,14 @@
       </p:sp>
       <p:sp>
         <p:nvSpPr>
-          <p:cNvPr id="10" name="Text 8"/>
-          <p:cNvSpPr/>
-          <p:nvPr/>
-        </p:nvSpPr>
-        <p:spPr>
-          <a:xfrm>
-            <a:off x="6126480" y="1572768"/>
-            <a:ext cx="2286000" cy="502920"/>
-          </a:xfrm>
-          <a:prstGeom prst="rect">
-            <a:avLst/>
-          </a:prstGeom>
-          <a:noFill/>
-          <a:ln/>
-        </p:spPr>
-        <p:txBody>
-          <a:bodyPr wrap="square" lIns="0" tIns="0" rIns="0" bIns="0" rtlCol="0" anchor="ctr"/>
-          <a:lstStyle/>
-          <a:p>
-            <a:pPr algn="ctr" indent="0" marL="0">
-              <a:lnSpc>
-                <a:spcPct val="125000"/>
-              </a:lnSpc>
-              <a:buNone/>
-            </a:pPr>
-            <a:r>
-              <a:rPr lang="en-US" sz="2400" b="1" dirty="0">
-                <a:solidFill>
-                  <a:srgbClr val="7A7099"/>
-                </a:solidFill>
-                <a:latin typeface="Cambria" pitchFamily="34" charset="0"/>
-                <a:ea typeface="Cambria" pitchFamily="34" charset="-122"/>
-                <a:cs typeface="Cambria" pitchFamily="34" charset="-120"/>
-              </a:rPr>
-              <a:t>+4,85</a:t>
-            </a:r>
-            <a:endParaRPr lang="en-US" sz="2400" dirty="0"/>
-          </a:p>
-        </p:txBody>
-      </p:sp>
-      <p:sp>
-        <p:nvSpPr>
           <p:cNvPr id="11" name="Text 9"/>
           <p:cNvSpPr/>
           <p:nvPr/>
         </p:nvSpPr>
         <p:spPr>
           <a:xfrm>
-            <a:off x="6126480" y="2103120"/>
-            <a:ext cx="2286000" cy="475488"/>
+            <a:off x="502920" y="2907792"/>
+            <a:ext cx="8138160" cy="566928"/>
           </a:xfrm>
           <a:prstGeom prst="rect">
             <a:avLst/>
@@ -8770,50 +8426,6 @@
               <a:buNone/>
             </a:pPr>
             <a:r>
-              <a:rPr lang="en-US" sz="1250" b="1" dirty="0">
-                <a:solidFill>
-                  <a:srgbClr val="1A1A1A"/>
-                </a:solidFill>
-                <a:latin typeface="Cambria" pitchFamily="34" charset="0"/>
-                <a:ea typeface="Cambria" pitchFamily="34" charset="-122"/>
-                <a:cs typeface="Cambria" pitchFamily="34" charset="-120"/>
-              </a:rPr>
-              <a:t>ACE − S1</a:t>
-            </a:r>
-            <a:endParaRPr lang="en-US" sz="1250" dirty="0"/>
-          </a:p>
-        </p:txBody>
-      </p:sp>
-      <p:sp>
-        <p:nvSpPr>
-          <p:cNvPr id="12" name="Text 10"/>
-          <p:cNvSpPr/>
-          <p:nvPr/>
-        </p:nvSpPr>
-        <p:spPr>
-          <a:xfrm>
-            <a:off x="502920" y="2907792"/>
-            <a:ext cx="8138160" cy="566928"/>
-          </a:xfrm>
-          <a:prstGeom prst="rect">
-            <a:avLst/>
-          </a:prstGeom>
-          <a:noFill/>
-          <a:ln/>
-        </p:spPr>
-        <p:txBody>
-          <a:bodyPr wrap="square" lIns="0" tIns="0" rIns="0" bIns="0" rtlCol="0" anchor="ctr">
-            <a:normAutofit/>
-          </a:bodyPr>
-          <a:lstStyle/>
-          <a:p>
-            <a:pPr algn="ctr" indent="0" marL="0">
-              <a:lnSpc>
-                <a:spcPct val="125000"/>
-              </a:lnSpc>
-              <a:buNone/>
-            </a:pPr>
-            <a:r>
               <a:rPr lang="en-US" sz="1420" b="1" dirty="0">
                 <a:solidFill>
                   <a:srgbClr val="25194B"/>
@@ -8830,7 +8442,7 @@
       </p:sp>
       <p:sp>
         <p:nvSpPr>
-          <p:cNvPr id="13" name="Shape 11"/>
+          <p:cNvPr id="12" name="Shape 10"/>
           <p:cNvSpPr/>
           <p:nvPr/>
         </p:nvSpPr>
@@ -8855,7 +8467,7 @@
       </p:sp>
       <p:sp>
         <p:nvSpPr>
-          <p:cNvPr id="14" name="Text 12"/>
+          <p:cNvPr id="13" name="Text 11"/>
           <p:cNvSpPr/>
           <p:nvPr/>
         </p:nvSpPr>
@@ -8899,7 +8511,7 @@
       </p:sp>
       <p:sp>
         <p:nvSpPr>
-          <p:cNvPr id="15" name="Text 13"/>
+          <p:cNvPr id="14" name="Text 12"/>
           <p:cNvSpPr/>
           <p:nvPr/>
         </p:nvSpPr>
@@ -8941,7 +8553,7 @@
       </p:sp>
       <p:sp>
         <p:nvSpPr>
-          <p:cNvPr id="16" name="Text 14"/>
+          <p:cNvPr id="15" name="Text 13"/>
           <p:cNvSpPr/>
           <p:nvPr/>
         </p:nvSpPr>
@@ -8983,7 +8595,7 @@
       </p:sp>
       <p:sp>
         <p:nvSpPr>
-          <p:cNvPr id="17" name="Text 15"/>
+          <p:cNvPr id="16" name="Text 14"/>
           <p:cNvSpPr/>
           <p:nvPr/>
         </p:nvSpPr>
@@ -9027,49 +8639,7 @@
       </p:sp>
       <p:sp>
         <p:nvSpPr>
-          <p:cNvPr id="18" name="Text 16"/>
-          <p:cNvSpPr/>
-          <p:nvPr/>
-        </p:nvSpPr>
-        <p:spPr>
-          <a:xfrm>
-            <a:off x="502920" y="6327648"/>
-            <a:ext cx="8138160" cy="137160"/>
-          </a:xfrm>
-          <a:prstGeom prst="rect">
-            <a:avLst/>
-          </a:prstGeom>
-          <a:noFill/>
-          <a:ln/>
-        </p:spPr>
-        <p:txBody>
-          <a:bodyPr wrap="square" lIns="0" tIns="0" rIns="0" bIns="0" rtlCol="0" anchor="ctr"/>
-          <a:lstStyle/>
-          <a:p>
-            <a:pPr algn="r" indent="0" marL="0">
-              <a:lnSpc>
-                <a:spcPct val="125000"/>
-              </a:lnSpc>
-              <a:buNone/>
-            </a:pPr>
-            <a:r>
-              <a:rPr lang="en-US" sz="800" i="1" dirty="0">
-                <a:solidFill>
-                  <a:srgbClr val="5A5A66"/>
-                </a:solidFill>
-                <a:latin typeface="Cambria" pitchFamily="34" charset="0"/>
-                <a:ea typeface="Cambria" pitchFamily="34" charset="-122"/>
-                <a:cs typeface="Cambria" pitchFamily="34" charset="-120"/>
-              </a:rPr>
-              <a:t>Luận văn §6.8</a:t>
-            </a:r>
-            <a:endParaRPr lang="en-US" sz="800" dirty="0"/>
-          </a:p>
-        </p:txBody>
-      </p:sp>
-      <p:sp>
-        <p:nvSpPr>
-          <p:cNvPr id="19" name="Shape 17"/>
+          <p:cNvPr id="17" name="Shape 15"/>
           <p:cNvSpPr/>
           <p:nvPr/>
         </p:nvSpPr>
@@ -9096,7 +8666,7 @@
       </p:sp>
       <p:sp>
         <p:nvSpPr>
-          <p:cNvPr id="20" name="Shape 18"/>
+          <p:cNvPr id="18" name="Shape 16"/>
           <p:cNvSpPr/>
           <p:nvPr/>
         </p:nvSpPr>
@@ -9123,7 +8693,7 @@
       </p:sp>
       <p:sp>
         <p:nvSpPr>
-          <p:cNvPr id="21" name="Shape 19"/>
+          <p:cNvPr id="19" name="Shape 17"/>
           <p:cNvSpPr/>
           <p:nvPr/>
         </p:nvSpPr>
@@ -9150,7 +8720,7 @@
       </p:sp>
       <p:sp>
         <p:nvSpPr>
-          <p:cNvPr id="22" name="Shape 20"/>
+          <p:cNvPr id="20" name="Shape 18"/>
           <p:cNvSpPr/>
           <p:nvPr/>
         </p:nvSpPr>
@@ -9177,7 +8747,7 @@
       </p:sp>
       <p:sp>
         <p:nvSpPr>
-          <p:cNvPr id="23" name="Text 21"/>
+          <p:cNvPr id="21" name="Text 19"/>
           <p:cNvSpPr/>
           <p:nvPr/>
         </p:nvSpPr>
@@ -9219,7 +8789,7 @@
       </p:sp>
       <p:sp>
         <p:nvSpPr>
-          <p:cNvPr id="24" name="Text 22"/>
+          <p:cNvPr id="22" name="Text 20"/>
           <p:cNvSpPr/>
           <p:nvPr/>
         </p:nvSpPr>
@@ -9261,7 +8831,7 @@
       </p:sp>
       <p:sp>
         <p:nvSpPr>
-          <p:cNvPr id="25" name="Text 23"/>
+          <p:cNvPr id="23" name="Text 21"/>
           <p:cNvSpPr/>
           <p:nvPr/>
         </p:nvSpPr>
@@ -9303,7 +8873,7 @@
       </p:sp>
       <p:sp>
         <p:nvSpPr>
-          <p:cNvPr id="26" name="Text 24"/>
+          <p:cNvPr id="24" name="Text 22"/>
           <p:cNvSpPr/>
           <p:nvPr/>
         </p:nvSpPr>
@@ -9448,51 +9018,7 @@
       </p:sp>
       <p:sp>
         <p:nvSpPr>
-          <p:cNvPr id="4" name="Text 2"/>
-          <p:cNvSpPr/>
-          <p:nvPr/>
-        </p:nvSpPr>
-        <p:spPr>
-          <a:xfrm>
-            <a:off x="502920" y="603504"/>
-            <a:ext cx="8138160" cy="219456"/>
-          </a:xfrm>
-          <a:prstGeom prst="rect">
-            <a:avLst/>
-          </a:prstGeom>
-          <a:noFill/>
-          <a:ln/>
-        </p:spPr>
-        <p:txBody>
-          <a:bodyPr wrap="square" lIns="0" tIns="0" rIns="0" bIns="0" rtlCol="0" anchor="ctr">
-            <a:normAutofit/>
-          </a:bodyPr>
-          <a:lstStyle/>
-          <a:p>
-            <a:pPr indent="0" marL="0">
-              <a:lnSpc>
-                <a:spcPct val="125000"/>
-              </a:lnSpc>
-              <a:buNone/>
-            </a:pPr>
-            <a:r>
-              <a:rPr lang="en-US" sz="1260" b="1" dirty="0">
-                <a:solidFill>
-                  <a:srgbClr val="25194B"/>
-                </a:solidFill>
-                <a:latin typeface="Cambria" pitchFamily="34" charset="0"/>
-                <a:ea typeface="Cambria" pitchFamily="34" charset="-122"/>
-                <a:cs typeface="Cambria" pitchFamily="34" charset="-120"/>
-              </a:rPr>
-              <a:t>Thành phần thứ hai: ACE</a:t>
-            </a:r>
-            <a:endParaRPr lang="en-US" sz="1260" dirty="0"/>
-          </a:p>
-        </p:txBody>
-      </p:sp>
-      <p:sp>
-        <p:nvSpPr>
-          <p:cNvPr id="5" name="Shape 3"/>
+          <p:cNvPr id="4" name="Shape 2"/>
           <p:cNvSpPr/>
           <p:nvPr/>
         </p:nvSpPr>
@@ -9517,7 +9043,7 @@
       </p:sp>
       <p:sp>
         <p:nvSpPr>
-          <p:cNvPr id="6" name="Text 4"/>
+          <p:cNvPr id="5" name="Text 3"/>
           <p:cNvSpPr/>
           <p:nvPr/>
         </p:nvSpPr>
@@ -9561,7 +9087,7 @@
       </p:sp>
       <p:sp>
         <p:nvSpPr>
-          <p:cNvPr id="7" name="Shape 5"/>
+          <p:cNvPr id="6" name="Shape 4"/>
           <p:cNvSpPr/>
           <p:nvPr/>
         </p:nvSpPr>
@@ -9585,7 +9111,7 @@
       </p:sp>
       <p:sp>
         <p:nvSpPr>
-          <p:cNvPr id="8" name="Shape 6"/>
+          <p:cNvPr id="7" name="Shape 5"/>
           <p:cNvSpPr/>
           <p:nvPr/>
         </p:nvSpPr>
@@ -9610,7 +9136,7 @@
       </p:sp>
       <p:sp>
         <p:nvSpPr>
-          <p:cNvPr id="9" name="Text 7"/>
+          <p:cNvPr id="8" name="Text 6"/>
           <p:cNvSpPr/>
           <p:nvPr/>
         </p:nvSpPr>
@@ -9674,7 +9200,7 @@
       </p:sp>
       <p:sp>
         <p:nvSpPr>
-          <p:cNvPr id="10" name="Shape 8"/>
+          <p:cNvPr id="9" name="Shape 7"/>
           <p:cNvSpPr/>
           <p:nvPr/>
         </p:nvSpPr>
@@ -9698,7 +9224,7 @@
       </p:sp>
       <p:sp>
         <p:nvSpPr>
-          <p:cNvPr id="11" name="Shape 9"/>
+          <p:cNvPr id="10" name="Shape 8"/>
           <p:cNvSpPr/>
           <p:nvPr/>
         </p:nvSpPr>
@@ -9723,7 +9249,7 @@
       </p:sp>
       <p:sp>
         <p:nvSpPr>
-          <p:cNvPr id="12" name="Text 10"/>
+          <p:cNvPr id="11" name="Text 9"/>
           <p:cNvSpPr/>
           <p:nvPr/>
         </p:nvSpPr>
@@ -9787,7 +9313,7 @@
       </p:sp>
       <p:sp>
         <p:nvSpPr>
-          <p:cNvPr id="13" name="Shape 11"/>
+          <p:cNvPr id="12" name="Shape 10"/>
           <p:cNvSpPr/>
           <p:nvPr/>
         </p:nvSpPr>
@@ -9811,7 +9337,7 @@
       </p:sp>
       <p:sp>
         <p:nvSpPr>
-          <p:cNvPr id="14" name="Shape 12"/>
+          <p:cNvPr id="13" name="Shape 11"/>
           <p:cNvSpPr/>
           <p:nvPr/>
         </p:nvSpPr>
@@ -9836,7 +9362,7 @@
       </p:sp>
       <p:sp>
         <p:nvSpPr>
-          <p:cNvPr id="15" name="Text 13"/>
+          <p:cNvPr id="14" name="Text 12"/>
           <p:cNvSpPr/>
           <p:nvPr/>
         </p:nvSpPr>
@@ -9900,7 +9426,7 @@
       </p:sp>
       <p:sp>
         <p:nvSpPr>
-          <p:cNvPr id="16" name="Shape 14"/>
+          <p:cNvPr id="15" name="Shape 13"/>
           <p:cNvSpPr/>
           <p:nvPr/>
         </p:nvSpPr>
@@ -9925,7 +9451,7 @@
       </p:sp>
       <p:sp>
         <p:nvSpPr>
-          <p:cNvPr id="17" name="Text 15"/>
+          <p:cNvPr id="16" name="Text 14"/>
           <p:cNvSpPr/>
           <p:nvPr/>
         </p:nvSpPr>
@@ -9969,7 +9495,7 @@
       </p:sp>
       <p:sp>
         <p:nvSpPr>
-          <p:cNvPr id="18" name="Shape 16"/>
+          <p:cNvPr id="17" name="Shape 15"/>
           <p:cNvSpPr/>
           <p:nvPr/>
         </p:nvSpPr>
@@ -9994,7 +9520,7 @@
       </p:sp>
       <p:sp>
         <p:nvSpPr>
-          <p:cNvPr id="19" name="Text 17"/>
+          <p:cNvPr id="18" name="Text 16"/>
           <p:cNvSpPr/>
           <p:nvPr/>
         </p:nvSpPr>
@@ -10038,7 +9564,7 @@
       </p:sp>
       <p:sp>
         <p:nvSpPr>
-          <p:cNvPr id="20" name="Shape 18"/>
+          <p:cNvPr id="19" name="Shape 17"/>
           <p:cNvSpPr/>
           <p:nvPr/>
         </p:nvSpPr>
@@ -10063,7 +9589,7 @@
       </p:sp>
       <p:sp>
         <p:nvSpPr>
-          <p:cNvPr id="21" name="Text 19"/>
+          <p:cNvPr id="20" name="Text 18"/>
           <p:cNvSpPr/>
           <p:nvPr/>
         </p:nvSpPr>
@@ -10107,7 +9633,7 @@
       </p:sp>
       <p:sp>
         <p:nvSpPr>
-          <p:cNvPr id="22" name="Shape 20"/>
+          <p:cNvPr id="21" name="Shape 19"/>
           <p:cNvSpPr/>
           <p:nvPr/>
         </p:nvSpPr>
@@ -10132,7 +9658,7 @@
       </p:sp>
       <p:sp>
         <p:nvSpPr>
-          <p:cNvPr id="23" name="Text 21"/>
+          <p:cNvPr id="22" name="Text 20"/>
           <p:cNvSpPr/>
           <p:nvPr/>
         </p:nvSpPr>
@@ -10176,49 +9702,7 @@
       </p:sp>
       <p:sp>
         <p:nvSpPr>
-          <p:cNvPr id="24" name="Text 22"/>
-          <p:cNvSpPr/>
-          <p:nvPr/>
-        </p:nvSpPr>
-        <p:spPr>
-          <a:xfrm>
-            <a:off x="502920" y="6327648"/>
-            <a:ext cx="8138160" cy="137160"/>
-          </a:xfrm>
-          <a:prstGeom prst="rect">
-            <a:avLst/>
-          </a:prstGeom>
-          <a:noFill/>
-          <a:ln/>
-        </p:spPr>
-        <p:txBody>
-          <a:bodyPr wrap="square" lIns="0" tIns="0" rIns="0" bIns="0" rtlCol="0" anchor="ctr"/>
-          <a:lstStyle/>
-          <a:p>
-            <a:pPr algn="r" indent="0" marL="0">
-              <a:lnSpc>
-                <a:spcPct val="125000"/>
-              </a:lnSpc>
-              <a:buNone/>
-            </a:pPr>
-            <a:r>
-              <a:rPr lang="en-US" sz="800" i="1" dirty="0">
-                <a:solidFill>
-                  <a:srgbClr val="5A5A66"/>
-                </a:solidFill>
-                <a:latin typeface="Cambria" pitchFamily="34" charset="0"/>
-                <a:ea typeface="Cambria" pitchFamily="34" charset="-122"/>
-                <a:cs typeface="Cambria" pitchFamily="34" charset="-120"/>
-              </a:rPr>
-              <a:t>Luận văn §4.6</a:t>
-            </a:r>
-            <a:endParaRPr lang="en-US" sz="800" dirty="0"/>
-          </a:p>
-        </p:txBody>
-      </p:sp>
-      <p:sp>
-        <p:nvSpPr>
-          <p:cNvPr id="25" name="Shape 23"/>
+          <p:cNvPr id="23" name="Shape 21"/>
           <p:cNvSpPr/>
           <p:nvPr/>
         </p:nvSpPr>
@@ -10245,7 +9729,7 @@
       </p:sp>
       <p:sp>
         <p:nvSpPr>
-          <p:cNvPr id="26" name="Shape 24"/>
+          <p:cNvPr id="24" name="Shape 22"/>
           <p:cNvSpPr/>
           <p:nvPr/>
         </p:nvSpPr>
@@ -10272,7 +9756,7 @@
       </p:sp>
       <p:sp>
         <p:nvSpPr>
-          <p:cNvPr id="27" name="Shape 25"/>
+          <p:cNvPr id="25" name="Shape 23"/>
           <p:cNvSpPr/>
           <p:nvPr/>
         </p:nvSpPr>
@@ -10299,7 +9783,7 @@
       </p:sp>
       <p:sp>
         <p:nvSpPr>
-          <p:cNvPr id="28" name="Shape 26"/>
+          <p:cNvPr id="26" name="Shape 24"/>
           <p:cNvSpPr/>
           <p:nvPr/>
         </p:nvSpPr>
@@ -10326,7 +9810,7 @@
       </p:sp>
       <p:sp>
         <p:nvSpPr>
-          <p:cNvPr id="29" name="Text 27"/>
+          <p:cNvPr id="27" name="Text 25"/>
           <p:cNvSpPr/>
           <p:nvPr/>
         </p:nvSpPr>
@@ -10368,7 +9852,7 @@
       </p:sp>
       <p:sp>
         <p:nvSpPr>
-          <p:cNvPr id="30" name="Text 28"/>
+          <p:cNvPr id="28" name="Text 26"/>
           <p:cNvSpPr/>
           <p:nvPr/>
         </p:nvSpPr>
@@ -10410,7 +9894,7 @@
       </p:sp>
       <p:sp>
         <p:nvSpPr>
-          <p:cNvPr id="31" name="Text 29"/>
+          <p:cNvPr id="29" name="Text 27"/>
           <p:cNvSpPr/>
           <p:nvPr/>
         </p:nvSpPr>
@@ -10452,7 +9936,7 @@
       </p:sp>
       <p:sp>
         <p:nvSpPr>
-          <p:cNvPr id="32" name="Text 30"/>
+          <p:cNvPr id="30" name="Text 28"/>
           <p:cNvSpPr/>
           <p:nvPr/>
         </p:nvSpPr>
@@ -10603,8 +10087,50 @@
         </p:nvSpPr>
         <p:spPr>
           <a:xfrm>
-            <a:off x="502920" y="603504"/>
-            <a:ext cx="8138160" cy="219456"/>
+            <a:off x="749808" y="859536"/>
+            <a:ext cx="1783080" cy="502920"/>
+          </a:xfrm>
+          <a:prstGeom prst="rect">
+            <a:avLst/>
+          </a:prstGeom>
+          <a:noFill/>
+          <a:ln/>
+        </p:spPr>
+        <p:txBody>
+          <a:bodyPr wrap="square" lIns="0" tIns="0" rIns="0" bIns="0" rtlCol="0" anchor="ctr"/>
+          <a:lstStyle/>
+          <a:p>
+            <a:pPr algn="ctr" indent="0" marL="0">
+              <a:lnSpc>
+                <a:spcPct val="125000"/>
+              </a:lnSpc>
+              <a:buNone/>
+            </a:pPr>
+            <a:r>
+              <a:rPr lang="en-US" sz="2400" b="1" dirty="0">
+                <a:solidFill>
+                  <a:srgbClr val="25194B"/>
+                </a:solidFill>
+                <a:latin typeface="Cambria" pitchFamily="34" charset="0"/>
+                <a:ea typeface="Cambria" pitchFamily="34" charset="-122"/>
+                <a:cs typeface="Cambria" pitchFamily="34" charset="-120"/>
+              </a:rPr>
+              <a:t>60,68%</a:t>
+            </a:r>
+            <a:endParaRPr lang="en-US" sz="2400" dirty="0"/>
+          </a:p>
+        </p:txBody>
+      </p:sp>
+      <p:sp>
+        <p:nvSpPr>
+          <p:cNvPr id="5" name="Text 3"/>
+          <p:cNvSpPr/>
+          <p:nvPr/>
+        </p:nvSpPr>
+        <p:spPr>
+          <a:xfrm>
+            <a:off x="749808" y="1389888"/>
+            <a:ext cx="1783080" cy="475488"/>
           </a:xfrm>
           <a:prstGeom prst="rect">
             <a:avLst/>
@@ -10618,36 +10144,36 @@
           </a:bodyPr>
           <a:lstStyle/>
           <a:p>
-            <a:pPr indent="0" marL="0">
-              <a:lnSpc>
-                <a:spcPct val="125000"/>
-              </a:lnSpc>
-              <a:buNone/>
-            </a:pPr>
-            <a:r>
-              <a:rPr lang="en-US" sz="1260" b="1" dirty="0">
-                <a:solidFill>
-                  <a:srgbClr val="25194B"/>
-                </a:solidFill>
-                <a:latin typeface="Cambria" pitchFamily="34" charset="0"/>
-                <a:ea typeface="Cambria" pitchFamily="34" charset="-122"/>
-                <a:cs typeface="Cambria" pitchFamily="34" charset="-120"/>
-              </a:rPr>
-              <a:t>Kết quả sau ACE</a:t>
-            </a:r>
-            <a:endParaRPr lang="en-US" sz="1260" dirty="0"/>
-          </a:p>
-        </p:txBody>
-      </p:sp>
-      <p:sp>
-        <p:nvSpPr>
-          <p:cNvPr id="5" name="Text 3"/>
-          <p:cNvSpPr/>
-          <p:nvPr/>
-        </p:nvSpPr>
-        <p:spPr>
-          <a:xfrm>
-            <a:off x="749808" y="859536"/>
+            <a:pPr algn="ctr" indent="0" marL="0">
+              <a:lnSpc>
+                <a:spcPct val="125000"/>
+              </a:lnSpc>
+              <a:buNone/>
+            </a:pPr>
+            <a:r>
+              <a:rPr lang="en-US" sz="1250" b="1" dirty="0">
+                <a:solidFill>
+                  <a:srgbClr val="1A1A1A"/>
+                </a:solidFill>
+                <a:latin typeface="Cambria" pitchFamily="34" charset="0"/>
+                <a:ea typeface="Cambria" pitchFamily="34" charset="-122"/>
+                <a:cs typeface="Cambria" pitchFamily="34" charset="-120"/>
+              </a:rPr>
+              <a:t>Executability</a:t>
+            </a:r>
+            <a:endParaRPr lang="en-US" sz="1250" dirty="0"/>
+          </a:p>
+        </p:txBody>
+      </p:sp>
+      <p:sp>
+        <p:nvSpPr>
+          <p:cNvPr id="6" name="Text 4"/>
+          <p:cNvSpPr/>
+          <p:nvPr/>
+        </p:nvSpPr>
+        <p:spPr>
+          <a:xfrm>
+            <a:off x="2743200" y="859536"/>
             <a:ext cx="1783080" cy="502920"/>
           </a:xfrm>
           <a:prstGeom prst="rect">
@@ -10669,13 +10195,13 @@
             <a:r>
               <a:rPr lang="en-US" sz="2400" b="1" dirty="0">
                 <a:solidFill>
-                  <a:srgbClr val="25194B"/>
-                </a:solidFill>
-                <a:latin typeface="Cambria" pitchFamily="34" charset="0"/>
-                <a:ea typeface="Cambria" pitchFamily="34" charset="-122"/>
-                <a:cs typeface="Cambria" pitchFamily="34" charset="-120"/>
-              </a:rPr>
-              <a:t>60,68%</a:t>
+                  <a:srgbClr val="7A7099"/>
+                </a:solidFill>
+                <a:latin typeface="Cambria" pitchFamily="34" charset="0"/>
+                <a:ea typeface="Cambria" pitchFamily="34" charset="-122"/>
+                <a:cs typeface="Cambria" pitchFamily="34" charset="-120"/>
+              </a:rPr>
+              <a:t>+0,02</a:t>
             </a:r>
             <a:endParaRPr lang="en-US" sz="2400" dirty="0"/>
           </a:p>
@@ -10683,13 +10209,13 @@
       </p:sp>
       <p:sp>
         <p:nvSpPr>
-          <p:cNvPr id="6" name="Text 4"/>
-          <p:cNvSpPr/>
-          <p:nvPr/>
-        </p:nvSpPr>
-        <p:spPr>
-          <a:xfrm>
-            <a:off x="749808" y="1389888"/>
+          <p:cNvPr id="7" name="Text 5"/>
+          <p:cNvSpPr/>
+          <p:nvPr/>
+        </p:nvSpPr>
+        <p:spPr>
+          <a:xfrm>
+            <a:off x="2743200" y="1389888"/>
             <a:ext cx="1783080" cy="475488"/>
           </a:xfrm>
           <a:prstGeom prst="rect">
@@ -10719,7 +10245,7 @@
                 <a:ea typeface="Cambria" pitchFamily="34" charset="-122"/>
                 <a:cs typeface="Cambria" pitchFamily="34" charset="-120"/>
               </a:rPr>
-              <a:t>Executability</a:t>
+              <a:t>so với GRPO-SPICE</a:t>
             </a:r>
             <a:endParaRPr lang="en-US" sz="1250" dirty="0"/>
           </a:p>
@@ -10727,13 +10253,13 @@
       </p:sp>
       <p:sp>
         <p:nvSpPr>
-          <p:cNvPr id="7" name="Text 5"/>
-          <p:cNvSpPr/>
-          <p:nvPr/>
-        </p:nvSpPr>
-        <p:spPr>
-          <a:xfrm>
-            <a:off x="2743200" y="859536"/>
+          <p:cNvPr id="8" name="Text 6"/>
+          <p:cNvSpPr/>
+          <p:nvPr/>
+        </p:nvSpPr>
+        <p:spPr>
+          <a:xfrm>
+            <a:off x="4736592" y="859536"/>
             <a:ext cx="1783080" cy="502920"/>
           </a:xfrm>
           <a:prstGeom prst="rect">
@@ -10755,13 +10281,13 @@
             <a:r>
               <a:rPr lang="en-US" sz="2400" b="1" dirty="0">
                 <a:solidFill>
-                  <a:srgbClr val="7A7099"/>
-                </a:solidFill>
-                <a:latin typeface="Cambria" pitchFamily="34" charset="0"/>
-                <a:ea typeface="Cambria" pitchFamily="34" charset="-122"/>
-                <a:cs typeface="Cambria" pitchFamily="34" charset="-120"/>
-              </a:rPr>
-              <a:t>+0,02</a:t>
+                  <a:srgbClr val="4F417A"/>
+                </a:solidFill>
+                <a:latin typeface="Cambria" pitchFamily="34" charset="0"/>
+                <a:ea typeface="Cambria" pitchFamily="34" charset="-122"/>
+                <a:cs typeface="Cambria" pitchFamily="34" charset="-120"/>
+              </a:rPr>
+              <a:t>7/7</a:t>
             </a:r>
             <a:endParaRPr lang="en-US" sz="2400" dirty="0"/>
           </a:p>
@@ -10769,13 +10295,13 @@
       </p:sp>
       <p:sp>
         <p:nvSpPr>
-          <p:cNvPr id="8" name="Text 6"/>
-          <p:cNvSpPr/>
-          <p:nvPr/>
-        </p:nvSpPr>
-        <p:spPr>
-          <a:xfrm>
-            <a:off x="2743200" y="1389888"/>
+          <p:cNvPr id="9" name="Text 7"/>
+          <p:cNvSpPr/>
+          <p:nvPr/>
+        </p:nvSpPr>
+        <p:spPr>
+          <a:xfrm>
+            <a:off x="4736592" y="1389888"/>
             <a:ext cx="1783080" cy="475488"/>
           </a:xfrm>
           <a:prstGeom prst="rect">
@@ -10805,7 +10331,7 @@
                 <a:ea typeface="Cambria" pitchFamily="34" charset="-122"/>
                 <a:cs typeface="Cambria" pitchFamily="34" charset="-120"/>
               </a:rPr>
-              <a:t>so với GRPO-SPICE</a:t>
+              <a:t>chỉ số câu tăng</a:t>
             </a:r>
             <a:endParaRPr lang="en-US" sz="1250" dirty="0"/>
           </a:p>
@@ -10813,13 +10339,13 @@
       </p:sp>
       <p:sp>
         <p:nvSpPr>
-          <p:cNvPr id="9" name="Text 7"/>
-          <p:cNvSpPr/>
-          <p:nvPr/>
-        </p:nvSpPr>
-        <p:spPr>
-          <a:xfrm>
-            <a:off x="4736592" y="859536"/>
+          <p:cNvPr id="10" name="Text 8"/>
+          <p:cNvSpPr/>
+          <p:nvPr/>
+        </p:nvSpPr>
+        <p:spPr>
+          <a:xfrm>
+            <a:off x="6729984" y="859536"/>
             <a:ext cx="1783080" cy="502920"/>
           </a:xfrm>
           <a:prstGeom prst="rect">
@@ -10847,7 +10373,7 @@
                 <a:ea typeface="Cambria" pitchFamily="34" charset="-122"/>
                 <a:cs typeface="Cambria" pitchFamily="34" charset="-120"/>
               </a:rPr>
-              <a:t>7/7</a:t>
+              <a:t>6/6</a:t>
             </a:r>
             <a:endParaRPr lang="en-US" sz="2400" dirty="0"/>
           </a:p>
@@ -10855,13 +10381,13 @@
       </p:sp>
       <p:sp>
         <p:nvSpPr>
-          <p:cNvPr id="10" name="Text 8"/>
-          <p:cNvSpPr/>
-          <p:nvPr/>
-        </p:nvSpPr>
-        <p:spPr>
-          <a:xfrm>
-            <a:off x="4736592" y="1389888"/>
+          <p:cNvPr id="11" name="Text 9"/>
+          <p:cNvSpPr/>
+          <p:nvPr/>
+        </p:nvSpPr>
+        <p:spPr>
+          <a:xfrm>
+            <a:off x="6729984" y="1389888"/>
             <a:ext cx="1783080" cy="475488"/>
           </a:xfrm>
           <a:prstGeom prst="rect">
@@ -10891,7 +10417,7 @@
                 <a:ea typeface="Cambria" pitchFamily="34" charset="-122"/>
                 <a:cs typeface="Cambria" pitchFamily="34" charset="-120"/>
               </a:rPr>
-              <a:t>chỉ số câu tăng</a:t>
+              <a:t>KTC &gt; 0</a:t>
             </a:r>
             <a:endParaRPr lang="en-US" sz="1250" dirty="0"/>
           </a:p>
@@ -10899,93 +10425,7 @@
       </p:sp>
       <p:sp>
         <p:nvSpPr>
-          <p:cNvPr id="11" name="Text 9"/>
-          <p:cNvSpPr/>
-          <p:nvPr/>
-        </p:nvSpPr>
-        <p:spPr>
-          <a:xfrm>
-            <a:off x="6729984" y="859536"/>
-            <a:ext cx="1783080" cy="502920"/>
-          </a:xfrm>
-          <a:prstGeom prst="rect">
-            <a:avLst/>
-          </a:prstGeom>
-          <a:noFill/>
-          <a:ln/>
-        </p:spPr>
-        <p:txBody>
-          <a:bodyPr wrap="square" lIns="0" tIns="0" rIns="0" bIns="0" rtlCol="0" anchor="ctr"/>
-          <a:lstStyle/>
-          <a:p>
-            <a:pPr algn="ctr" indent="0" marL="0">
-              <a:lnSpc>
-                <a:spcPct val="125000"/>
-              </a:lnSpc>
-              <a:buNone/>
-            </a:pPr>
-            <a:r>
-              <a:rPr lang="en-US" sz="2400" b="1" dirty="0">
-                <a:solidFill>
-                  <a:srgbClr val="4F417A"/>
-                </a:solidFill>
-                <a:latin typeface="Cambria" pitchFamily="34" charset="0"/>
-                <a:ea typeface="Cambria" pitchFamily="34" charset="-122"/>
-                <a:cs typeface="Cambria" pitchFamily="34" charset="-120"/>
-              </a:rPr>
-              <a:t>6/6</a:t>
-            </a:r>
-            <a:endParaRPr lang="en-US" sz="2400" dirty="0"/>
-          </a:p>
-        </p:txBody>
-      </p:sp>
-      <p:sp>
-        <p:nvSpPr>
-          <p:cNvPr id="12" name="Text 10"/>
-          <p:cNvSpPr/>
-          <p:nvPr/>
-        </p:nvSpPr>
-        <p:spPr>
-          <a:xfrm>
-            <a:off x="6729984" y="1389888"/>
-            <a:ext cx="1783080" cy="475488"/>
-          </a:xfrm>
-          <a:prstGeom prst="rect">
-            <a:avLst/>
-          </a:prstGeom>
-          <a:noFill/>
-          <a:ln/>
-        </p:spPr>
-        <p:txBody>
-          <a:bodyPr wrap="square" lIns="0" tIns="0" rIns="0" bIns="0" rtlCol="0" anchor="ctr">
-            <a:normAutofit/>
-          </a:bodyPr>
-          <a:lstStyle/>
-          <a:p>
-            <a:pPr algn="ctr" indent="0" marL="0">
-              <a:lnSpc>
-                <a:spcPct val="125000"/>
-              </a:lnSpc>
-              <a:buNone/>
-            </a:pPr>
-            <a:r>
-              <a:rPr lang="en-US" sz="1250" b="1" dirty="0">
-                <a:solidFill>
-                  <a:srgbClr val="1A1A1A"/>
-                </a:solidFill>
-                <a:latin typeface="Cambria" pitchFamily="34" charset="0"/>
-                <a:ea typeface="Cambria" pitchFamily="34" charset="-122"/>
-                <a:cs typeface="Cambria" pitchFamily="34" charset="-120"/>
-              </a:rPr>
-              <a:t>KTC &gt; 0</a:t>
-            </a:r>
-            <a:endParaRPr lang="en-US" sz="1250" dirty="0"/>
-          </a:p>
-        </p:txBody>
-      </p:sp>
-      <p:sp>
-        <p:nvSpPr>
-          <p:cNvPr id="13" name="Shape 11"/>
+          <p:cNvPr id="12" name="Shape 10"/>
           <p:cNvSpPr/>
           <p:nvPr/>
         </p:nvSpPr>
@@ -11012,7 +10452,7 @@
       </p:sp>
       <p:sp>
         <p:nvSpPr>
-          <p:cNvPr id="14" name="Text 12"/>
+          <p:cNvPr id="13" name="Text 11"/>
           <p:cNvSpPr/>
           <p:nvPr/>
         </p:nvSpPr>
@@ -11056,7 +10496,7 @@
       </p:sp>
       <p:sp>
         <p:nvSpPr>
-          <p:cNvPr id="15" name="Text 13"/>
+          <p:cNvPr id="14" name="Text 12"/>
           <p:cNvSpPr/>
           <p:nvPr/>
         </p:nvSpPr>
@@ -11100,7 +10540,7 @@
       </p:sp>
       <p:sp>
         <p:nvSpPr>
-          <p:cNvPr id="16" name="Text 14"/>
+          <p:cNvPr id="15" name="Text 13"/>
           <p:cNvSpPr/>
           <p:nvPr/>
         </p:nvSpPr>
@@ -11144,7 +10584,7 @@
       </p:sp>
       <p:sp>
         <p:nvSpPr>
-          <p:cNvPr id="17" name="Text 15"/>
+          <p:cNvPr id="16" name="Text 14"/>
           <p:cNvSpPr/>
           <p:nvPr/>
         </p:nvSpPr>
@@ -11188,7 +10628,7 @@
       </p:sp>
       <p:sp>
         <p:nvSpPr>
-          <p:cNvPr id="18" name="Text 16"/>
+          <p:cNvPr id="17" name="Text 15"/>
           <p:cNvSpPr/>
           <p:nvPr/>
         </p:nvSpPr>
@@ -11232,7 +10672,7 @@
       </p:sp>
       <p:sp>
         <p:nvSpPr>
-          <p:cNvPr id="19" name="Text 17"/>
+          <p:cNvPr id="18" name="Text 16"/>
           <p:cNvSpPr/>
           <p:nvPr/>
         </p:nvSpPr>
@@ -11276,7 +10716,7 @@
       </p:sp>
       <p:sp>
         <p:nvSpPr>
-          <p:cNvPr id="20" name="Text 18"/>
+          <p:cNvPr id="19" name="Text 17"/>
           <p:cNvSpPr/>
           <p:nvPr/>
         </p:nvSpPr>
@@ -11320,7 +10760,7 @@
       </p:sp>
       <p:sp>
         <p:nvSpPr>
-          <p:cNvPr id="21" name="Text 19"/>
+          <p:cNvPr id="20" name="Text 18"/>
           <p:cNvSpPr/>
           <p:nvPr/>
         </p:nvSpPr>
@@ -11364,7 +10804,7 @@
       </p:sp>
       <p:sp>
         <p:nvSpPr>
-          <p:cNvPr id="22" name="Text 20"/>
+          <p:cNvPr id="21" name="Text 19"/>
           <p:cNvSpPr/>
           <p:nvPr/>
         </p:nvSpPr>
@@ -11408,7 +10848,7 @@
       </p:sp>
       <p:sp>
         <p:nvSpPr>
-          <p:cNvPr id="23" name="Text 21"/>
+          <p:cNvPr id="22" name="Text 20"/>
           <p:cNvSpPr/>
           <p:nvPr/>
         </p:nvSpPr>
@@ -11452,7 +10892,7 @@
       </p:sp>
       <p:sp>
         <p:nvSpPr>
-          <p:cNvPr id="24" name="Shape 22"/>
+          <p:cNvPr id="23" name="Shape 21"/>
           <p:cNvSpPr/>
           <p:nvPr/>
         </p:nvSpPr>
@@ -11476,7 +10916,7 @@
       </p:sp>
       <p:sp>
         <p:nvSpPr>
-          <p:cNvPr id="25" name="Text 23"/>
+          <p:cNvPr id="24" name="Text 22"/>
           <p:cNvSpPr/>
           <p:nvPr/>
         </p:nvSpPr>
@@ -11520,7 +10960,7 @@
       </p:sp>
       <p:sp>
         <p:nvSpPr>
-          <p:cNvPr id="26" name="Text 24"/>
+          <p:cNvPr id="25" name="Text 23"/>
           <p:cNvSpPr/>
           <p:nvPr/>
         </p:nvSpPr>
@@ -11564,7 +11004,7 @@
       </p:sp>
       <p:sp>
         <p:nvSpPr>
-          <p:cNvPr id="27" name="Text 25"/>
+          <p:cNvPr id="26" name="Text 24"/>
           <p:cNvSpPr/>
           <p:nvPr/>
         </p:nvSpPr>
@@ -11608,7 +11048,7 @@
       </p:sp>
       <p:sp>
         <p:nvSpPr>
-          <p:cNvPr id="28" name="Text 26"/>
+          <p:cNvPr id="27" name="Text 25"/>
           <p:cNvSpPr/>
           <p:nvPr/>
         </p:nvSpPr>
@@ -11652,7 +11092,7 @@
       </p:sp>
       <p:sp>
         <p:nvSpPr>
-          <p:cNvPr id="29" name="Text 27"/>
+          <p:cNvPr id="28" name="Text 26"/>
           <p:cNvSpPr/>
           <p:nvPr/>
         </p:nvSpPr>
@@ -11696,7 +11136,7 @@
       </p:sp>
       <p:sp>
         <p:nvSpPr>
-          <p:cNvPr id="30" name="Shape 28"/>
+          <p:cNvPr id="29" name="Shape 27"/>
           <p:cNvSpPr/>
           <p:nvPr/>
         </p:nvSpPr>
@@ -11720,7 +11160,7 @@
       </p:sp>
       <p:sp>
         <p:nvSpPr>
-          <p:cNvPr id="31" name="Text 29"/>
+          <p:cNvPr id="30" name="Text 28"/>
           <p:cNvSpPr/>
           <p:nvPr/>
         </p:nvSpPr>
@@ -11764,7 +11204,7 @@
       </p:sp>
       <p:sp>
         <p:nvSpPr>
-          <p:cNvPr id="32" name="Text 30"/>
+          <p:cNvPr id="31" name="Text 29"/>
           <p:cNvSpPr/>
           <p:nvPr/>
         </p:nvSpPr>
@@ -11808,7 +11248,7 @@
       </p:sp>
       <p:sp>
         <p:nvSpPr>
-          <p:cNvPr id="33" name="Text 31"/>
+          <p:cNvPr id="32" name="Text 30"/>
           <p:cNvSpPr/>
           <p:nvPr/>
         </p:nvSpPr>
@@ -11852,7 +11292,7 @@
       </p:sp>
       <p:sp>
         <p:nvSpPr>
-          <p:cNvPr id="34" name="Text 32"/>
+          <p:cNvPr id="33" name="Text 31"/>
           <p:cNvSpPr/>
           <p:nvPr/>
         </p:nvSpPr>
@@ -11896,7 +11336,7 @@
       </p:sp>
       <p:sp>
         <p:nvSpPr>
-          <p:cNvPr id="35" name="Text 33"/>
+          <p:cNvPr id="34" name="Text 32"/>
           <p:cNvSpPr/>
           <p:nvPr/>
         </p:nvSpPr>
@@ -11940,7 +11380,7 @@
       </p:sp>
       <p:sp>
         <p:nvSpPr>
-          <p:cNvPr id="36" name="Shape 34"/>
+          <p:cNvPr id="35" name="Shape 33"/>
           <p:cNvSpPr/>
           <p:nvPr/>
         </p:nvSpPr>
@@ -11964,7 +11404,7 @@
       </p:sp>
       <p:sp>
         <p:nvSpPr>
-          <p:cNvPr id="37" name="Text 35"/>
+          <p:cNvPr id="36" name="Text 34"/>
           <p:cNvSpPr/>
           <p:nvPr/>
         </p:nvSpPr>
@@ -12008,7 +11448,7 @@
       </p:sp>
       <p:sp>
         <p:nvSpPr>
-          <p:cNvPr id="38" name="Text 36"/>
+          <p:cNvPr id="37" name="Text 35"/>
           <p:cNvSpPr/>
           <p:nvPr/>
         </p:nvSpPr>
@@ -12052,7 +11492,7 @@
       </p:sp>
       <p:sp>
         <p:nvSpPr>
-          <p:cNvPr id="39" name="Text 37"/>
+          <p:cNvPr id="38" name="Text 36"/>
           <p:cNvSpPr/>
           <p:nvPr/>
         </p:nvSpPr>
@@ -12096,7 +11536,7 @@
       </p:sp>
       <p:sp>
         <p:nvSpPr>
-          <p:cNvPr id="40" name="Text 38"/>
+          <p:cNvPr id="39" name="Text 37"/>
           <p:cNvSpPr/>
           <p:nvPr/>
         </p:nvSpPr>
@@ -12140,7 +11580,7 @@
       </p:sp>
       <p:sp>
         <p:nvSpPr>
-          <p:cNvPr id="41" name="Text 39"/>
+          <p:cNvPr id="40" name="Text 38"/>
           <p:cNvSpPr/>
           <p:nvPr/>
         </p:nvSpPr>
@@ -12184,7 +11624,7 @@
       </p:sp>
       <p:sp>
         <p:nvSpPr>
-          <p:cNvPr id="42" name="Shape 40"/>
+          <p:cNvPr id="41" name="Shape 39"/>
           <p:cNvSpPr/>
           <p:nvPr/>
         </p:nvSpPr>
@@ -12208,7 +11648,7 @@
       </p:sp>
       <p:sp>
         <p:nvSpPr>
-          <p:cNvPr id="43" name="Text 41"/>
+          <p:cNvPr id="42" name="Text 40"/>
           <p:cNvSpPr/>
           <p:nvPr/>
         </p:nvSpPr>
@@ -12252,7 +11692,7 @@
       </p:sp>
       <p:sp>
         <p:nvSpPr>
-          <p:cNvPr id="44" name="Text 42"/>
+          <p:cNvPr id="43" name="Text 41"/>
           <p:cNvSpPr/>
           <p:nvPr/>
         </p:nvSpPr>
@@ -12296,7 +11736,7 @@
       </p:sp>
       <p:sp>
         <p:nvSpPr>
-          <p:cNvPr id="45" name="Text 43"/>
+          <p:cNvPr id="44" name="Text 42"/>
           <p:cNvSpPr/>
           <p:nvPr/>
         </p:nvSpPr>
@@ -12340,7 +11780,7 @@
       </p:sp>
       <p:sp>
         <p:nvSpPr>
-          <p:cNvPr id="46" name="Text 44"/>
+          <p:cNvPr id="45" name="Text 43"/>
           <p:cNvSpPr/>
           <p:nvPr/>
         </p:nvSpPr>
@@ -12384,7 +11824,7 @@
       </p:sp>
       <p:sp>
         <p:nvSpPr>
-          <p:cNvPr id="47" name="Text 45"/>
+          <p:cNvPr id="46" name="Text 44"/>
           <p:cNvSpPr/>
           <p:nvPr/>
         </p:nvSpPr>
@@ -12428,7 +11868,7 @@
       </p:sp>
       <p:sp>
         <p:nvSpPr>
-          <p:cNvPr id="48" name="Shape 46"/>
+          <p:cNvPr id="47" name="Shape 45"/>
           <p:cNvSpPr/>
           <p:nvPr/>
         </p:nvSpPr>
@@ -12452,7 +11892,7 @@
       </p:sp>
       <p:sp>
         <p:nvSpPr>
-          <p:cNvPr id="49" name="Text 47"/>
+          <p:cNvPr id="48" name="Text 46"/>
           <p:cNvSpPr/>
           <p:nvPr/>
         </p:nvSpPr>
@@ -12496,7 +11936,7 @@
       </p:sp>
       <p:sp>
         <p:nvSpPr>
-          <p:cNvPr id="50" name="Text 48"/>
+          <p:cNvPr id="49" name="Text 47"/>
           <p:cNvSpPr/>
           <p:nvPr/>
         </p:nvSpPr>
@@ -12540,7 +11980,7 @@
       </p:sp>
       <p:sp>
         <p:nvSpPr>
-          <p:cNvPr id="51" name="Text 49"/>
+          <p:cNvPr id="50" name="Text 48"/>
           <p:cNvSpPr/>
           <p:nvPr/>
         </p:nvSpPr>
@@ -12584,7 +12024,7 @@
       </p:sp>
       <p:sp>
         <p:nvSpPr>
-          <p:cNvPr id="52" name="Text 50"/>
+          <p:cNvPr id="51" name="Text 49"/>
           <p:cNvSpPr/>
           <p:nvPr/>
         </p:nvSpPr>
@@ -12628,7 +12068,7 @@
       </p:sp>
       <p:sp>
         <p:nvSpPr>
-          <p:cNvPr id="53" name="Text 51"/>
+          <p:cNvPr id="52" name="Text 50"/>
           <p:cNvSpPr/>
           <p:nvPr/>
         </p:nvSpPr>
@@ -12672,7 +12112,7 @@
       </p:sp>
       <p:sp>
         <p:nvSpPr>
-          <p:cNvPr id="54" name="Shape 52"/>
+          <p:cNvPr id="53" name="Shape 51"/>
           <p:cNvSpPr/>
           <p:nvPr/>
         </p:nvSpPr>
@@ -12696,7 +12136,7 @@
       </p:sp>
       <p:sp>
         <p:nvSpPr>
-          <p:cNvPr id="55" name="Text 53"/>
+          <p:cNvPr id="54" name="Text 52"/>
           <p:cNvSpPr/>
           <p:nvPr/>
         </p:nvSpPr>
@@ -12740,7 +12180,7 @@
       </p:sp>
       <p:sp>
         <p:nvSpPr>
-          <p:cNvPr id="56" name="Text 54"/>
+          <p:cNvPr id="55" name="Text 53"/>
           <p:cNvSpPr/>
           <p:nvPr/>
         </p:nvSpPr>
@@ -12784,7 +12224,7 @@
       </p:sp>
       <p:sp>
         <p:nvSpPr>
-          <p:cNvPr id="57" name="Text 55"/>
+          <p:cNvPr id="56" name="Text 54"/>
           <p:cNvSpPr/>
           <p:nvPr/>
         </p:nvSpPr>
@@ -12828,7 +12268,7 @@
       </p:sp>
       <p:sp>
         <p:nvSpPr>
-          <p:cNvPr id="58" name="Text 56"/>
+          <p:cNvPr id="57" name="Text 55"/>
           <p:cNvSpPr/>
           <p:nvPr/>
         </p:nvSpPr>
@@ -12872,7 +12312,7 @@
       </p:sp>
       <p:sp>
         <p:nvSpPr>
-          <p:cNvPr id="59" name="Text 57"/>
+          <p:cNvPr id="58" name="Text 56"/>
           <p:cNvSpPr/>
           <p:nvPr/>
         </p:nvSpPr>
@@ -12916,7 +12356,7 @@
       </p:sp>
       <p:sp>
         <p:nvSpPr>
-          <p:cNvPr id="60" name="Text 58"/>
+          <p:cNvPr id="59" name="Text 57"/>
           <p:cNvSpPr/>
           <p:nvPr/>
         </p:nvSpPr>
@@ -12960,49 +12400,7 @@
       </p:sp>
       <p:sp>
         <p:nvSpPr>
-          <p:cNvPr id="61" name="Text 59"/>
-          <p:cNvSpPr/>
-          <p:nvPr/>
-        </p:nvSpPr>
-        <p:spPr>
-          <a:xfrm>
-            <a:off x="502920" y="6327648"/>
-            <a:ext cx="8138160" cy="137160"/>
-          </a:xfrm>
-          <a:prstGeom prst="rect">
-            <a:avLst/>
-          </a:prstGeom>
-          <a:noFill/>
-          <a:ln/>
-        </p:spPr>
-        <p:txBody>
-          <a:bodyPr wrap="square" lIns="0" tIns="0" rIns="0" bIns="0" rtlCol="0" anchor="ctr"/>
-          <a:lstStyle/>
-          <a:p>
-            <a:pPr algn="r" indent="0" marL="0">
-              <a:lnSpc>
-                <a:spcPct val="125000"/>
-              </a:lnSpc>
-              <a:buNone/>
-            </a:pPr>
-            <a:r>
-              <a:rPr lang="en-US" sz="800" i="1" dirty="0">
-                <a:solidFill>
-                  <a:srgbClr val="5A5A66"/>
-                </a:solidFill>
-                <a:latin typeface="Cambria" pitchFamily="34" charset="0"/>
-                <a:ea typeface="Cambria" pitchFamily="34" charset="-122"/>
-                <a:cs typeface="Cambria" pitchFamily="34" charset="-120"/>
-              </a:rPr>
-              <a:t>Luận văn §6.4–§6.5</a:t>
-            </a:r>
-            <a:endParaRPr lang="en-US" sz="800" dirty="0"/>
-          </a:p>
-        </p:txBody>
-      </p:sp>
-      <p:sp>
-        <p:nvSpPr>
-          <p:cNvPr id="62" name="Shape 60"/>
+          <p:cNvPr id="60" name="Shape 58"/>
           <p:cNvSpPr/>
           <p:nvPr/>
         </p:nvSpPr>
@@ -13029,7 +12427,7 @@
       </p:sp>
       <p:sp>
         <p:nvSpPr>
-          <p:cNvPr id="63" name="Shape 61"/>
+          <p:cNvPr id="61" name="Shape 59"/>
           <p:cNvSpPr/>
           <p:nvPr/>
         </p:nvSpPr>
@@ -13056,7 +12454,7 @@
       </p:sp>
       <p:sp>
         <p:nvSpPr>
-          <p:cNvPr id="64" name="Shape 62"/>
+          <p:cNvPr id="62" name="Shape 60"/>
           <p:cNvSpPr/>
           <p:nvPr/>
         </p:nvSpPr>
@@ -13083,7 +12481,7 @@
       </p:sp>
       <p:sp>
         <p:nvSpPr>
-          <p:cNvPr id="65" name="Shape 63"/>
+          <p:cNvPr id="63" name="Shape 61"/>
           <p:cNvSpPr/>
           <p:nvPr/>
         </p:nvSpPr>
@@ -13110,7 +12508,7 @@
       </p:sp>
       <p:sp>
         <p:nvSpPr>
-          <p:cNvPr id="66" name="Text 64"/>
+          <p:cNvPr id="64" name="Text 62"/>
           <p:cNvSpPr/>
           <p:nvPr/>
         </p:nvSpPr>
@@ -13152,7 +12550,7 @@
       </p:sp>
       <p:sp>
         <p:nvSpPr>
-          <p:cNvPr id="67" name="Text 65"/>
+          <p:cNvPr id="65" name="Text 63"/>
           <p:cNvSpPr/>
           <p:nvPr/>
         </p:nvSpPr>
@@ -13194,7 +12592,7 @@
       </p:sp>
       <p:sp>
         <p:nvSpPr>
-          <p:cNvPr id="68" name="Text 66"/>
+          <p:cNvPr id="66" name="Text 64"/>
           <p:cNvSpPr/>
           <p:nvPr/>
         </p:nvSpPr>
@@ -13236,7 +12634,7 @@
       </p:sp>
       <p:sp>
         <p:nvSpPr>
-          <p:cNvPr id="69" name="Text 67"/>
+          <p:cNvPr id="67" name="Text 65"/>
           <p:cNvSpPr/>
           <p:nvPr/>
         </p:nvSpPr>
@@ -13387,8 +12785,92 @@
         </p:nvSpPr>
         <p:spPr>
           <a:xfrm>
-            <a:off x="502920" y="603504"/>
-            <a:ext cx="8138160" cy="219456"/>
+            <a:off x="502920" y="896112"/>
+            <a:ext cx="8138160" cy="365760"/>
+          </a:xfrm>
+          <a:prstGeom prst="rect">
+            <a:avLst/>
+          </a:prstGeom>
+          <a:noFill/>
+          <a:ln/>
+        </p:spPr>
+        <p:txBody>
+          <a:bodyPr wrap="square" lIns="0" tIns="0" rIns="0" bIns="0" rtlCol="0" anchor="ctr"/>
+          <a:lstStyle/>
+          <a:p>
+            <a:pPr algn="ctr" indent="0" marL="0">
+              <a:lnSpc>
+                <a:spcPct val="125000"/>
+              </a:lnSpc>
+              <a:buNone/>
+            </a:pPr>
+            <a:r>
+              <a:rPr lang="en-US" sz="1650" b="1" dirty="0">
+                <a:solidFill>
+                  <a:srgbClr val="25194B"/>
+                </a:solidFill>
+                <a:latin typeface="Cambria" pitchFamily="34" charset="0"/>
+                <a:ea typeface="Cambria" pitchFamily="34" charset="-122"/>
+                <a:cs typeface="Cambria" pitchFamily="34" charset="-120"/>
+              </a:rPr>
+              <a:t>Chênh lệch GRPO-SPICE − S1</a:t>
+            </a:r>
+            <a:endParaRPr lang="en-US" sz="1650" dirty="0"/>
+          </a:p>
+        </p:txBody>
+      </p:sp>
+      <p:sp>
+        <p:nvSpPr>
+          <p:cNvPr id="5" name="Text 3"/>
+          <p:cNvSpPr/>
+          <p:nvPr/>
+        </p:nvSpPr>
+        <p:spPr>
+          <a:xfrm>
+            <a:off x="594360" y="1572768"/>
+            <a:ext cx="1828800" cy="502920"/>
+          </a:xfrm>
+          <a:prstGeom prst="rect">
+            <a:avLst/>
+          </a:prstGeom>
+          <a:noFill/>
+          <a:ln/>
+        </p:spPr>
+        <p:txBody>
+          <a:bodyPr wrap="square" lIns="0" tIns="0" rIns="0" bIns="0" rtlCol="0" anchor="ctr"/>
+          <a:lstStyle/>
+          <a:p>
+            <a:pPr algn="ctr" indent="0" marL="0">
+              <a:lnSpc>
+                <a:spcPct val="125000"/>
+              </a:lnSpc>
+              <a:buNone/>
+            </a:pPr>
+            <a:r>
+              <a:rPr lang="en-US" sz="2400" b="1" dirty="0">
+                <a:solidFill>
+                  <a:srgbClr val="25194B"/>
+                </a:solidFill>
+                <a:latin typeface="Cambria" pitchFamily="34" charset="0"/>
+                <a:ea typeface="Cambria" pitchFamily="34" charset="-122"/>
+                <a:cs typeface="Cambria" pitchFamily="34" charset="-120"/>
+              </a:rPr>
+              <a:t>+1,55</a:t>
+            </a:r>
+            <a:endParaRPr lang="en-US" sz="2400" dirty="0"/>
+          </a:p>
+        </p:txBody>
+      </p:sp>
+      <p:sp>
+        <p:nvSpPr>
+          <p:cNvPr id="6" name="Text 4"/>
+          <p:cNvSpPr/>
+          <p:nvPr/>
+        </p:nvSpPr>
+        <p:spPr>
+          <a:xfrm>
+            <a:off x="594360" y="2103120"/>
+            <a:ext cx="1828800" cy="475488"/>
           </a:xfrm>
           <a:prstGeom prst="rect">
             <a:avLst/>
@@ -13402,14 +12884,56 @@
           </a:bodyPr>
           <a:lstStyle/>
           <a:p>
-            <a:pPr indent="0" marL="0">
-              <a:lnSpc>
-                <a:spcPct val="125000"/>
-              </a:lnSpc>
-              <a:buNone/>
-            </a:pPr>
-            <a:r>
-              <a:rPr lang="en-US" sz="1260" b="1" dirty="0">
+            <a:pPr algn="ctr" indent="0" marL="0">
+              <a:lnSpc>
+                <a:spcPct val="125000"/>
+              </a:lnSpc>
+              <a:buNone/>
+            </a:pPr>
+            <a:r>
+              <a:rPr lang="en-US" sz="1250" b="1" dirty="0">
+                <a:solidFill>
+                  <a:srgbClr val="1A1A1A"/>
+                </a:solidFill>
+                <a:latin typeface="Cambria" pitchFamily="34" charset="0"/>
+                <a:ea typeface="Cambria" pitchFamily="34" charset="-122"/>
+                <a:cs typeface="Cambria" pitchFamily="34" charset="-120"/>
+              </a:rPr>
+              <a:t>UGround</a:t>
+            </a:r>
+            <a:endParaRPr lang="en-US" sz="1250" dirty="0"/>
+          </a:p>
+        </p:txBody>
+      </p:sp>
+      <p:sp>
+        <p:nvSpPr>
+          <p:cNvPr id="7" name="Text 5"/>
+          <p:cNvSpPr/>
+          <p:nvPr/>
+        </p:nvSpPr>
+        <p:spPr>
+          <a:xfrm>
+            <a:off x="2670048" y="1572768"/>
+            <a:ext cx="1828800" cy="502920"/>
+          </a:xfrm>
+          <a:prstGeom prst="rect">
+            <a:avLst/>
+          </a:prstGeom>
+          <a:noFill/>
+          <a:ln/>
+        </p:spPr>
+        <p:txBody>
+          <a:bodyPr wrap="square" lIns="0" tIns="0" rIns="0" bIns="0" rtlCol="0" anchor="ctr"/>
+          <a:lstStyle/>
+          <a:p>
+            <a:pPr algn="ctr" indent="0" marL="0">
+              <a:lnSpc>
+                <a:spcPct val="125000"/>
+              </a:lnSpc>
+              <a:buNone/>
+            </a:pPr>
+            <a:r>
+              <a:rPr lang="en-US" sz="2400" b="1" dirty="0">
                 <a:solidFill>
                   <a:srgbClr val="25194B"/>
                 </a:solidFill>
@@ -13417,90 +12941,6 @@
                 <a:ea typeface="Cambria" pitchFamily="34" charset="-122"/>
                 <a:cs typeface="Cambria" pitchFamily="34" charset="-120"/>
               </a:rPr>
-              <a:t>Đối chiếu với bốn công cụ đánh giá</a:t>
-            </a:r>
-            <a:endParaRPr lang="en-US" sz="1260" dirty="0"/>
-          </a:p>
-        </p:txBody>
-      </p:sp>
-      <p:sp>
-        <p:nvSpPr>
-          <p:cNvPr id="5" name="Text 3"/>
-          <p:cNvSpPr/>
-          <p:nvPr/>
-        </p:nvSpPr>
-        <p:spPr>
-          <a:xfrm>
-            <a:off x="502920" y="896112"/>
-            <a:ext cx="8138160" cy="365760"/>
-          </a:xfrm>
-          <a:prstGeom prst="rect">
-            <a:avLst/>
-          </a:prstGeom>
-          <a:noFill/>
-          <a:ln/>
-        </p:spPr>
-        <p:txBody>
-          <a:bodyPr wrap="square" lIns="0" tIns="0" rIns="0" bIns="0" rtlCol="0" anchor="ctr"/>
-          <a:lstStyle/>
-          <a:p>
-            <a:pPr algn="ctr" indent="0" marL="0">
-              <a:lnSpc>
-                <a:spcPct val="125000"/>
-              </a:lnSpc>
-              <a:buNone/>
-            </a:pPr>
-            <a:r>
-              <a:rPr lang="en-US" sz="1650" b="1" dirty="0">
-                <a:solidFill>
-                  <a:srgbClr val="25194B"/>
-                </a:solidFill>
-                <a:latin typeface="Cambria" pitchFamily="34" charset="0"/>
-                <a:ea typeface="Cambria" pitchFamily="34" charset="-122"/>
-                <a:cs typeface="Cambria" pitchFamily="34" charset="-120"/>
-              </a:rPr>
-              <a:t>Chênh lệch GRPO-SPICE − S1</a:t>
-            </a:r>
-            <a:endParaRPr lang="en-US" sz="1650" dirty="0"/>
-          </a:p>
-        </p:txBody>
-      </p:sp>
-      <p:sp>
-        <p:nvSpPr>
-          <p:cNvPr id="6" name="Text 4"/>
-          <p:cNvSpPr/>
-          <p:nvPr/>
-        </p:nvSpPr>
-        <p:spPr>
-          <a:xfrm>
-            <a:off x="594360" y="1572768"/>
-            <a:ext cx="1828800" cy="502920"/>
-          </a:xfrm>
-          <a:prstGeom prst="rect">
-            <a:avLst/>
-          </a:prstGeom>
-          <a:noFill/>
-          <a:ln/>
-        </p:spPr>
-        <p:txBody>
-          <a:bodyPr wrap="square" lIns="0" tIns="0" rIns="0" bIns="0" rtlCol="0" anchor="ctr"/>
-          <a:lstStyle/>
-          <a:p>
-            <a:pPr algn="ctr" indent="0" marL="0">
-              <a:lnSpc>
-                <a:spcPct val="125000"/>
-              </a:lnSpc>
-              <a:buNone/>
-            </a:pPr>
-            <a:r>
-              <a:rPr lang="en-US" sz="2400" b="1" dirty="0">
-                <a:solidFill>
-                  <a:srgbClr val="25194B"/>
-                </a:solidFill>
-                <a:latin typeface="Cambria" pitchFamily="34" charset="0"/>
-                <a:ea typeface="Cambria" pitchFamily="34" charset="-122"/>
-                <a:cs typeface="Cambria" pitchFamily="34" charset="-120"/>
-              </a:rPr>
               <a:t>+1,55</a:t>
             </a:r>
             <a:endParaRPr lang="en-US" sz="2400" dirty="0"/>
@@ -13509,13 +12949,13 @@
       </p:sp>
       <p:sp>
         <p:nvSpPr>
-          <p:cNvPr id="7" name="Text 5"/>
-          <p:cNvSpPr/>
-          <p:nvPr/>
-        </p:nvSpPr>
-        <p:spPr>
-          <a:xfrm>
-            <a:off x="594360" y="2103120"/>
+          <p:cNvPr id="8" name="Text 6"/>
+          <p:cNvSpPr/>
+          <p:nvPr/>
+        </p:nvSpPr>
+        <p:spPr>
+          <a:xfrm>
+            <a:off x="2670048" y="2103120"/>
             <a:ext cx="1828800" cy="475488"/>
           </a:xfrm>
           <a:prstGeom prst="rect">
@@ -13545,7 +12985,7 @@
                 <a:ea typeface="Cambria" pitchFamily="34" charset="-122"/>
                 <a:cs typeface="Cambria" pitchFamily="34" charset="-120"/>
               </a:rPr>
-              <a:t>UGround</a:t>
+              <a:t>UI-Venus</a:t>
             </a:r>
             <a:endParaRPr lang="en-US" sz="1250" dirty="0"/>
           </a:p>
@@ -13553,13 +12993,13 @@
       </p:sp>
       <p:sp>
         <p:nvSpPr>
-          <p:cNvPr id="8" name="Text 6"/>
-          <p:cNvSpPr/>
-          <p:nvPr/>
-        </p:nvSpPr>
-        <p:spPr>
-          <a:xfrm>
-            <a:off x="2670048" y="1572768"/>
+          <p:cNvPr id="9" name="Text 7"/>
+          <p:cNvSpPr/>
+          <p:nvPr/>
+        </p:nvSpPr>
+        <p:spPr>
+          <a:xfrm>
+            <a:off x="4745736" y="1572768"/>
             <a:ext cx="1828800" cy="502920"/>
           </a:xfrm>
           <a:prstGeom prst="rect">
@@ -13581,13 +13021,13 @@
             <a:r>
               <a:rPr lang="en-US" sz="2400" b="1" dirty="0">
                 <a:solidFill>
-                  <a:srgbClr val="25194B"/>
-                </a:solidFill>
-                <a:latin typeface="Cambria" pitchFamily="34" charset="0"/>
-                <a:ea typeface="Cambria" pitchFamily="34" charset="-122"/>
-                <a:cs typeface="Cambria" pitchFamily="34" charset="-120"/>
-              </a:rPr>
-              <a:t>+1,55</a:t>
+                  <a:srgbClr val="4F417A"/>
+                </a:solidFill>
+                <a:latin typeface="Cambria" pitchFamily="34" charset="0"/>
+                <a:ea typeface="Cambria" pitchFamily="34" charset="-122"/>
+                <a:cs typeface="Cambria" pitchFamily="34" charset="-120"/>
+              </a:rPr>
+              <a:t>+0,78</a:t>
             </a:r>
             <a:endParaRPr lang="en-US" sz="2400" dirty="0"/>
           </a:p>
@@ -13595,13 +13035,13 @@
       </p:sp>
       <p:sp>
         <p:nvSpPr>
-          <p:cNvPr id="9" name="Text 7"/>
-          <p:cNvSpPr/>
-          <p:nvPr/>
-        </p:nvSpPr>
-        <p:spPr>
-          <a:xfrm>
-            <a:off x="2670048" y="2103120"/>
+          <p:cNvPr id="10" name="Text 8"/>
+          <p:cNvSpPr/>
+          <p:nvPr/>
+        </p:nvSpPr>
+        <p:spPr>
+          <a:xfrm>
+            <a:off x="4745736" y="2103120"/>
             <a:ext cx="1828800" cy="475488"/>
           </a:xfrm>
           <a:prstGeom prst="rect">
@@ -13631,7 +13071,7 @@
                 <a:ea typeface="Cambria" pitchFamily="34" charset="-122"/>
                 <a:cs typeface="Cambria" pitchFamily="34" charset="-120"/>
               </a:rPr>
-              <a:t>UI-Venus</a:t>
+              <a:t>Phi-Ground</a:t>
             </a:r>
             <a:endParaRPr lang="en-US" sz="1250" dirty="0"/>
           </a:p>
@@ -13639,13 +13079,13 @@
       </p:sp>
       <p:sp>
         <p:nvSpPr>
-          <p:cNvPr id="10" name="Text 8"/>
-          <p:cNvSpPr/>
-          <p:nvPr/>
-        </p:nvSpPr>
-        <p:spPr>
-          <a:xfrm>
-            <a:off x="4745736" y="1572768"/>
+          <p:cNvPr id="11" name="Text 9"/>
+          <p:cNvSpPr/>
+          <p:nvPr/>
+        </p:nvSpPr>
+        <p:spPr>
+          <a:xfrm>
+            <a:off x="6821424" y="1572768"/>
             <a:ext cx="1828800" cy="502920"/>
           </a:xfrm>
           <a:prstGeom prst="rect">
@@ -13667,13 +13107,13 @@
             <a:r>
               <a:rPr lang="en-US" sz="2400" b="1" dirty="0">
                 <a:solidFill>
-                  <a:srgbClr val="4F417A"/>
-                </a:solidFill>
-                <a:latin typeface="Cambria" pitchFamily="34" charset="0"/>
-                <a:ea typeface="Cambria" pitchFamily="34" charset="-122"/>
-                <a:cs typeface="Cambria" pitchFamily="34" charset="-120"/>
-              </a:rPr>
-              <a:t>+0,78</a:t>
+                  <a:srgbClr val="7A7099"/>
+                </a:solidFill>
+                <a:latin typeface="Cambria" pitchFamily="34" charset="0"/>
+                <a:ea typeface="Cambria" pitchFamily="34" charset="-122"/>
+                <a:cs typeface="Cambria" pitchFamily="34" charset="-120"/>
+              </a:rPr>
+              <a:t>+0,69</a:t>
             </a:r>
             <a:endParaRPr lang="en-US" sz="2400" dirty="0"/>
           </a:p>
@@ -13681,13 +13121,13 @@
       </p:sp>
       <p:sp>
         <p:nvSpPr>
-          <p:cNvPr id="11" name="Text 9"/>
-          <p:cNvSpPr/>
-          <p:nvPr/>
-        </p:nvSpPr>
-        <p:spPr>
-          <a:xfrm>
-            <a:off x="4745736" y="2103120"/>
+          <p:cNvPr id="12" name="Text 10"/>
+          <p:cNvSpPr/>
+          <p:nvPr/>
+        </p:nvSpPr>
+        <p:spPr>
+          <a:xfrm>
+            <a:off x="6821424" y="2103120"/>
             <a:ext cx="1828800" cy="475488"/>
           </a:xfrm>
           <a:prstGeom prst="rect">
@@ -13717,7 +13157,7 @@
                 <a:ea typeface="Cambria" pitchFamily="34" charset="-122"/>
                 <a:cs typeface="Cambria" pitchFamily="34" charset="-120"/>
               </a:rPr>
-              <a:t>Phi-Ground</a:t>
+              <a:t>Phi-4</a:t>
             </a:r>
             <a:endParaRPr lang="en-US" sz="1250" dirty="0"/>
           </a:p>
@@ -13725,93 +13165,7 @@
       </p:sp>
       <p:sp>
         <p:nvSpPr>
-          <p:cNvPr id="12" name="Text 10"/>
-          <p:cNvSpPr/>
-          <p:nvPr/>
-        </p:nvSpPr>
-        <p:spPr>
-          <a:xfrm>
-            <a:off x="6821424" y="1572768"/>
-            <a:ext cx="1828800" cy="502920"/>
-          </a:xfrm>
-          <a:prstGeom prst="rect">
-            <a:avLst/>
-          </a:prstGeom>
-          <a:noFill/>
-          <a:ln/>
-        </p:spPr>
-        <p:txBody>
-          <a:bodyPr wrap="square" lIns="0" tIns="0" rIns="0" bIns="0" rtlCol="0" anchor="ctr"/>
-          <a:lstStyle/>
-          <a:p>
-            <a:pPr algn="ctr" indent="0" marL="0">
-              <a:lnSpc>
-                <a:spcPct val="125000"/>
-              </a:lnSpc>
-              <a:buNone/>
-            </a:pPr>
-            <a:r>
-              <a:rPr lang="en-US" sz="2400" b="1" dirty="0">
-                <a:solidFill>
-                  <a:srgbClr val="7A7099"/>
-                </a:solidFill>
-                <a:latin typeface="Cambria" pitchFamily="34" charset="0"/>
-                <a:ea typeface="Cambria" pitchFamily="34" charset="-122"/>
-                <a:cs typeface="Cambria" pitchFamily="34" charset="-120"/>
-              </a:rPr>
-              <a:t>+0,69</a:t>
-            </a:r>
-            <a:endParaRPr lang="en-US" sz="2400" dirty="0"/>
-          </a:p>
-        </p:txBody>
-      </p:sp>
-      <p:sp>
-        <p:nvSpPr>
-          <p:cNvPr id="13" name="Text 11"/>
-          <p:cNvSpPr/>
-          <p:nvPr/>
-        </p:nvSpPr>
-        <p:spPr>
-          <a:xfrm>
-            <a:off x="6821424" y="2103120"/>
-            <a:ext cx="1828800" cy="475488"/>
-          </a:xfrm>
-          <a:prstGeom prst="rect">
-            <a:avLst/>
-          </a:prstGeom>
-          <a:noFill/>
-          <a:ln/>
-        </p:spPr>
-        <p:txBody>
-          <a:bodyPr wrap="square" lIns="0" tIns="0" rIns="0" bIns="0" rtlCol="0" anchor="ctr">
-            <a:normAutofit/>
-          </a:bodyPr>
-          <a:lstStyle/>
-          <a:p>
-            <a:pPr algn="ctr" indent="0" marL="0">
-              <a:lnSpc>
-                <a:spcPct val="125000"/>
-              </a:lnSpc>
-              <a:buNone/>
-            </a:pPr>
-            <a:r>
-              <a:rPr lang="en-US" sz="1250" b="1" dirty="0">
-                <a:solidFill>
-                  <a:srgbClr val="1A1A1A"/>
-                </a:solidFill>
-                <a:latin typeface="Cambria" pitchFamily="34" charset="0"/>
-                <a:ea typeface="Cambria" pitchFamily="34" charset="-122"/>
-                <a:cs typeface="Cambria" pitchFamily="34" charset="-120"/>
-              </a:rPr>
-              <a:t>Phi-4</a:t>
-            </a:r>
-            <a:endParaRPr lang="en-US" sz="1250" dirty="0"/>
-          </a:p>
-        </p:txBody>
-      </p:sp>
-      <p:sp>
-        <p:nvSpPr>
-          <p:cNvPr id="14" name="Shape 12"/>
+          <p:cNvPr id="13" name="Shape 11"/>
           <p:cNvSpPr/>
           <p:nvPr/>
         </p:nvSpPr>
@@ -13836,7 +13190,7 @@
       </p:sp>
       <p:sp>
         <p:nvSpPr>
-          <p:cNvPr id="15" name="Text 13"/>
+          <p:cNvPr id="14" name="Text 12"/>
           <p:cNvSpPr/>
           <p:nvPr/>
         </p:nvSpPr>
@@ -13878,7 +13232,7 @@
       </p:sp>
       <p:sp>
         <p:nvSpPr>
-          <p:cNvPr id="16" name="Text 14"/>
+          <p:cNvPr id="15" name="Text 13"/>
           <p:cNvSpPr/>
           <p:nvPr/>
         </p:nvSpPr>
@@ -13920,7 +13274,7 @@
       </p:sp>
       <p:sp>
         <p:nvSpPr>
-          <p:cNvPr id="17" name="Text 15"/>
+          <p:cNvPr id="16" name="Text 14"/>
           <p:cNvSpPr/>
           <p:nvPr/>
         </p:nvSpPr>
@@ -13962,49 +13316,7 @@
       </p:sp>
       <p:sp>
         <p:nvSpPr>
-          <p:cNvPr id="18" name="Text 16"/>
-          <p:cNvSpPr/>
-          <p:nvPr/>
-        </p:nvSpPr>
-        <p:spPr>
-          <a:xfrm>
-            <a:off x="502920" y="6327648"/>
-            <a:ext cx="8138160" cy="137160"/>
-          </a:xfrm>
-          <a:prstGeom prst="rect">
-            <a:avLst/>
-          </a:prstGeom>
-          <a:noFill/>
-          <a:ln/>
-        </p:spPr>
-        <p:txBody>
-          <a:bodyPr wrap="square" lIns="0" tIns="0" rIns="0" bIns="0" rtlCol="0" anchor="ctr"/>
-          <a:lstStyle/>
-          <a:p>
-            <a:pPr algn="r" indent="0" marL="0">
-              <a:lnSpc>
-                <a:spcPct val="125000"/>
-              </a:lnSpc>
-              <a:buNone/>
-            </a:pPr>
-            <a:r>
-              <a:rPr lang="en-US" sz="800" i="1" dirty="0">
-                <a:solidFill>
-                  <a:srgbClr val="5A5A66"/>
-                </a:solidFill>
-                <a:latin typeface="Cambria" pitchFamily="34" charset="0"/>
-                <a:ea typeface="Cambria" pitchFamily="34" charset="-122"/>
-                <a:cs typeface="Cambria" pitchFamily="34" charset="-120"/>
-              </a:rPr>
-              <a:t>Luận văn §6.7.3</a:t>
-            </a:r>
-            <a:endParaRPr lang="en-US" sz="800" dirty="0"/>
-          </a:p>
-        </p:txBody>
-      </p:sp>
-      <p:sp>
-        <p:nvSpPr>
-          <p:cNvPr id="19" name="Shape 17"/>
+          <p:cNvPr id="17" name="Shape 15"/>
           <p:cNvSpPr/>
           <p:nvPr/>
         </p:nvSpPr>
@@ -14031,7 +13343,7 @@
       </p:sp>
       <p:sp>
         <p:nvSpPr>
-          <p:cNvPr id="20" name="Shape 18"/>
+          <p:cNvPr id="18" name="Shape 16"/>
           <p:cNvSpPr/>
           <p:nvPr/>
         </p:nvSpPr>
@@ -14058,7 +13370,7 @@
       </p:sp>
       <p:sp>
         <p:nvSpPr>
-          <p:cNvPr id="21" name="Shape 19"/>
+          <p:cNvPr id="19" name="Shape 17"/>
           <p:cNvSpPr/>
           <p:nvPr/>
         </p:nvSpPr>
@@ -14085,7 +13397,7 @@
       </p:sp>
       <p:sp>
         <p:nvSpPr>
-          <p:cNvPr id="22" name="Shape 20"/>
+          <p:cNvPr id="20" name="Shape 18"/>
           <p:cNvSpPr/>
           <p:nvPr/>
         </p:nvSpPr>
@@ -14112,7 +13424,7 @@
       </p:sp>
       <p:sp>
         <p:nvSpPr>
-          <p:cNvPr id="23" name="Text 21"/>
+          <p:cNvPr id="21" name="Text 19"/>
           <p:cNvSpPr/>
           <p:nvPr/>
         </p:nvSpPr>
@@ -14154,7 +13466,7 @@
       </p:sp>
       <p:sp>
         <p:nvSpPr>
-          <p:cNvPr id="24" name="Text 22"/>
+          <p:cNvPr id="22" name="Text 20"/>
           <p:cNvSpPr/>
           <p:nvPr/>
         </p:nvSpPr>
@@ -14196,7 +13508,7 @@
       </p:sp>
       <p:sp>
         <p:nvSpPr>
-          <p:cNvPr id="25" name="Text 23"/>
+          <p:cNvPr id="23" name="Text 21"/>
           <p:cNvSpPr/>
           <p:nvPr/>
         </p:nvSpPr>
@@ -14238,7 +13550,7 @@
       </p:sp>
       <p:sp>
         <p:nvSpPr>
-          <p:cNvPr id="26" name="Text 24"/>
+          <p:cNvPr id="24" name="Text 22"/>
           <p:cNvSpPr/>
           <p:nvPr/>
         </p:nvSpPr>
@@ -14389,8 +13701,8 @@
         </p:nvSpPr>
         <p:spPr>
           <a:xfrm>
-            <a:off x="502920" y="603504"/>
-            <a:ext cx="8138160" cy="219456"/>
+            <a:off x="502920" y="877824"/>
+            <a:ext cx="8138160" cy="566928"/>
           </a:xfrm>
           <a:prstGeom prst="rect">
             <a:avLst/>
@@ -14404,14 +13716,14 @@
           </a:bodyPr>
           <a:lstStyle/>
           <a:p>
-            <a:pPr indent="0" marL="0">
-              <a:lnSpc>
-                <a:spcPct val="125000"/>
-              </a:lnSpc>
-              <a:buNone/>
-            </a:pPr>
-            <a:r>
-              <a:rPr lang="en-US" sz="1260" b="1" dirty="0">
+            <a:pPr algn="ctr" indent="0" marL="0">
+              <a:lnSpc>
+                <a:spcPct val="125000"/>
+              </a:lnSpc>
+              <a:buNone/>
+            </a:pPr>
+            <a:r>
+              <a:rPr lang="en-US" sz="1580" b="1" dirty="0">
                 <a:solidFill>
                   <a:srgbClr val="25194B"/>
                 </a:solidFill>
@@ -14419,9 +13731,9 @@
                 <a:ea typeface="Cambria" pitchFamily="34" charset="-122"/>
                 <a:cs typeface="Cambria" pitchFamily="34" charset="-120"/>
               </a:rPr>
-              <a:t>Lịch sử do mô hình tự sinh</a:t>
-            </a:r>
-            <a:endParaRPr lang="en-US" sz="1260" dirty="0"/>
+              <a:t>Khi dùng lịch sử do chính mô hình sinh, cả hai nhánh đều giảm điểm nhưng GRPO-SPICE vẫn cao hơn S1.</a:t>
+            </a:r>
+            <a:endParaRPr lang="en-US" sz="1580" dirty="0"/>
           </a:p>
         </p:txBody>
       </p:sp>
@@ -14433,8 +13745,50 @@
         </p:nvSpPr>
         <p:spPr>
           <a:xfrm>
-            <a:off x="502920" y="877824"/>
-            <a:ext cx="8138160" cy="566928"/>
+            <a:off x="658368" y="1664208"/>
+            <a:ext cx="2240280" cy="502920"/>
+          </a:xfrm>
+          <a:prstGeom prst="rect">
+            <a:avLst/>
+          </a:prstGeom>
+          <a:noFill/>
+          <a:ln/>
+        </p:spPr>
+        <p:txBody>
+          <a:bodyPr wrap="square" lIns="0" tIns="0" rIns="0" bIns="0" rtlCol="0" anchor="ctr"/>
+          <a:lstStyle/>
+          <a:p>
+            <a:pPr algn="ctr" indent="0" marL="0">
+              <a:lnSpc>
+                <a:spcPct val="125000"/>
+              </a:lnSpc>
+              <a:buNone/>
+            </a:pPr>
+            <a:r>
+              <a:rPr lang="en-US" sz="2400" b="1" dirty="0">
+                <a:solidFill>
+                  <a:srgbClr val="7A7099"/>
+                </a:solidFill>
+                <a:latin typeface="Cambria" pitchFamily="34" charset="0"/>
+                <a:ea typeface="Cambria" pitchFamily="34" charset="-122"/>
+                <a:cs typeface="Cambria" pitchFamily="34" charset="-120"/>
+              </a:rPr>
+              <a:t>54,96%</a:t>
+            </a:r>
+            <a:endParaRPr lang="en-US" sz="2400" dirty="0"/>
+          </a:p>
+        </p:txBody>
+      </p:sp>
+      <p:sp>
+        <p:nvSpPr>
+          <p:cNvPr id="6" name="Text 4"/>
+          <p:cNvSpPr/>
+          <p:nvPr/>
+        </p:nvSpPr>
+        <p:spPr>
+          <a:xfrm>
+            <a:off x="658368" y="2194560"/>
+            <a:ext cx="2240280" cy="475488"/>
           </a:xfrm>
           <a:prstGeom prst="rect">
             <a:avLst/>
@@ -14455,29 +13809,29 @@
               <a:buNone/>
             </a:pPr>
             <a:r>
-              <a:rPr lang="en-US" sz="1580" b="1" dirty="0">
-                <a:solidFill>
-                  <a:srgbClr val="25194B"/>
-                </a:solidFill>
-                <a:latin typeface="Cambria" pitchFamily="34" charset="0"/>
-                <a:ea typeface="Cambria" pitchFamily="34" charset="-122"/>
-                <a:cs typeface="Cambria" pitchFamily="34" charset="-120"/>
-              </a:rPr>
-              <a:t>Khi dùng lịch sử do chính mô hình sinh, cả hai nhánh đều giảm điểm nhưng GRPO-SPICE vẫn cao hơn S1.</a:t>
-            </a:r>
-            <a:endParaRPr lang="en-US" sz="1580" dirty="0"/>
-          </a:p>
-        </p:txBody>
-      </p:sp>
-      <p:sp>
-        <p:nvSpPr>
-          <p:cNvPr id="6" name="Text 4"/>
-          <p:cNvSpPr/>
-          <p:nvPr/>
-        </p:nvSpPr>
-        <p:spPr>
-          <a:xfrm>
-            <a:off x="658368" y="1664208"/>
+              <a:rPr lang="en-US" sz="1250" b="1" dirty="0">
+                <a:solidFill>
+                  <a:srgbClr val="1A1A1A"/>
+                </a:solidFill>
+                <a:latin typeface="Cambria" pitchFamily="34" charset="0"/>
+                <a:ea typeface="Cambria" pitchFamily="34" charset="-122"/>
+                <a:cs typeface="Cambria" pitchFamily="34" charset="-120"/>
+              </a:rPr>
+              <a:t>S1 · lịch sử tự sinh</a:t>
+            </a:r>
+            <a:endParaRPr lang="en-US" sz="1250" dirty="0"/>
+          </a:p>
+        </p:txBody>
+      </p:sp>
+      <p:sp>
+        <p:nvSpPr>
+          <p:cNvPr id="7" name="Text 5"/>
+          <p:cNvSpPr/>
+          <p:nvPr/>
+        </p:nvSpPr>
+        <p:spPr>
+          <a:xfrm>
+            <a:off x="3456432" y="1664208"/>
             <a:ext cx="2240280" cy="502920"/>
           </a:xfrm>
           <a:prstGeom prst="rect">
@@ -14499,13 +13853,13 @@
             <a:r>
               <a:rPr lang="en-US" sz="2400" b="1" dirty="0">
                 <a:solidFill>
-                  <a:srgbClr val="7A7099"/>
-                </a:solidFill>
-                <a:latin typeface="Cambria" pitchFamily="34" charset="0"/>
-                <a:ea typeface="Cambria" pitchFamily="34" charset="-122"/>
-                <a:cs typeface="Cambria" pitchFamily="34" charset="-120"/>
-              </a:rPr>
-              <a:t>54,96%</a:t>
+                  <a:srgbClr val="4F417A"/>
+                </a:solidFill>
+                <a:latin typeface="Cambria" pitchFamily="34" charset="0"/>
+                <a:ea typeface="Cambria" pitchFamily="34" charset="-122"/>
+                <a:cs typeface="Cambria" pitchFamily="34" charset="-120"/>
+              </a:rPr>
+              <a:t>56,44%</a:t>
             </a:r>
             <a:endParaRPr lang="en-US" sz="2400" dirty="0"/>
           </a:p>
@@ -14513,13 +13867,13 @@
       </p:sp>
       <p:sp>
         <p:nvSpPr>
-          <p:cNvPr id="7" name="Text 5"/>
-          <p:cNvSpPr/>
-          <p:nvPr/>
-        </p:nvSpPr>
-        <p:spPr>
-          <a:xfrm>
-            <a:off x="658368" y="2194560"/>
+          <p:cNvPr id="8" name="Text 6"/>
+          <p:cNvSpPr/>
+          <p:nvPr/>
+        </p:nvSpPr>
+        <p:spPr>
+          <a:xfrm>
+            <a:off x="3456432" y="2194560"/>
             <a:ext cx="2240280" cy="475488"/>
           </a:xfrm>
           <a:prstGeom prst="rect">
@@ -14549,7 +13903,7 @@
                 <a:ea typeface="Cambria" pitchFamily="34" charset="-122"/>
                 <a:cs typeface="Cambria" pitchFamily="34" charset="-120"/>
               </a:rPr>
-              <a:t>S1 · lịch sử tự sinh</a:t>
+              <a:t>GRPO-SPICE · lịch sử tự sinh</a:t>
             </a:r>
             <a:endParaRPr lang="en-US" sz="1250" dirty="0"/>
           </a:p>
@@ -14557,13 +13911,13 @@
       </p:sp>
       <p:sp>
         <p:nvSpPr>
-          <p:cNvPr id="8" name="Text 6"/>
-          <p:cNvSpPr/>
-          <p:nvPr/>
-        </p:nvSpPr>
-        <p:spPr>
-          <a:xfrm>
-            <a:off x="3456432" y="1664208"/>
+          <p:cNvPr id="9" name="Text 7"/>
+          <p:cNvSpPr/>
+          <p:nvPr/>
+        </p:nvSpPr>
+        <p:spPr>
+          <a:xfrm>
+            <a:off x="6245352" y="1664208"/>
             <a:ext cx="2240280" cy="502920"/>
           </a:xfrm>
           <a:prstGeom prst="rect">
@@ -14585,13 +13939,13 @@
             <a:r>
               <a:rPr lang="en-US" sz="2400" b="1" dirty="0">
                 <a:solidFill>
-                  <a:srgbClr val="4F417A"/>
-                </a:solidFill>
-                <a:latin typeface="Cambria" pitchFamily="34" charset="0"/>
-                <a:ea typeface="Cambria" pitchFamily="34" charset="-122"/>
-                <a:cs typeface="Cambria" pitchFamily="34" charset="-120"/>
-              </a:rPr>
-              <a:t>56,44%</a:t>
+                  <a:srgbClr val="25194B"/>
+                </a:solidFill>
+                <a:latin typeface="Cambria" pitchFamily="34" charset="0"/>
+                <a:ea typeface="Cambria" pitchFamily="34" charset="-122"/>
+                <a:cs typeface="Cambria" pitchFamily="34" charset="-120"/>
+              </a:rPr>
+              <a:t>+1,48</a:t>
             </a:r>
             <a:endParaRPr lang="en-US" sz="2400" dirty="0"/>
           </a:p>
@@ -14599,13 +13953,13 @@
       </p:sp>
       <p:sp>
         <p:nvSpPr>
-          <p:cNvPr id="9" name="Text 7"/>
-          <p:cNvSpPr/>
-          <p:nvPr/>
-        </p:nvSpPr>
-        <p:spPr>
-          <a:xfrm>
-            <a:off x="3456432" y="2194560"/>
+          <p:cNvPr id="10" name="Text 8"/>
+          <p:cNvSpPr/>
+          <p:nvPr/>
+        </p:nvSpPr>
+        <p:spPr>
+          <a:xfrm>
+            <a:off x="6245352" y="2194560"/>
             <a:ext cx="2240280" cy="475488"/>
           </a:xfrm>
           <a:prstGeom prst="rect">
@@ -14635,7 +13989,7 @@
                 <a:ea typeface="Cambria" pitchFamily="34" charset="-122"/>
                 <a:cs typeface="Cambria" pitchFamily="34" charset="-120"/>
               </a:rPr>
-              <a:t>GRPO-SPICE · lịch sử tự sinh</a:t>
+              <a:t>GRPO-SPICE − S1</a:t>
             </a:r>
             <a:endParaRPr lang="en-US" sz="1250" dirty="0"/>
           </a:p>
@@ -14643,93 +13997,7 @@
       </p:sp>
       <p:sp>
         <p:nvSpPr>
-          <p:cNvPr id="10" name="Text 8"/>
-          <p:cNvSpPr/>
-          <p:nvPr/>
-        </p:nvSpPr>
-        <p:spPr>
-          <a:xfrm>
-            <a:off x="6245352" y="1664208"/>
-            <a:ext cx="2240280" cy="502920"/>
-          </a:xfrm>
-          <a:prstGeom prst="rect">
-            <a:avLst/>
-          </a:prstGeom>
-          <a:noFill/>
-          <a:ln/>
-        </p:spPr>
-        <p:txBody>
-          <a:bodyPr wrap="square" lIns="0" tIns="0" rIns="0" bIns="0" rtlCol="0" anchor="ctr"/>
-          <a:lstStyle/>
-          <a:p>
-            <a:pPr algn="ctr" indent="0" marL="0">
-              <a:lnSpc>
-                <a:spcPct val="125000"/>
-              </a:lnSpc>
-              <a:buNone/>
-            </a:pPr>
-            <a:r>
-              <a:rPr lang="en-US" sz="2400" b="1" dirty="0">
-                <a:solidFill>
-                  <a:srgbClr val="25194B"/>
-                </a:solidFill>
-                <a:latin typeface="Cambria" pitchFamily="34" charset="0"/>
-                <a:ea typeface="Cambria" pitchFamily="34" charset="-122"/>
-                <a:cs typeface="Cambria" pitchFamily="34" charset="-120"/>
-              </a:rPr>
-              <a:t>+1,48</a:t>
-            </a:r>
-            <a:endParaRPr lang="en-US" sz="2400" dirty="0"/>
-          </a:p>
-        </p:txBody>
-      </p:sp>
-      <p:sp>
-        <p:nvSpPr>
-          <p:cNvPr id="11" name="Text 9"/>
-          <p:cNvSpPr/>
-          <p:nvPr/>
-        </p:nvSpPr>
-        <p:spPr>
-          <a:xfrm>
-            <a:off x="6245352" y="2194560"/>
-            <a:ext cx="2240280" cy="475488"/>
-          </a:xfrm>
-          <a:prstGeom prst="rect">
-            <a:avLst/>
-          </a:prstGeom>
-          <a:noFill/>
-          <a:ln/>
-        </p:spPr>
-        <p:txBody>
-          <a:bodyPr wrap="square" lIns="0" tIns="0" rIns="0" bIns="0" rtlCol="0" anchor="ctr">
-            <a:normAutofit/>
-          </a:bodyPr>
-          <a:lstStyle/>
-          <a:p>
-            <a:pPr algn="ctr" indent="0" marL="0">
-              <a:lnSpc>
-                <a:spcPct val="125000"/>
-              </a:lnSpc>
-              <a:buNone/>
-            </a:pPr>
-            <a:r>
-              <a:rPr lang="en-US" sz="1250" b="1" dirty="0">
-                <a:solidFill>
-                  <a:srgbClr val="1A1A1A"/>
-                </a:solidFill>
-                <a:latin typeface="Cambria" pitchFamily="34" charset="0"/>
-                <a:ea typeface="Cambria" pitchFamily="34" charset="-122"/>
-                <a:cs typeface="Cambria" pitchFamily="34" charset="-120"/>
-              </a:rPr>
-              <a:t>GRPO-SPICE − S1</a:t>
-            </a:r>
-            <a:endParaRPr lang="en-US" sz="1250" dirty="0"/>
-          </a:p>
-        </p:txBody>
-      </p:sp>
-      <p:sp>
-        <p:nvSpPr>
-          <p:cNvPr id="12" name="Shape 10"/>
+          <p:cNvPr id="11" name="Shape 9"/>
           <p:cNvSpPr/>
           <p:nvPr/>
         </p:nvSpPr>
@@ -14754,7 +14022,7 @@
       </p:sp>
       <p:sp>
         <p:nvSpPr>
-          <p:cNvPr id="13" name="Text 11"/>
+          <p:cNvPr id="12" name="Text 10"/>
           <p:cNvSpPr/>
           <p:nvPr/>
         </p:nvSpPr>
@@ -14796,7 +14064,7 @@
       </p:sp>
       <p:sp>
         <p:nvSpPr>
-          <p:cNvPr id="14" name="Text 12"/>
+          <p:cNvPr id="13" name="Text 11"/>
           <p:cNvSpPr/>
           <p:nvPr/>
         </p:nvSpPr>
@@ -14829,7 +14097,7 @@
       </p:sp>
       <p:sp>
         <p:nvSpPr>
-          <p:cNvPr id="15" name="Text 13"/>
+          <p:cNvPr id="14" name="Text 12"/>
           <p:cNvSpPr/>
           <p:nvPr/>
         </p:nvSpPr>
@@ -14871,49 +14139,7 @@
       </p:sp>
       <p:sp>
         <p:nvSpPr>
-          <p:cNvPr id="16" name="Text 14"/>
-          <p:cNvSpPr/>
-          <p:nvPr/>
-        </p:nvSpPr>
-        <p:spPr>
-          <a:xfrm>
-            <a:off x="502920" y="6327648"/>
-            <a:ext cx="8138160" cy="137160"/>
-          </a:xfrm>
-          <a:prstGeom prst="rect">
-            <a:avLst/>
-          </a:prstGeom>
-          <a:noFill/>
-          <a:ln/>
-        </p:spPr>
-        <p:txBody>
-          <a:bodyPr wrap="square" lIns="0" tIns="0" rIns="0" bIns="0" rtlCol="0" anchor="ctr"/>
-          <a:lstStyle/>
-          <a:p>
-            <a:pPr algn="r" indent="0" marL="0">
-              <a:lnSpc>
-                <a:spcPct val="125000"/>
-              </a:lnSpc>
-              <a:buNone/>
-            </a:pPr>
-            <a:r>
-              <a:rPr lang="en-US" sz="800" i="1" dirty="0">
-                <a:solidFill>
-                  <a:srgbClr val="5A5A66"/>
-                </a:solidFill>
-                <a:latin typeface="Cambria" pitchFamily="34" charset="0"/>
-                <a:ea typeface="Cambria" pitchFamily="34" charset="-122"/>
-                <a:cs typeface="Cambria" pitchFamily="34" charset="-120"/>
-              </a:rPr>
-              <a:t>Luận văn §6.8 · lịch sử tự sinh</a:t>
-            </a:r>
-            <a:endParaRPr lang="en-US" sz="800" dirty="0"/>
-          </a:p>
-        </p:txBody>
-      </p:sp>
-      <p:sp>
-        <p:nvSpPr>
-          <p:cNvPr id="17" name="Shape 15"/>
+          <p:cNvPr id="15" name="Shape 13"/>
           <p:cNvSpPr/>
           <p:nvPr/>
         </p:nvSpPr>
@@ -14940,7 +14166,7 @@
       </p:sp>
       <p:sp>
         <p:nvSpPr>
-          <p:cNvPr id="18" name="Shape 16"/>
+          <p:cNvPr id="16" name="Shape 14"/>
           <p:cNvSpPr/>
           <p:nvPr/>
         </p:nvSpPr>
@@ -14967,7 +14193,7 @@
       </p:sp>
       <p:sp>
         <p:nvSpPr>
-          <p:cNvPr id="19" name="Shape 17"/>
+          <p:cNvPr id="17" name="Shape 15"/>
           <p:cNvSpPr/>
           <p:nvPr/>
         </p:nvSpPr>
@@ -14994,7 +14220,7 @@
       </p:sp>
       <p:sp>
         <p:nvSpPr>
-          <p:cNvPr id="20" name="Shape 18"/>
+          <p:cNvPr id="18" name="Shape 16"/>
           <p:cNvSpPr/>
           <p:nvPr/>
         </p:nvSpPr>
@@ -15021,7 +14247,7 @@
       </p:sp>
       <p:sp>
         <p:nvSpPr>
-          <p:cNvPr id="21" name="Text 19"/>
+          <p:cNvPr id="19" name="Text 17"/>
           <p:cNvSpPr/>
           <p:nvPr/>
         </p:nvSpPr>
@@ -15063,7 +14289,7 @@
       </p:sp>
       <p:sp>
         <p:nvSpPr>
-          <p:cNvPr id="22" name="Text 20"/>
+          <p:cNvPr id="20" name="Text 18"/>
           <p:cNvSpPr/>
           <p:nvPr/>
         </p:nvSpPr>
@@ -15105,7 +14331,7 @@
       </p:sp>
       <p:sp>
         <p:nvSpPr>
-          <p:cNvPr id="23" name="Text 21"/>
+          <p:cNvPr id="21" name="Text 19"/>
           <p:cNvSpPr/>
           <p:nvPr/>
         </p:nvSpPr>
@@ -15147,7 +14373,7 @@
       </p:sp>
       <p:sp>
         <p:nvSpPr>
-          <p:cNvPr id="24" name="Text 22"/>
+          <p:cNvPr id="22" name="Text 20"/>
           <p:cNvSpPr/>
           <p:nvPr/>
         </p:nvSpPr>
@@ -15298,8 +14524,8 @@
         </p:nvSpPr>
         <p:spPr>
           <a:xfrm>
-            <a:off x="502920" y="603504"/>
-            <a:ext cx="8138160" cy="219456"/>
+            <a:off x="502920" y="877824"/>
+            <a:ext cx="8138160" cy="512064"/>
           </a:xfrm>
           <a:prstGeom prst="rect">
             <a:avLst/>
@@ -15313,14 +14539,14 @@
           </a:bodyPr>
           <a:lstStyle/>
           <a:p>
-            <a:pPr indent="0" marL="0">
-              <a:lnSpc>
-                <a:spcPct val="125000"/>
-              </a:lnSpc>
-              <a:buNone/>
-            </a:pPr>
-            <a:r>
-              <a:rPr lang="en-US" sz="1260" b="1" dirty="0">
+            <a:pPr algn="ctr" indent="0" marL="0">
+              <a:lnSpc>
+                <a:spcPct val="125000"/>
+              </a:lnSpc>
+              <a:buNone/>
+            </a:pPr>
+            <a:r>
+              <a:rPr lang="en-US" sz="1550" b="1" dirty="0">
                 <a:solidFill>
                   <a:srgbClr val="25194B"/>
                 </a:solidFill>
@@ -15328,9 +14554,9 @@
                 <a:ea typeface="Cambria" pitchFamily="34" charset="-122"/>
                 <a:cs typeface="Cambria" pitchFamily="34" charset="-120"/>
               </a:rPr>
-              <a:t>Chuyển miền sang AitZ</a:t>
-            </a:r>
-            <a:endParaRPr lang="en-US" sz="1260" dirty="0"/>
+              <a:t>AitZ dùng phân phối câu chuẩn khác AndroidControl để kiểm tra khả năng chuyển miền.</a:t>
+            </a:r>
+            <a:endParaRPr lang="en-US" sz="1550" dirty="0"/>
           </a:p>
         </p:txBody>
       </p:sp>
@@ -15342,8 +14568,50 @@
         </p:nvSpPr>
         <p:spPr>
           <a:xfrm>
-            <a:off x="502920" y="877824"/>
-            <a:ext cx="8138160" cy="512064"/>
+            <a:off x="658368" y="1572768"/>
+            <a:ext cx="2240280" cy="502920"/>
+          </a:xfrm>
+          <a:prstGeom prst="rect">
+            <a:avLst/>
+          </a:prstGeom>
+          <a:noFill/>
+          <a:ln/>
+        </p:spPr>
+        <p:txBody>
+          <a:bodyPr wrap="square" lIns="0" tIns="0" rIns="0" bIns="0" rtlCol="0" anchor="ctr"/>
+          <a:lstStyle/>
+          <a:p>
+            <a:pPr algn="ctr" indent="0" marL="0">
+              <a:lnSpc>
+                <a:spcPct val="125000"/>
+              </a:lnSpc>
+              <a:buNone/>
+            </a:pPr>
+            <a:r>
+              <a:rPr lang="en-US" sz="2400" b="1" dirty="0">
+                <a:solidFill>
+                  <a:srgbClr val="7A7099"/>
+                </a:solidFill>
+                <a:latin typeface="Cambria" pitchFamily="34" charset="0"/>
+                <a:ea typeface="Cambria" pitchFamily="34" charset="-122"/>
+                <a:cs typeface="Cambria" pitchFamily="34" charset="-120"/>
+              </a:rPr>
+              <a:t>34,50%</a:t>
+            </a:r>
+            <a:endParaRPr lang="en-US" sz="2400" dirty="0"/>
+          </a:p>
+        </p:txBody>
+      </p:sp>
+      <p:sp>
+        <p:nvSpPr>
+          <p:cNvPr id="6" name="Text 4"/>
+          <p:cNvSpPr/>
+          <p:nvPr/>
+        </p:nvSpPr>
+        <p:spPr>
+          <a:xfrm>
+            <a:off x="658368" y="2103120"/>
+            <a:ext cx="2240280" cy="475488"/>
           </a:xfrm>
           <a:prstGeom prst="rect">
             <a:avLst/>
@@ -15364,7 +14632,49 @@
               <a:buNone/>
             </a:pPr>
             <a:r>
-              <a:rPr lang="en-US" sz="1550" b="1" dirty="0">
+              <a:rPr lang="en-US" sz="1250" b="1" dirty="0">
+                <a:solidFill>
+                  <a:srgbClr val="1A1A1A"/>
+                </a:solidFill>
+                <a:latin typeface="Cambria" pitchFamily="34" charset="0"/>
+                <a:ea typeface="Cambria" pitchFamily="34" charset="-122"/>
+                <a:cs typeface="Cambria" pitchFamily="34" charset="-120"/>
+              </a:rPr>
+              <a:t>Base</a:t>
+            </a:r>
+            <a:endParaRPr lang="en-US" sz="1250" dirty="0"/>
+          </a:p>
+        </p:txBody>
+      </p:sp>
+      <p:sp>
+        <p:nvSpPr>
+          <p:cNvPr id="7" name="Text 5"/>
+          <p:cNvSpPr/>
+          <p:nvPr/>
+        </p:nvSpPr>
+        <p:spPr>
+          <a:xfrm>
+            <a:off x="3456432" y="1572768"/>
+            <a:ext cx="2240280" cy="502920"/>
+          </a:xfrm>
+          <a:prstGeom prst="rect">
+            <a:avLst/>
+          </a:prstGeom>
+          <a:noFill/>
+          <a:ln/>
+        </p:spPr>
+        <p:txBody>
+          <a:bodyPr wrap="square" lIns="0" tIns="0" rIns="0" bIns="0" rtlCol="0" anchor="ctr"/>
+          <a:lstStyle/>
+          <a:p>
+            <a:pPr algn="ctr" indent="0" marL="0">
+              <a:lnSpc>
+                <a:spcPct val="125000"/>
+              </a:lnSpc>
+              <a:buNone/>
+            </a:pPr>
+            <a:r>
+              <a:rPr lang="en-US" sz="2400" b="1" dirty="0">
                 <a:solidFill>
                   <a:srgbClr val="25194B"/>
                 </a:solidFill>
@@ -15372,49 +14682,7 @@
                 <a:ea typeface="Cambria" pitchFamily="34" charset="-122"/>
                 <a:cs typeface="Cambria" pitchFamily="34" charset="-120"/>
               </a:rPr>
-              <a:t>AitZ dùng phân phối câu chuẩn khác AndroidControl để kiểm tra khả năng chuyển miền.</a:t>
-            </a:r>
-            <a:endParaRPr lang="en-US" sz="1550" dirty="0"/>
-          </a:p>
-        </p:txBody>
-      </p:sp>
-      <p:sp>
-        <p:nvSpPr>
-          <p:cNvPr id="6" name="Text 4"/>
-          <p:cNvSpPr/>
-          <p:nvPr/>
-        </p:nvSpPr>
-        <p:spPr>
-          <a:xfrm>
-            <a:off x="658368" y="1572768"/>
-            <a:ext cx="2240280" cy="502920"/>
-          </a:xfrm>
-          <a:prstGeom prst="rect">
-            <a:avLst/>
-          </a:prstGeom>
-          <a:noFill/>
-          <a:ln/>
-        </p:spPr>
-        <p:txBody>
-          <a:bodyPr wrap="square" lIns="0" tIns="0" rIns="0" bIns="0" rtlCol="0" anchor="ctr"/>
-          <a:lstStyle/>
-          <a:p>
-            <a:pPr algn="ctr" indent="0" marL="0">
-              <a:lnSpc>
-                <a:spcPct val="125000"/>
-              </a:lnSpc>
-              <a:buNone/>
-            </a:pPr>
-            <a:r>
-              <a:rPr lang="en-US" sz="2400" b="1" dirty="0">
-                <a:solidFill>
-                  <a:srgbClr val="7A7099"/>
-                </a:solidFill>
-                <a:latin typeface="Cambria" pitchFamily="34" charset="0"/>
-                <a:ea typeface="Cambria" pitchFamily="34" charset="-122"/>
-                <a:cs typeface="Cambria" pitchFamily="34" charset="-120"/>
-              </a:rPr>
-              <a:t>34,50%</a:t>
+              <a:t>37,79%</a:t>
             </a:r>
             <a:endParaRPr lang="en-US" sz="2400" dirty="0"/>
           </a:p>
@@ -15422,13 +14690,13 @@
       </p:sp>
       <p:sp>
         <p:nvSpPr>
-          <p:cNvPr id="7" name="Text 5"/>
-          <p:cNvSpPr/>
-          <p:nvPr/>
-        </p:nvSpPr>
-        <p:spPr>
-          <a:xfrm>
-            <a:off x="658368" y="2103120"/>
+          <p:cNvPr id="8" name="Text 6"/>
+          <p:cNvSpPr/>
+          <p:nvPr/>
+        </p:nvSpPr>
+        <p:spPr>
+          <a:xfrm>
+            <a:off x="3456432" y="2103120"/>
             <a:ext cx="2240280" cy="475488"/>
           </a:xfrm>
           <a:prstGeom prst="rect">
@@ -15458,7 +14726,7 @@
                 <a:ea typeface="Cambria" pitchFamily="34" charset="-122"/>
                 <a:cs typeface="Cambria" pitchFamily="34" charset="-120"/>
               </a:rPr>
-              <a:t>Base</a:t>
+              <a:t>S1</a:t>
             </a:r>
             <a:endParaRPr lang="en-US" sz="1250" dirty="0"/>
           </a:p>
@@ -15466,13 +14734,13 @@
       </p:sp>
       <p:sp>
         <p:nvSpPr>
-          <p:cNvPr id="8" name="Text 6"/>
-          <p:cNvSpPr/>
-          <p:nvPr/>
-        </p:nvSpPr>
-        <p:spPr>
-          <a:xfrm>
-            <a:off x="3456432" y="1572768"/>
+          <p:cNvPr id="9" name="Text 7"/>
+          <p:cNvSpPr/>
+          <p:nvPr/>
+        </p:nvSpPr>
+        <p:spPr>
+          <a:xfrm>
+            <a:off x="6245352" y="1572768"/>
             <a:ext cx="2240280" cy="502920"/>
           </a:xfrm>
           <a:prstGeom prst="rect">
@@ -15494,13 +14762,13 @@
             <a:r>
               <a:rPr lang="en-US" sz="2400" b="1" dirty="0">
                 <a:solidFill>
-                  <a:srgbClr val="25194B"/>
-                </a:solidFill>
-                <a:latin typeface="Cambria" pitchFamily="34" charset="0"/>
-                <a:ea typeface="Cambria" pitchFamily="34" charset="-122"/>
-                <a:cs typeface="Cambria" pitchFamily="34" charset="-120"/>
-              </a:rPr>
-              <a:t>37,79%</a:t>
+                  <a:srgbClr val="4F417A"/>
+                </a:solidFill>
+                <a:latin typeface="Cambria" pitchFamily="34" charset="0"/>
+                <a:ea typeface="Cambria" pitchFamily="34" charset="-122"/>
+                <a:cs typeface="Cambria" pitchFamily="34" charset="-120"/>
+              </a:rPr>
+              <a:t>37,28%</a:t>
             </a:r>
             <a:endParaRPr lang="en-US" sz="2400" dirty="0"/>
           </a:p>
@@ -15508,13 +14776,13 @@
       </p:sp>
       <p:sp>
         <p:nvSpPr>
-          <p:cNvPr id="9" name="Text 7"/>
-          <p:cNvSpPr/>
-          <p:nvPr/>
-        </p:nvSpPr>
-        <p:spPr>
-          <a:xfrm>
-            <a:off x="3456432" y="2103120"/>
+          <p:cNvPr id="10" name="Text 8"/>
+          <p:cNvSpPr/>
+          <p:nvPr/>
+        </p:nvSpPr>
+        <p:spPr>
+          <a:xfrm>
+            <a:off x="6245352" y="2103120"/>
             <a:ext cx="2240280" cy="475488"/>
           </a:xfrm>
           <a:prstGeom prst="rect">
@@ -15544,7 +14812,7 @@
                 <a:ea typeface="Cambria" pitchFamily="34" charset="-122"/>
                 <a:cs typeface="Cambria" pitchFamily="34" charset="-120"/>
               </a:rPr>
-              <a:t>S1</a:t>
+              <a:t>GRPO-SPICE</a:t>
             </a:r>
             <a:endParaRPr lang="en-US" sz="1250" dirty="0"/>
           </a:p>
@@ -15552,93 +14820,7 @@
       </p:sp>
       <p:sp>
         <p:nvSpPr>
-          <p:cNvPr id="10" name="Text 8"/>
-          <p:cNvSpPr/>
-          <p:nvPr/>
-        </p:nvSpPr>
-        <p:spPr>
-          <a:xfrm>
-            <a:off x="6245352" y="1572768"/>
-            <a:ext cx="2240280" cy="502920"/>
-          </a:xfrm>
-          <a:prstGeom prst="rect">
-            <a:avLst/>
-          </a:prstGeom>
-          <a:noFill/>
-          <a:ln/>
-        </p:spPr>
-        <p:txBody>
-          <a:bodyPr wrap="square" lIns="0" tIns="0" rIns="0" bIns="0" rtlCol="0" anchor="ctr"/>
-          <a:lstStyle/>
-          <a:p>
-            <a:pPr algn="ctr" indent="0" marL="0">
-              <a:lnSpc>
-                <a:spcPct val="125000"/>
-              </a:lnSpc>
-              <a:buNone/>
-            </a:pPr>
-            <a:r>
-              <a:rPr lang="en-US" sz="2400" b="1" dirty="0">
-                <a:solidFill>
-                  <a:srgbClr val="4F417A"/>
-                </a:solidFill>
-                <a:latin typeface="Cambria" pitchFamily="34" charset="0"/>
-                <a:ea typeface="Cambria" pitchFamily="34" charset="-122"/>
-                <a:cs typeface="Cambria" pitchFamily="34" charset="-120"/>
-              </a:rPr>
-              <a:t>37,28%</a:t>
-            </a:r>
-            <a:endParaRPr lang="en-US" sz="2400" dirty="0"/>
-          </a:p>
-        </p:txBody>
-      </p:sp>
-      <p:sp>
-        <p:nvSpPr>
-          <p:cNvPr id="11" name="Text 9"/>
-          <p:cNvSpPr/>
-          <p:nvPr/>
-        </p:nvSpPr>
-        <p:spPr>
-          <a:xfrm>
-            <a:off x="6245352" y="2103120"/>
-            <a:ext cx="2240280" cy="475488"/>
-          </a:xfrm>
-          <a:prstGeom prst="rect">
-            <a:avLst/>
-          </a:prstGeom>
-          <a:noFill/>
-          <a:ln/>
-        </p:spPr>
-        <p:txBody>
-          <a:bodyPr wrap="square" lIns="0" tIns="0" rIns="0" bIns="0" rtlCol="0" anchor="ctr">
-            <a:normAutofit/>
-          </a:bodyPr>
-          <a:lstStyle/>
-          <a:p>
-            <a:pPr algn="ctr" indent="0" marL="0">
-              <a:lnSpc>
-                <a:spcPct val="125000"/>
-              </a:lnSpc>
-              <a:buNone/>
-            </a:pPr>
-            <a:r>
-              <a:rPr lang="en-US" sz="1250" b="1" dirty="0">
-                <a:solidFill>
-                  <a:srgbClr val="1A1A1A"/>
-                </a:solidFill>
-                <a:latin typeface="Cambria" pitchFamily="34" charset="0"/>
-                <a:ea typeface="Cambria" pitchFamily="34" charset="-122"/>
-                <a:cs typeface="Cambria" pitchFamily="34" charset="-120"/>
-              </a:rPr>
-              <a:t>GRPO-SPICE</a:t>
-            </a:r>
-            <a:endParaRPr lang="en-US" sz="1250" dirty="0"/>
-          </a:p>
-        </p:txBody>
-      </p:sp>
-      <p:sp>
-        <p:nvSpPr>
-          <p:cNvPr id="12" name="Shape 10"/>
+          <p:cNvPr id="11" name="Shape 9"/>
           <p:cNvSpPr/>
           <p:nvPr/>
         </p:nvSpPr>
@@ -15663,7 +14845,7 @@
       </p:sp>
       <p:sp>
         <p:nvSpPr>
-          <p:cNvPr id="13" name="Text 11"/>
+          <p:cNvPr id="12" name="Text 10"/>
           <p:cNvSpPr/>
           <p:nvPr/>
         </p:nvSpPr>
@@ -15705,7 +14887,7 @@
       </p:sp>
       <p:sp>
         <p:nvSpPr>
-          <p:cNvPr id="14" name="Text 12"/>
+          <p:cNvPr id="13" name="Text 11"/>
           <p:cNvSpPr/>
           <p:nvPr/>
         </p:nvSpPr>
@@ -15747,7 +14929,7 @@
       </p:sp>
       <p:sp>
         <p:nvSpPr>
-          <p:cNvPr id="15" name="Shape 13"/>
+          <p:cNvPr id="14" name="Shape 12"/>
           <p:cNvSpPr/>
           <p:nvPr/>
         </p:nvSpPr>
@@ -15772,7 +14954,7 @@
       </p:sp>
       <p:sp>
         <p:nvSpPr>
-          <p:cNvPr id="16" name="Text 14"/>
+          <p:cNvPr id="15" name="Text 13"/>
           <p:cNvSpPr/>
           <p:nvPr/>
         </p:nvSpPr>
@@ -15814,7 +14996,7 @@
       </p:sp>
       <p:sp>
         <p:nvSpPr>
-          <p:cNvPr id="17" name="Text 15"/>
+          <p:cNvPr id="16" name="Text 14"/>
           <p:cNvSpPr/>
           <p:nvPr/>
         </p:nvSpPr>
@@ -15856,7 +15038,7 @@
       </p:sp>
       <p:sp>
         <p:nvSpPr>
-          <p:cNvPr id="18" name="Text 16"/>
+          <p:cNvPr id="17" name="Text 15"/>
           <p:cNvSpPr/>
           <p:nvPr/>
         </p:nvSpPr>
@@ -15889,7 +15071,7 @@
       </p:sp>
       <p:sp>
         <p:nvSpPr>
-          <p:cNvPr id="19" name="Text 17"/>
+          <p:cNvPr id="18" name="Text 16"/>
           <p:cNvSpPr/>
           <p:nvPr/>
         </p:nvSpPr>
@@ -15931,49 +15113,7 @@
       </p:sp>
       <p:sp>
         <p:nvSpPr>
-          <p:cNvPr id="20" name="Text 18"/>
-          <p:cNvSpPr/>
-          <p:nvPr/>
-        </p:nvSpPr>
-        <p:spPr>
-          <a:xfrm>
-            <a:off x="502920" y="6327648"/>
-            <a:ext cx="8138160" cy="137160"/>
-          </a:xfrm>
-          <a:prstGeom prst="rect">
-            <a:avLst/>
-          </a:prstGeom>
-          <a:noFill/>
-          <a:ln/>
-        </p:spPr>
-        <p:txBody>
-          <a:bodyPr wrap="square" lIns="0" tIns="0" rIns="0" bIns="0" rtlCol="0" anchor="ctr"/>
-          <a:lstStyle/>
-          <a:p>
-            <a:pPr algn="r" indent="0" marL="0">
-              <a:lnSpc>
-                <a:spcPct val="125000"/>
-              </a:lnSpc>
-              <a:buNone/>
-            </a:pPr>
-            <a:r>
-              <a:rPr lang="en-US" sz="800" i="1" dirty="0">
-                <a:solidFill>
-                  <a:srgbClr val="5A5A66"/>
-                </a:solidFill>
-                <a:latin typeface="Cambria" pitchFamily="34" charset="0"/>
-                <a:ea typeface="Cambria" pitchFamily="34" charset="-122"/>
-                <a:cs typeface="Cambria" pitchFamily="34" charset="-120"/>
-              </a:rPr>
-              <a:t>Luận văn §6.8 · AitZ</a:t>
-            </a:r>
-            <a:endParaRPr lang="en-US" sz="800" dirty="0"/>
-          </a:p>
-        </p:txBody>
-      </p:sp>
-      <p:sp>
-        <p:nvSpPr>
-          <p:cNvPr id="21" name="Shape 19"/>
+          <p:cNvPr id="19" name="Shape 17"/>
           <p:cNvSpPr/>
           <p:nvPr/>
         </p:nvSpPr>
@@ -16000,7 +15140,7 @@
       </p:sp>
       <p:sp>
         <p:nvSpPr>
-          <p:cNvPr id="22" name="Shape 20"/>
+          <p:cNvPr id="20" name="Shape 18"/>
           <p:cNvSpPr/>
           <p:nvPr/>
         </p:nvSpPr>
@@ -16027,7 +15167,7 @@
       </p:sp>
       <p:sp>
         <p:nvSpPr>
-          <p:cNvPr id="23" name="Shape 21"/>
+          <p:cNvPr id="21" name="Shape 19"/>
           <p:cNvSpPr/>
           <p:nvPr/>
         </p:nvSpPr>
@@ -16054,7 +15194,7 @@
       </p:sp>
       <p:sp>
         <p:nvSpPr>
-          <p:cNvPr id="24" name="Shape 22"/>
+          <p:cNvPr id="22" name="Shape 20"/>
           <p:cNvSpPr/>
           <p:nvPr/>
         </p:nvSpPr>
@@ -16081,7 +15221,7 @@
       </p:sp>
       <p:sp>
         <p:nvSpPr>
-          <p:cNvPr id="25" name="Text 23"/>
+          <p:cNvPr id="23" name="Text 21"/>
           <p:cNvSpPr/>
           <p:nvPr/>
         </p:nvSpPr>
@@ -16123,7 +15263,7 @@
       </p:sp>
       <p:sp>
         <p:nvSpPr>
-          <p:cNvPr id="26" name="Text 24"/>
+          <p:cNvPr id="24" name="Text 22"/>
           <p:cNvSpPr/>
           <p:nvPr/>
         </p:nvSpPr>
@@ -16165,7 +15305,7 @@
       </p:sp>
       <p:sp>
         <p:nvSpPr>
-          <p:cNvPr id="27" name="Text 25"/>
+          <p:cNvPr id="25" name="Text 23"/>
           <p:cNvSpPr/>
           <p:nvPr/>
         </p:nvSpPr>
@@ -16207,7 +15347,7 @@
       </p:sp>
       <p:sp>
         <p:nvSpPr>
-          <p:cNvPr id="28" name="Text 26"/>
+          <p:cNvPr id="26" name="Text 24"/>
           <p:cNvSpPr/>
           <p:nvPr/>
         </p:nvSpPr>
@@ -16358,8 +15498,8 @@
         </p:nvSpPr>
         <p:spPr>
           <a:xfrm>
-            <a:off x="502920" y="603504"/>
-            <a:ext cx="8138160" cy="219456"/>
+            <a:off x="502920" y="896112"/>
+            <a:ext cx="8138160" cy="566928"/>
           </a:xfrm>
           <a:prstGeom prst="rect">
             <a:avLst/>
@@ -16373,14 +15513,14 @@
           </a:bodyPr>
           <a:lstStyle/>
           <a:p>
-            <a:pPr indent="0" marL="0">
-              <a:lnSpc>
-                <a:spcPct val="125000"/>
-              </a:lnSpc>
-              <a:buNone/>
-            </a:pPr>
-            <a:r>
-              <a:rPr lang="en-US" sz="1260" b="1" dirty="0">
+            <a:pPr algn="ctr" indent="0" marL="0">
+              <a:lnSpc>
+                <a:spcPct val="125000"/>
+              </a:lnSpc>
+              <a:buNone/>
+            </a:pPr>
+            <a:r>
+              <a:rPr lang="en-US" sz="1700" b="1" dirty="0">
                 <a:solidFill>
                   <a:srgbClr val="25194B"/>
                 </a:solidFill>
@@ -16388,50 +15528,6 @@
                 <a:ea typeface="Cambria" pitchFamily="34" charset="-122"/>
                 <a:cs typeface="Cambria" pitchFamily="34" charset="-120"/>
               </a:rPr>
-              <a:t>Bài toán</a:t>
-            </a:r>
-            <a:endParaRPr lang="en-US" sz="1260" dirty="0"/>
-          </a:p>
-        </p:txBody>
-      </p:sp>
-      <p:sp>
-        <p:nvSpPr>
-          <p:cNvPr id="5" name="Text 3"/>
-          <p:cNvSpPr/>
-          <p:nvPr/>
-        </p:nvSpPr>
-        <p:spPr>
-          <a:xfrm>
-            <a:off x="502920" y="896112"/>
-            <a:ext cx="8138160" cy="566928"/>
-          </a:xfrm>
-          <a:prstGeom prst="rect">
-            <a:avLst/>
-          </a:prstGeom>
-          <a:noFill/>
-          <a:ln/>
-        </p:spPr>
-        <p:txBody>
-          <a:bodyPr wrap="square" lIns="0" tIns="0" rIns="0" bIns="0" rtlCol="0" anchor="ctr">
-            <a:normAutofit/>
-          </a:bodyPr>
-          <a:lstStyle/>
-          <a:p>
-            <a:pPr algn="ctr" indent="0" marL="0">
-              <a:lnSpc>
-                <a:spcPct val="125000"/>
-              </a:lnSpc>
-              <a:buNone/>
-            </a:pPr>
-            <a:r>
-              <a:rPr lang="en-US" sz="1700" b="1" dirty="0">
-                <a:solidFill>
-                  <a:srgbClr val="25194B"/>
-                </a:solidFill>
-                <a:latin typeface="Cambria" pitchFamily="34" charset="0"/>
-                <a:ea typeface="Cambria" pitchFamily="34" charset="-122"/>
-                <a:cs typeface="Cambria" pitchFamily="34" charset="-120"/>
-              </a:rPr>
               <a:t>Từ trạng thái giao diện hiện tại, sinh một câu hướng dẫn để người dùng biết chính xác bước tiếp theo cần làm.</a:t>
             </a:r>
             <a:endParaRPr lang="en-US" sz="1700" dirty="0"/>
@@ -16440,7 +15536,7 @@
       </p:sp>
       <p:sp>
         <p:nvSpPr>
-          <p:cNvPr id="6" name="Shape 4"/>
+          <p:cNvPr id="5" name="Shape 3"/>
           <p:cNvSpPr/>
           <p:nvPr/>
         </p:nvSpPr>
@@ -16465,7 +15561,7 @@
       </p:sp>
       <p:sp>
         <p:nvSpPr>
-          <p:cNvPr id="7" name="Text 5"/>
+          <p:cNvPr id="6" name="Text 4"/>
           <p:cNvSpPr/>
           <p:nvPr/>
         </p:nvSpPr>
@@ -16509,7 +15605,7 @@
       </p:sp>
       <p:sp>
         <p:nvSpPr>
-          <p:cNvPr id="8" name="Shape 6"/>
+          <p:cNvPr id="7" name="Shape 5"/>
           <p:cNvSpPr/>
           <p:nvPr/>
         </p:nvSpPr>
@@ -16533,7 +15629,7 @@
       </p:sp>
       <p:sp>
         <p:nvSpPr>
-          <p:cNvPr id="9" name="Shape 7"/>
+          <p:cNvPr id="8" name="Shape 6"/>
           <p:cNvSpPr/>
           <p:nvPr/>
         </p:nvSpPr>
@@ -16558,7 +15654,7 @@
       </p:sp>
       <p:sp>
         <p:nvSpPr>
-          <p:cNvPr id="10" name="Text 8"/>
+          <p:cNvPr id="9" name="Text 7"/>
           <p:cNvSpPr/>
           <p:nvPr/>
         </p:nvSpPr>
@@ -16602,7 +15698,7 @@
       </p:sp>
       <p:sp>
         <p:nvSpPr>
-          <p:cNvPr id="11" name="Shape 9"/>
+          <p:cNvPr id="10" name="Shape 8"/>
           <p:cNvSpPr/>
           <p:nvPr/>
         </p:nvSpPr>
@@ -16626,7 +15722,7 @@
       </p:sp>
       <p:sp>
         <p:nvSpPr>
-          <p:cNvPr id="12" name="Shape 10"/>
+          <p:cNvPr id="11" name="Shape 9"/>
           <p:cNvSpPr/>
           <p:nvPr/>
         </p:nvSpPr>
@@ -16651,7 +15747,7 @@
       </p:sp>
       <p:sp>
         <p:nvSpPr>
-          <p:cNvPr id="13" name="Text 11"/>
+          <p:cNvPr id="12" name="Text 10"/>
           <p:cNvSpPr/>
           <p:nvPr/>
         </p:nvSpPr>
@@ -16695,7 +15791,7 @@
       </p:sp>
       <p:sp>
         <p:nvSpPr>
-          <p:cNvPr id="14" name="Text 12"/>
+          <p:cNvPr id="13" name="Text 11"/>
           <p:cNvSpPr/>
           <p:nvPr/>
         </p:nvSpPr>
@@ -16737,7 +15833,7 @@
       </p:sp>
       <p:sp>
         <p:nvSpPr>
-          <p:cNvPr id="15" name="Shape 13"/>
+          <p:cNvPr id="14" name="Shape 12"/>
           <p:cNvSpPr/>
           <p:nvPr/>
         </p:nvSpPr>
@@ -16764,7 +15860,7 @@
       </p:sp>
       <p:sp>
         <p:nvSpPr>
-          <p:cNvPr id="16" name="Text 14"/>
+          <p:cNvPr id="15" name="Text 13"/>
           <p:cNvSpPr/>
           <p:nvPr/>
         </p:nvSpPr>
@@ -16808,7 +15904,7 @@
       </p:sp>
       <p:sp>
         <p:nvSpPr>
-          <p:cNvPr id="17" name="Shape 15"/>
+          <p:cNvPr id="16" name="Shape 14"/>
           <p:cNvSpPr/>
           <p:nvPr/>
         </p:nvSpPr>
@@ -16835,7 +15931,7 @@
       </p:sp>
       <p:sp>
         <p:nvSpPr>
-          <p:cNvPr id="18" name="Text 16"/>
+          <p:cNvPr id="17" name="Text 15"/>
           <p:cNvSpPr/>
           <p:nvPr/>
         </p:nvSpPr>
@@ -16879,7 +15975,7 @@
       </p:sp>
       <p:sp>
         <p:nvSpPr>
-          <p:cNvPr id="19" name="Shape 17"/>
+          <p:cNvPr id="18" name="Shape 16"/>
           <p:cNvSpPr/>
           <p:nvPr/>
         </p:nvSpPr>
@@ -16906,7 +16002,7 @@
       </p:sp>
       <p:sp>
         <p:nvSpPr>
-          <p:cNvPr id="20" name="Text 18"/>
+          <p:cNvPr id="19" name="Text 17"/>
           <p:cNvSpPr/>
           <p:nvPr/>
         </p:nvSpPr>
@@ -16950,7 +16046,7 @@
       </p:sp>
       <p:sp>
         <p:nvSpPr>
-          <p:cNvPr id="21" name="Shape 19"/>
+          <p:cNvPr id="20" name="Shape 18"/>
           <p:cNvSpPr/>
           <p:nvPr/>
         </p:nvSpPr>
@@ -16977,7 +16073,7 @@
       </p:sp>
       <p:sp>
         <p:nvSpPr>
-          <p:cNvPr id="22" name="Text 20"/>
+          <p:cNvPr id="21" name="Text 19"/>
           <p:cNvSpPr/>
           <p:nvPr/>
         </p:nvSpPr>
@@ -17021,7 +16117,7 @@
       </p:sp>
       <p:sp>
         <p:nvSpPr>
-          <p:cNvPr id="23" name="Shape 21"/>
+          <p:cNvPr id="22" name="Shape 20"/>
           <p:cNvSpPr/>
           <p:nvPr/>
         </p:nvSpPr>
@@ -17046,7 +16142,7 @@
       </p:sp>
       <p:sp>
         <p:nvSpPr>
-          <p:cNvPr id="24" name="Text 22"/>
+          <p:cNvPr id="23" name="Text 21"/>
           <p:cNvSpPr/>
           <p:nvPr/>
         </p:nvSpPr>
@@ -17088,7 +16184,7 @@
       </p:sp>
       <p:sp>
         <p:nvSpPr>
-          <p:cNvPr id="25" name="Text 23"/>
+          <p:cNvPr id="24" name="Text 22"/>
           <p:cNvSpPr/>
           <p:nvPr/>
         </p:nvSpPr>
@@ -17150,7 +16246,7 @@
       </p:sp>
       <p:sp>
         <p:nvSpPr>
-          <p:cNvPr id="26" name="Text 24"/>
+          <p:cNvPr id="25" name="Text 23"/>
           <p:cNvSpPr/>
           <p:nvPr/>
         </p:nvSpPr>
@@ -17194,49 +16290,7 @@
       </p:sp>
       <p:sp>
         <p:nvSpPr>
-          <p:cNvPr id="27" name="Text 25"/>
-          <p:cNvSpPr/>
-          <p:nvPr/>
-        </p:nvSpPr>
-        <p:spPr>
-          <a:xfrm>
-            <a:off x="502920" y="6327648"/>
-            <a:ext cx="8138160" cy="137160"/>
-          </a:xfrm>
-          <a:prstGeom prst="rect">
-            <a:avLst/>
-          </a:prstGeom>
-          <a:noFill/>
-          <a:ln/>
-        </p:spPr>
-        <p:txBody>
-          <a:bodyPr wrap="square" lIns="0" tIns="0" rIns="0" bIns="0" rtlCol="0" anchor="ctr"/>
-          <a:lstStyle/>
-          <a:p>
-            <a:pPr algn="r" indent="0" marL="0">
-              <a:lnSpc>
-                <a:spcPct val="125000"/>
-              </a:lnSpc>
-              <a:buNone/>
-            </a:pPr>
-            <a:r>
-              <a:rPr lang="en-US" sz="800" i="1" dirty="0">
-                <a:solidFill>
-                  <a:srgbClr val="5A5A66"/>
-                </a:solidFill>
-                <a:latin typeface="Cambria" pitchFamily="34" charset="0"/>
-                <a:ea typeface="Cambria" pitchFamily="34" charset="-122"/>
-                <a:cs typeface="Cambria" pitchFamily="34" charset="-120"/>
-              </a:rPr>
-              <a:t>Luận văn §1.2–§1.3</a:t>
-            </a:r>
-            <a:endParaRPr lang="en-US" sz="800" dirty="0"/>
-          </a:p>
-        </p:txBody>
-      </p:sp>
-      <p:sp>
-        <p:nvSpPr>
-          <p:cNvPr id="28" name="Shape 26"/>
+          <p:cNvPr id="26" name="Shape 24"/>
           <p:cNvSpPr/>
           <p:nvPr/>
         </p:nvSpPr>
@@ -17263,7 +16317,7 @@
       </p:sp>
       <p:sp>
         <p:nvSpPr>
-          <p:cNvPr id="29" name="Shape 27"/>
+          <p:cNvPr id="27" name="Shape 25"/>
           <p:cNvSpPr/>
           <p:nvPr/>
         </p:nvSpPr>
@@ -17290,7 +16344,7 @@
       </p:sp>
       <p:sp>
         <p:nvSpPr>
-          <p:cNvPr id="30" name="Shape 28"/>
+          <p:cNvPr id="28" name="Shape 26"/>
           <p:cNvSpPr/>
           <p:nvPr/>
         </p:nvSpPr>
@@ -17317,7 +16371,7 @@
       </p:sp>
       <p:sp>
         <p:nvSpPr>
-          <p:cNvPr id="31" name="Shape 29"/>
+          <p:cNvPr id="29" name="Shape 27"/>
           <p:cNvSpPr/>
           <p:nvPr/>
         </p:nvSpPr>
@@ -17344,7 +16398,7 @@
       </p:sp>
       <p:sp>
         <p:nvSpPr>
-          <p:cNvPr id="32" name="Text 30"/>
+          <p:cNvPr id="30" name="Text 28"/>
           <p:cNvSpPr/>
           <p:nvPr/>
         </p:nvSpPr>
@@ -17386,7 +16440,7 @@
       </p:sp>
       <p:sp>
         <p:nvSpPr>
-          <p:cNvPr id="33" name="Text 31"/>
+          <p:cNvPr id="31" name="Text 29"/>
           <p:cNvSpPr/>
           <p:nvPr/>
         </p:nvSpPr>
@@ -17428,7 +16482,7 @@
       </p:sp>
       <p:sp>
         <p:nvSpPr>
-          <p:cNvPr id="34" name="Text 32"/>
+          <p:cNvPr id="32" name="Text 30"/>
           <p:cNvSpPr/>
           <p:nvPr/>
         </p:nvSpPr>
@@ -17470,7 +16524,7 @@
       </p:sp>
       <p:sp>
         <p:nvSpPr>
-          <p:cNvPr id="35" name="Text 33"/>
+          <p:cNvPr id="33" name="Text 31"/>
           <p:cNvSpPr/>
           <p:nvPr/>
         </p:nvSpPr>
@@ -17613,53 +16667,9 @@
           </a:p>
         </p:txBody>
       </p:sp>
-      <p:sp>
-        <p:nvSpPr>
-          <p:cNvPr id="4" name="Text 2"/>
-          <p:cNvSpPr/>
-          <p:nvPr/>
-        </p:nvSpPr>
-        <p:spPr>
-          <a:xfrm>
-            <a:off x="502920" y="603504"/>
-            <a:ext cx="8138160" cy="219456"/>
-          </a:xfrm>
-          <a:prstGeom prst="rect">
-            <a:avLst/>
-          </a:prstGeom>
-          <a:noFill/>
-          <a:ln/>
-        </p:spPr>
-        <p:txBody>
-          <a:bodyPr wrap="square" lIns="0" tIns="0" rIns="0" bIns="0" rtlCol="0" anchor="ctr">
-            <a:normAutofit/>
-          </a:bodyPr>
-          <a:lstStyle/>
-          <a:p>
-            <a:pPr indent="0" marL="0">
-              <a:lnSpc>
-                <a:spcPct val="125000"/>
-              </a:lnSpc>
-              <a:buNone/>
-            </a:pPr>
-            <a:r>
-              <a:rPr lang="en-US" sz="1260" b="1" dirty="0">
-                <a:solidFill>
-                  <a:srgbClr val="25194B"/>
-                </a:solidFill>
-                <a:latin typeface="Cambria" pitchFamily="34" charset="0"/>
-                <a:ea typeface="Cambria" pitchFamily="34" charset="-122"/>
-                <a:cs typeface="Cambria" pitchFamily="34" charset="-120"/>
-              </a:rPr>
-              <a:t>Ví dụ định tính</a:t>
-            </a:r>
-            <a:endParaRPr lang="en-US" sz="1260" dirty="0"/>
-          </a:p>
-        </p:txBody>
-      </p:sp>
       <p:pic>
         <p:nvPicPr>
-          <p:cNvPr id="5" name="Image 0" descr="/mnt/d/Master/Thesis/thesis/figures/fig_vidu_spice.png">    </p:cNvPr>
+          <p:cNvPr id="4" name="Image 0" descr="/mnt/d/Master/Thesis/thesis/figures/fig_vidu_spice.png">    </p:cNvPr>
           <p:cNvPicPr>
             <a:picLocks noChangeAspect="1"/>
           </p:cNvPicPr>
@@ -17683,7 +16693,7 @@
       </p:pic>
       <p:sp>
         <p:nvSpPr>
-          <p:cNvPr id="6" name="Text 3"/>
+          <p:cNvPr id="5" name="Text 2"/>
           <p:cNvSpPr/>
           <p:nvPr/>
         </p:nvSpPr>
@@ -17725,7 +16735,7 @@
       </p:sp>
       <p:sp>
         <p:nvSpPr>
-          <p:cNvPr id="7" name="Shape 4"/>
+          <p:cNvPr id="6" name="Shape 3"/>
           <p:cNvSpPr/>
           <p:nvPr/>
         </p:nvSpPr>
@@ -17750,7 +16760,7 @@
       </p:sp>
       <p:sp>
         <p:nvSpPr>
-          <p:cNvPr id="8" name="Text 5"/>
+          <p:cNvPr id="7" name="Text 4"/>
           <p:cNvSpPr/>
           <p:nvPr/>
         </p:nvSpPr>
@@ -17794,7 +16804,7 @@
       </p:sp>
       <p:sp>
         <p:nvSpPr>
-          <p:cNvPr id="9" name="Text 6"/>
+          <p:cNvPr id="8" name="Text 5"/>
           <p:cNvSpPr/>
           <p:nvPr/>
         </p:nvSpPr>
@@ -17836,7 +16846,7 @@
       </p:sp>
       <p:sp>
         <p:nvSpPr>
-          <p:cNvPr id="10" name="Shape 7"/>
+          <p:cNvPr id="9" name="Shape 6"/>
           <p:cNvSpPr/>
           <p:nvPr/>
         </p:nvSpPr>
@@ -17861,7 +16871,7 @@
       </p:sp>
       <p:sp>
         <p:nvSpPr>
-          <p:cNvPr id="11" name="Text 8"/>
+          <p:cNvPr id="10" name="Text 7"/>
           <p:cNvSpPr/>
           <p:nvPr/>
         </p:nvSpPr>
@@ -17925,7 +16935,7 @@
       </p:sp>
       <p:sp>
         <p:nvSpPr>
-          <p:cNvPr id="12" name="Text 9"/>
+          <p:cNvPr id="11" name="Text 8"/>
           <p:cNvSpPr/>
           <p:nvPr/>
         </p:nvSpPr>
@@ -17967,7 +16977,7 @@
       </p:sp>
       <p:sp>
         <p:nvSpPr>
-          <p:cNvPr id="13" name="Shape 10"/>
+          <p:cNvPr id="12" name="Shape 9"/>
           <p:cNvSpPr/>
           <p:nvPr/>
         </p:nvSpPr>
@@ -17992,7 +17002,7 @@
       </p:sp>
       <p:sp>
         <p:nvSpPr>
-          <p:cNvPr id="14" name="Text 11"/>
+          <p:cNvPr id="13" name="Text 10"/>
           <p:cNvSpPr/>
           <p:nvPr/>
         </p:nvSpPr>
@@ -18056,7 +17066,7 @@
       </p:sp>
       <p:sp>
         <p:nvSpPr>
-          <p:cNvPr id="15" name="Text 12"/>
+          <p:cNvPr id="14" name="Text 11"/>
           <p:cNvSpPr/>
           <p:nvPr/>
         </p:nvSpPr>
@@ -18100,49 +17110,7 @@
       </p:sp>
       <p:sp>
         <p:nvSpPr>
-          <p:cNvPr id="16" name="Text 13"/>
-          <p:cNvSpPr/>
-          <p:nvPr/>
-        </p:nvSpPr>
-        <p:spPr>
-          <a:xfrm>
-            <a:off x="502920" y="6327648"/>
-            <a:ext cx="8138160" cy="137160"/>
-          </a:xfrm>
-          <a:prstGeom prst="rect">
-            <a:avLst/>
-          </a:prstGeom>
-          <a:noFill/>
-          <a:ln/>
-        </p:spPr>
-        <p:txBody>
-          <a:bodyPr wrap="square" lIns="0" tIns="0" rIns="0" bIns="0" rtlCol="0" anchor="ctr"/>
-          <a:lstStyle/>
-          <a:p>
-            <a:pPr algn="r" indent="0" marL="0">
-              <a:lnSpc>
-                <a:spcPct val="125000"/>
-              </a:lnSpc>
-              <a:buNone/>
-            </a:pPr>
-            <a:r>
-              <a:rPr lang="en-US" sz="800" i="1" dirty="0">
-                <a:solidFill>
-                  <a:srgbClr val="5A5A66"/>
-                </a:solidFill>
-                <a:latin typeface="Cambria" pitchFamily="34" charset="0"/>
-                <a:ea typeface="Cambria" pitchFamily="34" charset="-122"/>
-                <a:cs typeface="Cambria" pitchFamily="34" charset="-120"/>
-              </a:rPr>
-              <a:t>Luận văn Hình 6.1</a:t>
-            </a:r>
-            <a:endParaRPr lang="en-US" sz="800" dirty="0"/>
-          </a:p>
-        </p:txBody>
-      </p:sp>
-      <p:sp>
-        <p:nvSpPr>
-          <p:cNvPr id="17" name="Shape 14"/>
+          <p:cNvPr id="15" name="Shape 12"/>
           <p:cNvSpPr/>
           <p:nvPr/>
         </p:nvSpPr>
@@ -18169,7 +17137,7 @@
       </p:sp>
       <p:sp>
         <p:nvSpPr>
-          <p:cNvPr id="18" name="Shape 15"/>
+          <p:cNvPr id="16" name="Shape 13"/>
           <p:cNvSpPr/>
           <p:nvPr/>
         </p:nvSpPr>
@@ -18196,7 +17164,7 @@
       </p:sp>
       <p:sp>
         <p:nvSpPr>
-          <p:cNvPr id="19" name="Shape 16"/>
+          <p:cNvPr id="17" name="Shape 14"/>
           <p:cNvSpPr/>
           <p:nvPr/>
         </p:nvSpPr>
@@ -18223,7 +17191,7 @@
       </p:sp>
       <p:sp>
         <p:nvSpPr>
-          <p:cNvPr id="20" name="Shape 17"/>
+          <p:cNvPr id="18" name="Shape 15"/>
           <p:cNvSpPr/>
           <p:nvPr/>
         </p:nvSpPr>
@@ -18250,7 +17218,7 @@
       </p:sp>
       <p:sp>
         <p:nvSpPr>
-          <p:cNvPr id="21" name="Text 18"/>
+          <p:cNvPr id="19" name="Text 16"/>
           <p:cNvSpPr/>
           <p:nvPr/>
         </p:nvSpPr>
@@ -18292,7 +17260,7 @@
       </p:sp>
       <p:sp>
         <p:nvSpPr>
-          <p:cNvPr id="22" name="Text 19"/>
+          <p:cNvPr id="20" name="Text 17"/>
           <p:cNvSpPr/>
           <p:nvPr/>
         </p:nvSpPr>
@@ -18334,7 +17302,7 @@
       </p:sp>
       <p:sp>
         <p:nvSpPr>
-          <p:cNvPr id="23" name="Text 20"/>
+          <p:cNvPr id="21" name="Text 18"/>
           <p:cNvSpPr/>
           <p:nvPr/>
         </p:nvSpPr>
@@ -18376,7 +17344,7 @@
       </p:sp>
       <p:sp>
         <p:nvSpPr>
-          <p:cNvPr id="24" name="Text 21"/>
+          <p:cNvPr id="22" name="Text 19"/>
           <p:cNvSpPr/>
           <p:nvPr/>
         </p:nvSpPr>
@@ -18521,51 +17489,7 @@
       </p:sp>
       <p:sp>
         <p:nvSpPr>
-          <p:cNvPr id="4" name="Text 2"/>
-          <p:cNvSpPr/>
-          <p:nvPr/>
-        </p:nvSpPr>
-        <p:spPr>
-          <a:xfrm>
-            <a:off x="502920" y="603504"/>
-            <a:ext cx="8138160" cy="219456"/>
-          </a:xfrm>
-          <a:prstGeom prst="rect">
-            <a:avLst/>
-          </a:prstGeom>
-          <a:noFill/>
-          <a:ln/>
-        </p:spPr>
-        <p:txBody>
-          <a:bodyPr wrap="square" lIns="0" tIns="0" rIns="0" bIns="0" rtlCol="0" anchor="ctr">
-            <a:normAutofit/>
-          </a:bodyPr>
-          <a:lstStyle/>
-          <a:p>
-            <a:pPr indent="0" marL="0">
-              <a:lnSpc>
-                <a:spcPct val="125000"/>
-              </a:lnSpc>
-              <a:buNone/>
-            </a:pPr>
-            <a:r>
-              <a:rPr lang="en-US" sz="1260" b="1" dirty="0">
-                <a:solidFill>
-                  <a:srgbClr val="25194B"/>
-                </a:solidFill>
-                <a:latin typeface="Cambria" pitchFamily="34" charset="0"/>
-                <a:ea typeface="Cambria" pitchFamily="34" charset="-122"/>
-                <a:cs typeface="Cambria" pitchFamily="34" charset="-120"/>
-              </a:rPr>
-              <a:t>Kiểm tra độ ổn định của kết quả</a:t>
-            </a:r>
-            <a:endParaRPr lang="en-US" sz="1260" dirty="0"/>
-          </a:p>
-        </p:txBody>
-      </p:sp>
-      <p:sp>
-        <p:nvSpPr>
-          <p:cNvPr id="5" name="Shape 3"/>
+          <p:cNvPr id="4" name="Shape 2"/>
           <p:cNvSpPr/>
           <p:nvPr/>
         </p:nvSpPr>
@@ -18590,7 +17514,7 @@
       </p:sp>
       <p:sp>
         <p:nvSpPr>
-          <p:cNvPr id="6" name="Text 4"/>
+          <p:cNvPr id="5" name="Text 3"/>
           <p:cNvSpPr/>
           <p:nvPr/>
         </p:nvSpPr>
@@ -18632,7 +17556,7 @@
       </p:sp>
       <p:sp>
         <p:nvSpPr>
-          <p:cNvPr id="7" name="Text 5"/>
+          <p:cNvPr id="6" name="Text 4"/>
           <p:cNvSpPr/>
           <p:nvPr/>
         </p:nvSpPr>
@@ -18674,7 +17598,7 @@
       </p:sp>
       <p:sp>
         <p:nvSpPr>
-          <p:cNvPr id="8" name="Text 6"/>
+          <p:cNvPr id="7" name="Text 5"/>
           <p:cNvSpPr/>
           <p:nvPr/>
         </p:nvSpPr>
@@ -18718,7 +17642,7 @@
       </p:sp>
       <p:sp>
         <p:nvSpPr>
-          <p:cNvPr id="9" name="Shape 7"/>
+          <p:cNvPr id="8" name="Shape 6"/>
           <p:cNvSpPr/>
           <p:nvPr/>
         </p:nvSpPr>
@@ -18743,7 +17667,7 @@
       </p:sp>
       <p:sp>
         <p:nvSpPr>
-          <p:cNvPr id="10" name="Text 8"/>
+          <p:cNvPr id="9" name="Text 7"/>
           <p:cNvSpPr/>
           <p:nvPr/>
         </p:nvSpPr>
@@ -18785,7 +17709,7 @@
       </p:sp>
       <p:sp>
         <p:nvSpPr>
-          <p:cNvPr id="11" name="Text 9"/>
+          <p:cNvPr id="10" name="Text 8"/>
           <p:cNvSpPr/>
           <p:nvPr/>
         </p:nvSpPr>
@@ -18827,7 +17751,7 @@
       </p:sp>
       <p:sp>
         <p:nvSpPr>
-          <p:cNvPr id="12" name="Text 10"/>
+          <p:cNvPr id="11" name="Text 9"/>
           <p:cNvSpPr/>
           <p:nvPr/>
         </p:nvSpPr>
@@ -18871,7 +17795,7 @@
       </p:sp>
       <p:sp>
         <p:nvSpPr>
-          <p:cNvPr id="13" name="Shape 11"/>
+          <p:cNvPr id="12" name="Shape 10"/>
           <p:cNvSpPr/>
           <p:nvPr/>
         </p:nvSpPr>
@@ -18896,7 +17820,7 @@
       </p:sp>
       <p:sp>
         <p:nvSpPr>
-          <p:cNvPr id="14" name="Text 12"/>
+          <p:cNvPr id="13" name="Text 11"/>
           <p:cNvSpPr/>
           <p:nvPr/>
         </p:nvSpPr>
@@ -18938,7 +17862,7 @@
       </p:sp>
       <p:sp>
         <p:nvSpPr>
-          <p:cNvPr id="15" name="Text 13"/>
+          <p:cNvPr id="14" name="Text 12"/>
           <p:cNvSpPr/>
           <p:nvPr/>
         </p:nvSpPr>
@@ -18980,7 +17904,7 @@
       </p:sp>
       <p:sp>
         <p:nvSpPr>
-          <p:cNvPr id="16" name="Text 14"/>
+          <p:cNvPr id="15" name="Text 13"/>
           <p:cNvSpPr/>
           <p:nvPr/>
         </p:nvSpPr>
@@ -19024,7 +17948,7 @@
       </p:sp>
       <p:sp>
         <p:nvSpPr>
-          <p:cNvPr id="17" name="Shape 15"/>
+          <p:cNvPr id="16" name="Shape 14"/>
           <p:cNvSpPr/>
           <p:nvPr/>
         </p:nvSpPr>
@@ -19049,7 +17973,7 @@
       </p:sp>
       <p:sp>
         <p:nvSpPr>
-          <p:cNvPr id="18" name="Text 16"/>
+          <p:cNvPr id="17" name="Text 15"/>
           <p:cNvSpPr/>
           <p:nvPr/>
         </p:nvSpPr>
@@ -19091,7 +18015,7 @@
       </p:sp>
       <p:sp>
         <p:nvSpPr>
-          <p:cNvPr id="19" name="Text 17"/>
+          <p:cNvPr id="18" name="Text 16"/>
           <p:cNvSpPr/>
           <p:nvPr/>
         </p:nvSpPr>
@@ -19133,7 +18057,7 @@
       </p:sp>
       <p:sp>
         <p:nvSpPr>
-          <p:cNvPr id="20" name="Text 18"/>
+          <p:cNvPr id="19" name="Text 17"/>
           <p:cNvSpPr/>
           <p:nvPr/>
         </p:nvSpPr>
@@ -19177,7 +18101,7 @@
       </p:sp>
       <p:sp>
         <p:nvSpPr>
-          <p:cNvPr id="21" name="Text 19"/>
+          <p:cNvPr id="20" name="Text 18"/>
           <p:cNvSpPr/>
           <p:nvPr/>
         </p:nvSpPr>
@@ -19221,49 +18145,7 @@
       </p:sp>
       <p:sp>
         <p:nvSpPr>
-          <p:cNvPr id="22" name="Text 20"/>
-          <p:cNvSpPr/>
-          <p:nvPr/>
-        </p:nvSpPr>
-        <p:spPr>
-          <a:xfrm>
-            <a:off x="502920" y="6327648"/>
-            <a:ext cx="8138160" cy="137160"/>
-          </a:xfrm>
-          <a:prstGeom prst="rect">
-            <a:avLst/>
-          </a:prstGeom>
-          <a:noFill/>
-          <a:ln/>
-        </p:spPr>
-        <p:txBody>
-          <a:bodyPr wrap="square" lIns="0" tIns="0" rIns="0" bIns="0" rtlCol="0" anchor="ctr"/>
-          <a:lstStyle/>
-          <a:p>
-            <a:pPr algn="r" indent="0" marL="0">
-              <a:lnSpc>
-                <a:spcPct val="125000"/>
-              </a:lnSpc>
-              <a:buNone/>
-            </a:pPr>
-            <a:r>
-              <a:rPr lang="en-US" sz="800" i="1" dirty="0">
-                <a:solidFill>
-                  <a:srgbClr val="5A5A66"/>
-                </a:solidFill>
-                <a:latin typeface="Cambria" pitchFamily="34" charset="0"/>
-                <a:ea typeface="Cambria" pitchFamily="34" charset="-122"/>
-                <a:cs typeface="Cambria" pitchFamily="34" charset="-120"/>
-              </a:rPr>
-              <a:t>Luận văn Chương 6</a:t>
-            </a:r>
-            <a:endParaRPr lang="en-US" sz="800" dirty="0"/>
-          </a:p>
-        </p:txBody>
-      </p:sp>
-      <p:sp>
-        <p:nvSpPr>
-          <p:cNvPr id="23" name="Shape 21"/>
+          <p:cNvPr id="21" name="Shape 19"/>
           <p:cNvSpPr/>
           <p:nvPr/>
         </p:nvSpPr>
@@ -19290,7 +18172,7 @@
       </p:sp>
       <p:sp>
         <p:nvSpPr>
-          <p:cNvPr id="24" name="Shape 22"/>
+          <p:cNvPr id="22" name="Shape 20"/>
           <p:cNvSpPr/>
           <p:nvPr/>
         </p:nvSpPr>
@@ -19317,7 +18199,7 @@
       </p:sp>
       <p:sp>
         <p:nvSpPr>
-          <p:cNvPr id="25" name="Shape 23"/>
+          <p:cNvPr id="23" name="Shape 21"/>
           <p:cNvSpPr/>
           <p:nvPr/>
         </p:nvSpPr>
@@ -19344,7 +18226,7 @@
       </p:sp>
       <p:sp>
         <p:nvSpPr>
-          <p:cNvPr id="26" name="Shape 24"/>
+          <p:cNvPr id="24" name="Shape 22"/>
           <p:cNvSpPr/>
           <p:nvPr/>
         </p:nvSpPr>
@@ -19371,7 +18253,7 @@
       </p:sp>
       <p:sp>
         <p:nvSpPr>
-          <p:cNvPr id="27" name="Text 25"/>
+          <p:cNvPr id="25" name="Text 23"/>
           <p:cNvSpPr/>
           <p:nvPr/>
         </p:nvSpPr>
@@ -19413,7 +18295,7 @@
       </p:sp>
       <p:sp>
         <p:nvSpPr>
-          <p:cNvPr id="28" name="Text 26"/>
+          <p:cNvPr id="26" name="Text 24"/>
           <p:cNvSpPr/>
           <p:nvPr/>
         </p:nvSpPr>
@@ -19455,7 +18337,7 @@
       </p:sp>
       <p:sp>
         <p:nvSpPr>
-          <p:cNvPr id="29" name="Text 27"/>
+          <p:cNvPr id="27" name="Text 25"/>
           <p:cNvSpPr/>
           <p:nvPr/>
         </p:nvSpPr>
@@ -19497,7 +18379,7 @@
       </p:sp>
       <p:sp>
         <p:nvSpPr>
-          <p:cNvPr id="30" name="Text 28"/>
+          <p:cNvPr id="28" name="Text 26"/>
           <p:cNvSpPr/>
           <p:nvPr/>
         </p:nvSpPr>
@@ -19648,50 +18530,6 @@
         </p:nvSpPr>
         <p:spPr>
           <a:xfrm>
-            <a:off x="502920" y="603504"/>
-            <a:ext cx="8138160" cy="219456"/>
-          </a:xfrm>
-          <a:prstGeom prst="rect">
-            <a:avLst/>
-          </a:prstGeom>
-          <a:noFill/>
-          <a:ln/>
-        </p:spPr>
-        <p:txBody>
-          <a:bodyPr wrap="square" lIns="0" tIns="0" rIns="0" bIns="0" rtlCol="0" anchor="ctr">
-            <a:normAutofit/>
-          </a:bodyPr>
-          <a:lstStyle/>
-          <a:p>
-            <a:pPr indent="0" marL="0">
-              <a:lnSpc>
-                <a:spcPct val="125000"/>
-              </a:lnSpc>
-              <a:buNone/>
-            </a:pPr>
-            <a:r>
-              <a:rPr lang="en-US" sz="1260" b="1" dirty="0">
-                <a:solidFill>
-                  <a:srgbClr val="25194B"/>
-                </a:solidFill>
-                <a:latin typeface="Cambria" pitchFamily="34" charset="0"/>
-                <a:ea typeface="Cambria" pitchFamily="34" charset="-122"/>
-                <a:cs typeface="Cambria" pitchFamily="34" charset="-120"/>
-              </a:rPr>
-              <a:t>Phạm vi và hướng phát triển</a:t>
-            </a:r>
-            <a:endParaRPr lang="en-US" sz="1260" dirty="0"/>
-          </a:p>
-        </p:txBody>
-      </p:sp>
-      <p:sp>
-        <p:nvSpPr>
-          <p:cNvPr id="5" name="Text 3"/>
-          <p:cNvSpPr/>
-          <p:nvPr/>
-        </p:nvSpPr>
-        <p:spPr>
-          <a:xfrm>
             <a:off x="502920" y="868680"/>
             <a:ext cx="1828800" cy="320040"/>
           </a:xfrm>
@@ -19728,7 +18566,7 @@
       </p:sp>
       <p:sp>
         <p:nvSpPr>
-          <p:cNvPr id="6" name="Shape 4"/>
+          <p:cNvPr id="5" name="Shape 3"/>
           <p:cNvSpPr/>
           <p:nvPr/>
         </p:nvSpPr>
@@ -19755,7 +18593,7 @@
       </p:sp>
       <p:sp>
         <p:nvSpPr>
-          <p:cNvPr id="7" name="Text 5"/>
+          <p:cNvPr id="6" name="Text 4"/>
           <p:cNvSpPr/>
           <p:nvPr/>
         </p:nvSpPr>
@@ -19799,7 +18637,7 @@
       </p:sp>
       <p:sp>
         <p:nvSpPr>
-          <p:cNvPr id="8" name="Shape 6"/>
+          <p:cNvPr id="7" name="Shape 5"/>
           <p:cNvSpPr/>
           <p:nvPr/>
         </p:nvSpPr>
@@ -19826,7 +18664,7 @@
       </p:sp>
       <p:sp>
         <p:nvSpPr>
-          <p:cNvPr id="9" name="Text 7"/>
+          <p:cNvPr id="8" name="Text 6"/>
           <p:cNvSpPr/>
           <p:nvPr/>
         </p:nvSpPr>
@@ -19870,7 +18708,7 @@
       </p:sp>
       <p:sp>
         <p:nvSpPr>
-          <p:cNvPr id="10" name="Shape 8"/>
+          <p:cNvPr id="9" name="Shape 7"/>
           <p:cNvSpPr/>
           <p:nvPr/>
         </p:nvSpPr>
@@ -19897,7 +18735,7 @@
       </p:sp>
       <p:sp>
         <p:nvSpPr>
-          <p:cNvPr id="11" name="Text 9"/>
+          <p:cNvPr id="10" name="Text 8"/>
           <p:cNvSpPr/>
           <p:nvPr/>
         </p:nvSpPr>
@@ -19941,7 +18779,7 @@
       </p:sp>
       <p:sp>
         <p:nvSpPr>
-          <p:cNvPr id="12" name="Text 10"/>
+          <p:cNvPr id="11" name="Text 9"/>
           <p:cNvSpPr/>
           <p:nvPr/>
         </p:nvSpPr>
@@ -19983,7 +18821,7 @@
       </p:sp>
       <p:sp>
         <p:nvSpPr>
-          <p:cNvPr id="13" name="Shape 11"/>
+          <p:cNvPr id="12" name="Shape 10"/>
           <p:cNvSpPr/>
           <p:nvPr/>
         </p:nvSpPr>
@@ -20010,7 +18848,7 @@
       </p:sp>
       <p:sp>
         <p:nvSpPr>
-          <p:cNvPr id="14" name="Text 12"/>
+          <p:cNvPr id="13" name="Text 11"/>
           <p:cNvSpPr/>
           <p:nvPr/>
         </p:nvSpPr>
@@ -20054,7 +18892,7 @@
       </p:sp>
       <p:sp>
         <p:nvSpPr>
-          <p:cNvPr id="15" name="Shape 13"/>
+          <p:cNvPr id="14" name="Shape 12"/>
           <p:cNvSpPr/>
           <p:nvPr/>
         </p:nvSpPr>
@@ -20081,7 +18919,7 @@
       </p:sp>
       <p:sp>
         <p:nvSpPr>
-          <p:cNvPr id="16" name="Text 14"/>
+          <p:cNvPr id="15" name="Text 13"/>
           <p:cNvSpPr/>
           <p:nvPr/>
         </p:nvSpPr>
@@ -20125,49 +18963,7 @@
       </p:sp>
       <p:sp>
         <p:nvSpPr>
-          <p:cNvPr id="17" name="Text 15"/>
-          <p:cNvSpPr/>
-          <p:nvPr/>
-        </p:nvSpPr>
-        <p:spPr>
-          <a:xfrm>
-            <a:off x="502920" y="6327648"/>
-            <a:ext cx="8138160" cy="137160"/>
-          </a:xfrm>
-          <a:prstGeom prst="rect">
-            <a:avLst/>
-          </a:prstGeom>
-          <a:noFill/>
-          <a:ln/>
-        </p:spPr>
-        <p:txBody>
-          <a:bodyPr wrap="square" lIns="0" tIns="0" rIns="0" bIns="0" rtlCol="0" anchor="ctr"/>
-          <a:lstStyle/>
-          <a:p>
-            <a:pPr algn="r" indent="0" marL="0">
-              <a:lnSpc>
-                <a:spcPct val="125000"/>
-              </a:lnSpc>
-              <a:buNone/>
-            </a:pPr>
-            <a:r>
-              <a:rPr lang="en-US" sz="800" i="1" dirty="0">
-                <a:solidFill>
-                  <a:srgbClr val="5A5A66"/>
-                </a:solidFill>
-                <a:latin typeface="Cambria" pitchFamily="34" charset="0"/>
-                <a:ea typeface="Cambria" pitchFamily="34" charset="-122"/>
-                <a:cs typeface="Cambria" pitchFamily="34" charset="-120"/>
-              </a:rPr>
-              <a:t>Luận văn §7.2–§7.4</a:t>
-            </a:r>
-            <a:endParaRPr lang="en-US" sz="800" dirty="0"/>
-          </a:p>
-        </p:txBody>
-      </p:sp>
-      <p:sp>
-        <p:nvSpPr>
-          <p:cNvPr id="18" name="Shape 16"/>
+          <p:cNvPr id="16" name="Shape 14"/>
           <p:cNvSpPr/>
           <p:nvPr/>
         </p:nvSpPr>
@@ -20194,7 +18990,7 @@
       </p:sp>
       <p:sp>
         <p:nvSpPr>
-          <p:cNvPr id="19" name="Shape 17"/>
+          <p:cNvPr id="17" name="Shape 15"/>
           <p:cNvSpPr/>
           <p:nvPr/>
         </p:nvSpPr>
@@ -20221,7 +19017,7 @@
       </p:sp>
       <p:sp>
         <p:nvSpPr>
-          <p:cNvPr id="20" name="Shape 18"/>
+          <p:cNvPr id="18" name="Shape 16"/>
           <p:cNvSpPr/>
           <p:nvPr/>
         </p:nvSpPr>
@@ -20248,7 +19044,7 @@
       </p:sp>
       <p:sp>
         <p:nvSpPr>
-          <p:cNvPr id="21" name="Shape 19"/>
+          <p:cNvPr id="19" name="Shape 17"/>
           <p:cNvSpPr/>
           <p:nvPr/>
         </p:nvSpPr>
@@ -20275,7 +19071,7 @@
       </p:sp>
       <p:sp>
         <p:nvSpPr>
-          <p:cNvPr id="22" name="Text 20"/>
+          <p:cNvPr id="20" name="Text 18"/>
           <p:cNvSpPr/>
           <p:nvPr/>
         </p:nvSpPr>
@@ -20317,7 +19113,7 @@
       </p:sp>
       <p:sp>
         <p:nvSpPr>
-          <p:cNvPr id="23" name="Text 21"/>
+          <p:cNvPr id="21" name="Text 19"/>
           <p:cNvSpPr/>
           <p:nvPr/>
         </p:nvSpPr>
@@ -20359,7 +19155,7 @@
       </p:sp>
       <p:sp>
         <p:nvSpPr>
-          <p:cNvPr id="24" name="Text 22"/>
+          <p:cNvPr id="22" name="Text 20"/>
           <p:cNvSpPr/>
           <p:nvPr/>
         </p:nvSpPr>
@@ -20401,7 +19197,7 @@
       </p:sp>
       <p:sp>
         <p:nvSpPr>
-          <p:cNvPr id="25" name="Text 23"/>
+          <p:cNvPr id="23" name="Text 21"/>
           <p:cNvSpPr/>
           <p:nvPr/>
         </p:nvSpPr>
@@ -20546,51 +19342,7 @@
       </p:sp>
       <p:sp>
         <p:nvSpPr>
-          <p:cNvPr id="4" name="Text 2"/>
-          <p:cNvSpPr/>
-          <p:nvPr/>
-        </p:nvSpPr>
-        <p:spPr>
-          <a:xfrm>
-            <a:off x="502920" y="603504"/>
-            <a:ext cx="8138160" cy="219456"/>
-          </a:xfrm>
-          <a:prstGeom prst="rect">
-            <a:avLst/>
-          </a:prstGeom>
-          <a:noFill/>
-          <a:ln/>
-        </p:spPr>
-        <p:txBody>
-          <a:bodyPr wrap="square" lIns="0" tIns="0" rIns="0" bIns="0" rtlCol="0" anchor="ctr">
-            <a:normAutofit/>
-          </a:bodyPr>
-          <a:lstStyle/>
-          <a:p>
-            <a:pPr indent="0" marL="0">
-              <a:lnSpc>
-                <a:spcPct val="125000"/>
-              </a:lnSpc>
-              <a:buNone/>
-            </a:pPr>
-            <a:r>
-              <a:rPr lang="en-US" sz="1260" b="1" dirty="0">
-                <a:solidFill>
-                  <a:srgbClr val="25194B"/>
-                </a:solidFill>
-                <a:latin typeface="Cambria" pitchFamily="34" charset="0"/>
-                <a:ea typeface="Cambria" pitchFamily="34" charset="-122"/>
-                <a:cs typeface="Cambria" pitchFamily="34" charset="-120"/>
-              </a:rPr>
-              <a:t>Đóng góp chính</a:t>
-            </a:r>
-            <a:endParaRPr lang="en-US" sz="1260" dirty="0"/>
-          </a:p>
-        </p:txBody>
-      </p:sp>
-      <p:sp>
-        <p:nvSpPr>
-          <p:cNvPr id="5" name="Shape 3"/>
+          <p:cNvPr id="4" name="Shape 2"/>
           <p:cNvSpPr/>
           <p:nvPr/>
         </p:nvSpPr>
@@ -20615,7 +19367,7 @@
       </p:sp>
       <p:sp>
         <p:nvSpPr>
-          <p:cNvPr id="6" name="Text 4"/>
+          <p:cNvPr id="5" name="Text 3"/>
           <p:cNvSpPr/>
           <p:nvPr/>
         </p:nvSpPr>
@@ -20657,7 +19409,7 @@
       </p:sp>
       <p:sp>
         <p:nvSpPr>
-          <p:cNvPr id="7" name="Text 5"/>
+          <p:cNvPr id="6" name="Text 4"/>
           <p:cNvSpPr/>
           <p:nvPr/>
         </p:nvSpPr>
@@ -20701,7 +19453,7 @@
       </p:sp>
       <p:sp>
         <p:nvSpPr>
-          <p:cNvPr id="8" name="Shape 6"/>
+          <p:cNvPr id="7" name="Shape 5"/>
           <p:cNvSpPr/>
           <p:nvPr/>
         </p:nvSpPr>
@@ -20726,7 +19478,7 @@
       </p:sp>
       <p:sp>
         <p:nvSpPr>
-          <p:cNvPr id="9" name="Text 7"/>
+          <p:cNvPr id="8" name="Text 6"/>
           <p:cNvSpPr/>
           <p:nvPr/>
         </p:nvSpPr>
@@ -20768,7 +19520,7 @@
       </p:sp>
       <p:sp>
         <p:nvSpPr>
-          <p:cNvPr id="10" name="Text 8"/>
+          <p:cNvPr id="9" name="Text 7"/>
           <p:cNvSpPr/>
           <p:nvPr/>
         </p:nvSpPr>
@@ -20812,7 +19564,7 @@
       </p:sp>
       <p:sp>
         <p:nvSpPr>
-          <p:cNvPr id="11" name="Shape 9"/>
+          <p:cNvPr id="10" name="Shape 8"/>
           <p:cNvSpPr/>
           <p:nvPr/>
         </p:nvSpPr>
@@ -20837,7 +19589,7 @@
       </p:sp>
       <p:sp>
         <p:nvSpPr>
-          <p:cNvPr id="12" name="Text 10"/>
+          <p:cNvPr id="11" name="Text 9"/>
           <p:cNvSpPr/>
           <p:nvPr/>
         </p:nvSpPr>
@@ -20879,7 +19631,7 @@
       </p:sp>
       <p:sp>
         <p:nvSpPr>
-          <p:cNvPr id="13" name="Text 11"/>
+          <p:cNvPr id="12" name="Text 10"/>
           <p:cNvSpPr/>
           <p:nvPr/>
         </p:nvSpPr>
@@ -20923,7 +19675,7 @@
       </p:sp>
       <p:sp>
         <p:nvSpPr>
-          <p:cNvPr id="14" name="Text 12"/>
+          <p:cNvPr id="13" name="Text 11"/>
           <p:cNvSpPr/>
           <p:nvPr/>
         </p:nvSpPr>
@@ -20967,49 +19719,7 @@
       </p:sp>
       <p:sp>
         <p:nvSpPr>
-          <p:cNvPr id="15" name="Text 13"/>
-          <p:cNvSpPr/>
-          <p:nvPr/>
-        </p:nvSpPr>
-        <p:spPr>
-          <a:xfrm>
-            <a:off x="502920" y="6327648"/>
-            <a:ext cx="8138160" cy="137160"/>
-          </a:xfrm>
-          <a:prstGeom prst="rect">
-            <a:avLst/>
-          </a:prstGeom>
-          <a:noFill/>
-          <a:ln/>
-        </p:spPr>
-        <p:txBody>
-          <a:bodyPr wrap="square" lIns="0" tIns="0" rIns="0" bIns="0" rtlCol="0" anchor="ctr"/>
-          <a:lstStyle/>
-          <a:p>
-            <a:pPr algn="r" indent="0" marL="0">
-              <a:lnSpc>
-                <a:spcPct val="125000"/>
-              </a:lnSpc>
-              <a:buNone/>
-            </a:pPr>
-            <a:r>
-              <a:rPr lang="en-US" sz="800" i="1" dirty="0">
-                <a:solidFill>
-                  <a:srgbClr val="5A5A66"/>
-                </a:solidFill>
-                <a:latin typeface="Cambria" pitchFamily="34" charset="0"/>
-                <a:ea typeface="Cambria" pitchFamily="34" charset="-122"/>
-                <a:cs typeface="Cambria" pitchFamily="34" charset="-120"/>
-              </a:rPr>
-              <a:t>Luận văn Chương 7</a:t>
-            </a:r>
-            <a:endParaRPr lang="en-US" sz="800" dirty="0"/>
-          </a:p>
-        </p:txBody>
-      </p:sp>
-      <p:sp>
-        <p:nvSpPr>
-          <p:cNvPr id="16" name="Shape 14"/>
+          <p:cNvPr id="14" name="Shape 12"/>
           <p:cNvSpPr/>
           <p:nvPr/>
         </p:nvSpPr>
@@ -21036,7 +19746,7 @@
       </p:sp>
       <p:sp>
         <p:nvSpPr>
-          <p:cNvPr id="17" name="Shape 15"/>
+          <p:cNvPr id="15" name="Shape 13"/>
           <p:cNvSpPr/>
           <p:nvPr/>
         </p:nvSpPr>
@@ -21063,7 +19773,7 @@
       </p:sp>
       <p:sp>
         <p:nvSpPr>
-          <p:cNvPr id="18" name="Shape 16"/>
+          <p:cNvPr id="16" name="Shape 14"/>
           <p:cNvSpPr/>
           <p:nvPr/>
         </p:nvSpPr>
@@ -21090,7 +19800,7 @@
       </p:sp>
       <p:sp>
         <p:nvSpPr>
-          <p:cNvPr id="19" name="Shape 17"/>
+          <p:cNvPr id="17" name="Shape 15"/>
           <p:cNvSpPr/>
           <p:nvPr/>
         </p:nvSpPr>
@@ -21117,7 +19827,7 @@
       </p:sp>
       <p:sp>
         <p:nvSpPr>
-          <p:cNvPr id="20" name="Text 18"/>
+          <p:cNvPr id="18" name="Text 16"/>
           <p:cNvSpPr/>
           <p:nvPr/>
         </p:nvSpPr>
@@ -21159,7 +19869,7 @@
       </p:sp>
       <p:sp>
         <p:nvSpPr>
-          <p:cNvPr id="21" name="Text 19"/>
+          <p:cNvPr id="19" name="Text 17"/>
           <p:cNvSpPr/>
           <p:nvPr/>
         </p:nvSpPr>
@@ -21201,7 +19911,7 @@
       </p:sp>
       <p:sp>
         <p:nvSpPr>
-          <p:cNvPr id="22" name="Text 20"/>
+          <p:cNvPr id="20" name="Text 18"/>
           <p:cNvSpPr/>
           <p:nvPr/>
         </p:nvSpPr>
@@ -21243,7 +19953,7 @@
       </p:sp>
       <p:sp>
         <p:nvSpPr>
-          <p:cNvPr id="23" name="Text 21"/>
+          <p:cNvPr id="21" name="Text 19"/>
           <p:cNvSpPr/>
           <p:nvPr/>
         </p:nvSpPr>
@@ -21394,8 +20104,50 @@
         </p:nvSpPr>
         <p:spPr>
           <a:xfrm>
-            <a:off x="502920" y="603504"/>
-            <a:ext cx="8138160" cy="219456"/>
+            <a:off x="594360" y="960120"/>
+            <a:ext cx="2377440" cy="502920"/>
+          </a:xfrm>
+          <a:prstGeom prst="rect">
+            <a:avLst/>
+          </a:prstGeom>
+          <a:noFill/>
+          <a:ln/>
+        </p:spPr>
+        <p:txBody>
+          <a:bodyPr wrap="square" lIns="0" tIns="0" rIns="0" bIns="0" rtlCol="0" anchor="ctr"/>
+          <a:lstStyle/>
+          <a:p>
+            <a:pPr algn="ctr" indent="0" marL="0">
+              <a:lnSpc>
+                <a:spcPct val="125000"/>
+              </a:lnSpc>
+              <a:buNone/>
+            </a:pPr>
+            <a:r>
+              <a:rPr lang="en-US" sz="2400" b="1" dirty="0">
+                <a:solidFill>
+                  <a:srgbClr val="25194B"/>
+                </a:solidFill>
+                <a:latin typeface="Cambria" pitchFamily="34" charset="0"/>
+                <a:ea typeface="Cambria" pitchFamily="34" charset="-122"/>
+                <a:cs typeface="Cambria" pitchFamily="34" charset="-120"/>
+              </a:rPr>
+              <a:t>+1,55</a:t>
+            </a:r>
+            <a:endParaRPr lang="en-US" sz="2400" dirty="0"/>
+          </a:p>
+        </p:txBody>
+      </p:sp>
+      <p:sp>
+        <p:nvSpPr>
+          <p:cNvPr id="5" name="Text 3"/>
+          <p:cNvSpPr/>
+          <p:nvPr/>
+        </p:nvSpPr>
+        <p:spPr>
+          <a:xfrm>
+            <a:off x="594360" y="1490472"/>
+            <a:ext cx="2377440" cy="475488"/>
           </a:xfrm>
           <a:prstGeom prst="rect">
             <a:avLst/>
@@ -21409,36 +20161,36 @@
           </a:bodyPr>
           <a:lstStyle/>
           <a:p>
-            <a:pPr indent="0" marL="0">
-              <a:lnSpc>
-                <a:spcPct val="125000"/>
-              </a:lnSpc>
-              <a:buNone/>
-            </a:pPr>
-            <a:r>
-              <a:rPr lang="en-US" sz="1260" b="1" dirty="0">
-                <a:solidFill>
-                  <a:srgbClr val="25194B"/>
-                </a:solidFill>
-                <a:latin typeface="Cambria" pitchFamily="34" charset="0"/>
-                <a:ea typeface="Cambria" pitchFamily="34" charset="-122"/>
-                <a:cs typeface="Cambria" pitchFamily="34" charset="-120"/>
-              </a:rPr>
-              <a:t>Kết luận chung</a:t>
-            </a:r>
-            <a:endParaRPr lang="en-US" sz="1260" dirty="0"/>
-          </a:p>
-        </p:txBody>
-      </p:sp>
-      <p:sp>
-        <p:nvSpPr>
-          <p:cNvPr id="5" name="Text 3"/>
-          <p:cNvSpPr/>
-          <p:nvPr/>
-        </p:nvSpPr>
-        <p:spPr>
-          <a:xfrm>
-            <a:off x="594360" y="960120"/>
+            <a:pPr algn="ctr" indent="0" marL="0">
+              <a:lnSpc>
+                <a:spcPct val="125000"/>
+              </a:lnSpc>
+              <a:buNone/>
+            </a:pPr>
+            <a:r>
+              <a:rPr lang="en-US" sz="1250" b="1" dirty="0">
+                <a:solidFill>
+                  <a:srgbClr val="1A1A1A"/>
+                </a:solidFill>
+                <a:latin typeface="Cambria" pitchFamily="34" charset="0"/>
+                <a:ea typeface="Cambria" pitchFamily="34" charset="-122"/>
+                <a:cs typeface="Cambria" pitchFamily="34" charset="-120"/>
+              </a:rPr>
+              <a:t>tập kiểm chính</a:t>
+            </a:r>
+            <a:endParaRPr lang="en-US" sz="1250" dirty="0"/>
+          </a:p>
+        </p:txBody>
+      </p:sp>
+      <p:sp>
+        <p:nvSpPr>
+          <p:cNvPr id="6" name="Text 4"/>
+          <p:cNvSpPr/>
+          <p:nvPr/>
+        </p:nvSpPr>
+        <p:spPr>
+          <a:xfrm>
+            <a:off x="3383280" y="960120"/>
             <a:ext cx="2377440" cy="502920"/>
           </a:xfrm>
           <a:prstGeom prst="rect">
@@ -21460,13 +20212,13 @@
             <a:r>
               <a:rPr lang="en-US" sz="2400" b="1" dirty="0">
                 <a:solidFill>
-                  <a:srgbClr val="25194B"/>
-                </a:solidFill>
-                <a:latin typeface="Cambria" pitchFamily="34" charset="0"/>
-                <a:ea typeface="Cambria" pitchFamily="34" charset="-122"/>
-                <a:cs typeface="Cambria" pitchFamily="34" charset="-120"/>
-              </a:rPr>
-              <a:t>+1,55</a:t>
+                  <a:srgbClr val="4F417A"/>
+                </a:solidFill>
+                <a:latin typeface="Cambria" pitchFamily="34" charset="0"/>
+                <a:ea typeface="Cambria" pitchFamily="34" charset="-122"/>
+                <a:cs typeface="Cambria" pitchFamily="34" charset="-120"/>
+              </a:rPr>
+              <a:t>+4,58</a:t>
             </a:r>
             <a:endParaRPr lang="en-US" sz="2400" dirty="0"/>
           </a:p>
@@ -21474,13 +20226,13 @@
       </p:sp>
       <p:sp>
         <p:nvSpPr>
-          <p:cNvPr id="6" name="Text 4"/>
-          <p:cNvSpPr/>
-          <p:nvPr/>
-        </p:nvSpPr>
-        <p:spPr>
-          <a:xfrm>
-            <a:off x="594360" y="1490472"/>
+          <p:cNvPr id="7" name="Text 5"/>
+          <p:cNvSpPr/>
+          <p:nvPr/>
+        </p:nvSpPr>
+        <p:spPr>
+          <a:xfrm>
+            <a:off x="3383280" y="1490472"/>
             <a:ext cx="2377440" cy="475488"/>
           </a:xfrm>
           <a:prstGeom prst="rect">
@@ -21510,7 +20262,7 @@
                 <a:ea typeface="Cambria" pitchFamily="34" charset="-122"/>
                 <a:cs typeface="Cambria" pitchFamily="34" charset="-120"/>
               </a:rPr>
-              <a:t>tập kiểm chính</a:t>
+              <a:t>tác vụ chưa có trong tập dạy S1</a:t>
             </a:r>
             <a:endParaRPr lang="en-US" sz="1250" dirty="0"/>
           </a:p>
@@ -21518,13 +20270,13 @@
       </p:sp>
       <p:sp>
         <p:nvSpPr>
-          <p:cNvPr id="7" name="Text 5"/>
-          <p:cNvSpPr/>
-          <p:nvPr/>
-        </p:nvSpPr>
-        <p:spPr>
-          <a:xfrm>
-            <a:off x="3383280" y="960120"/>
+          <p:cNvPr id="8" name="Text 6"/>
+          <p:cNvSpPr/>
+          <p:nvPr/>
+        </p:nvSpPr>
+        <p:spPr>
+          <a:xfrm>
+            <a:off x="6172200" y="960120"/>
             <a:ext cx="2377440" cy="502920"/>
           </a:xfrm>
           <a:prstGeom prst="rect">
@@ -21546,13 +20298,13 @@
             <a:r>
               <a:rPr lang="en-US" sz="2400" b="1" dirty="0">
                 <a:solidFill>
-                  <a:srgbClr val="4F417A"/>
-                </a:solidFill>
-                <a:latin typeface="Cambria" pitchFamily="34" charset="0"/>
-                <a:ea typeface="Cambria" pitchFamily="34" charset="-122"/>
-                <a:cs typeface="Cambria" pitchFamily="34" charset="-120"/>
-              </a:rPr>
-              <a:t>+4,58</a:t>
+                  <a:srgbClr val="7A7099"/>
+                </a:solidFill>
+                <a:latin typeface="Cambria" pitchFamily="34" charset="0"/>
+                <a:ea typeface="Cambria" pitchFamily="34" charset="-122"/>
+                <a:cs typeface="Cambria" pitchFamily="34" charset="-120"/>
+              </a:rPr>
+              <a:t>+9,14</a:t>
             </a:r>
             <a:endParaRPr lang="en-US" sz="2400" dirty="0"/>
           </a:p>
@@ -21560,13 +20312,13 @@
       </p:sp>
       <p:sp>
         <p:nvSpPr>
-          <p:cNvPr id="8" name="Text 6"/>
-          <p:cNvSpPr/>
-          <p:nvPr/>
-        </p:nvSpPr>
-        <p:spPr>
-          <a:xfrm>
-            <a:off x="3383280" y="1490472"/>
+          <p:cNvPr id="9" name="Text 7"/>
+          <p:cNvSpPr/>
+          <p:nvPr/>
+        </p:nvSpPr>
+        <p:spPr>
+          <a:xfrm>
+            <a:off x="6172200" y="1490472"/>
             <a:ext cx="2377440" cy="475488"/>
           </a:xfrm>
           <a:prstGeom prst="rect">
@@ -21596,7 +20348,7 @@
                 <a:ea typeface="Cambria" pitchFamily="34" charset="-122"/>
                 <a:cs typeface="Cambria" pitchFamily="34" charset="-120"/>
               </a:rPr>
-              <a:t>tác vụ chưa có trong tập dạy S1</a:t>
+              <a:t>so với 7B prompting</a:t>
             </a:r>
             <a:endParaRPr lang="en-US" sz="1250" dirty="0"/>
           </a:p>
@@ -21604,93 +20356,7 @@
       </p:sp>
       <p:sp>
         <p:nvSpPr>
-          <p:cNvPr id="9" name="Text 7"/>
-          <p:cNvSpPr/>
-          <p:nvPr/>
-        </p:nvSpPr>
-        <p:spPr>
-          <a:xfrm>
-            <a:off x="6172200" y="960120"/>
-            <a:ext cx="2377440" cy="502920"/>
-          </a:xfrm>
-          <a:prstGeom prst="rect">
-            <a:avLst/>
-          </a:prstGeom>
-          <a:noFill/>
-          <a:ln/>
-        </p:spPr>
-        <p:txBody>
-          <a:bodyPr wrap="square" lIns="0" tIns="0" rIns="0" bIns="0" rtlCol="0" anchor="ctr"/>
-          <a:lstStyle/>
-          <a:p>
-            <a:pPr algn="ctr" indent="0" marL="0">
-              <a:lnSpc>
-                <a:spcPct val="125000"/>
-              </a:lnSpc>
-              <a:buNone/>
-            </a:pPr>
-            <a:r>
-              <a:rPr lang="en-US" sz="2400" b="1" dirty="0">
-                <a:solidFill>
-                  <a:srgbClr val="7A7099"/>
-                </a:solidFill>
-                <a:latin typeface="Cambria" pitchFamily="34" charset="0"/>
-                <a:ea typeface="Cambria" pitchFamily="34" charset="-122"/>
-                <a:cs typeface="Cambria" pitchFamily="34" charset="-120"/>
-              </a:rPr>
-              <a:t>+9,14</a:t>
-            </a:r>
-            <a:endParaRPr lang="en-US" sz="2400" dirty="0"/>
-          </a:p>
-        </p:txBody>
-      </p:sp>
-      <p:sp>
-        <p:nvSpPr>
-          <p:cNvPr id="10" name="Text 8"/>
-          <p:cNvSpPr/>
-          <p:nvPr/>
-        </p:nvSpPr>
-        <p:spPr>
-          <a:xfrm>
-            <a:off x="6172200" y="1490472"/>
-            <a:ext cx="2377440" cy="475488"/>
-          </a:xfrm>
-          <a:prstGeom prst="rect">
-            <a:avLst/>
-          </a:prstGeom>
-          <a:noFill/>
-          <a:ln/>
-        </p:spPr>
-        <p:txBody>
-          <a:bodyPr wrap="square" lIns="0" tIns="0" rIns="0" bIns="0" rtlCol="0" anchor="ctr">
-            <a:normAutofit/>
-          </a:bodyPr>
-          <a:lstStyle/>
-          <a:p>
-            <a:pPr algn="ctr" indent="0" marL="0">
-              <a:lnSpc>
-                <a:spcPct val="125000"/>
-              </a:lnSpc>
-              <a:buNone/>
-            </a:pPr>
-            <a:r>
-              <a:rPr lang="en-US" sz="1250" b="1" dirty="0">
-                <a:solidFill>
-                  <a:srgbClr val="1A1A1A"/>
-                </a:solidFill>
-                <a:latin typeface="Cambria" pitchFamily="34" charset="0"/>
-                <a:ea typeface="Cambria" pitchFamily="34" charset="-122"/>
-                <a:cs typeface="Cambria" pitchFamily="34" charset="-120"/>
-              </a:rPr>
-              <a:t>so với 7B prompting</a:t>
-            </a:r>
-            <a:endParaRPr lang="en-US" sz="1250" dirty="0"/>
-          </a:p>
-        </p:txBody>
-      </p:sp>
-      <p:sp>
-        <p:nvSpPr>
-          <p:cNvPr id="11" name="Shape 9"/>
+          <p:cNvPr id="10" name="Shape 8"/>
           <p:cNvSpPr/>
           <p:nvPr/>
         </p:nvSpPr>
@@ -21714,7 +20380,7 @@
       </p:sp>
       <p:sp>
         <p:nvSpPr>
-          <p:cNvPr id="12" name="Shape 10"/>
+          <p:cNvPr id="11" name="Shape 9"/>
           <p:cNvSpPr/>
           <p:nvPr/>
         </p:nvSpPr>
@@ -21741,7 +20407,7 @@
       </p:sp>
       <p:sp>
         <p:nvSpPr>
-          <p:cNvPr id="13" name="Text 11"/>
+          <p:cNvPr id="12" name="Text 10"/>
           <p:cNvSpPr/>
           <p:nvPr/>
         </p:nvSpPr>
@@ -21785,7 +20451,7 @@
       </p:sp>
       <p:sp>
         <p:nvSpPr>
-          <p:cNvPr id="14" name="Shape 12"/>
+          <p:cNvPr id="13" name="Shape 11"/>
           <p:cNvSpPr/>
           <p:nvPr/>
         </p:nvSpPr>
@@ -21812,7 +20478,7 @@
       </p:sp>
       <p:sp>
         <p:nvSpPr>
-          <p:cNvPr id="15" name="Text 13"/>
+          <p:cNvPr id="14" name="Text 12"/>
           <p:cNvSpPr/>
           <p:nvPr/>
         </p:nvSpPr>
@@ -21856,7 +20522,7 @@
       </p:sp>
       <p:sp>
         <p:nvSpPr>
-          <p:cNvPr id="16" name="Shape 14"/>
+          <p:cNvPr id="15" name="Shape 13"/>
           <p:cNvSpPr/>
           <p:nvPr/>
         </p:nvSpPr>
@@ -21883,7 +20549,7 @@
       </p:sp>
       <p:sp>
         <p:nvSpPr>
-          <p:cNvPr id="17" name="Text 15"/>
+          <p:cNvPr id="16" name="Text 14"/>
           <p:cNvSpPr/>
           <p:nvPr/>
         </p:nvSpPr>
@@ -21927,7 +20593,7 @@
       </p:sp>
       <p:sp>
         <p:nvSpPr>
-          <p:cNvPr id="18" name="Shape 16"/>
+          <p:cNvPr id="17" name="Shape 15"/>
           <p:cNvSpPr/>
           <p:nvPr/>
         </p:nvSpPr>
@@ -21952,7 +20618,7 @@
       </p:sp>
       <p:sp>
         <p:nvSpPr>
-          <p:cNvPr id="19" name="Text 17"/>
+          <p:cNvPr id="18" name="Text 16"/>
           <p:cNvSpPr/>
           <p:nvPr/>
         </p:nvSpPr>
@@ -21996,49 +20662,7 @@
       </p:sp>
       <p:sp>
         <p:nvSpPr>
-          <p:cNvPr id="20" name="Text 18"/>
-          <p:cNvSpPr/>
-          <p:nvPr/>
-        </p:nvSpPr>
-        <p:spPr>
-          <a:xfrm>
-            <a:off x="502920" y="6327648"/>
-            <a:ext cx="8138160" cy="137160"/>
-          </a:xfrm>
-          <a:prstGeom prst="rect">
-            <a:avLst/>
-          </a:prstGeom>
-          <a:noFill/>
-          <a:ln/>
-        </p:spPr>
-        <p:txBody>
-          <a:bodyPr wrap="square" lIns="0" tIns="0" rIns="0" bIns="0" rtlCol="0" anchor="ctr"/>
-          <a:lstStyle/>
-          <a:p>
-            <a:pPr algn="r" indent="0" marL="0">
-              <a:lnSpc>
-                <a:spcPct val="125000"/>
-              </a:lnSpc>
-              <a:buNone/>
-            </a:pPr>
-            <a:r>
-              <a:rPr lang="en-US" sz="800" i="1" dirty="0">
-                <a:solidFill>
-                  <a:srgbClr val="5A5A66"/>
-                </a:solidFill>
-                <a:latin typeface="Cambria" pitchFamily="34" charset="0"/>
-                <a:ea typeface="Cambria" pitchFamily="34" charset="-122"/>
-                <a:cs typeface="Cambria" pitchFamily="34" charset="-120"/>
-              </a:rPr>
-              <a:t>Luận văn Chương 7</a:t>
-            </a:r>
-            <a:endParaRPr lang="en-US" sz="800" dirty="0"/>
-          </a:p>
-        </p:txBody>
-      </p:sp>
-      <p:sp>
-        <p:nvSpPr>
-          <p:cNvPr id="21" name="Shape 19"/>
+          <p:cNvPr id="19" name="Shape 17"/>
           <p:cNvSpPr/>
           <p:nvPr/>
         </p:nvSpPr>
@@ -22065,7 +20689,7 @@
       </p:sp>
       <p:sp>
         <p:nvSpPr>
-          <p:cNvPr id="22" name="Shape 20"/>
+          <p:cNvPr id="20" name="Shape 18"/>
           <p:cNvSpPr/>
           <p:nvPr/>
         </p:nvSpPr>
@@ -22092,7 +20716,7 @@
       </p:sp>
       <p:sp>
         <p:nvSpPr>
-          <p:cNvPr id="23" name="Shape 21"/>
+          <p:cNvPr id="21" name="Shape 19"/>
           <p:cNvSpPr/>
           <p:nvPr/>
         </p:nvSpPr>
@@ -22119,7 +20743,7 @@
       </p:sp>
       <p:sp>
         <p:nvSpPr>
-          <p:cNvPr id="24" name="Shape 22"/>
+          <p:cNvPr id="22" name="Shape 20"/>
           <p:cNvSpPr/>
           <p:nvPr/>
         </p:nvSpPr>
@@ -22146,7 +20770,7 @@
       </p:sp>
       <p:sp>
         <p:nvSpPr>
-          <p:cNvPr id="25" name="Text 23"/>
+          <p:cNvPr id="23" name="Text 21"/>
           <p:cNvSpPr/>
           <p:nvPr/>
         </p:nvSpPr>
@@ -22188,7 +20812,7 @@
       </p:sp>
       <p:sp>
         <p:nvSpPr>
-          <p:cNvPr id="26" name="Text 24"/>
+          <p:cNvPr id="24" name="Text 22"/>
           <p:cNvSpPr/>
           <p:nvPr/>
         </p:nvSpPr>
@@ -22230,7 +20854,7 @@
       </p:sp>
       <p:sp>
         <p:nvSpPr>
-          <p:cNvPr id="27" name="Text 25"/>
+          <p:cNvPr id="25" name="Text 23"/>
           <p:cNvSpPr/>
           <p:nvPr/>
         </p:nvSpPr>
@@ -22272,7 +20896,7 @@
       </p:sp>
       <p:sp>
         <p:nvSpPr>
-          <p:cNvPr id="28" name="Text 26"/>
+          <p:cNvPr id="26" name="Text 24"/>
           <p:cNvSpPr/>
           <p:nvPr/>
         </p:nvSpPr>
@@ -28982,8 +27606,8 @@
         </p:nvSpPr>
         <p:spPr>
           <a:xfrm>
-            <a:off x="502920" y="603504"/>
-            <a:ext cx="8138160" cy="219456"/>
+            <a:off x="502920" y="914400"/>
+            <a:ext cx="8138160" cy="530352"/>
           </a:xfrm>
           <a:prstGeom prst="rect">
             <a:avLst/>
@@ -28997,14 +27621,14 @@
           </a:bodyPr>
           <a:lstStyle/>
           <a:p>
-            <a:pPr indent="0" marL="0">
-              <a:lnSpc>
-                <a:spcPct val="125000"/>
-              </a:lnSpc>
-              <a:buNone/>
-            </a:pPr>
-            <a:r>
-              <a:rPr lang="en-US" sz="1260" b="1" dirty="0">
+            <a:pPr algn="ctr" indent="0" marL="0">
+              <a:lnSpc>
+                <a:spcPct val="125000"/>
+              </a:lnSpc>
+              <a:buNone/>
+            </a:pPr>
+            <a:r>
+              <a:rPr lang="en-US" sz="1700" b="1" dirty="0">
                 <a:solidFill>
                   <a:srgbClr val="25194B"/>
                 </a:solidFill>
@@ -29012,50 +27636,6 @@
                 <a:ea typeface="Cambria" pitchFamily="34" charset="-122"/>
                 <a:cs typeface="Cambria" pitchFamily="34" charset="-120"/>
               </a:rPr>
-              <a:t>Yêu cầu của câu hướng dẫn</a:t>
-            </a:r>
-            <a:endParaRPr lang="en-US" sz="1260" dirty="0"/>
-          </a:p>
-        </p:txBody>
-      </p:sp>
-      <p:sp>
-        <p:nvSpPr>
-          <p:cNvPr id="5" name="Text 3"/>
-          <p:cNvSpPr/>
-          <p:nvPr/>
-        </p:nvSpPr>
-        <p:spPr>
-          <a:xfrm>
-            <a:off x="502920" y="914400"/>
-            <a:ext cx="8138160" cy="530352"/>
-          </a:xfrm>
-          <a:prstGeom prst="rect">
-            <a:avLst/>
-          </a:prstGeom>
-          <a:noFill/>
-          <a:ln/>
-        </p:spPr>
-        <p:txBody>
-          <a:bodyPr wrap="square" lIns="0" tIns="0" rIns="0" bIns="0" rtlCol="0" anchor="ctr">
-            <a:normAutofit/>
-          </a:bodyPr>
-          <a:lstStyle/>
-          <a:p>
-            <a:pPr algn="ctr" indent="0" marL="0">
-              <a:lnSpc>
-                <a:spcPct val="125000"/>
-              </a:lnSpc>
-              <a:buNone/>
-            </a:pPr>
-            <a:r>
-              <a:rPr lang="en-US" sz="1700" b="1" dirty="0">
-                <a:solidFill>
-                  <a:srgbClr val="25194B"/>
-                </a:solidFill>
-                <a:latin typeface="Cambria" pitchFamily="34" charset="0"/>
-                <a:ea typeface="Cambria" pitchFamily="34" charset="-122"/>
-                <a:cs typeface="Cambria" pitchFamily="34" charset="-120"/>
-              </a:rPr>
               <a:t>Một câu nghe hoàn toàn tự nhiên vẫn có thể không đủ thông tin để người dùng chọn đúng phần tử.</a:t>
             </a:r>
             <a:endParaRPr lang="en-US" sz="1700" dirty="0"/>
@@ -29064,7 +27644,7 @@
       </p:sp>
       <p:sp>
         <p:nvSpPr>
-          <p:cNvPr id="6" name="Shape 4"/>
+          <p:cNvPr id="5" name="Shape 3"/>
           <p:cNvSpPr/>
           <p:nvPr/>
         </p:nvSpPr>
@@ -29089,7 +27669,7 @@
       </p:sp>
       <p:sp>
         <p:nvSpPr>
-          <p:cNvPr id="7" name="Text 5"/>
+          <p:cNvPr id="6" name="Text 4"/>
           <p:cNvSpPr/>
           <p:nvPr/>
         </p:nvSpPr>
@@ -29131,7 +27711,7 @@
       </p:sp>
       <p:sp>
         <p:nvSpPr>
-          <p:cNvPr id="8" name="Text 6"/>
+          <p:cNvPr id="7" name="Text 5"/>
           <p:cNvSpPr/>
           <p:nvPr/>
         </p:nvSpPr>
@@ -29173,7 +27753,7 @@
       </p:sp>
       <p:sp>
         <p:nvSpPr>
-          <p:cNvPr id="9" name="Text 7"/>
+          <p:cNvPr id="8" name="Text 6"/>
           <p:cNvSpPr/>
           <p:nvPr/>
         </p:nvSpPr>
@@ -29217,7 +27797,7 @@
       </p:sp>
       <p:sp>
         <p:nvSpPr>
-          <p:cNvPr id="10" name="Shape 8"/>
+          <p:cNvPr id="9" name="Shape 7"/>
           <p:cNvSpPr/>
           <p:nvPr/>
         </p:nvSpPr>
@@ -29242,7 +27822,7 @@
       </p:sp>
       <p:sp>
         <p:nvSpPr>
-          <p:cNvPr id="11" name="Text 9"/>
+          <p:cNvPr id="10" name="Text 8"/>
           <p:cNvSpPr/>
           <p:nvPr/>
         </p:nvSpPr>
@@ -29284,7 +27864,7 @@
       </p:sp>
       <p:sp>
         <p:nvSpPr>
-          <p:cNvPr id="12" name="Text 10"/>
+          <p:cNvPr id="11" name="Text 9"/>
           <p:cNvSpPr/>
           <p:nvPr/>
         </p:nvSpPr>
@@ -29326,7 +27906,7 @@
       </p:sp>
       <p:sp>
         <p:nvSpPr>
-          <p:cNvPr id="13" name="Text 11"/>
+          <p:cNvPr id="12" name="Text 10"/>
           <p:cNvSpPr/>
           <p:nvPr/>
         </p:nvSpPr>
@@ -29368,7 +27948,7 @@
       </p:sp>
       <p:sp>
         <p:nvSpPr>
-          <p:cNvPr id="14" name="Text 12"/>
+          <p:cNvPr id="13" name="Text 11"/>
           <p:cNvSpPr/>
           <p:nvPr/>
         </p:nvSpPr>
@@ -29412,49 +27992,7 @@
       </p:sp>
       <p:sp>
         <p:nvSpPr>
-          <p:cNvPr id="15" name="Text 13"/>
-          <p:cNvSpPr/>
-          <p:nvPr/>
-        </p:nvSpPr>
-        <p:spPr>
-          <a:xfrm>
-            <a:off x="502920" y="6327648"/>
-            <a:ext cx="8138160" cy="137160"/>
-          </a:xfrm>
-          <a:prstGeom prst="rect">
-            <a:avLst/>
-          </a:prstGeom>
-          <a:noFill/>
-          <a:ln/>
-        </p:spPr>
-        <p:txBody>
-          <a:bodyPr wrap="square" lIns="0" tIns="0" rIns="0" bIns="0" rtlCol="0" anchor="ctr"/>
-          <a:lstStyle/>
-          <a:p>
-            <a:pPr algn="r" indent="0" marL="0">
-              <a:lnSpc>
-                <a:spcPct val="125000"/>
-              </a:lnSpc>
-              <a:buNone/>
-            </a:pPr>
-            <a:r>
-              <a:rPr lang="en-US" sz="800" i="1" dirty="0">
-                <a:solidFill>
-                  <a:srgbClr val="5A5A66"/>
-                </a:solidFill>
-                <a:latin typeface="Cambria" pitchFamily="34" charset="0"/>
-                <a:ea typeface="Cambria" pitchFamily="34" charset="-122"/>
-                <a:cs typeface="Cambria" pitchFamily="34" charset="-120"/>
-              </a:rPr>
-              <a:t>Luận văn Chương 1</a:t>
-            </a:r>
-            <a:endParaRPr lang="en-US" sz="800" dirty="0"/>
-          </a:p>
-        </p:txBody>
-      </p:sp>
-      <p:sp>
-        <p:nvSpPr>
-          <p:cNvPr id="16" name="Shape 14"/>
+          <p:cNvPr id="14" name="Shape 12"/>
           <p:cNvSpPr/>
           <p:nvPr/>
         </p:nvSpPr>
@@ -29481,7 +28019,7 @@
       </p:sp>
       <p:sp>
         <p:nvSpPr>
-          <p:cNvPr id="17" name="Shape 15"/>
+          <p:cNvPr id="15" name="Shape 13"/>
           <p:cNvSpPr/>
           <p:nvPr/>
         </p:nvSpPr>
@@ -29508,7 +28046,7 @@
       </p:sp>
       <p:sp>
         <p:nvSpPr>
-          <p:cNvPr id="18" name="Shape 16"/>
+          <p:cNvPr id="16" name="Shape 14"/>
           <p:cNvSpPr/>
           <p:nvPr/>
         </p:nvSpPr>
@@ -29535,7 +28073,7 @@
       </p:sp>
       <p:sp>
         <p:nvSpPr>
-          <p:cNvPr id="19" name="Shape 17"/>
+          <p:cNvPr id="17" name="Shape 15"/>
           <p:cNvSpPr/>
           <p:nvPr/>
         </p:nvSpPr>
@@ -29562,7 +28100,7 @@
       </p:sp>
       <p:sp>
         <p:nvSpPr>
-          <p:cNvPr id="20" name="Text 18"/>
+          <p:cNvPr id="18" name="Text 16"/>
           <p:cNvSpPr/>
           <p:nvPr/>
         </p:nvSpPr>
@@ -29604,7 +28142,7 @@
       </p:sp>
       <p:sp>
         <p:nvSpPr>
-          <p:cNvPr id="21" name="Text 19"/>
+          <p:cNvPr id="19" name="Text 17"/>
           <p:cNvSpPr/>
           <p:nvPr/>
         </p:nvSpPr>
@@ -29646,7 +28184,7 @@
       </p:sp>
       <p:sp>
         <p:nvSpPr>
-          <p:cNvPr id="22" name="Text 20"/>
+          <p:cNvPr id="20" name="Text 18"/>
           <p:cNvSpPr/>
           <p:nvPr/>
         </p:nvSpPr>
@@ -29688,7 +28226,7 @@
       </p:sp>
       <p:sp>
         <p:nvSpPr>
-          <p:cNvPr id="23" name="Text 21"/>
+          <p:cNvPr id="21" name="Text 19"/>
           <p:cNvSpPr/>
           <p:nvPr/>
         </p:nvSpPr>
@@ -31191,50 +29729,6 @@
         </p:nvSpPr>
         <p:spPr>
           <a:xfrm>
-            <a:off x="502920" y="603504"/>
-            <a:ext cx="8138160" cy="219456"/>
-          </a:xfrm>
-          <a:prstGeom prst="rect">
-            <a:avLst/>
-          </a:prstGeom>
-          <a:noFill/>
-          <a:ln/>
-        </p:spPr>
-        <p:txBody>
-          <a:bodyPr wrap="square" lIns="0" tIns="0" rIns="0" bIns="0" rtlCol="0" anchor="ctr">
-            <a:normAutofit/>
-          </a:bodyPr>
-          <a:lstStyle/>
-          <a:p>
-            <a:pPr indent="0" marL="0">
-              <a:lnSpc>
-                <a:spcPct val="125000"/>
-              </a:lnSpc>
-              <a:buNone/>
-            </a:pPr>
-            <a:r>
-              <a:rPr lang="en-US" sz="1260" b="1" dirty="0">
-                <a:solidFill>
-                  <a:srgbClr val="25194B"/>
-                </a:solidFill>
-                <a:latin typeface="Cambria" pitchFamily="34" charset="0"/>
-                <a:ea typeface="Cambria" pitchFamily="34" charset="-122"/>
-                <a:cs typeface="Cambria" pitchFamily="34" charset="-120"/>
-              </a:rPr>
-              <a:t>Hạn chế của độ tương đồng</a:t>
-            </a:r>
-            <a:endParaRPr lang="en-US" sz="1260" dirty="0"/>
-          </a:p>
-        </p:txBody>
-      </p:sp>
-      <p:sp>
-        <p:nvSpPr>
-          <p:cNvPr id="5" name="Text 3"/>
-          <p:cNvSpPr/>
-          <p:nvPr/>
-        </p:nvSpPr>
-        <p:spPr>
-          <a:xfrm>
             <a:off x="502920" y="914400"/>
             <a:ext cx="8138160" cy="502920"/>
           </a:xfrm>
@@ -31271,7 +29765,7 @@
       </p:sp>
       <p:sp>
         <p:nvSpPr>
-          <p:cNvPr id="6" name="Shape 4"/>
+          <p:cNvPr id="5" name="Shape 3"/>
           <p:cNvSpPr/>
           <p:nvPr/>
         </p:nvSpPr>
@@ -31296,7 +29790,7 @@
       </p:sp>
       <p:sp>
         <p:nvSpPr>
-          <p:cNvPr id="7" name="Text 5"/>
+          <p:cNvPr id="6" name="Text 4"/>
           <p:cNvSpPr/>
           <p:nvPr/>
         </p:nvSpPr>
@@ -31360,7 +29854,7 @@
       </p:sp>
       <p:sp>
         <p:nvSpPr>
-          <p:cNvPr id="8" name="Shape 6"/>
+          <p:cNvPr id="7" name="Shape 5"/>
           <p:cNvSpPr/>
           <p:nvPr/>
         </p:nvSpPr>
@@ -31385,7 +29879,7 @@
       </p:sp>
       <p:sp>
         <p:nvSpPr>
-          <p:cNvPr id="9" name="Text 7"/>
+          <p:cNvPr id="8" name="Text 6"/>
           <p:cNvSpPr/>
           <p:nvPr/>
         </p:nvSpPr>
@@ -31449,7 +29943,7 @@
       </p:sp>
       <p:sp>
         <p:nvSpPr>
-          <p:cNvPr id="10" name="Shape 8"/>
+          <p:cNvPr id="9" name="Shape 7"/>
           <p:cNvSpPr/>
           <p:nvPr/>
         </p:nvSpPr>
@@ -31474,7 +29968,7 @@
       </p:sp>
       <p:sp>
         <p:nvSpPr>
-          <p:cNvPr id="11" name="Text 9"/>
+          <p:cNvPr id="10" name="Text 8"/>
           <p:cNvSpPr/>
           <p:nvPr/>
         </p:nvSpPr>
@@ -31558,7 +30052,7 @@
       </p:sp>
       <p:sp>
         <p:nvSpPr>
-          <p:cNvPr id="12" name="Text 10"/>
+          <p:cNvPr id="11" name="Text 9"/>
           <p:cNvSpPr/>
           <p:nvPr/>
         </p:nvSpPr>
@@ -31602,49 +30096,7 @@
       </p:sp>
       <p:sp>
         <p:nvSpPr>
-          <p:cNvPr id="13" name="Text 11"/>
-          <p:cNvSpPr/>
-          <p:nvPr/>
-        </p:nvSpPr>
-        <p:spPr>
-          <a:xfrm>
-            <a:off x="502920" y="6327648"/>
-            <a:ext cx="8138160" cy="137160"/>
-          </a:xfrm>
-          <a:prstGeom prst="rect">
-            <a:avLst/>
-          </a:prstGeom>
-          <a:noFill/>
-          <a:ln/>
-        </p:spPr>
-        <p:txBody>
-          <a:bodyPr wrap="square" lIns="0" tIns="0" rIns="0" bIns="0" rtlCol="0" anchor="ctr"/>
-          <a:lstStyle/>
-          <a:p>
-            <a:pPr algn="r" indent="0" marL="0">
-              <a:lnSpc>
-                <a:spcPct val="125000"/>
-              </a:lnSpc>
-              <a:buNone/>
-            </a:pPr>
-            <a:r>
-              <a:rPr lang="en-US" sz="800" i="1" dirty="0">
-                <a:solidFill>
-                  <a:srgbClr val="5A5A66"/>
-                </a:solidFill>
-                <a:latin typeface="Cambria" pitchFamily="34" charset="0"/>
-                <a:ea typeface="Cambria" pitchFamily="34" charset="-122"/>
-                <a:cs typeface="Cambria" pitchFamily="34" charset="-120"/>
-              </a:rPr>
-              <a:t>Luận văn Chương 5</a:t>
-            </a:r>
-            <a:endParaRPr lang="en-US" sz="800" dirty="0"/>
-          </a:p>
-        </p:txBody>
-      </p:sp>
-      <p:sp>
-        <p:nvSpPr>
-          <p:cNvPr id="14" name="Shape 12"/>
+          <p:cNvPr id="12" name="Shape 10"/>
           <p:cNvSpPr/>
           <p:nvPr/>
         </p:nvSpPr>
@@ -31671,7 +30123,7 @@
       </p:sp>
       <p:sp>
         <p:nvSpPr>
-          <p:cNvPr id="15" name="Shape 13"/>
+          <p:cNvPr id="13" name="Shape 11"/>
           <p:cNvSpPr/>
           <p:nvPr/>
         </p:nvSpPr>
@@ -31698,7 +30150,7 @@
       </p:sp>
       <p:sp>
         <p:nvSpPr>
-          <p:cNvPr id="16" name="Shape 14"/>
+          <p:cNvPr id="14" name="Shape 12"/>
           <p:cNvSpPr/>
           <p:nvPr/>
         </p:nvSpPr>
@@ -31725,7 +30177,7 @@
       </p:sp>
       <p:sp>
         <p:nvSpPr>
-          <p:cNvPr id="17" name="Shape 15"/>
+          <p:cNvPr id="15" name="Shape 13"/>
           <p:cNvSpPr/>
           <p:nvPr/>
         </p:nvSpPr>
@@ -31752,7 +30204,7 @@
       </p:sp>
       <p:sp>
         <p:nvSpPr>
-          <p:cNvPr id="18" name="Text 16"/>
+          <p:cNvPr id="16" name="Text 14"/>
           <p:cNvSpPr/>
           <p:nvPr/>
         </p:nvSpPr>
@@ -31794,7 +30246,7 @@
       </p:sp>
       <p:sp>
         <p:nvSpPr>
-          <p:cNvPr id="19" name="Text 17"/>
+          <p:cNvPr id="17" name="Text 15"/>
           <p:cNvSpPr/>
           <p:nvPr/>
         </p:nvSpPr>
@@ -31836,7 +30288,7 @@
       </p:sp>
       <p:sp>
         <p:nvSpPr>
-          <p:cNvPr id="20" name="Text 18"/>
+          <p:cNvPr id="18" name="Text 16"/>
           <p:cNvSpPr/>
           <p:nvPr/>
         </p:nvSpPr>
@@ -31878,7 +30330,7 @@
       </p:sp>
       <p:sp>
         <p:nvSpPr>
-          <p:cNvPr id="21" name="Text 19"/>
+          <p:cNvPr id="19" name="Text 17"/>
           <p:cNvSpPr/>
           <p:nvPr/>
         </p:nvSpPr>
@@ -32023,51 +30475,7 @@
       </p:sp>
       <p:sp>
         <p:nvSpPr>
-          <p:cNvPr id="4" name="Text 2"/>
-          <p:cNvSpPr/>
-          <p:nvPr/>
-        </p:nvSpPr>
-        <p:spPr>
-          <a:xfrm>
-            <a:off x="502920" y="603504"/>
-            <a:ext cx="8138160" cy="219456"/>
-          </a:xfrm>
-          <a:prstGeom prst="rect">
-            <a:avLst/>
-          </a:prstGeom>
-          <a:noFill/>
-          <a:ln/>
-        </p:spPr>
-        <p:txBody>
-          <a:bodyPr wrap="square" lIns="0" tIns="0" rIns="0" bIns="0" rtlCol="0" anchor="ctr">
-            <a:normAutofit/>
-          </a:bodyPr>
-          <a:lstStyle/>
-          <a:p>
-            <a:pPr indent="0" marL="0">
-              <a:lnSpc>
-                <a:spcPct val="125000"/>
-              </a:lnSpc>
-              <a:buNone/>
-            </a:pPr>
-            <a:r>
-              <a:rPr lang="en-US" sz="1260" b="1" dirty="0">
-                <a:solidFill>
-                  <a:srgbClr val="25194B"/>
-                </a:solidFill>
-                <a:latin typeface="Cambria" pitchFamily="34" charset="0"/>
-                <a:ea typeface="Cambria" pitchFamily="34" charset="-122"/>
-                <a:cs typeface="Cambria" pitchFamily="34" charset="-120"/>
-              </a:rPr>
-              <a:t>Đóng góp chính</a:t>
-            </a:r>
-            <a:endParaRPr lang="en-US" sz="1260" dirty="0"/>
-          </a:p>
-        </p:txBody>
-      </p:sp>
-      <p:sp>
-        <p:nvSpPr>
-          <p:cNvPr id="5" name="Shape 3"/>
+          <p:cNvPr id="4" name="Shape 2"/>
           <p:cNvSpPr/>
           <p:nvPr/>
         </p:nvSpPr>
@@ -32092,7 +30500,7 @@
       </p:sp>
       <p:sp>
         <p:nvSpPr>
-          <p:cNvPr id="6" name="Text 4"/>
+          <p:cNvPr id="5" name="Text 3"/>
           <p:cNvSpPr/>
           <p:nvPr/>
         </p:nvSpPr>
@@ -32134,7 +30542,7 @@
       </p:sp>
       <p:sp>
         <p:nvSpPr>
-          <p:cNvPr id="7" name="Text 5"/>
+          <p:cNvPr id="6" name="Text 4"/>
           <p:cNvSpPr/>
           <p:nvPr/>
         </p:nvSpPr>
@@ -32178,7 +30586,7 @@
       </p:sp>
       <p:sp>
         <p:nvSpPr>
-          <p:cNvPr id="8" name="Shape 6"/>
+          <p:cNvPr id="7" name="Shape 5"/>
           <p:cNvSpPr/>
           <p:nvPr/>
         </p:nvSpPr>
@@ -32203,7 +30611,7 @@
       </p:sp>
       <p:sp>
         <p:nvSpPr>
-          <p:cNvPr id="9" name="Text 7"/>
+          <p:cNvPr id="8" name="Text 6"/>
           <p:cNvSpPr/>
           <p:nvPr/>
         </p:nvSpPr>
@@ -32245,7 +30653,7 @@
       </p:sp>
       <p:sp>
         <p:nvSpPr>
-          <p:cNvPr id="10" name="Text 8"/>
+          <p:cNvPr id="9" name="Text 7"/>
           <p:cNvSpPr/>
           <p:nvPr/>
         </p:nvSpPr>
@@ -32289,7 +30697,7 @@
       </p:sp>
       <p:sp>
         <p:nvSpPr>
-          <p:cNvPr id="11" name="Shape 9"/>
+          <p:cNvPr id="10" name="Shape 8"/>
           <p:cNvSpPr/>
           <p:nvPr/>
         </p:nvSpPr>
@@ -32314,7 +30722,7 @@
       </p:sp>
       <p:sp>
         <p:nvSpPr>
-          <p:cNvPr id="12" name="Text 10"/>
+          <p:cNvPr id="11" name="Text 9"/>
           <p:cNvSpPr/>
           <p:nvPr/>
         </p:nvSpPr>
@@ -32358,7 +30766,7 @@
       </p:sp>
       <p:sp>
         <p:nvSpPr>
-          <p:cNvPr id="13" name="Text 11"/>
+          <p:cNvPr id="12" name="Text 10"/>
           <p:cNvSpPr/>
           <p:nvPr/>
         </p:nvSpPr>
@@ -32402,7 +30810,7 @@
       </p:sp>
       <p:sp>
         <p:nvSpPr>
-          <p:cNvPr id="14" name="Text 12"/>
+          <p:cNvPr id="13" name="Text 11"/>
           <p:cNvSpPr/>
           <p:nvPr/>
         </p:nvSpPr>
@@ -32444,7 +30852,7 @@
       </p:sp>
       <p:sp>
         <p:nvSpPr>
-          <p:cNvPr id="15" name="Text 13"/>
+          <p:cNvPr id="14" name="Text 12"/>
           <p:cNvSpPr/>
           <p:nvPr/>
         </p:nvSpPr>
@@ -32488,7 +30896,7 @@
       </p:sp>
       <p:sp>
         <p:nvSpPr>
-          <p:cNvPr id="16" name="Text 14"/>
+          <p:cNvPr id="15" name="Text 13"/>
           <p:cNvSpPr/>
           <p:nvPr/>
         </p:nvSpPr>
@@ -32530,7 +30938,7 @@
       </p:sp>
       <p:sp>
         <p:nvSpPr>
-          <p:cNvPr id="17" name="Text 15"/>
+          <p:cNvPr id="16" name="Text 14"/>
           <p:cNvSpPr/>
           <p:nvPr/>
         </p:nvSpPr>
@@ -32574,7 +30982,7 @@
       </p:sp>
       <p:sp>
         <p:nvSpPr>
-          <p:cNvPr id="18" name="Text 16"/>
+          <p:cNvPr id="17" name="Text 15"/>
           <p:cNvSpPr/>
           <p:nvPr/>
         </p:nvSpPr>
@@ -32616,7 +31024,7 @@
       </p:sp>
       <p:sp>
         <p:nvSpPr>
-          <p:cNvPr id="19" name="Text 17"/>
+          <p:cNvPr id="18" name="Text 16"/>
           <p:cNvSpPr/>
           <p:nvPr/>
         </p:nvSpPr>
@@ -32660,49 +31068,7 @@
       </p:sp>
       <p:sp>
         <p:nvSpPr>
-          <p:cNvPr id="20" name="Text 18"/>
-          <p:cNvSpPr/>
-          <p:nvPr/>
-        </p:nvSpPr>
-        <p:spPr>
-          <a:xfrm>
-            <a:off x="502920" y="6327648"/>
-            <a:ext cx="8138160" cy="137160"/>
-          </a:xfrm>
-          <a:prstGeom prst="rect">
-            <a:avLst/>
-          </a:prstGeom>
-          <a:noFill/>
-          <a:ln/>
-        </p:spPr>
-        <p:txBody>
-          <a:bodyPr wrap="square" lIns="0" tIns="0" rIns="0" bIns="0" rtlCol="0" anchor="ctr"/>
-          <a:lstStyle/>
-          <a:p>
-            <a:pPr algn="r" indent="0" marL="0">
-              <a:lnSpc>
-                <a:spcPct val="125000"/>
-              </a:lnSpc>
-              <a:buNone/>
-            </a:pPr>
-            <a:r>
-              <a:rPr lang="en-US" sz="800" i="1" dirty="0">
-                <a:solidFill>
-                  <a:srgbClr val="5A5A66"/>
-                </a:solidFill>
-                <a:latin typeface="Cambria" pitchFamily="34" charset="0"/>
-                <a:ea typeface="Cambria" pitchFamily="34" charset="-122"/>
-                <a:cs typeface="Cambria" pitchFamily="34" charset="-120"/>
-              </a:rPr>
-              <a:t>Luận văn §1.6, Chương 6</a:t>
-            </a:r>
-            <a:endParaRPr lang="en-US" sz="800" dirty="0"/>
-          </a:p>
-        </p:txBody>
-      </p:sp>
-      <p:sp>
-        <p:nvSpPr>
-          <p:cNvPr id="21" name="Shape 19"/>
+          <p:cNvPr id="19" name="Shape 17"/>
           <p:cNvSpPr/>
           <p:nvPr/>
         </p:nvSpPr>
@@ -32729,7 +31095,7 @@
       </p:sp>
       <p:sp>
         <p:nvSpPr>
-          <p:cNvPr id="22" name="Shape 20"/>
+          <p:cNvPr id="20" name="Shape 18"/>
           <p:cNvSpPr/>
           <p:nvPr/>
         </p:nvSpPr>
@@ -32756,7 +31122,7 @@
       </p:sp>
       <p:sp>
         <p:nvSpPr>
-          <p:cNvPr id="23" name="Shape 21"/>
+          <p:cNvPr id="21" name="Shape 19"/>
           <p:cNvSpPr/>
           <p:nvPr/>
         </p:nvSpPr>
@@ -32783,7 +31149,7 @@
       </p:sp>
       <p:sp>
         <p:nvSpPr>
-          <p:cNvPr id="24" name="Shape 22"/>
+          <p:cNvPr id="22" name="Shape 20"/>
           <p:cNvSpPr/>
           <p:nvPr/>
         </p:nvSpPr>
@@ -32810,7 +31176,7 @@
       </p:sp>
       <p:sp>
         <p:nvSpPr>
-          <p:cNvPr id="25" name="Text 23"/>
+          <p:cNvPr id="23" name="Text 21"/>
           <p:cNvSpPr/>
           <p:nvPr/>
         </p:nvSpPr>
@@ -32852,7 +31218,7 @@
       </p:sp>
       <p:sp>
         <p:nvSpPr>
-          <p:cNvPr id="26" name="Text 24"/>
+          <p:cNvPr id="24" name="Text 22"/>
           <p:cNvSpPr/>
           <p:nvPr/>
         </p:nvSpPr>
@@ -32894,7 +31260,7 @@
       </p:sp>
       <p:sp>
         <p:nvSpPr>
-          <p:cNvPr id="27" name="Text 25"/>
+          <p:cNvPr id="25" name="Text 23"/>
           <p:cNvSpPr/>
           <p:nvPr/>
         </p:nvSpPr>
@@ -32936,7 +31302,7 @@
       </p:sp>
       <p:sp>
         <p:nvSpPr>
-          <p:cNvPr id="28" name="Text 26"/>
+          <p:cNvPr id="26" name="Text 24"/>
           <p:cNvSpPr/>
           <p:nvPr/>
         </p:nvSpPr>
@@ -33087,8 +31453,8 @@
         </p:nvSpPr>
         <p:spPr>
           <a:xfrm>
-            <a:off x="502920" y="603504"/>
-            <a:ext cx="8138160" cy="219456"/>
+            <a:off x="502920" y="877824"/>
+            <a:ext cx="8138160" cy="502920"/>
           </a:xfrm>
           <a:prstGeom prst="rect">
             <a:avLst/>
@@ -33102,14 +31468,14 @@
           </a:bodyPr>
           <a:lstStyle/>
           <a:p>
-            <a:pPr indent="0" marL="0">
-              <a:lnSpc>
-                <a:spcPct val="125000"/>
-              </a:lnSpc>
-              <a:buNone/>
-            </a:pPr>
-            <a:r>
-              <a:rPr lang="en-US" sz="1260" b="1" dirty="0">
+            <a:pPr algn="ctr" indent="0" marL="0">
+              <a:lnSpc>
+                <a:spcPct val="125000"/>
+              </a:lnSpc>
+              <a:buNone/>
+            </a:pPr>
+            <a:r>
+              <a:rPr lang="en-US" sz="1650" b="1" dirty="0">
                 <a:solidFill>
                   <a:srgbClr val="25194B"/>
                 </a:solidFill>
@@ -33117,50 +31483,6 @@
                 <a:ea typeface="Cambria" pitchFamily="34" charset="-122"/>
                 <a:cs typeface="Cambria" pitchFamily="34" charset="-120"/>
               </a:rPr>
-              <a:t>Dữ liệu và cách chia tập</a:t>
-            </a:r>
-            <a:endParaRPr lang="en-US" sz="1260" dirty="0"/>
-          </a:p>
-        </p:txBody>
-      </p:sp>
-      <p:sp>
-        <p:nvSpPr>
-          <p:cNvPr id="5" name="Text 3"/>
-          <p:cNvSpPr/>
-          <p:nvPr/>
-        </p:nvSpPr>
-        <p:spPr>
-          <a:xfrm>
-            <a:off x="502920" y="877824"/>
-            <a:ext cx="8138160" cy="502920"/>
-          </a:xfrm>
-          <a:prstGeom prst="rect">
-            <a:avLst/>
-          </a:prstGeom>
-          <a:noFill/>
-          <a:ln/>
-        </p:spPr>
-        <p:txBody>
-          <a:bodyPr wrap="square" lIns="0" tIns="0" rIns="0" bIns="0" rtlCol="0" anchor="ctr">
-            <a:normAutofit/>
-          </a:bodyPr>
-          <a:lstStyle/>
-          <a:p>
-            <a:pPr algn="ctr" indent="0" marL="0">
-              <a:lnSpc>
-                <a:spcPct val="125000"/>
-              </a:lnSpc>
-              <a:buNone/>
-            </a:pPr>
-            <a:r>
-              <a:rPr lang="en-US" sz="1650" b="1" dirty="0">
-                <a:solidFill>
-                  <a:srgbClr val="25194B"/>
-                </a:solidFill>
-                <a:latin typeface="Cambria" pitchFamily="34" charset="0"/>
-                <a:ea typeface="Cambria" pitchFamily="34" charset="-122"/>
-                <a:cs typeface="Cambria" pitchFamily="34" charset="-120"/>
-              </a:rPr>
               <a:t>Tập huấn luyện và tập kiểm tra chính được tách theo tác vụ; không có tác vụ xuất hiện ở cả hai phía.</a:t>
             </a:r>
             <a:endParaRPr lang="en-US" sz="1650" dirty="0"/>
@@ -33169,7 +31491,7 @@
       </p:sp>
       <p:sp>
         <p:nvSpPr>
-          <p:cNvPr id="6" name="Shape 4"/>
+          <p:cNvPr id="5" name="Shape 3"/>
           <p:cNvSpPr/>
           <p:nvPr/>
         </p:nvSpPr>
@@ -33196,7 +31518,7 @@
       </p:sp>
       <p:sp>
         <p:nvSpPr>
-          <p:cNvPr id="7" name="Text 5"/>
+          <p:cNvPr id="6" name="Text 4"/>
           <p:cNvSpPr/>
           <p:nvPr/>
         </p:nvSpPr>
@@ -33229,7 +31551,7 @@
       </p:sp>
       <p:sp>
         <p:nvSpPr>
-          <p:cNvPr id="8" name="Text 6"/>
+          <p:cNvPr id="7" name="Text 5"/>
           <p:cNvSpPr/>
           <p:nvPr/>
         </p:nvSpPr>
@@ -33273,7 +31595,7 @@
       </p:sp>
       <p:sp>
         <p:nvSpPr>
-          <p:cNvPr id="9" name="Text 7"/>
+          <p:cNvPr id="8" name="Text 6"/>
           <p:cNvSpPr/>
           <p:nvPr/>
         </p:nvSpPr>
@@ -33317,7 +31639,7 @@
       </p:sp>
       <p:sp>
         <p:nvSpPr>
-          <p:cNvPr id="10" name="Text 8"/>
+          <p:cNvPr id="9" name="Text 7"/>
           <p:cNvSpPr/>
           <p:nvPr/>
         </p:nvSpPr>
@@ -33361,7 +31683,7 @@
       </p:sp>
       <p:sp>
         <p:nvSpPr>
-          <p:cNvPr id="11" name="Text 9"/>
+          <p:cNvPr id="10" name="Text 8"/>
           <p:cNvSpPr/>
           <p:nvPr/>
         </p:nvSpPr>
@@ -33405,7 +31727,7 @@
       </p:sp>
       <p:sp>
         <p:nvSpPr>
-          <p:cNvPr id="12" name="Text 10"/>
+          <p:cNvPr id="11" name="Text 9"/>
           <p:cNvSpPr/>
           <p:nvPr/>
         </p:nvSpPr>
@@ -33449,7 +31771,7 @@
       </p:sp>
       <p:sp>
         <p:nvSpPr>
-          <p:cNvPr id="13" name="Text 11"/>
+          <p:cNvPr id="12" name="Text 10"/>
           <p:cNvSpPr/>
           <p:nvPr/>
         </p:nvSpPr>
@@ -33493,7 +31815,7 @@
       </p:sp>
       <p:sp>
         <p:nvSpPr>
-          <p:cNvPr id="14" name="Text 12"/>
+          <p:cNvPr id="13" name="Text 11"/>
           <p:cNvSpPr/>
           <p:nvPr/>
         </p:nvSpPr>
@@ -33537,7 +31859,7 @@
       </p:sp>
       <p:sp>
         <p:nvSpPr>
-          <p:cNvPr id="15" name="Shape 13"/>
+          <p:cNvPr id="14" name="Shape 12"/>
           <p:cNvSpPr/>
           <p:nvPr/>
         </p:nvSpPr>
@@ -33561,7 +31883,7 @@
       </p:sp>
       <p:sp>
         <p:nvSpPr>
-          <p:cNvPr id="16" name="Text 14"/>
+          <p:cNvPr id="15" name="Text 13"/>
           <p:cNvSpPr/>
           <p:nvPr/>
         </p:nvSpPr>
@@ -33605,7 +31927,7 @@
       </p:sp>
       <p:sp>
         <p:nvSpPr>
-          <p:cNvPr id="17" name="Text 15"/>
+          <p:cNvPr id="16" name="Text 14"/>
           <p:cNvSpPr/>
           <p:nvPr/>
         </p:nvSpPr>
@@ -33649,7 +31971,7 @@
       </p:sp>
       <p:sp>
         <p:nvSpPr>
-          <p:cNvPr id="18" name="Text 16"/>
+          <p:cNvPr id="17" name="Text 15"/>
           <p:cNvSpPr/>
           <p:nvPr/>
         </p:nvSpPr>
@@ -33693,7 +32015,7 @@
       </p:sp>
       <p:sp>
         <p:nvSpPr>
-          <p:cNvPr id="19" name="Text 17"/>
+          <p:cNvPr id="18" name="Text 16"/>
           <p:cNvSpPr/>
           <p:nvPr/>
         </p:nvSpPr>
@@ -33737,7 +32059,7 @@
       </p:sp>
       <p:sp>
         <p:nvSpPr>
-          <p:cNvPr id="20" name="Shape 18"/>
+          <p:cNvPr id="19" name="Shape 17"/>
           <p:cNvSpPr/>
           <p:nvPr/>
         </p:nvSpPr>
@@ -33761,7 +32083,7 @@
       </p:sp>
       <p:sp>
         <p:nvSpPr>
-          <p:cNvPr id="21" name="Text 19"/>
+          <p:cNvPr id="20" name="Text 18"/>
           <p:cNvSpPr/>
           <p:nvPr/>
         </p:nvSpPr>
@@ -33805,7 +32127,7 @@
       </p:sp>
       <p:sp>
         <p:nvSpPr>
-          <p:cNvPr id="22" name="Text 20"/>
+          <p:cNvPr id="21" name="Text 19"/>
           <p:cNvSpPr/>
           <p:nvPr/>
         </p:nvSpPr>
@@ -33849,7 +32171,7 @@
       </p:sp>
       <p:sp>
         <p:nvSpPr>
-          <p:cNvPr id="23" name="Text 21"/>
+          <p:cNvPr id="22" name="Text 20"/>
           <p:cNvSpPr/>
           <p:nvPr/>
         </p:nvSpPr>
@@ -33893,7 +32215,7 @@
       </p:sp>
       <p:sp>
         <p:nvSpPr>
-          <p:cNvPr id="24" name="Text 22"/>
+          <p:cNvPr id="23" name="Text 21"/>
           <p:cNvSpPr/>
           <p:nvPr/>
         </p:nvSpPr>
@@ -33937,7 +32259,7 @@
       </p:sp>
       <p:sp>
         <p:nvSpPr>
-          <p:cNvPr id="25" name="Shape 23"/>
+          <p:cNvPr id="24" name="Shape 22"/>
           <p:cNvSpPr/>
           <p:nvPr/>
         </p:nvSpPr>
@@ -33962,7 +32284,7 @@
       </p:sp>
       <p:sp>
         <p:nvSpPr>
-          <p:cNvPr id="26" name="Text 24"/>
+          <p:cNvPr id="25" name="Text 23"/>
           <p:cNvSpPr/>
           <p:nvPr/>
         </p:nvSpPr>
@@ -34006,7 +32328,7 @@
       </p:sp>
       <p:sp>
         <p:nvSpPr>
-          <p:cNvPr id="27" name="Text 25"/>
+          <p:cNvPr id="26" name="Text 24"/>
           <p:cNvSpPr/>
           <p:nvPr/>
         </p:nvSpPr>
@@ -34050,49 +32372,7 @@
       </p:sp>
       <p:sp>
         <p:nvSpPr>
-          <p:cNvPr id="28" name="Text 26"/>
-          <p:cNvSpPr/>
-          <p:nvPr/>
-        </p:nvSpPr>
-        <p:spPr>
-          <a:xfrm>
-            <a:off x="502920" y="6327648"/>
-            <a:ext cx="8138160" cy="137160"/>
-          </a:xfrm>
-          <a:prstGeom prst="rect">
-            <a:avLst/>
-          </a:prstGeom>
-          <a:noFill/>
-          <a:ln/>
-        </p:spPr>
-        <p:txBody>
-          <a:bodyPr wrap="square" lIns="0" tIns="0" rIns="0" bIns="0" rtlCol="0" anchor="ctr"/>
-          <a:lstStyle/>
-          <a:p>
-            <a:pPr algn="r" indent="0" marL="0">
-              <a:lnSpc>
-                <a:spcPct val="125000"/>
-              </a:lnSpc>
-              <a:buNone/>
-            </a:pPr>
-            <a:r>
-              <a:rPr lang="en-US" sz="800" i="1" dirty="0">
-                <a:solidFill>
-                  <a:srgbClr val="5A5A66"/>
-                </a:solidFill>
-                <a:latin typeface="Cambria" pitchFamily="34" charset="0"/>
-                <a:ea typeface="Cambria" pitchFamily="34" charset="-122"/>
-                <a:cs typeface="Cambria" pitchFamily="34" charset="-120"/>
-              </a:rPr>
-              <a:t>Luận văn Chương 3, §6.8</a:t>
-            </a:r>
-            <a:endParaRPr lang="en-US" sz="800" dirty="0"/>
-          </a:p>
-        </p:txBody>
-      </p:sp>
-      <p:sp>
-        <p:nvSpPr>
-          <p:cNvPr id="29" name="Shape 27"/>
+          <p:cNvPr id="27" name="Shape 25"/>
           <p:cNvSpPr/>
           <p:nvPr/>
         </p:nvSpPr>
@@ -34119,7 +32399,7 @@
       </p:sp>
       <p:sp>
         <p:nvSpPr>
-          <p:cNvPr id="30" name="Shape 28"/>
+          <p:cNvPr id="28" name="Shape 26"/>
           <p:cNvSpPr/>
           <p:nvPr/>
         </p:nvSpPr>
@@ -34146,7 +32426,7 @@
       </p:sp>
       <p:sp>
         <p:nvSpPr>
-          <p:cNvPr id="31" name="Shape 29"/>
+          <p:cNvPr id="29" name="Shape 27"/>
           <p:cNvSpPr/>
           <p:nvPr/>
         </p:nvSpPr>
@@ -34173,7 +32453,7 @@
       </p:sp>
       <p:sp>
         <p:nvSpPr>
-          <p:cNvPr id="32" name="Shape 30"/>
+          <p:cNvPr id="30" name="Shape 28"/>
           <p:cNvSpPr/>
           <p:nvPr/>
         </p:nvSpPr>
@@ -34200,7 +32480,7 @@
       </p:sp>
       <p:sp>
         <p:nvSpPr>
-          <p:cNvPr id="33" name="Text 31"/>
+          <p:cNvPr id="31" name="Text 29"/>
           <p:cNvSpPr/>
           <p:nvPr/>
         </p:nvSpPr>
@@ -34242,7 +32522,7 @@
       </p:sp>
       <p:sp>
         <p:nvSpPr>
-          <p:cNvPr id="34" name="Text 32"/>
+          <p:cNvPr id="32" name="Text 30"/>
           <p:cNvSpPr/>
           <p:nvPr/>
         </p:nvSpPr>
@@ -34284,7 +32564,7 @@
       </p:sp>
       <p:sp>
         <p:nvSpPr>
-          <p:cNvPr id="35" name="Text 33"/>
+          <p:cNvPr id="33" name="Text 31"/>
           <p:cNvSpPr/>
           <p:nvPr/>
         </p:nvSpPr>
@@ -34326,7 +32606,7 @@
       </p:sp>
       <p:sp>
         <p:nvSpPr>
-          <p:cNvPr id="36" name="Text 34"/>
+          <p:cNvPr id="34" name="Text 32"/>
           <p:cNvSpPr/>
           <p:nvPr/>
         </p:nvSpPr>
@@ -34477,8 +32757,50 @@
         </p:nvSpPr>
         <p:spPr>
           <a:xfrm>
-            <a:off x="502920" y="603504"/>
-            <a:ext cx="8138160" cy="219456"/>
+            <a:off x="566928" y="1325880"/>
+            <a:ext cx="1828800" cy="502920"/>
+          </a:xfrm>
+          <a:prstGeom prst="rect">
+            <a:avLst/>
+          </a:prstGeom>
+          <a:noFill/>
+          <a:ln/>
+        </p:spPr>
+        <p:txBody>
+          <a:bodyPr wrap="square" lIns="0" tIns="0" rIns="0" bIns="0" rtlCol="0" anchor="ctr"/>
+          <a:lstStyle/>
+          <a:p>
+            <a:pPr algn="ctr" indent="0" marL="0">
+              <a:lnSpc>
+                <a:spcPct val="125000"/>
+              </a:lnSpc>
+              <a:buNone/>
+            </a:pPr>
+            <a:r>
+              <a:rPr lang="en-US" sz="2400" b="1" dirty="0">
+                <a:solidFill>
+                  <a:srgbClr val="7A7099"/>
+                </a:solidFill>
+                <a:latin typeface="Cambria" pitchFamily="34" charset="0"/>
+                <a:ea typeface="Cambria" pitchFamily="34" charset="-122"/>
+                <a:cs typeface="Cambria" pitchFamily="34" charset="-120"/>
+              </a:rPr>
+              <a:t>47,59%</a:t>
+            </a:r>
+            <a:endParaRPr lang="en-US" sz="2400" dirty="0"/>
+          </a:p>
+        </p:txBody>
+      </p:sp>
+      <p:sp>
+        <p:nvSpPr>
+          <p:cNvPr id="5" name="Text 3"/>
+          <p:cNvSpPr/>
+          <p:nvPr/>
+        </p:nvSpPr>
+        <p:spPr>
+          <a:xfrm>
+            <a:off x="566928" y="1856232"/>
+            <a:ext cx="1828800" cy="475488"/>
           </a:xfrm>
           <a:prstGeom prst="rect">
             <a:avLst/>
@@ -34492,36 +32814,36 @@
           </a:bodyPr>
           <a:lstStyle/>
           <a:p>
-            <a:pPr indent="0" marL="0">
-              <a:lnSpc>
-                <a:spcPct val="125000"/>
-              </a:lnSpc>
-              <a:buNone/>
-            </a:pPr>
-            <a:r>
-              <a:rPr lang="en-US" sz="1260" b="1" dirty="0">
-                <a:solidFill>
-                  <a:srgbClr val="25194B"/>
-                </a:solidFill>
-                <a:latin typeface="Cambria" pitchFamily="34" charset="0"/>
-                <a:ea typeface="Cambria" pitchFamily="34" charset="-122"/>
-                <a:cs typeface="Cambria" pitchFamily="34" charset="-120"/>
-              </a:rPr>
-              <a:t>So sánh 3B sau tinh chỉnh với 7B prompting</a:t>
-            </a:r>
-            <a:endParaRPr lang="en-US" sz="1260" dirty="0"/>
-          </a:p>
-        </p:txBody>
-      </p:sp>
-      <p:sp>
-        <p:nvSpPr>
-          <p:cNvPr id="5" name="Text 3"/>
-          <p:cNvSpPr/>
-          <p:nvPr/>
-        </p:nvSpPr>
-        <p:spPr>
-          <a:xfrm>
-            <a:off x="566928" y="1325880"/>
+            <a:pPr algn="ctr" indent="0" marL="0">
+              <a:lnSpc>
+                <a:spcPct val="125000"/>
+              </a:lnSpc>
+              <a:buNone/>
+            </a:pPr>
+            <a:r>
+              <a:rPr lang="en-US" sz="1250" b="1" dirty="0">
+                <a:solidFill>
+                  <a:srgbClr val="1A1A1A"/>
+                </a:solidFill>
+                <a:latin typeface="Cambria" pitchFamily="34" charset="0"/>
+                <a:ea typeface="Cambria" pitchFamily="34" charset="-122"/>
+                <a:cs typeface="Cambria" pitchFamily="34" charset="-120"/>
+              </a:rPr>
+              <a:t>3B · chưa tinh chỉnh</a:t>
+            </a:r>
+            <a:endParaRPr lang="en-US" sz="1250" dirty="0"/>
+          </a:p>
+        </p:txBody>
+      </p:sp>
+      <p:sp>
+        <p:nvSpPr>
+          <p:cNvPr id="6" name="Text 4"/>
+          <p:cNvSpPr/>
+          <p:nvPr/>
+        </p:nvSpPr>
+        <p:spPr>
+          <a:xfrm>
+            <a:off x="2633472" y="1325880"/>
             <a:ext cx="1828800" cy="502920"/>
           </a:xfrm>
           <a:prstGeom prst="rect">
@@ -34549,7 +32871,7 @@
                 <a:ea typeface="Cambria" pitchFamily="34" charset="-122"/>
                 <a:cs typeface="Cambria" pitchFamily="34" charset="-120"/>
               </a:rPr>
-              <a:t>47,59%</a:t>
+              <a:t>51,51%</a:t>
             </a:r>
             <a:endParaRPr lang="en-US" sz="2400" dirty="0"/>
           </a:p>
@@ -34557,13 +32879,13 @@
       </p:sp>
       <p:sp>
         <p:nvSpPr>
-          <p:cNvPr id="6" name="Text 4"/>
-          <p:cNvSpPr/>
-          <p:nvPr/>
-        </p:nvSpPr>
-        <p:spPr>
-          <a:xfrm>
-            <a:off x="566928" y="1856232"/>
+          <p:cNvPr id="7" name="Text 5"/>
+          <p:cNvSpPr/>
+          <p:nvPr/>
+        </p:nvSpPr>
+        <p:spPr>
+          <a:xfrm>
+            <a:off x="2633472" y="1856232"/>
             <a:ext cx="1828800" cy="475488"/>
           </a:xfrm>
           <a:prstGeom prst="rect">
@@ -34593,7 +32915,7 @@
                 <a:ea typeface="Cambria" pitchFamily="34" charset="-122"/>
                 <a:cs typeface="Cambria" pitchFamily="34" charset="-120"/>
               </a:rPr>
-              <a:t>3B · chưa tinh chỉnh</a:t>
+              <a:t>7B · prompting</a:t>
             </a:r>
             <a:endParaRPr lang="en-US" sz="1250" dirty="0"/>
           </a:p>
@@ -34601,13 +32923,13 @@
       </p:sp>
       <p:sp>
         <p:nvSpPr>
-          <p:cNvPr id="7" name="Text 5"/>
-          <p:cNvSpPr/>
-          <p:nvPr/>
-        </p:nvSpPr>
-        <p:spPr>
-          <a:xfrm>
-            <a:off x="2633472" y="1325880"/>
+          <p:cNvPr id="8" name="Text 6"/>
+          <p:cNvSpPr/>
+          <p:nvPr/>
+        </p:nvSpPr>
+        <p:spPr>
+          <a:xfrm>
+            <a:off x="4700016" y="1325880"/>
             <a:ext cx="1828800" cy="502920"/>
           </a:xfrm>
           <a:prstGeom prst="rect">
@@ -34629,13 +32951,13 @@
             <a:r>
               <a:rPr lang="en-US" sz="2400" b="1" dirty="0">
                 <a:solidFill>
-                  <a:srgbClr val="7A7099"/>
-                </a:solidFill>
-                <a:latin typeface="Cambria" pitchFamily="34" charset="0"/>
-                <a:ea typeface="Cambria" pitchFamily="34" charset="-122"/>
-                <a:cs typeface="Cambria" pitchFamily="34" charset="-120"/>
-              </a:rPr>
-              <a:t>51,51%</a:t>
+                  <a:srgbClr val="25194B"/>
+                </a:solidFill>
+                <a:latin typeface="Cambria" pitchFamily="34" charset="0"/>
+                <a:ea typeface="Cambria" pitchFamily="34" charset="-122"/>
+                <a:cs typeface="Cambria" pitchFamily="34" charset="-120"/>
+              </a:rPr>
+              <a:t>59,11%</a:t>
             </a:r>
             <a:endParaRPr lang="en-US" sz="2400" dirty="0"/>
           </a:p>
@@ -34643,13 +32965,13 @@
       </p:sp>
       <p:sp>
         <p:nvSpPr>
-          <p:cNvPr id="8" name="Text 6"/>
-          <p:cNvSpPr/>
-          <p:nvPr/>
-        </p:nvSpPr>
-        <p:spPr>
-          <a:xfrm>
-            <a:off x="2633472" y="1856232"/>
+          <p:cNvPr id="9" name="Text 7"/>
+          <p:cNvSpPr/>
+          <p:nvPr/>
+        </p:nvSpPr>
+        <p:spPr>
+          <a:xfrm>
+            <a:off x="4700016" y="1856232"/>
             <a:ext cx="1828800" cy="475488"/>
           </a:xfrm>
           <a:prstGeom prst="rect">
@@ -34679,7 +33001,7 @@
                 <a:ea typeface="Cambria" pitchFamily="34" charset="-122"/>
                 <a:cs typeface="Cambria" pitchFamily="34" charset="-120"/>
               </a:rPr>
-              <a:t>7B · prompting</a:t>
+              <a:t>3B · S1</a:t>
             </a:r>
             <a:endParaRPr lang="en-US" sz="1250" dirty="0"/>
           </a:p>
@@ -34687,13 +33009,13 @@
       </p:sp>
       <p:sp>
         <p:nvSpPr>
-          <p:cNvPr id="9" name="Text 7"/>
-          <p:cNvSpPr/>
-          <p:nvPr/>
-        </p:nvSpPr>
-        <p:spPr>
-          <a:xfrm>
-            <a:off x="4700016" y="1325880"/>
+          <p:cNvPr id="10" name="Text 8"/>
+          <p:cNvSpPr/>
+          <p:nvPr/>
+        </p:nvSpPr>
+        <p:spPr>
+          <a:xfrm>
+            <a:off x="6766560" y="1325880"/>
             <a:ext cx="1828800" cy="502920"/>
           </a:xfrm>
           <a:prstGeom prst="rect">
@@ -34715,13 +33037,13 @@
             <a:r>
               <a:rPr lang="en-US" sz="2400" b="1" dirty="0">
                 <a:solidFill>
-                  <a:srgbClr val="25194B"/>
-                </a:solidFill>
-                <a:latin typeface="Cambria" pitchFamily="34" charset="0"/>
-                <a:ea typeface="Cambria" pitchFamily="34" charset="-122"/>
-                <a:cs typeface="Cambria" pitchFamily="34" charset="-120"/>
-              </a:rPr>
-              <a:t>59,11%</a:t>
+                  <a:srgbClr val="4F417A"/>
+                </a:solidFill>
+                <a:latin typeface="Cambria" pitchFamily="34" charset="0"/>
+                <a:ea typeface="Cambria" pitchFamily="34" charset="-122"/>
+                <a:cs typeface="Cambria" pitchFamily="34" charset="-120"/>
+              </a:rPr>
+              <a:t>60,65%</a:t>
             </a:r>
             <a:endParaRPr lang="en-US" sz="2400" dirty="0"/>
           </a:p>
@@ -34729,13 +33051,13 @@
       </p:sp>
       <p:sp>
         <p:nvSpPr>
-          <p:cNvPr id="10" name="Text 8"/>
-          <p:cNvSpPr/>
-          <p:nvPr/>
-        </p:nvSpPr>
-        <p:spPr>
-          <a:xfrm>
-            <a:off x="4700016" y="1856232"/>
+          <p:cNvPr id="11" name="Text 9"/>
+          <p:cNvSpPr/>
+          <p:nvPr/>
+        </p:nvSpPr>
+        <p:spPr>
+          <a:xfrm>
+            <a:off x="6766560" y="1856232"/>
             <a:ext cx="1828800" cy="475488"/>
           </a:xfrm>
           <a:prstGeom prst="rect">
@@ -34765,7 +33087,7 @@
                 <a:ea typeface="Cambria" pitchFamily="34" charset="-122"/>
                 <a:cs typeface="Cambria" pitchFamily="34" charset="-120"/>
               </a:rPr>
-              <a:t>3B · S1</a:t>
+              <a:t>3B · GRPO-SPICE</a:t>
             </a:r>
             <a:endParaRPr lang="en-US" sz="1250" dirty="0"/>
           </a:p>
@@ -34773,93 +33095,7 @@
       </p:sp>
       <p:sp>
         <p:nvSpPr>
-          <p:cNvPr id="11" name="Text 9"/>
-          <p:cNvSpPr/>
-          <p:nvPr/>
-        </p:nvSpPr>
-        <p:spPr>
-          <a:xfrm>
-            <a:off x="6766560" y="1325880"/>
-            <a:ext cx="1828800" cy="502920"/>
-          </a:xfrm>
-          <a:prstGeom prst="rect">
-            <a:avLst/>
-          </a:prstGeom>
-          <a:noFill/>
-          <a:ln/>
-        </p:spPr>
-        <p:txBody>
-          <a:bodyPr wrap="square" lIns="0" tIns="0" rIns="0" bIns="0" rtlCol="0" anchor="ctr"/>
-          <a:lstStyle/>
-          <a:p>
-            <a:pPr algn="ctr" indent="0" marL="0">
-              <a:lnSpc>
-                <a:spcPct val="125000"/>
-              </a:lnSpc>
-              <a:buNone/>
-            </a:pPr>
-            <a:r>
-              <a:rPr lang="en-US" sz="2400" b="1" dirty="0">
-                <a:solidFill>
-                  <a:srgbClr val="4F417A"/>
-                </a:solidFill>
-                <a:latin typeface="Cambria" pitchFamily="34" charset="0"/>
-                <a:ea typeface="Cambria" pitchFamily="34" charset="-122"/>
-                <a:cs typeface="Cambria" pitchFamily="34" charset="-120"/>
-              </a:rPr>
-              <a:t>60,65%</a:t>
-            </a:r>
-            <a:endParaRPr lang="en-US" sz="2400" dirty="0"/>
-          </a:p>
-        </p:txBody>
-      </p:sp>
-      <p:sp>
-        <p:nvSpPr>
-          <p:cNvPr id="12" name="Text 10"/>
-          <p:cNvSpPr/>
-          <p:nvPr/>
-        </p:nvSpPr>
-        <p:spPr>
-          <a:xfrm>
-            <a:off x="6766560" y="1856232"/>
-            <a:ext cx="1828800" cy="475488"/>
-          </a:xfrm>
-          <a:prstGeom prst="rect">
-            <a:avLst/>
-          </a:prstGeom>
-          <a:noFill/>
-          <a:ln/>
-        </p:spPr>
-        <p:txBody>
-          <a:bodyPr wrap="square" lIns="0" tIns="0" rIns="0" bIns="0" rtlCol="0" anchor="ctr">
-            <a:normAutofit/>
-          </a:bodyPr>
-          <a:lstStyle/>
-          <a:p>
-            <a:pPr algn="ctr" indent="0" marL="0">
-              <a:lnSpc>
-                <a:spcPct val="125000"/>
-              </a:lnSpc>
-              <a:buNone/>
-            </a:pPr>
-            <a:r>
-              <a:rPr lang="en-US" sz="1250" b="1" dirty="0">
-                <a:solidFill>
-                  <a:srgbClr val="1A1A1A"/>
-                </a:solidFill>
-                <a:latin typeface="Cambria" pitchFamily="34" charset="0"/>
-                <a:ea typeface="Cambria" pitchFamily="34" charset="-122"/>
-                <a:cs typeface="Cambria" pitchFamily="34" charset="-120"/>
-              </a:rPr>
-              <a:t>3B · GRPO-SPICE</a:t>
-            </a:r>
-            <a:endParaRPr lang="en-US" sz="1250" dirty="0"/>
-          </a:p>
-        </p:txBody>
-      </p:sp>
-      <p:sp>
-        <p:nvSpPr>
-          <p:cNvPr id="13" name="Shape 11"/>
+          <p:cNvPr id="12" name="Shape 10"/>
           <p:cNvSpPr/>
           <p:nvPr/>
         </p:nvSpPr>
@@ -34883,7 +33119,7 @@
       </p:sp>
       <p:sp>
         <p:nvSpPr>
-          <p:cNvPr id="14" name="Shape 12"/>
+          <p:cNvPr id="13" name="Shape 11"/>
           <p:cNvSpPr/>
           <p:nvPr/>
         </p:nvSpPr>
@@ -34908,7 +33144,7 @@
       </p:sp>
       <p:sp>
         <p:nvSpPr>
-          <p:cNvPr id="15" name="Text 13"/>
+          <p:cNvPr id="14" name="Text 12"/>
           <p:cNvSpPr/>
           <p:nvPr/>
         </p:nvSpPr>
@@ -34950,7 +33186,7 @@
       </p:sp>
       <p:sp>
         <p:nvSpPr>
-          <p:cNvPr id="16" name="Text 14"/>
+          <p:cNvPr id="15" name="Text 13"/>
           <p:cNvSpPr/>
           <p:nvPr/>
         </p:nvSpPr>
@@ -34992,7 +33228,7 @@
       </p:sp>
       <p:sp>
         <p:nvSpPr>
-          <p:cNvPr id="17" name="Shape 15"/>
+          <p:cNvPr id="16" name="Shape 14"/>
           <p:cNvSpPr/>
           <p:nvPr/>
         </p:nvSpPr>
@@ -35017,7 +33253,7 @@
       </p:sp>
       <p:sp>
         <p:nvSpPr>
-          <p:cNvPr id="18" name="Text 16"/>
+          <p:cNvPr id="17" name="Text 15"/>
           <p:cNvSpPr/>
           <p:nvPr/>
         </p:nvSpPr>
@@ -35061,7 +33297,7 @@
       </p:sp>
       <p:sp>
         <p:nvSpPr>
-          <p:cNvPr id="19" name="Text 17"/>
+          <p:cNvPr id="18" name="Text 16"/>
           <p:cNvSpPr/>
           <p:nvPr/>
         </p:nvSpPr>
@@ -35103,7 +33339,7 @@
       </p:sp>
       <p:sp>
         <p:nvSpPr>
-          <p:cNvPr id="20" name="Text 18"/>
+          <p:cNvPr id="19" name="Text 17"/>
           <p:cNvSpPr/>
           <p:nvPr/>
         </p:nvSpPr>
@@ -35147,49 +33383,7 @@
       </p:sp>
       <p:sp>
         <p:nvSpPr>
-          <p:cNvPr id="21" name="Text 19"/>
-          <p:cNvSpPr/>
-          <p:nvPr/>
-        </p:nvSpPr>
-        <p:spPr>
-          <a:xfrm>
-            <a:off x="502920" y="6327648"/>
-            <a:ext cx="8138160" cy="137160"/>
-          </a:xfrm>
-          <a:prstGeom prst="rect">
-            <a:avLst/>
-          </a:prstGeom>
-          <a:noFill/>
-          <a:ln/>
-        </p:spPr>
-        <p:txBody>
-          <a:bodyPr wrap="square" lIns="0" tIns="0" rIns="0" bIns="0" rtlCol="0" anchor="ctr"/>
-          <a:lstStyle/>
-          <a:p>
-            <a:pPr algn="r" indent="0" marL="0">
-              <a:lnSpc>
-                <a:spcPct val="125000"/>
-              </a:lnSpc>
-              <a:buNone/>
-            </a:pPr>
-            <a:r>
-              <a:rPr lang="en-US" sz="800" i="1" dirty="0">
-                <a:solidFill>
-                  <a:srgbClr val="5A5A66"/>
-                </a:solidFill>
-                <a:latin typeface="Cambria" pitchFamily="34" charset="0"/>
-                <a:ea typeface="Cambria" pitchFamily="34" charset="-122"/>
-                <a:cs typeface="Cambria" pitchFamily="34" charset="-120"/>
-              </a:rPr>
-              <a:t>Luận văn §6.2</a:t>
-            </a:r>
-            <a:endParaRPr lang="en-US" sz="800" dirty="0"/>
-          </a:p>
-        </p:txBody>
-      </p:sp>
-      <p:sp>
-        <p:nvSpPr>
-          <p:cNvPr id="22" name="Shape 20"/>
+          <p:cNvPr id="20" name="Shape 18"/>
           <p:cNvSpPr/>
           <p:nvPr/>
         </p:nvSpPr>
@@ -35216,7 +33410,7 @@
       </p:sp>
       <p:sp>
         <p:nvSpPr>
-          <p:cNvPr id="23" name="Shape 21"/>
+          <p:cNvPr id="21" name="Shape 19"/>
           <p:cNvSpPr/>
           <p:nvPr/>
         </p:nvSpPr>
@@ -35243,7 +33437,7 @@
       </p:sp>
       <p:sp>
         <p:nvSpPr>
-          <p:cNvPr id="24" name="Shape 22"/>
+          <p:cNvPr id="22" name="Shape 20"/>
           <p:cNvSpPr/>
           <p:nvPr/>
         </p:nvSpPr>
@@ -35270,7 +33464,7 @@
       </p:sp>
       <p:sp>
         <p:nvSpPr>
-          <p:cNvPr id="25" name="Shape 23"/>
+          <p:cNvPr id="23" name="Shape 21"/>
           <p:cNvSpPr/>
           <p:nvPr/>
         </p:nvSpPr>
@@ -35297,7 +33491,7 @@
       </p:sp>
       <p:sp>
         <p:nvSpPr>
-          <p:cNvPr id="26" name="Text 24"/>
+          <p:cNvPr id="24" name="Text 22"/>
           <p:cNvSpPr/>
           <p:nvPr/>
         </p:nvSpPr>
@@ -35339,7 +33533,7 @@
       </p:sp>
       <p:sp>
         <p:nvSpPr>
-          <p:cNvPr id="27" name="Text 25"/>
+          <p:cNvPr id="25" name="Text 23"/>
           <p:cNvSpPr/>
           <p:nvPr/>
         </p:nvSpPr>
@@ -35381,7 +33575,7 @@
       </p:sp>
       <p:sp>
         <p:nvSpPr>
-          <p:cNvPr id="28" name="Text 26"/>
+          <p:cNvPr id="26" name="Text 24"/>
           <p:cNvSpPr/>
           <p:nvPr/>
         </p:nvSpPr>
@@ -35423,7 +33617,7 @@
       </p:sp>
       <p:sp>
         <p:nvSpPr>
-          <p:cNvPr id="29" name="Text 27"/>
+          <p:cNvPr id="27" name="Text 25"/>
           <p:cNvSpPr/>
           <p:nvPr/>
         </p:nvSpPr>
@@ -35568,51 +33762,7 @@
       </p:sp>
       <p:sp>
         <p:nvSpPr>
-          <p:cNvPr id="4" name="Text 2"/>
-          <p:cNvSpPr/>
-          <p:nvPr/>
-        </p:nvSpPr>
-        <p:spPr>
-          <a:xfrm>
-            <a:off x="502920" y="603504"/>
-            <a:ext cx="8138160" cy="219456"/>
-          </a:xfrm>
-          <a:prstGeom prst="rect">
-            <a:avLst/>
-          </a:prstGeom>
-          <a:noFill/>
-          <a:ln/>
-        </p:spPr>
-        <p:txBody>
-          <a:bodyPr wrap="square" lIns="0" tIns="0" rIns="0" bIns="0" rtlCol="0" anchor="ctr">
-            <a:normAutofit/>
-          </a:bodyPr>
-          <a:lstStyle/>
-          <a:p>
-            <a:pPr indent="0" marL="0">
-              <a:lnSpc>
-                <a:spcPct val="125000"/>
-              </a:lnSpc>
-              <a:buNone/>
-            </a:pPr>
-            <a:r>
-              <a:rPr lang="en-US" sz="1260" b="1" dirty="0">
-                <a:solidFill>
-                  <a:srgbClr val="25194B"/>
-                </a:solidFill>
-                <a:latin typeface="Cambria" pitchFamily="34" charset="0"/>
-                <a:ea typeface="Cambria" pitchFamily="34" charset="-122"/>
-                <a:cs typeface="Cambria" pitchFamily="34" charset="-120"/>
-              </a:rPr>
-              <a:t>Executability</a:t>
-            </a:r>
-            <a:endParaRPr lang="en-US" sz="1260" dirty="0"/>
-          </a:p>
-        </p:txBody>
-      </p:sp>
-      <p:sp>
-        <p:nvSpPr>
-          <p:cNvPr id="5" name="Shape 3"/>
+          <p:cNvPr id="4" name="Shape 2"/>
           <p:cNvSpPr/>
           <p:nvPr/>
         </p:nvSpPr>
@@ -35637,7 +33787,7 @@
       </p:sp>
       <p:sp>
         <p:nvSpPr>
-          <p:cNvPr id="6" name="Text 4"/>
+          <p:cNvPr id="5" name="Text 3"/>
           <p:cNvSpPr/>
           <p:nvPr/>
         </p:nvSpPr>
@@ -35681,7 +33831,7 @@
       </p:sp>
       <p:sp>
         <p:nvSpPr>
-          <p:cNvPr id="7" name="Shape 5"/>
+          <p:cNvPr id="6" name="Shape 4"/>
           <p:cNvSpPr/>
           <p:nvPr/>
         </p:nvSpPr>
@@ -35705,7 +33855,7 @@
       </p:sp>
       <p:sp>
         <p:nvSpPr>
-          <p:cNvPr id="8" name="Shape 6"/>
+          <p:cNvPr id="7" name="Shape 5"/>
           <p:cNvSpPr/>
           <p:nvPr/>
         </p:nvSpPr>
@@ -35730,7 +33880,7 @@
       </p:sp>
       <p:sp>
         <p:nvSpPr>
-          <p:cNvPr id="9" name="Text 7"/>
+          <p:cNvPr id="8" name="Text 6"/>
           <p:cNvSpPr/>
           <p:nvPr/>
         </p:nvSpPr>
@@ -35794,7 +33944,7 @@
       </p:sp>
       <p:sp>
         <p:nvSpPr>
-          <p:cNvPr id="10" name="Shape 8"/>
+          <p:cNvPr id="9" name="Shape 7"/>
           <p:cNvSpPr/>
           <p:nvPr/>
         </p:nvSpPr>
@@ -35818,7 +33968,7 @@
       </p:sp>
       <p:sp>
         <p:nvSpPr>
-          <p:cNvPr id="11" name="Shape 9"/>
+          <p:cNvPr id="10" name="Shape 8"/>
           <p:cNvSpPr/>
           <p:nvPr/>
         </p:nvSpPr>
@@ -35843,7 +33993,7 @@
       </p:sp>
       <p:sp>
         <p:nvSpPr>
-          <p:cNvPr id="12" name="Text 10"/>
+          <p:cNvPr id="11" name="Text 9"/>
           <p:cNvSpPr/>
           <p:nvPr/>
         </p:nvSpPr>
@@ -35887,7 +34037,7 @@
       </p:sp>
       <p:sp>
         <p:nvSpPr>
-          <p:cNvPr id="13" name="Shape 11"/>
+          <p:cNvPr id="12" name="Shape 10"/>
           <p:cNvSpPr/>
           <p:nvPr/>
         </p:nvSpPr>
@@ -35911,7 +34061,7 @@
       </p:sp>
       <p:sp>
         <p:nvSpPr>
-          <p:cNvPr id="14" name="Shape 12"/>
+          <p:cNvPr id="13" name="Shape 11"/>
           <p:cNvSpPr/>
           <p:nvPr/>
         </p:nvSpPr>
@@ -35936,7 +34086,7 @@
       </p:sp>
       <p:sp>
         <p:nvSpPr>
-          <p:cNvPr id="15" name="Text 13"/>
+          <p:cNvPr id="14" name="Text 12"/>
           <p:cNvSpPr/>
           <p:nvPr/>
         </p:nvSpPr>
@@ -36000,7 +34150,7 @@
       </p:sp>
       <p:sp>
         <p:nvSpPr>
-          <p:cNvPr id="16" name="Text 14"/>
+          <p:cNvPr id="15" name="Text 13"/>
           <p:cNvSpPr/>
           <p:nvPr/>
         </p:nvSpPr>
@@ -36044,7 +34194,7 @@
       </p:sp>
       <p:sp>
         <p:nvSpPr>
-          <p:cNvPr id="17" name="Shape 15"/>
+          <p:cNvPr id="16" name="Shape 14"/>
           <p:cNvSpPr/>
           <p:nvPr/>
         </p:nvSpPr>
@@ -36071,7 +34221,7 @@
       </p:sp>
       <p:sp>
         <p:nvSpPr>
-          <p:cNvPr id="18" name="Text 16"/>
+          <p:cNvPr id="17" name="Text 15"/>
           <p:cNvSpPr/>
           <p:nvPr/>
         </p:nvSpPr>
@@ -36115,7 +34265,7 @@
       </p:sp>
       <p:sp>
         <p:nvSpPr>
-          <p:cNvPr id="19" name="Shape 17"/>
+          <p:cNvPr id="18" name="Shape 16"/>
           <p:cNvSpPr/>
           <p:nvPr/>
         </p:nvSpPr>
@@ -36142,7 +34292,7 @@
       </p:sp>
       <p:sp>
         <p:nvSpPr>
-          <p:cNvPr id="20" name="Text 18"/>
+          <p:cNvPr id="19" name="Text 17"/>
           <p:cNvSpPr/>
           <p:nvPr/>
         </p:nvSpPr>
@@ -36186,7 +34336,7 @@
       </p:sp>
       <p:sp>
         <p:nvSpPr>
-          <p:cNvPr id="21" name="Shape 19"/>
+          <p:cNvPr id="20" name="Shape 18"/>
           <p:cNvSpPr/>
           <p:nvPr/>
         </p:nvSpPr>
@@ -36213,7 +34363,7 @@
       </p:sp>
       <p:sp>
         <p:nvSpPr>
-          <p:cNvPr id="22" name="Text 20"/>
+          <p:cNvPr id="21" name="Text 19"/>
           <p:cNvSpPr/>
           <p:nvPr/>
         </p:nvSpPr>
@@ -36257,7 +34407,7 @@
       </p:sp>
       <p:sp>
         <p:nvSpPr>
-          <p:cNvPr id="23" name="Text 21"/>
+          <p:cNvPr id="22" name="Text 20"/>
           <p:cNvSpPr/>
           <p:nvPr/>
         </p:nvSpPr>
@@ -36299,49 +34449,7 @@
       </p:sp>
       <p:sp>
         <p:nvSpPr>
-          <p:cNvPr id="24" name="Text 22"/>
-          <p:cNvSpPr/>
-          <p:nvPr/>
-        </p:nvSpPr>
-        <p:spPr>
-          <a:xfrm>
-            <a:off x="502920" y="6327648"/>
-            <a:ext cx="8138160" cy="137160"/>
-          </a:xfrm>
-          <a:prstGeom prst="rect">
-            <a:avLst/>
-          </a:prstGeom>
-          <a:noFill/>
-          <a:ln/>
-        </p:spPr>
-        <p:txBody>
-          <a:bodyPr wrap="square" lIns="0" tIns="0" rIns="0" bIns="0" rtlCol="0" anchor="ctr"/>
-          <a:lstStyle/>
-          <a:p>
-            <a:pPr algn="r" indent="0" marL="0">
-              <a:lnSpc>
-                <a:spcPct val="125000"/>
-              </a:lnSpc>
-              <a:buNone/>
-            </a:pPr>
-            <a:r>
-              <a:rPr lang="en-US" sz="800" i="1" dirty="0">
-                <a:solidFill>
-                  <a:srgbClr val="5A5A66"/>
-                </a:solidFill>
-                <a:latin typeface="Cambria" pitchFamily="34" charset="0"/>
-                <a:ea typeface="Cambria" pitchFamily="34" charset="-122"/>
-                <a:cs typeface="Cambria" pitchFamily="34" charset="-120"/>
-              </a:rPr>
-              <a:t>Luận văn Chương 5</a:t>
-            </a:r>
-            <a:endParaRPr lang="en-US" sz="800" dirty="0"/>
-          </a:p>
-        </p:txBody>
-      </p:sp>
-      <p:sp>
-        <p:nvSpPr>
-          <p:cNvPr id="25" name="Shape 23"/>
+          <p:cNvPr id="23" name="Shape 21"/>
           <p:cNvSpPr/>
           <p:nvPr/>
         </p:nvSpPr>
@@ -36368,7 +34476,7 @@
       </p:sp>
       <p:sp>
         <p:nvSpPr>
-          <p:cNvPr id="26" name="Shape 24"/>
+          <p:cNvPr id="24" name="Shape 22"/>
           <p:cNvSpPr/>
           <p:nvPr/>
         </p:nvSpPr>
@@ -36395,7 +34503,7 @@
       </p:sp>
       <p:sp>
         <p:nvSpPr>
-          <p:cNvPr id="27" name="Shape 25"/>
+          <p:cNvPr id="25" name="Shape 23"/>
           <p:cNvSpPr/>
           <p:nvPr/>
         </p:nvSpPr>
@@ -36422,7 +34530,7 @@
       </p:sp>
       <p:sp>
         <p:nvSpPr>
-          <p:cNvPr id="28" name="Shape 26"/>
+          <p:cNvPr id="26" name="Shape 24"/>
           <p:cNvSpPr/>
           <p:nvPr/>
         </p:nvSpPr>
@@ -36449,7 +34557,7 @@
       </p:sp>
       <p:sp>
         <p:nvSpPr>
-          <p:cNvPr id="29" name="Text 27"/>
+          <p:cNvPr id="27" name="Text 25"/>
           <p:cNvSpPr/>
           <p:nvPr/>
         </p:nvSpPr>
@@ -36491,7 +34599,7 @@
       </p:sp>
       <p:sp>
         <p:nvSpPr>
-          <p:cNvPr id="30" name="Text 28"/>
+          <p:cNvPr id="28" name="Text 26"/>
           <p:cNvSpPr/>
           <p:nvPr/>
         </p:nvSpPr>
@@ -36533,7 +34641,7 @@
       </p:sp>
       <p:sp>
         <p:nvSpPr>
-          <p:cNvPr id="31" name="Text 29"/>
+          <p:cNvPr id="29" name="Text 27"/>
           <p:cNvSpPr/>
           <p:nvPr/>
         </p:nvSpPr>
@@ -36575,7 +34683,7 @@
       </p:sp>
       <p:sp>
         <p:nvSpPr>
-          <p:cNvPr id="32" name="Text 30"/>
+          <p:cNvPr id="30" name="Text 28"/>
           <p:cNvSpPr/>
           <p:nvPr/>
         </p:nvSpPr>
@@ -36726,8 +34834,50 @@
         </p:nvSpPr>
         <p:spPr>
           <a:xfrm>
-            <a:off x="502920" y="603504"/>
-            <a:ext cx="8138160" cy="219456"/>
+            <a:off x="640080" y="1097280"/>
+            <a:ext cx="2148840" cy="502920"/>
+          </a:xfrm>
+          <a:prstGeom prst="rect">
+            <a:avLst/>
+          </a:prstGeom>
+          <a:noFill/>
+          <a:ln/>
+        </p:spPr>
+        <p:txBody>
+          <a:bodyPr wrap="square" lIns="0" tIns="0" rIns="0" bIns="0" rtlCol="0" anchor="ctr"/>
+          <a:lstStyle/>
+          <a:p>
+            <a:pPr algn="ctr" indent="0" marL="0">
+              <a:lnSpc>
+                <a:spcPct val="125000"/>
+              </a:lnSpc>
+              <a:buNone/>
+            </a:pPr>
+            <a:r>
+              <a:rPr lang="en-US" sz="2400" b="1" dirty="0">
+                <a:solidFill>
+                  <a:srgbClr val="25194B"/>
+                </a:solidFill>
+                <a:latin typeface="Cambria" pitchFamily="34" charset="0"/>
+                <a:ea typeface="Cambria" pitchFamily="34" charset="-122"/>
+                <a:cs typeface="Cambria" pitchFamily="34" charset="-120"/>
+              </a:rPr>
+              <a:t>75,7%</a:t>
+            </a:r>
+            <a:endParaRPr lang="en-US" sz="2400" dirty="0"/>
+          </a:p>
+        </p:txBody>
+      </p:sp>
+      <p:sp>
+        <p:nvSpPr>
+          <p:cNvPr id="5" name="Text 3"/>
+          <p:cNvSpPr/>
+          <p:nvPr/>
+        </p:nvSpPr>
+        <p:spPr>
+          <a:xfrm>
+            <a:off x="640080" y="1627632"/>
+            <a:ext cx="2148840" cy="475488"/>
           </a:xfrm>
           <a:prstGeom prst="rect">
             <a:avLst/>
@@ -36741,36 +34891,36 @@
           </a:bodyPr>
           <a:lstStyle/>
           <a:p>
-            <a:pPr indent="0" marL="0">
-              <a:lnSpc>
-                <a:spcPct val="125000"/>
-              </a:lnSpc>
-              <a:buNone/>
-            </a:pPr>
-            <a:r>
-              <a:rPr lang="en-US" sz="1260" b="1" dirty="0">
-                <a:solidFill>
-                  <a:srgbClr val="25194B"/>
-                </a:solidFill>
-                <a:latin typeface="Cambria" pitchFamily="34" charset="0"/>
-                <a:ea typeface="Cambria" pitchFamily="34" charset="-122"/>
-                <a:cs typeface="Cambria" pitchFamily="34" charset="-120"/>
-              </a:rPr>
-              <a:t>Kiểm tra độ tin cậy của executability</a:t>
-            </a:r>
-            <a:endParaRPr lang="en-US" sz="1260" dirty="0"/>
-          </a:p>
-        </p:txBody>
-      </p:sp>
-      <p:sp>
-        <p:nvSpPr>
-          <p:cNvPr id="5" name="Text 3"/>
-          <p:cNvSpPr/>
-          <p:nvPr/>
-        </p:nvSpPr>
-        <p:spPr>
-          <a:xfrm>
-            <a:off x="640080" y="1097280"/>
+            <a:pPr algn="ctr" indent="0" marL="0">
+              <a:lnSpc>
+                <a:spcPct val="125000"/>
+              </a:lnSpc>
+              <a:buNone/>
+            </a:pPr>
+            <a:r>
+              <a:rPr lang="en-US" sz="1250" b="1" dirty="0">
+                <a:solidFill>
+                  <a:srgbClr val="1A1A1A"/>
+                </a:solidFill>
+                <a:latin typeface="Cambria" pitchFamily="34" charset="0"/>
+                <a:ea typeface="Cambria" pitchFamily="34" charset="-122"/>
+                <a:cs typeface="Cambria" pitchFamily="34" charset="-120"/>
+              </a:rPr>
+              <a:t>câu chuẩn</a:t>
+            </a:r>
+            <a:endParaRPr lang="en-US" sz="1250" dirty="0"/>
+          </a:p>
+        </p:txBody>
+      </p:sp>
+      <p:sp>
+        <p:nvSpPr>
+          <p:cNvPr id="6" name="Text 4"/>
+          <p:cNvSpPr/>
+          <p:nvPr/>
+        </p:nvSpPr>
+        <p:spPr>
+          <a:xfrm>
+            <a:off x="3493008" y="1097280"/>
             <a:ext cx="2148840" cy="502920"/>
           </a:xfrm>
           <a:prstGeom prst="rect">
@@ -36792,13 +34942,13 @@
             <a:r>
               <a:rPr lang="en-US" sz="2400" b="1" dirty="0">
                 <a:solidFill>
-                  <a:srgbClr val="25194B"/>
-                </a:solidFill>
-                <a:latin typeface="Cambria" pitchFamily="34" charset="0"/>
-                <a:ea typeface="Cambria" pitchFamily="34" charset="-122"/>
-                <a:cs typeface="Cambria" pitchFamily="34" charset="-120"/>
-              </a:rPr>
-              <a:t>75,7%</a:t>
+                  <a:srgbClr val="4F417A"/>
+                </a:solidFill>
+                <a:latin typeface="Cambria" pitchFamily="34" charset="0"/>
+                <a:ea typeface="Cambria" pitchFamily="34" charset="-122"/>
+                <a:cs typeface="Cambria" pitchFamily="34" charset="-120"/>
+              </a:rPr>
+              <a:t>12,0%</a:t>
             </a:r>
             <a:endParaRPr lang="en-US" sz="2400" dirty="0"/>
           </a:p>
@@ -36806,13 +34956,13 @@
       </p:sp>
       <p:sp>
         <p:nvSpPr>
-          <p:cNvPr id="6" name="Text 4"/>
-          <p:cNvSpPr/>
-          <p:nvPr/>
-        </p:nvSpPr>
-        <p:spPr>
-          <a:xfrm>
-            <a:off x="640080" y="1627632"/>
+          <p:cNvPr id="7" name="Text 5"/>
+          <p:cNvSpPr/>
+          <p:nvPr/>
+        </p:nvSpPr>
+        <p:spPr>
+          <a:xfrm>
+            <a:off x="3493008" y="1627632"/>
             <a:ext cx="2148840" cy="475488"/>
           </a:xfrm>
           <a:prstGeom prst="rect">
@@ -36842,7 +34992,7 @@
                 <a:ea typeface="Cambria" pitchFamily="34" charset="-122"/>
                 <a:cs typeface="Cambria" pitchFamily="34" charset="-120"/>
               </a:rPr>
-              <a:t>câu chuẩn</a:t>
+              <a:t>“Tap the button.”</a:t>
             </a:r>
             <a:endParaRPr lang="en-US" sz="1250" dirty="0"/>
           </a:p>
@@ -36850,13 +35000,13 @@
       </p:sp>
       <p:sp>
         <p:nvSpPr>
-          <p:cNvPr id="7" name="Text 5"/>
-          <p:cNvSpPr/>
-          <p:nvPr/>
-        </p:nvSpPr>
-        <p:spPr>
-          <a:xfrm>
-            <a:off x="3493008" y="1097280"/>
+          <p:cNvPr id="8" name="Text 6"/>
+          <p:cNvSpPr/>
+          <p:nvPr/>
+        </p:nvSpPr>
+        <p:spPr>
+          <a:xfrm>
+            <a:off x="6345936" y="1097280"/>
             <a:ext cx="2148840" cy="502920"/>
           </a:xfrm>
           <a:prstGeom prst="rect">
@@ -36878,13 +35028,13 @@
             <a:r>
               <a:rPr lang="en-US" sz="2400" b="1" dirty="0">
                 <a:solidFill>
-                  <a:srgbClr val="4F417A"/>
-                </a:solidFill>
-                <a:latin typeface="Cambria" pitchFamily="34" charset="0"/>
-                <a:ea typeface="Cambria" pitchFamily="34" charset="-122"/>
-                <a:cs typeface="Cambria" pitchFamily="34" charset="-120"/>
-              </a:rPr>
-              <a:t>12,0%</a:t>
+                  <a:srgbClr val="7A7099"/>
+                </a:solidFill>
+                <a:latin typeface="Cambria" pitchFamily="34" charset="0"/>
+                <a:ea typeface="Cambria" pitchFamily="34" charset="-122"/>
+                <a:cs typeface="Cambria" pitchFamily="34" charset="-120"/>
+              </a:rPr>
+              <a:t>6,1%</a:t>
             </a:r>
             <a:endParaRPr lang="en-US" sz="2400" dirty="0"/>
           </a:p>
@@ -36892,13 +35042,13 @@
       </p:sp>
       <p:sp>
         <p:nvSpPr>
-          <p:cNvPr id="8" name="Text 6"/>
-          <p:cNvSpPr/>
-          <p:nvPr/>
-        </p:nvSpPr>
-        <p:spPr>
-          <a:xfrm>
-            <a:off x="3493008" y="1627632"/>
+          <p:cNvPr id="9" name="Text 7"/>
+          <p:cNvSpPr/>
+          <p:nvPr/>
+        </p:nvSpPr>
+        <p:spPr>
+          <a:xfrm>
+            <a:off x="6345936" y="1627632"/>
             <a:ext cx="2148840" cy="475488"/>
           </a:xfrm>
           <a:prstGeom prst="rect">
@@ -36928,7 +35078,7 @@
                 <a:ea typeface="Cambria" pitchFamily="34" charset="-122"/>
                 <a:cs typeface="Cambria" pitchFamily="34" charset="-120"/>
               </a:rPr>
-              <a:t>“Tap the button.”</a:t>
+              <a:t>câu của màn hình khác</a:t>
             </a:r>
             <a:endParaRPr lang="en-US" sz="1250" dirty="0"/>
           </a:p>
@@ -36936,93 +35086,7 @@
       </p:sp>
       <p:sp>
         <p:nvSpPr>
-          <p:cNvPr id="9" name="Text 7"/>
-          <p:cNvSpPr/>
-          <p:nvPr/>
-        </p:nvSpPr>
-        <p:spPr>
-          <a:xfrm>
-            <a:off x="6345936" y="1097280"/>
-            <a:ext cx="2148840" cy="502920"/>
-          </a:xfrm>
-          <a:prstGeom prst="rect">
-            <a:avLst/>
-          </a:prstGeom>
-          <a:noFill/>
-          <a:ln/>
-        </p:spPr>
-        <p:txBody>
-          <a:bodyPr wrap="square" lIns="0" tIns="0" rIns="0" bIns="0" rtlCol="0" anchor="ctr"/>
-          <a:lstStyle/>
-          <a:p>
-            <a:pPr algn="ctr" indent="0" marL="0">
-              <a:lnSpc>
-                <a:spcPct val="125000"/>
-              </a:lnSpc>
-              <a:buNone/>
-            </a:pPr>
-            <a:r>
-              <a:rPr lang="en-US" sz="2400" b="1" dirty="0">
-                <a:solidFill>
-                  <a:srgbClr val="7A7099"/>
-                </a:solidFill>
-                <a:latin typeface="Cambria" pitchFamily="34" charset="0"/>
-                <a:ea typeface="Cambria" pitchFamily="34" charset="-122"/>
-                <a:cs typeface="Cambria" pitchFamily="34" charset="-120"/>
-              </a:rPr>
-              <a:t>6,1%</a:t>
-            </a:r>
-            <a:endParaRPr lang="en-US" sz="2400" dirty="0"/>
-          </a:p>
-        </p:txBody>
-      </p:sp>
-      <p:sp>
-        <p:nvSpPr>
           <p:cNvPr id="10" name="Text 8"/>
-          <p:cNvSpPr/>
-          <p:nvPr/>
-        </p:nvSpPr>
-        <p:spPr>
-          <a:xfrm>
-            <a:off x="6345936" y="1627632"/>
-            <a:ext cx="2148840" cy="475488"/>
-          </a:xfrm>
-          <a:prstGeom prst="rect">
-            <a:avLst/>
-          </a:prstGeom>
-          <a:noFill/>
-          <a:ln/>
-        </p:spPr>
-        <p:txBody>
-          <a:bodyPr wrap="square" lIns="0" tIns="0" rIns="0" bIns="0" rtlCol="0" anchor="ctr">
-            <a:normAutofit/>
-          </a:bodyPr>
-          <a:lstStyle/>
-          <a:p>
-            <a:pPr algn="ctr" indent="0" marL="0">
-              <a:lnSpc>
-                <a:spcPct val="125000"/>
-              </a:lnSpc>
-              <a:buNone/>
-            </a:pPr>
-            <a:r>
-              <a:rPr lang="en-US" sz="1250" b="1" dirty="0">
-                <a:solidFill>
-                  <a:srgbClr val="1A1A1A"/>
-                </a:solidFill>
-                <a:latin typeface="Cambria" pitchFamily="34" charset="0"/>
-                <a:ea typeface="Cambria" pitchFamily="34" charset="-122"/>
-                <a:cs typeface="Cambria" pitchFamily="34" charset="-120"/>
-              </a:rPr>
-              <a:t>câu của màn hình khác</a:t>
-            </a:r>
-            <a:endParaRPr lang="en-US" sz="1250" dirty="0"/>
-          </a:p>
-        </p:txBody>
-      </p:sp>
-      <p:sp>
-        <p:nvSpPr>
-          <p:cNvPr id="11" name="Text 9"/>
           <p:cNvSpPr/>
           <p:nvPr/>
         </p:nvSpPr>
@@ -37064,7 +35128,7 @@
       </p:sp>
       <p:sp>
         <p:nvSpPr>
-          <p:cNvPr id="12" name="Shape 10"/>
+          <p:cNvPr id="11" name="Shape 9"/>
           <p:cNvSpPr/>
           <p:nvPr/>
         </p:nvSpPr>
@@ -37088,7 +35152,7 @@
       </p:sp>
       <p:sp>
         <p:nvSpPr>
-          <p:cNvPr id="13" name="Shape 11"/>
+          <p:cNvPr id="12" name="Shape 10"/>
           <p:cNvSpPr/>
           <p:nvPr/>
         </p:nvSpPr>
@@ -37113,7 +35177,7 @@
       </p:sp>
       <p:sp>
         <p:nvSpPr>
-          <p:cNvPr id="14" name="Text 12"/>
+          <p:cNvPr id="13" name="Text 11"/>
           <p:cNvSpPr/>
           <p:nvPr/>
         </p:nvSpPr>
@@ -37155,7 +35219,7 @@
       </p:sp>
       <p:sp>
         <p:nvSpPr>
-          <p:cNvPr id="15" name="Text 13"/>
+          <p:cNvPr id="14" name="Text 12"/>
           <p:cNvSpPr/>
           <p:nvPr/>
         </p:nvSpPr>
@@ -37199,7 +35263,7 @@
       </p:sp>
       <p:sp>
         <p:nvSpPr>
-          <p:cNvPr id="16" name="Text 14"/>
+          <p:cNvPr id="15" name="Text 13"/>
           <p:cNvSpPr/>
           <p:nvPr/>
         </p:nvSpPr>
@@ -37241,49 +35305,7 @@
       </p:sp>
       <p:sp>
         <p:nvSpPr>
-          <p:cNvPr id="17" name="Text 15"/>
-          <p:cNvSpPr/>
-          <p:nvPr/>
-        </p:nvSpPr>
-        <p:spPr>
-          <a:xfrm>
-            <a:off x="502920" y="6327648"/>
-            <a:ext cx="8138160" cy="137160"/>
-          </a:xfrm>
-          <a:prstGeom prst="rect">
-            <a:avLst/>
-          </a:prstGeom>
-          <a:noFill/>
-          <a:ln/>
-        </p:spPr>
-        <p:txBody>
-          <a:bodyPr wrap="square" lIns="0" tIns="0" rIns="0" bIns="0" rtlCol="0" anchor="ctr"/>
-          <a:lstStyle/>
-          <a:p>
-            <a:pPr algn="r" indent="0" marL="0">
-              <a:lnSpc>
-                <a:spcPct val="125000"/>
-              </a:lnSpc>
-              <a:buNone/>
-            </a:pPr>
-            <a:r>
-              <a:rPr lang="en-US" sz="800" i="1" dirty="0">
-                <a:solidFill>
-                  <a:srgbClr val="5A5A66"/>
-                </a:solidFill>
-                <a:latin typeface="Cambria" pitchFamily="34" charset="0"/>
-                <a:ea typeface="Cambria" pitchFamily="34" charset="-122"/>
-                <a:cs typeface="Cambria" pitchFamily="34" charset="-120"/>
-              </a:rPr>
-              <a:t>Luận văn §5.5–§5.10, §6.7.3</a:t>
-            </a:r>
-            <a:endParaRPr lang="en-US" sz="800" dirty="0"/>
-          </a:p>
-        </p:txBody>
-      </p:sp>
-      <p:sp>
-        <p:nvSpPr>
-          <p:cNvPr id="18" name="Shape 16"/>
+          <p:cNvPr id="16" name="Shape 14"/>
           <p:cNvSpPr/>
           <p:nvPr/>
         </p:nvSpPr>
@@ -37310,7 +35332,7 @@
       </p:sp>
       <p:sp>
         <p:nvSpPr>
-          <p:cNvPr id="19" name="Shape 17"/>
+          <p:cNvPr id="17" name="Shape 15"/>
           <p:cNvSpPr/>
           <p:nvPr/>
         </p:nvSpPr>
@@ -37337,7 +35359,7 @@
       </p:sp>
       <p:sp>
         <p:nvSpPr>
-          <p:cNvPr id="20" name="Shape 18"/>
+          <p:cNvPr id="18" name="Shape 16"/>
           <p:cNvSpPr/>
           <p:nvPr/>
         </p:nvSpPr>
@@ -37364,7 +35386,7 @@
       </p:sp>
       <p:sp>
         <p:nvSpPr>
-          <p:cNvPr id="21" name="Shape 19"/>
+          <p:cNvPr id="19" name="Shape 17"/>
           <p:cNvSpPr/>
           <p:nvPr/>
         </p:nvSpPr>
@@ -37391,7 +35413,7 @@
       </p:sp>
       <p:sp>
         <p:nvSpPr>
-          <p:cNvPr id="22" name="Text 20"/>
+          <p:cNvPr id="20" name="Text 18"/>
           <p:cNvSpPr/>
           <p:nvPr/>
         </p:nvSpPr>
@@ -37433,7 +35455,7 @@
       </p:sp>
       <p:sp>
         <p:nvSpPr>
-          <p:cNvPr id="23" name="Text 21"/>
+          <p:cNvPr id="21" name="Text 19"/>
           <p:cNvSpPr/>
           <p:nvPr/>
         </p:nvSpPr>
@@ -37475,7 +35497,7 @@
       </p:sp>
       <p:sp>
         <p:nvSpPr>
-          <p:cNvPr id="24" name="Text 22"/>
+          <p:cNvPr id="22" name="Text 20"/>
           <p:cNvSpPr/>
           <p:nvPr/>
         </p:nvSpPr>
@@ -37517,7 +35539,7 @@
       </p:sp>
       <p:sp>
         <p:nvSpPr>
-          <p:cNvPr id="25" name="Text 23"/>
+          <p:cNvPr id="23" name="Text 21"/>
           <p:cNvSpPr/>
           <p:nvPr/>
         </p:nvSpPr>

--- a/slides/LUAN_VAN_SLIDE_BAO_VE_CONCISE.pptx
+++ b/slides/LUAN_VAN_SLIDE_BAO_VE_CONCISE.pptx
@@ -4191,14 +4191,14 @@
         </p:nvSpPr>
         <p:spPr>
           <a:xfrm>
-            <a:off x="502920" y="1234440"/>
-            <a:ext cx="868680" cy="822960"/>
+            <a:off x="548640" y="1691640"/>
+            <a:ext cx="1417320" cy="841248"/>
           </a:xfrm>
           <a:prstGeom prst="roundRect">
             <a:avLst/>
           </a:prstGeom>
           <a:solidFill>
-            <a:srgbClr val="FFFFFF"/>
+            <a:srgbClr val="F3F2F5"/>
           </a:solidFill>
           <a:ln w="12700">
             <a:solidFill>
@@ -4216,8 +4216,8 @@
         </p:nvSpPr>
         <p:spPr>
           <a:xfrm>
-            <a:off x="502920" y="1234440"/>
-            <a:ext cx="868680" cy="822960"/>
+            <a:off x="548640" y="1691640"/>
+            <a:ext cx="1417320" cy="841248"/>
           </a:xfrm>
           <a:prstGeom prst="rect">
             <a:avLst/>
@@ -4246,7 +4246,7 @@
                 <a:ea typeface="Cambria" pitchFamily="34" charset="-122"/>
                 <a:cs typeface="Cambria" pitchFamily="34" charset="-120"/>
               </a:rPr>
-              <a:t>S1</a:t>
+              <a:t>1 đầu vào</a:t>
             </a:r>
             <a:endParaRPr lang="en-US" sz="1600" dirty="0"/>
           </a:p>
@@ -4260,8 +4260,8 @@
         </p:nvSpPr>
         <p:spPr>
           <a:xfrm>
-            <a:off x="1481328" y="1645920"/>
-            <a:ext cx="320040" cy="0"/>
+            <a:off x="2084832" y="2112264"/>
+            <a:ext cx="384048" cy="0"/>
           </a:xfrm>
           <a:prstGeom prst="line">
             <a:avLst/>
@@ -4284,8 +4284,8 @@
         </p:nvSpPr>
         <p:spPr>
           <a:xfrm>
-            <a:off x="1901952" y="1143000"/>
-            <a:ext cx="1965960" cy="1005840"/>
+            <a:off x="2578608" y="1517904"/>
+            <a:ext cx="1600200" cy="1188720"/>
           </a:xfrm>
           <a:prstGeom prst="roundRect">
             <a:avLst/>
@@ -4309,8 +4309,8 @@
         </p:nvSpPr>
         <p:spPr>
           <a:xfrm>
-            <a:off x="1901952" y="1143000"/>
-            <a:ext cx="1965960" cy="1005840"/>
+            <a:off x="2578608" y="1517904"/>
+            <a:ext cx="1600200" cy="1188720"/>
           </a:xfrm>
           <a:prstGeom prst="rect">
             <a:avLst/>
@@ -4331,7 +4331,7 @@
               <a:buNone/>
             </a:pPr>
             <a:r>
-              <a:rPr lang="en-US" sz="1500" b="1" dirty="0">
+              <a:rPr lang="en-US" sz="1600" b="1" dirty="0">
                 <a:solidFill>
                   <a:srgbClr val="1A1A1A"/>
                 </a:solidFill>
@@ -4339,19 +4339,19 @@
                 <a:ea typeface="Cambria" pitchFamily="34" charset="-122"/>
                 <a:cs typeface="Cambria" pitchFamily="34" charset="-120"/>
               </a:rPr>
-              <a:t>GRPO-SPICE</a:t>
-            </a:r>
-            <a:endParaRPr lang="en-US" sz="1500" dirty="0"/>
-          </a:p>
-          <a:p>
-            <a:pPr algn="ctr" indent="0" marL="0">
-              <a:lnSpc>
-                <a:spcPct val="125000"/>
-              </a:lnSpc>
-              <a:buNone/>
-            </a:pPr>
-            <a:r>
-              <a:rPr lang="en-US" sz="1500" b="1" dirty="0">
+              <a:t>8 câu</a:t>
+            </a:r>
+            <a:endParaRPr lang="en-US" sz="1600" dirty="0"/>
+          </a:p>
+          <a:p>
+            <a:pPr algn="ctr" indent="0" marL="0">
+              <a:lnSpc>
+                <a:spcPct val="125000"/>
+              </a:lnSpc>
+              <a:buNone/>
+            </a:pPr>
+            <a:r>
+              <a:rPr lang="en-US" sz="1600" b="1" dirty="0">
                 <a:solidFill>
                   <a:srgbClr val="1A1A1A"/>
                 </a:solidFill>
@@ -4359,9 +4359,9 @@
                 <a:ea typeface="Cambria" pitchFamily="34" charset="-122"/>
                 <a:cs typeface="Cambria" pitchFamily="34" charset="-120"/>
               </a:rPr>
-              <a:t>sinh câu ban đầu</a:t>
-            </a:r>
-            <a:endParaRPr lang="en-US" sz="1500" dirty="0"/>
+              <a:t>hướng dẫn</a:t>
+            </a:r>
+            <a:endParaRPr lang="en-US" sz="1600" dirty="0"/>
           </a:p>
         </p:txBody>
       </p:sp>
@@ -4373,8 +4373,8 @@
         </p:nvSpPr>
         <p:spPr>
           <a:xfrm>
-            <a:off x="3977640" y="1645920"/>
-            <a:ext cx="320040" cy="0"/>
+            <a:off x="4297680" y="2112264"/>
+            <a:ext cx="384048" cy="0"/>
           </a:xfrm>
           <a:prstGeom prst="line">
             <a:avLst/>
@@ -4397,8 +4397,8 @@
         </p:nvSpPr>
         <p:spPr>
           <a:xfrm>
-            <a:off x="4407408" y="1143000"/>
-            <a:ext cx="1965960" cy="1005840"/>
+            <a:off x="4791456" y="1517904"/>
+            <a:ext cx="1645920" cy="1188720"/>
           </a:xfrm>
           <a:prstGeom prst="roundRect">
             <a:avLst/>
@@ -4422,8 +4422,8 @@
         </p:nvSpPr>
         <p:spPr>
           <a:xfrm>
-            <a:off x="4407408" y="1143000"/>
-            <a:ext cx="1965960" cy="1005840"/>
+            <a:off x="4791456" y="1517904"/>
+            <a:ext cx="1645920" cy="1188720"/>
           </a:xfrm>
           <a:prstGeom prst="rect">
             <a:avLst/>
@@ -4452,7 +4452,7 @@
                 <a:ea typeface="Cambria" pitchFamily="34" charset="-122"/>
                 <a:cs typeface="Cambria" pitchFamily="34" charset="-120"/>
               </a:rPr>
-              <a:t>ACE</a:t>
+              <a:t>SPICE</a:t>
             </a:r>
             <a:endParaRPr lang="en-US" sz="1500" dirty="0"/>
           </a:p>
@@ -4472,7 +4472,7 @@
                 <a:ea typeface="Cambria" pitchFamily="34" charset="-122"/>
                 <a:cs typeface="Cambria" pitchFamily="34" charset="-120"/>
               </a:rPr>
-              <a:t>hiệu chỉnh có chọn lọc</a:t>
+              <a:t>− phạt độ dài</a:t>
             </a:r>
             <a:endParaRPr lang="en-US" sz="1500" dirty="0"/>
           </a:p>
@@ -4486,8 +4486,8 @@
         </p:nvSpPr>
         <p:spPr>
           <a:xfrm>
-            <a:off x="6492240" y="1645920"/>
-            <a:ext cx="320040" cy="0"/>
+            <a:off x="6556248" y="2112264"/>
+            <a:ext cx="384048" cy="0"/>
           </a:xfrm>
           <a:prstGeom prst="line">
             <a:avLst/>
@@ -4510,14 +4510,14 @@
         </p:nvSpPr>
         <p:spPr>
           <a:xfrm>
-            <a:off x="6922008" y="1143000"/>
-            <a:ext cx="1719072" cy="1005840"/>
+            <a:off x="7050024" y="1463040"/>
+            <a:ext cx="1554480" cy="1298448"/>
           </a:xfrm>
           <a:prstGeom prst="roundRect">
             <a:avLst/>
           </a:prstGeom>
           <a:solidFill>
-            <a:srgbClr val="FFFFFF"/>
+            <a:srgbClr val="F3F2F5"/>
           </a:solidFill>
           <a:ln w="12700">
             <a:solidFill>
@@ -4535,8 +4535,8 @@
         </p:nvSpPr>
         <p:spPr>
           <a:xfrm>
-            <a:off x="6922008" y="1143000"/>
-            <a:ext cx="1719072" cy="1005840"/>
+            <a:off x="7050024" y="1463040"/>
+            <a:ext cx="1554480" cy="1298448"/>
           </a:xfrm>
           <a:prstGeom prst="rect">
             <a:avLst/>
@@ -4557,7 +4557,7 @@
               <a:buNone/>
             </a:pPr>
             <a:r>
-              <a:rPr lang="en-US" sz="1400" b="1" dirty="0">
+              <a:rPr lang="en-US" sz="1500" b="1" dirty="0">
                 <a:solidFill>
                   <a:srgbClr val="1A1A1A"/>
                 </a:solidFill>
@@ -4565,42 +4565,153 @@
                 <a:ea typeface="Cambria" pitchFamily="34" charset="-122"/>
                 <a:cs typeface="Cambria" pitchFamily="34" charset="-120"/>
               </a:rPr>
-              <a:t>Câu hướng dẫn</a:t>
+              <a:t>Cập nhật</a:t>
+            </a:r>
+            <a:endParaRPr lang="en-US" sz="1500" dirty="0"/>
+          </a:p>
+          <a:p>
+            <a:pPr algn="ctr" indent="0" marL="0">
+              <a:lnSpc>
+                <a:spcPct val="125000"/>
+              </a:lnSpc>
+              <a:buNone/>
+            </a:pPr>
+            <a:r>
+              <a:rPr lang="en-US" sz="1500" b="1" dirty="0">
+                <a:solidFill>
+                  <a:srgbClr val="1A1A1A"/>
+                </a:solidFill>
+                <a:latin typeface="Cambria" pitchFamily="34" charset="0"/>
+                <a:ea typeface="Cambria" pitchFamily="34" charset="-122"/>
+                <a:cs typeface="Cambria" pitchFamily="34" charset="-120"/>
+              </a:rPr>
+              <a:t>GRPO</a:t>
+            </a:r>
+            <a:endParaRPr lang="en-US" sz="1500" dirty="0"/>
+          </a:p>
+        </p:txBody>
+      </p:sp>
+      <p:sp>
+        <p:nvSpPr>
+          <p:cNvPr id="15" name="Shape 13"/>
+          <p:cNvSpPr/>
+          <p:nvPr/>
+        </p:nvSpPr>
+        <p:spPr>
+          <a:xfrm>
+            <a:off x="502920" y="3337560"/>
+            <a:ext cx="8138160" cy="1572768"/>
+          </a:xfrm>
+          <a:prstGeom prst="roundRect">
+            <a:avLst/>
+          </a:prstGeom>
+          <a:solidFill>
+            <a:srgbClr val="F3F2F5"/>
+          </a:solidFill>
+          <a:ln w="12700">
+            <a:solidFill>
+              <a:srgbClr val="7A7099"/>
+            </a:solidFill>
+            <a:prstDash val="solid"/>
+          </a:ln>
+        </p:spPr>
+      </p:sp>
+      <p:sp>
+        <p:nvSpPr>
+          <p:cNvPr id="16" name="Text 14"/>
+          <p:cNvSpPr/>
+          <p:nvPr/>
+        </p:nvSpPr>
+        <p:spPr>
+          <a:xfrm>
+            <a:off x="704088" y="3566160"/>
+            <a:ext cx="1965960" cy="320040"/>
+          </a:xfrm>
+          <a:prstGeom prst="rect">
+            <a:avLst/>
+          </a:prstGeom>
+          <a:noFill/>
+          <a:ln/>
+        </p:spPr>
+        <p:txBody>
+          <a:bodyPr wrap="square" lIns="0" tIns="0" rIns="0" bIns="0" rtlCol="0" anchor="ctr"/>
+          <a:lstStyle/>
+          <a:p>
+            <a:pPr indent="0" marL="0">
+              <a:lnSpc>
+                <a:spcPct val="125000"/>
+              </a:lnSpc>
+              <a:buNone/>
+            </a:pPr>
+            <a:r>
+              <a:rPr lang="en-US" sz="1550" b="1" dirty="0">
+                <a:solidFill>
+                  <a:srgbClr val="25194B"/>
+                </a:solidFill>
+                <a:latin typeface="Cambria" pitchFamily="34" charset="0"/>
+                <a:ea typeface="Cambria" pitchFamily="34" charset="-122"/>
+                <a:cs typeface="Cambria" pitchFamily="34" charset="-120"/>
+              </a:rPr>
+              <a:t>Vai trò của SPICE</a:t>
+            </a:r>
+            <a:endParaRPr lang="en-US" sz="1550" dirty="0"/>
+          </a:p>
+        </p:txBody>
+      </p:sp>
+      <p:sp>
+        <p:nvSpPr>
+          <p:cNvPr id="17" name="Text 15"/>
+          <p:cNvSpPr/>
+          <p:nvPr/>
+        </p:nvSpPr>
+        <p:spPr>
+          <a:xfrm>
+            <a:off x="2441448" y="3429000"/>
+            <a:ext cx="5943600" cy="804672"/>
+          </a:xfrm>
+          <a:prstGeom prst="rect">
+            <a:avLst/>
+          </a:prstGeom>
+          <a:noFill/>
+          <a:ln/>
+        </p:spPr>
+        <p:txBody>
+          <a:bodyPr wrap="square" lIns="0" tIns="0" rIns="0" bIns="0" rtlCol="0" anchor="ctr">
+            <a:normAutofit/>
+          </a:bodyPr>
+          <a:lstStyle/>
+          <a:p>
+            <a:pPr indent="0" marL="0">
+              <a:lnSpc>
+                <a:spcPct val="125000"/>
+              </a:lnSpc>
+              <a:buNone/>
+            </a:pPr>
+            <a:r>
+              <a:rPr lang="en-US" sz="1400" dirty="0">
+                <a:solidFill>
+                  <a:srgbClr val="1A1A1A"/>
+                </a:solidFill>
+                <a:latin typeface="Cambria" pitchFamily="34" charset="0"/>
+                <a:ea typeface="Cambria" pitchFamily="34" charset="-122"/>
+                <a:cs typeface="Cambria" pitchFamily="34" charset="-120"/>
+              </a:rPr>
+              <a:t>SPICE ưu tiên mức đúng về nội dung thay vì chỉ mức giống nhau về câu chữ. Nhờ đó, tín hiệu huấn luyện tập trung hơn vào đối tượng và quan hệ cần mô tả.</a:t>
             </a:r>
             <a:endParaRPr lang="en-US" sz="1400" dirty="0"/>
           </a:p>
-          <a:p>
-            <a:pPr algn="ctr" indent="0" marL="0">
-              <a:lnSpc>
-                <a:spcPct val="125000"/>
-              </a:lnSpc>
-              <a:buNone/>
-            </a:pPr>
-            <a:r>
-              <a:rPr lang="en-US" sz="1400" b="1" dirty="0">
-                <a:solidFill>
-                  <a:srgbClr val="1A1A1A"/>
-                </a:solidFill>
-                <a:latin typeface="Cambria" pitchFamily="34" charset="0"/>
-                <a:ea typeface="Cambria" pitchFamily="34" charset="-122"/>
-                <a:cs typeface="Cambria" pitchFamily="34" charset="-120"/>
-              </a:rPr>
-              <a:t>cuối</a:t>
-            </a:r>
-            <a:endParaRPr lang="en-US" sz="1400" dirty="0"/>
-          </a:p>
-        </p:txBody>
-      </p:sp>
-      <p:sp>
-        <p:nvSpPr>
-          <p:cNvPr id="15" name="Text 13"/>
-          <p:cNvSpPr/>
-          <p:nvPr/>
-        </p:nvSpPr>
-        <p:spPr>
-          <a:xfrm>
-            <a:off x="502920" y="3127248"/>
-            <a:ext cx="1965960" cy="365760"/>
+        </p:txBody>
+      </p:sp>
+      <p:sp>
+        <p:nvSpPr>
+          <p:cNvPr id="18" name="Text 16"/>
+          <p:cNvSpPr/>
+          <p:nvPr/>
+        </p:nvSpPr>
+        <p:spPr>
+          <a:xfrm>
+            <a:off x="502920" y="5321808"/>
+            <a:ext cx="8138160" cy="393192"/>
           </a:xfrm>
           <a:prstGeom prst="rect">
             <a:avLst/>
@@ -4612,14 +4723,14 @@
           <a:bodyPr wrap="square" lIns="0" tIns="0" rIns="0" bIns="0" rtlCol="0" anchor="ctr"/>
           <a:lstStyle/>
           <a:p>
-            <a:pPr indent="0" marL="0">
-              <a:lnSpc>
-                <a:spcPct val="125000"/>
-              </a:lnSpc>
-              <a:buNone/>
-            </a:pPr>
-            <a:r>
-              <a:rPr lang="en-US" sz="1700" b="1" dirty="0">
+            <a:pPr algn="ctr" indent="0" marL="0">
+              <a:lnSpc>
+                <a:spcPct val="125000"/>
+              </a:lnSpc>
+              <a:buNone/>
+            </a:pPr>
+            <a:r>
+              <a:rPr lang="en-US" sz="1360" b="1" dirty="0">
                 <a:solidFill>
                   <a:srgbClr val="25194B"/>
                 </a:solidFill>
@@ -4627,24 +4738,78 @@
                 <a:ea typeface="Cambria" pitchFamily="34" charset="-122"/>
                 <a:cs typeface="Cambria" pitchFamily="34" charset="-120"/>
               </a:rPr>
-              <a:t>GRPO-SPICE</a:t>
-            </a:r>
-            <a:endParaRPr lang="en-US" sz="1700" dirty="0"/>
-          </a:p>
-        </p:txBody>
-      </p:sp>
-      <p:sp>
-        <p:nvSpPr>
-          <p:cNvPr id="16" name="Shape 14"/>
-          <p:cNvSpPr/>
-          <p:nvPr/>
-        </p:nvSpPr>
-        <p:spPr>
-          <a:xfrm>
-            <a:off x="521208" y="3721608"/>
-            <a:ext cx="64008" cy="64008"/>
-          </a:xfrm>
-          <a:prstGeom prst="ellipse">
+              <a:t>500 bước cập nhật từ S1 · nhánh đối chứng dùng cùng cấu hình huấn luyện.</a:t>
+            </a:r>
+            <a:endParaRPr lang="en-US" sz="1360" dirty="0"/>
+          </a:p>
+        </p:txBody>
+      </p:sp>
+      <p:sp>
+        <p:nvSpPr>
+          <p:cNvPr id="19" name="Shape 17"/>
+          <p:cNvSpPr/>
+          <p:nvPr/>
+        </p:nvSpPr>
+        <p:spPr>
+          <a:xfrm>
+            <a:off x="0" y="6620256"/>
+            <a:ext cx="2743200" cy="237744"/>
+          </a:xfrm>
+          <a:prstGeom prst="rect">
+            <a:avLst/>
+          </a:prstGeom>
+          <a:solidFill>
+            <a:srgbClr val="191132"/>
+          </a:solidFill>
+          <a:ln w="12700">
+            <a:solidFill>
+              <a:srgbClr val="191132">
+                <a:alpha val="0"/>
+              </a:srgbClr>
+            </a:solidFill>
+            <a:prstDash val="solid"/>
+          </a:ln>
+        </p:spPr>
+      </p:sp>
+      <p:sp>
+        <p:nvSpPr>
+          <p:cNvPr id="20" name="Shape 18"/>
+          <p:cNvSpPr/>
+          <p:nvPr/>
+        </p:nvSpPr>
+        <p:spPr>
+          <a:xfrm>
+            <a:off x="2743200" y="6620256"/>
+            <a:ext cx="3383280" cy="237744"/>
+          </a:xfrm>
+          <a:prstGeom prst="rect">
+            <a:avLst/>
+          </a:prstGeom>
+          <a:solidFill>
+            <a:srgbClr val="25194B"/>
+          </a:solidFill>
+          <a:ln w="12700">
+            <a:solidFill>
+              <a:srgbClr val="25194B">
+                <a:alpha val="0"/>
+              </a:srgbClr>
+            </a:solidFill>
+            <a:prstDash val="solid"/>
+          </a:ln>
+        </p:spPr>
+      </p:sp>
+      <p:sp>
+        <p:nvSpPr>
+          <p:cNvPr id="21" name="Shape 19"/>
+          <p:cNvSpPr/>
+          <p:nvPr/>
+        </p:nvSpPr>
+        <p:spPr>
+          <a:xfrm>
+            <a:off x="6126480" y="6620256"/>
+            <a:ext cx="1737360" cy="237744"/>
+          </a:xfrm>
+          <a:prstGeom prst="rect">
             <a:avLst/>
           </a:prstGeom>
           <a:solidFill>
@@ -4662,429 +4827,7 @@
       </p:sp>
       <p:sp>
         <p:nvSpPr>
-          <p:cNvPr id="17" name="Text 15"/>
-          <p:cNvSpPr/>
-          <p:nvPr/>
-        </p:nvSpPr>
-        <p:spPr>
-          <a:xfrm>
-            <a:off x="713232" y="3584448"/>
-            <a:ext cx="3584448" cy="548640"/>
-          </a:xfrm>
-          <a:prstGeom prst="rect">
-            <a:avLst/>
-          </a:prstGeom>
-          <a:noFill/>
-          <a:ln/>
-        </p:spPr>
-        <p:txBody>
-          <a:bodyPr wrap="square" lIns="0" tIns="0" rIns="0" bIns="0" rtlCol="0" anchor="t">
-            <a:normAutofit/>
-          </a:bodyPr>
-          <a:lstStyle/>
-          <a:p>
-            <a:pPr indent="0" marL="0">
-              <a:lnSpc>
-                <a:spcPct val="125000"/>
-              </a:lnSpc>
-              <a:buNone/>
-            </a:pPr>
-            <a:r>
-              <a:rPr lang="en-US" sz="1460" dirty="0">
-                <a:solidFill>
-                  <a:srgbClr val="1A1A1A"/>
-                </a:solidFill>
-                <a:latin typeface="Cambria" pitchFamily="34" charset="0"/>
-                <a:ea typeface="Cambria" pitchFamily="34" charset="-122"/>
-                <a:cs typeface="Cambria" pitchFamily="34" charset="-120"/>
-              </a:rPr>
-              <a:t>Sinh 8 câu cho cùng đầu vào.</a:t>
-            </a:r>
-            <a:endParaRPr lang="en-US" sz="1460" dirty="0"/>
-          </a:p>
-        </p:txBody>
-      </p:sp>
-      <p:sp>
-        <p:nvSpPr>
-          <p:cNvPr id="18" name="Shape 16"/>
-          <p:cNvSpPr/>
-          <p:nvPr/>
-        </p:nvSpPr>
-        <p:spPr>
-          <a:xfrm>
-            <a:off x="521208" y="4379976"/>
-            <a:ext cx="64008" cy="64008"/>
-          </a:xfrm>
-          <a:prstGeom prst="ellipse">
-            <a:avLst/>
-          </a:prstGeom>
-          <a:solidFill>
-            <a:srgbClr val="4F417A"/>
-          </a:solidFill>
-          <a:ln w="12700">
-            <a:solidFill>
-              <a:srgbClr val="4F417A">
-                <a:alpha val="0"/>
-              </a:srgbClr>
-            </a:solidFill>
-            <a:prstDash val="solid"/>
-          </a:ln>
-        </p:spPr>
-      </p:sp>
-      <p:sp>
-        <p:nvSpPr>
-          <p:cNvPr id="19" name="Text 17"/>
-          <p:cNvSpPr/>
-          <p:nvPr/>
-        </p:nvSpPr>
-        <p:spPr>
-          <a:xfrm>
-            <a:off x="713232" y="4242816"/>
-            <a:ext cx="3584448" cy="548640"/>
-          </a:xfrm>
-          <a:prstGeom prst="rect">
-            <a:avLst/>
-          </a:prstGeom>
-          <a:noFill/>
-          <a:ln/>
-        </p:spPr>
-        <p:txBody>
-          <a:bodyPr wrap="square" lIns="0" tIns="0" rIns="0" bIns="0" rtlCol="0" anchor="t">
-            <a:normAutofit/>
-          </a:bodyPr>
-          <a:lstStyle/>
-          <a:p>
-            <a:pPr indent="0" marL="0">
-              <a:lnSpc>
-                <a:spcPct val="125000"/>
-              </a:lnSpc>
-              <a:buNone/>
-            </a:pPr>
-            <a:r>
-              <a:rPr lang="en-US" sz="1460" dirty="0">
-                <a:solidFill>
-                  <a:srgbClr val="1A1A1A"/>
-                </a:solidFill>
-                <a:latin typeface="Cambria" pitchFamily="34" charset="0"/>
-                <a:ea typeface="Cambria" pitchFamily="34" charset="-122"/>
-                <a:cs typeface="Cambria" pitchFamily="34" charset="-120"/>
-              </a:rPr>
-              <a:t>SPICE + phạt độ dài làm tín hiệu cập nhật.</a:t>
-            </a:r>
-            <a:endParaRPr lang="en-US" sz="1460" dirty="0"/>
-          </a:p>
-        </p:txBody>
-      </p:sp>
-      <p:sp>
-        <p:nvSpPr>
-          <p:cNvPr id="20" name="Text 18"/>
-          <p:cNvSpPr/>
-          <p:nvPr/>
-        </p:nvSpPr>
-        <p:spPr>
-          <a:xfrm>
-            <a:off x="4617720" y="3127248"/>
-            <a:ext cx="1097280" cy="365760"/>
-          </a:xfrm>
-          <a:prstGeom prst="rect">
-            <a:avLst/>
-          </a:prstGeom>
-          <a:noFill/>
-          <a:ln/>
-        </p:spPr>
-        <p:txBody>
-          <a:bodyPr wrap="square" lIns="0" tIns="0" rIns="0" bIns="0" rtlCol="0" anchor="ctr"/>
-          <a:lstStyle/>
-          <a:p>
-            <a:pPr indent="0" marL="0">
-              <a:lnSpc>
-                <a:spcPct val="125000"/>
-              </a:lnSpc>
-              <a:buNone/>
-            </a:pPr>
-            <a:r>
-              <a:rPr lang="en-US" sz="1700" b="1" dirty="0">
-                <a:solidFill>
-                  <a:srgbClr val="25194B"/>
-                </a:solidFill>
-                <a:latin typeface="Cambria" pitchFamily="34" charset="0"/>
-                <a:ea typeface="Cambria" pitchFamily="34" charset="-122"/>
-                <a:cs typeface="Cambria" pitchFamily="34" charset="-120"/>
-              </a:rPr>
-              <a:t>ACE</a:t>
-            </a:r>
-            <a:endParaRPr lang="en-US" sz="1700" dirty="0"/>
-          </a:p>
-        </p:txBody>
-      </p:sp>
-      <p:sp>
-        <p:nvSpPr>
-          <p:cNvPr id="21" name="Shape 19"/>
-          <p:cNvSpPr/>
-          <p:nvPr/>
-        </p:nvSpPr>
-        <p:spPr>
-          <a:xfrm>
-            <a:off x="4636008" y="3721608"/>
-            <a:ext cx="64008" cy="64008"/>
-          </a:xfrm>
-          <a:prstGeom prst="ellipse">
-            <a:avLst/>
-          </a:prstGeom>
-          <a:solidFill>
-            <a:srgbClr val="4F417A"/>
-          </a:solidFill>
-          <a:ln w="12700">
-            <a:solidFill>
-              <a:srgbClr val="4F417A">
-                <a:alpha val="0"/>
-              </a:srgbClr>
-            </a:solidFill>
-            <a:prstDash val="solid"/>
-          </a:ln>
-        </p:spPr>
-      </p:sp>
-      <p:sp>
-        <p:nvSpPr>
-          <p:cNvPr id="22" name="Text 20"/>
-          <p:cNvSpPr/>
-          <p:nvPr/>
-        </p:nvSpPr>
-        <p:spPr>
-          <a:xfrm>
-            <a:off x="4828032" y="3584448"/>
-            <a:ext cx="3767328" cy="548640"/>
-          </a:xfrm>
-          <a:prstGeom prst="rect">
-            <a:avLst/>
-          </a:prstGeom>
-          <a:noFill/>
-          <a:ln/>
-        </p:spPr>
-        <p:txBody>
-          <a:bodyPr wrap="square" lIns="0" tIns="0" rIns="0" bIns="0" rtlCol="0" anchor="t">
-            <a:normAutofit/>
-          </a:bodyPr>
-          <a:lstStyle/>
-          <a:p>
-            <a:pPr indent="0" marL="0">
-              <a:lnSpc>
-                <a:spcPct val="125000"/>
-              </a:lnSpc>
-              <a:buNone/>
-            </a:pPr>
-            <a:r>
-              <a:rPr lang="en-US" sz="1460" dirty="0">
-                <a:solidFill>
-                  <a:srgbClr val="1A1A1A"/>
-                </a:solidFill>
-                <a:latin typeface="Cambria" pitchFamily="34" charset="0"/>
-                <a:ea typeface="Cambria" pitchFamily="34" charset="-122"/>
-                <a:cs typeface="Cambria" pitchFamily="34" charset="-120"/>
-              </a:rPr>
-              <a:t>Truy hồi 4 câu ví dụ từ tập dạy.</a:t>
-            </a:r>
-            <a:endParaRPr lang="en-US" sz="1460" dirty="0"/>
-          </a:p>
-        </p:txBody>
-      </p:sp>
-      <p:sp>
-        <p:nvSpPr>
-          <p:cNvPr id="23" name="Shape 21"/>
-          <p:cNvSpPr/>
-          <p:nvPr/>
-        </p:nvSpPr>
-        <p:spPr>
-          <a:xfrm>
-            <a:off x="4636008" y="4379976"/>
-            <a:ext cx="64008" cy="64008"/>
-          </a:xfrm>
-          <a:prstGeom prst="ellipse">
-            <a:avLst/>
-          </a:prstGeom>
-          <a:solidFill>
-            <a:srgbClr val="4F417A"/>
-          </a:solidFill>
-          <a:ln w="12700">
-            <a:solidFill>
-              <a:srgbClr val="4F417A">
-                <a:alpha val="0"/>
-              </a:srgbClr>
-            </a:solidFill>
-            <a:prstDash val="solid"/>
-          </a:ln>
-        </p:spPr>
-      </p:sp>
-      <p:sp>
-        <p:nvSpPr>
-          <p:cNvPr id="24" name="Text 22"/>
-          <p:cNvSpPr/>
-          <p:nvPr/>
-        </p:nvSpPr>
-        <p:spPr>
-          <a:xfrm>
-            <a:off x="4828032" y="4242816"/>
-            <a:ext cx="3767328" cy="548640"/>
-          </a:xfrm>
-          <a:prstGeom prst="rect">
-            <a:avLst/>
-          </a:prstGeom>
-          <a:noFill/>
-          <a:ln/>
-        </p:spPr>
-        <p:txBody>
-          <a:bodyPr wrap="square" lIns="0" tIns="0" rIns="0" bIns="0" rtlCol="0" anchor="t">
-            <a:normAutofit/>
-          </a:bodyPr>
-          <a:lstStyle/>
-          <a:p>
-            <a:pPr indent="0" marL="0">
-              <a:lnSpc>
-                <a:spcPct val="125000"/>
-              </a:lnSpc>
-              <a:buNone/>
-            </a:pPr>
-            <a:r>
-              <a:rPr lang="en-US" sz="1460" dirty="0">
-                <a:solidFill>
-                  <a:srgbClr val="1A1A1A"/>
-                </a:solidFill>
-                <a:latin typeface="Cambria" pitchFamily="34" charset="0"/>
-                <a:ea typeface="Cambria" pitchFamily="34" charset="-122"/>
-                <a:cs typeface="Cambria" pitchFamily="34" charset="-120"/>
-              </a:rPr>
-              <a:t>Chỉ thay câu ban đầu khi thỏa điều kiện chọn lọc.</a:t>
-            </a:r>
-            <a:endParaRPr lang="en-US" sz="1460" dirty="0"/>
-          </a:p>
-        </p:txBody>
-      </p:sp>
-      <p:sp>
-        <p:nvSpPr>
-          <p:cNvPr id="25" name="Text 23"/>
-          <p:cNvSpPr/>
-          <p:nvPr/>
-        </p:nvSpPr>
-        <p:spPr>
-          <a:xfrm>
-            <a:off x="502920" y="5321808"/>
-            <a:ext cx="8138160" cy="438912"/>
-          </a:xfrm>
-          <a:prstGeom prst="rect">
-            <a:avLst/>
-          </a:prstGeom>
-          <a:noFill/>
-          <a:ln/>
-        </p:spPr>
-        <p:txBody>
-          <a:bodyPr wrap="square" lIns="0" tIns="0" rIns="0" bIns="0" rtlCol="0" anchor="ctr"/>
-          <a:lstStyle/>
-          <a:p>
-            <a:pPr algn="ctr" indent="0" marL="0">
-              <a:lnSpc>
-                <a:spcPct val="125000"/>
-              </a:lnSpc>
-              <a:buNone/>
-            </a:pPr>
-            <a:r>
-              <a:rPr lang="en-US" sz="1420" b="1" dirty="0">
-                <a:solidFill>
-                  <a:srgbClr val="25194B"/>
-                </a:solidFill>
-                <a:latin typeface="Cambria" pitchFamily="34" charset="0"/>
-                <a:ea typeface="Cambria" pitchFamily="34" charset="-122"/>
-                <a:cs typeface="Cambria" pitchFamily="34" charset="-120"/>
-              </a:rPr>
-              <a:t>UGround không nằm trong hàm thưởng và không tham gia vào quá trình sinh câu.</a:t>
-            </a:r>
-            <a:endParaRPr lang="en-US" sz="1420" dirty="0"/>
-          </a:p>
-        </p:txBody>
-      </p:sp>
-      <p:sp>
-        <p:nvSpPr>
-          <p:cNvPr id="26" name="Shape 24"/>
-          <p:cNvSpPr/>
-          <p:nvPr/>
-        </p:nvSpPr>
-        <p:spPr>
-          <a:xfrm>
-            <a:off x="0" y="6620256"/>
-            <a:ext cx="2743200" cy="237744"/>
-          </a:xfrm>
-          <a:prstGeom prst="rect">
-            <a:avLst/>
-          </a:prstGeom>
-          <a:solidFill>
-            <a:srgbClr val="191132"/>
-          </a:solidFill>
-          <a:ln w="12700">
-            <a:solidFill>
-              <a:srgbClr val="191132">
-                <a:alpha val="0"/>
-              </a:srgbClr>
-            </a:solidFill>
-            <a:prstDash val="solid"/>
-          </a:ln>
-        </p:spPr>
-      </p:sp>
-      <p:sp>
-        <p:nvSpPr>
-          <p:cNvPr id="27" name="Shape 25"/>
-          <p:cNvSpPr/>
-          <p:nvPr/>
-        </p:nvSpPr>
-        <p:spPr>
-          <a:xfrm>
-            <a:off x="2743200" y="6620256"/>
-            <a:ext cx="3383280" cy="237744"/>
-          </a:xfrm>
-          <a:prstGeom prst="rect">
-            <a:avLst/>
-          </a:prstGeom>
-          <a:solidFill>
-            <a:srgbClr val="25194B"/>
-          </a:solidFill>
-          <a:ln w="12700">
-            <a:solidFill>
-              <a:srgbClr val="25194B">
-                <a:alpha val="0"/>
-              </a:srgbClr>
-            </a:solidFill>
-            <a:prstDash val="solid"/>
-          </a:ln>
-        </p:spPr>
-      </p:sp>
-      <p:sp>
-        <p:nvSpPr>
-          <p:cNvPr id="28" name="Shape 26"/>
-          <p:cNvSpPr/>
-          <p:nvPr/>
-        </p:nvSpPr>
-        <p:spPr>
-          <a:xfrm>
-            <a:off x="6126480" y="6620256"/>
-            <a:ext cx="1737360" cy="237744"/>
-          </a:xfrm>
-          <a:prstGeom prst="rect">
-            <a:avLst/>
-          </a:prstGeom>
-          <a:solidFill>
-            <a:srgbClr val="4F417A"/>
-          </a:solidFill>
-          <a:ln w="12700">
-            <a:solidFill>
-              <a:srgbClr val="4F417A">
-                <a:alpha val="0"/>
-              </a:srgbClr>
-            </a:solidFill>
-            <a:prstDash val="solid"/>
-          </a:ln>
-        </p:spPr>
-      </p:sp>
-      <p:sp>
-        <p:nvSpPr>
-          <p:cNvPr id="29" name="Shape 27"/>
+          <p:cNvPr id="22" name="Shape 20"/>
           <p:cNvSpPr/>
           <p:nvPr/>
         </p:nvSpPr>
@@ -5111,7 +4854,7 @@
       </p:sp>
       <p:sp>
         <p:nvSpPr>
-          <p:cNvPr id="30" name="Text 28"/>
+          <p:cNvPr id="23" name="Text 21"/>
           <p:cNvSpPr/>
           <p:nvPr/>
         </p:nvSpPr>
@@ -5153,7 +4896,7 @@
       </p:sp>
       <p:sp>
         <p:nvSpPr>
-          <p:cNvPr id="31" name="Text 29"/>
+          <p:cNvPr id="24" name="Text 22"/>
           <p:cNvSpPr/>
           <p:nvPr/>
         </p:nvSpPr>
@@ -5195,7 +4938,7 @@
       </p:sp>
       <p:sp>
         <p:nvSpPr>
-          <p:cNvPr id="32" name="Text 30"/>
+          <p:cNvPr id="25" name="Text 23"/>
           <p:cNvSpPr/>
           <p:nvPr/>
         </p:nvSpPr>
@@ -5237,7 +4980,7 @@
       </p:sp>
       <p:sp>
         <p:nvSpPr>
-          <p:cNvPr id="33" name="Text 31"/>
+          <p:cNvPr id="26" name="Text 24"/>
           <p:cNvSpPr/>
           <p:nvPr/>
         </p:nvSpPr>
@@ -5388,8 +5131,327 @@
         </p:nvSpPr>
         <p:spPr>
           <a:xfrm>
-            <a:off x="548640" y="1691640"/>
-            <a:ext cx="1417320" cy="841248"/>
+            <a:off x="411480" y="1143000"/>
+            <a:ext cx="1508760" cy="868680"/>
+          </a:xfrm>
+          <a:prstGeom prst="roundRect">
+            <a:avLst/>
+          </a:prstGeom>
+          <a:solidFill>
+            <a:srgbClr val="FFFFFF"/>
+          </a:solidFill>
+          <a:ln w="12700">
+            <a:solidFill>
+              <a:srgbClr val="7A7099"/>
+            </a:solidFill>
+            <a:prstDash val="solid"/>
+          </a:ln>
+        </p:spPr>
+      </p:sp>
+      <p:sp>
+        <p:nvSpPr>
+          <p:cNvPr id="5" name="Text 3"/>
+          <p:cNvSpPr/>
+          <p:nvPr/>
+        </p:nvSpPr>
+        <p:spPr>
+          <a:xfrm>
+            <a:off x="411480" y="1143000"/>
+            <a:ext cx="1508760" cy="868680"/>
+          </a:xfrm>
+          <a:prstGeom prst="rect">
+            <a:avLst/>
+          </a:prstGeom>
+          <a:noFill/>
+          <a:ln/>
+        </p:spPr>
+        <p:txBody>
+          <a:bodyPr wrap="square" lIns="0" tIns="0" rIns="0" bIns="0" rtlCol="0" anchor="ctr">
+            <a:normAutofit/>
+          </a:bodyPr>
+          <a:lstStyle/>
+          <a:p>
+            <a:pPr algn="ctr" indent="0" marL="0">
+              <a:lnSpc>
+                <a:spcPct val="125000"/>
+              </a:lnSpc>
+              <a:buNone/>
+            </a:pPr>
+            <a:r>
+              <a:rPr lang="en-US" sz="1450" b="1" dirty="0">
+                <a:solidFill>
+                  <a:srgbClr val="1A1A1A"/>
+                </a:solidFill>
+                <a:latin typeface="Cambria" pitchFamily="34" charset="0"/>
+                <a:ea typeface="Cambria" pitchFamily="34" charset="-122"/>
+                <a:cs typeface="Cambria" pitchFamily="34" charset="-120"/>
+              </a:rPr>
+              <a:t>Câu ban đầu</a:t>
+            </a:r>
+            <a:endParaRPr lang="en-US" sz="1450" dirty="0"/>
+          </a:p>
+        </p:txBody>
+      </p:sp>
+      <p:sp>
+        <p:nvSpPr>
+          <p:cNvPr id="6" name="Shape 4"/>
+          <p:cNvSpPr/>
+          <p:nvPr/>
+        </p:nvSpPr>
+        <p:spPr>
+          <a:xfrm>
+            <a:off x="2011680" y="1581912"/>
+            <a:ext cx="347472" cy="0"/>
+          </a:xfrm>
+          <a:prstGeom prst="line">
+            <a:avLst/>
+          </a:prstGeom>
+          <a:noFill/>
+          <a:ln w="25400">
+            <a:solidFill>
+              <a:srgbClr val="4F417A"/>
+            </a:solidFill>
+            <a:prstDash val="solid"/>
+            <a:tailEnd type="triangle"/>
+          </a:ln>
+        </p:spPr>
+      </p:sp>
+      <p:sp>
+        <p:nvSpPr>
+          <p:cNvPr id="7" name="Shape 5"/>
+          <p:cNvSpPr/>
+          <p:nvPr/>
+        </p:nvSpPr>
+        <p:spPr>
+          <a:xfrm>
+            <a:off x="2450592" y="1051560"/>
+            <a:ext cx="1737360" cy="1051560"/>
+          </a:xfrm>
+          <a:prstGeom prst="roundRect">
+            <a:avLst/>
+          </a:prstGeom>
+          <a:solidFill>
+            <a:srgbClr val="F3F2F5"/>
+          </a:solidFill>
+          <a:ln w="12700">
+            <a:solidFill>
+              <a:srgbClr val="25194B"/>
+            </a:solidFill>
+            <a:prstDash val="solid"/>
+          </a:ln>
+        </p:spPr>
+      </p:sp>
+      <p:sp>
+        <p:nvSpPr>
+          <p:cNvPr id="8" name="Text 6"/>
+          <p:cNvSpPr/>
+          <p:nvPr/>
+        </p:nvSpPr>
+        <p:spPr>
+          <a:xfrm>
+            <a:off x="2450592" y="1051560"/>
+            <a:ext cx="1737360" cy="1051560"/>
+          </a:xfrm>
+          <a:prstGeom prst="rect">
+            <a:avLst/>
+          </a:prstGeom>
+          <a:noFill/>
+          <a:ln/>
+        </p:spPr>
+        <p:txBody>
+          <a:bodyPr wrap="square" lIns="0" tIns="0" rIns="0" bIns="0" rtlCol="0" anchor="ctr">
+            <a:normAutofit/>
+          </a:bodyPr>
+          <a:lstStyle/>
+          <a:p>
+            <a:pPr algn="ctr" indent="0" marL="0">
+              <a:lnSpc>
+                <a:spcPct val="125000"/>
+              </a:lnSpc>
+              <a:buNone/>
+            </a:pPr>
+            <a:r>
+              <a:rPr lang="en-US" sz="1400" b="1" dirty="0">
+                <a:solidFill>
+                  <a:srgbClr val="1A1A1A"/>
+                </a:solidFill>
+                <a:latin typeface="Cambria" pitchFamily="34" charset="0"/>
+                <a:ea typeface="Cambria" pitchFamily="34" charset="-122"/>
+                <a:cs typeface="Cambria" pitchFamily="34" charset="-120"/>
+              </a:rPr>
+              <a:t>Truy hồi 4 câu</a:t>
+            </a:r>
+            <a:endParaRPr lang="en-US" sz="1400" dirty="0"/>
+          </a:p>
+          <a:p>
+            <a:pPr algn="ctr" indent="0" marL="0">
+              <a:lnSpc>
+                <a:spcPct val="125000"/>
+              </a:lnSpc>
+              <a:buNone/>
+            </a:pPr>
+            <a:r>
+              <a:rPr lang="en-US" sz="1400" b="1" dirty="0">
+                <a:solidFill>
+                  <a:srgbClr val="1A1A1A"/>
+                </a:solidFill>
+                <a:latin typeface="Cambria" pitchFamily="34" charset="0"/>
+                <a:ea typeface="Cambria" pitchFamily="34" charset="-122"/>
+                <a:cs typeface="Cambria" pitchFamily="34" charset="-120"/>
+              </a:rPr>
+              <a:t>ví dụ từ train</a:t>
+            </a:r>
+            <a:endParaRPr lang="en-US" sz="1400" dirty="0"/>
+          </a:p>
+        </p:txBody>
+      </p:sp>
+      <p:sp>
+        <p:nvSpPr>
+          <p:cNvPr id="9" name="Shape 7"/>
+          <p:cNvSpPr/>
+          <p:nvPr/>
+        </p:nvSpPr>
+        <p:spPr>
+          <a:xfrm>
+            <a:off x="4279392" y="1581912"/>
+            <a:ext cx="347472" cy="0"/>
+          </a:xfrm>
+          <a:prstGeom prst="line">
+            <a:avLst/>
+          </a:prstGeom>
+          <a:noFill/>
+          <a:ln w="25400">
+            <a:solidFill>
+              <a:srgbClr val="4F417A"/>
+            </a:solidFill>
+            <a:prstDash val="solid"/>
+            <a:tailEnd type="triangle"/>
+          </a:ln>
+        </p:spPr>
+      </p:sp>
+      <p:sp>
+        <p:nvSpPr>
+          <p:cNvPr id="10" name="Shape 8"/>
+          <p:cNvSpPr/>
+          <p:nvPr/>
+        </p:nvSpPr>
+        <p:spPr>
+          <a:xfrm>
+            <a:off x="4718304" y="1051560"/>
+            <a:ext cx="1417320" cy="1051560"/>
+          </a:xfrm>
+          <a:prstGeom prst="roundRect">
+            <a:avLst/>
+          </a:prstGeom>
+          <a:solidFill>
+            <a:srgbClr val="F3F2F5"/>
+          </a:solidFill>
+          <a:ln w="12700">
+            <a:solidFill>
+              <a:srgbClr val="4F417A"/>
+            </a:solidFill>
+            <a:prstDash val="solid"/>
+          </a:ln>
+        </p:spPr>
+      </p:sp>
+      <p:sp>
+        <p:nvSpPr>
+          <p:cNvPr id="11" name="Text 9"/>
+          <p:cNvSpPr/>
+          <p:nvPr/>
+        </p:nvSpPr>
+        <p:spPr>
+          <a:xfrm>
+            <a:off x="4718304" y="1051560"/>
+            <a:ext cx="1417320" cy="1051560"/>
+          </a:xfrm>
+          <a:prstGeom prst="rect">
+            <a:avLst/>
+          </a:prstGeom>
+          <a:noFill/>
+          <a:ln/>
+        </p:spPr>
+        <p:txBody>
+          <a:bodyPr wrap="square" lIns="0" tIns="0" rIns="0" bIns="0" rtlCol="0" anchor="ctr">
+            <a:normAutofit/>
+          </a:bodyPr>
+          <a:lstStyle/>
+          <a:p>
+            <a:pPr algn="ctr" indent="0" marL="0">
+              <a:lnSpc>
+                <a:spcPct val="125000"/>
+              </a:lnSpc>
+              <a:buNone/>
+            </a:pPr>
+            <a:r>
+              <a:rPr lang="en-US" sz="1400" b="1" dirty="0">
+                <a:solidFill>
+                  <a:srgbClr val="1A1A1A"/>
+                </a:solidFill>
+                <a:latin typeface="Cambria" pitchFamily="34" charset="0"/>
+                <a:ea typeface="Cambria" pitchFamily="34" charset="-122"/>
+                <a:cs typeface="Cambria" pitchFamily="34" charset="-120"/>
+              </a:rPr>
+              <a:t>Sinh câu</a:t>
+            </a:r>
+            <a:endParaRPr lang="en-US" sz="1400" dirty="0"/>
+          </a:p>
+          <a:p>
+            <a:pPr algn="ctr" indent="0" marL="0">
+              <a:lnSpc>
+                <a:spcPct val="125000"/>
+              </a:lnSpc>
+              <a:buNone/>
+            </a:pPr>
+            <a:r>
+              <a:rPr lang="en-US" sz="1400" b="1" dirty="0">
+                <a:solidFill>
+                  <a:srgbClr val="1A1A1A"/>
+                </a:solidFill>
+                <a:latin typeface="Cambria" pitchFamily="34" charset="0"/>
+                <a:ea typeface="Cambria" pitchFamily="34" charset="-122"/>
+                <a:cs typeface="Cambria" pitchFamily="34" charset="-120"/>
+              </a:rPr>
+              <a:t>ứng viên</a:t>
+            </a:r>
+            <a:endParaRPr lang="en-US" sz="1400" dirty="0"/>
+          </a:p>
+        </p:txBody>
+      </p:sp>
+      <p:sp>
+        <p:nvSpPr>
+          <p:cNvPr id="12" name="Shape 10"/>
+          <p:cNvSpPr/>
+          <p:nvPr/>
+        </p:nvSpPr>
+        <p:spPr>
+          <a:xfrm>
+            <a:off x="6227064" y="1581912"/>
+            <a:ext cx="347472" cy="0"/>
+          </a:xfrm>
+          <a:prstGeom prst="line">
+            <a:avLst/>
+          </a:prstGeom>
+          <a:noFill/>
+          <a:ln w="25400">
+            <a:solidFill>
+              <a:srgbClr val="4F417A"/>
+            </a:solidFill>
+            <a:prstDash val="solid"/>
+            <a:tailEnd type="triangle"/>
+          </a:ln>
+        </p:spPr>
+      </p:sp>
+      <p:sp>
+        <p:nvSpPr>
+          <p:cNvPr id="13" name="Shape 11"/>
+          <p:cNvSpPr/>
+          <p:nvPr/>
+        </p:nvSpPr>
+        <p:spPr>
+          <a:xfrm>
+            <a:off x="6665976" y="960120"/>
+            <a:ext cx="2011680" cy="1234440"/>
           </a:xfrm>
           <a:prstGeom prst="roundRect">
             <a:avLst/>
@@ -5407,14 +5469,14 @@
       </p:sp>
       <p:sp>
         <p:nvSpPr>
-          <p:cNvPr id="5" name="Text 3"/>
-          <p:cNvSpPr/>
-          <p:nvPr/>
-        </p:nvSpPr>
-        <p:spPr>
-          <a:xfrm>
-            <a:off x="548640" y="1691640"/>
-            <a:ext cx="1417320" cy="841248"/>
+          <p:cNvPr id="14" name="Text 12"/>
+          <p:cNvSpPr/>
+          <p:nvPr/>
+        </p:nvSpPr>
+        <p:spPr>
+          <a:xfrm>
+            <a:off x="6665976" y="960120"/>
+            <a:ext cx="2011680" cy="1234440"/>
           </a:xfrm>
           <a:prstGeom prst="rect">
             <a:avLst/>
@@ -5435,7 +5497,7 @@
               <a:buNone/>
             </a:pPr>
             <a:r>
-              <a:rPr lang="en-US" sz="1600" b="1" dirty="0">
+              <a:rPr lang="en-US" sz="1400" b="1" dirty="0">
                 <a:solidFill>
                   <a:srgbClr val="1A1A1A"/>
                 </a:solidFill>
@@ -5443,92 +5505,19 @@
                 <a:ea typeface="Cambria" pitchFamily="34" charset="-122"/>
                 <a:cs typeface="Cambria" pitchFamily="34" charset="-120"/>
               </a:rPr>
-              <a:t>1 đầu vào</a:t>
-            </a:r>
-            <a:endParaRPr lang="en-US" sz="1600" dirty="0"/>
-          </a:p>
-        </p:txBody>
-      </p:sp>
-      <p:sp>
-        <p:nvSpPr>
-          <p:cNvPr id="6" name="Shape 4"/>
-          <p:cNvSpPr/>
-          <p:nvPr/>
-        </p:nvSpPr>
-        <p:spPr>
-          <a:xfrm>
-            <a:off x="2084832" y="2112264"/>
-            <a:ext cx="384048" cy="0"/>
-          </a:xfrm>
-          <a:prstGeom prst="line">
-            <a:avLst/>
-          </a:prstGeom>
-          <a:noFill/>
-          <a:ln w="25400">
-            <a:solidFill>
-              <a:srgbClr val="4F417A"/>
-            </a:solidFill>
-            <a:prstDash val="solid"/>
-            <a:tailEnd type="triangle"/>
-          </a:ln>
-        </p:spPr>
-      </p:sp>
-      <p:sp>
-        <p:nvSpPr>
-          <p:cNvPr id="7" name="Shape 5"/>
-          <p:cNvSpPr/>
-          <p:nvPr/>
-        </p:nvSpPr>
-        <p:spPr>
-          <a:xfrm>
-            <a:off x="2578608" y="1517904"/>
-            <a:ext cx="1600200" cy="1188720"/>
-          </a:xfrm>
-          <a:prstGeom prst="roundRect">
-            <a:avLst/>
-          </a:prstGeom>
-          <a:solidFill>
-            <a:srgbClr val="F3F2F5"/>
-          </a:solidFill>
-          <a:ln w="12700">
-            <a:solidFill>
-              <a:srgbClr val="25194B"/>
-            </a:solidFill>
-            <a:prstDash val="solid"/>
-          </a:ln>
-        </p:spPr>
-      </p:sp>
-      <p:sp>
-        <p:nvSpPr>
-          <p:cNvPr id="8" name="Text 6"/>
-          <p:cNvSpPr/>
-          <p:nvPr/>
-        </p:nvSpPr>
-        <p:spPr>
-          <a:xfrm>
-            <a:off x="2578608" y="1517904"/>
-            <a:ext cx="1600200" cy="1188720"/>
-          </a:xfrm>
-          <a:prstGeom prst="rect">
-            <a:avLst/>
-          </a:prstGeom>
-          <a:noFill/>
-          <a:ln/>
-        </p:spPr>
-        <p:txBody>
-          <a:bodyPr wrap="square" lIns="0" tIns="0" rIns="0" bIns="0" rtlCol="0" anchor="ctr">
-            <a:normAutofit/>
-          </a:bodyPr>
-          <a:lstStyle/>
-          <a:p>
-            <a:pPr algn="ctr" indent="0" marL="0">
-              <a:lnSpc>
-                <a:spcPct val="125000"/>
-              </a:lnSpc>
-              <a:buNone/>
-            </a:pPr>
-            <a:r>
-              <a:rPr lang="en-US" sz="1600" b="1" dirty="0">
+              <a:t>Kiểm tra</a:t>
+            </a:r>
+            <a:endParaRPr lang="en-US" sz="1400" dirty="0"/>
+          </a:p>
+          <a:p>
+            <a:pPr algn="ctr" indent="0" marL="0">
+              <a:lnSpc>
+                <a:spcPct val="125000"/>
+              </a:lnSpc>
+              <a:buNone/>
+            </a:pPr>
+            <a:r>
+              <a:rPr lang="en-US" sz="1400" b="1" dirty="0">
                 <a:solidFill>
                   <a:srgbClr val="1A1A1A"/>
                 </a:solidFill>
@@ -5536,66 +5525,22 @@
                 <a:ea typeface="Cambria" pitchFamily="34" charset="-122"/>
                 <a:cs typeface="Cambria" pitchFamily="34" charset="-120"/>
               </a:rPr>
-              <a:t>8 câu</a:t>
-            </a:r>
-            <a:endParaRPr lang="en-US" sz="1600" dirty="0"/>
-          </a:p>
-          <a:p>
-            <a:pPr algn="ctr" indent="0" marL="0">
-              <a:lnSpc>
-                <a:spcPct val="125000"/>
-              </a:lnSpc>
-              <a:buNone/>
-            </a:pPr>
-            <a:r>
-              <a:rPr lang="en-US" sz="1600" b="1" dirty="0">
-                <a:solidFill>
-                  <a:srgbClr val="1A1A1A"/>
-                </a:solidFill>
-                <a:latin typeface="Cambria" pitchFamily="34" charset="0"/>
-                <a:ea typeface="Cambria" pitchFamily="34" charset="-122"/>
-                <a:cs typeface="Cambria" pitchFamily="34" charset="-120"/>
-              </a:rPr>
-              <a:t>hướng dẫn</a:t>
-            </a:r>
-            <a:endParaRPr lang="en-US" sz="1600" dirty="0"/>
-          </a:p>
-        </p:txBody>
-      </p:sp>
-      <p:sp>
-        <p:nvSpPr>
-          <p:cNvPr id="9" name="Shape 7"/>
-          <p:cNvSpPr/>
-          <p:nvPr/>
-        </p:nvSpPr>
-        <p:spPr>
-          <a:xfrm>
-            <a:off x="4297680" y="2112264"/>
-            <a:ext cx="384048" cy="0"/>
-          </a:xfrm>
-          <a:prstGeom prst="line">
-            <a:avLst/>
-          </a:prstGeom>
-          <a:noFill/>
-          <a:ln w="25400">
-            <a:solidFill>
-              <a:srgbClr val="4F417A"/>
-            </a:solidFill>
-            <a:prstDash val="solid"/>
-            <a:tailEnd type="triangle"/>
-          </a:ln>
-        </p:spPr>
-      </p:sp>
-      <p:sp>
-        <p:nvSpPr>
-          <p:cNvPr id="10" name="Shape 8"/>
-          <p:cNvSpPr/>
-          <p:nvPr/>
-        </p:nvSpPr>
-        <p:spPr>
-          <a:xfrm>
-            <a:off x="4791456" y="1517904"/>
-            <a:ext cx="1645920" cy="1188720"/>
+              <a:t>2 điều kiện chọn lọc</a:t>
+            </a:r>
+            <a:endParaRPr lang="en-US" sz="1400" dirty="0"/>
+          </a:p>
+        </p:txBody>
+      </p:sp>
+      <p:sp>
+        <p:nvSpPr>
+          <p:cNvPr id="15" name="Shape 13"/>
+          <p:cNvSpPr/>
+          <p:nvPr/>
+        </p:nvSpPr>
+        <p:spPr>
+          <a:xfrm>
+            <a:off x="502920" y="3127248"/>
+            <a:ext cx="3840480" cy="1078992"/>
           </a:xfrm>
           <a:prstGeom prst="roundRect">
             <a:avLst/>
@@ -5613,14 +5558,14 @@
       </p:sp>
       <p:sp>
         <p:nvSpPr>
-          <p:cNvPr id="11" name="Text 9"/>
-          <p:cNvSpPr/>
-          <p:nvPr/>
-        </p:nvSpPr>
-        <p:spPr>
-          <a:xfrm>
-            <a:off x="4791456" y="1517904"/>
-            <a:ext cx="1645920" cy="1188720"/>
+          <p:cNvPr id="16" name="Text 14"/>
+          <p:cNvSpPr/>
+          <p:nvPr/>
+        </p:nvSpPr>
+        <p:spPr>
+          <a:xfrm>
+            <a:off x="667512" y="3127248"/>
+            <a:ext cx="3511296" cy="1078992"/>
           </a:xfrm>
           <a:prstGeom prst="rect">
             <a:avLst/>
@@ -5641,7 +5586,7 @@
               <a:buNone/>
             </a:pPr>
             <a:r>
-              <a:rPr lang="en-US" sz="1500" b="1" dirty="0">
+              <a:rPr lang="en-US" sz="1400" b="1" dirty="0">
                 <a:solidFill>
                   <a:srgbClr val="1A1A1A"/>
                 </a:solidFill>
@@ -5649,72 +5594,166 @@
                 <a:ea typeface="Cambria" pitchFamily="34" charset="-122"/>
                 <a:cs typeface="Cambria" pitchFamily="34" charset="-120"/>
               </a:rPr>
-              <a:t>SPICE</a:t>
-            </a:r>
-            <a:endParaRPr lang="en-US" sz="1500" dirty="0"/>
-          </a:p>
-          <a:p>
-            <a:pPr algn="ctr" indent="0" marL="0">
-              <a:lnSpc>
-                <a:spcPct val="125000"/>
-              </a:lnSpc>
-              <a:buNone/>
-            </a:pPr>
-            <a:r>
-              <a:rPr lang="en-US" sz="1500" b="1" dirty="0">
-                <a:solidFill>
-                  <a:srgbClr val="1A1A1A"/>
-                </a:solidFill>
-                <a:latin typeface="Cambria" pitchFamily="34" charset="0"/>
-                <a:ea typeface="Cambria" pitchFamily="34" charset="-122"/>
-                <a:cs typeface="Cambria" pitchFamily="34" charset="-120"/>
-              </a:rPr>
-              <a:t>− phạt độ dài</a:t>
-            </a:r>
-            <a:endParaRPr lang="en-US" sz="1500" dirty="0"/>
-          </a:p>
-        </p:txBody>
-      </p:sp>
-      <p:sp>
-        <p:nvSpPr>
-          <p:cNvPr id="12" name="Shape 10"/>
-          <p:cNvSpPr/>
-          <p:nvPr/>
-        </p:nvSpPr>
-        <p:spPr>
-          <a:xfrm>
-            <a:off x="6556248" y="2112264"/>
-            <a:ext cx="384048" cy="0"/>
-          </a:xfrm>
-          <a:prstGeom prst="line">
-            <a:avLst/>
-          </a:prstGeom>
-          <a:noFill/>
-          <a:ln w="25400">
+              <a:t>1 · Câu ứng viên phải giống hoàn toàn một trong bốn câu ví dụ được truy hồi.</a:t>
+            </a:r>
+            <a:endParaRPr lang="en-US" sz="1400" dirty="0"/>
+          </a:p>
+        </p:txBody>
+      </p:sp>
+      <p:sp>
+        <p:nvSpPr>
+          <p:cNvPr id="17" name="Shape 15"/>
+          <p:cNvSpPr/>
+          <p:nvPr/>
+        </p:nvSpPr>
+        <p:spPr>
+          <a:xfrm>
+            <a:off x="4800600" y="3127248"/>
+            <a:ext cx="3840480" cy="1078992"/>
+          </a:xfrm>
+          <a:prstGeom prst="roundRect">
+            <a:avLst/>
+          </a:prstGeom>
+          <a:solidFill>
+            <a:srgbClr val="F3F2F5"/>
+          </a:solidFill>
+          <a:ln w="12700">
             <a:solidFill>
               <a:srgbClr val="4F417A"/>
             </a:solidFill>
             <a:prstDash val="solid"/>
-            <a:tailEnd type="triangle"/>
           </a:ln>
         </p:spPr>
       </p:sp>
       <p:sp>
         <p:nvSpPr>
-          <p:cNvPr id="13" name="Shape 11"/>
-          <p:cNvSpPr/>
-          <p:nvPr/>
-        </p:nvSpPr>
-        <p:spPr>
-          <a:xfrm>
-            <a:off x="7050024" y="1463040"/>
-            <a:ext cx="1554480" cy="1298448"/>
+          <p:cNvPr id="18" name="Text 16"/>
+          <p:cNvSpPr/>
+          <p:nvPr/>
+        </p:nvSpPr>
+        <p:spPr>
+          <a:xfrm>
+            <a:off x="4965192" y="3127248"/>
+            <a:ext cx="3511296" cy="1078992"/>
+          </a:xfrm>
+          <a:prstGeom prst="rect">
+            <a:avLst/>
+          </a:prstGeom>
+          <a:noFill/>
+          <a:ln/>
+        </p:spPr>
+        <p:txBody>
+          <a:bodyPr wrap="square" lIns="0" tIns="0" rIns="0" bIns="0" rtlCol="0" anchor="ctr">
+            <a:normAutofit/>
+          </a:bodyPr>
+          <a:lstStyle/>
+          <a:p>
+            <a:pPr algn="ctr" indent="0" marL="0">
+              <a:lnSpc>
+                <a:spcPct val="125000"/>
+              </a:lnSpc>
+              <a:buNone/>
+            </a:pPr>
+            <a:r>
+              <a:rPr lang="en-US" sz="1400" b="1" dirty="0">
+                <a:solidFill>
+                  <a:srgbClr val="1A1A1A"/>
+                </a:solidFill>
+                <a:latin typeface="Cambria" pitchFamily="34" charset="0"/>
+                <a:ea typeface="Cambria" pitchFamily="34" charset="-122"/>
+                <a:cs typeface="Cambria" pitchFamily="34" charset="-120"/>
+              </a:rPr>
+              <a:t>2 · Động từ đầu câu phải cùng lớp thao tác với câu ban đầu.</a:t>
+            </a:r>
+            <a:endParaRPr lang="en-US" sz="1400" dirty="0"/>
+          </a:p>
+        </p:txBody>
+      </p:sp>
+      <p:sp>
+        <p:nvSpPr>
+          <p:cNvPr id="19" name="Shape 17"/>
+          <p:cNvSpPr/>
+          <p:nvPr/>
+        </p:nvSpPr>
+        <p:spPr>
+          <a:xfrm>
+            <a:off x="1645920" y="4663440"/>
+            <a:ext cx="2560320" cy="749808"/>
           </a:xfrm>
           <a:prstGeom prst="roundRect">
             <a:avLst/>
           </a:prstGeom>
           <a:solidFill>
             <a:srgbClr val="F3F2F5"/>
+          </a:solidFill>
+          <a:ln w="12700">
+            <a:solidFill>
+              <a:srgbClr val="4F417A"/>
+            </a:solidFill>
+            <a:prstDash val="solid"/>
+          </a:ln>
+        </p:spPr>
+      </p:sp>
+      <p:sp>
+        <p:nvSpPr>
+          <p:cNvPr id="20" name="Text 18"/>
+          <p:cNvSpPr/>
+          <p:nvPr/>
+        </p:nvSpPr>
+        <p:spPr>
+          <a:xfrm>
+            <a:off x="1645920" y="4663440"/>
+            <a:ext cx="2560320" cy="749808"/>
+          </a:xfrm>
+          <a:prstGeom prst="rect">
+            <a:avLst/>
+          </a:prstGeom>
+          <a:noFill/>
+          <a:ln/>
+        </p:spPr>
+        <p:txBody>
+          <a:bodyPr wrap="square" lIns="0" tIns="0" rIns="0" bIns="0" rtlCol="0" anchor="ctr">
+            <a:normAutofit/>
+          </a:bodyPr>
+          <a:lstStyle/>
+          <a:p>
+            <a:pPr algn="ctr" indent="0" marL="0">
+              <a:lnSpc>
+                <a:spcPct val="125000"/>
+              </a:lnSpc>
+              <a:buNone/>
+            </a:pPr>
+            <a:r>
+              <a:rPr lang="en-US" sz="1400" b="1" dirty="0">
+                <a:solidFill>
+                  <a:srgbClr val="1A1A1A"/>
+                </a:solidFill>
+                <a:latin typeface="Cambria" pitchFamily="34" charset="0"/>
+                <a:ea typeface="Cambria" pitchFamily="34" charset="-122"/>
+                <a:cs typeface="Cambria" pitchFamily="34" charset="-120"/>
+              </a:rPr>
+              <a:t>Đủ điều kiện → dùng câu mới</a:t>
+            </a:r>
+            <a:endParaRPr lang="en-US" sz="1400" dirty="0"/>
+          </a:p>
+        </p:txBody>
+      </p:sp>
+      <p:sp>
+        <p:nvSpPr>
+          <p:cNvPr id="21" name="Shape 19"/>
+          <p:cNvSpPr/>
+          <p:nvPr/>
+        </p:nvSpPr>
+        <p:spPr>
+          <a:xfrm>
+            <a:off x="4937760" y="4663440"/>
+            <a:ext cx="2560320" cy="749808"/>
+          </a:xfrm>
+          <a:prstGeom prst="roundRect">
+            <a:avLst/>
+          </a:prstGeom>
+          <a:solidFill>
+            <a:srgbClr val="FFFFFF"/>
           </a:solidFill>
           <a:ln w="12700">
             <a:solidFill>
@@ -5726,14 +5765,14 @@
       </p:sp>
       <p:sp>
         <p:nvSpPr>
-          <p:cNvPr id="14" name="Text 12"/>
-          <p:cNvSpPr/>
-          <p:nvPr/>
-        </p:nvSpPr>
-        <p:spPr>
-          <a:xfrm>
-            <a:off x="7050024" y="1463040"/>
-            <a:ext cx="1554480" cy="1298448"/>
+          <p:cNvPr id="22" name="Text 20"/>
+          <p:cNvSpPr/>
+          <p:nvPr/>
+        </p:nvSpPr>
+        <p:spPr>
+          <a:xfrm>
+            <a:off x="4937760" y="4663440"/>
+            <a:ext cx="2560320" cy="749808"/>
           </a:xfrm>
           <a:prstGeom prst="rect">
             <a:avLst/>
@@ -5754,7 +5793,7 @@
               <a:buNone/>
             </a:pPr>
             <a:r>
-              <a:rPr lang="en-US" sz="1500" b="1" dirty="0">
+              <a:rPr lang="en-US" sz="1400" b="1" dirty="0">
                 <a:solidFill>
                   <a:srgbClr val="1A1A1A"/>
                 </a:solidFill>
@@ -5762,138 +5801,7 @@
                 <a:ea typeface="Cambria" pitchFamily="34" charset="-122"/>
                 <a:cs typeface="Cambria" pitchFamily="34" charset="-120"/>
               </a:rPr>
-              <a:t>Cập nhật</a:t>
-            </a:r>
-            <a:endParaRPr lang="en-US" sz="1500" dirty="0"/>
-          </a:p>
-          <a:p>
-            <a:pPr algn="ctr" indent="0" marL="0">
-              <a:lnSpc>
-                <a:spcPct val="125000"/>
-              </a:lnSpc>
-              <a:buNone/>
-            </a:pPr>
-            <a:r>
-              <a:rPr lang="en-US" sz="1500" b="1" dirty="0">
-                <a:solidFill>
-                  <a:srgbClr val="1A1A1A"/>
-                </a:solidFill>
-                <a:latin typeface="Cambria" pitchFamily="34" charset="0"/>
-                <a:ea typeface="Cambria" pitchFamily="34" charset="-122"/>
-                <a:cs typeface="Cambria" pitchFamily="34" charset="-120"/>
-              </a:rPr>
-              <a:t>GRPO</a:t>
-            </a:r>
-            <a:endParaRPr lang="en-US" sz="1500" dirty="0"/>
-          </a:p>
-        </p:txBody>
-      </p:sp>
-      <p:sp>
-        <p:nvSpPr>
-          <p:cNvPr id="15" name="Shape 13"/>
-          <p:cNvSpPr/>
-          <p:nvPr/>
-        </p:nvSpPr>
-        <p:spPr>
-          <a:xfrm>
-            <a:off x="502920" y="3337560"/>
-            <a:ext cx="8138160" cy="1572768"/>
-          </a:xfrm>
-          <a:prstGeom prst="roundRect">
-            <a:avLst/>
-          </a:prstGeom>
-          <a:solidFill>
-            <a:srgbClr val="F3F2F5"/>
-          </a:solidFill>
-          <a:ln w="12700">
-            <a:solidFill>
-              <a:srgbClr val="7A7099"/>
-            </a:solidFill>
-            <a:prstDash val="solid"/>
-          </a:ln>
-        </p:spPr>
-      </p:sp>
-      <p:sp>
-        <p:nvSpPr>
-          <p:cNvPr id="16" name="Text 14"/>
-          <p:cNvSpPr/>
-          <p:nvPr/>
-        </p:nvSpPr>
-        <p:spPr>
-          <a:xfrm>
-            <a:off x="704088" y="3566160"/>
-            <a:ext cx="1965960" cy="320040"/>
-          </a:xfrm>
-          <a:prstGeom prst="rect">
-            <a:avLst/>
-          </a:prstGeom>
-          <a:noFill/>
-          <a:ln/>
-        </p:spPr>
-        <p:txBody>
-          <a:bodyPr wrap="square" lIns="0" tIns="0" rIns="0" bIns="0" rtlCol="0" anchor="ctr"/>
-          <a:lstStyle/>
-          <a:p>
-            <a:pPr indent="0" marL="0">
-              <a:lnSpc>
-                <a:spcPct val="125000"/>
-              </a:lnSpc>
-              <a:buNone/>
-            </a:pPr>
-            <a:r>
-              <a:rPr lang="en-US" sz="1550" b="1" dirty="0">
-                <a:solidFill>
-                  <a:srgbClr val="25194B"/>
-                </a:solidFill>
-                <a:latin typeface="Cambria" pitchFamily="34" charset="0"/>
-                <a:ea typeface="Cambria" pitchFamily="34" charset="-122"/>
-                <a:cs typeface="Cambria" pitchFamily="34" charset="-120"/>
-              </a:rPr>
-              <a:t>Vai trò của SPICE</a:t>
-            </a:r>
-            <a:endParaRPr lang="en-US" sz="1550" dirty="0"/>
-          </a:p>
-        </p:txBody>
-      </p:sp>
-      <p:sp>
-        <p:nvSpPr>
-          <p:cNvPr id="17" name="Text 15"/>
-          <p:cNvSpPr/>
-          <p:nvPr/>
-        </p:nvSpPr>
-        <p:spPr>
-          <a:xfrm>
-            <a:off x="2441448" y="3429000"/>
-            <a:ext cx="5943600" cy="804672"/>
-          </a:xfrm>
-          <a:prstGeom prst="rect">
-            <a:avLst/>
-          </a:prstGeom>
-          <a:noFill/>
-          <a:ln/>
-        </p:spPr>
-        <p:txBody>
-          <a:bodyPr wrap="square" lIns="0" tIns="0" rIns="0" bIns="0" rtlCol="0" anchor="ctr">
-            <a:normAutofit/>
-          </a:bodyPr>
-          <a:lstStyle/>
-          <a:p>
-            <a:pPr indent="0" marL="0">
-              <a:lnSpc>
-                <a:spcPct val="125000"/>
-              </a:lnSpc>
-              <a:buNone/>
-            </a:pPr>
-            <a:r>
-              <a:rPr lang="en-US" sz="1400" dirty="0">
-                <a:solidFill>
-                  <a:srgbClr val="1A1A1A"/>
-                </a:solidFill>
-                <a:latin typeface="Cambria" pitchFamily="34" charset="0"/>
-                <a:ea typeface="Cambria" pitchFamily="34" charset="-122"/>
-                <a:cs typeface="Cambria" pitchFamily="34" charset="-120"/>
-              </a:rPr>
-              <a:t>SPICE ưu tiên mức đúng về nội dung thay vì chỉ mức giống nhau về câu chữ. Nhờ đó, tín hiệu huấn luyện tập trung hơn vào đối tượng và quan hệ cần mô tả.</a:t>
+              <a:t>Không đủ → giữ câu ban đầu</a:t>
             </a:r>
             <a:endParaRPr lang="en-US" sz="1400" dirty="0"/>
           </a:p>
@@ -5901,49 +5809,7 @@
       </p:sp>
       <p:sp>
         <p:nvSpPr>
-          <p:cNvPr id="18" name="Text 16"/>
-          <p:cNvSpPr/>
-          <p:nvPr/>
-        </p:nvSpPr>
-        <p:spPr>
-          <a:xfrm>
-            <a:off x="502920" y="5321808"/>
-            <a:ext cx="8138160" cy="393192"/>
-          </a:xfrm>
-          <a:prstGeom prst="rect">
-            <a:avLst/>
-          </a:prstGeom>
-          <a:noFill/>
-          <a:ln/>
-        </p:spPr>
-        <p:txBody>
-          <a:bodyPr wrap="square" lIns="0" tIns="0" rIns="0" bIns="0" rtlCol="0" anchor="ctr"/>
-          <a:lstStyle/>
-          <a:p>
-            <a:pPr algn="ctr" indent="0" marL="0">
-              <a:lnSpc>
-                <a:spcPct val="125000"/>
-              </a:lnSpc>
-              <a:buNone/>
-            </a:pPr>
-            <a:r>
-              <a:rPr lang="en-US" sz="1360" b="1" dirty="0">
-                <a:solidFill>
-                  <a:srgbClr val="25194B"/>
-                </a:solidFill>
-                <a:latin typeface="Cambria" pitchFamily="34" charset="0"/>
-                <a:ea typeface="Cambria" pitchFamily="34" charset="-122"/>
-                <a:cs typeface="Cambria" pitchFamily="34" charset="-120"/>
-              </a:rPr>
-              <a:t>500 bước cập nhật từ S1 · nhánh đối chứng dùng cùng cấu hình huấn luyện.</a:t>
-            </a:r>
-            <a:endParaRPr lang="en-US" sz="1360" dirty="0"/>
-          </a:p>
-        </p:txBody>
-      </p:sp>
-      <p:sp>
-        <p:nvSpPr>
-          <p:cNvPr id="19" name="Shape 17"/>
+          <p:cNvPr id="23" name="Shape 21"/>
           <p:cNvSpPr/>
           <p:nvPr/>
         </p:nvSpPr>
@@ -5970,7 +5836,7 @@
       </p:sp>
       <p:sp>
         <p:nvSpPr>
-          <p:cNvPr id="20" name="Shape 18"/>
+          <p:cNvPr id="24" name="Shape 22"/>
           <p:cNvSpPr/>
           <p:nvPr/>
         </p:nvSpPr>
@@ -5997,7 +5863,7 @@
       </p:sp>
       <p:sp>
         <p:nvSpPr>
-          <p:cNvPr id="21" name="Shape 19"/>
+          <p:cNvPr id="25" name="Shape 23"/>
           <p:cNvSpPr/>
           <p:nvPr/>
         </p:nvSpPr>
@@ -6024,7 +5890,7 @@
       </p:sp>
       <p:sp>
         <p:nvSpPr>
-          <p:cNvPr id="22" name="Shape 20"/>
+          <p:cNvPr id="26" name="Shape 24"/>
           <p:cNvSpPr/>
           <p:nvPr/>
         </p:nvSpPr>
@@ -6051,7 +5917,7 @@
       </p:sp>
       <p:sp>
         <p:nvSpPr>
-          <p:cNvPr id="23" name="Text 21"/>
+          <p:cNvPr id="27" name="Text 25"/>
           <p:cNvSpPr/>
           <p:nvPr/>
         </p:nvSpPr>
@@ -6093,7 +5959,7 @@
       </p:sp>
       <p:sp>
         <p:nvSpPr>
-          <p:cNvPr id="24" name="Text 22"/>
+          <p:cNvPr id="28" name="Text 26"/>
           <p:cNvSpPr/>
           <p:nvPr/>
         </p:nvSpPr>
@@ -6135,7 +6001,7 @@
       </p:sp>
       <p:sp>
         <p:nvSpPr>
-          <p:cNvPr id="25" name="Text 23"/>
+          <p:cNvPr id="29" name="Text 27"/>
           <p:cNvSpPr/>
           <p:nvPr/>
         </p:nvSpPr>
@@ -6177,7 +6043,7 @@
       </p:sp>
       <p:sp>
         <p:nvSpPr>
-          <p:cNvPr id="26" name="Text 24"/>
+          <p:cNvPr id="30" name="Text 28"/>
           <p:cNvSpPr/>
           <p:nvPr/>
         </p:nvSpPr>
@@ -6328,8 +6194,50 @@
         </p:nvSpPr>
         <p:spPr>
           <a:xfrm>
-            <a:off x="502920" y="868680"/>
-            <a:ext cx="8138160" cy="502920"/>
+            <a:off x="566928" y="1325880"/>
+            <a:ext cx="1828800" cy="502920"/>
+          </a:xfrm>
+          <a:prstGeom prst="rect">
+            <a:avLst/>
+          </a:prstGeom>
+          <a:noFill/>
+          <a:ln/>
+        </p:spPr>
+        <p:txBody>
+          <a:bodyPr wrap="square" lIns="0" tIns="0" rIns="0" bIns="0" rtlCol="0" anchor="ctr"/>
+          <a:lstStyle/>
+          <a:p>
+            <a:pPr algn="ctr" indent="0" marL="0">
+              <a:lnSpc>
+                <a:spcPct val="125000"/>
+              </a:lnSpc>
+              <a:buNone/>
+            </a:pPr>
+            <a:r>
+              <a:rPr lang="en-US" sz="2400" b="1" dirty="0">
+                <a:solidFill>
+                  <a:srgbClr val="7A7099"/>
+                </a:solidFill>
+                <a:latin typeface="Cambria" pitchFamily="34" charset="0"/>
+                <a:ea typeface="Cambria" pitchFamily="34" charset="-122"/>
+                <a:cs typeface="Cambria" pitchFamily="34" charset="-120"/>
+              </a:rPr>
+              <a:t>47,59%</a:t>
+            </a:r>
+            <a:endParaRPr lang="en-US" sz="2400" dirty="0"/>
+          </a:p>
+        </p:txBody>
+      </p:sp>
+      <p:sp>
+        <p:nvSpPr>
+          <p:cNvPr id="5" name="Text 3"/>
+          <p:cNvSpPr/>
+          <p:nvPr/>
+        </p:nvSpPr>
+        <p:spPr>
+          <a:xfrm>
+            <a:off x="566928" y="1856232"/>
+            <a:ext cx="1828800" cy="475488"/>
           </a:xfrm>
           <a:prstGeom prst="rect">
             <a:avLst/>
@@ -6350,30 +6258,30 @@
               <a:buNone/>
             </a:pPr>
             <a:r>
-              <a:rPr lang="en-US" sz="1630" b="1" dirty="0">
-                <a:solidFill>
-                  <a:srgbClr val="25194B"/>
-                </a:solidFill>
-                <a:latin typeface="Cambria" pitchFamily="34" charset="0"/>
-                <a:ea typeface="Cambria" pitchFamily="34" charset="-122"/>
-                <a:cs typeface="Cambria" pitchFamily="34" charset="-120"/>
-              </a:rPr>
-              <a:t>Nhánh đối chứng dùng cùng cấu hình huấn luyện nhưng không giữ đúng tín hiệu SPICE.</a:t>
-            </a:r>
-            <a:endParaRPr lang="en-US" sz="1630" dirty="0"/>
-          </a:p>
-        </p:txBody>
-      </p:sp>
-      <p:sp>
-        <p:nvSpPr>
-          <p:cNvPr id="5" name="Text 3"/>
-          <p:cNvSpPr/>
-          <p:nvPr/>
-        </p:nvSpPr>
-        <p:spPr>
-          <a:xfrm>
-            <a:off x="713232" y="1664208"/>
-            <a:ext cx="2240280" cy="502920"/>
+              <a:rPr lang="en-US" sz="1250" b="1" dirty="0">
+                <a:solidFill>
+                  <a:srgbClr val="1A1A1A"/>
+                </a:solidFill>
+                <a:latin typeface="Cambria" pitchFamily="34" charset="0"/>
+                <a:ea typeface="Cambria" pitchFamily="34" charset="-122"/>
+                <a:cs typeface="Cambria" pitchFamily="34" charset="-120"/>
+              </a:rPr>
+              <a:t>3B · chưa tinh chỉnh</a:t>
+            </a:r>
+            <a:endParaRPr lang="en-US" sz="1250" dirty="0"/>
+          </a:p>
+        </p:txBody>
+      </p:sp>
+      <p:sp>
+        <p:nvSpPr>
+          <p:cNvPr id="6" name="Text 4"/>
+          <p:cNvSpPr/>
+          <p:nvPr/>
+        </p:nvSpPr>
+        <p:spPr>
+          <a:xfrm>
+            <a:off x="2633472" y="1325880"/>
+            <a:ext cx="1828800" cy="502920"/>
           </a:xfrm>
           <a:prstGeom prst="rect">
             <a:avLst/>
@@ -6400,7 +6308,7 @@
                 <a:ea typeface="Cambria" pitchFamily="34" charset="-122"/>
                 <a:cs typeface="Cambria" pitchFamily="34" charset="-120"/>
               </a:rPr>
-              <a:t>59,11%</a:t>
+              <a:t>51,51%</a:t>
             </a:r>
             <a:endParaRPr lang="en-US" sz="2400" dirty="0"/>
           </a:p>
@@ -6408,14 +6316,14 @@
       </p:sp>
       <p:sp>
         <p:nvSpPr>
-          <p:cNvPr id="6" name="Text 4"/>
-          <p:cNvSpPr/>
-          <p:nvPr/>
-        </p:nvSpPr>
-        <p:spPr>
-          <a:xfrm>
-            <a:off x="713232" y="2194560"/>
-            <a:ext cx="2240280" cy="475488"/>
+          <p:cNvPr id="7" name="Text 5"/>
+          <p:cNvSpPr/>
+          <p:nvPr/>
+        </p:nvSpPr>
+        <p:spPr>
+          <a:xfrm>
+            <a:off x="2633472" y="1856232"/>
+            <a:ext cx="1828800" cy="475488"/>
           </a:xfrm>
           <a:prstGeom prst="rect">
             <a:avLst/>
@@ -6444,7 +6352,7 @@
                 <a:ea typeface="Cambria" pitchFamily="34" charset="-122"/>
                 <a:cs typeface="Cambria" pitchFamily="34" charset="-120"/>
               </a:rPr>
-              <a:t>S1</a:t>
+              <a:t>7B · prompting</a:t>
             </a:r>
             <a:endParaRPr lang="en-US" sz="1250" dirty="0"/>
           </a:p>
@@ -6452,14 +6360,14 @@
       </p:sp>
       <p:sp>
         <p:nvSpPr>
-          <p:cNvPr id="7" name="Text 5"/>
-          <p:cNvSpPr/>
-          <p:nvPr/>
-        </p:nvSpPr>
-        <p:spPr>
-          <a:xfrm>
-            <a:off x="3456432" y="1664208"/>
-            <a:ext cx="2240280" cy="502920"/>
+          <p:cNvPr id="8" name="Text 6"/>
+          <p:cNvSpPr/>
+          <p:nvPr/>
+        </p:nvSpPr>
+        <p:spPr>
+          <a:xfrm>
+            <a:off x="4700016" y="1325880"/>
+            <a:ext cx="1828800" cy="502920"/>
           </a:xfrm>
           <a:prstGeom prst="rect">
             <a:avLst/>
@@ -6480,7 +6388,7 @@
             <a:r>
               <a:rPr lang="en-US" sz="2400" b="1" dirty="0">
                 <a:solidFill>
-                  <a:srgbClr val="7A7099"/>
+                  <a:srgbClr val="25194B"/>
                 </a:solidFill>
                 <a:latin typeface="Cambria" pitchFamily="34" charset="0"/>
                 <a:ea typeface="Cambria" pitchFamily="34" charset="-122"/>
@@ -6494,14 +6402,14 @@
       </p:sp>
       <p:sp>
         <p:nvSpPr>
-          <p:cNvPr id="8" name="Text 6"/>
-          <p:cNvSpPr/>
-          <p:nvPr/>
-        </p:nvSpPr>
-        <p:spPr>
-          <a:xfrm>
-            <a:off x="3456432" y="2194560"/>
-            <a:ext cx="2240280" cy="475488"/>
+          <p:cNvPr id="9" name="Text 7"/>
+          <p:cNvSpPr/>
+          <p:nvPr/>
+        </p:nvSpPr>
+        <p:spPr>
+          <a:xfrm>
+            <a:off x="4700016" y="1856232"/>
+            <a:ext cx="1828800" cy="475488"/>
           </a:xfrm>
           <a:prstGeom prst="rect">
             <a:avLst/>
@@ -6530,7 +6438,7 @@
                 <a:ea typeface="Cambria" pitchFamily="34" charset="-122"/>
                 <a:cs typeface="Cambria" pitchFamily="34" charset="-120"/>
               </a:rPr>
-              <a:t>GRPO · đối chứng</a:t>
+              <a:t>3B · S1</a:t>
             </a:r>
             <a:endParaRPr lang="en-US" sz="1250" dirty="0"/>
           </a:p>
@@ -6538,14 +6446,14 @@
       </p:sp>
       <p:sp>
         <p:nvSpPr>
-          <p:cNvPr id="9" name="Text 7"/>
-          <p:cNvSpPr/>
-          <p:nvPr/>
-        </p:nvSpPr>
-        <p:spPr>
-          <a:xfrm>
-            <a:off x="6199632" y="1664208"/>
-            <a:ext cx="2240280" cy="502920"/>
+          <p:cNvPr id="10" name="Text 8"/>
+          <p:cNvSpPr/>
+          <p:nvPr/>
+        </p:nvSpPr>
+        <p:spPr>
+          <a:xfrm>
+            <a:off x="6766560" y="1325880"/>
+            <a:ext cx="1828800" cy="502920"/>
           </a:xfrm>
           <a:prstGeom prst="rect">
             <a:avLst/>
@@ -6580,14 +6488,14 @@
       </p:sp>
       <p:sp>
         <p:nvSpPr>
-          <p:cNvPr id="10" name="Text 8"/>
-          <p:cNvSpPr/>
-          <p:nvPr/>
-        </p:nvSpPr>
-        <p:spPr>
-          <a:xfrm>
-            <a:off x="6199632" y="2194560"/>
-            <a:ext cx="2240280" cy="475488"/>
+          <p:cNvPr id="11" name="Text 9"/>
+          <p:cNvSpPr/>
+          <p:nvPr/>
+        </p:nvSpPr>
+        <p:spPr>
+          <a:xfrm>
+            <a:off x="6766560" y="1856232"/>
+            <a:ext cx="1828800" cy="475488"/>
           </a:xfrm>
           <a:prstGeom prst="rect">
             <a:avLst/>
@@ -6616,7 +6524,7 @@
                 <a:ea typeface="Cambria" pitchFamily="34" charset="-122"/>
                 <a:cs typeface="Cambria" pitchFamily="34" charset="-120"/>
               </a:rPr>
-              <a:t>GRPO-SPICE</a:t>
+              <a:t>3B · GRPO-SPICE</a:t>
             </a:r>
             <a:endParaRPr lang="en-US" sz="1250" dirty="0"/>
           </a:p>
@@ -6624,13 +6532,13 @@
       </p:sp>
       <p:sp>
         <p:nvSpPr>
-          <p:cNvPr id="11" name="Shape 9"/>
-          <p:cNvSpPr/>
-          <p:nvPr/>
-        </p:nvSpPr>
-        <p:spPr>
-          <a:xfrm>
-            <a:off x="502920" y="3063240"/>
+          <p:cNvPr id="12" name="Shape 10"/>
+          <p:cNvSpPr/>
+          <p:nvPr/>
+        </p:nvSpPr>
+        <p:spPr>
+          <a:xfrm>
+            <a:off x="502920" y="2788920"/>
             <a:ext cx="8138160" cy="0"/>
           </a:xfrm>
           <a:prstGeom prst="line">
@@ -6648,14 +6556,123 @@
       </p:sp>
       <p:sp>
         <p:nvSpPr>
-          <p:cNvPr id="12" name="Shape 10"/>
-          <p:cNvSpPr/>
-          <p:nvPr/>
-        </p:nvSpPr>
-        <p:spPr>
-          <a:xfrm>
-            <a:off x="502920" y="3401568"/>
-            <a:ext cx="8138160" cy="1170432"/>
+          <p:cNvPr id="13" name="Shape 11"/>
+          <p:cNvSpPr/>
+          <p:nvPr/>
+        </p:nvSpPr>
+        <p:spPr>
+          <a:xfrm>
+            <a:off x="777240" y="3200400"/>
+            <a:ext cx="3520440" cy="1298448"/>
+          </a:xfrm>
+          <a:prstGeom prst="roundRect">
+            <a:avLst/>
+          </a:prstGeom>
+          <a:solidFill>
+            <a:srgbClr val="F3F2F5"/>
+          </a:solidFill>
+          <a:ln w="12700">
+            <a:solidFill>
+              <a:srgbClr val="7A7099"/>
+            </a:solidFill>
+            <a:prstDash val="solid"/>
+          </a:ln>
+        </p:spPr>
+      </p:sp>
+      <p:sp>
+        <p:nvSpPr>
+          <p:cNvPr id="14" name="Text 12"/>
+          <p:cNvSpPr/>
+          <p:nvPr/>
+        </p:nvSpPr>
+        <p:spPr>
+          <a:xfrm>
+            <a:off x="960120" y="3429000"/>
+            <a:ext cx="3154680" cy="320040"/>
+          </a:xfrm>
+          <a:prstGeom prst="rect">
+            <a:avLst/>
+          </a:prstGeom>
+          <a:noFill/>
+          <a:ln/>
+        </p:spPr>
+        <p:txBody>
+          <a:bodyPr wrap="square" lIns="0" tIns="0" rIns="0" bIns="0" rtlCol="0" anchor="ctr"/>
+          <a:lstStyle/>
+          <a:p>
+            <a:pPr algn="ctr" indent="0" marL="0">
+              <a:lnSpc>
+                <a:spcPct val="125000"/>
+              </a:lnSpc>
+              <a:buNone/>
+            </a:pPr>
+            <a:r>
+              <a:rPr lang="en-US" sz="1450" b="1" dirty="0">
+                <a:solidFill>
+                  <a:srgbClr val="25194B"/>
+                </a:solidFill>
+                <a:latin typeface="Cambria" pitchFamily="34" charset="0"/>
+                <a:ea typeface="Cambria" pitchFamily="34" charset="-122"/>
+                <a:cs typeface="Cambria" pitchFamily="34" charset="-120"/>
+              </a:rPr>
+              <a:t>7B hơn 3B gốc</a:t>
+            </a:r>
+            <a:endParaRPr lang="en-US" sz="1450" dirty="0"/>
+          </a:p>
+        </p:txBody>
+      </p:sp>
+      <p:sp>
+        <p:nvSpPr>
+          <p:cNvPr id="15" name="Text 13"/>
+          <p:cNvSpPr/>
+          <p:nvPr/>
+        </p:nvSpPr>
+        <p:spPr>
+          <a:xfrm>
+            <a:off x="960120" y="3822192"/>
+            <a:ext cx="3154680" cy="411480"/>
+          </a:xfrm>
+          <a:prstGeom prst="rect">
+            <a:avLst/>
+          </a:prstGeom>
+          <a:noFill/>
+          <a:ln/>
+        </p:spPr>
+        <p:txBody>
+          <a:bodyPr wrap="square" lIns="0" tIns="0" rIns="0" bIns="0" rtlCol="0" anchor="ctr"/>
+          <a:lstStyle/>
+          <a:p>
+            <a:pPr algn="ctr" indent="0" marL="0">
+              <a:lnSpc>
+                <a:spcPct val="125000"/>
+              </a:lnSpc>
+              <a:buNone/>
+            </a:pPr>
+            <a:r>
+              <a:rPr lang="en-US" sz="2100" b="1" dirty="0">
+                <a:solidFill>
+                  <a:srgbClr val="7A7099"/>
+                </a:solidFill>
+                <a:latin typeface="Cambria" pitchFamily="34" charset="0"/>
+                <a:ea typeface="Cambria" pitchFamily="34" charset="-122"/>
+                <a:cs typeface="Cambria" pitchFamily="34" charset="-120"/>
+              </a:rPr>
+              <a:t>+3,92 điểm</a:t>
+            </a:r>
+            <a:endParaRPr lang="en-US" sz="2100" dirty="0"/>
+          </a:p>
+        </p:txBody>
+      </p:sp>
+      <p:sp>
+        <p:nvSpPr>
+          <p:cNvPr id="16" name="Shape 14"/>
+          <p:cNvSpPr/>
+          <p:nvPr/>
+        </p:nvSpPr>
+        <p:spPr>
+          <a:xfrm>
+            <a:off x="4846320" y="3200400"/>
+            <a:ext cx="3520440" cy="1298448"/>
           </a:xfrm>
           <a:prstGeom prst="roundRect">
             <a:avLst/>
@@ -6673,14 +6690,58 @@
       </p:sp>
       <p:sp>
         <p:nvSpPr>
-          <p:cNvPr id="13" name="Text 11"/>
-          <p:cNvSpPr/>
-          <p:nvPr/>
-        </p:nvSpPr>
-        <p:spPr>
-          <a:xfrm>
-            <a:off x="685800" y="3566160"/>
-            <a:ext cx="7772400" cy="384048"/>
+          <p:cNvPr id="17" name="Text 15"/>
+          <p:cNvSpPr/>
+          <p:nvPr/>
+        </p:nvSpPr>
+        <p:spPr>
+          <a:xfrm>
+            <a:off x="5029200" y="3383280"/>
+            <a:ext cx="3154680" cy="475488"/>
+          </a:xfrm>
+          <a:prstGeom prst="rect">
+            <a:avLst/>
+          </a:prstGeom>
+          <a:noFill/>
+          <a:ln/>
+        </p:spPr>
+        <p:txBody>
+          <a:bodyPr wrap="square" lIns="0" tIns="0" rIns="0" bIns="0" rtlCol="0" anchor="ctr">
+            <a:normAutofit/>
+          </a:bodyPr>
+          <a:lstStyle/>
+          <a:p>
+            <a:pPr algn="ctr" indent="0" marL="0">
+              <a:lnSpc>
+                <a:spcPct val="125000"/>
+              </a:lnSpc>
+              <a:buNone/>
+            </a:pPr>
+            <a:r>
+              <a:rPr lang="en-US" sz="1360" b="1" dirty="0">
+                <a:solidFill>
+                  <a:srgbClr val="25194B"/>
+                </a:solidFill>
+                <a:latin typeface="Cambria" pitchFamily="34" charset="0"/>
+                <a:ea typeface="Cambria" pitchFamily="34" charset="-122"/>
+                <a:cs typeface="Cambria" pitchFamily="34" charset="-120"/>
+              </a:rPr>
+              <a:t>3B sau GRPO-SPICE hơn 7B prompting</a:t>
+            </a:r>
+            <a:endParaRPr lang="en-US" sz="1360" dirty="0"/>
+          </a:p>
+        </p:txBody>
+      </p:sp>
+      <p:sp>
+        <p:nvSpPr>
+          <p:cNvPr id="18" name="Text 16"/>
+          <p:cNvSpPr/>
+          <p:nvPr/>
+        </p:nvSpPr>
+        <p:spPr>
+          <a:xfrm>
+            <a:off x="5029200" y="3822192"/>
+            <a:ext cx="3154680" cy="411480"/>
           </a:xfrm>
           <a:prstGeom prst="rect">
             <a:avLst/>
@@ -6699,7 +6760,51 @@
               <a:buNone/>
             </a:pPr>
             <a:r>
-              <a:rPr lang="en-US" sz="1900" b="1" dirty="0">
+              <a:rPr lang="en-US" sz="2100" b="1" dirty="0">
+                <a:solidFill>
+                  <a:srgbClr val="4F417A"/>
+                </a:solidFill>
+                <a:latin typeface="Cambria" pitchFamily="34" charset="0"/>
+                <a:ea typeface="Cambria" pitchFamily="34" charset="-122"/>
+                <a:cs typeface="Cambria" pitchFamily="34" charset="-120"/>
+              </a:rPr>
+              <a:t>+9,14 điểm</a:t>
+            </a:r>
+            <a:endParaRPr lang="en-US" sz="2100" dirty="0"/>
+          </a:p>
+        </p:txBody>
+      </p:sp>
+      <p:sp>
+        <p:nvSpPr>
+          <p:cNvPr id="19" name="Text 17"/>
+          <p:cNvSpPr/>
+          <p:nvPr/>
+        </p:nvSpPr>
+        <p:spPr>
+          <a:xfrm>
+            <a:off x="502920" y="5074920"/>
+            <a:ext cx="8138160" cy="502920"/>
+          </a:xfrm>
+          <a:prstGeom prst="rect">
+            <a:avLst/>
+          </a:prstGeom>
+          <a:noFill/>
+          <a:ln/>
+        </p:spPr>
+        <p:txBody>
+          <a:bodyPr wrap="square" lIns="0" tIns="0" rIns="0" bIns="0" rtlCol="0" anchor="ctr">
+            <a:normAutofit/>
+          </a:bodyPr>
+          <a:lstStyle/>
+          <a:p>
+            <a:pPr algn="ctr" indent="0" marL="0">
+              <a:lnSpc>
+                <a:spcPct val="125000"/>
+              </a:lnSpc>
+              <a:buNone/>
+            </a:pPr>
+            <a:r>
+              <a:rPr lang="en-US" sz="1380" b="1" dirty="0">
                 <a:solidFill>
                   <a:srgbClr val="25194B"/>
                 </a:solidFill>
@@ -6707,99 +6812,15 @@
                 <a:ea typeface="Cambria" pitchFamily="34" charset="-122"/>
                 <a:cs typeface="Cambria" pitchFamily="34" charset="-120"/>
               </a:rPr>
-              <a:t>GRPO-SPICE cao hơn đối chứng +1,55 điểm</a:t>
-            </a:r>
-            <a:endParaRPr lang="en-US" sz="1900" dirty="0"/>
-          </a:p>
-        </p:txBody>
-      </p:sp>
-      <p:sp>
-        <p:nvSpPr>
-          <p:cNvPr id="14" name="Text 12"/>
-          <p:cNvSpPr/>
-          <p:nvPr/>
-        </p:nvSpPr>
-        <p:spPr>
-          <a:xfrm>
-            <a:off x="685800" y="4005072"/>
-            <a:ext cx="7772400" cy="329184"/>
-          </a:xfrm>
-          <a:prstGeom prst="rect">
-            <a:avLst/>
-          </a:prstGeom>
-          <a:noFill/>
-          <a:ln/>
-        </p:spPr>
-        <p:txBody>
-          <a:bodyPr wrap="square" lIns="0" tIns="0" rIns="0" bIns="0" rtlCol="0" anchor="ctr"/>
-          <a:lstStyle/>
-          <a:p>
-            <a:pPr algn="ctr" indent="0" marL="0">
-              <a:lnSpc>
-                <a:spcPct val="125000"/>
-              </a:lnSpc>
-              <a:buNone/>
-            </a:pPr>
-            <a:r>
-              <a:rPr lang="en-US" sz="1450" b="1" dirty="0">
-                <a:solidFill>
-                  <a:srgbClr val="4F417A"/>
-                </a:solidFill>
-                <a:latin typeface="Cambria" pitchFamily="34" charset="0"/>
-                <a:ea typeface="Cambria" pitchFamily="34" charset="-122"/>
-                <a:cs typeface="Cambria" pitchFamily="34" charset="-120"/>
-              </a:rPr>
-              <a:t>KTC 95% [+0,81; +2,30] · p = 2×10⁻⁵</a:t>
-            </a:r>
-            <a:endParaRPr lang="en-US" sz="1450" dirty="0"/>
-          </a:p>
-        </p:txBody>
-      </p:sp>
-      <p:sp>
-        <p:nvSpPr>
-          <p:cNvPr id="15" name="Text 13"/>
-          <p:cNvSpPr/>
-          <p:nvPr/>
-        </p:nvSpPr>
-        <p:spPr>
-          <a:xfrm>
-            <a:off x="502920" y="5047488"/>
-            <a:ext cx="8138160" cy="457200"/>
-          </a:xfrm>
-          <a:prstGeom prst="rect">
-            <a:avLst/>
-          </a:prstGeom>
-          <a:noFill/>
-          <a:ln/>
-        </p:spPr>
-        <p:txBody>
-          <a:bodyPr wrap="square" lIns="0" tIns="0" rIns="0" bIns="0" rtlCol="0" anchor="ctr"/>
-          <a:lstStyle/>
-          <a:p>
-            <a:pPr algn="ctr" indent="0" marL="0">
-              <a:lnSpc>
-                <a:spcPct val="125000"/>
-              </a:lnSpc>
-              <a:buNone/>
-            </a:pPr>
-            <a:r>
-              <a:rPr lang="en-US" sz="1430" b="1" dirty="0">
-                <a:solidFill>
-                  <a:srgbClr val="25194B"/>
-                </a:solidFill>
-                <a:latin typeface="Cambria" pitchFamily="34" charset="0"/>
-                <a:ea typeface="Cambria" pitchFamily="34" charset="-122"/>
-                <a:cs typeface="Cambria" pitchFamily="34" charset="-120"/>
-              </a:rPr>
-              <a:t>6/6 chỉ số chất lượng câu có KTC đều tăng so với đối chứng.</a:t>
-            </a:r>
-            <a:endParaRPr lang="en-US" sz="1430" dirty="0"/>
-          </a:p>
-        </p:txBody>
-      </p:sp>
-      <p:sp>
-        <p:nvSpPr>
-          <p:cNvPr id="16" name="Shape 14"/>
+              <a:t>So sánh này chỉ áp dụng cho thiết lập prompting đã thử. 7B không được tối ưu prompt riêng.</a:t>
+            </a:r>
+            <a:endParaRPr lang="en-US" sz="1380" dirty="0"/>
+          </a:p>
+        </p:txBody>
+      </p:sp>
+      <p:sp>
+        <p:nvSpPr>
+          <p:cNvPr id="20" name="Shape 18"/>
           <p:cNvSpPr/>
           <p:nvPr/>
         </p:nvSpPr>
@@ -6826,7 +6847,7 @@
       </p:sp>
       <p:sp>
         <p:nvSpPr>
-          <p:cNvPr id="17" name="Shape 15"/>
+          <p:cNvPr id="21" name="Shape 19"/>
           <p:cNvSpPr/>
           <p:nvPr/>
         </p:nvSpPr>
@@ -6853,7 +6874,7 @@
       </p:sp>
       <p:sp>
         <p:nvSpPr>
-          <p:cNvPr id="18" name="Shape 16"/>
+          <p:cNvPr id="22" name="Shape 20"/>
           <p:cNvSpPr/>
           <p:nvPr/>
         </p:nvSpPr>
@@ -6880,7 +6901,7 @@
       </p:sp>
       <p:sp>
         <p:nvSpPr>
-          <p:cNvPr id="19" name="Shape 17"/>
+          <p:cNvPr id="23" name="Shape 21"/>
           <p:cNvSpPr/>
           <p:nvPr/>
         </p:nvSpPr>
@@ -6907,7 +6928,7 @@
       </p:sp>
       <p:sp>
         <p:nvSpPr>
-          <p:cNvPr id="20" name="Text 18"/>
+          <p:cNvPr id="24" name="Text 22"/>
           <p:cNvSpPr/>
           <p:nvPr/>
         </p:nvSpPr>
@@ -6949,7 +6970,7 @@
       </p:sp>
       <p:sp>
         <p:nvSpPr>
-          <p:cNvPr id="21" name="Text 19"/>
+          <p:cNvPr id="25" name="Text 23"/>
           <p:cNvSpPr/>
           <p:nvPr/>
         </p:nvSpPr>
@@ -6991,7 +7012,7 @@
       </p:sp>
       <p:sp>
         <p:nvSpPr>
-          <p:cNvPr id="22" name="Text 20"/>
+          <p:cNvPr id="26" name="Text 24"/>
           <p:cNvSpPr/>
           <p:nvPr/>
         </p:nvSpPr>
@@ -7033,7 +7054,7 @@
       </p:sp>
       <p:sp>
         <p:nvSpPr>
-          <p:cNvPr id="23" name="Text 21"/>
+          <p:cNvPr id="27" name="Text 25"/>
           <p:cNvSpPr/>
           <p:nvPr/>
         </p:nvSpPr>
@@ -7185,91 +7206,7 @@
         <p:spPr>
           <a:xfrm>
             <a:off x="502920" y="868680"/>
-            <a:ext cx="8138160" cy="475488"/>
-          </a:xfrm>
-          <a:prstGeom prst="rect">
-            <a:avLst/>
-          </a:prstGeom>
-          <a:noFill/>
-          <a:ln/>
-        </p:spPr>
-        <p:txBody>
-          <a:bodyPr wrap="square" lIns="0" tIns="0" rIns="0" bIns="0" rtlCol="0" anchor="ctr"/>
-          <a:lstStyle/>
-          <a:p>
-            <a:pPr algn="ctr" indent="0" marL="0">
-              <a:lnSpc>
-                <a:spcPct val="125000"/>
-              </a:lnSpc>
-              <a:buNone/>
-            </a:pPr>
-            <a:r>
-              <a:rPr lang="en-US" sz="1680" b="1" dirty="0">
-                <a:solidFill>
-                  <a:srgbClr val="25194B"/>
-                </a:solidFill>
-                <a:latin typeface="Cambria" pitchFamily="34" charset="0"/>
-                <a:ea typeface="Cambria" pitchFamily="34" charset="-122"/>
-                <a:cs typeface="Cambria" pitchFamily="34" charset="-120"/>
-              </a:rPr>
-              <a:t>So với S1, GRPO-SPICE cao hơn ở toàn bộ 13 độ đo được báo cáo.</a:t>
-            </a:r>
-            <a:endParaRPr lang="en-US" sz="1680" dirty="0"/>
-          </a:p>
-        </p:txBody>
-      </p:sp>
-      <p:sp>
-        <p:nvSpPr>
-          <p:cNvPr id="5" name="Text 3"/>
-          <p:cNvSpPr/>
-          <p:nvPr/>
-        </p:nvSpPr>
-        <p:spPr>
-          <a:xfrm>
-            <a:off x="566928" y="1572768"/>
-            <a:ext cx="2057400" cy="502920"/>
-          </a:xfrm>
-          <a:prstGeom prst="rect">
-            <a:avLst/>
-          </a:prstGeom>
-          <a:noFill/>
-          <a:ln/>
-        </p:spPr>
-        <p:txBody>
-          <a:bodyPr wrap="square" lIns="0" tIns="0" rIns="0" bIns="0" rtlCol="0" anchor="ctr"/>
-          <a:lstStyle/>
-          <a:p>
-            <a:pPr algn="ctr" indent="0" marL="0">
-              <a:lnSpc>
-                <a:spcPct val="125000"/>
-              </a:lnSpc>
-              <a:buNone/>
-            </a:pPr>
-            <a:r>
-              <a:rPr lang="en-US" sz="2400" b="1" dirty="0">
-                <a:solidFill>
-                  <a:srgbClr val="4F417A"/>
-                </a:solidFill>
-                <a:latin typeface="Cambria" pitchFamily="34" charset="0"/>
-                <a:ea typeface="Cambria" pitchFamily="34" charset="-122"/>
-                <a:cs typeface="Cambria" pitchFamily="34" charset="-120"/>
-              </a:rPr>
-              <a:t>+1,55</a:t>
-            </a:r>
-            <a:endParaRPr lang="en-US" sz="2400" dirty="0"/>
-          </a:p>
-        </p:txBody>
-      </p:sp>
-      <p:sp>
-        <p:nvSpPr>
-          <p:cNvPr id="6" name="Text 4"/>
-          <p:cNvSpPr/>
-          <p:nvPr/>
-        </p:nvSpPr>
-        <p:spPr>
-          <a:xfrm>
-            <a:off x="566928" y="2103120"/>
-            <a:ext cx="2057400" cy="475488"/>
+            <a:ext cx="8138160" cy="502920"/>
           </a:xfrm>
           <a:prstGeom prst="rect">
             <a:avLst/>
@@ -7290,30 +7227,30 @@
               <a:buNone/>
             </a:pPr>
             <a:r>
-              <a:rPr lang="en-US" sz="1250" b="1" dirty="0">
-                <a:solidFill>
-                  <a:srgbClr val="1A1A1A"/>
-                </a:solidFill>
-                <a:latin typeface="Cambria" pitchFamily="34" charset="0"/>
-                <a:ea typeface="Cambria" pitchFamily="34" charset="-122"/>
-                <a:cs typeface="Cambria" pitchFamily="34" charset="-120"/>
-              </a:rPr>
-              <a:t>Executability</a:t>
-            </a:r>
-            <a:endParaRPr lang="en-US" sz="1250" dirty="0"/>
-          </a:p>
-        </p:txBody>
-      </p:sp>
-      <p:sp>
-        <p:nvSpPr>
-          <p:cNvPr id="7" name="Text 5"/>
-          <p:cNvSpPr/>
-          <p:nvPr/>
-        </p:nvSpPr>
-        <p:spPr>
-          <a:xfrm>
-            <a:off x="2706624" y="1572768"/>
-            <a:ext cx="2057400" cy="502920"/>
+              <a:rPr lang="en-US" sz="1630" b="1" dirty="0">
+                <a:solidFill>
+                  <a:srgbClr val="25194B"/>
+                </a:solidFill>
+                <a:latin typeface="Cambria" pitchFamily="34" charset="0"/>
+                <a:ea typeface="Cambria" pitchFamily="34" charset="-122"/>
+                <a:cs typeface="Cambria" pitchFamily="34" charset="-120"/>
+              </a:rPr>
+              <a:t>Nhánh đối chứng dùng cùng cấu hình huấn luyện nhưng không giữ đúng tín hiệu SPICE.</a:t>
+            </a:r>
+            <a:endParaRPr lang="en-US" sz="1630" dirty="0"/>
+          </a:p>
+        </p:txBody>
+      </p:sp>
+      <p:sp>
+        <p:nvSpPr>
+          <p:cNvPr id="5" name="Text 3"/>
+          <p:cNvSpPr/>
+          <p:nvPr/>
+        </p:nvSpPr>
+        <p:spPr>
+          <a:xfrm>
+            <a:off x="713232" y="1664208"/>
+            <a:ext cx="2240280" cy="502920"/>
           </a:xfrm>
           <a:prstGeom prst="rect">
             <a:avLst/>
@@ -7334,13 +7271,13 @@
             <a:r>
               <a:rPr lang="en-US" sz="2400" b="1" dirty="0">
                 <a:solidFill>
-                  <a:srgbClr val="4F417A"/>
-                </a:solidFill>
-                <a:latin typeface="Cambria" pitchFamily="34" charset="0"/>
-                <a:ea typeface="Cambria" pitchFamily="34" charset="-122"/>
-                <a:cs typeface="Cambria" pitchFamily="34" charset="-120"/>
-              </a:rPr>
-              <a:t>+1,52</a:t>
+                  <a:srgbClr val="7A7099"/>
+                </a:solidFill>
+                <a:latin typeface="Cambria" pitchFamily="34" charset="0"/>
+                <a:ea typeface="Cambria" pitchFamily="34" charset="-122"/>
+                <a:cs typeface="Cambria" pitchFamily="34" charset="-120"/>
+              </a:rPr>
+              <a:t>59,11%</a:t>
             </a:r>
             <a:endParaRPr lang="en-US" sz="2400" dirty="0"/>
           </a:p>
@@ -7348,14 +7285,14 @@
       </p:sp>
       <p:sp>
         <p:nvSpPr>
-          <p:cNvPr id="8" name="Text 6"/>
-          <p:cNvSpPr/>
-          <p:nvPr/>
-        </p:nvSpPr>
-        <p:spPr>
-          <a:xfrm>
-            <a:off x="2706624" y="2103120"/>
-            <a:ext cx="2057400" cy="475488"/>
+          <p:cNvPr id="6" name="Text 4"/>
+          <p:cNvSpPr/>
+          <p:nvPr/>
+        </p:nvSpPr>
+        <p:spPr>
+          <a:xfrm>
+            <a:off x="713232" y="2194560"/>
+            <a:ext cx="2240280" cy="475488"/>
           </a:xfrm>
           <a:prstGeom prst="rect">
             <a:avLst/>
@@ -7384,7 +7321,7 @@
                 <a:ea typeface="Cambria" pitchFamily="34" charset="-122"/>
                 <a:cs typeface="Cambria" pitchFamily="34" charset="-120"/>
               </a:rPr>
-              <a:t>Hộp phần tử</a:t>
+              <a:t>S1</a:t>
             </a:r>
             <a:endParaRPr lang="en-US" sz="1250" dirty="0"/>
           </a:p>
@@ -7392,14 +7329,14 @@
       </p:sp>
       <p:sp>
         <p:nvSpPr>
-          <p:cNvPr id="9" name="Text 7"/>
-          <p:cNvSpPr/>
-          <p:nvPr/>
-        </p:nvSpPr>
-        <p:spPr>
-          <a:xfrm>
-            <a:off x="4846320" y="1572768"/>
-            <a:ext cx="2057400" cy="502920"/>
+          <p:cNvPr id="7" name="Text 5"/>
+          <p:cNvSpPr/>
+          <p:nvPr/>
+        </p:nvSpPr>
+        <p:spPr>
+          <a:xfrm>
+            <a:off x="3456432" y="1664208"/>
+            <a:ext cx="2240280" cy="502920"/>
           </a:xfrm>
           <a:prstGeom prst="rect">
             <a:avLst/>
@@ -7420,13 +7357,13 @@
             <a:r>
               <a:rPr lang="en-US" sz="2400" b="1" dirty="0">
                 <a:solidFill>
-                  <a:srgbClr val="4F417A"/>
-                </a:solidFill>
-                <a:latin typeface="Cambria" pitchFamily="34" charset="0"/>
-                <a:ea typeface="Cambria" pitchFamily="34" charset="-122"/>
-                <a:cs typeface="Cambria" pitchFamily="34" charset="-120"/>
-              </a:rPr>
-              <a:t>+1,88</a:t>
+                  <a:srgbClr val="7A7099"/>
+                </a:solidFill>
+                <a:latin typeface="Cambria" pitchFamily="34" charset="0"/>
+                <a:ea typeface="Cambria" pitchFamily="34" charset="-122"/>
+                <a:cs typeface="Cambria" pitchFamily="34" charset="-120"/>
+              </a:rPr>
+              <a:t>59,11%</a:t>
             </a:r>
             <a:endParaRPr lang="en-US" sz="2400" dirty="0"/>
           </a:p>
@@ -7434,14 +7371,14 @@
       </p:sp>
       <p:sp>
         <p:nvSpPr>
-          <p:cNvPr id="10" name="Text 8"/>
-          <p:cNvSpPr/>
-          <p:nvPr/>
-        </p:nvSpPr>
-        <p:spPr>
-          <a:xfrm>
-            <a:off x="4846320" y="2103120"/>
-            <a:ext cx="2057400" cy="475488"/>
+          <p:cNvPr id="8" name="Text 6"/>
+          <p:cNvSpPr/>
+          <p:nvPr/>
+        </p:nvSpPr>
+        <p:spPr>
+          <a:xfrm>
+            <a:off x="3456432" y="2194560"/>
+            <a:ext cx="2240280" cy="475488"/>
           </a:xfrm>
           <a:prstGeom prst="rect">
             <a:avLst/>
@@ -7470,7 +7407,7 @@
                 <a:ea typeface="Cambria" pitchFamily="34" charset="-122"/>
                 <a:cs typeface="Cambria" pitchFamily="34" charset="-120"/>
               </a:rPr>
-              <a:t>AitW đầy đủ</a:t>
+              <a:t>GRPO · đối chứng</a:t>
             </a:r>
             <a:endParaRPr lang="en-US" sz="1250" dirty="0"/>
           </a:p>
@@ -7478,14 +7415,14 @@
       </p:sp>
       <p:sp>
         <p:nvSpPr>
-          <p:cNvPr id="11" name="Text 9"/>
-          <p:cNvSpPr/>
-          <p:nvPr/>
-        </p:nvSpPr>
-        <p:spPr>
-          <a:xfrm>
-            <a:off x="6986016" y="1572768"/>
-            <a:ext cx="1627632" cy="502920"/>
+          <p:cNvPr id="9" name="Text 7"/>
+          <p:cNvSpPr/>
+          <p:nvPr/>
+        </p:nvSpPr>
+        <p:spPr>
+          <a:xfrm>
+            <a:off x="6199632" y="1664208"/>
+            <a:ext cx="2240280" cy="502920"/>
           </a:xfrm>
           <a:prstGeom prst="rect">
             <a:avLst/>
@@ -7506,13 +7443,13 @@
             <a:r>
               <a:rPr lang="en-US" sz="2400" b="1" dirty="0">
                 <a:solidFill>
-                  <a:srgbClr val="7A7099"/>
-                </a:solidFill>
-                <a:latin typeface="Cambria" pitchFamily="34" charset="0"/>
-                <a:ea typeface="Cambria" pitchFamily="34" charset="-122"/>
-                <a:cs typeface="Cambria" pitchFamily="34" charset="-120"/>
-              </a:rPr>
-              <a:t>7/7</a:t>
+                  <a:srgbClr val="4F417A"/>
+                </a:solidFill>
+                <a:latin typeface="Cambria" pitchFamily="34" charset="0"/>
+                <a:ea typeface="Cambria" pitchFamily="34" charset="-122"/>
+                <a:cs typeface="Cambria" pitchFamily="34" charset="-120"/>
+              </a:rPr>
+              <a:t>60,65%</a:t>
             </a:r>
             <a:endParaRPr lang="en-US" sz="2400" dirty="0"/>
           </a:p>
@@ -7520,14 +7457,14 @@
       </p:sp>
       <p:sp>
         <p:nvSpPr>
-          <p:cNvPr id="12" name="Text 10"/>
-          <p:cNvSpPr/>
-          <p:nvPr/>
-        </p:nvSpPr>
-        <p:spPr>
-          <a:xfrm>
-            <a:off x="6986016" y="2103120"/>
-            <a:ext cx="1627632" cy="475488"/>
+          <p:cNvPr id="10" name="Text 8"/>
+          <p:cNvSpPr/>
+          <p:nvPr/>
+        </p:nvSpPr>
+        <p:spPr>
+          <a:xfrm>
+            <a:off x="6199632" y="2194560"/>
+            <a:ext cx="2240280" cy="475488"/>
           </a:xfrm>
           <a:prstGeom prst="rect">
             <a:avLst/>
@@ -7556,7 +7493,7 @@
                 <a:ea typeface="Cambria" pitchFamily="34" charset="-122"/>
                 <a:cs typeface="Cambria" pitchFamily="34" charset="-120"/>
               </a:rPr>
-              <a:t>chỉ số câu tăng</a:t>
+              <a:t>GRPO-SPICE</a:t>
             </a:r>
             <a:endParaRPr lang="en-US" sz="1250" dirty="0"/>
           </a:p>
@@ -7564,14 +7501,38 @@
       </p:sp>
       <p:sp>
         <p:nvSpPr>
-          <p:cNvPr id="13" name="Shape 11"/>
-          <p:cNvSpPr/>
-          <p:nvPr/>
-        </p:nvSpPr>
-        <p:spPr>
-          <a:xfrm>
-            <a:off x="502920" y="3090672"/>
-            <a:ext cx="8138160" cy="1353312"/>
+          <p:cNvPr id="11" name="Shape 9"/>
+          <p:cNvSpPr/>
+          <p:nvPr/>
+        </p:nvSpPr>
+        <p:spPr>
+          <a:xfrm>
+            <a:off x="502920" y="3063240"/>
+            <a:ext cx="8138160" cy="0"/>
+          </a:xfrm>
+          <a:prstGeom prst="line">
+            <a:avLst/>
+          </a:prstGeom>
+          <a:noFill/>
+          <a:ln w="12700">
+            <a:solidFill>
+              <a:srgbClr val="D9D6DF"/>
+            </a:solidFill>
+            <a:prstDash val="solid"/>
+            <a:tailEnd type="none"/>
+          </a:ln>
+        </p:spPr>
+      </p:sp>
+      <p:sp>
+        <p:nvSpPr>
+          <p:cNvPr id="12" name="Shape 10"/>
+          <p:cNvSpPr/>
+          <p:nvPr/>
+        </p:nvSpPr>
+        <p:spPr>
+          <a:xfrm>
+            <a:off x="502920" y="3401568"/>
+            <a:ext cx="8138160" cy="1170432"/>
           </a:xfrm>
           <a:prstGeom prst="roundRect">
             <a:avLst/>
@@ -7581,7 +7542,7 @@
           </a:solidFill>
           <a:ln w="12700">
             <a:solidFill>
-              <a:srgbClr val="7A7099"/>
+              <a:srgbClr val="4F417A"/>
             </a:solidFill>
             <a:prstDash val="solid"/>
           </a:ln>
@@ -7589,14 +7550,56 @@
       </p:sp>
       <p:sp>
         <p:nvSpPr>
+          <p:cNvPr id="13" name="Text 11"/>
+          <p:cNvSpPr/>
+          <p:nvPr/>
+        </p:nvSpPr>
+        <p:spPr>
+          <a:xfrm>
+            <a:off x="685800" y="3566160"/>
+            <a:ext cx="7772400" cy="384048"/>
+          </a:xfrm>
+          <a:prstGeom prst="rect">
+            <a:avLst/>
+          </a:prstGeom>
+          <a:noFill/>
+          <a:ln/>
+        </p:spPr>
+        <p:txBody>
+          <a:bodyPr wrap="square" lIns="0" tIns="0" rIns="0" bIns="0" rtlCol="0" anchor="ctr"/>
+          <a:lstStyle/>
+          <a:p>
+            <a:pPr algn="ctr" indent="0" marL="0">
+              <a:lnSpc>
+                <a:spcPct val="125000"/>
+              </a:lnSpc>
+              <a:buNone/>
+            </a:pPr>
+            <a:r>
+              <a:rPr lang="en-US" sz="1900" b="1" dirty="0">
+                <a:solidFill>
+                  <a:srgbClr val="25194B"/>
+                </a:solidFill>
+                <a:latin typeface="Cambria" pitchFamily="34" charset="0"/>
+                <a:ea typeface="Cambria" pitchFamily="34" charset="-122"/>
+                <a:cs typeface="Cambria" pitchFamily="34" charset="-120"/>
+              </a:rPr>
+              <a:t>GRPO-SPICE cao hơn đối chứng +1,55 điểm</a:t>
+            </a:r>
+            <a:endParaRPr lang="en-US" sz="1900" dirty="0"/>
+          </a:p>
+        </p:txBody>
+      </p:sp>
+      <p:sp>
+        <p:nvSpPr>
           <p:cNvPr id="14" name="Text 12"/>
           <p:cNvSpPr/>
           <p:nvPr/>
         </p:nvSpPr>
         <p:spPr>
           <a:xfrm>
-            <a:off x="704088" y="3346704"/>
-            <a:ext cx="7726680" cy="384048"/>
+            <a:off x="685800" y="4005072"/>
+            <a:ext cx="7772400" cy="329184"/>
           </a:xfrm>
           <a:prstGeom prst="rect">
             <a:avLst/>
@@ -7615,7 +7618,49 @@
               <a:buNone/>
             </a:pPr>
             <a:r>
-              <a:rPr lang="en-US" sz="1900" b="1" dirty="0">
+              <a:rPr lang="en-US" sz="1450" b="1" dirty="0">
+                <a:solidFill>
+                  <a:srgbClr val="4F417A"/>
+                </a:solidFill>
+                <a:latin typeface="Cambria" pitchFamily="34" charset="0"/>
+                <a:ea typeface="Cambria" pitchFamily="34" charset="-122"/>
+                <a:cs typeface="Cambria" pitchFamily="34" charset="-120"/>
+              </a:rPr>
+              <a:t>KTC 95% [+0,81; +2,30] · p = 2×10⁻⁵</a:t>
+            </a:r>
+            <a:endParaRPr lang="en-US" sz="1450" dirty="0"/>
+          </a:p>
+        </p:txBody>
+      </p:sp>
+      <p:sp>
+        <p:nvSpPr>
+          <p:cNvPr id="15" name="Text 13"/>
+          <p:cNvSpPr/>
+          <p:nvPr/>
+        </p:nvSpPr>
+        <p:spPr>
+          <a:xfrm>
+            <a:off x="502920" y="5047488"/>
+            <a:ext cx="8138160" cy="457200"/>
+          </a:xfrm>
+          <a:prstGeom prst="rect">
+            <a:avLst/>
+          </a:prstGeom>
+          <a:noFill/>
+          <a:ln/>
+        </p:spPr>
+        <p:txBody>
+          <a:bodyPr wrap="square" lIns="0" tIns="0" rIns="0" bIns="0" rtlCol="0" anchor="ctr"/>
+          <a:lstStyle/>
+          <a:p>
+            <a:pPr algn="ctr" indent="0" marL="0">
+              <a:lnSpc>
+                <a:spcPct val="125000"/>
+              </a:lnSpc>
+              <a:buNone/>
+            </a:pPr>
+            <a:r>
+              <a:rPr lang="en-US" sz="1430" b="1" dirty="0">
                 <a:solidFill>
                   <a:srgbClr val="25194B"/>
                 </a:solidFill>
@@ -7623,103 +7668,15 @@
                 <a:ea typeface="Cambria" pitchFamily="34" charset="-122"/>
                 <a:cs typeface="Cambria" pitchFamily="34" charset="-120"/>
               </a:rPr>
-              <a:t>12/12 độ đo có khoảng tin cậy đều nằm trên 0</a:t>
-            </a:r>
-            <a:endParaRPr lang="en-US" sz="1900" dirty="0"/>
-          </a:p>
-        </p:txBody>
-      </p:sp>
-      <p:sp>
-        <p:nvSpPr>
-          <p:cNvPr id="15" name="Text 13"/>
-          <p:cNvSpPr/>
-          <p:nvPr/>
-        </p:nvSpPr>
-        <p:spPr>
-          <a:xfrm>
-            <a:off x="777240" y="3822192"/>
-            <a:ext cx="7589520" cy="347472"/>
-          </a:xfrm>
-          <a:prstGeom prst="rect">
-            <a:avLst/>
-          </a:prstGeom>
-          <a:noFill/>
-          <a:ln/>
-        </p:spPr>
-        <p:txBody>
-          <a:bodyPr wrap="square" lIns="0" tIns="0" rIns="0" bIns="0" rtlCol="0" anchor="ctr">
-            <a:normAutofit/>
-          </a:bodyPr>
-          <a:lstStyle/>
-          <a:p>
-            <a:pPr algn="ctr" indent="0" marL="0">
-              <a:lnSpc>
-                <a:spcPct val="125000"/>
-              </a:lnSpc>
-              <a:buNone/>
-            </a:pPr>
-            <a:r>
-              <a:rPr lang="en-US" sz="1320" dirty="0">
-                <a:solidFill>
-                  <a:srgbClr val="5A5A66"/>
-                </a:solidFill>
-                <a:latin typeface="Cambria" pitchFamily="34" charset="0"/>
-                <a:ea typeface="Cambria" pitchFamily="34" charset="-122"/>
-                <a:cs typeface="Cambria" pitchFamily="34" charset="-120"/>
-              </a:rPr>
-              <a:t>METEOR tăng +1,13 điểm nhưng chưa có KTC trong thiết lập đánh giá hiện tại.</a:t>
-            </a:r>
-            <a:endParaRPr lang="en-US" sz="1320" dirty="0"/>
-          </a:p>
-        </p:txBody>
-      </p:sp>
-      <p:sp>
-        <p:nvSpPr>
-          <p:cNvPr id="16" name="Text 14"/>
-          <p:cNvSpPr/>
-          <p:nvPr/>
-        </p:nvSpPr>
-        <p:spPr>
-          <a:xfrm>
-            <a:off x="502920" y="4919472"/>
-            <a:ext cx="8138160" cy="658368"/>
-          </a:xfrm>
-          <a:prstGeom prst="rect">
-            <a:avLst/>
-          </a:prstGeom>
-          <a:noFill/>
-          <a:ln/>
-        </p:spPr>
-        <p:txBody>
-          <a:bodyPr wrap="square" lIns="0" tIns="0" rIns="0" bIns="0" rtlCol="0" anchor="ctr">
-            <a:normAutofit/>
-          </a:bodyPr>
-          <a:lstStyle/>
-          <a:p>
-            <a:pPr algn="ctr" indent="0" marL="0">
-              <a:lnSpc>
-                <a:spcPct val="125000"/>
-              </a:lnSpc>
-              <a:buNone/>
-            </a:pPr>
-            <a:r>
-              <a:rPr lang="en-US" sz="1280" b="1" dirty="0">
-                <a:solidFill>
-                  <a:srgbClr val="25194B"/>
-                </a:solidFill>
-                <a:latin typeface="Cambria" pitchFamily="34" charset="0"/>
-                <a:ea typeface="Cambria" pitchFamily="34" charset="-122"/>
-                <a:cs typeface="Cambria" pitchFamily="34" charset="-120"/>
-              </a:rPr>
-              <a:t>Lượt GRPO-SPICE thứ hai vẫn cao hơn S1 lượt đầu +0,83 điểm.</a:t>
-            </a:r>
-            <a:endParaRPr lang="en-US" sz="1280" dirty="0"/>
-          </a:p>
-        </p:txBody>
-      </p:sp>
-      <p:sp>
-        <p:nvSpPr>
-          <p:cNvPr id="17" name="Shape 15"/>
+              <a:t>6/6 chỉ số chất lượng câu có KTC đều tăng so với đối chứng.</a:t>
+            </a:r>
+            <a:endParaRPr lang="en-US" sz="1430" dirty="0"/>
+          </a:p>
+        </p:txBody>
+      </p:sp>
+      <p:sp>
+        <p:nvSpPr>
+          <p:cNvPr id="16" name="Shape 14"/>
           <p:cNvSpPr/>
           <p:nvPr/>
         </p:nvSpPr>
@@ -7746,7 +7703,7 @@
       </p:sp>
       <p:sp>
         <p:nvSpPr>
-          <p:cNvPr id="18" name="Shape 16"/>
+          <p:cNvPr id="17" name="Shape 15"/>
           <p:cNvSpPr/>
           <p:nvPr/>
         </p:nvSpPr>
@@ -7773,7 +7730,7 @@
       </p:sp>
       <p:sp>
         <p:nvSpPr>
-          <p:cNvPr id="19" name="Shape 17"/>
+          <p:cNvPr id="18" name="Shape 16"/>
           <p:cNvSpPr/>
           <p:nvPr/>
         </p:nvSpPr>
@@ -7800,7 +7757,7 @@
       </p:sp>
       <p:sp>
         <p:nvSpPr>
-          <p:cNvPr id="20" name="Shape 18"/>
+          <p:cNvPr id="19" name="Shape 17"/>
           <p:cNvSpPr/>
           <p:nvPr/>
         </p:nvSpPr>
@@ -7827,7 +7784,7 @@
       </p:sp>
       <p:sp>
         <p:nvSpPr>
-          <p:cNvPr id="21" name="Text 19"/>
+          <p:cNvPr id="20" name="Text 18"/>
           <p:cNvSpPr/>
           <p:nvPr/>
         </p:nvSpPr>
@@ -7869,7 +7826,7 @@
       </p:sp>
       <p:sp>
         <p:nvSpPr>
-          <p:cNvPr id="22" name="Text 20"/>
+          <p:cNvPr id="21" name="Text 19"/>
           <p:cNvSpPr/>
           <p:nvPr/>
         </p:nvSpPr>
@@ -7911,7 +7868,7 @@
       </p:sp>
       <p:sp>
         <p:nvSpPr>
-          <p:cNvPr id="23" name="Text 21"/>
+          <p:cNvPr id="22" name="Text 20"/>
           <p:cNvSpPr/>
           <p:nvPr/>
         </p:nvSpPr>
@@ -7953,7 +7910,7 @@
       </p:sp>
       <p:sp>
         <p:nvSpPr>
-          <p:cNvPr id="24" name="Text 22"/>
+          <p:cNvPr id="23" name="Text 21"/>
           <p:cNvSpPr/>
           <p:nvPr/>
         </p:nvSpPr>
@@ -8105,7 +8062,7 @@
         <p:spPr>
           <a:xfrm>
             <a:off x="502920" y="868680"/>
-            <a:ext cx="8138160" cy="457200"/>
+            <a:ext cx="8138160" cy="475488"/>
           </a:xfrm>
           <a:prstGeom prst="rect">
             <a:avLst/>
@@ -8124,7 +8081,7 @@
               <a:buNone/>
             </a:pPr>
             <a:r>
-              <a:rPr lang="en-US" sz="1600" b="1" dirty="0">
+              <a:rPr lang="en-US" sz="1680" b="1" dirty="0">
                 <a:solidFill>
                   <a:srgbClr val="25194B"/>
                 </a:solidFill>
@@ -8132,9 +8089,9 @@
                 <a:ea typeface="Cambria" pitchFamily="34" charset="-122"/>
                 <a:cs typeface="Cambria" pitchFamily="34" charset="-120"/>
               </a:rPr>
-              <a:t>ACU gồm 1.484 bước thuộc các tác vụ không xuất hiện trong tập huấn luyện của S1.</a:t>
-            </a:r>
-            <a:endParaRPr lang="en-US" sz="1600" dirty="0"/>
+              <a:t>So với S1, GRPO-SPICE cao hơn ở toàn bộ 13 độ đo được báo cáo.</a:t>
+            </a:r>
+            <a:endParaRPr lang="en-US" sz="1680" dirty="0"/>
           </a:p>
         </p:txBody>
       </p:sp>
@@ -8146,8 +8103,8 @@
         </p:nvSpPr>
         <p:spPr>
           <a:xfrm>
-            <a:off x="731520" y="1572768"/>
-            <a:ext cx="2286000" cy="502920"/>
+            <a:off x="566928" y="1572768"/>
+            <a:ext cx="2057400" cy="502920"/>
           </a:xfrm>
           <a:prstGeom prst="rect">
             <a:avLst/>
@@ -8174,7 +8131,7 @@
                 <a:ea typeface="Cambria" pitchFamily="34" charset="-122"/>
                 <a:cs typeface="Cambria" pitchFamily="34" charset="-120"/>
               </a:rPr>
-              <a:t>+4,58</a:t>
+              <a:t>+1,55</a:t>
             </a:r>
             <a:endParaRPr lang="en-US" sz="2400" dirty="0"/>
           </a:p>
@@ -8188,8 +8145,8 @@
         </p:nvSpPr>
         <p:spPr>
           <a:xfrm>
-            <a:off x="731520" y="2103120"/>
-            <a:ext cx="2286000" cy="475488"/>
+            <a:off x="566928" y="2103120"/>
+            <a:ext cx="2057400" cy="475488"/>
           </a:xfrm>
           <a:prstGeom prst="rect">
             <a:avLst/>
@@ -8218,7 +8175,7 @@
                 <a:ea typeface="Cambria" pitchFamily="34" charset="-122"/>
                 <a:cs typeface="Cambria" pitchFamily="34" charset="-120"/>
               </a:rPr>
-              <a:t>GRPO-SPICE − S1</a:t>
+              <a:t>Executability</a:t>
             </a:r>
             <a:endParaRPr lang="en-US" sz="1250" dirty="0"/>
           </a:p>
@@ -8232,8 +8189,8 @@
         </p:nvSpPr>
         <p:spPr>
           <a:xfrm>
-            <a:off x="3429000" y="1572768"/>
-            <a:ext cx="2286000" cy="502920"/>
+            <a:off x="2706624" y="1572768"/>
+            <a:ext cx="2057400" cy="502920"/>
           </a:xfrm>
           <a:prstGeom prst="rect">
             <a:avLst/>
@@ -8260,7 +8217,7 @@
                 <a:ea typeface="Cambria" pitchFamily="34" charset="-122"/>
                 <a:cs typeface="Cambria" pitchFamily="34" charset="-120"/>
               </a:rPr>
-              <a:t>+4,04</a:t>
+              <a:t>+1,52</a:t>
             </a:r>
             <a:endParaRPr lang="en-US" sz="2400" dirty="0"/>
           </a:p>
@@ -8274,8 +8231,8 @@
         </p:nvSpPr>
         <p:spPr>
           <a:xfrm>
-            <a:off x="3429000" y="2103120"/>
-            <a:ext cx="2286000" cy="475488"/>
+            <a:off x="2706624" y="2103120"/>
+            <a:ext cx="2057400" cy="475488"/>
           </a:xfrm>
           <a:prstGeom prst="rect">
             <a:avLst/>
@@ -8304,7 +8261,7 @@
                 <a:ea typeface="Cambria" pitchFamily="34" charset="-122"/>
                 <a:cs typeface="Cambria" pitchFamily="34" charset="-120"/>
               </a:rPr>
-              <a:t>lượt GRPO thứ hai − S1</a:t>
+              <a:t>Hộp phần tử</a:t>
             </a:r>
             <a:endParaRPr lang="en-US" sz="1250" dirty="0"/>
           </a:p>
@@ -8318,8 +8275,8 @@
         </p:nvSpPr>
         <p:spPr>
           <a:xfrm>
-            <a:off x="6126480" y="1572768"/>
-            <a:ext cx="2286000" cy="502920"/>
+            <a:off x="4846320" y="1572768"/>
+            <a:ext cx="2057400" cy="502920"/>
           </a:xfrm>
           <a:prstGeom prst="rect">
             <a:avLst/>
@@ -8340,13 +8297,13 @@
             <a:r>
               <a:rPr lang="en-US" sz="2400" b="1" dirty="0">
                 <a:solidFill>
-                  <a:srgbClr val="7A7099"/>
-                </a:solidFill>
-                <a:latin typeface="Cambria" pitchFamily="34" charset="0"/>
-                <a:ea typeface="Cambria" pitchFamily="34" charset="-122"/>
-                <a:cs typeface="Cambria" pitchFamily="34" charset="-120"/>
-              </a:rPr>
-              <a:t>+4,85</a:t>
+                  <a:srgbClr val="4F417A"/>
+                </a:solidFill>
+                <a:latin typeface="Cambria" pitchFamily="34" charset="0"/>
+                <a:ea typeface="Cambria" pitchFamily="34" charset="-122"/>
+                <a:cs typeface="Cambria" pitchFamily="34" charset="-120"/>
+              </a:rPr>
+              <a:t>+1,88</a:t>
             </a:r>
             <a:endParaRPr lang="en-US" sz="2400" dirty="0"/>
           </a:p>
@@ -8360,8 +8317,8 @@
         </p:nvSpPr>
         <p:spPr>
           <a:xfrm>
-            <a:off x="6126480" y="2103120"/>
-            <a:ext cx="2286000" cy="475488"/>
+            <a:off x="4846320" y="2103120"/>
+            <a:ext cx="2057400" cy="475488"/>
           </a:xfrm>
           <a:prstGeom prst="rect">
             <a:avLst/>
@@ -8390,7 +8347,7 @@
                 <a:ea typeface="Cambria" pitchFamily="34" charset="-122"/>
                 <a:cs typeface="Cambria" pitchFamily="34" charset="-120"/>
               </a:rPr>
-              <a:t>ACE − S1</a:t>
+              <a:t>AitW đầy đủ</a:t>
             </a:r>
             <a:endParaRPr lang="en-US" sz="1250" dirty="0"/>
           </a:p>
@@ -8404,8 +8361,50 @@
         </p:nvSpPr>
         <p:spPr>
           <a:xfrm>
-            <a:off x="502920" y="2907792"/>
-            <a:ext cx="8138160" cy="566928"/>
+            <a:off x="6986016" y="1572768"/>
+            <a:ext cx="1627632" cy="502920"/>
+          </a:xfrm>
+          <a:prstGeom prst="rect">
+            <a:avLst/>
+          </a:prstGeom>
+          <a:noFill/>
+          <a:ln/>
+        </p:spPr>
+        <p:txBody>
+          <a:bodyPr wrap="square" lIns="0" tIns="0" rIns="0" bIns="0" rtlCol="0" anchor="ctr"/>
+          <a:lstStyle/>
+          <a:p>
+            <a:pPr algn="ctr" indent="0" marL="0">
+              <a:lnSpc>
+                <a:spcPct val="125000"/>
+              </a:lnSpc>
+              <a:buNone/>
+            </a:pPr>
+            <a:r>
+              <a:rPr lang="en-US" sz="2400" b="1" dirty="0">
+                <a:solidFill>
+                  <a:srgbClr val="7A7099"/>
+                </a:solidFill>
+                <a:latin typeface="Cambria" pitchFamily="34" charset="0"/>
+                <a:ea typeface="Cambria" pitchFamily="34" charset="-122"/>
+                <a:cs typeface="Cambria" pitchFamily="34" charset="-120"/>
+              </a:rPr>
+              <a:t>7/7</a:t>
+            </a:r>
+            <a:endParaRPr lang="en-US" sz="2400" dirty="0"/>
+          </a:p>
+        </p:txBody>
+      </p:sp>
+      <p:sp>
+        <p:nvSpPr>
+          <p:cNvPr id="12" name="Text 10"/>
+          <p:cNvSpPr/>
+          <p:nvPr/>
+        </p:nvSpPr>
+        <p:spPr>
+          <a:xfrm>
+            <a:off x="6986016" y="2103120"/>
+            <a:ext cx="1627632" cy="475488"/>
           </a:xfrm>
           <a:prstGeom prst="rect">
             <a:avLst/>
@@ -8426,30 +8425,30 @@
               <a:buNone/>
             </a:pPr>
             <a:r>
-              <a:rPr lang="en-US" sz="1420" b="1" dirty="0">
-                <a:solidFill>
-                  <a:srgbClr val="25194B"/>
-                </a:solidFill>
-                <a:latin typeface="Cambria" pitchFamily="34" charset="0"/>
-                <a:ea typeface="Cambria" pitchFamily="34" charset="-122"/>
-                <a:cs typeface="Cambria" pitchFamily="34" charset="-120"/>
-              </a:rPr>
-              <a:t>Cả ba mức tăng đều có khoảng tin cậy nằm trên 0.</a:t>
-            </a:r>
-            <a:endParaRPr lang="en-US" sz="1420" dirty="0"/>
-          </a:p>
-        </p:txBody>
-      </p:sp>
-      <p:sp>
-        <p:nvSpPr>
-          <p:cNvPr id="12" name="Shape 10"/>
-          <p:cNvSpPr/>
-          <p:nvPr/>
-        </p:nvSpPr>
-        <p:spPr>
-          <a:xfrm>
-            <a:off x="502920" y="3730752"/>
-            <a:ext cx="8138160" cy="1207008"/>
+              <a:rPr lang="en-US" sz="1250" b="1" dirty="0">
+                <a:solidFill>
+                  <a:srgbClr val="1A1A1A"/>
+                </a:solidFill>
+                <a:latin typeface="Cambria" pitchFamily="34" charset="0"/>
+                <a:ea typeface="Cambria" pitchFamily="34" charset="-122"/>
+                <a:cs typeface="Cambria" pitchFamily="34" charset="-120"/>
+              </a:rPr>
+              <a:t>chỉ số câu tăng</a:t>
+            </a:r>
+            <a:endParaRPr lang="en-US" sz="1250" dirty="0"/>
+          </a:p>
+        </p:txBody>
+      </p:sp>
+      <p:sp>
+        <p:nvSpPr>
+          <p:cNvPr id="13" name="Shape 11"/>
+          <p:cNvSpPr/>
+          <p:nvPr/>
+        </p:nvSpPr>
+        <p:spPr>
+          <a:xfrm>
+            <a:off x="502920" y="3090672"/>
+            <a:ext cx="8138160" cy="1353312"/>
           </a:xfrm>
           <a:prstGeom prst="roundRect">
             <a:avLst/>
@@ -8467,14 +8466,56 @@
       </p:sp>
       <p:sp>
         <p:nvSpPr>
-          <p:cNvPr id="13" name="Text 11"/>
-          <p:cNvSpPr/>
-          <p:nvPr/>
-        </p:nvSpPr>
-        <p:spPr>
-          <a:xfrm>
-            <a:off x="704088" y="3877056"/>
-            <a:ext cx="3108960" cy="475488"/>
+          <p:cNvPr id="14" name="Text 12"/>
+          <p:cNvSpPr/>
+          <p:nvPr/>
+        </p:nvSpPr>
+        <p:spPr>
+          <a:xfrm>
+            <a:off x="704088" y="3346704"/>
+            <a:ext cx="7726680" cy="384048"/>
+          </a:xfrm>
+          <a:prstGeom prst="rect">
+            <a:avLst/>
+          </a:prstGeom>
+          <a:noFill/>
+          <a:ln/>
+        </p:spPr>
+        <p:txBody>
+          <a:bodyPr wrap="square" lIns="0" tIns="0" rIns="0" bIns="0" rtlCol="0" anchor="ctr"/>
+          <a:lstStyle/>
+          <a:p>
+            <a:pPr algn="ctr" indent="0" marL="0">
+              <a:lnSpc>
+                <a:spcPct val="125000"/>
+              </a:lnSpc>
+              <a:buNone/>
+            </a:pPr>
+            <a:r>
+              <a:rPr lang="en-US" sz="1900" b="1" dirty="0">
+                <a:solidFill>
+                  <a:srgbClr val="25194B"/>
+                </a:solidFill>
+                <a:latin typeface="Cambria" pitchFamily="34" charset="0"/>
+                <a:ea typeface="Cambria" pitchFamily="34" charset="-122"/>
+                <a:cs typeface="Cambria" pitchFamily="34" charset="-120"/>
+              </a:rPr>
+              <a:t>12/12 độ đo có khoảng tin cậy đều nằm trên 0</a:t>
+            </a:r>
+            <a:endParaRPr lang="en-US" sz="1900" dirty="0"/>
+          </a:p>
+        </p:txBody>
+      </p:sp>
+      <p:sp>
+        <p:nvSpPr>
+          <p:cNvPr id="15" name="Text 13"/>
+          <p:cNvSpPr/>
+          <p:nvPr/>
+        </p:nvSpPr>
+        <p:spPr>
+          <a:xfrm>
+            <a:off x="777240" y="3822192"/>
+            <a:ext cx="7589520" cy="347472"/>
           </a:xfrm>
           <a:prstGeom prst="rect">
             <a:avLst/>
@@ -8488,108 +8529,24 @@
           </a:bodyPr>
           <a:lstStyle/>
           <a:p>
-            <a:pPr indent="0" marL="0">
-              <a:lnSpc>
-                <a:spcPct val="125000"/>
-              </a:lnSpc>
-              <a:buNone/>
-            </a:pPr>
-            <a:r>
-              <a:rPr lang="en-US" sz="1370" b="1" dirty="0">
-                <a:solidFill>
-                  <a:srgbClr val="25194B"/>
-                </a:solidFill>
-                <a:latin typeface="Cambria" pitchFamily="34" charset="0"/>
-                <a:ea typeface="Cambria" pitchFamily="34" charset="-122"/>
-                <a:cs typeface="Cambria" pitchFamily="34" charset="-120"/>
-              </a:rPr>
-              <a:t>Gộp tập kiểm chính + ACU = 5.947 bước</a:t>
-            </a:r>
-            <a:endParaRPr lang="en-US" sz="1370" dirty="0"/>
-          </a:p>
-        </p:txBody>
-      </p:sp>
-      <p:sp>
-        <p:nvSpPr>
-          <p:cNvPr id="14" name="Text 12"/>
-          <p:cNvSpPr/>
-          <p:nvPr/>
-        </p:nvSpPr>
-        <p:spPr>
-          <a:xfrm>
-            <a:off x="3703320" y="3895344"/>
-            <a:ext cx="4663440" cy="438912"/>
-          </a:xfrm>
-          <a:prstGeom prst="rect">
-            <a:avLst/>
-          </a:prstGeom>
-          <a:noFill/>
-          <a:ln/>
-        </p:spPr>
-        <p:txBody>
-          <a:bodyPr wrap="square" lIns="0" tIns="0" rIns="0" bIns="0" rtlCol="0" anchor="ctr"/>
-          <a:lstStyle/>
-          <a:p>
-            <a:pPr algn="ctr" indent="0" marL="0">
-              <a:lnSpc>
-                <a:spcPct val="125000"/>
-              </a:lnSpc>
-              <a:buNone/>
-            </a:pPr>
-            <a:r>
-              <a:rPr lang="en-US" sz="1720" b="1" dirty="0">
-                <a:solidFill>
-                  <a:srgbClr val="4F417A"/>
-                </a:solidFill>
-                <a:latin typeface="Cambria" pitchFamily="34" charset="0"/>
-                <a:ea typeface="Cambria" pitchFamily="34" charset="-122"/>
-                <a:cs typeface="Cambria" pitchFamily="34" charset="-120"/>
-              </a:rPr>
-              <a:t>GRPO-SPICE − S1 = +2,30  [ +1,62; +2,99 ]</a:t>
-            </a:r>
-            <a:endParaRPr lang="en-US" sz="1720" dirty="0"/>
-          </a:p>
-        </p:txBody>
-      </p:sp>
-      <p:sp>
-        <p:nvSpPr>
-          <p:cNvPr id="15" name="Text 13"/>
-          <p:cNvSpPr/>
-          <p:nvPr/>
-        </p:nvSpPr>
-        <p:spPr>
-          <a:xfrm>
-            <a:off x="502920" y="5230368"/>
-            <a:ext cx="8138160" cy="457200"/>
-          </a:xfrm>
-          <a:prstGeom prst="rect">
-            <a:avLst/>
-          </a:prstGeom>
-          <a:noFill/>
-          <a:ln/>
-        </p:spPr>
-        <p:txBody>
-          <a:bodyPr wrap="square" lIns="0" tIns="0" rIns="0" bIns="0" rtlCol="0" anchor="ctr"/>
-          <a:lstStyle/>
-          <a:p>
-            <a:pPr algn="ctr" indent="0" marL="0">
-              <a:lnSpc>
-                <a:spcPct val="125000"/>
-              </a:lnSpc>
-              <a:buNone/>
-            </a:pPr>
-            <a:r>
-              <a:rPr lang="en-US" sz="1380" b="1" dirty="0">
-                <a:solidFill>
-                  <a:srgbClr val="25194B"/>
-                </a:solidFill>
-                <a:latin typeface="Cambria" pitchFamily="34" charset="0"/>
-                <a:ea typeface="Cambria" pitchFamily="34" charset="-122"/>
-                <a:cs typeface="Cambria" pitchFamily="34" charset="-120"/>
-              </a:rPr>
-              <a:t>Trên ACU, 6/6 chỉ số chất lượng câu có KTC đều tăng.</a:t>
-            </a:r>
-            <a:endParaRPr lang="en-US" sz="1380" dirty="0"/>
+            <a:pPr algn="ctr" indent="0" marL="0">
+              <a:lnSpc>
+                <a:spcPct val="125000"/>
+              </a:lnSpc>
+              <a:buNone/>
+            </a:pPr>
+            <a:r>
+              <a:rPr lang="en-US" sz="1320" dirty="0">
+                <a:solidFill>
+                  <a:srgbClr val="5A5A66"/>
+                </a:solidFill>
+                <a:latin typeface="Cambria" pitchFamily="34" charset="0"/>
+                <a:ea typeface="Cambria" pitchFamily="34" charset="-122"/>
+                <a:cs typeface="Cambria" pitchFamily="34" charset="-120"/>
+              </a:rPr>
+              <a:t>METEOR tăng +1,13 điểm nhưng chưa có KTC trong thiết lập đánh giá hiện tại.</a:t>
+            </a:r>
+            <a:endParaRPr lang="en-US" sz="1320" dirty="0"/>
           </a:p>
         </p:txBody>
       </p:sp>
@@ -8601,8 +8558,8 @@
         </p:nvSpPr>
         <p:spPr>
           <a:xfrm>
-            <a:off x="502920" y="5705856"/>
-            <a:ext cx="8138160" cy="274320"/>
+            <a:off x="502920" y="4919472"/>
+            <a:ext cx="8138160" cy="658368"/>
           </a:xfrm>
           <a:prstGeom prst="rect">
             <a:avLst/>
@@ -8623,17 +8580,17 @@
               <a:buNone/>
             </a:pPr>
             <a:r>
-              <a:rPr lang="en-US" sz="1080" dirty="0">
-                <a:solidFill>
-                  <a:srgbClr val="5A5A66"/>
-                </a:solidFill>
-                <a:latin typeface="Cambria" pitchFamily="34" charset="0"/>
-                <a:ea typeface="Cambria" pitchFamily="34" charset="-122"/>
-                <a:cs typeface="Cambria" pitchFamily="34" charset="-120"/>
-              </a:rPr>
-              <a:t>ACU dùng để kiểm tra khả năng tổng quát hóa sang tác vụ mới.</a:t>
-            </a:r>
-            <a:endParaRPr lang="en-US" sz="1080" dirty="0"/>
+              <a:rPr lang="en-US" sz="1280" b="1" dirty="0">
+                <a:solidFill>
+                  <a:srgbClr val="25194B"/>
+                </a:solidFill>
+                <a:latin typeface="Cambria" pitchFamily="34" charset="0"/>
+                <a:ea typeface="Cambria" pitchFamily="34" charset="-122"/>
+                <a:cs typeface="Cambria" pitchFamily="34" charset="-120"/>
+              </a:rPr>
+              <a:t>Lượt GRPO-SPICE thứ hai vẫn cao hơn S1 lượt đầu +0,83 điểm.</a:t>
+            </a:r>
+            <a:endParaRPr lang="en-US" sz="1280" dirty="0"/>
           </a:p>
         </p:txBody>
       </p:sp>
@@ -9010,7 +8967,7 @@
                 <a:ea typeface="Cambria" pitchFamily="34" charset="-122"/>
                 <a:cs typeface="Cambria" pitchFamily="34" charset="-120"/>
               </a:rPr>
-              <a:t>Phương pháp đề xuất</a:t>
+              <a:t>Thực nghiệm và kết quả</a:t>
             </a:r>
             <a:endParaRPr lang="en-US" sz="1820" dirty="0"/>
           </a:p>
@@ -9018,28 +8975,45 @@
       </p:sp>
       <p:sp>
         <p:nvSpPr>
-          <p:cNvPr id="4" name="Shape 2"/>
-          <p:cNvSpPr/>
-          <p:nvPr/>
-        </p:nvSpPr>
-        <p:spPr>
-          <a:xfrm>
-            <a:off x="411480" y="1143000"/>
-            <a:ext cx="1508760" cy="868680"/>
-          </a:xfrm>
-          <a:prstGeom prst="roundRect">
-            <a:avLst/>
-          </a:prstGeom>
-          <a:solidFill>
-            <a:srgbClr val="FFFFFF"/>
-          </a:solidFill>
-          <a:ln w="12700">
-            <a:solidFill>
-              <a:srgbClr val="7A7099"/>
-            </a:solidFill>
-            <a:prstDash val="solid"/>
-          </a:ln>
-        </p:spPr>
+          <p:cNvPr id="4" name="Text 2"/>
+          <p:cNvSpPr/>
+          <p:nvPr/>
+        </p:nvSpPr>
+        <p:spPr>
+          <a:xfrm>
+            <a:off x="502920" y="868680"/>
+            <a:ext cx="8138160" cy="457200"/>
+          </a:xfrm>
+          <a:prstGeom prst="rect">
+            <a:avLst/>
+          </a:prstGeom>
+          <a:noFill/>
+          <a:ln/>
+        </p:spPr>
+        <p:txBody>
+          <a:bodyPr wrap="square" lIns="0" tIns="0" rIns="0" bIns="0" rtlCol="0" anchor="ctr"/>
+          <a:lstStyle/>
+          <a:p>
+            <a:pPr algn="ctr" indent="0" marL="0">
+              <a:lnSpc>
+                <a:spcPct val="125000"/>
+              </a:lnSpc>
+              <a:buNone/>
+            </a:pPr>
+            <a:r>
+              <a:rPr lang="en-US" sz="1600" b="1" dirty="0">
+                <a:solidFill>
+                  <a:srgbClr val="25194B"/>
+                </a:solidFill>
+                <a:latin typeface="Cambria" pitchFamily="34" charset="0"/>
+                <a:ea typeface="Cambria" pitchFamily="34" charset="-122"/>
+                <a:cs typeface="Cambria" pitchFamily="34" charset="-120"/>
+              </a:rPr>
+              <a:t>ACU gồm 1.484 bước thuộc các tác vụ không xuất hiện trong tập huấn luyện của S1.</a:t>
+            </a:r>
+            <a:endParaRPr lang="en-US" sz="1600" dirty="0"/>
+          </a:p>
+        </p:txBody>
       </p:sp>
       <p:sp>
         <p:nvSpPr>
@@ -9049,8 +9023,50 @@
         </p:nvSpPr>
         <p:spPr>
           <a:xfrm>
-            <a:off x="411480" y="1143000"/>
-            <a:ext cx="1508760" cy="868680"/>
+            <a:off x="731520" y="1572768"/>
+            <a:ext cx="2286000" cy="502920"/>
+          </a:xfrm>
+          <a:prstGeom prst="rect">
+            <a:avLst/>
+          </a:prstGeom>
+          <a:noFill/>
+          <a:ln/>
+        </p:spPr>
+        <p:txBody>
+          <a:bodyPr wrap="square" lIns="0" tIns="0" rIns="0" bIns="0" rtlCol="0" anchor="ctr"/>
+          <a:lstStyle/>
+          <a:p>
+            <a:pPr algn="ctr" indent="0" marL="0">
+              <a:lnSpc>
+                <a:spcPct val="125000"/>
+              </a:lnSpc>
+              <a:buNone/>
+            </a:pPr>
+            <a:r>
+              <a:rPr lang="en-US" sz="2400" b="1" dirty="0">
+                <a:solidFill>
+                  <a:srgbClr val="4F417A"/>
+                </a:solidFill>
+                <a:latin typeface="Cambria" pitchFamily="34" charset="0"/>
+                <a:ea typeface="Cambria" pitchFamily="34" charset="-122"/>
+                <a:cs typeface="Cambria" pitchFamily="34" charset="-120"/>
+              </a:rPr>
+              <a:t>+4,58</a:t>
+            </a:r>
+            <a:endParaRPr lang="en-US" sz="2400" dirty="0"/>
+          </a:p>
+        </p:txBody>
+      </p:sp>
+      <p:sp>
+        <p:nvSpPr>
+          <p:cNvPr id="6" name="Text 4"/>
+          <p:cNvSpPr/>
+          <p:nvPr/>
+        </p:nvSpPr>
+        <p:spPr>
+          <a:xfrm>
+            <a:off x="731520" y="2103120"/>
+            <a:ext cx="2286000" cy="475488"/>
           </a:xfrm>
           <a:prstGeom prst="rect">
             <a:avLst/>
@@ -9071,7 +9087,7 @@
               <a:buNone/>
             </a:pPr>
             <a:r>
-              <a:rPr lang="en-US" sz="1450" b="1" dirty="0">
+              <a:rPr lang="en-US" sz="1250" b="1" dirty="0">
                 <a:solidFill>
                   <a:srgbClr val="1A1A1A"/>
                 </a:solidFill>
@@ -9079,60 +9095,53 @@
                 <a:ea typeface="Cambria" pitchFamily="34" charset="-122"/>
                 <a:cs typeface="Cambria" pitchFamily="34" charset="-120"/>
               </a:rPr>
-              <a:t>Câu ban đầu</a:t>
-            </a:r>
-            <a:endParaRPr lang="en-US" sz="1450" dirty="0"/>
-          </a:p>
-        </p:txBody>
-      </p:sp>
-      <p:sp>
-        <p:nvSpPr>
-          <p:cNvPr id="6" name="Shape 4"/>
-          <p:cNvSpPr/>
-          <p:nvPr/>
-        </p:nvSpPr>
-        <p:spPr>
-          <a:xfrm>
-            <a:off x="2011680" y="1581912"/>
-            <a:ext cx="347472" cy="0"/>
-          </a:xfrm>
-          <a:prstGeom prst="line">
-            <a:avLst/>
-          </a:prstGeom>
-          <a:noFill/>
-          <a:ln w="25400">
-            <a:solidFill>
-              <a:srgbClr val="4F417A"/>
-            </a:solidFill>
-            <a:prstDash val="solid"/>
-            <a:tailEnd type="triangle"/>
-          </a:ln>
-        </p:spPr>
-      </p:sp>
-      <p:sp>
-        <p:nvSpPr>
-          <p:cNvPr id="7" name="Shape 5"/>
-          <p:cNvSpPr/>
-          <p:nvPr/>
-        </p:nvSpPr>
-        <p:spPr>
-          <a:xfrm>
-            <a:off x="2450592" y="1051560"/>
-            <a:ext cx="1737360" cy="1051560"/>
-          </a:xfrm>
-          <a:prstGeom prst="roundRect">
-            <a:avLst/>
-          </a:prstGeom>
-          <a:solidFill>
-            <a:srgbClr val="F3F2F5"/>
-          </a:solidFill>
-          <a:ln w="12700">
-            <a:solidFill>
-              <a:srgbClr val="25194B"/>
-            </a:solidFill>
-            <a:prstDash val="solid"/>
-          </a:ln>
-        </p:spPr>
+              <a:t>GRPO-SPICE − S1</a:t>
+            </a:r>
+            <a:endParaRPr lang="en-US" sz="1250" dirty="0"/>
+          </a:p>
+        </p:txBody>
+      </p:sp>
+      <p:sp>
+        <p:nvSpPr>
+          <p:cNvPr id="7" name="Text 5"/>
+          <p:cNvSpPr/>
+          <p:nvPr/>
+        </p:nvSpPr>
+        <p:spPr>
+          <a:xfrm>
+            <a:off x="3429000" y="1572768"/>
+            <a:ext cx="2286000" cy="502920"/>
+          </a:xfrm>
+          <a:prstGeom prst="rect">
+            <a:avLst/>
+          </a:prstGeom>
+          <a:noFill/>
+          <a:ln/>
+        </p:spPr>
+        <p:txBody>
+          <a:bodyPr wrap="square" lIns="0" tIns="0" rIns="0" bIns="0" rtlCol="0" anchor="ctr"/>
+          <a:lstStyle/>
+          <a:p>
+            <a:pPr algn="ctr" indent="0" marL="0">
+              <a:lnSpc>
+                <a:spcPct val="125000"/>
+              </a:lnSpc>
+              <a:buNone/>
+            </a:pPr>
+            <a:r>
+              <a:rPr lang="en-US" sz="2400" b="1" dirty="0">
+                <a:solidFill>
+                  <a:srgbClr val="4F417A"/>
+                </a:solidFill>
+                <a:latin typeface="Cambria" pitchFamily="34" charset="0"/>
+                <a:ea typeface="Cambria" pitchFamily="34" charset="-122"/>
+                <a:cs typeface="Cambria" pitchFamily="34" charset="-120"/>
+              </a:rPr>
+              <a:t>+4,04</a:t>
+            </a:r>
+            <a:endParaRPr lang="en-US" sz="2400" dirty="0"/>
+          </a:p>
+        </p:txBody>
       </p:sp>
       <p:sp>
         <p:nvSpPr>
@@ -9142,8 +9151,8 @@
         </p:nvSpPr>
         <p:spPr>
           <a:xfrm>
-            <a:off x="2450592" y="1051560"/>
-            <a:ext cx="1737360" cy="1051560"/>
+            <a:off x="3429000" y="2103120"/>
+            <a:ext cx="2286000" cy="475488"/>
           </a:xfrm>
           <a:prstGeom prst="rect">
             <a:avLst/>
@@ -9164,7 +9173,7 @@
               <a:buNone/>
             </a:pPr>
             <a:r>
-              <a:rPr lang="en-US" sz="1400" b="1" dirty="0">
+              <a:rPr lang="en-US" sz="1250" b="1" dirty="0">
                 <a:solidFill>
                   <a:srgbClr val="1A1A1A"/>
                 </a:solidFill>
@@ -9172,91 +9181,64 @@
                 <a:ea typeface="Cambria" pitchFamily="34" charset="-122"/>
                 <a:cs typeface="Cambria" pitchFamily="34" charset="-120"/>
               </a:rPr>
-              <a:t>Truy hồi 4 câu</a:t>
-            </a:r>
-            <a:endParaRPr lang="en-US" sz="1400" dirty="0"/>
-          </a:p>
-          <a:p>
-            <a:pPr algn="ctr" indent="0" marL="0">
-              <a:lnSpc>
-                <a:spcPct val="125000"/>
-              </a:lnSpc>
-              <a:buNone/>
-            </a:pPr>
-            <a:r>
-              <a:rPr lang="en-US" sz="1400" b="1" dirty="0">
-                <a:solidFill>
-                  <a:srgbClr val="1A1A1A"/>
-                </a:solidFill>
-                <a:latin typeface="Cambria" pitchFamily="34" charset="0"/>
-                <a:ea typeface="Cambria" pitchFamily="34" charset="-122"/>
-                <a:cs typeface="Cambria" pitchFamily="34" charset="-120"/>
-              </a:rPr>
-              <a:t>ví dụ từ train</a:t>
-            </a:r>
-            <a:endParaRPr lang="en-US" sz="1400" dirty="0"/>
-          </a:p>
-        </p:txBody>
-      </p:sp>
-      <p:sp>
-        <p:nvSpPr>
-          <p:cNvPr id="9" name="Shape 7"/>
-          <p:cNvSpPr/>
-          <p:nvPr/>
-        </p:nvSpPr>
-        <p:spPr>
-          <a:xfrm>
-            <a:off x="4279392" y="1581912"/>
-            <a:ext cx="347472" cy="0"/>
-          </a:xfrm>
-          <a:prstGeom prst="line">
-            <a:avLst/>
-          </a:prstGeom>
-          <a:noFill/>
-          <a:ln w="25400">
-            <a:solidFill>
-              <a:srgbClr val="4F417A"/>
-            </a:solidFill>
-            <a:prstDash val="solid"/>
-            <a:tailEnd type="triangle"/>
-          </a:ln>
-        </p:spPr>
-      </p:sp>
-      <p:sp>
-        <p:nvSpPr>
-          <p:cNvPr id="10" name="Shape 8"/>
-          <p:cNvSpPr/>
-          <p:nvPr/>
-        </p:nvSpPr>
-        <p:spPr>
-          <a:xfrm>
-            <a:off x="4718304" y="1051560"/>
-            <a:ext cx="1417320" cy="1051560"/>
-          </a:xfrm>
-          <a:prstGeom prst="roundRect">
-            <a:avLst/>
-          </a:prstGeom>
-          <a:solidFill>
-            <a:srgbClr val="F3F2F5"/>
-          </a:solidFill>
-          <a:ln w="12700">
-            <a:solidFill>
-              <a:srgbClr val="4F417A"/>
-            </a:solidFill>
-            <a:prstDash val="solid"/>
-          </a:ln>
-        </p:spPr>
-      </p:sp>
-      <p:sp>
-        <p:nvSpPr>
-          <p:cNvPr id="11" name="Text 9"/>
-          <p:cNvSpPr/>
-          <p:nvPr/>
-        </p:nvSpPr>
-        <p:spPr>
-          <a:xfrm>
-            <a:off x="4718304" y="1051560"/>
-            <a:ext cx="1417320" cy="1051560"/>
+              <a:t>lượt GRPO thứ hai − S1</a:t>
+            </a:r>
+            <a:endParaRPr lang="en-US" sz="1250" dirty="0"/>
+          </a:p>
+        </p:txBody>
+      </p:sp>
+      <p:sp>
+        <p:nvSpPr>
+          <p:cNvPr id="9" name="Text 7"/>
+          <p:cNvSpPr/>
+          <p:nvPr/>
+        </p:nvSpPr>
+        <p:spPr>
+          <a:xfrm>
+            <a:off x="6126480" y="1572768"/>
+            <a:ext cx="2286000" cy="502920"/>
+          </a:xfrm>
+          <a:prstGeom prst="rect">
+            <a:avLst/>
+          </a:prstGeom>
+          <a:noFill/>
+          <a:ln/>
+        </p:spPr>
+        <p:txBody>
+          <a:bodyPr wrap="square" lIns="0" tIns="0" rIns="0" bIns="0" rtlCol="0" anchor="ctr"/>
+          <a:lstStyle/>
+          <a:p>
+            <a:pPr algn="ctr" indent="0" marL="0">
+              <a:lnSpc>
+                <a:spcPct val="125000"/>
+              </a:lnSpc>
+              <a:buNone/>
+            </a:pPr>
+            <a:r>
+              <a:rPr lang="en-US" sz="2400" b="1" dirty="0">
+                <a:solidFill>
+                  <a:srgbClr val="7A7099"/>
+                </a:solidFill>
+                <a:latin typeface="Cambria" pitchFamily="34" charset="0"/>
+                <a:ea typeface="Cambria" pitchFamily="34" charset="-122"/>
+                <a:cs typeface="Cambria" pitchFamily="34" charset="-120"/>
+              </a:rPr>
+              <a:t>+4,85</a:t>
+            </a:r>
+            <a:endParaRPr lang="en-US" sz="2400" dirty="0"/>
+          </a:p>
+        </p:txBody>
+      </p:sp>
+      <p:sp>
+        <p:nvSpPr>
+          <p:cNvPr id="10" name="Text 8"/>
+          <p:cNvSpPr/>
+          <p:nvPr/>
+        </p:nvSpPr>
+        <p:spPr>
+          <a:xfrm>
+            <a:off x="6126480" y="2103120"/>
+            <a:ext cx="2286000" cy="475488"/>
           </a:xfrm>
           <a:prstGeom prst="rect">
             <a:avLst/>
@@ -9277,7 +9259,7 @@
               <a:buNone/>
             </a:pPr>
             <a:r>
-              <a:rPr lang="en-US" sz="1400" b="1" dirty="0">
+              <a:rPr lang="en-US" sz="1250" b="1" dirty="0">
                 <a:solidFill>
                   <a:srgbClr val="1A1A1A"/>
                 </a:solidFill>
@@ -9285,29 +9267,53 @@
                 <a:ea typeface="Cambria" pitchFamily="34" charset="-122"/>
                 <a:cs typeface="Cambria" pitchFamily="34" charset="-120"/>
               </a:rPr>
-              <a:t>Sinh câu</a:t>
-            </a:r>
-            <a:endParaRPr lang="en-US" sz="1400" dirty="0"/>
-          </a:p>
-          <a:p>
-            <a:pPr algn="ctr" indent="0" marL="0">
-              <a:lnSpc>
-                <a:spcPct val="125000"/>
-              </a:lnSpc>
-              <a:buNone/>
-            </a:pPr>
-            <a:r>
-              <a:rPr lang="en-US" sz="1400" b="1" dirty="0">
-                <a:solidFill>
-                  <a:srgbClr val="1A1A1A"/>
-                </a:solidFill>
-                <a:latin typeface="Cambria" pitchFamily="34" charset="0"/>
-                <a:ea typeface="Cambria" pitchFamily="34" charset="-122"/>
-                <a:cs typeface="Cambria" pitchFamily="34" charset="-120"/>
-              </a:rPr>
-              <a:t>ứng viên</a:t>
-            </a:r>
-            <a:endParaRPr lang="en-US" sz="1400" dirty="0"/>
+              <a:t>ACE − S1</a:t>
+            </a:r>
+            <a:endParaRPr lang="en-US" sz="1250" dirty="0"/>
+          </a:p>
+        </p:txBody>
+      </p:sp>
+      <p:sp>
+        <p:nvSpPr>
+          <p:cNvPr id="11" name="Text 9"/>
+          <p:cNvSpPr/>
+          <p:nvPr/>
+        </p:nvSpPr>
+        <p:spPr>
+          <a:xfrm>
+            <a:off x="502920" y="2907792"/>
+            <a:ext cx="8138160" cy="566928"/>
+          </a:xfrm>
+          <a:prstGeom prst="rect">
+            <a:avLst/>
+          </a:prstGeom>
+          <a:noFill/>
+          <a:ln/>
+        </p:spPr>
+        <p:txBody>
+          <a:bodyPr wrap="square" lIns="0" tIns="0" rIns="0" bIns="0" rtlCol="0" anchor="ctr">
+            <a:normAutofit/>
+          </a:bodyPr>
+          <a:lstStyle/>
+          <a:p>
+            <a:pPr algn="ctr" indent="0" marL="0">
+              <a:lnSpc>
+                <a:spcPct val="125000"/>
+              </a:lnSpc>
+              <a:buNone/>
+            </a:pPr>
+            <a:r>
+              <a:rPr lang="en-US" sz="1420" b="1" dirty="0">
+                <a:solidFill>
+                  <a:srgbClr val="25194B"/>
+                </a:solidFill>
+                <a:latin typeface="Cambria" pitchFamily="34" charset="0"/>
+                <a:ea typeface="Cambria" pitchFamily="34" charset="-122"/>
+                <a:cs typeface="Cambria" pitchFamily="34" charset="-120"/>
+              </a:rPr>
+              <a:t>Cả ba mức tăng đều có khoảng tin cậy nằm trên 0.</a:t>
+            </a:r>
+            <a:endParaRPr lang="en-US" sz="1420" dirty="0"/>
           </a:p>
         </p:txBody>
       </p:sp>
@@ -9319,32 +9325,8 @@
         </p:nvSpPr>
         <p:spPr>
           <a:xfrm>
-            <a:off x="6227064" y="1581912"/>
-            <a:ext cx="347472" cy="0"/>
-          </a:xfrm>
-          <a:prstGeom prst="line">
-            <a:avLst/>
-          </a:prstGeom>
-          <a:noFill/>
-          <a:ln w="25400">
-            <a:solidFill>
-              <a:srgbClr val="4F417A"/>
-            </a:solidFill>
-            <a:prstDash val="solid"/>
-            <a:tailEnd type="triangle"/>
-          </a:ln>
-        </p:spPr>
-      </p:sp>
-      <p:sp>
-        <p:nvSpPr>
-          <p:cNvPr id="13" name="Shape 11"/>
-          <p:cNvSpPr/>
-          <p:nvPr/>
-        </p:nvSpPr>
-        <p:spPr>
-          <a:xfrm>
-            <a:off x="6665976" y="960120"/>
-            <a:ext cx="2011680" cy="1234440"/>
+            <a:off x="502920" y="3730752"/>
+            <a:ext cx="8138160" cy="1207008"/>
           </a:xfrm>
           <a:prstGeom prst="roundRect">
             <a:avLst/>
@@ -9362,14 +9344,14 @@
       </p:sp>
       <p:sp>
         <p:nvSpPr>
-          <p:cNvPr id="14" name="Text 12"/>
-          <p:cNvSpPr/>
-          <p:nvPr/>
-        </p:nvSpPr>
-        <p:spPr>
-          <a:xfrm>
-            <a:off x="6665976" y="960120"/>
-            <a:ext cx="2011680" cy="1234440"/>
+          <p:cNvPr id="13" name="Text 11"/>
+          <p:cNvSpPr/>
+          <p:nvPr/>
+        </p:nvSpPr>
+        <p:spPr>
+          <a:xfrm>
+            <a:off x="704088" y="3877056"/>
+            <a:ext cx="3108960" cy="475488"/>
           </a:xfrm>
           <a:prstGeom prst="rect">
             <a:avLst/>
@@ -9383,71 +9365,110 @@
           </a:bodyPr>
           <a:lstStyle/>
           <a:p>
-            <a:pPr algn="ctr" indent="0" marL="0">
-              <a:lnSpc>
-                <a:spcPct val="125000"/>
-              </a:lnSpc>
-              <a:buNone/>
-            </a:pPr>
-            <a:r>
-              <a:rPr lang="en-US" sz="1400" b="1" dirty="0">
-                <a:solidFill>
-                  <a:srgbClr val="1A1A1A"/>
-                </a:solidFill>
-                <a:latin typeface="Cambria" pitchFamily="34" charset="0"/>
-                <a:ea typeface="Cambria" pitchFamily="34" charset="-122"/>
-                <a:cs typeface="Cambria" pitchFamily="34" charset="-120"/>
-              </a:rPr>
-              <a:t>Kiểm tra</a:t>
-            </a:r>
-            <a:endParaRPr lang="en-US" sz="1400" dirty="0"/>
-          </a:p>
-          <a:p>
-            <a:pPr algn="ctr" indent="0" marL="0">
-              <a:lnSpc>
-                <a:spcPct val="125000"/>
-              </a:lnSpc>
-              <a:buNone/>
-            </a:pPr>
-            <a:r>
-              <a:rPr lang="en-US" sz="1400" b="1" dirty="0">
-                <a:solidFill>
-                  <a:srgbClr val="1A1A1A"/>
-                </a:solidFill>
-                <a:latin typeface="Cambria" pitchFamily="34" charset="0"/>
-                <a:ea typeface="Cambria" pitchFamily="34" charset="-122"/>
-                <a:cs typeface="Cambria" pitchFamily="34" charset="-120"/>
-              </a:rPr>
-              <a:t>2 điều kiện chọn lọc</a:t>
-            </a:r>
-            <a:endParaRPr lang="en-US" sz="1400" dirty="0"/>
-          </a:p>
-        </p:txBody>
-      </p:sp>
-      <p:sp>
-        <p:nvSpPr>
-          <p:cNvPr id="15" name="Shape 13"/>
-          <p:cNvSpPr/>
-          <p:nvPr/>
-        </p:nvSpPr>
-        <p:spPr>
-          <a:xfrm>
-            <a:off x="502920" y="3127248"/>
-            <a:ext cx="3840480" cy="1078992"/>
-          </a:xfrm>
-          <a:prstGeom prst="roundRect">
-            <a:avLst/>
-          </a:prstGeom>
-          <a:solidFill>
-            <a:srgbClr val="F3F2F5"/>
-          </a:solidFill>
-          <a:ln w="12700">
-            <a:solidFill>
-              <a:srgbClr val="4F417A"/>
-            </a:solidFill>
-            <a:prstDash val="solid"/>
-          </a:ln>
-        </p:spPr>
+            <a:pPr indent="0" marL="0">
+              <a:lnSpc>
+                <a:spcPct val="125000"/>
+              </a:lnSpc>
+              <a:buNone/>
+            </a:pPr>
+            <a:r>
+              <a:rPr lang="en-US" sz="1370" b="1" dirty="0">
+                <a:solidFill>
+                  <a:srgbClr val="25194B"/>
+                </a:solidFill>
+                <a:latin typeface="Cambria" pitchFamily="34" charset="0"/>
+                <a:ea typeface="Cambria" pitchFamily="34" charset="-122"/>
+                <a:cs typeface="Cambria" pitchFamily="34" charset="-120"/>
+              </a:rPr>
+              <a:t>Gộp tập kiểm chính + ACU = 5.947 bước</a:t>
+            </a:r>
+            <a:endParaRPr lang="en-US" sz="1370" dirty="0"/>
+          </a:p>
+        </p:txBody>
+      </p:sp>
+      <p:sp>
+        <p:nvSpPr>
+          <p:cNvPr id="14" name="Text 12"/>
+          <p:cNvSpPr/>
+          <p:nvPr/>
+        </p:nvSpPr>
+        <p:spPr>
+          <a:xfrm>
+            <a:off x="3703320" y="3895344"/>
+            <a:ext cx="4663440" cy="438912"/>
+          </a:xfrm>
+          <a:prstGeom prst="rect">
+            <a:avLst/>
+          </a:prstGeom>
+          <a:noFill/>
+          <a:ln/>
+        </p:spPr>
+        <p:txBody>
+          <a:bodyPr wrap="square" lIns="0" tIns="0" rIns="0" bIns="0" rtlCol="0" anchor="ctr"/>
+          <a:lstStyle/>
+          <a:p>
+            <a:pPr algn="ctr" indent="0" marL="0">
+              <a:lnSpc>
+                <a:spcPct val="125000"/>
+              </a:lnSpc>
+              <a:buNone/>
+            </a:pPr>
+            <a:r>
+              <a:rPr lang="en-US" sz="1720" b="1" dirty="0">
+                <a:solidFill>
+                  <a:srgbClr val="4F417A"/>
+                </a:solidFill>
+                <a:latin typeface="Cambria" pitchFamily="34" charset="0"/>
+                <a:ea typeface="Cambria" pitchFamily="34" charset="-122"/>
+                <a:cs typeface="Cambria" pitchFamily="34" charset="-120"/>
+              </a:rPr>
+              <a:t>GRPO-SPICE − S1 = +2,30  [ +1,62; +2,99 ]</a:t>
+            </a:r>
+            <a:endParaRPr lang="en-US" sz="1720" dirty="0"/>
+          </a:p>
+        </p:txBody>
+      </p:sp>
+      <p:sp>
+        <p:nvSpPr>
+          <p:cNvPr id="15" name="Text 13"/>
+          <p:cNvSpPr/>
+          <p:nvPr/>
+        </p:nvSpPr>
+        <p:spPr>
+          <a:xfrm>
+            <a:off x="502920" y="5230368"/>
+            <a:ext cx="8138160" cy="457200"/>
+          </a:xfrm>
+          <a:prstGeom prst="rect">
+            <a:avLst/>
+          </a:prstGeom>
+          <a:noFill/>
+          <a:ln/>
+        </p:spPr>
+        <p:txBody>
+          <a:bodyPr wrap="square" lIns="0" tIns="0" rIns="0" bIns="0" rtlCol="0" anchor="ctr"/>
+          <a:lstStyle/>
+          <a:p>
+            <a:pPr algn="ctr" indent="0" marL="0">
+              <a:lnSpc>
+                <a:spcPct val="125000"/>
+              </a:lnSpc>
+              <a:buNone/>
+            </a:pPr>
+            <a:r>
+              <a:rPr lang="en-US" sz="1380" b="1" dirty="0">
+                <a:solidFill>
+                  <a:srgbClr val="25194B"/>
+                </a:solidFill>
+                <a:latin typeface="Cambria" pitchFamily="34" charset="0"/>
+                <a:ea typeface="Cambria" pitchFamily="34" charset="-122"/>
+                <a:cs typeface="Cambria" pitchFamily="34" charset="-120"/>
+              </a:rPr>
+              <a:t>Trên ACU, 6/6 chỉ số chất lượng câu có KTC đều tăng.</a:t>
+            </a:r>
+            <a:endParaRPr lang="en-US" sz="1380" dirty="0"/>
+          </a:p>
+        </p:txBody>
       </p:sp>
       <p:sp>
         <p:nvSpPr>
@@ -9457,8 +9478,8 @@
         </p:nvSpPr>
         <p:spPr>
           <a:xfrm>
-            <a:off x="667512" y="3127248"/>
-            <a:ext cx="3511296" cy="1078992"/>
+            <a:off x="502920" y="5705856"/>
+            <a:ext cx="8138160" cy="274320"/>
           </a:xfrm>
           <a:prstGeom prst="rect">
             <a:avLst/>
@@ -9479,230 +9500,23 @@
               <a:buNone/>
             </a:pPr>
             <a:r>
-              <a:rPr lang="en-US" sz="1400" b="1" dirty="0">
-                <a:solidFill>
-                  <a:srgbClr val="1A1A1A"/>
-                </a:solidFill>
-                <a:latin typeface="Cambria" pitchFamily="34" charset="0"/>
-                <a:ea typeface="Cambria" pitchFamily="34" charset="-122"/>
-                <a:cs typeface="Cambria" pitchFamily="34" charset="-120"/>
-              </a:rPr>
-              <a:t>1 · Câu ứng viên phải giống hoàn toàn một trong bốn câu ví dụ được truy hồi.</a:t>
-            </a:r>
-            <a:endParaRPr lang="en-US" sz="1400" dirty="0"/>
+              <a:rPr lang="en-US" sz="1080" dirty="0">
+                <a:solidFill>
+                  <a:srgbClr val="5A5A66"/>
+                </a:solidFill>
+                <a:latin typeface="Cambria" pitchFamily="34" charset="0"/>
+                <a:ea typeface="Cambria" pitchFamily="34" charset="-122"/>
+                <a:cs typeface="Cambria" pitchFamily="34" charset="-120"/>
+              </a:rPr>
+              <a:t>ACU dùng để kiểm tra khả năng tổng quát hóa sang tác vụ mới.</a:t>
+            </a:r>
+            <a:endParaRPr lang="en-US" sz="1080" dirty="0"/>
           </a:p>
         </p:txBody>
       </p:sp>
       <p:sp>
         <p:nvSpPr>
           <p:cNvPr id="17" name="Shape 15"/>
-          <p:cNvSpPr/>
-          <p:nvPr/>
-        </p:nvSpPr>
-        <p:spPr>
-          <a:xfrm>
-            <a:off x="4800600" y="3127248"/>
-            <a:ext cx="3840480" cy="1078992"/>
-          </a:xfrm>
-          <a:prstGeom prst="roundRect">
-            <a:avLst/>
-          </a:prstGeom>
-          <a:solidFill>
-            <a:srgbClr val="F3F2F5"/>
-          </a:solidFill>
-          <a:ln w="12700">
-            <a:solidFill>
-              <a:srgbClr val="4F417A"/>
-            </a:solidFill>
-            <a:prstDash val="solid"/>
-          </a:ln>
-        </p:spPr>
-      </p:sp>
-      <p:sp>
-        <p:nvSpPr>
-          <p:cNvPr id="18" name="Text 16"/>
-          <p:cNvSpPr/>
-          <p:nvPr/>
-        </p:nvSpPr>
-        <p:spPr>
-          <a:xfrm>
-            <a:off x="4965192" y="3127248"/>
-            <a:ext cx="3511296" cy="1078992"/>
-          </a:xfrm>
-          <a:prstGeom prst="rect">
-            <a:avLst/>
-          </a:prstGeom>
-          <a:noFill/>
-          <a:ln/>
-        </p:spPr>
-        <p:txBody>
-          <a:bodyPr wrap="square" lIns="0" tIns="0" rIns="0" bIns="0" rtlCol="0" anchor="ctr">
-            <a:normAutofit/>
-          </a:bodyPr>
-          <a:lstStyle/>
-          <a:p>
-            <a:pPr algn="ctr" indent="0" marL="0">
-              <a:lnSpc>
-                <a:spcPct val="125000"/>
-              </a:lnSpc>
-              <a:buNone/>
-            </a:pPr>
-            <a:r>
-              <a:rPr lang="en-US" sz="1400" b="1" dirty="0">
-                <a:solidFill>
-                  <a:srgbClr val="1A1A1A"/>
-                </a:solidFill>
-                <a:latin typeface="Cambria" pitchFamily="34" charset="0"/>
-                <a:ea typeface="Cambria" pitchFamily="34" charset="-122"/>
-                <a:cs typeface="Cambria" pitchFamily="34" charset="-120"/>
-              </a:rPr>
-              <a:t>2 · Động từ đầu câu phải cùng lớp thao tác với câu ban đầu.</a:t>
-            </a:r>
-            <a:endParaRPr lang="en-US" sz="1400" dirty="0"/>
-          </a:p>
-        </p:txBody>
-      </p:sp>
-      <p:sp>
-        <p:nvSpPr>
-          <p:cNvPr id="19" name="Shape 17"/>
-          <p:cNvSpPr/>
-          <p:nvPr/>
-        </p:nvSpPr>
-        <p:spPr>
-          <a:xfrm>
-            <a:off x="1645920" y="4663440"/>
-            <a:ext cx="2560320" cy="749808"/>
-          </a:xfrm>
-          <a:prstGeom prst="roundRect">
-            <a:avLst/>
-          </a:prstGeom>
-          <a:solidFill>
-            <a:srgbClr val="F3F2F5"/>
-          </a:solidFill>
-          <a:ln w="12700">
-            <a:solidFill>
-              <a:srgbClr val="4F417A"/>
-            </a:solidFill>
-            <a:prstDash val="solid"/>
-          </a:ln>
-        </p:spPr>
-      </p:sp>
-      <p:sp>
-        <p:nvSpPr>
-          <p:cNvPr id="20" name="Text 18"/>
-          <p:cNvSpPr/>
-          <p:nvPr/>
-        </p:nvSpPr>
-        <p:spPr>
-          <a:xfrm>
-            <a:off x="1645920" y="4663440"/>
-            <a:ext cx="2560320" cy="749808"/>
-          </a:xfrm>
-          <a:prstGeom prst="rect">
-            <a:avLst/>
-          </a:prstGeom>
-          <a:noFill/>
-          <a:ln/>
-        </p:spPr>
-        <p:txBody>
-          <a:bodyPr wrap="square" lIns="0" tIns="0" rIns="0" bIns="0" rtlCol="0" anchor="ctr">
-            <a:normAutofit/>
-          </a:bodyPr>
-          <a:lstStyle/>
-          <a:p>
-            <a:pPr algn="ctr" indent="0" marL="0">
-              <a:lnSpc>
-                <a:spcPct val="125000"/>
-              </a:lnSpc>
-              <a:buNone/>
-            </a:pPr>
-            <a:r>
-              <a:rPr lang="en-US" sz="1400" b="1" dirty="0">
-                <a:solidFill>
-                  <a:srgbClr val="1A1A1A"/>
-                </a:solidFill>
-                <a:latin typeface="Cambria" pitchFamily="34" charset="0"/>
-                <a:ea typeface="Cambria" pitchFamily="34" charset="-122"/>
-                <a:cs typeface="Cambria" pitchFamily="34" charset="-120"/>
-              </a:rPr>
-              <a:t>Đủ điều kiện → dùng câu mới</a:t>
-            </a:r>
-            <a:endParaRPr lang="en-US" sz="1400" dirty="0"/>
-          </a:p>
-        </p:txBody>
-      </p:sp>
-      <p:sp>
-        <p:nvSpPr>
-          <p:cNvPr id="21" name="Shape 19"/>
-          <p:cNvSpPr/>
-          <p:nvPr/>
-        </p:nvSpPr>
-        <p:spPr>
-          <a:xfrm>
-            <a:off x="4937760" y="4663440"/>
-            <a:ext cx="2560320" cy="749808"/>
-          </a:xfrm>
-          <a:prstGeom prst="roundRect">
-            <a:avLst/>
-          </a:prstGeom>
-          <a:solidFill>
-            <a:srgbClr val="FFFFFF"/>
-          </a:solidFill>
-          <a:ln w="12700">
-            <a:solidFill>
-              <a:srgbClr val="7A7099"/>
-            </a:solidFill>
-            <a:prstDash val="solid"/>
-          </a:ln>
-        </p:spPr>
-      </p:sp>
-      <p:sp>
-        <p:nvSpPr>
-          <p:cNvPr id="22" name="Text 20"/>
-          <p:cNvSpPr/>
-          <p:nvPr/>
-        </p:nvSpPr>
-        <p:spPr>
-          <a:xfrm>
-            <a:off x="4937760" y="4663440"/>
-            <a:ext cx="2560320" cy="749808"/>
-          </a:xfrm>
-          <a:prstGeom prst="rect">
-            <a:avLst/>
-          </a:prstGeom>
-          <a:noFill/>
-          <a:ln/>
-        </p:spPr>
-        <p:txBody>
-          <a:bodyPr wrap="square" lIns="0" tIns="0" rIns="0" bIns="0" rtlCol="0" anchor="ctr">
-            <a:normAutofit/>
-          </a:bodyPr>
-          <a:lstStyle/>
-          <a:p>
-            <a:pPr algn="ctr" indent="0" marL="0">
-              <a:lnSpc>
-                <a:spcPct val="125000"/>
-              </a:lnSpc>
-              <a:buNone/>
-            </a:pPr>
-            <a:r>
-              <a:rPr lang="en-US" sz="1400" b="1" dirty="0">
-                <a:solidFill>
-                  <a:srgbClr val="1A1A1A"/>
-                </a:solidFill>
-                <a:latin typeface="Cambria" pitchFamily="34" charset="0"/>
-                <a:ea typeface="Cambria" pitchFamily="34" charset="-122"/>
-                <a:cs typeface="Cambria" pitchFamily="34" charset="-120"/>
-              </a:rPr>
-              <a:t>Không đủ → giữ câu ban đầu</a:t>
-            </a:r>
-            <a:endParaRPr lang="en-US" sz="1400" dirty="0"/>
-          </a:p>
-        </p:txBody>
-      </p:sp>
-      <p:sp>
-        <p:nvSpPr>
-          <p:cNvPr id="23" name="Shape 21"/>
           <p:cNvSpPr/>
           <p:nvPr/>
         </p:nvSpPr>
@@ -9729,7 +9543,7 @@
       </p:sp>
       <p:sp>
         <p:nvSpPr>
-          <p:cNvPr id="24" name="Shape 22"/>
+          <p:cNvPr id="18" name="Shape 16"/>
           <p:cNvSpPr/>
           <p:nvPr/>
         </p:nvSpPr>
@@ -9756,7 +9570,7 @@
       </p:sp>
       <p:sp>
         <p:nvSpPr>
-          <p:cNvPr id="25" name="Shape 23"/>
+          <p:cNvPr id="19" name="Shape 17"/>
           <p:cNvSpPr/>
           <p:nvPr/>
         </p:nvSpPr>
@@ -9783,7 +9597,7 @@
       </p:sp>
       <p:sp>
         <p:nvSpPr>
-          <p:cNvPr id="26" name="Shape 24"/>
+          <p:cNvPr id="20" name="Shape 18"/>
           <p:cNvSpPr/>
           <p:nvPr/>
         </p:nvSpPr>
@@ -9810,7 +9624,7 @@
       </p:sp>
       <p:sp>
         <p:nvSpPr>
-          <p:cNvPr id="27" name="Text 25"/>
+          <p:cNvPr id="21" name="Text 19"/>
           <p:cNvSpPr/>
           <p:nvPr/>
         </p:nvSpPr>
@@ -9852,7 +9666,7 @@
       </p:sp>
       <p:sp>
         <p:nvSpPr>
-          <p:cNvPr id="28" name="Text 26"/>
+          <p:cNvPr id="22" name="Text 20"/>
           <p:cNvSpPr/>
           <p:nvPr/>
         </p:nvSpPr>
@@ -9894,7 +9708,7 @@
       </p:sp>
       <p:sp>
         <p:nvSpPr>
-          <p:cNvPr id="29" name="Text 27"/>
+          <p:cNvPr id="23" name="Text 21"/>
           <p:cNvSpPr/>
           <p:nvPr/>
         </p:nvSpPr>
@@ -9936,7 +9750,7 @@
       </p:sp>
       <p:sp>
         <p:nvSpPr>
-          <p:cNvPr id="30" name="Text 28"/>
+          <p:cNvPr id="24" name="Text 22"/>
           <p:cNvSpPr/>
           <p:nvPr/>
         </p:nvSpPr>
@@ -29715,7 +29529,7 @@
                 <a:ea typeface="Cambria" pitchFamily="34" charset="-122"/>
                 <a:cs typeface="Cambria" pitchFamily="34" charset="-120"/>
               </a:rPr>
-              <a:t>Tổng quan</a:t>
+              <a:t>Giới thiệu</a:t>
             </a:r>
             <a:endParaRPr lang="en-US" sz="1820" dirty="0"/>
           </a:p>
@@ -31439,7 +31253,7 @@
                 <a:ea typeface="Cambria" pitchFamily="34" charset="-122"/>
                 <a:cs typeface="Cambria" pitchFamily="34" charset="-120"/>
               </a:rPr>
-              <a:t>Xây dựng bộ dữ liệu</a:t>
+              <a:t>Dữ liệu và đánh giá</a:t>
             </a:r>
             <a:endParaRPr lang="en-US" sz="1820" dirty="0"/>
           </a:p>
@@ -32743,7 +32557,7 @@
                 <a:ea typeface="Cambria" pitchFamily="34" charset="-122"/>
                 <a:cs typeface="Cambria" pitchFamily="34" charset="-120"/>
               </a:rPr>
-              <a:t>Thực nghiệm và kết quả</a:t>
+              <a:t>Dữ liệu và đánh giá</a:t>
             </a:r>
             <a:endParaRPr lang="en-US" sz="1820" dirty="0"/>
           </a:p>
@@ -32751,388 +32565,20 @@
       </p:sp>
       <p:sp>
         <p:nvSpPr>
-          <p:cNvPr id="4" name="Text 2"/>
-          <p:cNvSpPr/>
-          <p:nvPr/>
-        </p:nvSpPr>
-        <p:spPr>
-          <a:xfrm>
-            <a:off x="566928" y="1325880"/>
-            <a:ext cx="1828800" cy="502920"/>
-          </a:xfrm>
-          <a:prstGeom prst="rect">
-            <a:avLst/>
-          </a:prstGeom>
-          <a:noFill/>
-          <a:ln/>
-        </p:spPr>
-        <p:txBody>
-          <a:bodyPr wrap="square" lIns="0" tIns="0" rIns="0" bIns="0" rtlCol="0" anchor="ctr"/>
-          <a:lstStyle/>
-          <a:p>
-            <a:pPr algn="ctr" indent="0" marL="0">
-              <a:lnSpc>
-                <a:spcPct val="125000"/>
-              </a:lnSpc>
-              <a:buNone/>
-            </a:pPr>
-            <a:r>
-              <a:rPr lang="en-US" sz="2400" b="1" dirty="0">
-                <a:solidFill>
-                  <a:srgbClr val="7A7099"/>
-                </a:solidFill>
-                <a:latin typeface="Cambria" pitchFamily="34" charset="0"/>
-                <a:ea typeface="Cambria" pitchFamily="34" charset="-122"/>
-                <a:cs typeface="Cambria" pitchFamily="34" charset="-120"/>
-              </a:rPr>
-              <a:t>47,59%</a:t>
-            </a:r>
-            <a:endParaRPr lang="en-US" sz="2400" dirty="0"/>
-          </a:p>
-        </p:txBody>
-      </p:sp>
-      <p:sp>
-        <p:nvSpPr>
-          <p:cNvPr id="5" name="Text 3"/>
-          <p:cNvSpPr/>
-          <p:nvPr/>
-        </p:nvSpPr>
-        <p:spPr>
-          <a:xfrm>
-            <a:off x="566928" y="1856232"/>
-            <a:ext cx="1828800" cy="475488"/>
-          </a:xfrm>
-          <a:prstGeom prst="rect">
-            <a:avLst/>
-          </a:prstGeom>
-          <a:noFill/>
-          <a:ln/>
-        </p:spPr>
-        <p:txBody>
-          <a:bodyPr wrap="square" lIns="0" tIns="0" rIns="0" bIns="0" rtlCol="0" anchor="ctr">
-            <a:normAutofit/>
-          </a:bodyPr>
-          <a:lstStyle/>
-          <a:p>
-            <a:pPr algn="ctr" indent="0" marL="0">
-              <a:lnSpc>
-                <a:spcPct val="125000"/>
-              </a:lnSpc>
-              <a:buNone/>
-            </a:pPr>
-            <a:r>
-              <a:rPr lang="en-US" sz="1250" b="1" dirty="0">
-                <a:solidFill>
-                  <a:srgbClr val="1A1A1A"/>
-                </a:solidFill>
-                <a:latin typeface="Cambria" pitchFamily="34" charset="0"/>
-                <a:ea typeface="Cambria" pitchFamily="34" charset="-122"/>
-                <a:cs typeface="Cambria" pitchFamily="34" charset="-120"/>
-              </a:rPr>
-              <a:t>3B · chưa tinh chỉnh</a:t>
-            </a:r>
-            <a:endParaRPr lang="en-US" sz="1250" dirty="0"/>
-          </a:p>
-        </p:txBody>
-      </p:sp>
-      <p:sp>
-        <p:nvSpPr>
-          <p:cNvPr id="6" name="Text 4"/>
-          <p:cNvSpPr/>
-          <p:nvPr/>
-        </p:nvSpPr>
-        <p:spPr>
-          <a:xfrm>
-            <a:off x="2633472" y="1325880"/>
-            <a:ext cx="1828800" cy="502920"/>
-          </a:xfrm>
-          <a:prstGeom prst="rect">
-            <a:avLst/>
-          </a:prstGeom>
-          <a:noFill/>
-          <a:ln/>
-        </p:spPr>
-        <p:txBody>
-          <a:bodyPr wrap="square" lIns="0" tIns="0" rIns="0" bIns="0" rtlCol="0" anchor="ctr"/>
-          <a:lstStyle/>
-          <a:p>
-            <a:pPr algn="ctr" indent="0" marL="0">
-              <a:lnSpc>
-                <a:spcPct val="125000"/>
-              </a:lnSpc>
-              <a:buNone/>
-            </a:pPr>
-            <a:r>
-              <a:rPr lang="en-US" sz="2400" b="1" dirty="0">
-                <a:solidFill>
-                  <a:srgbClr val="7A7099"/>
-                </a:solidFill>
-                <a:latin typeface="Cambria" pitchFamily="34" charset="0"/>
-                <a:ea typeface="Cambria" pitchFamily="34" charset="-122"/>
-                <a:cs typeface="Cambria" pitchFamily="34" charset="-120"/>
-              </a:rPr>
-              <a:t>51,51%</a:t>
-            </a:r>
-            <a:endParaRPr lang="en-US" sz="2400" dirty="0"/>
-          </a:p>
-        </p:txBody>
-      </p:sp>
-      <p:sp>
-        <p:nvSpPr>
-          <p:cNvPr id="7" name="Text 5"/>
-          <p:cNvSpPr/>
-          <p:nvPr/>
-        </p:nvSpPr>
-        <p:spPr>
-          <a:xfrm>
-            <a:off x="2633472" y="1856232"/>
-            <a:ext cx="1828800" cy="475488"/>
-          </a:xfrm>
-          <a:prstGeom prst="rect">
-            <a:avLst/>
-          </a:prstGeom>
-          <a:noFill/>
-          <a:ln/>
-        </p:spPr>
-        <p:txBody>
-          <a:bodyPr wrap="square" lIns="0" tIns="0" rIns="0" bIns="0" rtlCol="0" anchor="ctr">
-            <a:normAutofit/>
-          </a:bodyPr>
-          <a:lstStyle/>
-          <a:p>
-            <a:pPr algn="ctr" indent="0" marL="0">
-              <a:lnSpc>
-                <a:spcPct val="125000"/>
-              </a:lnSpc>
-              <a:buNone/>
-            </a:pPr>
-            <a:r>
-              <a:rPr lang="en-US" sz="1250" b="1" dirty="0">
-                <a:solidFill>
-                  <a:srgbClr val="1A1A1A"/>
-                </a:solidFill>
-                <a:latin typeface="Cambria" pitchFamily="34" charset="0"/>
-                <a:ea typeface="Cambria" pitchFamily="34" charset="-122"/>
-                <a:cs typeface="Cambria" pitchFamily="34" charset="-120"/>
-              </a:rPr>
-              <a:t>7B · prompting</a:t>
-            </a:r>
-            <a:endParaRPr lang="en-US" sz="1250" dirty="0"/>
-          </a:p>
-        </p:txBody>
-      </p:sp>
-      <p:sp>
-        <p:nvSpPr>
-          <p:cNvPr id="8" name="Text 6"/>
-          <p:cNvSpPr/>
-          <p:nvPr/>
-        </p:nvSpPr>
-        <p:spPr>
-          <a:xfrm>
-            <a:off x="4700016" y="1325880"/>
-            <a:ext cx="1828800" cy="502920"/>
-          </a:xfrm>
-          <a:prstGeom prst="rect">
-            <a:avLst/>
-          </a:prstGeom>
-          <a:noFill/>
-          <a:ln/>
-        </p:spPr>
-        <p:txBody>
-          <a:bodyPr wrap="square" lIns="0" tIns="0" rIns="0" bIns="0" rtlCol="0" anchor="ctr"/>
-          <a:lstStyle/>
-          <a:p>
-            <a:pPr algn="ctr" indent="0" marL="0">
-              <a:lnSpc>
-                <a:spcPct val="125000"/>
-              </a:lnSpc>
-              <a:buNone/>
-            </a:pPr>
-            <a:r>
-              <a:rPr lang="en-US" sz="2400" b="1" dirty="0">
-                <a:solidFill>
-                  <a:srgbClr val="25194B"/>
-                </a:solidFill>
-                <a:latin typeface="Cambria" pitchFamily="34" charset="0"/>
-                <a:ea typeface="Cambria" pitchFamily="34" charset="-122"/>
-                <a:cs typeface="Cambria" pitchFamily="34" charset="-120"/>
-              </a:rPr>
-              <a:t>59,11%</a:t>
-            </a:r>
-            <a:endParaRPr lang="en-US" sz="2400" dirty="0"/>
-          </a:p>
-        </p:txBody>
-      </p:sp>
-      <p:sp>
-        <p:nvSpPr>
-          <p:cNvPr id="9" name="Text 7"/>
-          <p:cNvSpPr/>
-          <p:nvPr/>
-        </p:nvSpPr>
-        <p:spPr>
-          <a:xfrm>
-            <a:off x="4700016" y="1856232"/>
-            <a:ext cx="1828800" cy="475488"/>
-          </a:xfrm>
-          <a:prstGeom prst="rect">
-            <a:avLst/>
-          </a:prstGeom>
-          <a:noFill/>
-          <a:ln/>
-        </p:spPr>
-        <p:txBody>
-          <a:bodyPr wrap="square" lIns="0" tIns="0" rIns="0" bIns="0" rtlCol="0" anchor="ctr">
-            <a:normAutofit/>
-          </a:bodyPr>
-          <a:lstStyle/>
-          <a:p>
-            <a:pPr algn="ctr" indent="0" marL="0">
-              <a:lnSpc>
-                <a:spcPct val="125000"/>
-              </a:lnSpc>
-              <a:buNone/>
-            </a:pPr>
-            <a:r>
-              <a:rPr lang="en-US" sz="1250" b="1" dirty="0">
-                <a:solidFill>
-                  <a:srgbClr val="1A1A1A"/>
-                </a:solidFill>
-                <a:latin typeface="Cambria" pitchFamily="34" charset="0"/>
-                <a:ea typeface="Cambria" pitchFamily="34" charset="-122"/>
-                <a:cs typeface="Cambria" pitchFamily="34" charset="-120"/>
-              </a:rPr>
-              <a:t>3B · S1</a:t>
-            </a:r>
-            <a:endParaRPr lang="en-US" sz="1250" dirty="0"/>
-          </a:p>
-        </p:txBody>
-      </p:sp>
-      <p:sp>
-        <p:nvSpPr>
-          <p:cNvPr id="10" name="Text 8"/>
-          <p:cNvSpPr/>
-          <p:nvPr/>
-        </p:nvSpPr>
-        <p:spPr>
-          <a:xfrm>
-            <a:off x="6766560" y="1325880"/>
-            <a:ext cx="1828800" cy="502920"/>
-          </a:xfrm>
-          <a:prstGeom prst="rect">
-            <a:avLst/>
-          </a:prstGeom>
-          <a:noFill/>
-          <a:ln/>
-        </p:spPr>
-        <p:txBody>
-          <a:bodyPr wrap="square" lIns="0" tIns="0" rIns="0" bIns="0" rtlCol="0" anchor="ctr"/>
-          <a:lstStyle/>
-          <a:p>
-            <a:pPr algn="ctr" indent="0" marL="0">
-              <a:lnSpc>
-                <a:spcPct val="125000"/>
-              </a:lnSpc>
-              <a:buNone/>
-            </a:pPr>
-            <a:r>
-              <a:rPr lang="en-US" sz="2400" b="1" dirty="0">
-                <a:solidFill>
-                  <a:srgbClr val="4F417A"/>
-                </a:solidFill>
-                <a:latin typeface="Cambria" pitchFamily="34" charset="0"/>
-                <a:ea typeface="Cambria" pitchFamily="34" charset="-122"/>
-                <a:cs typeface="Cambria" pitchFamily="34" charset="-120"/>
-              </a:rPr>
-              <a:t>60,65%</a:t>
-            </a:r>
-            <a:endParaRPr lang="en-US" sz="2400" dirty="0"/>
-          </a:p>
-        </p:txBody>
-      </p:sp>
-      <p:sp>
-        <p:nvSpPr>
-          <p:cNvPr id="11" name="Text 9"/>
-          <p:cNvSpPr/>
-          <p:nvPr/>
-        </p:nvSpPr>
-        <p:spPr>
-          <a:xfrm>
-            <a:off x="6766560" y="1856232"/>
-            <a:ext cx="1828800" cy="475488"/>
-          </a:xfrm>
-          <a:prstGeom prst="rect">
-            <a:avLst/>
-          </a:prstGeom>
-          <a:noFill/>
-          <a:ln/>
-        </p:spPr>
-        <p:txBody>
-          <a:bodyPr wrap="square" lIns="0" tIns="0" rIns="0" bIns="0" rtlCol="0" anchor="ctr">
-            <a:normAutofit/>
-          </a:bodyPr>
-          <a:lstStyle/>
-          <a:p>
-            <a:pPr algn="ctr" indent="0" marL="0">
-              <a:lnSpc>
-                <a:spcPct val="125000"/>
-              </a:lnSpc>
-              <a:buNone/>
-            </a:pPr>
-            <a:r>
-              <a:rPr lang="en-US" sz="1250" b="1" dirty="0">
-                <a:solidFill>
-                  <a:srgbClr val="1A1A1A"/>
-                </a:solidFill>
-                <a:latin typeface="Cambria" pitchFamily="34" charset="0"/>
-                <a:ea typeface="Cambria" pitchFamily="34" charset="-122"/>
-                <a:cs typeface="Cambria" pitchFamily="34" charset="-120"/>
-              </a:rPr>
-              <a:t>3B · GRPO-SPICE</a:t>
-            </a:r>
-            <a:endParaRPr lang="en-US" sz="1250" dirty="0"/>
-          </a:p>
-        </p:txBody>
-      </p:sp>
-      <p:sp>
-        <p:nvSpPr>
-          <p:cNvPr id="12" name="Shape 10"/>
-          <p:cNvSpPr/>
-          <p:nvPr/>
-        </p:nvSpPr>
-        <p:spPr>
-          <a:xfrm>
-            <a:off x="502920" y="2788920"/>
-            <a:ext cx="8138160" cy="0"/>
-          </a:xfrm>
-          <a:prstGeom prst="line">
-            <a:avLst/>
-          </a:prstGeom>
-          <a:noFill/>
-          <a:ln w="12700">
-            <a:solidFill>
-              <a:srgbClr val="D9D6DF"/>
-            </a:solidFill>
-            <a:prstDash val="solid"/>
-            <a:tailEnd type="none"/>
-          </a:ln>
-        </p:spPr>
-      </p:sp>
-      <p:sp>
-        <p:nvSpPr>
-          <p:cNvPr id="13" name="Shape 11"/>
-          <p:cNvSpPr/>
-          <p:nvPr/>
-        </p:nvSpPr>
-        <p:spPr>
-          <a:xfrm>
-            <a:off x="777240" y="3200400"/>
-            <a:ext cx="3520440" cy="1298448"/>
+          <p:cNvPr id="4" name="Shape 2"/>
+          <p:cNvSpPr/>
+          <p:nvPr/>
+        </p:nvSpPr>
+        <p:spPr>
+          <a:xfrm>
+            <a:off x="594360" y="1572768"/>
+            <a:ext cx="1737360" cy="841248"/>
           </a:xfrm>
           <a:prstGeom prst="roundRect">
             <a:avLst/>
           </a:prstGeom>
           <a:solidFill>
-            <a:srgbClr val="F3F2F5"/>
+            <a:srgbClr val="FFFFFF"/>
           </a:solidFill>
           <a:ln w="12700">
             <a:solidFill>
@@ -33144,98 +32590,288 @@
       </p:sp>
       <p:sp>
         <p:nvSpPr>
-          <p:cNvPr id="14" name="Text 12"/>
-          <p:cNvSpPr/>
-          <p:nvPr/>
-        </p:nvSpPr>
-        <p:spPr>
-          <a:xfrm>
-            <a:off x="960120" y="3429000"/>
-            <a:ext cx="3154680" cy="320040"/>
-          </a:xfrm>
-          <a:prstGeom prst="rect">
-            <a:avLst/>
-          </a:prstGeom>
-          <a:noFill/>
-          <a:ln/>
-        </p:spPr>
-        <p:txBody>
-          <a:bodyPr wrap="square" lIns="0" tIns="0" rIns="0" bIns="0" rtlCol="0" anchor="ctr"/>
-          <a:lstStyle/>
-          <a:p>
-            <a:pPr algn="ctr" indent="0" marL="0">
-              <a:lnSpc>
-                <a:spcPct val="125000"/>
-              </a:lnSpc>
-              <a:buNone/>
-            </a:pPr>
-            <a:r>
-              <a:rPr lang="en-US" sz="1450" b="1" dirty="0">
-                <a:solidFill>
-                  <a:srgbClr val="25194B"/>
-                </a:solidFill>
-                <a:latin typeface="Cambria" pitchFamily="34" charset="0"/>
-                <a:ea typeface="Cambria" pitchFamily="34" charset="-122"/>
-                <a:cs typeface="Cambria" pitchFamily="34" charset="-120"/>
-              </a:rPr>
-              <a:t>7B hơn 3B gốc</a:t>
-            </a:r>
-            <a:endParaRPr lang="en-US" sz="1450" dirty="0"/>
-          </a:p>
-        </p:txBody>
-      </p:sp>
-      <p:sp>
-        <p:nvSpPr>
-          <p:cNvPr id="15" name="Text 13"/>
-          <p:cNvSpPr/>
-          <p:nvPr/>
-        </p:nvSpPr>
-        <p:spPr>
-          <a:xfrm>
-            <a:off x="960120" y="3822192"/>
-            <a:ext cx="3154680" cy="411480"/>
-          </a:xfrm>
-          <a:prstGeom prst="rect">
-            <a:avLst/>
-          </a:prstGeom>
-          <a:noFill/>
-          <a:ln/>
-        </p:spPr>
-        <p:txBody>
-          <a:bodyPr wrap="square" lIns="0" tIns="0" rIns="0" bIns="0" rtlCol="0" anchor="ctr"/>
-          <a:lstStyle/>
-          <a:p>
-            <a:pPr algn="ctr" indent="0" marL="0">
-              <a:lnSpc>
-                <a:spcPct val="125000"/>
-              </a:lnSpc>
-              <a:buNone/>
-            </a:pPr>
-            <a:r>
-              <a:rPr lang="en-US" sz="2100" b="1" dirty="0">
-                <a:solidFill>
-                  <a:srgbClr val="7A7099"/>
-                </a:solidFill>
-                <a:latin typeface="Cambria" pitchFamily="34" charset="0"/>
-                <a:ea typeface="Cambria" pitchFamily="34" charset="-122"/>
-                <a:cs typeface="Cambria" pitchFamily="34" charset="-120"/>
-              </a:rPr>
-              <a:t>+3,92 điểm</a:t>
-            </a:r>
-            <a:endParaRPr lang="en-US" sz="2100" dirty="0"/>
-          </a:p>
-        </p:txBody>
-      </p:sp>
-      <p:sp>
-        <p:nvSpPr>
-          <p:cNvPr id="16" name="Shape 14"/>
-          <p:cNvSpPr/>
-          <p:nvPr/>
-        </p:nvSpPr>
-        <p:spPr>
-          <a:xfrm>
-            <a:off x="4846320" y="3200400"/>
-            <a:ext cx="3520440" cy="1298448"/>
+          <p:cNvPr id="5" name="Text 3"/>
+          <p:cNvSpPr/>
+          <p:nvPr/>
+        </p:nvSpPr>
+        <p:spPr>
+          <a:xfrm>
+            <a:off x="594360" y="1572768"/>
+            <a:ext cx="1737360" cy="841248"/>
+          </a:xfrm>
+          <a:prstGeom prst="rect">
+            <a:avLst/>
+          </a:prstGeom>
+          <a:noFill/>
+          <a:ln/>
+        </p:spPr>
+        <p:txBody>
+          <a:bodyPr wrap="square" lIns="0" tIns="0" rIns="0" bIns="0" rtlCol="0" anchor="ctr">
+            <a:normAutofit/>
+          </a:bodyPr>
+          <a:lstStyle/>
+          <a:p>
+            <a:pPr algn="ctr" indent="0" marL="0">
+              <a:lnSpc>
+                <a:spcPct val="125000"/>
+              </a:lnSpc>
+              <a:buNone/>
+            </a:pPr>
+            <a:r>
+              <a:rPr lang="en-US" sz="1600" b="1" dirty="0">
+                <a:solidFill>
+                  <a:srgbClr val="1A1A1A"/>
+                </a:solidFill>
+                <a:latin typeface="Cambria" pitchFamily="34" charset="0"/>
+                <a:ea typeface="Cambria" pitchFamily="34" charset="-122"/>
+                <a:cs typeface="Cambria" pitchFamily="34" charset="-120"/>
+              </a:rPr>
+              <a:t>Câu hướng dẫn</a:t>
+            </a:r>
+            <a:endParaRPr lang="en-US" sz="1600" dirty="0"/>
+          </a:p>
+        </p:txBody>
+      </p:sp>
+      <p:sp>
+        <p:nvSpPr>
+          <p:cNvPr id="6" name="Shape 4"/>
+          <p:cNvSpPr/>
+          <p:nvPr/>
+        </p:nvSpPr>
+        <p:spPr>
+          <a:xfrm>
+            <a:off x="2441448" y="1993392"/>
+            <a:ext cx="365760" cy="0"/>
+          </a:xfrm>
+          <a:prstGeom prst="line">
+            <a:avLst/>
+          </a:prstGeom>
+          <a:noFill/>
+          <a:ln w="25400">
+            <a:solidFill>
+              <a:srgbClr val="4F417A"/>
+            </a:solidFill>
+            <a:prstDash val="solid"/>
+            <a:tailEnd type="triangle"/>
+          </a:ln>
+        </p:spPr>
+      </p:sp>
+      <p:sp>
+        <p:nvSpPr>
+          <p:cNvPr id="7" name="Shape 5"/>
+          <p:cNvSpPr/>
+          <p:nvPr/>
+        </p:nvSpPr>
+        <p:spPr>
+          <a:xfrm>
+            <a:off x="2907792" y="1444752"/>
+            <a:ext cx="2057400" cy="1097280"/>
+          </a:xfrm>
+          <a:prstGeom prst="roundRect">
+            <a:avLst/>
+          </a:prstGeom>
+          <a:solidFill>
+            <a:srgbClr val="F3F2F5"/>
+          </a:solidFill>
+          <a:ln w="12700">
+            <a:solidFill>
+              <a:srgbClr val="25194B"/>
+            </a:solidFill>
+            <a:prstDash val="solid"/>
+          </a:ln>
+        </p:spPr>
+      </p:sp>
+      <p:sp>
+        <p:nvSpPr>
+          <p:cNvPr id="8" name="Text 6"/>
+          <p:cNvSpPr/>
+          <p:nvPr/>
+        </p:nvSpPr>
+        <p:spPr>
+          <a:xfrm>
+            <a:off x="2907792" y="1444752"/>
+            <a:ext cx="2057400" cy="1097280"/>
+          </a:xfrm>
+          <a:prstGeom prst="rect">
+            <a:avLst/>
+          </a:prstGeom>
+          <a:noFill/>
+          <a:ln/>
+        </p:spPr>
+        <p:txBody>
+          <a:bodyPr wrap="square" lIns="0" tIns="0" rIns="0" bIns="0" rtlCol="0" anchor="ctr">
+            <a:normAutofit/>
+          </a:bodyPr>
+          <a:lstStyle/>
+          <a:p>
+            <a:pPr algn="ctr" indent="0" marL="0">
+              <a:lnSpc>
+                <a:spcPct val="125000"/>
+              </a:lnSpc>
+              <a:buNone/>
+            </a:pPr>
+            <a:r>
+              <a:rPr lang="en-US" sz="1500" b="1" dirty="0">
+                <a:solidFill>
+                  <a:srgbClr val="1A1A1A"/>
+                </a:solidFill>
+                <a:latin typeface="Cambria" pitchFamily="34" charset="0"/>
+                <a:ea typeface="Cambria" pitchFamily="34" charset="-122"/>
+                <a:cs typeface="Cambria" pitchFamily="34" charset="-120"/>
+              </a:rPr>
+              <a:t>Mô hình định vị</a:t>
+            </a:r>
+            <a:endParaRPr lang="en-US" sz="1500" dirty="0"/>
+          </a:p>
+          <a:p>
+            <a:pPr algn="ctr" indent="0" marL="0">
+              <a:lnSpc>
+                <a:spcPct val="125000"/>
+              </a:lnSpc>
+              <a:buNone/>
+            </a:pPr>
+            <a:r>
+              <a:rPr lang="en-US" sz="1500" b="1" dirty="0">
+                <a:solidFill>
+                  <a:srgbClr val="1A1A1A"/>
+                </a:solidFill>
+                <a:latin typeface="Cambria" pitchFamily="34" charset="0"/>
+                <a:ea typeface="Cambria" pitchFamily="34" charset="-122"/>
+                <a:cs typeface="Cambria" pitchFamily="34" charset="-120"/>
+              </a:rPr>
+              <a:t>tách biệt</a:t>
+            </a:r>
+            <a:endParaRPr lang="en-US" sz="1500" dirty="0"/>
+          </a:p>
+        </p:txBody>
+      </p:sp>
+      <p:sp>
+        <p:nvSpPr>
+          <p:cNvPr id="9" name="Shape 7"/>
+          <p:cNvSpPr/>
+          <p:nvPr/>
+        </p:nvSpPr>
+        <p:spPr>
+          <a:xfrm>
+            <a:off x="5074920" y="1993392"/>
+            <a:ext cx="365760" cy="0"/>
+          </a:xfrm>
+          <a:prstGeom prst="line">
+            <a:avLst/>
+          </a:prstGeom>
+          <a:noFill/>
+          <a:ln w="25400">
+            <a:solidFill>
+              <a:srgbClr val="4F417A"/>
+            </a:solidFill>
+            <a:prstDash val="solid"/>
+            <a:tailEnd type="triangle"/>
+          </a:ln>
+        </p:spPr>
+      </p:sp>
+      <p:sp>
+        <p:nvSpPr>
+          <p:cNvPr id="10" name="Shape 8"/>
+          <p:cNvSpPr/>
+          <p:nvPr/>
+        </p:nvSpPr>
+        <p:spPr>
+          <a:xfrm>
+            <a:off x="5541264" y="1572768"/>
+            <a:ext cx="1188720" cy="841248"/>
+          </a:xfrm>
+          <a:prstGeom prst="roundRect">
+            <a:avLst/>
+          </a:prstGeom>
+          <a:solidFill>
+            <a:srgbClr val="FFFFFF"/>
+          </a:solidFill>
+          <a:ln w="12700">
+            <a:solidFill>
+              <a:srgbClr val="7A7099"/>
+            </a:solidFill>
+            <a:prstDash val="solid"/>
+          </a:ln>
+        </p:spPr>
+      </p:sp>
+      <p:sp>
+        <p:nvSpPr>
+          <p:cNvPr id="11" name="Text 9"/>
+          <p:cNvSpPr/>
+          <p:nvPr/>
+        </p:nvSpPr>
+        <p:spPr>
+          <a:xfrm>
+            <a:off x="5541264" y="1572768"/>
+            <a:ext cx="1188720" cy="841248"/>
+          </a:xfrm>
+          <a:prstGeom prst="rect">
+            <a:avLst/>
+          </a:prstGeom>
+          <a:noFill/>
+          <a:ln/>
+        </p:spPr>
+        <p:txBody>
+          <a:bodyPr wrap="square" lIns="0" tIns="0" rIns="0" bIns="0" rtlCol="0" anchor="ctr">
+            <a:normAutofit/>
+          </a:bodyPr>
+          <a:lstStyle/>
+          <a:p>
+            <a:pPr algn="ctr" indent="0" marL="0">
+              <a:lnSpc>
+                <a:spcPct val="125000"/>
+              </a:lnSpc>
+              <a:buNone/>
+            </a:pPr>
+            <a:r>
+              <a:rPr lang="en-US" sz="1400" b="1" dirty="0">
+                <a:solidFill>
+                  <a:srgbClr val="1A1A1A"/>
+                </a:solidFill>
+                <a:latin typeface="Cambria" pitchFamily="34" charset="0"/>
+                <a:ea typeface="Cambria" pitchFamily="34" charset="-122"/>
+                <a:cs typeface="Cambria" pitchFamily="34" charset="-120"/>
+              </a:rPr>
+              <a:t>Điểm (x,y)</a:t>
+            </a:r>
+            <a:endParaRPr lang="en-US" sz="1400" dirty="0"/>
+          </a:p>
+        </p:txBody>
+      </p:sp>
+      <p:sp>
+        <p:nvSpPr>
+          <p:cNvPr id="12" name="Shape 10"/>
+          <p:cNvSpPr/>
+          <p:nvPr/>
+        </p:nvSpPr>
+        <p:spPr>
+          <a:xfrm>
+            <a:off x="6839712" y="1993392"/>
+            <a:ext cx="365760" cy="0"/>
+          </a:xfrm>
+          <a:prstGeom prst="line">
+            <a:avLst/>
+          </a:prstGeom>
+          <a:noFill/>
+          <a:ln w="25400">
+            <a:solidFill>
+              <a:srgbClr val="4F417A"/>
+            </a:solidFill>
+            <a:prstDash val="solid"/>
+            <a:tailEnd type="triangle"/>
+          </a:ln>
+        </p:spPr>
+      </p:sp>
+      <p:sp>
+        <p:nvSpPr>
+          <p:cNvPr id="13" name="Shape 11"/>
+          <p:cNvSpPr/>
+          <p:nvPr/>
+        </p:nvSpPr>
+        <p:spPr>
+          <a:xfrm>
+            <a:off x="7296912" y="1371600"/>
+            <a:ext cx="1261872" cy="1243584"/>
           </a:xfrm>
           <a:prstGeom prst="roundRect">
             <a:avLst/>
@@ -33253,14 +32889,14 @@
       </p:sp>
       <p:sp>
         <p:nvSpPr>
-          <p:cNvPr id="17" name="Text 15"/>
-          <p:cNvSpPr/>
-          <p:nvPr/>
-        </p:nvSpPr>
-        <p:spPr>
-          <a:xfrm>
-            <a:off x="5029200" y="3383280"/>
-            <a:ext cx="3154680" cy="475488"/>
+          <p:cNvPr id="14" name="Text 12"/>
+          <p:cNvSpPr/>
+          <p:nvPr/>
+        </p:nvSpPr>
+        <p:spPr>
+          <a:xfrm>
+            <a:off x="7296912" y="1371600"/>
+            <a:ext cx="1261872" cy="1243584"/>
           </a:xfrm>
           <a:prstGeom prst="rect">
             <a:avLst/>
@@ -33281,72 +32917,50 @@
               <a:buNone/>
             </a:pPr>
             <a:r>
-              <a:rPr lang="en-US" sz="1360" b="1" dirty="0">
-                <a:solidFill>
-                  <a:srgbClr val="25194B"/>
-                </a:solidFill>
-                <a:latin typeface="Cambria" pitchFamily="34" charset="0"/>
-                <a:ea typeface="Cambria" pitchFamily="34" charset="-122"/>
-                <a:cs typeface="Cambria" pitchFamily="34" charset="-120"/>
-              </a:rPr>
-              <a:t>3B sau GRPO-SPICE hơn 7B prompting</a:t>
-            </a:r>
-            <a:endParaRPr lang="en-US" sz="1360" dirty="0"/>
-          </a:p>
-        </p:txBody>
-      </p:sp>
-      <p:sp>
-        <p:nvSpPr>
-          <p:cNvPr id="18" name="Text 16"/>
-          <p:cNvSpPr/>
-          <p:nvPr/>
-        </p:nvSpPr>
-        <p:spPr>
-          <a:xfrm>
-            <a:off x="5029200" y="3822192"/>
-            <a:ext cx="3154680" cy="411480"/>
-          </a:xfrm>
-          <a:prstGeom prst="rect">
-            <a:avLst/>
-          </a:prstGeom>
-          <a:noFill/>
-          <a:ln/>
-        </p:spPr>
-        <p:txBody>
-          <a:bodyPr wrap="square" lIns="0" tIns="0" rIns="0" bIns="0" rtlCol="0" anchor="ctr"/>
-          <a:lstStyle/>
-          <a:p>
-            <a:pPr algn="ctr" indent="0" marL="0">
-              <a:lnSpc>
-                <a:spcPct val="125000"/>
-              </a:lnSpc>
-              <a:buNone/>
-            </a:pPr>
-            <a:r>
-              <a:rPr lang="en-US" sz="2100" b="1" dirty="0">
-                <a:solidFill>
-                  <a:srgbClr val="4F417A"/>
-                </a:solidFill>
-                <a:latin typeface="Cambria" pitchFamily="34" charset="0"/>
-                <a:ea typeface="Cambria" pitchFamily="34" charset="-122"/>
-                <a:cs typeface="Cambria" pitchFamily="34" charset="-120"/>
-              </a:rPr>
-              <a:t>+9,14 điểm</a:t>
-            </a:r>
-            <a:endParaRPr lang="en-US" sz="2100" dirty="0"/>
-          </a:p>
-        </p:txBody>
-      </p:sp>
-      <p:sp>
-        <p:nvSpPr>
-          <p:cNvPr id="19" name="Text 17"/>
-          <p:cNvSpPr/>
-          <p:nvPr/>
-        </p:nvSpPr>
-        <p:spPr>
-          <a:xfrm>
-            <a:off x="502920" y="5074920"/>
-            <a:ext cx="8138160" cy="502920"/>
+              <a:rPr lang="en-US" sz="1320" b="1" dirty="0">
+                <a:solidFill>
+                  <a:srgbClr val="1A1A1A"/>
+                </a:solidFill>
+                <a:latin typeface="Cambria" pitchFamily="34" charset="0"/>
+                <a:ea typeface="Cambria" pitchFamily="34" charset="-122"/>
+                <a:cs typeface="Cambria" pitchFamily="34" charset="-120"/>
+              </a:rPr>
+              <a:t>Kiểm tra</a:t>
+            </a:r>
+            <a:endParaRPr lang="en-US" sz="1320" dirty="0"/>
+          </a:p>
+          <a:p>
+            <a:pPr algn="ctr" indent="0" marL="0">
+              <a:lnSpc>
+                <a:spcPct val="125000"/>
+              </a:lnSpc>
+              <a:buNone/>
+            </a:pPr>
+            <a:r>
+              <a:rPr lang="en-US" sz="1320" b="1" dirty="0">
+                <a:solidFill>
+                  <a:srgbClr val="1A1A1A"/>
+                </a:solidFill>
+                <a:latin typeface="Cambria" pitchFamily="34" charset="0"/>
+                <a:ea typeface="Cambria" pitchFamily="34" charset="-122"/>
+                <a:cs typeface="Cambria" pitchFamily="34" charset="-120"/>
+              </a:rPr>
+              <a:t>phần tử + thao tác</a:t>
+            </a:r>
+            <a:endParaRPr lang="en-US" sz="1320" dirty="0"/>
+          </a:p>
+        </p:txBody>
+      </p:sp>
+      <p:sp>
+        <p:nvSpPr>
+          <p:cNvPr id="15" name="Text 13"/>
+          <p:cNvSpPr/>
+          <p:nvPr/>
+        </p:nvSpPr>
+        <p:spPr>
+          <a:xfrm>
+            <a:off x="502920" y="3182112"/>
+            <a:ext cx="3246120" cy="502920"/>
           </a:xfrm>
           <a:prstGeom prst="rect">
             <a:avLst/>
@@ -33360,14 +32974,14 @@
           </a:bodyPr>
           <a:lstStyle/>
           <a:p>
-            <a:pPr algn="ctr" indent="0" marL="0">
-              <a:lnSpc>
-                <a:spcPct val="125000"/>
-              </a:lnSpc>
-              <a:buNone/>
-            </a:pPr>
-            <a:r>
-              <a:rPr lang="en-US" sz="1380" b="1" dirty="0">
+            <a:pPr indent="0" marL="0">
+              <a:lnSpc>
+                <a:spcPct val="125000"/>
+              </a:lnSpc>
+              <a:buNone/>
+            </a:pPr>
+            <a:r>
+              <a:rPr lang="en-US" sz="1550" b="1" dirty="0">
                 <a:solidFill>
                   <a:srgbClr val="25194B"/>
                 </a:solidFill>
@@ -33375,15 +32989,270 @@
                 <a:ea typeface="Cambria" pitchFamily="34" charset="-122"/>
                 <a:cs typeface="Cambria" pitchFamily="34" charset="-120"/>
               </a:rPr>
-              <a:t>So sánh này chỉ áp dụng cho thiết lập prompting đã thử. 7B không được tối ưu prompt riêng.</a:t>
-            </a:r>
-            <a:endParaRPr lang="en-US" sz="1380" dirty="0"/>
+              <a:t>Một bước được tính đúng khi đồng thời:</a:t>
+            </a:r>
+            <a:endParaRPr lang="en-US" sz="1550" dirty="0"/>
+          </a:p>
+        </p:txBody>
+      </p:sp>
+      <p:sp>
+        <p:nvSpPr>
+          <p:cNvPr id="16" name="Shape 14"/>
+          <p:cNvSpPr/>
+          <p:nvPr/>
+        </p:nvSpPr>
+        <p:spPr>
+          <a:xfrm>
+            <a:off x="521208" y="3813048"/>
+            <a:ext cx="64008" cy="64008"/>
+          </a:xfrm>
+          <a:prstGeom prst="ellipse">
+            <a:avLst/>
+          </a:prstGeom>
+          <a:solidFill>
+            <a:srgbClr val="4F417A"/>
+          </a:solidFill>
+          <a:ln w="12700">
+            <a:solidFill>
+              <a:srgbClr val="4F417A">
+                <a:alpha val="0"/>
+              </a:srgbClr>
+            </a:solidFill>
+            <a:prstDash val="solid"/>
+          </a:ln>
+        </p:spPr>
+      </p:sp>
+      <p:sp>
+        <p:nvSpPr>
+          <p:cNvPr id="17" name="Text 15"/>
+          <p:cNvSpPr/>
+          <p:nvPr/>
+        </p:nvSpPr>
+        <p:spPr>
+          <a:xfrm>
+            <a:off x="713232" y="3675888"/>
+            <a:ext cx="7927848" cy="475488"/>
+          </a:xfrm>
+          <a:prstGeom prst="rect">
+            <a:avLst/>
+          </a:prstGeom>
+          <a:noFill/>
+          <a:ln/>
+        </p:spPr>
+        <p:txBody>
+          <a:bodyPr wrap="square" lIns="0" tIns="0" rIns="0" bIns="0" rtlCol="0" anchor="t">
+            <a:normAutofit/>
+          </a:bodyPr>
+          <a:lstStyle/>
+          <a:p>
+            <a:pPr indent="0" marL="0">
+              <a:lnSpc>
+                <a:spcPct val="125000"/>
+              </a:lnSpc>
+              <a:buNone/>
+            </a:pPr>
+            <a:r>
+              <a:rPr lang="en-US" sz="1500" dirty="0">
+                <a:solidFill>
+                  <a:srgbClr val="1A1A1A"/>
+                </a:solidFill>
+                <a:latin typeface="Cambria" pitchFamily="34" charset="0"/>
+                <a:ea typeface="Cambria" pitchFamily="34" charset="-122"/>
+                <a:cs typeface="Cambria" pitchFamily="34" charset="-120"/>
+              </a:rPr>
+              <a:t>đúng loại thao tác</a:t>
+            </a:r>
+            <a:endParaRPr lang="en-US" sz="1500" dirty="0"/>
+          </a:p>
+        </p:txBody>
+      </p:sp>
+      <p:sp>
+        <p:nvSpPr>
+          <p:cNvPr id="18" name="Shape 16"/>
+          <p:cNvSpPr/>
+          <p:nvPr/>
+        </p:nvSpPr>
+        <p:spPr>
+          <a:xfrm>
+            <a:off x="521208" y="4379976"/>
+            <a:ext cx="64008" cy="64008"/>
+          </a:xfrm>
+          <a:prstGeom prst="ellipse">
+            <a:avLst/>
+          </a:prstGeom>
+          <a:solidFill>
+            <a:srgbClr val="4F417A"/>
+          </a:solidFill>
+          <a:ln w="12700">
+            <a:solidFill>
+              <a:srgbClr val="4F417A">
+                <a:alpha val="0"/>
+              </a:srgbClr>
+            </a:solidFill>
+            <a:prstDash val="solid"/>
+          </a:ln>
+        </p:spPr>
+      </p:sp>
+      <p:sp>
+        <p:nvSpPr>
+          <p:cNvPr id="19" name="Text 17"/>
+          <p:cNvSpPr/>
+          <p:nvPr/>
+        </p:nvSpPr>
+        <p:spPr>
+          <a:xfrm>
+            <a:off x="713232" y="4242816"/>
+            <a:ext cx="7927848" cy="475488"/>
+          </a:xfrm>
+          <a:prstGeom prst="rect">
+            <a:avLst/>
+          </a:prstGeom>
+          <a:noFill/>
+          <a:ln/>
+        </p:spPr>
+        <p:txBody>
+          <a:bodyPr wrap="square" lIns="0" tIns="0" rIns="0" bIns="0" rtlCol="0" anchor="t">
+            <a:normAutofit/>
+          </a:bodyPr>
+          <a:lstStyle/>
+          <a:p>
+            <a:pPr indent="0" marL="0">
+              <a:lnSpc>
+                <a:spcPct val="125000"/>
+              </a:lnSpc>
+              <a:buNone/>
+            </a:pPr>
+            <a:r>
+              <a:rPr lang="en-US" sz="1500" dirty="0">
+                <a:solidFill>
+                  <a:srgbClr val="1A1A1A"/>
+                </a:solidFill>
+                <a:latin typeface="Cambria" pitchFamily="34" charset="0"/>
+                <a:ea typeface="Cambria" pitchFamily="34" charset="-122"/>
+                <a:cs typeface="Cambria" pitchFamily="34" charset="-120"/>
+              </a:rPr>
+              <a:t>không diễn đạt ngược thao tác cần làm</a:t>
+            </a:r>
+            <a:endParaRPr lang="en-US" sz="1500" dirty="0"/>
           </a:p>
         </p:txBody>
       </p:sp>
       <p:sp>
         <p:nvSpPr>
           <p:cNvPr id="20" name="Shape 18"/>
+          <p:cNvSpPr/>
+          <p:nvPr/>
+        </p:nvSpPr>
+        <p:spPr>
+          <a:xfrm>
+            <a:off x="521208" y="4946904"/>
+            <a:ext cx="64008" cy="64008"/>
+          </a:xfrm>
+          <a:prstGeom prst="ellipse">
+            <a:avLst/>
+          </a:prstGeom>
+          <a:solidFill>
+            <a:srgbClr val="4F417A"/>
+          </a:solidFill>
+          <a:ln w="12700">
+            <a:solidFill>
+              <a:srgbClr val="4F417A">
+                <a:alpha val="0"/>
+              </a:srgbClr>
+            </a:solidFill>
+            <a:prstDash val="solid"/>
+          </a:ln>
+        </p:spPr>
+      </p:sp>
+      <p:sp>
+        <p:nvSpPr>
+          <p:cNvPr id="21" name="Text 19"/>
+          <p:cNvSpPr/>
+          <p:nvPr/>
+        </p:nvSpPr>
+        <p:spPr>
+          <a:xfrm>
+            <a:off x="713232" y="4809744"/>
+            <a:ext cx="7927848" cy="475488"/>
+          </a:xfrm>
+          <a:prstGeom prst="rect">
+            <a:avLst/>
+          </a:prstGeom>
+          <a:noFill/>
+          <a:ln/>
+        </p:spPr>
+        <p:txBody>
+          <a:bodyPr wrap="square" lIns="0" tIns="0" rIns="0" bIns="0" rtlCol="0" anchor="t">
+            <a:normAutofit/>
+          </a:bodyPr>
+          <a:lstStyle/>
+          <a:p>
+            <a:pPr indent="0" marL="0">
+              <a:lnSpc>
+                <a:spcPct val="125000"/>
+              </a:lnSpc>
+              <a:buNone/>
+            </a:pPr>
+            <a:r>
+              <a:rPr lang="en-US" sz="1500" dirty="0">
+                <a:solidFill>
+                  <a:srgbClr val="1A1A1A"/>
+                </a:solidFill>
+                <a:latin typeface="Cambria" pitchFamily="34" charset="0"/>
+                <a:ea typeface="Cambria" pitchFamily="34" charset="-122"/>
+                <a:cs typeface="Cambria" pitchFamily="34" charset="-120"/>
+              </a:rPr>
+              <a:t>điểm định vị thuộc vùng của phần tử cần chạm</a:t>
+            </a:r>
+            <a:endParaRPr lang="en-US" sz="1500" dirty="0"/>
+          </a:p>
+        </p:txBody>
+      </p:sp>
+      <p:sp>
+        <p:nvSpPr>
+          <p:cNvPr id="22" name="Text 20"/>
+          <p:cNvSpPr/>
+          <p:nvPr/>
+        </p:nvSpPr>
+        <p:spPr>
+          <a:xfrm>
+            <a:off x="502920" y="5468112"/>
+            <a:ext cx="8138160" cy="411480"/>
+          </a:xfrm>
+          <a:prstGeom prst="rect">
+            <a:avLst/>
+          </a:prstGeom>
+          <a:noFill/>
+          <a:ln/>
+        </p:spPr>
+        <p:txBody>
+          <a:bodyPr wrap="square" lIns="0" tIns="0" rIns="0" bIns="0" rtlCol="0" anchor="ctr"/>
+          <a:lstStyle/>
+          <a:p>
+            <a:pPr algn="ctr" indent="0" marL="0">
+              <a:lnSpc>
+                <a:spcPct val="125000"/>
+              </a:lnSpc>
+              <a:buNone/>
+            </a:pPr>
+            <a:r>
+              <a:rPr lang="en-US" sz="1400" b="1" dirty="0">
+                <a:solidFill>
+                  <a:srgbClr val="25194B"/>
+                </a:solidFill>
+                <a:latin typeface="Cambria" pitchFamily="34" charset="0"/>
+                <a:ea typeface="Cambria" pitchFamily="34" charset="-122"/>
+                <a:cs typeface="Cambria" pitchFamily="34" charset="-120"/>
+              </a:rPr>
+              <a:t>Mô hình định vị không tham gia huấn luyện phương pháp và không biết tọa độ đáp án.</a:t>
+            </a:r>
+            <a:endParaRPr lang="en-US" sz="1400" dirty="0"/>
+          </a:p>
+        </p:txBody>
+      </p:sp>
+      <p:sp>
+        <p:nvSpPr>
+          <p:cNvPr id="23" name="Shape 21"/>
           <p:cNvSpPr/>
           <p:nvPr/>
         </p:nvSpPr>
@@ -33410,7 +33279,7 @@
       </p:sp>
       <p:sp>
         <p:nvSpPr>
-          <p:cNvPr id="21" name="Shape 19"/>
+          <p:cNvPr id="24" name="Shape 22"/>
           <p:cNvSpPr/>
           <p:nvPr/>
         </p:nvSpPr>
@@ -33437,7 +33306,7 @@
       </p:sp>
       <p:sp>
         <p:nvSpPr>
-          <p:cNvPr id="22" name="Shape 20"/>
+          <p:cNvPr id="25" name="Shape 23"/>
           <p:cNvSpPr/>
           <p:nvPr/>
         </p:nvSpPr>
@@ -33464,7 +33333,7 @@
       </p:sp>
       <p:sp>
         <p:nvSpPr>
-          <p:cNvPr id="23" name="Shape 21"/>
+          <p:cNvPr id="26" name="Shape 24"/>
           <p:cNvSpPr/>
           <p:nvPr/>
         </p:nvSpPr>
@@ -33491,7 +33360,7 @@
       </p:sp>
       <p:sp>
         <p:nvSpPr>
-          <p:cNvPr id="24" name="Text 22"/>
+          <p:cNvPr id="27" name="Text 25"/>
           <p:cNvSpPr/>
           <p:nvPr/>
         </p:nvSpPr>
@@ -33533,7 +33402,7 @@
       </p:sp>
       <p:sp>
         <p:nvSpPr>
-          <p:cNvPr id="25" name="Text 23"/>
+          <p:cNvPr id="28" name="Text 26"/>
           <p:cNvSpPr/>
           <p:nvPr/>
         </p:nvSpPr>
@@ -33575,7 +33444,7 @@
       </p:sp>
       <p:sp>
         <p:nvSpPr>
-          <p:cNvPr id="26" name="Text 24"/>
+          <p:cNvPr id="29" name="Text 27"/>
           <p:cNvSpPr/>
           <p:nvPr/>
         </p:nvSpPr>
@@ -33617,7 +33486,7 @@
       </p:sp>
       <p:sp>
         <p:nvSpPr>
-          <p:cNvPr id="27" name="Text 25"/>
+          <p:cNvPr id="30" name="Text 28"/>
           <p:cNvSpPr/>
           <p:nvPr/>
         </p:nvSpPr>
@@ -33754,7 +33623,7 @@
                 <a:ea typeface="Cambria" pitchFamily="34" charset="-122"/>
                 <a:cs typeface="Cambria" pitchFamily="34" charset="-120"/>
               </a:rPr>
-              <a:t>Độ đo khả năng thực hiện theo hướng dẫn</a:t>
+              <a:t>Dữ liệu và đánh giá</a:t>
             </a:r>
             <a:endParaRPr lang="en-US" sz="1820" dirty="0"/>
           </a:p>
@@ -33762,20 +33631,344 @@
       </p:sp>
       <p:sp>
         <p:nvSpPr>
-          <p:cNvPr id="4" name="Shape 2"/>
-          <p:cNvSpPr/>
-          <p:nvPr/>
-        </p:nvSpPr>
-        <p:spPr>
-          <a:xfrm>
-            <a:off x="594360" y="1572768"/>
-            <a:ext cx="1737360" cy="841248"/>
+          <p:cNvPr id="4" name="Text 2"/>
+          <p:cNvSpPr/>
+          <p:nvPr/>
+        </p:nvSpPr>
+        <p:spPr>
+          <a:xfrm>
+            <a:off x="640080" y="1097280"/>
+            <a:ext cx="2148840" cy="502920"/>
+          </a:xfrm>
+          <a:prstGeom prst="rect">
+            <a:avLst/>
+          </a:prstGeom>
+          <a:noFill/>
+          <a:ln/>
+        </p:spPr>
+        <p:txBody>
+          <a:bodyPr wrap="square" lIns="0" tIns="0" rIns="0" bIns="0" rtlCol="0" anchor="ctr"/>
+          <a:lstStyle/>
+          <a:p>
+            <a:pPr algn="ctr" indent="0" marL="0">
+              <a:lnSpc>
+                <a:spcPct val="125000"/>
+              </a:lnSpc>
+              <a:buNone/>
+            </a:pPr>
+            <a:r>
+              <a:rPr lang="en-US" sz="2400" b="1" dirty="0">
+                <a:solidFill>
+                  <a:srgbClr val="25194B"/>
+                </a:solidFill>
+                <a:latin typeface="Cambria" pitchFamily="34" charset="0"/>
+                <a:ea typeface="Cambria" pitchFamily="34" charset="-122"/>
+                <a:cs typeface="Cambria" pitchFamily="34" charset="-120"/>
+              </a:rPr>
+              <a:t>75,7%</a:t>
+            </a:r>
+            <a:endParaRPr lang="en-US" sz="2400" dirty="0"/>
+          </a:p>
+        </p:txBody>
+      </p:sp>
+      <p:sp>
+        <p:nvSpPr>
+          <p:cNvPr id="5" name="Text 3"/>
+          <p:cNvSpPr/>
+          <p:nvPr/>
+        </p:nvSpPr>
+        <p:spPr>
+          <a:xfrm>
+            <a:off x="640080" y="1627632"/>
+            <a:ext cx="2148840" cy="475488"/>
+          </a:xfrm>
+          <a:prstGeom prst="rect">
+            <a:avLst/>
+          </a:prstGeom>
+          <a:noFill/>
+          <a:ln/>
+        </p:spPr>
+        <p:txBody>
+          <a:bodyPr wrap="square" lIns="0" tIns="0" rIns="0" bIns="0" rtlCol="0" anchor="ctr">
+            <a:normAutofit/>
+          </a:bodyPr>
+          <a:lstStyle/>
+          <a:p>
+            <a:pPr algn="ctr" indent="0" marL="0">
+              <a:lnSpc>
+                <a:spcPct val="125000"/>
+              </a:lnSpc>
+              <a:buNone/>
+            </a:pPr>
+            <a:r>
+              <a:rPr lang="en-US" sz="1250" b="1" dirty="0">
+                <a:solidFill>
+                  <a:srgbClr val="1A1A1A"/>
+                </a:solidFill>
+                <a:latin typeface="Cambria" pitchFamily="34" charset="0"/>
+                <a:ea typeface="Cambria" pitchFamily="34" charset="-122"/>
+                <a:cs typeface="Cambria" pitchFamily="34" charset="-120"/>
+              </a:rPr>
+              <a:t>câu chuẩn</a:t>
+            </a:r>
+            <a:endParaRPr lang="en-US" sz="1250" dirty="0"/>
+          </a:p>
+        </p:txBody>
+      </p:sp>
+      <p:sp>
+        <p:nvSpPr>
+          <p:cNvPr id="6" name="Text 4"/>
+          <p:cNvSpPr/>
+          <p:nvPr/>
+        </p:nvSpPr>
+        <p:spPr>
+          <a:xfrm>
+            <a:off x="3493008" y="1097280"/>
+            <a:ext cx="2148840" cy="502920"/>
+          </a:xfrm>
+          <a:prstGeom prst="rect">
+            <a:avLst/>
+          </a:prstGeom>
+          <a:noFill/>
+          <a:ln/>
+        </p:spPr>
+        <p:txBody>
+          <a:bodyPr wrap="square" lIns="0" tIns="0" rIns="0" bIns="0" rtlCol="0" anchor="ctr"/>
+          <a:lstStyle/>
+          <a:p>
+            <a:pPr algn="ctr" indent="0" marL="0">
+              <a:lnSpc>
+                <a:spcPct val="125000"/>
+              </a:lnSpc>
+              <a:buNone/>
+            </a:pPr>
+            <a:r>
+              <a:rPr lang="en-US" sz="2400" b="1" dirty="0">
+                <a:solidFill>
+                  <a:srgbClr val="4F417A"/>
+                </a:solidFill>
+                <a:latin typeface="Cambria" pitchFamily="34" charset="0"/>
+                <a:ea typeface="Cambria" pitchFamily="34" charset="-122"/>
+                <a:cs typeface="Cambria" pitchFamily="34" charset="-120"/>
+              </a:rPr>
+              <a:t>12,0%</a:t>
+            </a:r>
+            <a:endParaRPr lang="en-US" sz="2400" dirty="0"/>
+          </a:p>
+        </p:txBody>
+      </p:sp>
+      <p:sp>
+        <p:nvSpPr>
+          <p:cNvPr id="7" name="Text 5"/>
+          <p:cNvSpPr/>
+          <p:nvPr/>
+        </p:nvSpPr>
+        <p:spPr>
+          <a:xfrm>
+            <a:off x="3493008" y="1627632"/>
+            <a:ext cx="2148840" cy="475488"/>
+          </a:xfrm>
+          <a:prstGeom prst="rect">
+            <a:avLst/>
+          </a:prstGeom>
+          <a:noFill/>
+          <a:ln/>
+        </p:spPr>
+        <p:txBody>
+          <a:bodyPr wrap="square" lIns="0" tIns="0" rIns="0" bIns="0" rtlCol="0" anchor="ctr">
+            <a:normAutofit/>
+          </a:bodyPr>
+          <a:lstStyle/>
+          <a:p>
+            <a:pPr algn="ctr" indent="0" marL="0">
+              <a:lnSpc>
+                <a:spcPct val="125000"/>
+              </a:lnSpc>
+              <a:buNone/>
+            </a:pPr>
+            <a:r>
+              <a:rPr lang="en-US" sz="1250" b="1" dirty="0">
+                <a:solidFill>
+                  <a:srgbClr val="1A1A1A"/>
+                </a:solidFill>
+                <a:latin typeface="Cambria" pitchFamily="34" charset="0"/>
+                <a:ea typeface="Cambria" pitchFamily="34" charset="-122"/>
+                <a:cs typeface="Cambria" pitchFamily="34" charset="-120"/>
+              </a:rPr>
+              <a:t>“Tap the button.”</a:t>
+            </a:r>
+            <a:endParaRPr lang="en-US" sz="1250" dirty="0"/>
+          </a:p>
+        </p:txBody>
+      </p:sp>
+      <p:sp>
+        <p:nvSpPr>
+          <p:cNvPr id="8" name="Text 6"/>
+          <p:cNvSpPr/>
+          <p:nvPr/>
+        </p:nvSpPr>
+        <p:spPr>
+          <a:xfrm>
+            <a:off x="6345936" y="1097280"/>
+            <a:ext cx="2148840" cy="502920"/>
+          </a:xfrm>
+          <a:prstGeom prst="rect">
+            <a:avLst/>
+          </a:prstGeom>
+          <a:noFill/>
+          <a:ln/>
+        </p:spPr>
+        <p:txBody>
+          <a:bodyPr wrap="square" lIns="0" tIns="0" rIns="0" bIns="0" rtlCol="0" anchor="ctr"/>
+          <a:lstStyle/>
+          <a:p>
+            <a:pPr algn="ctr" indent="0" marL="0">
+              <a:lnSpc>
+                <a:spcPct val="125000"/>
+              </a:lnSpc>
+              <a:buNone/>
+            </a:pPr>
+            <a:r>
+              <a:rPr lang="en-US" sz="2400" b="1" dirty="0">
+                <a:solidFill>
+                  <a:srgbClr val="7A7099"/>
+                </a:solidFill>
+                <a:latin typeface="Cambria" pitchFamily="34" charset="0"/>
+                <a:ea typeface="Cambria" pitchFamily="34" charset="-122"/>
+                <a:cs typeface="Cambria" pitchFamily="34" charset="-120"/>
+              </a:rPr>
+              <a:t>6,1%</a:t>
+            </a:r>
+            <a:endParaRPr lang="en-US" sz="2400" dirty="0"/>
+          </a:p>
+        </p:txBody>
+      </p:sp>
+      <p:sp>
+        <p:nvSpPr>
+          <p:cNvPr id="9" name="Text 7"/>
+          <p:cNvSpPr/>
+          <p:nvPr/>
+        </p:nvSpPr>
+        <p:spPr>
+          <a:xfrm>
+            <a:off x="6345936" y="1627632"/>
+            <a:ext cx="2148840" cy="475488"/>
+          </a:xfrm>
+          <a:prstGeom prst="rect">
+            <a:avLst/>
+          </a:prstGeom>
+          <a:noFill/>
+          <a:ln/>
+        </p:spPr>
+        <p:txBody>
+          <a:bodyPr wrap="square" lIns="0" tIns="0" rIns="0" bIns="0" rtlCol="0" anchor="ctr">
+            <a:normAutofit/>
+          </a:bodyPr>
+          <a:lstStyle/>
+          <a:p>
+            <a:pPr algn="ctr" indent="0" marL="0">
+              <a:lnSpc>
+                <a:spcPct val="125000"/>
+              </a:lnSpc>
+              <a:buNone/>
+            </a:pPr>
+            <a:r>
+              <a:rPr lang="en-US" sz="1250" b="1" dirty="0">
+                <a:solidFill>
+                  <a:srgbClr val="1A1A1A"/>
+                </a:solidFill>
+                <a:latin typeface="Cambria" pitchFamily="34" charset="0"/>
+                <a:ea typeface="Cambria" pitchFamily="34" charset="-122"/>
+                <a:cs typeface="Cambria" pitchFamily="34" charset="-120"/>
+              </a:rPr>
+              <a:t>câu của màn hình khác</a:t>
+            </a:r>
+            <a:endParaRPr lang="en-US" sz="1250" dirty="0"/>
+          </a:p>
+        </p:txBody>
+      </p:sp>
+      <p:sp>
+        <p:nvSpPr>
+          <p:cNvPr id="10" name="Text 8"/>
+          <p:cNvSpPr/>
+          <p:nvPr/>
+        </p:nvSpPr>
+        <p:spPr>
+          <a:xfrm>
+            <a:off x="502920" y="2395728"/>
+            <a:ext cx="8138160" cy="274320"/>
+          </a:xfrm>
+          <a:prstGeom prst="rect">
+            <a:avLst/>
+          </a:prstGeom>
+          <a:noFill/>
+          <a:ln/>
+        </p:spPr>
+        <p:txBody>
+          <a:bodyPr wrap="square" lIns="0" tIns="0" rIns="0" bIns="0" rtlCol="0" anchor="ctr"/>
+          <a:lstStyle/>
+          <a:p>
+            <a:pPr algn="ctr" indent="0" marL="0">
+              <a:lnSpc>
+                <a:spcPct val="125000"/>
+              </a:lnSpc>
+              <a:buNone/>
+            </a:pPr>
+            <a:r>
+              <a:rPr lang="en-US" sz="1250" dirty="0">
+                <a:solidFill>
+                  <a:srgbClr val="5A5A66"/>
+                </a:solidFill>
+                <a:latin typeface="Cambria" pitchFamily="34" charset="0"/>
+                <a:ea typeface="Cambria" pitchFamily="34" charset="-122"/>
+                <a:cs typeface="Cambria" pitchFamily="34" charset="-120"/>
+              </a:rPr>
+              <a:t>Ba mốc được tính trên cùng mẫu 800 bước.</a:t>
+            </a:r>
+            <a:endParaRPr lang="en-US" sz="1250" dirty="0"/>
+          </a:p>
+        </p:txBody>
+      </p:sp>
+      <p:sp>
+        <p:nvSpPr>
+          <p:cNvPr id="11" name="Shape 9"/>
+          <p:cNvSpPr/>
+          <p:nvPr/>
+        </p:nvSpPr>
+        <p:spPr>
+          <a:xfrm>
+            <a:off x="502920" y="2761488"/>
+            <a:ext cx="8138160" cy="0"/>
+          </a:xfrm>
+          <a:prstGeom prst="line">
+            <a:avLst/>
+          </a:prstGeom>
+          <a:noFill/>
+          <a:ln w="12700">
+            <a:solidFill>
+              <a:srgbClr val="D9D6DF"/>
+            </a:solidFill>
+            <a:prstDash val="solid"/>
+            <a:tailEnd type="none"/>
+          </a:ln>
+        </p:spPr>
+      </p:sp>
+      <p:sp>
+        <p:nvSpPr>
+          <p:cNvPr id="12" name="Shape 10"/>
+          <p:cNvSpPr/>
+          <p:nvPr/>
+        </p:nvSpPr>
+        <p:spPr>
+          <a:xfrm>
+            <a:off x="502920" y="3127248"/>
+            <a:ext cx="8138160" cy="1417320"/>
           </a:xfrm>
           <a:prstGeom prst="roundRect">
             <a:avLst/>
           </a:prstGeom>
           <a:solidFill>
-            <a:srgbClr val="FFFFFF"/>
+            <a:srgbClr val="F3F2F5"/>
           </a:solidFill>
           <a:ln w="12700">
             <a:solidFill>
@@ -33787,14 +33980,56 @@
       </p:sp>
       <p:sp>
         <p:nvSpPr>
-          <p:cNvPr id="5" name="Text 3"/>
-          <p:cNvSpPr/>
-          <p:nvPr/>
-        </p:nvSpPr>
-        <p:spPr>
-          <a:xfrm>
-            <a:off x="594360" y="1572768"/>
-            <a:ext cx="1737360" cy="841248"/>
+          <p:cNvPr id="13" name="Text 11"/>
+          <p:cNvSpPr/>
+          <p:nvPr/>
+        </p:nvSpPr>
+        <p:spPr>
+          <a:xfrm>
+            <a:off x="704088" y="3346704"/>
+            <a:ext cx="2057400" cy="310896"/>
+          </a:xfrm>
+          <a:prstGeom prst="rect">
+            <a:avLst/>
+          </a:prstGeom>
+          <a:noFill/>
+          <a:ln/>
+        </p:spPr>
+        <p:txBody>
+          <a:bodyPr wrap="square" lIns="0" tIns="0" rIns="0" bIns="0" rtlCol="0" anchor="ctr"/>
+          <a:lstStyle/>
+          <a:p>
+            <a:pPr indent="0" marL="0">
+              <a:lnSpc>
+                <a:spcPct val="125000"/>
+              </a:lnSpc>
+              <a:buNone/>
+            </a:pPr>
+            <a:r>
+              <a:rPr lang="en-US" sz="1500" b="1" dirty="0">
+                <a:solidFill>
+                  <a:srgbClr val="25194B"/>
+                </a:solidFill>
+                <a:latin typeface="Cambria" pitchFamily="34" charset="0"/>
+                <a:ea typeface="Cambria" pitchFamily="34" charset="-122"/>
+                <a:cs typeface="Cambria" pitchFamily="34" charset="-120"/>
+              </a:rPr>
+              <a:t>Đổi công cụ đánh giá</a:t>
+            </a:r>
+            <a:endParaRPr lang="en-US" sz="1500" dirty="0"/>
+          </a:p>
+        </p:txBody>
+      </p:sp>
+      <p:sp>
+        <p:nvSpPr>
+          <p:cNvPr id="14" name="Text 12"/>
+          <p:cNvSpPr/>
+          <p:nvPr/>
+        </p:nvSpPr>
+        <p:spPr>
+          <a:xfrm>
+            <a:off x="2560320" y="3182112"/>
+            <a:ext cx="5806440" cy="841248"/>
           </a:xfrm>
           <a:prstGeom prst="rect">
             <a:avLst/>
@@ -33808,14 +34043,14 @@
           </a:bodyPr>
           <a:lstStyle/>
           <a:p>
-            <a:pPr algn="ctr" indent="0" marL="0">
-              <a:lnSpc>
-                <a:spcPct val="125000"/>
-              </a:lnSpc>
-              <a:buNone/>
-            </a:pPr>
-            <a:r>
-              <a:rPr lang="en-US" sz="1600" b="1" dirty="0">
+            <a:pPr indent="0" marL="0">
+              <a:lnSpc>
+                <a:spcPct val="125000"/>
+              </a:lnSpc>
+              <a:buNone/>
+            </a:pPr>
+            <a:r>
+              <a:rPr lang="en-US" sz="1400" dirty="0">
                 <a:solidFill>
                   <a:srgbClr val="1A1A1A"/>
                 </a:solidFill>
@@ -33823,56 +34058,76 @@
                 <a:ea typeface="Cambria" pitchFamily="34" charset="-122"/>
                 <a:cs typeface="Cambria" pitchFamily="34" charset="-120"/>
               </a:rPr>
-              <a:t>Câu hướng dẫn</a:t>
-            </a:r>
-            <a:endParaRPr lang="en-US" sz="1600" dirty="0"/>
-          </a:p>
-        </p:txBody>
-      </p:sp>
-      <p:sp>
-        <p:nvSpPr>
-          <p:cNvPr id="6" name="Shape 4"/>
-          <p:cNvSpPr/>
-          <p:nvPr/>
-        </p:nvSpPr>
-        <p:spPr>
-          <a:xfrm>
-            <a:off x="2441448" y="1993392"/>
-            <a:ext cx="365760" cy="0"/>
-          </a:xfrm>
-          <a:prstGeom prst="line">
-            <a:avLst/>
-          </a:prstGeom>
-          <a:noFill/>
-          <a:ln w="25400">
-            <a:solidFill>
-              <a:srgbClr val="4F417A"/>
-            </a:solidFill>
-            <a:prstDash val="solid"/>
-            <a:tailEnd type="triangle"/>
-          </a:ln>
-        </p:spPr>
-      </p:sp>
-      <p:sp>
-        <p:nvSpPr>
-          <p:cNvPr id="7" name="Shape 5"/>
-          <p:cNvSpPr/>
-          <p:nvPr/>
-        </p:nvSpPr>
-        <p:spPr>
-          <a:xfrm>
-            <a:off x="2907792" y="1444752"/>
-            <a:ext cx="2057400" cy="1097280"/>
-          </a:xfrm>
-          <a:prstGeom prst="roundRect">
+              <a:t>Chiều cải thiện của GRPO-SPICE so với S1 được giữ dưới UGround, UI-Venus, Phi-Ground và Phi-4. Hai công cụ sau nằm ngoài họ Qwen.</a:t>
+            </a:r>
+            <a:endParaRPr lang="en-US" sz="1400" dirty="0"/>
+          </a:p>
+        </p:txBody>
+      </p:sp>
+      <p:sp>
+        <p:nvSpPr>
+          <p:cNvPr id="15" name="Text 13"/>
+          <p:cNvSpPr/>
+          <p:nvPr/>
+        </p:nvSpPr>
+        <p:spPr>
+          <a:xfrm>
+            <a:off x="502920" y="5074920"/>
+            <a:ext cx="8138160" cy="457200"/>
+          </a:xfrm>
+          <a:prstGeom prst="rect">
+            <a:avLst/>
+          </a:prstGeom>
+          <a:noFill/>
+          <a:ln/>
+        </p:spPr>
+        <p:txBody>
+          <a:bodyPr wrap="square" lIns="0" tIns="0" rIns="0" bIns="0" rtlCol="0" anchor="ctr"/>
+          <a:lstStyle/>
+          <a:p>
+            <a:pPr algn="ctr" indent="0" marL="0">
+              <a:lnSpc>
+                <a:spcPct val="125000"/>
+              </a:lnSpc>
+              <a:buNone/>
+            </a:pPr>
+            <a:r>
+              <a:rPr lang="en-US" sz="1500" b="1" dirty="0">
+                <a:solidFill>
+                  <a:srgbClr val="25194B"/>
+                </a:solidFill>
+                <a:latin typeface="Cambria" pitchFamily="34" charset="0"/>
+                <a:ea typeface="Cambria" pitchFamily="34" charset="-122"/>
+                <a:cs typeface="Cambria" pitchFamily="34" charset="-120"/>
+              </a:rPr>
+              <a:t>Kết luận chính không phụ thuộc vào một công cụ đánh giá duy nhất.</a:t>
+            </a:r>
+            <a:endParaRPr lang="en-US" sz="1500" dirty="0"/>
+          </a:p>
+        </p:txBody>
+      </p:sp>
+      <p:sp>
+        <p:nvSpPr>
+          <p:cNvPr id="16" name="Shape 14"/>
+          <p:cNvSpPr/>
+          <p:nvPr/>
+        </p:nvSpPr>
+        <p:spPr>
+          <a:xfrm>
+            <a:off x="0" y="6620256"/>
+            <a:ext cx="2743200" cy="237744"/>
+          </a:xfrm>
+          <a:prstGeom prst="rect">
             <a:avLst/>
           </a:prstGeom>
           <a:solidFill>
-            <a:srgbClr val="F3F2F5"/>
+            <a:srgbClr val="191132"/>
           </a:solidFill>
           <a:ln w="12700">
             <a:solidFill>
-              <a:srgbClr val="25194B"/>
+              <a:srgbClr val="191132">
+                <a:alpha val="0"/>
+              </a:srgbClr>
             </a:solidFill>
             <a:prstDash val="solid"/>
           </a:ln>
@@ -33880,112 +34135,26 @@
       </p:sp>
       <p:sp>
         <p:nvSpPr>
-          <p:cNvPr id="8" name="Text 6"/>
-          <p:cNvSpPr/>
-          <p:nvPr/>
-        </p:nvSpPr>
-        <p:spPr>
-          <a:xfrm>
-            <a:off x="2907792" y="1444752"/>
-            <a:ext cx="2057400" cy="1097280"/>
-          </a:xfrm>
-          <a:prstGeom prst="rect">
-            <a:avLst/>
-          </a:prstGeom>
-          <a:noFill/>
-          <a:ln/>
-        </p:spPr>
-        <p:txBody>
-          <a:bodyPr wrap="square" lIns="0" tIns="0" rIns="0" bIns="0" rtlCol="0" anchor="ctr">
-            <a:normAutofit/>
-          </a:bodyPr>
-          <a:lstStyle/>
-          <a:p>
-            <a:pPr algn="ctr" indent="0" marL="0">
-              <a:lnSpc>
-                <a:spcPct val="125000"/>
-              </a:lnSpc>
-              <a:buNone/>
-            </a:pPr>
-            <a:r>
-              <a:rPr lang="en-US" sz="1500" b="1" dirty="0">
-                <a:solidFill>
-                  <a:srgbClr val="1A1A1A"/>
-                </a:solidFill>
-                <a:latin typeface="Cambria" pitchFamily="34" charset="0"/>
-                <a:ea typeface="Cambria" pitchFamily="34" charset="-122"/>
-                <a:cs typeface="Cambria" pitchFamily="34" charset="-120"/>
-              </a:rPr>
-              <a:t>Mô hình định vị</a:t>
-            </a:r>
-            <a:endParaRPr lang="en-US" sz="1500" dirty="0"/>
-          </a:p>
-          <a:p>
-            <a:pPr algn="ctr" indent="0" marL="0">
-              <a:lnSpc>
-                <a:spcPct val="125000"/>
-              </a:lnSpc>
-              <a:buNone/>
-            </a:pPr>
-            <a:r>
-              <a:rPr lang="en-US" sz="1500" b="1" dirty="0">
-                <a:solidFill>
-                  <a:srgbClr val="1A1A1A"/>
-                </a:solidFill>
-                <a:latin typeface="Cambria" pitchFamily="34" charset="0"/>
-                <a:ea typeface="Cambria" pitchFamily="34" charset="-122"/>
-                <a:cs typeface="Cambria" pitchFamily="34" charset="-120"/>
-              </a:rPr>
-              <a:t>tách biệt</a:t>
-            </a:r>
-            <a:endParaRPr lang="en-US" sz="1500" dirty="0"/>
-          </a:p>
-        </p:txBody>
-      </p:sp>
-      <p:sp>
-        <p:nvSpPr>
-          <p:cNvPr id="9" name="Shape 7"/>
-          <p:cNvSpPr/>
-          <p:nvPr/>
-        </p:nvSpPr>
-        <p:spPr>
-          <a:xfrm>
-            <a:off x="5074920" y="1993392"/>
-            <a:ext cx="365760" cy="0"/>
-          </a:xfrm>
-          <a:prstGeom prst="line">
-            <a:avLst/>
-          </a:prstGeom>
-          <a:noFill/>
-          <a:ln w="25400">
-            <a:solidFill>
-              <a:srgbClr val="4F417A"/>
-            </a:solidFill>
-            <a:prstDash val="solid"/>
-            <a:tailEnd type="triangle"/>
-          </a:ln>
-        </p:spPr>
-      </p:sp>
-      <p:sp>
-        <p:nvSpPr>
-          <p:cNvPr id="10" name="Shape 8"/>
-          <p:cNvSpPr/>
-          <p:nvPr/>
-        </p:nvSpPr>
-        <p:spPr>
-          <a:xfrm>
-            <a:off x="5541264" y="1572768"/>
-            <a:ext cx="1188720" cy="841248"/>
-          </a:xfrm>
-          <a:prstGeom prst="roundRect">
+          <p:cNvPr id="17" name="Shape 15"/>
+          <p:cNvSpPr/>
+          <p:nvPr/>
+        </p:nvSpPr>
+        <p:spPr>
+          <a:xfrm>
+            <a:off x="2743200" y="6620256"/>
+            <a:ext cx="3383280" cy="237744"/>
+          </a:xfrm>
+          <a:prstGeom prst="rect">
             <a:avLst/>
           </a:prstGeom>
           <a:solidFill>
-            <a:srgbClr val="FFFFFF"/>
+            <a:srgbClr val="25194B"/>
           </a:solidFill>
           <a:ln w="12700">
             <a:solidFill>
-              <a:srgbClr val="7A7099"/>
+              <a:srgbClr val="25194B">
+                <a:alpha val="0"/>
+              </a:srgbClr>
             </a:solidFill>
             <a:prstDash val="solid"/>
           </a:ln>
@@ -33993,217 +34162,16 @@
       </p:sp>
       <p:sp>
         <p:nvSpPr>
-          <p:cNvPr id="11" name="Text 9"/>
-          <p:cNvSpPr/>
-          <p:nvPr/>
-        </p:nvSpPr>
-        <p:spPr>
-          <a:xfrm>
-            <a:off x="5541264" y="1572768"/>
-            <a:ext cx="1188720" cy="841248"/>
-          </a:xfrm>
-          <a:prstGeom prst="rect">
-            <a:avLst/>
-          </a:prstGeom>
-          <a:noFill/>
-          <a:ln/>
-        </p:spPr>
-        <p:txBody>
-          <a:bodyPr wrap="square" lIns="0" tIns="0" rIns="0" bIns="0" rtlCol="0" anchor="ctr">
-            <a:normAutofit/>
-          </a:bodyPr>
-          <a:lstStyle/>
-          <a:p>
-            <a:pPr algn="ctr" indent="0" marL="0">
-              <a:lnSpc>
-                <a:spcPct val="125000"/>
-              </a:lnSpc>
-              <a:buNone/>
-            </a:pPr>
-            <a:r>
-              <a:rPr lang="en-US" sz="1400" b="1" dirty="0">
-                <a:solidFill>
-                  <a:srgbClr val="1A1A1A"/>
-                </a:solidFill>
-                <a:latin typeface="Cambria" pitchFamily="34" charset="0"/>
-                <a:ea typeface="Cambria" pitchFamily="34" charset="-122"/>
-                <a:cs typeface="Cambria" pitchFamily="34" charset="-120"/>
-              </a:rPr>
-              <a:t>Điểm (x,y)</a:t>
-            </a:r>
-            <a:endParaRPr lang="en-US" sz="1400" dirty="0"/>
-          </a:p>
-        </p:txBody>
-      </p:sp>
-      <p:sp>
-        <p:nvSpPr>
-          <p:cNvPr id="12" name="Shape 10"/>
-          <p:cNvSpPr/>
-          <p:nvPr/>
-        </p:nvSpPr>
-        <p:spPr>
-          <a:xfrm>
-            <a:off x="6839712" y="1993392"/>
-            <a:ext cx="365760" cy="0"/>
-          </a:xfrm>
-          <a:prstGeom prst="line">
-            <a:avLst/>
-          </a:prstGeom>
-          <a:noFill/>
-          <a:ln w="25400">
-            <a:solidFill>
-              <a:srgbClr val="4F417A"/>
-            </a:solidFill>
-            <a:prstDash val="solid"/>
-            <a:tailEnd type="triangle"/>
-          </a:ln>
-        </p:spPr>
-      </p:sp>
-      <p:sp>
-        <p:nvSpPr>
-          <p:cNvPr id="13" name="Shape 11"/>
-          <p:cNvSpPr/>
-          <p:nvPr/>
-        </p:nvSpPr>
-        <p:spPr>
-          <a:xfrm>
-            <a:off x="7296912" y="1371600"/>
-            <a:ext cx="1261872" cy="1243584"/>
-          </a:xfrm>
-          <a:prstGeom prst="roundRect">
-            <a:avLst/>
-          </a:prstGeom>
-          <a:solidFill>
-            <a:srgbClr val="F3F2F5"/>
-          </a:solidFill>
-          <a:ln w="12700">
-            <a:solidFill>
-              <a:srgbClr val="4F417A"/>
-            </a:solidFill>
-            <a:prstDash val="solid"/>
-          </a:ln>
-        </p:spPr>
-      </p:sp>
-      <p:sp>
-        <p:nvSpPr>
-          <p:cNvPr id="14" name="Text 12"/>
-          <p:cNvSpPr/>
-          <p:nvPr/>
-        </p:nvSpPr>
-        <p:spPr>
-          <a:xfrm>
-            <a:off x="7296912" y="1371600"/>
-            <a:ext cx="1261872" cy="1243584"/>
-          </a:xfrm>
-          <a:prstGeom prst="rect">
-            <a:avLst/>
-          </a:prstGeom>
-          <a:noFill/>
-          <a:ln/>
-        </p:spPr>
-        <p:txBody>
-          <a:bodyPr wrap="square" lIns="0" tIns="0" rIns="0" bIns="0" rtlCol="0" anchor="ctr">
-            <a:normAutofit/>
-          </a:bodyPr>
-          <a:lstStyle/>
-          <a:p>
-            <a:pPr algn="ctr" indent="0" marL="0">
-              <a:lnSpc>
-                <a:spcPct val="125000"/>
-              </a:lnSpc>
-              <a:buNone/>
-            </a:pPr>
-            <a:r>
-              <a:rPr lang="en-US" sz="1320" b="1" dirty="0">
-                <a:solidFill>
-                  <a:srgbClr val="1A1A1A"/>
-                </a:solidFill>
-                <a:latin typeface="Cambria" pitchFamily="34" charset="0"/>
-                <a:ea typeface="Cambria" pitchFamily="34" charset="-122"/>
-                <a:cs typeface="Cambria" pitchFamily="34" charset="-120"/>
-              </a:rPr>
-              <a:t>Kiểm tra</a:t>
-            </a:r>
-            <a:endParaRPr lang="en-US" sz="1320" dirty="0"/>
-          </a:p>
-          <a:p>
-            <a:pPr algn="ctr" indent="0" marL="0">
-              <a:lnSpc>
-                <a:spcPct val="125000"/>
-              </a:lnSpc>
-              <a:buNone/>
-            </a:pPr>
-            <a:r>
-              <a:rPr lang="en-US" sz="1320" b="1" dirty="0">
-                <a:solidFill>
-                  <a:srgbClr val="1A1A1A"/>
-                </a:solidFill>
-                <a:latin typeface="Cambria" pitchFamily="34" charset="0"/>
-                <a:ea typeface="Cambria" pitchFamily="34" charset="-122"/>
-                <a:cs typeface="Cambria" pitchFamily="34" charset="-120"/>
-              </a:rPr>
-              <a:t>phần tử + thao tác</a:t>
-            </a:r>
-            <a:endParaRPr lang="en-US" sz="1320" dirty="0"/>
-          </a:p>
-        </p:txBody>
-      </p:sp>
-      <p:sp>
-        <p:nvSpPr>
-          <p:cNvPr id="15" name="Text 13"/>
-          <p:cNvSpPr/>
-          <p:nvPr/>
-        </p:nvSpPr>
-        <p:spPr>
-          <a:xfrm>
-            <a:off x="502920" y="3182112"/>
-            <a:ext cx="3246120" cy="502920"/>
-          </a:xfrm>
-          <a:prstGeom prst="rect">
-            <a:avLst/>
-          </a:prstGeom>
-          <a:noFill/>
-          <a:ln/>
-        </p:spPr>
-        <p:txBody>
-          <a:bodyPr wrap="square" lIns="0" tIns="0" rIns="0" bIns="0" rtlCol="0" anchor="ctr">
-            <a:normAutofit/>
-          </a:bodyPr>
-          <a:lstStyle/>
-          <a:p>
-            <a:pPr indent="0" marL="0">
-              <a:lnSpc>
-                <a:spcPct val="125000"/>
-              </a:lnSpc>
-              <a:buNone/>
-            </a:pPr>
-            <a:r>
-              <a:rPr lang="en-US" sz="1550" b="1" dirty="0">
-                <a:solidFill>
-                  <a:srgbClr val="25194B"/>
-                </a:solidFill>
-                <a:latin typeface="Cambria" pitchFamily="34" charset="0"/>
-                <a:ea typeface="Cambria" pitchFamily="34" charset="-122"/>
-                <a:cs typeface="Cambria" pitchFamily="34" charset="-120"/>
-              </a:rPr>
-              <a:t>Một bước được tính đúng khi đồng thời:</a:t>
-            </a:r>
-            <a:endParaRPr lang="en-US" sz="1550" dirty="0"/>
-          </a:p>
-        </p:txBody>
-      </p:sp>
-      <p:sp>
-        <p:nvSpPr>
-          <p:cNvPr id="16" name="Shape 14"/>
-          <p:cNvSpPr/>
-          <p:nvPr/>
-        </p:nvSpPr>
-        <p:spPr>
-          <a:xfrm>
-            <a:off x="521208" y="3813048"/>
-            <a:ext cx="64008" cy="64008"/>
-          </a:xfrm>
-          <a:prstGeom prst="ellipse">
+          <p:cNvPr id="18" name="Shape 16"/>
+          <p:cNvSpPr/>
+          <p:nvPr/>
+        </p:nvSpPr>
+        <p:spPr>
+          <a:xfrm>
+            <a:off x="6126480" y="6620256"/>
+            <a:ext cx="1737360" cy="237744"/>
+          </a:xfrm>
+          <a:prstGeom prst="rect">
             <a:avLst/>
           </a:prstGeom>
           <a:solidFill>
@@ -34221,316 +34189,7 @@
       </p:sp>
       <p:sp>
         <p:nvSpPr>
-          <p:cNvPr id="17" name="Text 15"/>
-          <p:cNvSpPr/>
-          <p:nvPr/>
-        </p:nvSpPr>
-        <p:spPr>
-          <a:xfrm>
-            <a:off x="713232" y="3675888"/>
-            <a:ext cx="7927848" cy="475488"/>
-          </a:xfrm>
-          <a:prstGeom prst="rect">
-            <a:avLst/>
-          </a:prstGeom>
-          <a:noFill/>
-          <a:ln/>
-        </p:spPr>
-        <p:txBody>
-          <a:bodyPr wrap="square" lIns="0" tIns="0" rIns="0" bIns="0" rtlCol="0" anchor="t">
-            <a:normAutofit/>
-          </a:bodyPr>
-          <a:lstStyle/>
-          <a:p>
-            <a:pPr indent="0" marL="0">
-              <a:lnSpc>
-                <a:spcPct val="125000"/>
-              </a:lnSpc>
-              <a:buNone/>
-            </a:pPr>
-            <a:r>
-              <a:rPr lang="en-US" sz="1500" dirty="0">
-                <a:solidFill>
-                  <a:srgbClr val="1A1A1A"/>
-                </a:solidFill>
-                <a:latin typeface="Cambria" pitchFamily="34" charset="0"/>
-                <a:ea typeface="Cambria" pitchFamily="34" charset="-122"/>
-                <a:cs typeface="Cambria" pitchFamily="34" charset="-120"/>
-              </a:rPr>
-              <a:t>đúng loại thao tác</a:t>
-            </a:r>
-            <a:endParaRPr lang="en-US" sz="1500" dirty="0"/>
-          </a:p>
-        </p:txBody>
-      </p:sp>
-      <p:sp>
-        <p:nvSpPr>
-          <p:cNvPr id="18" name="Shape 16"/>
-          <p:cNvSpPr/>
-          <p:nvPr/>
-        </p:nvSpPr>
-        <p:spPr>
-          <a:xfrm>
-            <a:off x="521208" y="4379976"/>
-            <a:ext cx="64008" cy="64008"/>
-          </a:xfrm>
-          <a:prstGeom prst="ellipse">
-            <a:avLst/>
-          </a:prstGeom>
-          <a:solidFill>
-            <a:srgbClr val="4F417A"/>
-          </a:solidFill>
-          <a:ln w="12700">
-            <a:solidFill>
-              <a:srgbClr val="4F417A">
-                <a:alpha val="0"/>
-              </a:srgbClr>
-            </a:solidFill>
-            <a:prstDash val="solid"/>
-          </a:ln>
-        </p:spPr>
-      </p:sp>
-      <p:sp>
-        <p:nvSpPr>
-          <p:cNvPr id="19" name="Text 17"/>
-          <p:cNvSpPr/>
-          <p:nvPr/>
-        </p:nvSpPr>
-        <p:spPr>
-          <a:xfrm>
-            <a:off x="713232" y="4242816"/>
-            <a:ext cx="7927848" cy="475488"/>
-          </a:xfrm>
-          <a:prstGeom prst="rect">
-            <a:avLst/>
-          </a:prstGeom>
-          <a:noFill/>
-          <a:ln/>
-        </p:spPr>
-        <p:txBody>
-          <a:bodyPr wrap="square" lIns="0" tIns="0" rIns="0" bIns="0" rtlCol="0" anchor="t">
-            <a:normAutofit/>
-          </a:bodyPr>
-          <a:lstStyle/>
-          <a:p>
-            <a:pPr indent="0" marL="0">
-              <a:lnSpc>
-                <a:spcPct val="125000"/>
-              </a:lnSpc>
-              <a:buNone/>
-            </a:pPr>
-            <a:r>
-              <a:rPr lang="en-US" sz="1500" dirty="0">
-                <a:solidFill>
-                  <a:srgbClr val="1A1A1A"/>
-                </a:solidFill>
-                <a:latin typeface="Cambria" pitchFamily="34" charset="0"/>
-                <a:ea typeface="Cambria" pitchFamily="34" charset="-122"/>
-                <a:cs typeface="Cambria" pitchFamily="34" charset="-120"/>
-              </a:rPr>
-              <a:t>không diễn đạt ngược thao tác cần làm</a:t>
-            </a:r>
-            <a:endParaRPr lang="en-US" sz="1500" dirty="0"/>
-          </a:p>
-        </p:txBody>
-      </p:sp>
-      <p:sp>
-        <p:nvSpPr>
-          <p:cNvPr id="20" name="Shape 18"/>
-          <p:cNvSpPr/>
-          <p:nvPr/>
-        </p:nvSpPr>
-        <p:spPr>
-          <a:xfrm>
-            <a:off x="521208" y="4946904"/>
-            <a:ext cx="64008" cy="64008"/>
-          </a:xfrm>
-          <a:prstGeom prst="ellipse">
-            <a:avLst/>
-          </a:prstGeom>
-          <a:solidFill>
-            <a:srgbClr val="4F417A"/>
-          </a:solidFill>
-          <a:ln w="12700">
-            <a:solidFill>
-              <a:srgbClr val="4F417A">
-                <a:alpha val="0"/>
-              </a:srgbClr>
-            </a:solidFill>
-            <a:prstDash val="solid"/>
-          </a:ln>
-        </p:spPr>
-      </p:sp>
-      <p:sp>
-        <p:nvSpPr>
-          <p:cNvPr id="21" name="Text 19"/>
-          <p:cNvSpPr/>
-          <p:nvPr/>
-        </p:nvSpPr>
-        <p:spPr>
-          <a:xfrm>
-            <a:off x="713232" y="4809744"/>
-            <a:ext cx="7927848" cy="475488"/>
-          </a:xfrm>
-          <a:prstGeom prst="rect">
-            <a:avLst/>
-          </a:prstGeom>
-          <a:noFill/>
-          <a:ln/>
-        </p:spPr>
-        <p:txBody>
-          <a:bodyPr wrap="square" lIns="0" tIns="0" rIns="0" bIns="0" rtlCol="0" anchor="t">
-            <a:normAutofit/>
-          </a:bodyPr>
-          <a:lstStyle/>
-          <a:p>
-            <a:pPr indent="0" marL="0">
-              <a:lnSpc>
-                <a:spcPct val="125000"/>
-              </a:lnSpc>
-              <a:buNone/>
-            </a:pPr>
-            <a:r>
-              <a:rPr lang="en-US" sz="1500" dirty="0">
-                <a:solidFill>
-                  <a:srgbClr val="1A1A1A"/>
-                </a:solidFill>
-                <a:latin typeface="Cambria" pitchFamily="34" charset="0"/>
-                <a:ea typeface="Cambria" pitchFamily="34" charset="-122"/>
-                <a:cs typeface="Cambria" pitchFamily="34" charset="-120"/>
-              </a:rPr>
-              <a:t>điểm định vị thuộc vùng của phần tử cần chạm</a:t>
-            </a:r>
-            <a:endParaRPr lang="en-US" sz="1500" dirty="0"/>
-          </a:p>
-        </p:txBody>
-      </p:sp>
-      <p:sp>
-        <p:nvSpPr>
-          <p:cNvPr id="22" name="Text 20"/>
-          <p:cNvSpPr/>
-          <p:nvPr/>
-        </p:nvSpPr>
-        <p:spPr>
-          <a:xfrm>
-            <a:off x="502920" y="5468112"/>
-            <a:ext cx="8138160" cy="411480"/>
-          </a:xfrm>
-          <a:prstGeom prst="rect">
-            <a:avLst/>
-          </a:prstGeom>
-          <a:noFill/>
-          <a:ln/>
-        </p:spPr>
-        <p:txBody>
-          <a:bodyPr wrap="square" lIns="0" tIns="0" rIns="0" bIns="0" rtlCol="0" anchor="ctr"/>
-          <a:lstStyle/>
-          <a:p>
-            <a:pPr algn="ctr" indent="0" marL="0">
-              <a:lnSpc>
-                <a:spcPct val="125000"/>
-              </a:lnSpc>
-              <a:buNone/>
-            </a:pPr>
-            <a:r>
-              <a:rPr lang="en-US" sz="1400" b="1" dirty="0">
-                <a:solidFill>
-                  <a:srgbClr val="25194B"/>
-                </a:solidFill>
-                <a:latin typeface="Cambria" pitchFamily="34" charset="0"/>
-                <a:ea typeface="Cambria" pitchFamily="34" charset="-122"/>
-                <a:cs typeface="Cambria" pitchFamily="34" charset="-120"/>
-              </a:rPr>
-              <a:t>Mô hình định vị không tham gia huấn luyện phương pháp và không biết tọa độ đáp án.</a:t>
-            </a:r>
-            <a:endParaRPr lang="en-US" sz="1400" dirty="0"/>
-          </a:p>
-        </p:txBody>
-      </p:sp>
-      <p:sp>
-        <p:nvSpPr>
-          <p:cNvPr id="23" name="Shape 21"/>
-          <p:cNvSpPr/>
-          <p:nvPr/>
-        </p:nvSpPr>
-        <p:spPr>
-          <a:xfrm>
-            <a:off x="0" y="6620256"/>
-            <a:ext cx="2743200" cy="237744"/>
-          </a:xfrm>
-          <a:prstGeom prst="rect">
-            <a:avLst/>
-          </a:prstGeom>
-          <a:solidFill>
-            <a:srgbClr val="191132"/>
-          </a:solidFill>
-          <a:ln w="12700">
-            <a:solidFill>
-              <a:srgbClr val="191132">
-                <a:alpha val="0"/>
-              </a:srgbClr>
-            </a:solidFill>
-            <a:prstDash val="solid"/>
-          </a:ln>
-        </p:spPr>
-      </p:sp>
-      <p:sp>
-        <p:nvSpPr>
-          <p:cNvPr id="24" name="Shape 22"/>
-          <p:cNvSpPr/>
-          <p:nvPr/>
-        </p:nvSpPr>
-        <p:spPr>
-          <a:xfrm>
-            <a:off x="2743200" y="6620256"/>
-            <a:ext cx="3383280" cy="237744"/>
-          </a:xfrm>
-          <a:prstGeom prst="rect">
-            <a:avLst/>
-          </a:prstGeom>
-          <a:solidFill>
-            <a:srgbClr val="25194B"/>
-          </a:solidFill>
-          <a:ln w="12700">
-            <a:solidFill>
-              <a:srgbClr val="25194B">
-                <a:alpha val="0"/>
-              </a:srgbClr>
-            </a:solidFill>
-            <a:prstDash val="solid"/>
-          </a:ln>
-        </p:spPr>
-      </p:sp>
-      <p:sp>
-        <p:nvSpPr>
-          <p:cNvPr id="25" name="Shape 23"/>
-          <p:cNvSpPr/>
-          <p:nvPr/>
-        </p:nvSpPr>
-        <p:spPr>
-          <a:xfrm>
-            <a:off x="6126480" y="6620256"/>
-            <a:ext cx="1737360" cy="237744"/>
-          </a:xfrm>
-          <a:prstGeom prst="rect">
-            <a:avLst/>
-          </a:prstGeom>
-          <a:solidFill>
-            <a:srgbClr val="4F417A"/>
-          </a:solidFill>
-          <a:ln w="12700">
-            <a:solidFill>
-              <a:srgbClr val="4F417A">
-                <a:alpha val="0"/>
-              </a:srgbClr>
-            </a:solidFill>
-            <a:prstDash val="solid"/>
-          </a:ln>
-        </p:spPr>
-      </p:sp>
-      <p:sp>
-        <p:nvSpPr>
-          <p:cNvPr id="26" name="Shape 24"/>
+          <p:cNvPr id="19" name="Shape 17"/>
           <p:cNvSpPr/>
           <p:nvPr/>
         </p:nvSpPr>
@@ -34557,7 +34216,7 @@
       </p:sp>
       <p:sp>
         <p:nvSpPr>
-          <p:cNvPr id="27" name="Text 25"/>
+          <p:cNvPr id="20" name="Text 18"/>
           <p:cNvSpPr/>
           <p:nvPr/>
         </p:nvSpPr>
@@ -34599,7 +34258,7 @@
       </p:sp>
       <p:sp>
         <p:nvSpPr>
-          <p:cNvPr id="28" name="Text 26"/>
+          <p:cNvPr id="21" name="Text 19"/>
           <p:cNvSpPr/>
           <p:nvPr/>
         </p:nvSpPr>
@@ -34641,7 +34300,7 @@
       </p:sp>
       <p:sp>
         <p:nvSpPr>
-          <p:cNvPr id="29" name="Text 27"/>
+          <p:cNvPr id="22" name="Text 20"/>
           <p:cNvSpPr/>
           <p:nvPr/>
         </p:nvSpPr>
@@ -34683,7 +34342,7 @@
       </p:sp>
       <p:sp>
         <p:nvSpPr>
-          <p:cNvPr id="30" name="Text 28"/>
+          <p:cNvPr id="23" name="Text 21"/>
           <p:cNvSpPr/>
           <p:nvPr/>
         </p:nvSpPr>
@@ -34820,7 +34479,7 @@
                 <a:ea typeface="Cambria" pitchFamily="34" charset="-122"/>
                 <a:cs typeface="Cambria" pitchFamily="34" charset="-120"/>
               </a:rPr>
-              <a:t>Độ đo khả năng thực hiện theo hướng dẫn</a:t>
+              <a:t>Phương pháp đề xuất</a:t>
             </a:r>
             <a:endParaRPr lang="en-US" sz="1820" dirty="0"/>
           </a:p>
@@ -34828,344 +34487,20 @@
       </p:sp>
       <p:sp>
         <p:nvSpPr>
-          <p:cNvPr id="4" name="Text 2"/>
-          <p:cNvSpPr/>
-          <p:nvPr/>
-        </p:nvSpPr>
-        <p:spPr>
-          <a:xfrm>
-            <a:off x="640080" y="1097280"/>
-            <a:ext cx="2148840" cy="502920"/>
-          </a:xfrm>
-          <a:prstGeom prst="rect">
-            <a:avLst/>
-          </a:prstGeom>
-          <a:noFill/>
-          <a:ln/>
-        </p:spPr>
-        <p:txBody>
-          <a:bodyPr wrap="square" lIns="0" tIns="0" rIns="0" bIns="0" rtlCol="0" anchor="ctr"/>
-          <a:lstStyle/>
-          <a:p>
-            <a:pPr algn="ctr" indent="0" marL="0">
-              <a:lnSpc>
-                <a:spcPct val="125000"/>
-              </a:lnSpc>
-              <a:buNone/>
-            </a:pPr>
-            <a:r>
-              <a:rPr lang="en-US" sz="2400" b="1" dirty="0">
-                <a:solidFill>
-                  <a:srgbClr val="25194B"/>
-                </a:solidFill>
-                <a:latin typeface="Cambria" pitchFamily="34" charset="0"/>
-                <a:ea typeface="Cambria" pitchFamily="34" charset="-122"/>
-                <a:cs typeface="Cambria" pitchFamily="34" charset="-120"/>
-              </a:rPr>
-              <a:t>75,7%</a:t>
-            </a:r>
-            <a:endParaRPr lang="en-US" sz="2400" dirty="0"/>
-          </a:p>
-        </p:txBody>
-      </p:sp>
-      <p:sp>
-        <p:nvSpPr>
-          <p:cNvPr id="5" name="Text 3"/>
-          <p:cNvSpPr/>
-          <p:nvPr/>
-        </p:nvSpPr>
-        <p:spPr>
-          <a:xfrm>
-            <a:off x="640080" y="1627632"/>
-            <a:ext cx="2148840" cy="475488"/>
-          </a:xfrm>
-          <a:prstGeom prst="rect">
-            <a:avLst/>
-          </a:prstGeom>
-          <a:noFill/>
-          <a:ln/>
-        </p:spPr>
-        <p:txBody>
-          <a:bodyPr wrap="square" lIns="0" tIns="0" rIns="0" bIns="0" rtlCol="0" anchor="ctr">
-            <a:normAutofit/>
-          </a:bodyPr>
-          <a:lstStyle/>
-          <a:p>
-            <a:pPr algn="ctr" indent="0" marL="0">
-              <a:lnSpc>
-                <a:spcPct val="125000"/>
-              </a:lnSpc>
-              <a:buNone/>
-            </a:pPr>
-            <a:r>
-              <a:rPr lang="en-US" sz="1250" b="1" dirty="0">
-                <a:solidFill>
-                  <a:srgbClr val="1A1A1A"/>
-                </a:solidFill>
-                <a:latin typeface="Cambria" pitchFamily="34" charset="0"/>
-                <a:ea typeface="Cambria" pitchFamily="34" charset="-122"/>
-                <a:cs typeface="Cambria" pitchFamily="34" charset="-120"/>
-              </a:rPr>
-              <a:t>câu chuẩn</a:t>
-            </a:r>
-            <a:endParaRPr lang="en-US" sz="1250" dirty="0"/>
-          </a:p>
-        </p:txBody>
-      </p:sp>
-      <p:sp>
-        <p:nvSpPr>
-          <p:cNvPr id="6" name="Text 4"/>
-          <p:cNvSpPr/>
-          <p:nvPr/>
-        </p:nvSpPr>
-        <p:spPr>
-          <a:xfrm>
-            <a:off x="3493008" y="1097280"/>
-            <a:ext cx="2148840" cy="502920"/>
-          </a:xfrm>
-          <a:prstGeom prst="rect">
-            <a:avLst/>
-          </a:prstGeom>
-          <a:noFill/>
-          <a:ln/>
-        </p:spPr>
-        <p:txBody>
-          <a:bodyPr wrap="square" lIns="0" tIns="0" rIns="0" bIns="0" rtlCol="0" anchor="ctr"/>
-          <a:lstStyle/>
-          <a:p>
-            <a:pPr algn="ctr" indent="0" marL="0">
-              <a:lnSpc>
-                <a:spcPct val="125000"/>
-              </a:lnSpc>
-              <a:buNone/>
-            </a:pPr>
-            <a:r>
-              <a:rPr lang="en-US" sz="2400" b="1" dirty="0">
-                <a:solidFill>
-                  <a:srgbClr val="4F417A"/>
-                </a:solidFill>
-                <a:latin typeface="Cambria" pitchFamily="34" charset="0"/>
-                <a:ea typeface="Cambria" pitchFamily="34" charset="-122"/>
-                <a:cs typeface="Cambria" pitchFamily="34" charset="-120"/>
-              </a:rPr>
-              <a:t>12,0%</a:t>
-            </a:r>
-            <a:endParaRPr lang="en-US" sz="2400" dirty="0"/>
-          </a:p>
-        </p:txBody>
-      </p:sp>
-      <p:sp>
-        <p:nvSpPr>
-          <p:cNvPr id="7" name="Text 5"/>
-          <p:cNvSpPr/>
-          <p:nvPr/>
-        </p:nvSpPr>
-        <p:spPr>
-          <a:xfrm>
-            <a:off x="3493008" y="1627632"/>
-            <a:ext cx="2148840" cy="475488"/>
-          </a:xfrm>
-          <a:prstGeom prst="rect">
-            <a:avLst/>
-          </a:prstGeom>
-          <a:noFill/>
-          <a:ln/>
-        </p:spPr>
-        <p:txBody>
-          <a:bodyPr wrap="square" lIns="0" tIns="0" rIns="0" bIns="0" rtlCol="0" anchor="ctr">
-            <a:normAutofit/>
-          </a:bodyPr>
-          <a:lstStyle/>
-          <a:p>
-            <a:pPr algn="ctr" indent="0" marL="0">
-              <a:lnSpc>
-                <a:spcPct val="125000"/>
-              </a:lnSpc>
-              <a:buNone/>
-            </a:pPr>
-            <a:r>
-              <a:rPr lang="en-US" sz="1250" b="1" dirty="0">
-                <a:solidFill>
-                  <a:srgbClr val="1A1A1A"/>
-                </a:solidFill>
-                <a:latin typeface="Cambria" pitchFamily="34" charset="0"/>
-                <a:ea typeface="Cambria" pitchFamily="34" charset="-122"/>
-                <a:cs typeface="Cambria" pitchFamily="34" charset="-120"/>
-              </a:rPr>
-              <a:t>“Tap the button.”</a:t>
-            </a:r>
-            <a:endParaRPr lang="en-US" sz="1250" dirty="0"/>
-          </a:p>
-        </p:txBody>
-      </p:sp>
-      <p:sp>
-        <p:nvSpPr>
-          <p:cNvPr id="8" name="Text 6"/>
-          <p:cNvSpPr/>
-          <p:nvPr/>
-        </p:nvSpPr>
-        <p:spPr>
-          <a:xfrm>
-            <a:off x="6345936" y="1097280"/>
-            <a:ext cx="2148840" cy="502920"/>
-          </a:xfrm>
-          <a:prstGeom prst="rect">
-            <a:avLst/>
-          </a:prstGeom>
-          <a:noFill/>
-          <a:ln/>
-        </p:spPr>
-        <p:txBody>
-          <a:bodyPr wrap="square" lIns="0" tIns="0" rIns="0" bIns="0" rtlCol="0" anchor="ctr"/>
-          <a:lstStyle/>
-          <a:p>
-            <a:pPr algn="ctr" indent="0" marL="0">
-              <a:lnSpc>
-                <a:spcPct val="125000"/>
-              </a:lnSpc>
-              <a:buNone/>
-            </a:pPr>
-            <a:r>
-              <a:rPr lang="en-US" sz="2400" b="1" dirty="0">
-                <a:solidFill>
-                  <a:srgbClr val="7A7099"/>
-                </a:solidFill>
-                <a:latin typeface="Cambria" pitchFamily="34" charset="0"/>
-                <a:ea typeface="Cambria" pitchFamily="34" charset="-122"/>
-                <a:cs typeface="Cambria" pitchFamily="34" charset="-120"/>
-              </a:rPr>
-              <a:t>6,1%</a:t>
-            </a:r>
-            <a:endParaRPr lang="en-US" sz="2400" dirty="0"/>
-          </a:p>
-        </p:txBody>
-      </p:sp>
-      <p:sp>
-        <p:nvSpPr>
-          <p:cNvPr id="9" name="Text 7"/>
-          <p:cNvSpPr/>
-          <p:nvPr/>
-        </p:nvSpPr>
-        <p:spPr>
-          <a:xfrm>
-            <a:off x="6345936" y="1627632"/>
-            <a:ext cx="2148840" cy="475488"/>
-          </a:xfrm>
-          <a:prstGeom prst="rect">
-            <a:avLst/>
-          </a:prstGeom>
-          <a:noFill/>
-          <a:ln/>
-        </p:spPr>
-        <p:txBody>
-          <a:bodyPr wrap="square" lIns="0" tIns="0" rIns="0" bIns="0" rtlCol="0" anchor="ctr">
-            <a:normAutofit/>
-          </a:bodyPr>
-          <a:lstStyle/>
-          <a:p>
-            <a:pPr algn="ctr" indent="0" marL="0">
-              <a:lnSpc>
-                <a:spcPct val="125000"/>
-              </a:lnSpc>
-              <a:buNone/>
-            </a:pPr>
-            <a:r>
-              <a:rPr lang="en-US" sz="1250" b="1" dirty="0">
-                <a:solidFill>
-                  <a:srgbClr val="1A1A1A"/>
-                </a:solidFill>
-                <a:latin typeface="Cambria" pitchFamily="34" charset="0"/>
-                <a:ea typeface="Cambria" pitchFamily="34" charset="-122"/>
-                <a:cs typeface="Cambria" pitchFamily="34" charset="-120"/>
-              </a:rPr>
-              <a:t>câu của màn hình khác</a:t>
-            </a:r>
-            <a:endParaRPr lang="en-US" sz="1250" dirty="0"/>
-          </a:p>
-        </p:txBody>
-      </p:sp>
-      <p:sp>
-        <p:nvSpPr>
-          <p:cNvPr id="10" name="Text 8"/>
-          <p:cNvSpPr/>
-          <p:nvPr/>
-        </p:nvSpPr>
-        <p:spPr>
-          <a:xfrm>
-            <a:off x="502920" y="2395728"/>
-            <a:ext cx="8138160" cy="274320"/>
-          </a:xfrm>
-          <a:prstGeom prst="rect">
-            <a:avLst/>
-          </a:prstGeom>
-          <a:noFill/>
-          <a:ln/>
-        </p:spPr>
-        <p:txBody>
-          <a:bodyPr wrap="square" lIns="0" tIns="0" rIns="0" bIns="0" rtlCol="0" anchor="ctr"/>
-          <a:lstStyle/>
-          <a:p>
-            <a:pPr algn="ctr" indent="0" marL="0">
-              <a:lnSpc>
-                <a:spcPct val="125000"/>
-              </a:lnSpc>
-              <a:buNone/>
-            </a:pPr>
-            <a:r>
-              <a:rPr lang="en-US" sz="1250" dirty="0">
-                <a:solidFill>
-                  <a:srgbClr val="5A5A66"/>
-                </a:solidFill>
-                <a:latin typeface="Cambria" pitchFamily="34" charset="0"/>
-                <a:ea typeface="Cambria" pitchFamily="34" charset="-122"/>
-                <a:cs typeface="Cambria" pitchFamily="34" charset="-120"/>
-              </a:rPr>
-              <a:t>Ba mốc được tính trên cùng mẫu 800 bước.</a:t>
-            </a:r>
-            <a:endParaRPr lang="en-US" sz="1250" dirty="0"/>
-          </a:p>
-        </p:txBody>
-      </p:sp>
-      <p:sp>
-        <p:nvSpPr>
-          <p:cNvPr id="11" name="Shape 9"/>
-          <p:cNvSpPr/>
-          <p:nvPr/>
-        </p:nvSpPr>
-        <p:spPr>
-          <a:xfrm>
-            <a:off x="502920" y="2761488"/>
-            <a:ext cx="8138160" cy="0"/>
-          </a:xfrm>
-          <a:prstGeom prst="line">
-            <a:avLst/>
-          </a:prstGeom>
-          <a:noFill/>
-          <a:ln w="12700">
-            <a:solidFill>
-              <a:srgbClr val="D9D6DF"/>
-            </a:solidFill>
-            <a:prstDash val="solid"/>
-            <a:tailEnd type="none"/>
-          </a:ln>
-        </p:spPr>
-      </p:sp>
-      <p:sp>
-        <p:nvSpPr>
-          <p:cNvPr id="12" name="Shape 10"/>
-          <p:cNvSpPr/>
-          <p:nvPr/>
-        </p:nvSpPr>
-        <p:spPr>
-          <a:xfrm>
-            <a:off x="502920" y="3127248"/>
-            <a:ext cx="8138160" cy="1417320"/>
+          <p:cNvPr id="4" name="Shape 2"/>
+          <p:cNvSpPr/>
+          <p:nvPr/>
+        </p:nvSpPr>
+        <p:spPr>
+          <a:xfrm>
+            <a:off x="502920" y="1234440"/>
+            <a:ext cx="868680" cy="822960"/>
           </a:xfrm>
           <a:prstGeom prst="roundRect">
             <a:avLst/>
           </a:prstGeom>
           <a:solidFill>
-            <a:srgbClr val="F3F2F5"/>
+            <a:srgbClr val="FFFFFF"/>
           </a:solidFill>
           <a:ln w="12700">
             <a:solidFill>
@@ -35177,56 +34512,14 @@
       </p:sp>
       <p:sp>
         <p:nvSpPr>
-          <p:cNvPr id="13" name="Text 11"/>
-          <p:cNvSpPr/>
-          <p:nvPr/>
-        </p:nvSpPr>
-        <p:spPr>
-          <a:xfrm>
-            <a:off x="704088" y="3346704"/>
-            <a:ext cx="2057400" cy="310896"/>
-          </a:xfrm>
-          <a:prstGeom prst="rect">
-            <a:avLst/>
-          </a:prstGeom>
-          <a:noFill/>
-          <a:ln/>
-        </p:spPr>
-        <p:txBody>
-          <a:bodyPr wrap="square" lIns="0" tIns="0" rIns="0" bIns="0" rtlCol="0" anchor="ctr"/>
-          <a:lstStyle/>
-          <a:p>
-            <a:pPr indent="0" marL="0">
-              <a:lnSpc>
-                <a:spcPct val="125000"/>
-              </a:lnSpc>
-              <a:buNone/>
-            </a:pPr>
-            <a:r>
-              <a:rPr lang="en-US" sz="1500" b="1" dirty="0">
-                <a:solidFill>
-                  <a:srgbClr val="25194B"/>
-                </a:solidFill>
-                <a:latin typeface="Cambria" pitchFamily="34" charset="0"/>
-                <a:ea typeface="Cambria" pitchFamily="34" charset="-122"/>
-                <a:cs typeface="Cambria" pitchFamily="34" charset="-120"/>
-              </a:rPr>
-              <a:t>Đổi công cụ đánh giá</a:t>
-            </a:r>
-            <a:endParaRPr lang="en-US" sz="1500" dirty="0"/>
-          </a:p>
-        </p:txBody>
-      </p:sp>
-      <p:sp>
-        <p:nvSpPr>
-          <p:cNvPr id="14" name="Text 12"/>
-          <p:cNvSpPr/>
-          <p:nvPr/>
-        </p:nvSpPr>
-        <p:spPr>
-          <a:xfrm>
-            <a:off x="2560320" y="3182112"/>
-            <a:ext cx="5806440" cy="841248"/>
+          <p:cNvPr id="5" name="Text 3"/>
+          <p:cNvSpPr/>
+          <p:nvPr/>
+        </p:nvSpPr>
+        <p:spPr>
+          <a:xfrm>
+            <a:off x="502920" y="1234440"/>
+            <a:ext cx="868680" cy="822960"/>
           </a:xfrm>
           <a:prstGeom prst="rect">
             <a:avLst/>
@@ -35240,6 +34533,387 @@
           </a:bodyPr>
           <a:lstStyle/>
           <a:p>
+            <a:pPr algn="ctr" indent="0" marL="0">
+              <a:lnSpc>
+                <a:spcPct val="125000"/>
+              </a:lnSpc>
+              <a:buNone/>
+            </a:pPr>
+            <a:r>
+              <a:rPr lang="en-US" sz="1600" b="1" dirty="0">
+                <a:solidFill>
+                  <a:srgbClr val="1A1A1A"/>
+                </a:solidFill>
+                <a:latin typeface="Cambria" pitchFamily="34" charset="0"/>
+                <a:ea typeface="Cambria" pitchFamily="34" charset="-122"/>
+                <a:cs typeface="Cambria" pitchFamily="34" charset="-120"/>
+              </a:rPr>
+              <a:t>S1</a:t>
+            </a:r>
+            <a:endParaRPr lang="en-US" sz="1600" dirty="0"/>
+          </a:p>
+        </p:txBody>
+      </p:sp>
+      <p:sp>
+        <p:nvSpPr>
+          <p:cNvPr id="6" name="Shape 4"/>
+          <p:cNvSpPr/>
+          <p:nvPr/>
+        </p:nvSpPr>
+        <p:spPr>
+          <a:xfrm>
+            <a:off x="1481328" y="1645920"/>
+            <a:ext cx="320040" cy="0"/>
+          </a:xfrm>
+          <a:prstGeom prst="line">
+            <a:avLst/>
+          </a:prstGeom>
+          <a:noFill/>
+          <a:ln w="25400">
+            <a:solidFill>
+              <a:srgbClr val="4F417A"/>
+            </a:solidFill>
+            <a:prstDash val="solid"/>
+            <a:tailEnd type="triangle"/>
+          </a:ln>
+        </p:spPr>
+      </p:sp>
+      <p:sp>
+        <p:nvSpPr>
+          <p:cNvPr id="7" name="Shape 5"/>
+          <p:cNvSpPr/>
+          <p:nvPr/>
+        </p:nvSpPr>
+        <p:spPr>
+          <a:xfrm>
+            <a:off x="1901952" y="1143000"/>
+            <a:ext cx="1965960" cy="1005840"/>
+          </a:xfrm>
+          <a:prstGeom prst="roundRect">
+            <a:avLst/>
+          </a:prstGeom>
+          <a:solidFill>
+            <a:srgbClr val="F3F2F5"/>
+          </a:solidFill>
+          <a:ln w="12700">
+            <a:solidFill>
+              <a:srgbClr val="25194B"/>
+            </a:solidFill>
+            <a:prstDash val="solid"/>
+          </a:ln>
+        </p:spPr>
+      </p:sp>
+      <p:sp>
+        <p:nvSpPr>
+          <p:cNvPr id="8" name="Text 6"/>
+          <p:cNvSpPr/>
+          <p:nvPr/>
+        </p:nvSpPr>
+        <p:spPr>
+          <a:xfrm>
+            <a:off x="1901952" y="1143000"/>
+            <a:ext cx="1965960" cy="1005840"/>
+          </a:xfrm>
+          <a:prstGeom prst="rect">
+            <a:avLst/>
+          </a:prstGeom>
+          <a:noFill/>
+          <a:ln/>
+        </p:spPr>
+        <p:txBody>
+          <a:bodyPr wrap="square" lIns="0" tIns="0" rIns="0" bIns="0" rtlCol="0" anchor="ctr">
+            <a:normAutofit/>
+          </a:bodyPr>
+          <a:lstStyle/>
+          <a:p>
+            <a:pPr algn="ctr" indent="0" marL="0">
+              <a:lnSpc>
+                <a:spcPct val="125000"/>
+              </a:lnSpc>
+              <a:buNone/>
+            </a:pPr>
+            <a:r>
+              <a:rPr lang="en-US" sz="1500" b="1" dirty="0">
+                <a:solidFill>
+                  <a:srgbClr val="1A1A1A"/>
+                </a:solidFill>
+                <a:latin typeface="Cambria" pitchFamily="34" charset="0"/>
+                <a:ea typeface="Cambria" pitchFamily="34" charset="-122"/>
+                <a:cs typeface="Cambria" pitchFamily="34" charset="-120"/>
+              </a:rPr>
+              <a:t>GRPO-SPICE</a:t>
+            </a:r>
+            <a:endParaRPr lang="en-US" sz="1500" dirty="0"/>
+          </a:p>
+          <a:p>
+            <a:pPr algn="ctr" indent="0" marL="0">
+              <a:lnSpc>
+                <a:spcPct val="125000"/>
+              </a:lnSpc>
+              <a:buNone/>
+            </a:pPr>
+            <a:r>
+              <a:rPr lang="en-US" sz="1500" b="1" dirty="0">
+                <a:solidFill>
+                  <a:srgbClr val="1A1A1A"/>
+                </a:solidFill>
+                <a:latin typeface="Cambria" pitchFamily="34" charset="0"/>
+                <a:ea typeface="Cambria" pitchFamily="34" charset="-122"/>
+                <a:cs typeface="Cambria" pitchFamily="34" charset="-120"/>
+              </a:rPr>
+              <a:t>sinh câu ban đầu</a:t>
+            </a:r>
+            <a:endParaRPr lang="en-US" sz="1500" dirty="0"/>
+          </a:p>
+        </p:txBody>
+      </p:sp>
+      <p:sp>
+        <p:nvSpPr>
+          <p:cNvPr id="9" name="Shape 7"/>
+          <p:cNvSpPr/>
+          <p:nvPr/>
+        </p:nvSpPr>
+        <p:spPr>
+          <a:xfrm>
+            <a:off x="3977640" y="1645920"/>
+            <a:ext cx="320040" cy="0"/>
+          </a:xfrm>
+          <a:prstGeom prst="line">
+            <a:avLst/>
+          </a:prstGeom>
+          <a:noFill/>
+          <a:ln w="25400">
+            <a:solidFill>
+              <a:srgbClr val="4F417A"/>
+            </a:solidFill>
+            <a:prstDash val="solid"/>
+            <a:tailEnd type="triangle"/>
+          </a:ln>
+        </p:spPr>
+      </p:sp>
+      <p:sp>
+        <p:nvSpPr>
+          <p:cNvPr id="10" name="Shape 8"/>
+          <p:cNvSpPr/>
+          <p:nvPr/>
+        </p:nvSpPr>
+        <p:spPr>
+          <a:xfrm>
+            <a:off x="4407408" y="1143000"/>
+            <a:ext cx="1965960" cy="1005840"/>
+          </a:xfrm>
+          <a:prstGeom prst="roundRect">
+            <a:avLst/>
+          </a:prstGeom>
+          <a:solidFill>
+            <a:srgbClr val="F3F2F5"/>
+          </a:solidFill>
+          <a:ln w="12700">
+            <a:solidFill>
+              <a:srgbClr val="4F417A"/>
+            </a:solidFill>
+            <a:prstDash val="solid"/>
+          </a:ln>
+        </p:spPr>
+      </p:sp>
+      <p:sp>
+        <p:nvSpPr>
+          <p:cNvPr id="11" name="Text 9"/>
+          <p:cNvSpPr/>
+          <p:nvPr/>
+        </p:nvSpPr>
+        <p:spPr>
+          <a:xfrm>
+            <a:off x="4407408" y="1143000"/>
+            <a:ext cx="1965960" cy="1005840"/>
+          </a:xfrm>
+          <a:prstGeom prst="rect">
+            <a:avLst/>
+          </a:prstGeom>
+          <a:noFill/>
+          <a:ln/>
+        </p:spPr>
+        <p:txBody>
+          <a:bodyPr wrap="square" lIns="0" tIns="0" rIns="0" bIns="0" rtlCol="0" anchor="ctr">
+            <a:normAutofit/>
+          </a:bodyPr>
+          <a:lstStyle/>
+          <a:p>
+            <a:pPr algn="ctr" indent="0" marL="0">
+              <a:lnSpc>
+                <a:spcPct val="125000"/>
+              </a:lnSpc>
+              <a:buNone/>
+            </a:pPr>
+            <a:r>
+              <a:rPr lang="en-US" sz="1500" b="1" dirty="0">
+                <a:solidFill>
+                  <a:srgbClr val="1A1A1A"/>
+                </a:solidFill>
+                <a:latin typeface="Cambria" pitchFamily="34" charset="0"/>
+                <a:ea typeface="Cambria" pitchFamily="34" charset="-122"/>
+                <a:cs typeface="Cambria" pitchFamily="34" charset="-120"/>
+              </a:rPr>
+              <a:t>ACE</a:t>
+            </a:r>
+            <a:endParaRPr lang="en-US" sz="1500" dirty="0"/>
+          </a:p>
+          <a:p>
+            <a:pPr algn="ctr" indent="0" marL="0">
+              <a:lnSpc>
+                <a:spcPct val="125000"/>
+              </a:lnSpc>
+              <a:buNone/>
+            </a:pPr>
+            <a:r>
+              <a:rPr lang="en-US" sz="1500" b="1" dirty="0">
+                <a:solidFill>
+                  <a:srgbClr val="1A1A1A"/>
+                </a:solidFill>
+                <a:latin typeface="Cambria" pitchFamily="34" charset="0"/>
+                <a:ea typeface="Cambria" pitchFamily="34" charset="-122"/>
+                <a:cs typeface="Cambria" pitchFamily="34" charset="-120"/>
+              </a:rPr>
+              <a:t>hiệu chỉnh có chọn lọc</a:t>
+            </a:r>
+            <a:endParaRPr lang="en-US" sz="1500" dirty="0"/>
+          </a:p>
+        </p:txBody>
+      </p:sp>
+      <p:sp>
+        <p:nvSpPr>
+          <p:cNvPr id="12" name="Shape 10"/>
+          <p:cNvSpPr/>
+          <p:nvPr/>
+        </p:nvSpPr>
+        <p:spPr>
+          <a:xfrm>
+            <a:off x="6492240" y="1645920"/>
+            <a:ext cx="320040" cy="0"/>
+          </a:xfrm>
+          <a:prstGeom prst="line">
+            <a:avLst/>
+          </a:prstGeom>
+          <a:noFill/>
+          <a:ln w="25400">
+            <a:solidFill>
+              <a:srgbClr val="4F417A"/>
+            </a:solidFill>
+            <a:prstDash val="solid"/>
+            <a:tailEnd type="triangle"/>
+          </a:ln>
+        </p:spPr>
+      </p:sp>
+      <p:sp>
+        <p:nvSpPr>
+          <p:cNvPr id="13" name="Shape 11"/>
+          <p:cNvSpPr/>
+          <p:nvPr/>
+        </p:nvSpPr>
+        <p:spPr>
+          <a:xfrm>
+            <a:off x="6922008" y="1143000"/>
+            <a:ext cx="1719072" cy="1005840"/>
+          </a:xfrm>
+          <a:prstGeom prst="roundRect">
+            <a:avLst/>
+          </a:prstGeom>
+          <a:solidFill>
+            <a:srgbClr val="FFFFFF"/>
+          </a:solidFill>
+          <a:ln w="12700">
+            <a:solidFill>
+              <a:srgbClr val="7A7099"/>
+            </a:solidFill>
+            <a:prstDash val="solid"/>
+          </a:ln>
+        </p:spPr>
+      </p:sp>
+      <p:sp>
+        <p:nvSpPr>
+          <p:cNvPr id="14" name="Text 12"/>
+          <p:cNvSpPr/>
+          <p:nvPr/>
+        </p:nvSpPr>
+        <p:spPr>
+          <a:xfrm>
+            <a:off x="6922008" y="1143000"/>
+            <a:ext cx="1719072" cy="1005840"/>
+          </a:xfrm>
+          <a:prstGeom prst="rect">
+            <a:avLst/>
+          </a:prstGeom>
+          <a:noFill/>
+          <a:ln/>
+        </p:spPr>
+        <p:txBody>
+          <a:bodyPr wrap="square" lIns="0" tIns="0" rIns="0" bIns="0" rtlCol="0" anchor="ctr">
+            <a:normAutofit/>
+          </a:bodyPr>
+          <a:lstStyle/>
+          <a:p>
+            <a:pPr algn="ctr" indent="0" marL="0">
+              <a:lnSpc>
+                <a:spcPct val="125000"/>
+              </a:lnSpc>
+              <a:buNone/>
+            </a:pPr>
+            <a:r>
+              <a:rPr lang="en-US" sz="1400" b="1" dirty="0">
+                <a:solidFill>
+                  <a:srgbClr val="1A1A1A"/>
+                </a:solidFill>
+                <a:latin typeface="Cambria" pitchFamily="34" charset="0"/>
+                <a:ea typeface="Cambria" pitchFamily="34" charset="-122"/>
+                <a:cs typeface="Cambria" pitchFamily="34" charset="-120"/>
+              </a:rPr>
+              <a:t>Câu hướng dẫn</a:t>
+            </a:r>
+            <a:endParaRPr lang="en-US" sz="1400" dirty="0"/>
+          </a:p>
+          <a:p>
+            <a:pPr algn="ctr" indent="0" marL="0">
+              <a:lnSpc>
+                <a:spcPct val="125000"/>
+              </a:lnSpc>
+              <a:buNone/>
+            </a:pPr>
+            <a:r>
+              <a:rPr lang="en-US" sz="1400" b="1" dirty="0">
+                <a:solidFill>
+                  <a:srgbClr val="1A1A1A"/>
+                </a:solidFill>
+                <a:latin typeface="Cambria" pitchFamily="34" charset="0"/>
+                <a:ea typeface="Cambria" pitchFamily="34" charset="-122"/>
+                <a:cs typeface="Cambria" pitchFamily="34" charset="-120"/>
+              </a:rPr>
+              <a:t>cuối</a:t>
+            </a:r>
+            <a:endParaRPr lang="en-US" sz="1400" dirty="0"/>
+          </a:p>
+        </p:txBody>
+      </p:sp>
+      <p:sp>
+        <p:nvSpPr>
+          <p:cNvPr id="15" name="Text 13"/>
+          <p:cNvSpPr/>
+          <p:nvPr/>
+        </p:nvSpPr>
+        <p:spPr>
+          <a:xfrm>
+            <a:off x="502920" y="3127248"/>
+            <a:ext cx="1965960" cy="365760"/>
+          </a:xfrm>
+          <a:prstGeom prst="rect">
+            <a:avLst/>
+          </a:prstGeom>
+          <a:noFill/>
+          <a:ln/>
+        </p:spPr>
+        <p:txBody>
+          <a:bodyPr wrap="square" lIns="0" tIns="0" rIns="0" bIns="0" rtlCol="0" anchor="ctr"/>
+          <a:lstStyle/>
+          <a:p>
             <a:pPr indent="0" marL="0">
               <a:lnSpc>
                 <a:spcPct val="125000"/>
@@ -35247,7 +34921,78 @@
               <a:buNone/>
             </a:pPr>
             <a:r>
-              <a:rPr lang="en-US" sz="1400" dirty="0">
+              <a:rPr lang="en-US" sz="1700" b="1" dirty="0">
+                <a:solidFill>
+                  <a:srgbClr val="25194B"/>
+                </a:solidFill>
+                <a:latin typeface="Cambria" pitchFamily="34" charset="0"/>
+                <a:ea typeface="Cambria" pitchFamily="34" charset="-122"/>
+                <a:cs typeface="Cambria" pitchFamily="34" charset="-120"/>
+              </a:rPr>
+              <a:t>GRPO-SPICE</a:t>
+            </a:r>
+            <a:endParaRPr lang="en-US" sz="1700" dirty="0"/>
+          </a:p>
+        </p:txBody>
+      </p:sp>
+      <p:sp>
+        <p:nvSpPr>
+          <p:cNvPr id="16" name="Shape 14"/>
+          <p:cNvSpPr/>
+          <p:nvPr/>
+        </p:nvSpPr>
+        <p:spPr>
+          <a:xfrm>
+            <a:off x="521208" y="3721608"/>
+            <a:ext cx="64008" cy="64008"/>
+          </a:xfrm>
+          <a:prstGeom prst="ellipse">
+            <a:avLst/>
+          </a:prstGeom>
+          <a:solidFill>
+            <a:srgbClr val="4F417A"/>
+          </a:solidFill>
+          <a:ln w="12700">
+            <a:solidFill>
+              <a:srgbClr val="4F417A">
+                <a:alpha val="0"/>
+              </a:srgbClr>
+            </a:solidFill>
+            <a:prstDash val="solid"/>
+          </a:ln>
+        </p:spPr>
+      </p:sp>
+      <p:sp>
+        <p:nvSpPr>
+          <p:cNvPr id="17" name="Text 15"/>
+          <p:cNvSpPr/>
+          <p:nvPr/>
+        </p:nvSpPr>
+        <p:spPr>
+          <a:xfrm>
+            <a:off x="713232" y="3584448"/>
+            <a:ext cx="3584448" cy="548640"/>
+          </a:xfrm>
+          <a:prstGeom prst="rect">
+            <a:avLst/>
+          </a:prstGeom>
+          <a:noFill/>
+          <a:ln/>
+        </p:spPr>
+        <p:txBody>
+          <a:bodyPr wrap="square" lIns="0" tIns="0" rIns="0" bIns="0" rtlCol="0" anchor="t">
+            <a:normAutofit/>
+          </a:bodyPr>
+          <a:lstStyle/>
+          <a:p>
+            <a:pPr indent="0" marL="0">
+              <a:lnSpc>
+                <a:spcPct val="125000"/>
+              </a:lnSpc>
+              <a:buNone/>
+            </a:pPr>
+            <a:r>
+              <a:rPr lang="en-US" sz="1460" dirty="0">
                 <a:solidFill>
                   <a:srgbClr val="1A1A1A"/>
                 </a:solidFill>
@@ -35255,22 +35000,93 @@
                 <a:ea typeface="Cambria" pitchFamily="34" charset="-122"/>
                 <a:cs typeface="Cambria" pitchFamily="34" charset="-120"/>
               </a:rPr>
-              <a:t>Chiều cải thiện của GRPO-SPICE so với S1 được giữ dưới UGround, UI-Venus, Phi-Ground và Phi-4. Hai công cụ sau nằm ngoài họ Qwen.</a:t>
-            </a:r>
-            <a:endParaRPr lang="en-US" sz="1400" dirty="0"/>
-          </a:p>
-        </p:txBody>
-      </p:sp>
-      <p:sp>
-        <p:nvSpPr>
-          <p:cNvPr id="15" name="Text 13"/>
-          <p:cNvSpPr/>
-          <p:nvPr/>
-        </p:nvSpPr>
-        <p:spPr>
-          <a:xfrm>
-            <a:off x="502920" y="5074920"/>
-            <a:ext cx="8138160" cy="457200"/>
+              <a:t>Sinh 8 câu cho cùng đầu vào.</a:t>
+            </a:r>
+            <a:endParaRPr lang="en-US" sz="1460" dirty="0"/>
+          </a:p>
+        </p:txBody>
+      </p:sp>
+      <p:sp>
+        <p:nvSpPr>
+          <p:cNvPr id="18" name="Shape 16"/>
+          <p:cNvSpPr/>
+          <p:nvPr/>
+        </p:nvSpPr>
+        <p:spPr>
+          <a:xfrm>
+            <a:off x="521208" y="4379976"/>
+            <a:ext cx="64008" cy="64008"/>
+          </a:xfrm>
+          <a:prstGeom prst="ellipse">
+            <a:avLst/>
+          </a:prstGeom>
+          <a:solidFill>
+            <a:srgbClr val="4F417A"/>
+          </a:solidFill>
+          <a:ln w="12700">
+            <a:solidFill>
+              <a:srgbClr val="4F417A">
+                <a:alpha val="0"/>
+              </a:srgbClr>
+            </a:solidFill>
+            <a:prstDash val="solid"/>
+          </a:ln>
+        </p:spPr>
+      </p:sp>
+      <p:sp>
+        <p:nvSpPr>
+          <p:cNvPr id="19" name="Text 17"/>
+          <p:cNvSpPr/>
+          <p:nvPr/>
+        </p:nvSpPr>
+        <p:spPr>
+          <a:xfrm>
+            <a:off x="713232" y="4242816"/>
+            <a:ext cx="3584448" cy="548640"/>
+          </a:xfrm>
+          <a:prstGeom prst="rect">
+            <a:avLst/>
+          </a:prstGeom>
+          <a:noFill/>
+          <a:ln/>
+        </p:spPr>
+        <p:txBody>
+          <a:bodyPr wrap="square" lIns="0" tIns="0" rIns="0" bIns="0" rtlCol="0" anchor="t">
+            <a:normAutofit/>
+          </a:bodyPr>
+          <a:lstStyle/>
+          <a:p>
+            <a:pPr indent="0" marL="0">
+              <a:lnSpc>
+                <a:spcPct val="125000"/>
+              </a:lnSpc>
+              <a:buNone/>
+            </a:pPr>
+            <a:r>
+              <a:rPr lang="en-US" sz="1460" dirty="0">
+                <a:solidFill>
+                  <a:srgbClr val="1A1A1A"/>
+                </a:solidFill>
+                <a:latin typeface="Cambria" pitchFamily="34" charset="0"/>
+                <a:ea typeface="Cambria" pitchFamily="34" charset="-122"/>
+                <a:cs typeface="Cambria" pitchFamily="34" charset="-120"/>
+              </a:rPr>
+              <a:t>SPICE + phạt độ dài làm tín hiệu cập nhật.</a:t>
+            </a:r>
+            <a:endParaRPr lang="en-US" sz="1460" dirty="0"/>
+          </a:p>
+        </p:txBody>
+      </p:sp>
+      <p:sp>
+        <p:nvSpPr>
+          <p:cNvPr id="20" name="Text 18"/>
+          <p:cNvSpPr/>
+          <p:nvPr/>
+        </p:nvSpPr>
+        <p:spPr>
+          <a:xfrm>
+            <a:off x="4617720" y="3127248"/>
+            <a:ext cx="1097280" cy="365760"/>
           </a:xfrm>
           <a:prstGeom prst="rect">
             <a:avLst/>
@@ -35282,14 +35098,14 @@
           <a:bodyPr wrap="square" lIns="0" tIns="0" rIns="0" bIns="0" rtlCol="0" anchor="ctr"/>
           <a:lstStyle/>
           <a:p>
-            <a:pPr algn="ctr" indent="0" marL="0">
-              <a:lnSpc>
-                <a:spcPct val="125000"/>
-              </a:lnSpc>
-              <a:buNone/>
-            </a:pPr>
-            <a:r>
-              <a:rPr lang="en-US" sz="1500" b="1" dirty="0">
+            <a:pPr indent="0" marL="0">
+              <a:lnSpc>
+                <a:spcPct val="125000"/>
+              </a:lnSpc>
+              <a:buNone/>
+            </a:pPr>
+            <a:r>
+              <a:rPr lang="en-US" sz="1700" b="1" dirty="0">
                 <a:solidFill>
                   <a:srgbClr val="25194B"/>
                 </a:solidFill>
@@ -35297,15 +35113,199 @@
                 <a:ea typeface="Cambria" pitchFamily="34" charset="-122"/>
                 <a:cs typeface="Cambria" pitchFamily="34" charset="-120"/>
               </a:rPr>
-              <a:t>Kết luận chính không phụ thuộc vào một công cụ đánh giá duy nhất.</a:t>
-            </a:r>
-            <a:endParaRPr lang="en-US" sz="1500" dirty="0"/>
-          </a:p>
-        </p:txBody>
-      </p:sp>
-      <p:sp>
-        <p:nvSpPr>
-          <p:cNvPr id="16" name="Shape 14"/>
+              <a:t>ACE</a:t>
+            </a:r>
+            <a:endParaRPr lang="en-US" sz="1700" dirty="0"/>
+          </a:p>
+        </p:txBody>
+      </p:sp>
+      <p:sp>
+        <p:nvSpPr>
+          <p:cNvPr id="21" name="Shape 19"/>
+          <p:cNvSpPr/>
+          <p:nvPr/>
+        </p:nvSpPr>
+        <p:spPr>
+          <a:xfrm>
+            <a:off x="4636008" y="3721608"/>
+            <a:ext cx="64008" cy="64008"/>
+          </a:xfrm>
+          <a:prstGeom prst="ellipse">
+            <a:avLst/>
+          </a:prstGeom>
+          <a:solidFill>
+            <a:srgbClr val="4F417A"/>
+          </a:solidFill>
+          <a:ln w="12700">
+            <a:solidFill>
+              <a:srgbClr val="4F417A">
+                <a:alpha val="0"/>
+              </a:srgbClr>
+            </a:solidFill>
+            <a:prstDash val="solid"/>
+          </a:ln>
+        </p:spPr>
+      </p:sp>
+      <p:sp>
+        <p:nvSpPr>
+          <p:cNvPr id="22" name="Text 20"/>
+          <p:cNvSpPr/>
+          <p:nvPr/>
+        </p:nvSpPr>
+        <p:spPr>
+          <a:xfrm>
+            <a:off x="4828032" y="3584448"/>
+            <a:ext cx="3767328" cy="548640"/>
+          </a:xfrm>
+          <a:prstGeom prst="rect">
+            <a:avLst/>
+          </a:prstGeom>
+          <a:noFill/>
+          <a:ln/>
+        </p:spPr>
+        <p:txBody>
+          <a:bodyPr wrap="square" lIns="0" tIns="0" rIns="0" bIns="0" rtlCol="0" anchor="t">
+            <a:normAutofit/>
+          </a:bodyPr>
+          <a:lstStyle/>
+          <a:p>
+            <a:pPr indent="0" marL="0">
+              <a:lnSpc>
+                <a:spcPct val="125000"/>
+              </a:lnSpc>
+              <a:buNone/>
+            </a:pPr>
+            <a:r>
+              <a:rPr lang="en-US" sz="1460" dirty="0">
+                <a:solidFill>
+                  <a:srgbClr val="1A1A1A"/>
+                </a:solidFill>
+                <a:latin typeface="Cambria" pitchFamily="34" charset="0"/>
+                <a:ea typeface="Cambria" pitchFamily="34" charset="-122"/>
+                <a:cs typeface="Cambria" pitchFamily="34" charset="-120"/>
+              </a:rPr>
+              <a:t>Truy hồi 4 câu ví dụ từ tập dạy.</a:t>
+            </a:r>
+            <a:endParaRPr lang="en-US" sz="1460" dirty="0"/>
+          </a:p>
+        </p:txBody>
+      </p:sp>
+      <p:sp>
+        <p:nvSpPr>
+          <p:cNvPr id="23" name="Shape 21"/>
+          <p:cNvSpPr/>
+          <p:nvPr/>
+        </p:nvSpPr>
+        <p:spPr>
+          <a:xfrm>
+            <a:off x="4636008" y="4379976"/>
+            <a:ext cx="64008" cy="64008"/>
+          </a:xfrm>
+          <a:prstGeom prst="ellipse">
+            <a:avLst/>
+          </a:prstGeom>
+          <a:solidFill>
+            <a:srgbClr val="4F417A"/>
+          </a:solidFill>
+          <a:ln w="12700">
+            <a:solidFill>
+              <a:srgbClr val="4F417A">
+                <a:alpha val="0"/>
+              </a:srgbClr>
+            </a:solidFill>
+            <a:prstDash val="solid"/>
+          </a:ln>
+        </p:spPr>
+      </p:sp>
+      <p:sp>
+        <p:nvSpPr>
+          <p:cNvPr id="24" name="Text 22"/>
+          <p:cNvSpPr/>
+          <p:nvPr/>
+        </p:nvSpPr>
+        <p:spPr>
+          <a:xfrm>
+            <a:off x="4828032" y="4242816"/>
+            <a:ext cx="3767328" cy="548640"/>
+          </a:xfrm>
+          <a:prstGeom prst="rect">
+            <a:avLst/>
+          </a:prstGeom>
+          <a:noFill/>
+          <a:ln/>
+        </p:spPr>
+        <p:txBody>
+          <a:bodyPr wrap="square" lIns="0" tIns="0" rIns="0" bIns="0" rtlCol="0" anchor="t">
+            <a:normAutofit/>
+          </a:bodyPr>
+          <a:lstStyle/>
+          <a:p>
+            <a:pPr indent="0" marL="0">
+              <a:lnSpc>
+                <a:spcPct val="125000"/>
+              </a:lnSpc>
+              <a:buNone/>
+            </a:pPr>
+            <a:r>
+              <a:rPr lang="en-US" sz="1460" dirty="0">
+                <a:solidFill>
+                  <a:srgbClr val="1A1A1A"/>
+                </a:solidFill>
+                <a:latin typeface="Cambria" pitchFamily="34" charset="0"/>
+                <a:ea typeface="Cambria" pitchFamily="34" charset="-122"/>
+                <a:cs typeface="Cambria" pitchFamily="34" charset="-120"/>
+              </a:rPr>
+              <a:t>Chỉ thay câu ban đầu khi thỏa điều kiện chọn lọc.</a:t>
+            </a:r>
+            <a:endParaRPr lang="en-US" sz="1460" dirty="0"/>
+          </a:p>
+        </p:txBody>
+      </p:sp>
+      <p:sp>
+        <p:nvSpPr>
+          <p:cNvPr id="25" name="Text 23"/>
+          <p:cNvSpPr/>
+          <p:nvPr/>
+        </p:nvSpPr>
+        <p:spPr>
+          <a:xfrm>
+            <a:off x="502920" y="5321808"/>
+            <a:ext cx="8138160" cy="438912"/>
+          </a:xfrm>
+          <a:prstGeom prst="rect">
+            <a:avLst/>
+          </a:prstGeom>
+          <a:noFill/>
+          <a:ln/>
+        </p:spPr>
+        <p:txBody>
+          <a:bodyPr wrap="square" lIns="0" tIns="0" rIns="0" bIns="0" rtlCol="0" anchor="ctr"/>
+          <a:lstStyle/>
+          <a:p>
+            <a:pPr algn="ctr" indent="0" marL="0">
+              <a:lnSpc>
+                <a:spcPct val="125000"/>
+              </a:lnSpc>
+              <a:buNone/>
+            </a:pPr>
+            <a:r>
+              <a:rPr lang="en-US" sz="1420" b="1" dirty="0">
+                <a:solidFill>
+                  <a:srgbClr val="25194B"/>
+                </a:solidFill>
+                <a:latin typeface="Cambria" pitchFamily="34" charset="0"/>
+                <a:ea typeface="Cambria" pitchFamily="34" charset="-122"/>
+                <a:cs typeface="Cambria" pitchFamily="34" charset="-120"/>
+              </a:rPr>
+              <a:t>UGround không nằm trong hàm thưởng và không tham gia vào quá trình sinh câu.</a:t>
+            </a:r>
+            <a:endParaRPr lang="en-US" sz="1420" dirty="0"/>
+          </a:p>
+        </p:txBody>
+      </p:sp>
+      <p:sp>
+        <p:nvSpPr>
+          <p:cNvPr id="26" name="Shape 24"/>
           <p:cNvSpPr/>
           <p:nvPr/>
         </p:nvSpPr>
@@ -35332,7 +35332,7 @@
       </p:sp>
       <p:sp>
         <p:nvSpPr>
-          <p:cNvPr id="17" name="Shape 15"/>
+          <p:cNvPr id="27" name="Shape 25"/>
           <p:cNvSpPr/>
           <p:nvPr/>
         </p:nvSpPr>
@@ -35359,7 +35359,7 @@
       </p:sp>
       <p:sp>
         <p:nvSpPr>
-          <p:cNvPr id="18" name="Shape 16"/>
+          <p:cNvPr id="28" name="Shape 26"/>
           <p:cNvSpPr/>
           <p:nvPr/>
         </p:nvSpPr>
@@ -35386,7 +35386,7 @@
       </p:sp>
       <p:sp>
         <p:nvSpPr>
-          <p:cNvPr id="19" name="Shape 17"/>
+          <p:cNvPr id="29" name="Shape 27"/>
           <p:cNvSpPr/>
           <p:nvPr/>
         </p:nvSpPr>
@@ -35413,7 +35413,7 @@
       </p:sp>
       <p:sp>
         <p:nvSpPr>
-          <p:cNvPr id="20" name="Text 18"/>
+          <p:cNvPr id="30" name="Text 28"/>
           <p:cNvSpPr/>
           <p:nvPr/>
         </p:nvSpPr>
@@ -35455,7 +35455,7 @@
       </p:sp>
       <p:sp>
         <p:nvSpPr>
-          <p:cNvPr id="21" name="Text 19"/>
+          <p:cNvPr id="31" name="Text 29"/>
           <p:cNvSpPr/>
           <p:nvPr/>
         </p:nvSpPr>
@@ -35497,7 +35497,7 @@
       </p:sp>
       <p:sp>
         <p:nvSpPr>
-          <p:cNvPr id="22" name="Text 20"/>
+          <p:cNvPr id="32" name="Text 30"/>
           <p:cNvSpPr/>
           <p:nvPr/>
         </p:nvSpPr>
@@ -35539,7 +35539,7 @@
       </p:sp>
       <p:sp>
         <p:nvSpPr>
-          <p:cNvPr id="23" name="Text 21"/>
+          <p:cNvPr id="33" name="Text 31"/>
           <p:cNvSpPr/>
           <p:nvPr/>
         </p:nvSpPr>

--- a/slides/LUAN_VAN_SLIDE_BAO_VE_CONCISE.pptx
+++ b/slides/LUAN_VAN_SLIDE_BAO_VE_CONCISE.pptx
@@ -7346,7 +7346,7 @@
                 <a:ea typeface="Cambria" pitchFamily="34" charset="-122"/>
                 <a:cs typeface="Cambria" pitchFamily="34" charset="-120"/>
               </a:rPr>
-              <a:t>Cùng 500 bước huấn luyện, chỉ nhánh dùng đúng tín hiệu SPICE tăng điểm.</a:t>
+              <a:t>Cùng 500 bước GRPO, mức tăng chỉ xuất hiện khi điểm SPICE vẫn gắn với đúng mẫu.</a:t>
             </a:r>
             <a:endParaRPr lang="en-US" sz="1650" dirty="0"/>
           </a:p>
@@ -7354,68 +7354,24 @@
       </p:sp>
       <p:sp>
         <p:nvSpPr>
-          <p:cNvPr id="5" name="Text 3"/>
-          <p:cNvSpPr/>
-          <p:nvPr/>
-        </p:nvSpPr>
-        <p:spPr>
-          <a:xfrm>
-            <a:off x="932688" y="1563624"/>
-            <a:ext cx="1856232" cy="365760"/>
-          </a:xfrm>
-          <a:prstGeom prst="rect">
-            <a:avLst/>
-          </a:prstGeom>
-          <a:noFill/>
-          <a:ln/>
-        </p:spPr>
-        <p:txBody>
-          <a:bodyPr wrap="square" lIns="0" tIns="0" rIns="0" bIns="0" rtlCol="0" anchor="ctr">
-            <a:normAutofit/>
-          </a:bodyPr>
-          <a:lstStyle/>
-          <a:p>
-            <a:pPr indent="0" marL="0">
-              <a:lnSpc>
-                <a:spcPct val="125000"/>
-              </a:lnSpc>
-              <a:buNone/>
-            </a:pPr>
-            <a:r>
-              <a:rPr lang="en-US" sz="1420" dirty="0">
-                <a:solidFill>
-                  <a:srgbClr val="1A1A1A"/>
-                </a:solidFill>
-                <a:latin typeface="Cambria" pitchFamily="34" charset="0"/>
-                <a:ea typeface="Cambria" pitchFamily="34" charset="-122"/>
-                <a:cs typeface="Cambria" pitchFamily="34" charset="-120"/>
-              </a:rPr>
-              <a:t>S1</a:t>
-            </a:r>
-            <a:endParaRPr lang="en-US" sz="1420" dirty="0"/>
-          </a:p>
-        </p:txBody>
-      </p:sp>
-      <p:sp>
-        <p:nvSpPr>
-          <p:cNvPr id="6" name="Shape 4"/>
-          <p:cNvSpPr/>
-          <p:nvPr/>
-        </p:nvSpPr>
-        <p:spPr>
-          <a:xfrm>
-            <a:off x="2898648" y="1636776"/>
-            <a:ext cx="4288536" cy="256032"/>
-          </a:xfrm>
-          <a:prstGeom prst="roundRect">
+          <p:cNvPr id="5" name="Shape 3"/>
+          <p:cNvSpPr/>
+          <p:nvPr/>
+        </p:nvSpPr>
+        <p:spPr>
+          <a:xfrm>
+            <a:off x="749808" y="1627632"/>
+            <a:ext cx="7818120" cy="530352"/>
+          </a:xfrm>
+          <a:prstGeom prst="rect">
             <a:avLst/>
           </a:prstGeom>
           <a:solidFill>
-            <a:srgbClr val="ECEAF0"/>
+            <a:srgbClr val="25194B"/>
           </a:solidFill>
           <a:ln w="12700">
             <a:solidFill>
-              <a:srgbClr val="ECEAF0">
+              <a:srgbClr val="25194B">
                 <a:alpha val="0"/>
               </a:srgbClr>
             </a:solidFill>
@@ -7425,16 +7381,516 @@
       </p:sp>
       <p:sp>
         <p:nvSpPr>
-          <p:cNvPr id="7" name="Shape 5"/>
-          <p:cNvSpPr/>
-          <p:nvPr/>
-        </p:nvSpPr>
-        <p:spPr>
-          <a:xfrm>
-            <a:off x="2898648" y="1636776"/>
-            <a:ext cx="4023736" cy="256032"/>
+          <p:cNvPr id="6" name="Text 4"/>
+          <p:cNvSpPr/>
+          <p:nvPr/>
+        </p:nvSpPr>
+        <p:spPr>
+          <a:xfrm>
+            <a:off x="749808" y="1627632"/>
+            <a:ext cx="2606040" cy="530352"/>
+          </a:xfrm>
+          <a:prstGeom prst="rect">
+            <a:avLst/>
+          </a:prstGeom>
+          <a:noFill/>
+          <a:ln/>
+        </p:spPr>
+        <p:txBody>
+          <a:bodyPr wrap="square" lIns="0" tIns="0" rIns="0" bIns="0" rtlCol="0" anchor="ctr">
+            <a:normAutofit/>
+          </a:bodyPr>
+          <a:lstStyle/>
+          <a:p>
+            <a:pPr algn="ctr" indent="0" marL="0">
+              <a:lnSpc>
+                <a:spcPct val="125000"/>
+              </a:lnSpc>
+              <a:buNone/>
+            </a:pPr>
+            <a:r>
+              <a:rPr lang="en-US" sz="1380" b="1" dirty="0">
+                <a:solidFill>
+                  <a:srgbClr val="FFFFFF"/>
+                </a:solidFill>
+                <a:latin typeface="Cambria" pitchFamily="34" charset="0"/>
+                <a:ea typeface="Cambria" pitchFamily="34" charset="-122"/>
+                <a:cs typeface="Cambria" pitchFamily="34" charset="-120"/>
+              </a:rPr>
+              <a:t>S1</a:t>
+            </a:r>
+            <a:endParaRPr lang="en-US" sz="1380" dirty="0"/>
+          </a:p>
+        </p:txBody>
+      </p:sp>
+      <p:sp>
+        <p:nvSpPr>
+          <p:cNvPr id="7" name="Text 5"/>
+          <p:cNvSpPr/>
+          <p:nvPr/>
+        </p:nvSpPr>
+        <p:spPr>
+          <a:xfrm>
+            <a:off x="3355848" y="1627632"/>
+            <a:ext cx="2606040" cy="530352"/>
+          </a:xfrm>
+          <a:prstGeom prst="rect">
+            <a:avLst/>
+          </a:prstGeom>
+          <a:noFill/>
+          <a:ln/>
+        </p:spPr>
+        <p:txBody>
+          <a:bodyPr wrap="square" lIns="0" tIns="0" rIns="0" bIns="0" rtlCol="0" anchor="ctr">
+            <a:normAutofit/>
+          </a:bodyPr>
+          <a:lstStyle/>
+          <a:p>
+            <a:pPr algn="ctr" indent="0" marL="0">
+              <a:lnSpc>
+                <a:spcPct val="125000"/>
+              </a:lnSpc>
+              <a:buNone/>
+            </a:pPr>
+            <a:r>
+              <a:rPr lang="en-US" sz="1380" b="1" dirty="0">
+                <a:solidFill>
+                  <a:srgbClr val="FFFFFF"/>
+                </a:solidFill>
+                <a:latin typeface="Cambria" pitchFamily="34" charset="0"/>
+                <a:ea typeface="Cambria" pitchFamily="34" charset="-122"/>
+                <a:cs typeface="Cambria" pitchFamily="34" charset="-120"/>
+              </a:rPr>
+              <a:t>GRPO + SPICE ghép ngẫu nhiên</a:t>
+            </a:r>
+            <a:endParaRPr lang="en-US" sz="1380" dirty="0"/>
+          </a:p>
+        </p:txBody>
+      </p:sp>
+      <p:sp>
+        <p:nvSpPr>
+          <p:cNvPr id="8" name="Text 6"/>
+          <p:cNvSpPr/>
+          <p:nvPr/>
+        </p:nvSpPr>
+        <p:spPr>
+          <a:xfrm>
+            <a:off x="5961888" y="1627632"/>
+            <a:ext cx="2606040" cy="530352"/>
+          </a:xfrm>
+          <a:prstGeom prst="rect">
+            <a:avLst/>
+          </a:prstGeom>
+          <a:noFill/>
+          <a:ln/>
+        </p:spPr>
+        <p:txBody>
+          <a:bodyPr wrap="square" lIns="0" tIns="0" rIns="0" bIns="0" rtlCol="0" anchor="ctr">
+            <a:normAutofit/>
+          </a:bodyPr>
+          <a:lstStyle/>
+          <a:p>
+            <a:pPr algn="ctr" indent="0" marL="0">
+              <a:lnSpc>
+                <a:spcPct val="125000"/>
+              </a:lnSpc>
+              <a:buNone/>
+            </a:pPr>
+            <a:r>
+              <a:rPr lang="en-US" sz="1380" b="1" dirty="0">
+                <a:solidFill>
+                  <a:srgbClr val="FFFFFF"/>
+                </a:solidFill>
+                <a:latin typeface="Cambria" pitchFamily="34" charset="0"/>
+                <a:ea typeface="Cambria" pitchFamily="34" charset="-122"/>
+                <a:cs typeface="Cambria" pitchFamily="34" charset="-120"/>
+              </a:rPr>
+              <a:t>GRPO-SPICE</a:t>
+            </a:r>
+            <a:endParaRPr lang="en-US" sz="1380" dirty="0"/>
+          </a:p>
+        </p:txBody>
+      </p:sp>
+      <p:sp>
+        <p:nvSpPr>
+          <p:cNvPr id="9" name="Text 7"/>
+          <p:cNvSpPr/>
+          <p:nvPr/>
+        </p:nvSpPr>
+        <p:spPr>
+          <a:xfrm>
+            <a:off x="749808" y="2157984"/>
+            <a:ext cx="2606040" cy="841248"/>
+          </a:xfrm>
+          <a:prstGeom prst="rect">
+            <a:avLst/>
+          </a:prstGeom>
+          <a:noFill/>
+          <a:ln/>
+        </p:spPr>
+        <p:txBody>
+          <a:bodyPr wrap="square" lIns="0" tIns="0" rIns="0" bIns="0" rtlCol="0" anchor="ctr">
+            <a:normAutofit/>
+          </a:bodyPr>
+          <a:lstStyle/>
+          <a:p>
+            <a:pPr algn="ctr" indent="0" marL="0">
+              <a:lnSpc>
+                <a:spcPct val="125000"/>
+              </a:lnSpc>
+              <a:buNone/>
+            </a:pPr>
+            <a:r>
+              <a:rPr lang="en-US" sz="2000" b="1" dirty="0">
+                <a:solidFill>
+                  <a:srgbClr val="1A1A1A"/>
+                </a:solidFill>
+                <a:latin typeface="Cambria" pitchFamily="34" charset="0"/>
+                <a:ea typeface="Cambria" pitchFamily="34" charset="-122"/>
+                <a:cs typeface="Cambria" pitchFamily="34" charset="-120"/>
+              </a:rPr>
+              <a:t>59,11%</a:t>
+            </a:r>
+            <a:endParaRPr lang="en-US" sz="2000" dirty="0"/>
+          </a:p>
+        </p:txBody>
+      </p:sp>
+      <p:sp>
+        <p:nvSpPr>
+          <p:cNvPr id="10" name="Text 8"/>
+          <p:cNvSpPr/>
+          <p:nvPr/>
+        </p:nvSpPr>
+        <p:spPr>
+          <a:xfrm>
+            <a:off x="3355848" y="2157984"/>
+            <a:ext cx="2606040" cy="841248"/>
+          </a:xfrm>
+          <a:prstGeom prst="rect">
+            <a:avLst/>
+          </a:prstGeom>
+          <a:noFill/>
+          <a:ln/>
+        </p:spPr>
+        <p:txBody>
+          <a:bodyPr wrap="square" lIns="0" tIns="0" rIns="0" bIns="0" rtlCol="0" anchor="ctr">
+            <a:normAutofit/>
+          </a:bodyPr>
+          <a:lstStyle/>
+          <a:p>
+            <a:pPr algn="ctr" indent="0" marL="0">
+              <a:lnSpc>
+                <a:spcPct val="125000"/>
+              </a:lnSpc>
+              <a:buNone/>
+            </a:pPr>
+            <a:r>
+              <a:rPr lang="en-US" sz="2000" b="1" dirty="0">
+                <a:solidFill>
+                  <a:srgbClr val="1A1A1A"/>
+                </a:solidFill>
+                <a:latin typeface="Cambria" pitchFamily="34" charset="0"/>
+                <a:ea typeface="Cambria" pitchFamily="34" charset="-122"/>
+                <a:cs typeface="Cambria" pitchFamily="34" charset="-120"/>
+              </a:rPr>
+              <a:t>59,11%</a:t>
+            </a:r>
+            <a:endParaRPr lang="en-US" sz="2000" dirty="0"/>
+          </a:p>
+        </p:txBody>
+      </p:sp>
+      <p:sp>
+        <p:nvSpPr>
+          <p:cNvPr id="11" name="Text 9"/>
+          <p:cNvSpPr/>
+          <p:nvPr/>
+        </p:nvSpPr>
+        <p:spPr>
+          <a:xfrm>
+            <a:off x="5961888" y="2157984"/>
+            <a:ext cx="2606040" cy="841248"/>
+          </a:xfrm>
+          <a:prstGeom prst="rect">
+            <a:avLst/>
+          </a:prstGeom>
+          <a:noFill/>
+          <a:ln/>
+        </p:spPr>
+        <p:txBody>
+          <a:bodyPr wrap="square" lIns="0" tIns="0" rIns="0" bIns="0" rtlCol="0" anchor="ctr">
+            <a:normAutofit/>
+          </a:bodyPr>
+          <a:lstStyle/>
+          <a:p>
+            <a:pPr algn="ctr" indent="0" marL="0">
+              <a:lnSpc>
+                <a:spcPct val="125000"/>
+              </a:lnSpc>
+              <a:buNone/>
+            </a:pPr>
+            <a:r>
+              <a:rPr lang="en-US" sz="2000" b="1" dirty="0">
+                <a:solidFill>
+                  <a:srgbClr val="4F417A"/>
+                </a:solidFill>
+                <a:latin typeface="Cambria" pitchFamily="34" charset="0"/>
+                <a:ea typeface="Cambria" pitchFamily="34" charset="-122"/>
+                <a:cs typeface="Cambria" pitchFamily="34" charset="-120"/>
+              </a:rPr>
+              <a:t>60,65%</a:t>
+            </a:r>
+            <a:endParaRPr lang="en-US" sz="2000" dirty="0"/>
+          </a:p>
+        </p:txBody>
+      </p:sp>
+      <p:sp>
+        <p:nvSpPr>
+          <p:cNvPr id="12" name="Text 10"/>
+          <p:cNvSpPr/>
+          <p:nvPr/>
+        </p:nvSpPr>
+        <p:spPr>
+          <a:xfrm>
+            <a:off x="2578608" y="3090672"/>
+            <a:ext cx="3986784" cy="438912"/>
+          </a:xfrm>
+          <a:prstGeom prst="rect">
+            <a:avLst/>
+          </a:prstGeom>
+          <a:noFill/>
+          <a:ln/>
+        </p:spPr>
+        <p:txBody>
+          <a:bodyPr wrap="square" lIns="0" tIns="0" rIns="0" bIns="0" rtlCol="0" anchor="ctr">
+            <a:normAutofit/>
+          </a:bodyPr>
+          <a:lstStyle/>
+          <a:p>
+            <a:pPr algn="ctr" indent="0" marL="0">
+              <a:lnSpc>
+                <a:spcPct val="125000"/>
+              </a:lnSpc>
+              <a:buNone/>
+            </a:pPr>
+            <a:r>
+              <a:rPr lang="en-US" sz="1340" dirty="0">
+                <a:solidFill>
+                  <a:srgbClr val="5A5A66"/>
+                </a:solidFill>
+                <a:latin typeface="Cambria" pitchFamily="34" charset="0"/>
+                <a:ea typeface="Cambria" pitchFamily="34" charset="-122"/>
+                <a:cs typeface="Cambria" pitchFamily="34" charset="-120"/>
+              </a:rPr>
+              <a:t>Điểm SPICE của nhánh kiểm soát được ghép ngẫu nhiên sang mẫu khác.</a:t>
+            </a:r>
+            <a:endParaRPr lang="en-US" sz="1340" dirty="0"/>
+          </a:p>
+        </p:txBody>
+      </p:sp>
+      <p:sp>
+        <p:nvSpPr>
+          <p:cNvPr id="13" name="Shape 11"/>
+          <p:cNvSpPr/>
+          <p:nvPr/>
+        </p:nvSpPr>
+        <p:spPr>
+          <a:xfrm>
+            <a:off x="1005840" y="4041648"/>
+            <a:ext cx="7132320" cy="896112"/>
           </a:xfrm>
           <a:prstGeom prst="roundRect">
+            <a:avLst/>
+          </a:prstGeom>
+          <a:solidFill>
+            <a:srgbClr val="F3F2F5"/>
+          </a:solidFill>
+          <a:ln w="12700">
+            <a:solidFill>
+              <a:srgbClr val="4F417A"/>
+            </a:solidFill>
+            <a:prstDash val="solid"/>
+          </a:ln>
+        </p:spPr>
+      </p:sp>
+      <p:sp>
+        <p:nvSpPr>
+          <p:cNvPr id="14" name="Text 12"/>
+          <p:cNvSpPr/>
+          <p:nvPr/>
+        </p:nvSpPr>
+        <p:spPr>
+          <a:xfrm>
+            <a:off x="1188720" y="4041648"/>
+            <a:ext cx="6766560" cy="896112"/>
+          </a:xfrm>
+          <a:prstGeom prst="rect">
+            <a:avLst/>
+          </a:prstGeom>
+          <a:noFill/>
+          <a:ln/>
+        </p:spPr>
+        <p:txBody>
+          <a:bodyPr wrap="square" lIns="0" tIns="0" rIns="0" bIns="0" rtlCol="0" anchor="ctr">
+            <a:normAutofit/>
+          </a:bodyPr>
+          <a:lstStyle/>
+          <a:p>
+            <a:pPr algn="ctr" indent="0" marL="0">
+              <a:lnSpc>
+                <a:spcPct val="125000"/>
+              </a:lnSpc>
+              <a:buNone/>
+            </a:pPr>
+            <a:r>
+              <a:rPr lang="en-US" sz="1600" b="1" dirty="0">
+                <a:solidFill>
+                  <a:srgbClr val="25194B"/>
+                </a:solidFill>
+                <a:latin typeface="Cambria" pitchFamily="34" charset="0"/>
+                <a:ea typeface="Cambria" pitchFamily="34" charset="-122"/>
+                <a:cs typeface="Cambria" pitchFamily="34" charset="-120"/>
+              </a:rPr>
+              <a:t>GRPO-SPICE cao hơn nhánh kiểm soát +1,55 điểm · KTC 95% [+0,81; +2,30]</a:t>
+            </a:r>
+            <a:endParaRPr lang="en-US" sz="1600" dirty="0"/>
+          </a:p>
+        </p:txBody>
+      </p:sp>
+      <p:sp>
+        <p:nvSpPr>
+          <p:cNvPr id="15" name="Text 13"/>
+          <p:cNvSpPr/>
+          <p:nvPr/>
+        </p:nvSpPr>
+        <p:spPr>
+          <a:xfrm>
+            <a:off x="502920" y="5413248"/>
+            <a:ext cx="8138160" cy="402336"/>
+          </a:xfrm>
+          <a:prstGeom prst="rect">
+            <a:avLst/>
+          </a:prstGeom>
+          <a:noFill/>
+          <a:ln/>
+        </p:spPr>
+        <p:txBody>
+          <a:bodyPr wrap="square" lIns="0" tIns="0" rIns="0" bIns="0" rtlCol="0" anchor="ctr"/>
+          <a:lstStyle/>
+          <a:p>
+            <a:pPr algn="ctr" indent="0" marL="0">
+              <a:lnSpc>
+                <a:spcPct val="125000"/>
+              </a:lnSpc>
+              <a:buNone/>
+            </a:pPr>
+            <a:r>
+              <a:rPr lang="en-US" sz="1380" b="1" dirty="0">
+                <a:solidFill>
+                  <a:srgbClr val="25194B"/>
+                </a:solidFill>
+                <a:latin typeface="Cambria" pitchFamily="34" charset="0"/>
+                <a:ea typeface="Cambria" pitchFamily="34" charset="-122"/>
+                <a:cs typeface="Cambria" pitchFamily="34" charset="-120"/>
+              </a:rPr>
+              <a:t>6/6 độ đo chất lượng câu có KTC đều tăng so với nhánh kiểm soát.</a:t>
+            </a:r>
+            <a:endParaRPr lang="en-US" sz="1380" dirty="0"/>
+          </a:p>
+        </p:txBody>
+      </p:sp>
+      <p:sp>
+        <p:nvSpPr>
+          <p:cNvPr id="16" name="Shape 14"/>
+          <p:cNvSpPr/>
+          <p:nvPr/>
+        </p:nvSpPr>
+        <p:spPr>
+          <a:xfrm>
+            <a:off x="0" y="6620256"/>
+            <a:ext cx="2743200" cy="237744"/>
+          </a:xfrm>
+          <a:prstGeom prst="rect">
+            <a:avLst/>
+          </a:prstGeom>
+          <a:solidFill>
+            <a:srgbClr val="191132"/>
+          </a:solidFill>
+          <a:ln w="12700">
+            <a:solidFill>
+              <a:srgbClr val="191132">
+                <a:alpha val="0"/>
+              </a:srgbClr>
+            </a:solidFill>
+            <a:prstDash val="solid"/>
+          </a:ln>
+        </p:spPr>
+      </p:sp>
+      <p:sp>
+        <p:nvSpPr>
+          <p:cNvPr id="17" name="Shape 15"/>
+          <p:cNvSpPr/>
+          <p:nvPr/>
+        </p:nvSpPr>
+        <p:spPr>
+          <a:xfrm>
+            <a:off x="2743200" y="6620256"/>
+            <a:ext cx="3383280" cy="237744"/>
+          </a:xfrm>
+          <a:prstGeom prst="rect">
+            <a:avLst/>
+          </a:prstGeom>
+          <a:solidFill>
+            <a:srgbClr val="25194B"/>
+          </a:solidFill>
+          <a:ln w="12700">
+            <a:solidFill>
+              <a:srgbClr val="25194B">
+                <a:alpha val="0"/>
+              </a:srgbClr>
+            </a:solidFill>
+            <a:prstDash val="solid"/>
+          </a:ln>
+        </p:spPr>
+      </p:sp>
+      <p:sp>
+        <p:nvSpPr>
+          <p:cNvPr id="18" name="Shape 16"/>
+          <p:cNvSpPr/>
+          <p:nvPr/>
+        </p:nvSpPr>
+        <p:spPr>
+          <a:xfrm>
+            <a:off x="6126480" y="6620256"/>
+            <a:ext cx="1737360" cy="237744"/>
+          </a:xfrm>
+          <a:prstGeom prst="rect">
+            <a:avLst/>
+          </a:prstGeom>
+          <a:solidFill>
+            <a:srgbClr val="4F417A"/>
+          </a:solidFill>
+          <a:ln w="12700">
+            <a:solidFill>
+              <a:srgbClr val="4F417A">
+                <a:alpha val="0"/>
+              </a:srgbClr>
+            </a:solidFill>
+            <a:prstDash val="solid"/>
+          </a:ln>
+        </p:spPr>
+      </p:sp>
+      <p:sp>
+        <p:nvSpPr>
+          <p:cNvPr id="19" name="Shape 17"/>
+          <p:cNvSpPr/>
+          <p:nvPr/>
+        </p:nvSpPr>
+        <p:spPr>
+          <a:xfrm>
+            <a:off x="7863840" y="6620256"/>
+            <a:ext cx="1280160" cy="237744"/>
+          </a:xfrm>
+          <a:prstGeom prst="rect">
             <a:avLst/>
           </a:prstGeom>
           <a:solidFill>
@@ -7452,554 +7908,7 @@
       </p:sp>
       <p:sp>
         <p:nvSpPr>
-          <p:cNvPr id="8" name="Text 6"/>
-          <p:cNvSpPr/>
-          <p:nvPr/>
-        </p:nvSpPr>
-        <p:spPr>
-          <a:xfrm>
-            <a:off x="7333488" y="1554480"/>
-            <a:ext cx="868680" cy="384048"/>
-          </a:xfrm>
-          <a:prstGeom prst="rect">
-            <a:avLst/>
-          </a:prstGeom>
-          <a:noFill/>
-          <a:ln/>
-        </p:spPr>
-        <p:txBody>
-          <a:bodyPr wrap="square" lIns="0" tIns="0" rIns="0" bIns="0" rtlCol="0" anchor="ctr">
-            <a:normAutofit/>
-          </a:bodyPr>
-          <a:lstStyle/>
-          <a:p>
-            <a:pPr algn="r" indent="0" marL="0">
-              <a:lnSpc>
-                <a:spcPct val="125000"/>
-              </a:lnSpc>
-              <a:buNone/>
-            </a:pPr>
-            <a:r>
-              <a:rPr lang="en-US" sz="1420" b="1" dirty="0">
-                <a:solidFill>
-                  <a:srgbClr val="7A7099"/>
-                </a:solidFill>
-                <a:latin typeface="Cambria" pitchFamily="34" charset="0"/>
-                <a:ea typeface="Cambria" pitchFamily="34" charset="-122"/>
-                <a:cs typeface="Cambria" pitchFamily="34" charset="-120"/>
-              </a:rPr>
-              <a:t>59,11%</a:t>
-            </a:r>
-            <a:endParaRPr lang="en-US" sz="1420" dirty="0"/>
-          </a:p>
-        </p:txBody>
-      </p:sp>
-      <p:sp>
-        <p:nvSpPr>
-          <p:cNvPr id="9" name="Text 7"/>
-          <p:cNvSpPr/>
-          <p:nvPr/>
-        </p:nvSpPr>
-        <p:spPr>
-          <a:xfrm>
-            <a:off x="932688" y="2368296"/>
-            <a:ext cx="1856232" cy="365760"/>
-          </a:xfrm>
-          <a:prstGeom prst="rect">
-            <a:avLst/>
-          </a:prstGeom>
-          <a:noFill/>
-          <a:ln/>
-        </p:spPr>
-        <p:txBody>
-          <a:bodyPr wrap="square" lIns="0" tIns="0" rIns="0" bIns="0" rtlCol="0" anchor="ctr">
-            <a:normAutofit/>
-          </a:bodyPr>
-          <a:lstStyle/>
-          <a:p>
-            <a:pPr indent="0" marL="0">
-              <a:lnSpc>
-                <a:spcPct val="125000"/>
-              </a:lnSpc>
-              <a:buNone/>
-            </a:pPr>
-            <a:r>
-              <a:rPr lang="en-US" sz="1420" dirty="0">
-                <a:solidFill>
-                  <a:srgbClr val="1A1A1A"/>
-                </a:solidFill>
-                <a:latin typeface="Cambria" pitchFamily="34" charset="0"/>
-                <a:ea typeface="Cambria" pitchFamily="34" charset="-122"/>
-                <a:cs typeface="Cambria" pitchFamily="34" charset="-120"/>
-              </a:rPr>
-              <a:t>GRPO · đối chứng</a:t>
-            </a:r>
-            <a:endParaRPr lang="en-US" sz="1420" dirty="0"/>
-          </a:p>
-        </p:txBody>
-      </p:sp>
-      <p:sp>
-        <p:nvSpPr>
-          <p:cNvPr id="10" name="Shape 8"/>
-          <p:cNvSpPr/>
-          <p:nvPr/>
-        </p:nvSpPr>
-        <p:spPr>
-          <a:xfrm>
-            <a:off x="2898648" y="2441448"/>
-            <a:ext cx="4288536" cy="256032"/>
-          </a:xfrm>
-          <a:prstGeom prst="roundRect">
-            <a:avLst/>
-          </a:prstGeom>
-          <a:solidFill>
-            <a:srgbClr val="ECEAF0"/>
-          </a:solidFill>
-          <a:ln w="12700">
-            <a:solidFill>
-              <a:srgbClr val="ECEAF0">
-                <a:alpha val="0"/>
-              </a:srgbClr>
-            </a:solidFill>
-            <a:prstDash val="solid"/>
-          </a:ln>
-        </p:spPr>
-      </p:sp>
-      <p:sp>
-        <p:nvSpPr>
-          <p:cNvPr id="11" name="Shape 9"/>
-          <p:cNvSpPr/>
-          <p:nvPr/>
-        </p:nvSpPr>
-        <p:spPr>
-          <a:xfrm>
-            <a:off x="2898648" y="2441448"/>
-            <a:ext cx="4023736" cy="256032"/>
-          </a:xfrm>
-          <a:prstGeom prst="roundRect">
-            <a:avLst/>
-          </a:prstGeom>
-          <a:solidFill>
-            <a:srgbClr val="7A7099"/>
-          </a:solidFill>
-          <a:ln w="12700">
-            <a:solidFill>
-              <a:srgbClr val="7A7099">
-                <a:alpha val="0"/>
-              </a:srgbClr>
-            </a:solidFill>
-            <a:prstDash val="solid"/>
-          </a:ln>
-        </p:spPr>
-      </p:sp>
-      <p:sp>
-        <p:nvSpPr>
-          <p:cNvPr id="12" name="Text 10"/>
-          <p:cNvSpPr/>
-          <p:nvPr/>
-        </p:nvSpPr>
-        <p:spPr>
-          <a:xfrm>
-            <a:off x="7333488" y="2359152"/>
-            <a:ext cx="868680" cy="384048"/>
-          </a:xfrm>
-          <a:prstGeom prst="rect">
-            <a:avLst/>
-          </a:prstGeom>
-          <a:noFill/>
-          <a:ln/>
-        </p:spPr>
-        <p:txBody>
-          <a:bodyPr wrap="square" lIns="0" tIns="0" rIns="0" bIns="0" rtlCol="0" anchor="ctr">
-            <a:normAutofit/>
-          </a:bodyPr>
-          <a:lstStyle/>
-          <a:p>
-            <a:pPr algn="r" indent="0" marL="0">
-              <a:lnSpc>
-                <a:spcPct val="125000"/>
-              </a:lnSpc>
-              <a:buNone/>
-            </a:pPr>
-            <a:r>
-              <a:rPr lang="en-US" sz="1420" b="1" dirty="0">
-                <a:solidFill>
-                  <a:srgbClr val="7A7099"/>
-                </a:solidFill>
-                <a:latin typeface="Cambria" pitchFamily="34" charset="0"/>
-                <a:ea typeface="Cambria" pitchFamily="34" charset="-122"/>
-                <a:cs typeface="Cambria" pitchFamily="34" charset="-120"/>
-              </a:rPr>
-              <a:t>59,11%</a:t>
-            </a:r>
-            <a:endParaRPr lang="en-US" sz="1420" dirty="0"/>
-          </a:p>
-        </p:txBody>
-      </p:sp>
-      <p:sp>
-        <p:nvSpPr>
-          <p:cNvPr id="13" name="Text 11"/>
-          <p:cNvSpPr/>
-          <p:nvPr/>
-        </p:nvSpPr>
-        <p:spPr>
-          <a:xfrm>
-            <a:off x="932688" y="3172968"/>
-            <a:ext cx="1856232" cy="365760"/>
-          </a:xfrm>
-          <a:prstGeom prst="rect">
-            <a:avLst/>
-          </a:prstGeom>
-          <a:noFill/>
-          <a:ln/>
-        </p:spPr>
-        <p:txBody>
-          <a:bodyPr wrap="square" lIns="0" tIns="0" rIns="0" bIns="0" rtlCol="0" anchor="ctr">
-            <a:normAutofit/>
-          </a:bodyPr>
-          <a:lstStyle/>
-          <a:p>
-            <a:pPr indent="0" marL="0">
-              <a:lnSpc>
-                <a:spcPct val="125000"/>
-              </a:lnSpc>
-              <a:buNone/>
-            </a:pPr>
-            <a:r>
-              <a:rPr lang="en-US" sz="1420" b="1" dirty="0">
-                <a:solidFill>
-                  <a:srgbClr val="1A1A1A"/>
-                </a:solidFill>
-                <a:latin typeface="Cambria" pitchFamily="34" charset="0"/>
-                <a:ea typeface="Cambria" pitchFamily="34" charset="-122"/>
-                <a:cs typeface="Cambria" pitchFamily="34" charset="-120"/>
-              </a:rPr>
-              <a:t>GRPO-SPICE</a:t>
-            </a:r>
-            <a:endParaRPr lang="en-US" sz="1420" dirty="0"/>
-          </a:p>
-        </p:txBody>
-      </p:sp>
-      <p:sp>
-        <p:nvSpPr>
-          <p:cNvPr id="14" name="Shape 12"/>
-          <p:cNvSpPr/>
-          <p:nvPr/>
-        </p:nvSpPr>
-        <p:spPr>
-          <a:xfrm>
-            <a:off x="2898648" y="3246120"/>
-            <a:ext cx="4288536" cy="256032"/>
-          </a:xfrm>
-          <a:prstGeom prst="roundRect">
-            <a:avLst/>
-          </a:prstGeom>
-          <a:solidFill>
-            <a:srgbClr val="ECEAF0"/>
-          </a:solidFill>
-          <a:ln w="12700">
-            <a:solidFill>
-              <a:srgbClr val="ECEAF0">
-                <a:alpha val="0"/>
-              </a:srgbClr>
-            </a:solidFill>
-            <a:prstDash val="solid"/>
-          </a:ln>
-        </p:spPr>
-      </p:sp>
-      <p:sp>
-        <p:nvSpPr>
-          <p:cNvPr id="15" name="Shape 13"/>
-          <p:cNvSpPr/>
-          <p:nvPr/>
-        </p:nvSpPr>
-        <p:spPr>
-          <a:xfrm>
-            <a:off x="2898648" y="3246120"/>
-            <a:ext cx="4128567" cy="256032"/>
-          </a:xfrm>
-          <a:prstGeom prst="roundRect">
-            <a:avLst/>
-          </a:prstGeom>
-          <a:solidFill>
-            <a:srgbClr val="4F417A"/>
-          </a:solidFill>
-          <a:ln w="12700">
-            <a:solidFill>
-              <a:srgbClr val="4F417A">
-                <a:alpha val="0"/>
-              </a:srgbClr>
-            </a:solidFill>
-            <a:prstDash val="solid"/>
-          </a:ln>
-        </p:spPr>
-      </p:sp>
-      <p:sp>
-        <p:nvSpPr>
-          <p:cNvPr id="16" name="Text 14"/>
-          <p:cNvSpPr/>
-          <p:nvPr/>
-        </p:nvSpPr>
-        <p:spPr>
-          <a:xfrm>
-            <a:off x="7333488" y="3163824"/>
-            <a:ext cx="868680" cy="384048"/>
-          </a:xfrm>
-          <a:prstGeom prst="rect">
-            <a:avLst/>
-          </a:prstGeom>
-          <a:noFill/>
-          <a:ln/>
-        </p:spPr>
-        <p:txBody>
-          <a:bodyPr wrap="square" lIns="0" tIns="0" rIns="0" bIns="0" rtlCol="0" anchor="ctr">
-            <a:normAutofit/>
-          </a:bodyPr>
-          <a:lstStyle/>
-          <a:p>
-            <a:pPr algn="r" indent="0" marL="0">
-              <a:lnSpc>
-                <a:spcPct val="125000"/>
-              </a:lnSpc>
-              <a:buNone/>
-            </a:pPr>
-            <a:r>
-              <a:rPr lang="en-US" sz="1420" b="1" dirty="0">
-                <a:solidFill>
-                  <a:srgbClr val="4F417A"/>
-                </a:solidFill>
-                <a:latin typeface="Cambria" pitchFamily="34" charset="0"/>
-                <a:ea typeface="Cambria" pitchFamily="34" charset="-122"/>
-                <a:cs typeface="Cambria" pitchFamily="34" charset="-120"/>
-              </a:rPr>
-              <a:t>60,65%</a:t>
-            </a:r>
-            <a:endParaRPr lang="en-US" sz="1420" dirty="0"/>
-          </a:p>
-        </p:txBody>
-      </p:sp>
-      <p:sp>
-        <p:nvSpPr>
-          <p:cNvPr id="17" name="Shape 15"/>
-          <p:cNvSpPr/>
-          <p:nvPr/>
-        </p:nvSpPr>
-        <p:spPr>
-          <a:xfrm>
-            <a:off x="1005840" y="4224528"/>
-            <a:ext cx="7132320" cy="868680"/>
-          </a:xfrm>
-          <a:prstGeom prst="roundRect">
-            <a:avLst/>
-          </a:prstGeom>
-          <a:solidFill>
-            <a:srgbClr val="F3F2F5"/>
-          </a:solidFill>
-          <a:ln w="12700">
-            <a:solidFill>
-              <a:srgbClr val="4F417A"/>
-            </a:solidFill>
-            <a:prstDash val="solid"/>
-          </a:ln>
-        </p:spPr>
-      </p:sp>
-      <p:sp>
-        <p:nvSpPr>
-          <p:cNvPr id="18" name="Text 16"/>
-          <p:cNvSpPr/>
-          <p:nvPr/>
-        </p:nvSpPr>
-        <p:spPr>
-          <a:xfrm>
-            <a:off x="1188720" y="4224528"/>
-            <a:ext cx="6766560" cy="868680"/>
-          </a:xfrm>
-          <a:prstGeom prst="rect">
-            <a:avLst/>
-          </a:prstGeom>
-          <a:noFill/>
-          <a:ln/>
-        </p:spPr>
-        <p:txBody>
-          <a:bodyPr wrap="square" lIns="0" tIns="0" rIns="0" bIns="0" rtlCol="0" anchor="ctr">
-            <a:normAutofit/>
-          </a:bodyPr>
-          <a:lstStyle/>
-          <a:p>
-            <a:pPr algn="ctr" indent="0" marL="0">
-              <a:lnSpc>
-                <a:spcPct val="125000"/>
-              </a:lnSpc>
-              <a:buNone/>
-            </a:pPr>
-            <a:r>
-              <a:rPr lang="en-US" sz="1660" b="1" dirty="0">
-                <a:solidFill>
-                  <a:srgbClr val="25194B"/>
-                </a:solidFill>
-                <a:latin typeface="Cambria" pitchFamily="34" charset="0"/>
-                <a:ea typeface="Cambria" pitchFamily="34" charset="-122"/>
-                <a:cs typeface="Cambria" pitchFamily="34" charset="-120"/>
-              </a:rPr>
-              <a:t>+1,55 điểm so với đối chứng   ·   KTC 95% [+0,81; +2,30]</a:t>
-            </a:r>
-            <a:endParaRPr lang="en-US" sz="1660" dirty="0"/>
-          </a:p>
-        </p:txBody>
-      </p:sp>
-      <p:sp>
-        <p:nvSpPr>
-          <p:cNvPr id="19" name="Text 17"/>
-          <p:cNvSpPr/>
-          <p:nvPr/>
-        </p:nvSpPr>
-        <p:spPr>
-          <a:xfrm>
-            <a:off x="502920" y="5468112"/>
-            <a:ext cx="8138160" cy="384048"/>
-          </a:xfrm>
-          <a:prstGeom prst="rect">
-            <a:avLst/>
-          </a:prstGeom>
-          <a:noFill/>
-          <a:ln/>
-        </p:spPr>
-        <p:txBody>
-          <a:bodyPr wrap="square" lIns="0" tIns="0" rIns="0" bIns="0" rtlCol="0" anchor="ctr"/>
-          <a:lstStyle/>
-          <a:p>
-            <a:pPr algn="ctr" indent="0" marL="0">
-              <a:lnSpc>
-                <a:spcPct val="125000"/>
-              </a:lnSpc>
-              <a:buNone/>
-            </a:pPr>
-            <a:r>
-              <a:rPr lang="en-US" sz="1340" b="1" dirty="0">
-                <a:solidFill>
-                  <a:srgbClr val="25194B"/>
-                </a:solidFill>
-                <a:latin typeface="Cambria" pitchFamily="34" charset="0"/>
-                <a:ea typeface="Cambria" pitchFamily="34" charset="-122"/>
-                <a:cs typeface="Cambria" pitchFamily="34" charset="-120"/>
-              </a:rPr>
-              <a:t>6/6 chỉ số chất lượng câu có KTC đều tăng so với đối chứng.</a:t>
-            </a:r>
-            <a:endParaRPr lang="en-US" sz="1340" dirty="0"/>
-          </a:p>
-        </p:txBody>
-      </p:sp>
-      <p:sp>
-        <p:nvSpPr>
-          <p:cNvPr id="20" name="Shape 18"/>
-          <p:cNvSpPr/>
-          <p:nvPr/>
-        </p:nvSpPr>
-        <p:spPr>
-          <a:xfrm>
-            <a:off x="0" y="6620256"/>
-            <a:ext cx="2743200" cy="237744"/>
-          </a:xfrm>
-          <a:prstGeom prst="rect">
-            <a:avLst/>
-          </a:prstGeom>
-          <a:solidFill>
-            <a:srgbClr val="191132"/>
-          </a:solidFill>
-          <a:ln w="12700">
-            <a:solidFill>
-              <a:srgbClr val="191132">
-                <a:alpha val="0"/>
-              </a:srgbClr>
-            </a:solidFill>
-            <a:prstDash val="solid"/>
-          </a:ln>
-        </p:spPr>
-      </p:sp>
-      <p:sp>
-        <p:nvSpPr>
-          <p:cNvPr id="21" name="Shape 19"/>
-          <p:cNvSpPr/>
-          <p:nvPr/>
-        </p:nvSpPr>
-        <p:spPr>
-          <a:xfrm>
-            <a:off x="2743200" y="6620256"/>
-            <a:ext cx="3383280" cy="237744"/>
-          </a:xfrm>
-          <a:prstGeom prst="rect">
-            <a:avLst/>
-          </a:prstGeom>
-          <a:solidFill>
-            <a:srgbClr val="25194B"/>
-          </a:solidFill>
-          <a:ln w="12700">
-            <a:solidFill>
-              <a:srgbClr val="25194B">
-                <a:alpha val="0"/>
-              </a:srgbClr>
-            </a:solidFill>
-            <a:prstDash val="solid"/>
-          </a:ln>
-        </p:spPr>
-      </p:sp>
-      <p:sp>
-        <p:nvSpPr>
-          <p:cNvPr id="22" name="Shape 20"/>
-          <p:cNvSpPr/>
-          <p:nvPr/>
-        </p:nvSpPr>
-        <p:spPr>
-          <a:xfrm>
-            <a:off x="6126480" y="6620256"/>
-            <a:ext cx="1737360" cy="237744"/>
-          </a:xfrm>
-          <a:prstGeom prst="rect">
-            <a:avLst/>
-          </a:prstGeom>
-          <a:solidFill>
-            <a:srgbClr val="4F417A"/>
-          </a:solidFill>
-          <a:ln w="12700">
-            <a:solidFill>
-              <a:srgbClr val="4F417A">
-                <a:alpha val="0"/>
-              </a:srgbClr>
-            </a:solidFill>
-            <a:prstDash val="solid"/>
-          </a:ln>
-        </p:spPr>
-      </p:sp>
-      <p:sp>
-        <p:nvSpPr>
-          <p:cNvPr id="23" name="Shape 21"/>
-          <p:cNvSpPr/>
-          <p:nvPr/>
-        </p:nvSpPr>
-        <p:spPr>
-          <a:xfrm>
-            <a:off x="7863840" y="6620256"/>
-            <a:ext cx="1280160" cy="237744"/>
-          </a:xfrm>
-          <a:prstGeom prst="rect">
-            <a:avLst/>
-          </a:prstGeom>
-          <a:solidFill>
-            <a:srgbClr val="7A7099"/>
-          </a:solidFill>
-          <a:ln w="12700">
-            <a:solidFill>
-              <a:srgbClr val="7A7099">
-                <a:alpha val="0"/>
-              </a:srgbClr>
-            </a:solidFill>
-            <a:prstDash val="solid"/>
-          </a:ln>
-        </p:spPr>
-      </p:sp>
-      <p:sp>
-        <p:nvSpPr>
-          <p:cNvPr id="24" name="Text 22"/>
+          <p:cNvPr id="20" name="Text 18"/>
           <p:cNvSpPr/>
           <p:nvPr/>
         </p:nvSpPr>
@@ -8041,7 +7950,7 @@
       </p:sp>
       <p:sp>
         <p:nvSpPr>
-          <p:cNvPr id="25" name="Text 23"/>
+          <p:cNvPr id="21" name="Text 19"/>
           <p:cNvSpPr/>
           <p:nvPr/>
         </p:nvSpPr>
@@ -8083,7 +7992,7 @@
       </p:sp>
       <p:sp>
         <p:nvSpPr>
-          <p:cNvPr id="26" name="Text 24"/>
+          <p:cNvPr id="22" name="Text 20"/>
           <p:cNvSpPr/>
           <p:nvPr/>
         </p:nvSpPr>
@@ -8125,7 +8034,7 @@
       </p:sp>
       <p:sp>
         <p:nvSpPr>
-          <p:cNvPr id="27" name="Text 25"/>
+          <p:cNvPr id="23" name="Text 21"/>
           <p:cNvSpPr/>
           <p:nvPr/>
         </p:nvSpPr>
@@ -11373,8 +11282,8 @@
         </p:nvSpPr>
         <p:spPr>
           <a:xfrm>
-            <a:off x="502920" y="1847088"/>
-            <a:ext cx="8138160" cy="347472"/>
+            <a:off x="502920" y="1810512"/>
+            <a:ext cx="8138160" cy="384048"/>
           </a:xfrm>
           <a:prstGeom prst="rect">
             <a:avLst/>
@@ -11393,7 +11302,7 @@
               <a:buNone/>
             </a:pPr>
             <a:r>
-              <a:rPr lang="en-US" sz="1360" b="1" dirty="0">
+              <a:rPr lang="en-US" sz="1420" b="1" dirty="0">
                 <a:solidFill>
                   <a:srgbClr val="25194B"/>
                 </a:solidFill>
@@ -11401,9 +11310,9 @@
                 <a:ea typeface="Cambria" pitchFamily="34" charset="-122"/>
                 <a:cs typeface="Cambria" pitchFamily="34" charset="-120"/>
               </a:rPr>
-              <a:t>6/6 độ đo có KTC nằm trên 0; METEOR chưa có KTC.</a:t>
-            </a:r>
-            <a:endParaRPr lang="en-US" sz="1360" dirty="0"/>
+              <a:t>ACE tiếp tục tăng các độ đo dựa trên câu chuẩn mà không làm giảm executability.</a:t>
+            </a:r>
+            <a:endParaRPr lang="en-US" sz="1420" dirty="0"/>
           </a:p>
         </p:txBody>
       </p:sp>
@@ -11415,8 +11324,35 @@
         </p:nvSpPr>
         <p:spPr>
           <a:xfrm>
-            <a:off x="960120" y="2340864"/>
-            <a:ext cx="7269480" cy="457200"/>
+            <a:off x="5797296" y="2313432"/>
+            <a:ext cx="1874520" cy="3511296"/>
+          </a:xfrm>
+          <a:prstGeom prst="rect">
+            <a:avLst/>
+          </a:prstGeom>
+          <a:solidFill>
+            <a:srgbClr val="F0EEF5"/>
+          </a:solidFill>
+          <a:ln w="12700">
+            <a:solidFill>
+              <a:srgbClr val="F0EEF5">
+                <a:alpha val="0"/>
+              </a:srgbClr>
+            </a:solidFill>
+            <a:prstDash val="solid"/>
+          </a:ln>
+        </p:spPr>
+      </p:sp>
+      <p:sp>
+        <p:nvSpPr>
+          <p:cNvPr id="12" name="Shape 10"/>
+          <p:cNvSpPr/>
+          <p:nvPr/>
+        </p:nvSpPr>
+        <p:spPr>
+          <a:xfrm>
+            <a:off x="658368" y="2313432"/>
+            <a:ext cx="7013448" cy="438912"/>
           </a:xfrm>
           <a:prstGeom prst="rect">
             <a:avLst/>
@@ -11436,14 +11372,14 @@
       </p:sp>
       <p:sp>
         <p:nvSpPr>
-          <p:cNvPr id="12" name="Text 10"/>
-          <p:cNvSpPr/>
-          <p:nvPr/>
-        </p:nvSpPr>
-        <p:spPr>
-          <a:xfrm>
-            <a:off x="960120" y="2340864"/>
-            <a:ext cx="2148840" cy="457200"/>
+          <p:cNvPr id="13" name="Text 11"/>
+          <p:cNvSpPr/>
+          <p:nvPr/>
+        </p:nvSpPr>
+        <p:spPr>
+          <a:xfrm>
+            <a:off x="658368" y="2313432"/>
+            <a:ext cx="1783080" cy="438912"/>
           </a:xfrm>
           <a:prstGeom prst="rect">
             <a:avLst/>
@@ -11464,7 +11400,7 @@
               <a:buNone/>
             </a:pPr>
             <a:r>
-              <a:rPr lang="en-US" sz="1350" b="1" dirty="0">
+              <a:rPr lang="en-US" sz="1280" b="1" dirty="0">
                 <a:solidFill>
                   <a:srgbClr val="FFFFFF"/>
                 </a:solidFill>
@@ -11474,20 +11410,20 @@
               </a:rPr>
               <a:t>Chỉ số</a:t>
             </a:r>
-            <a:endParaRPr lang="en-US" sz="1350" dirty="0"/>
-          </a:p>
-        </p:txBody>
-      </p:sp>
-      <p:sp>
-        <p:nvSpPr>
-          <p:cNvPr id="13" name="Text 11"/>
-          <p:cNvSpPr/>
-          <p:nvPr/>
-        </p:nvSpPr>
-        <p:spPr>
-          <a:xfrm>
-            <a:off x="3108960" y="2340864"/>
-            <a:ext cx="1874520" cy="457200"/>
+            <a:endParaRPr lang="en-US" sz="1280" dirty="0"/>
+          </a:p>
+        </p:txBody>
+      </p:sp>
+      <p:sp>
+        <p:nvSpPr>
+          <p:cNvPr id="14" name="Text 12"/>
+          <p:cNvSpPr/>
+          <p:nvPr/>
+        </p:nvSpPr>
+        <p:spPr>
+          <a:xfrm>
+            <a:off x="2441448" y="2313432"/>
+            <a:ext cx="1481328" cy="438912"/>
           </a:xfrm>
           <a:prstGeom prst="rect">
             <a:avLst/>
@@ -11508,7 +11444,7 @@
               <a:buNone/>
             </a:pPr>
             <a:r>
-              <a:rPr lang="en-US" sz="1350" b="1" dirty="0">
+              <a:rPr lang="en-US" sz="1280" b="1" dirty="0">
                 <a:solidFill>
                   <a:srgbClr val="FFFFFF"/>
                 </a:solidFill>
@@ -11516,22 +11452,22 @@
                 <a:ea typeface="Cambria" pitchFamily="34" charset="-122"/>
                 <a:cs typeface="Cambria" pitchFamily="34" charset="-120"/>
               </a:rPr>
-              <a:t>Δ ACE</a:t>
-            </a:r>
-            <a:endParaRPr lang="en-US" sz="1350" dirty="0"/>
-          </a:p>
-        </p:txBody>
-      </p:sp>
-      <p:sp>
-        <p:nvSpPr>
-          <p:cNvPr id="14" name="Text 12"/>
-          <p:cNvSpPr/>
-          <p:nvPr/>
-        </p:nvSpPr>
-        <p:spPr>
-          <a:xfrm>
-            <a:off x="4983480" y="2340864"/>
-            <a:ext cx="3246120" cy="457200"/>
+              <a:t>S1</a:t>
+            </a:r>
+            <a:endParaRPr lang="en-US" sz="1280" dirty="0"/>
+          </a:p>
+        </p:txBody>
+      </p:sp>
+      <p:sp>
+        <p:nvSpPr>
+          <p:cNvPr id="15" name="Text 13"/>
+          <p:cNvSpPr/>
+          <p:nvPr/>
+        </p:nvSpPr>
+        <p:spPr>
+          <a:xfrm>
+            <a:off x="3922776" y="2313432"/>
+            <a:ext cx="1874520" cy="438912"/>
           </a:xfrm>
           <a:prstGeom prst="rect">
             <a:avLst/>
@@ -11552,7 +11488,7 @@
               <a:buNone/>
             </a:pPr>
             <a:r>
-              <a:rPr lang="en-US" sz="1350" b="1" dirty="0">
+              <a:rPr lang="en-US" sz="1280" b="1" dirty="0">
                 <a:solidFill>
                   <a:srgbClr val="FFFFFF"/>
                 </a:solidFill>
@@ -11560,22 +11496,22 @@
                 <a:ea typeface="Cambria" pitchFamily="34" charset="-122"/>
                 <a:cs typeface="Cambria" pitchFamily="34" charset="-120"/>
               </a:rPr>
-              <a:t>KTC 95%</a:t>
-            </a:r>
-            <a:endParaRPr lang="en-US" sz="1350" dirty="0"/>
-          </a:p>
-        </p:txBody>
-      </p:sp>
-      <p:sp>
-        <p:nvSpPr>
-          <p:cNvPr id="15" name="Text 13"/>
-          <p:cNvSpPr/>
-          <p:nvPr/>
-        </p:nvSpPr>
-        <p:spPr>
-          <a:xfrm>
-            <a:off x="960120" y="2798064"/>
-            <a:ext cx="2148840" cy="457200"/>
+              <a:t>GRPO-SPICE</a:t>
+            </a:r>
+            <a:endParaRPr lang="en-US" sz="1280" dirty="0"/>
+          </a:p>
+        </p:txBody>
+      </p:sp>
+      <p:sp>
+        <p:nvSpPr>
+          <p:cNvPr id="16" name="Text 14"/>
+          <p:cNvSpPr/>
+          <p:nvPr/>
+        </p:nvSpPr>
+        <p:spPr>
+          <a:xfrm>
+            <a:off x="5797296" y="2313432"/>
+            <a:ext cx="1874520" cy="438912"/>
           </a:xfrm>
           <a:prstGeom prst="rect">
             <a:avLst/>
@@ -11589,6 +11525,50 @@
           </a:bodyPr>
           <a:lstStyle/>
           <a:p>
+            <a:pPr algn="ctr" indent="0" marL="0">
+              <a:lnSpc>
+                <a:spcPct val="125000"/>
+              </a:lnSpc>
+              <a:buNone/>
+            </a:pPr>
+            <a:r>
+              <a:rPr lang="en-US" sz="1280" b="1" dirty="0">
+                <a:solidFill>
+                  <a:srgbClr val="FFFFFF"/>
+                </a:solidFill>
+                <a:latin typeface="Cambria" pitchFamily="34" charset="0"/>
+                <a:ea typeface="Cambria" pitchFamily="34" charset="-122"/>
+                <a:cs typeface="Cambria" pitchFamily="34" charset="-120"/>
+              </a:rPr>
+              <a:t>ACE</a:t>
+            </a:r>
+            <a:endParaRPr lang="en-US" sz="1280" dirty="0"/>
+          </a:p>
+        </p:txBody>
+      </p:sp>
+      <p:sp>
+        <p:nvSpPr>
+          <p:cNvPr id="17" name="Text 15"/>
+          <p:cNvSpPr/>
+          <p:nvPr/>
+        </p:nvSpPr>
+        <p:spPr>
+          <a:xfrm>
+            <a:off x="658368" y="2752344"/>
+            <a:ext cx="1783080" cy="438912"/>
+          </a:xfrm>
+          <a:prstGeom prst="rect">
+            <a:avLst/>
+          </a:prstGeom>
+          <a:noFill/>
+          <a:ln/>
+        </p:spPr>
+        <p:txBody>
+          <a:bodyPr wrap="square" lIns="0" tIns="0" rIns="0" bIns="0" rtlCol="0" anchor="ctr">
+            <a:normAutofit/>
+          </a:bodyPr>
+          <a:lstStyle/>
+          <a:p>
             <a:pPr algn="l" indent="0" marL="0">
               <a:lnSpc>
                 <a:spcPct val="125000"/>
@@ -11596,7 +11576,7 @@
               <a:buNone/>
             </a:pPr>
             <a:r>
-              <a:rPr lang="en-US" sz="1330" dirty="0">
+              <a:rPr lang="en-US" sz="1280" dirty="0">
                 <a:solidFill>
                   <a:srgbClr val="1A1A1A"/>
                 </a:solidFill>
@@ -11606,20 +11586,20 @@
               </a:rPr>
               <a:t>BLEU-4</a:t>
             </a:r>
-            <a:endParaRPr lang="en-US" sz="1330" dirty="0"/>
-          </a:p>
-        </p:txBody>
-      </p:sp>
-      <p:sp>
-        <p:nvSpPr>
-          <p:cNvPr id="16" name="Text 14"/>
-          <p:cNvSpPr/>
-          <p:nvPr/>
-        </p:nvSpPr>
-        <p:spPr>
-          <a:xfrm>
-            <a:off x="3108960" y="2798064"/>
-            <a:ext cx="1874520" cy="457200"/>
+            <a:endParaRPr lang="en-US" sz="1280" dirty="0"/>
+          </a:p>
+        </p:txBody>
+      </p:sp>
+      <p:sp>
+        <p:nvSpPr>
+          <p:cNvPr id="18" name="Text 16"/>
+          <p:cNvSpPr/>
+          <p:nvPr/>
+        </p:nvSpPr>
+        <p:spPr>
+          <a:xfrm>
+            <a:off x="2441448" y="2752344"/>
+            <a:ext cx="1481328" cy="438912"/>
           </a:xfrm>
           <a:prstGeom prst="rect">
             <a:avLst/>
@@ -11640,7 +11620,95 @@
               <a:buNone/>
             </a:pPr>
             <a:r>
-              <a:rPr lang="en-US" sz="1330" b="1" dirty="0">
+              <a:rPr lang="en-US" sz="1280" dirty="0">
+                <a:solidFill>
+                  <a:srgbClr val="1A1A1A"/>
+                </a:solidFill>
+                <a:latin typeface="Cambria" pitchFamily="34" charset="0"/>
+                <a:ea typeface="Cambria" pitchFamily="34" charset="-122"/>
+                <a:cs typeface="Cambria" pitchFamily="34" charset="-120"/>
+              </a:rPr>
+              <a:t>51,56</a:t>
+            </a:r>
+            <a:endParaRPr lang="en-US" sz="1280" dirty="0"/>
+          </a:p>
+        </p:txBody>
+      </p:sp>
+      <p:sp>
+        <p:nvSpPr>
+          <p:cNvPr id="19" name="Text 17"/>
+          <p:cNvSpPr/>
+          <p:nvPr/>
+        </p:nvSpPr>
+        <p:spPr>
+          <a:xfrm>
+            <a:off x="3922776" y="2752344"/>
+            <a:ext cx="1874520" cy="438912"/>
+          </a:xfrm>
+          <a:prstGeom prst="rect">
+            <a:avLst/>
+          </a:prstGeom>
+          <a:noFill/>
+          <a:ln/>
+        </p:spPr>
+        <p:txBody>
+          <a:bodyPr wrap="square" lIns="0" tIns="0" rIns="0" bIns="0" rtlCol="0" anchor="ctr">
+            <a:normAutofit/>
+          </a:bodyPr>
+          <a:lstStyle/>
+          <a:p>
+            <a:pPr algn="ctr" indent="0" marL="0">
+              <a:lnSpc>
+                <a:spcPct val="125000"/>
+              </a:lnSpc>
+              <a:buNone/>
+            </a:pPr>
+            <a:r>
+              <a:rPr lang="en-US" sz="1280" dirty="0">
+                <a:solidFill>
+                  <a:srgbClr val="1A1A1A"/>
+                </a:solidFill>
+                <a:latin typeface="Cambria" pitchFamily="34" charset="0"/>
+                <a:ea typeface="Cambria" pitchFamily="34" charset="-122"/>
+                <a:cs typeface="Cambria" pitchFamily="34" charset="-120"/>
+              </a:rPr>
+              <a:t>52,36</a:t>
+            </a:r>
+            <a:endParaRPr lang="en-US" sz="1280" dirty="0"/>
+          </a:p>
+        </p:txBody>
+      </p:sp>
+      <p:sp>
+        <p:nvSpPr>
+          <p:cNvPr id="20" name="Text 18"/>
+          <p:cNvSpPr/>
+          <p:nvPr/>
+        </p:nvSpPr>
+        <p:spPr>
+          <a:xfrm>
+            <a:off x="5797296" y="2752344"/>
+            <a:ext cx="1874520" cy="438912"/>
+          </a:xfrm>
+          <a:prstGeom prst="rect">
+            <a:avLst/>
+          </a:prstGeom>
+          <a:noFill/>
+          <a:ln/>
+        </p:spPr>
+        <p:txBody>
+          <a:bodyPr wrap="square" lIns="0" tIns="0" rIns="0" bIns="0" rtlCol="0" anchor="ctr">
+            <a:normAutofit/>
+          </a:bodyPr>
+          <a:lstStyle/>
+          <a:p>
+            <a:pPr algn="ctr" indent="0" marL="0">
+              <a:lnSpc>
+                <a:spcPct val="125000"/>
+              </a:lnSpc>
+              <a:buNone/>
+            </a:pPr>
+            <a:r>
+              <a:rPr lang="en-US" sz="1280" b="1" dirty="0">
                 <a:solidFill>
                   <a:srgbClr val="4F417A"/>
                 </a:solidFill>
@@ -11648,66 +11716,22 @@
                 <a:ea typeface="Cambria" pitchFamily="34" charset="-122"/>
                 <a:cs typeface="Cambria" pitchFamily="34" charset="-120"/>
               </a:rPr>
-              <a:t>+1,11</a:t>
-            </a:r>
-            <a:endParaRPr lang="en-US" sz="1330" dirty="0"/>
-          </a:p>
-        </p:txBody>
-      </p:sp>
-      <p:sp>
-        <p:nvSpPr>
-          <p:cNvPr id="17" name="Text 15"/>
-          <p:cNvSpPr/>
-          <p:nvPr/>
-        </p:nvSpPr>
-        <p:spPr>
-          <a:xfrm>
-            <a:off x="4983480" y="2798064"/>
-            <a:ext cx="3246120" cy="457200"/>
-          </a:xfrm>
-          <a:prstGeom prst="rect">
-            <a:avLst/>
-          </a:prstGeom>
-          <a:noFill/>
-          <a:ln/>
-        </p:spPr>
-        <p:txBody>
-          <a:bodyPr wrap="square" lIns="0" tIns="0" rIns="0" bIns="0" rtlCol="0" anchor="ctr">
-            <a:normAutofit/>
-          </a:bodyPr>
-          <a:lstStyle/>
-          <a:p>
-            <a:pPr algn="ctr" indent="0" marL="0">
-              <a:lnSpc>
-                <a:spcPct val="125000"/>
-              </a:lnSpc>
-              <a:buNone/>
-            </a:pPr>
-            <a:r>
-              <a:rPr lang="en-US" sz="1330" dirty="0">
-                <a:solidFill>
-                  <a:srgbClr val="1A1A1A"/>
-                </a:solidFill>
-                <a:latin typeface="Cambria" pitchFamily="34" charset="0"/>
-                <a:ea typeface="Cambria" pitchFamily="34" charset="-122"/>
-                <a:cs typeface="Cambria" pitchFamily="34" charset="-120"/>
-              </a:rPr>
-              <a:t>[+0,78; +1,42]</a:t>
-            </a:r>
-            <a:endParaRPr lang="en-US" sz="1330" dirty="0"/>
-          </a:p>
-        </p:txBody>
-      </p:sp>
-      <p:sp>
-        <p:nvSpPr>
-          <p:cNvPr id="18" name="Shape 16"/>
-          <p:cNvSpPr/>
-          <p:nvPr/>
-        </p:nvSpPr>
-        <p:spPr>
-          <a:xfrm>
-            <a:off x="960120" y="3255264"/>
-            <a:ext cx="7269480" cy="0"/>
+              <a:t>53,47</a:t>
+            </a:r>
+            <a:endParaRPr lang="en-US" sz="1280" dirty="0"/>
+          </a:p>
+        </p:txBody>
+      </p:sp>
+      <p:sp>
+        <p:nvSpPr>
+          <p:cNvPr id="21" name="Shape 19"/>
+          <p:cNvSpPr/>
+          <p:nvPr/>
+        </p:nvSpPr>
+        <p:spPr>
+          <a:xfrm>
+            <a:off x="658368" y="3191256"/>
+            <a:ext cx="7013448" cy="0"/>
           </a:xfrm>
           <a:prstGeom prst="line">
             <a:avLst/>
@@ -11724,14 +11748,14 @@
       </p:sp>
       <p:sp>
         <p:nvSpPr>
-          <p:cNvPr id="19" name="Text 17"/>
-          <p:cNvSpPr/>
-          <p:nvPr/>
-        </p:nvSpPr>
-        <p:spPr>
-          <a:xfrm>
-            <a:off x="960120" y="3255264"/>
-            <a:ext cx="2148840" cy="457200"/>
+          <p:cNvPr id="22" name="Text 20"/>
+          <p:cNvSpPr/>
+          <p:nvPr/>
+        </p:nvSpPr>
+        <p:spPr>
+          <a:xfrm>
+            <a:off x="658368" y="3191256"/>
+            <a:ext cx="1783080" cy="438912"/>
           </a:xfrm>
           <a:prstGeom prst="rect">
             <a:avLst/>
@@ -11752,7 +11776,7 @@
               <a:buNone/>
             </a:pPr>
             <a:r>
-              <a:rPr lang="en-US" sz="1330" dirty="0">
+              <a:rPr lang="en-US" sz="1280" dirty="0">
                 <a:solidFill>
                   <a:srgbClr val="1A1A1A"/>
                 </a:solidFill>
@@ -11762,20 +11786,20 @@
               </a:rPr>
               <a:t>METEOR</a:t>
             </a:r>
-            <a:endParaRPr lang="en-US" sz="1330" dirty="0"/>
-          </a:p>
-        </p:txBody>
-      </p:sp>
-      <p:sp>
-        <p:nvSpPr>
-          <p:cNvPr id="20" name="Text 18"/>
-          <p:cNvSpPr/>
-          <p:nvPr/>
-        </p:nvSpPr>
-        <p:spPr>
-          <a:xfrm>
-            <a:off x="3108960" y="3255264"/>
-            <a:ext cx="1874520" cy="457200"/>
+            <a:endParaRPr lang="en-US" sz="1280" dirty="0"/>
+          </a:p>
+        </p:txBody>
+      </p:sp>
+      <p:sp>
+        <p:nvSpPr>
+          <p:cNvPr id="23" name="Text 21"/>
+          <p:cNvSpPr/>
+          <p:nvPr/>
+        </p:nvSpPr>
+        <p:spPr>
+          <a:xfrm>
+            <a:off x="2441448" y="3191256"/>
+            <a:ext cx="1481328" cy="438912"/>
           </a:xfrm>
           <a:prstGeom prst="rect">
             <a:avLst/>
@@ -11796,7 +11820,95 @@
               <a:buNone/>
             </a:pPr>
             <a:r>
-              <a:rPr lang="en-US" sz="1330" b="1" dirty="0">
+              <a:rPr lang="en-US" sz="1280" dirty="0">
+                <a:solidFill>
+                  <a:srgbClr val="1A1A1A"/>
+                </a:solidFill>
+                <a:latin typeface="Cambria" pitchFamily="34" charset="0"/>
+                <a:ea typeface="Cambria" pitchFamily="34" charset="-122"/>
+                <a:cs typeface="Cambria" pitchFamily="34" charset="-120"/>
+              </a:rPr>
+              <a:t>36,79</a:t>
+            </a:r>
+            <a:endParaRPr lang="en-US" sz="1280" dirty="0"/>
+          </a:p>
+        </p:txBody>
+      </p:sp>
+      <p:sp>
+        <p:nvSpPr>
+          <p:cNvPr id="24" name="Text 22"/>
+          <p:cNvSpPr/>
+          <p:nvPr/>
+        </p:nvSpPr>
+        <p:spPr>
+          <a:xfrm>
+            <a:off x="3922776" y="3191256"/>
+            <a:ext cx="1874520" cy="438912"/>
+          </a:xfrm>
+          <a:prstGeom prst="rect">
+            <a:avLst/>
+          </a:prstGeom>
+          <a:noFill/>
+          <a:ln/>
+        </p:spPr>
+        <p:txBody>
+          <a:bodyPr wrap="square" lIns="0" tIns="0" rIns="0" bIns="0" rtlCol="0" anchor="ctr">
+            <a:normAutofit/>
+          </a:bodyPr>
+          <a:lstStyle/>
+          <a:p>
+            <a:pPr algn="ctr" indent="0" marL="0">
+              <a:lnSpc>
+                <a:spcPct val="125000"/>
+              </a:lnSpc>
+              <a:buNone/>
+            </a:pPr>
+            <a:r>
+              <a:rPr lang="en-US" sz="1280" dirty="0">
+                <a:solidFill>
+                  <a:srgbClr val="1A1A1A"/>
+                </a:solidFill>
+                <a:latin typeface="Cambria" pitchFamily="34" charset="0"/>
+                <a:ea typeface="Cambria" pitchFamily="34" charset="-122"/>
+                <a:cs typeface="Cambria" pitchFamily="34" charset="-120"/>
+              </a:rPr>
+              <a:t>37,92</a:t>
+            </a:r>
+            <a:endParaRPr lang="en-US" sz="1280" dirty="0"/>
+          </a:p>
+        </p:txBody>
+      </p:sp>
+      <p:sp>
+        <p:nvSpPr>
+          <p:cNvPr id="25" name="Text 23"/>
+          <p:cNvSpPr/>
+          <p:nvPr/>
+        </p:nvSpPr>
+        <p:spPr>
+          <a:xfrm>
+            <a:off x="5797296" y="3191256"/>
+            <a:ext cx="1874520" cy="438912"/>
+          </a:xfrm>
+          <a:prstGeom prst="rect">
+            <a:avLst/>
+          </a:prstGeom>
+          <a:noFill/>
+          <a:ln/>
+        </p:spPr>
+        <p:txBody>
+          <a:bodyPr wrap="square" lIns="0" tIns="0" rIns="0" bIns="0" rtlCol="0" anchor="ctr">
+            <a:normAutofit/>
+          </a:bodyPr>
+          <a:lstStyle/>
+          <a:p>
+            <a:pPr algn="ctr" indent="0" marL="0">
+              <a:lnSpc>
+                <a:spcPct val="125000"/>
+              </a:lnSpc>
+              <a:buNone/>
+            </a:pPr>
+            <a:r>
+              <a:rPr lang="en-US" sz="1280" b="1" dirty="0">
                 <a:solidFill>
                   <a:srgbClr val="4F417A"/>
                 </a:solidFill>
@@ -11804,66 +11916,22 @@
                 <a:ea typeface="Cambria" pitchFamily="34" charset="-122"/>
                 <a:cs typeface="Cambria" pitchFamily="34" charset="-120"/>
               </a:rPr>
-              <a:t>+0,45</a:t>
-            </a:r>
-            <a:endParaRPr lang="en-US" sz="1330" dirty="0"/>
-          </a:p>
-        </p:txBody>
-      </p:sp>
-      <p:sp>
-        <p:nvSpPr>
-          <p:cNvPr id="21" name="Text 19"/>
-          <p:cNvSpPr/>
-          <p:nvPr/>
-        </p:nvSpPr>
-        <p:spPr>
-          <a:xfrm>
-            <a:off x="4983480" y="3255264"/>
-            <a:ext cx="3246120" cy="457200"/>
-          </a:xfrm>
-          <a:prstGeom prst="rect">
-            <a:avLst/>
-          </a:prstGeom>
-          <a:noFill/>
-          <a:ln/>
-        </p:spPr>
-        <p:txBody>
-          <a:bodyPr wrap="square" lIns="0" tIns="0" rIns="0" bIns="0" rtlCol="0" anchor="ctr">
-            <a:normAutofit/>
-          </a:bodyPr>
-          <a:lstStyle/>
-          <a:p>
-            <a:pPr algn="ctr" indent="0" marL="0">
-              <a:lnSpc>
-                <a:spcPct val="125000"/>
-              </a:lnSpc>
-              <a:buNone/>
-            </a:pPr>
-            <a:r>
-              <a:rPr lang="en-US" sz="1330" dirty="0">
-                <a:solidFill>
-                  <a:srgbClr val="1A1A1A"/>
-                </a:solidFill>
-                <a:latin typeface="Cambria" pitchFamily="34" charset="0"/>
-                <a:ea typeface="Cambria" pitchFamily="34" charset="-122"/>
-                <a:cs typeface="Cambria" pitchFamily="34" charset="-120"/>
-              </a:rPr>
-              <a:t>—</a:t>
-            </a:r>
-            <a:endParaRPr lang="en-US" sz="1330" dirty="0"/>
-          </a:p>
-        </p:txBody>
-      </p:sp>
-      <p:sp>
-        <p:nvSpPr>
-          <p:cNvPr id="22" name="Shape 20"/>
-          <p:cNvSpPr/>
-          <p:nvPr/>
-        </p:nvSpPr>
-        <p:spPr>
-          <a:xfrm>
-            <a:off x="960120" y="3712464"/>
-            <a:ext cx="7269480" cy="0"/>
+              <a:t>38,37</a:t>
+            </a:r>
+            <a:endParaRPr lang="en-US" sz="1280" dirty="0"/>
+          </a:p>
+        </p:txBody>
+      </p:sp>
+      <p:sp>
+        <p:nvSpPr>
+          <p:cNvPr id="26" name="Shape 24"/>
+          <p:cNvSpPr/>
+          <p:nvPr/>
+        </p:nvSpPr>
+        <p:spPr>
+          <a:xfrm>
+            <a:off x="658368" y="3630168"/>
+            <a:ext cx="7013448" cy="0"/>
           </a:xfrm>
           <a:prstGeom prst="line">
             <a:avLst/>
@@ -11880,14 +11948,14 @@
       </p:sp>
       <p:sp>
         <p:nvSpPr>
-          <p:cNvPr id="23" name="Text 21"/>
-          <p:cNvSpPr/>
-          <p:nvPr/>
-        </p:nvSpPr>
-        <p:spPr>
-          <a:xfrm>
-            <a:off x="960120" y="3712464"/>
-            <a:ext cx="2148840" cy="457200"/>
+          <p:cNvPr id="27" name="Text 25"/>
+          <p:cNvSpPr/>
+          <p:nvPr/>
+        </p:nvSpPr>
+        <p:spPr>
+          <a:xfrm>
+            <a:off x="658368" y="3630168"/>
+            <a:ext cx="1783080" cy="438912"/>
           </a:xfrm>
           <a:prstGeom prst="rect">
             <a:avLst/>
@@ -11908,7 +11976,7 @@
               <a:buNone/>
             </a:pPr>
             <a:r>
-              <a:rPr lang="en-US" sz="1330" dirty="0">
+              <a:rPr lang="en-US" sz="1280" dirty="0">
                 <a:solidFill>
                   <a:srgbClr val="1A1A1A"/>
                 </a:solidFill>
@@ -11918,20 +11986,20 @@
               </a:rPr>
               <a:t>ROUGE-L</a:t>
             </a:r>
-            <a:endParaRPr lang="en-US" sz="1330" dirty="0"/>
-          </a:p>
-        </p:txBody>
-      </p:sp>
-      <p:sp>
-        <p:nvSpPr>
-          <p:cNvPr id="24" name="Text 22"/>
-          <p:cNvSpPr/>
-          <p:nvPr/>
-        </p:nvSpPr>
-        <p:spPr>
-          <a:xfrm>
-            <a:off x="3108960" y="3712464"/>
-            <a:ext cx="1874520" cy="457200"/>
+            <a:endParaRPr lang="en-US" sz="1280" dirty="0"/>
+          </a:p>
+        </p:txBody>
+      </p:sp>
+      <p:sp>
+        <p:nvSpPr>
+          <p:cNvPr id="28" name="Text 26"/>
+          <p:cNvSpPr/>
+          <p:nvPr/>
+        </p:nvSpPr>
+        <p:spPr>
+          <a:xfrm>
+            <a:off x="2441448" y="3630168"/>
+            <a:ext cx="1481328" cy="438912"/>
           </a:xfrm>
           <a:prstGeom prst="rect">
             <a:avLst/>
@@ -11952,7 +12020,95 @@
               <a:buNone/>
             </a:pPr>
             <a:r>
-              <a:rPr lang="en-US" sz="1330" b="1" dirty="0">
+              <a:rPr lang="en-US" sz="1280" dirty="0">
+                <a:solidFill>
+                  <a:srgbClr val="1A1A1A"/>
+                </a:solidFill>
+                <a:latin typeface="Cambria" pitchFamily="34" charset="0"/>
+                <a:ea typeface="Cambria" pitchFamily="34" charset="-122"/>
+                <a:cs typeface="Cambria" pitchFamily="34" charset="-120"/>
+              </a:rPr>
+              <a:t>67,35</a:t>
+            </a:r>
+            <a:endParaRPr lang="en-US" sz="1280" dirty="0"/>
+          </a:p>
+        </p:txBody>
+      </p:sp>
+      <p:sp>
+        <p:nvSpPr>
+          <p:cNvPr id="29" name="Text 27"/>
+          <p:cNvSpPr/>
+          <p:nvPr/>
+        </p:nvSpPr>
+        <p:spPr>
+          <a:xfrm>
+            <a:off x="3922776" y="3630168"/>
+            <a:ext cx="1874520" cy="438912"/>
+          </a:xfrm>
+          <a:prstGeom prst="rect">
+            <a:avLst/>
+          </a:prstGeom>
+          <a:noFill/>
+          <a:ln/>
+        </p:spPr>
+        <p:txBody>
+          <a:bodyPr wrap="square" lIns="0" tIns="0" rIns="0" bIns="0" rtlCol="0" anchor="ctr">
+            <a:normAutofit/>
+          </a:bodyPr>
+          <a:lstStyle/>
+          <a:p>
+            <a:pPr algn="ctr" indent="0" marL="0">
+              <a:lnSpc>
+                <a:spcPct val="125000"/>
+              </a:lnSpc>
+              <a:buNone/>
+            </a:pPr>
+            <a:r>
+              <a:rPr lang="en-US" sz="1280" dirty="0">
+                <a:solidFill>
+                  <a:srgbClr val="1A1A1A"/>
+                </a:solidFill>
+                <a:latin typeface="Cambria" pitchFamily="34" charset="0"/>
+                <a:ea typeface="Cambria" pitchFamily="34" charset="-122"/>
+                <a:cs typeface="Cambria" pitchFamily="34" charset="-120"/>
+              </a:rPr>
+              <a:t>68,36</a:t>
+            </a:r>
+            <a:endParaRPr lang="en-US" sz="1280" dirty="0"/>
+          </a:p>
+        </p:txBody>
+      </p:sp>
+      <p:sp>
+        <p:nvSpPr>
+          <p:cNvPr id="30" name="Text 28"/>
+          <p:cNvSpPr/>
+          <p:nvPr/>
+        </p:nvSpPr>
+        <p:spPr>
+          <a:xfrm>
+            <a:off x="5797296" y="3630168"/>
+            <a:ext cx="1874520" cy="438912"/>
+          </a:xfrm>
+          <a:prstGeom prst="rect">
+            <a:avLst/>
+          </a:prstGeom>
+          <a:noFill/>
+          <a:ln/>
+        </p:spPr>
+        <p:txBody>
+          <a:bodyPr wrap="square" lIns="0" tIns="0" rIns="0" bIns="0" rtlCol="0" anchor="ctr">
+            <a:normAutofit/>
+          </a:bodyPr>
+          <a:lstStyle/>
+          <a:p>
+            <a:pPr algn="ctr" indent="0" marL="0">
+              <a:lnSpc>
+                <a:spcPct val="125000"/>
+              </a:lnSpc>
+              <a:buNone/>
+            </a:pPr>
+            <a:r>
+              <a:rPr lang="en-US" sz="1280" b="1" dirty="0">
                 <a:solidFill>
                   <a:srgbClr val="4F417A"/>
                 </a:solidFill>
@@ -11960,66 +12116,22 @@
                 <a:ea typeface="Cambria" pitchFamily="34" charset="-122"/>
                 <a:cs typeface="Cambria" pitchFamily="34" charset="-120"/>
               </a:rPr>
-              <a:t>+0,74</a:t>
-            </a:r>
-            <a:endParaRPr lang="en-US" sz="1330" dirty="0"/>
-          </a:p>
-        </p:txBody>
-      </p:sp>
-      <p:sp>
-        <p:nvSpPr>
-          <p:cNvPr id="25" name="Text 23"/>
-          <p:cNvSpPr/>
-          <p:nvPr/>
-        </p:nvSpPr>
-        <p:spPr>
-          <a:xfrm>
-            <a:off x="4983480" y="3712464"/>
-            <a:ext cx="3246120" cy="457200"/>
-          </a:xfrm>
-          <a:prstGeom prst="rect">
-            <a:avLst/>
-          </a:prstGeom>
-          <a:noFill/>
-          <a:ln/>
-        </p:spPr>
-        <p:txBody>
-          <a:bodyPr wrap="square" lIns="0" tIns="0" rIns="0" bIns="0" rtlCol="0" anchor="ctr">
-            <a:normAutofit/>
-          </a:bodyPr>
-          <a:lstStyle/>
-          <a:p>
-            <a:pPr algn="ctr" indent="0" marL="0">
-              <a:lnSpc>
-                <a:spcPct val="125000"/>
-              </a:lnSpc>
-              <a:buNone/>
-            </a:pPr>
-            <a:r>
-              <a:rPr lang="en-US" sz="1330" dirty="0">
-                <a:solidFill>
-                  <a:srgbClr val="1A1A1A"/>
-                </a:solidFill>
-                <a:latin typeface="Cambria" pitchFamily="34" charset="0"/>
-                <a:ea typeface="Cambria" pitchFamily="34" charset="-122"/>
-                <a:cs typeface="Cambria" pitchFamily="34" charset="-120"/>
-              </a:rPr>
-              <a:t>[+0,54; +0,94]</a:t>
-            </a:r>
-            <a:endParaRPr lang="en-US" sz="1330" dirty="0"/>
-          </a:p>
-        </p:txBody>
-      </p:sp>
-      <p:sp>
-        <p:nvSpPr>
-          <p:cNvPr id="26" name="Shape 24"/>
-          <p:cNvSpPr/>
-          <p:nvPr/>
-        </p:nvSpPr>
-        <p:spPr>
-          <a:xfrm>
-            <a:off x="960120" y="4169664"/>
-            <a:ext cx="7269480" cy="0"/>
+              <a:t>69,11</a:t>
+            </a:r>
+            <a:endParaRPr lang="en-US" sz="1280" dirty="0"/>
+          </a:p>
+        </p:txBody>
+      </p:sp>
+      <p:sp>
+        <p:nvSpPr>
+          <p:cNvPr id="31" name="Shape 29"/>
+          <p:cNvSpPr/>
+          <p:nvPr/>
+        </p:nvSpPr>
+        <p:spPr>
+          <a:xfrm>
+            <a:off x="658368" y="4069080"/>
+            <a:ext cx="7013448" cy="0"/>
           </a:xfrm>
           <a:prstGeom prst="line">
             <a:avLst/>
@@ -12036,14 +12148,14 @@
       </p:sp>
       <p:sp>
         <p:nvSpPr>
-          <p:cNvPr id="27" name="Text 25"/>
-          <p:cNvSpPr/>
-          <p:nvPr/>
-        </p:nvSpPr>
-        <p:spPr>
-          <a:xfrm>
-            <a:off x="960120" y="4169664"/>
-            <a:ext cx="2148840" cy="457200"/>
+          <p:cNvPr id="32" name="Text 30"/>
+          <p:cNvSpPr/>
+          <p:nvPr/>
+        </p:nvSpPr>
+        <p:spPr>
+          <a:xfrm>
+            <a:off x="658368" y="4069080"/>
+            <a:ext cx="1783080" cy="438912"/>
           </a:xfrm>
           <a:prstGeom prst="rect">
             <a:avLst/>
@@ -12064,7 +12176,7 @@
               <a:buNone/>
             </a:pPr>
             <a:r>
-              <a:rPr lang="en-US" sz="1330" dirty="0">
+              <a:rPr lang="en-US" sz="1280" dirty="0">
                 <a:solidFill>
                   <a:srgbClr val="1A1A1A"/>
                 </a:solidFill>
@@ -12074,20 +12186,20 @@
               </a:rPr>
               <a:t>CIDEr-D</a:t>
             </a:r>
-            <a:endParaRPr lang="en-US" sz="1330" dirty="0"/>
-          </a:p>
-        </p:txBody>
-      </p:sp>
-      <p:sp>
-        <p:nvSpPr>
-          <p:cNvPr id="28" name="Text 26"/>
-          <p:cNvSpPr/>
-          <p:nvPr/>
-        </p:nvSpPr>
-        <p:spPr>
-          <a:xfrm>
-            <a:off x="3108960" y="4169664"/>
-            <a:ext cx="1874520" cy="457200"/>
+            <a:endParaRPr lang="en-US" sz="1280" dirty="0"/>
+          </a:p>
+        </p:txBody>
+      </p:sp>
+      <p:sp>
+        <p:nvSpPr>
+          <p:cNvPr id="33" name="Text 31"/>
+          <p:cNvSpPr/>
+          <p:nvPr/>
+        </p:nvSpPr>
+        <p:spPr>
+          <a:xfrm>
+            <a:off x="2441448" y="4069080"/>
+            <a:ext cx="1481328" cy="438912"/>
           </a:xfrm>
           <a:prstGeom prst="rect">
             <a:avLst/>
@@ -12108,7 +12220,95 @@
               <a:buNone/>
             </a:pPr>
             <a:r>
-              <a:rPr lang="en-US" sz="1330" b="1" dirty="0">
+              <a:rPr lang="en-US" sz="1280" dirty="0">
+                <a:solidFill>
+                  <a:srgbClr val="1A1A1A"/>
+                </a:solidFill>
+                <a:latin typeface="Cambria" pitchFamily="34" charset="0"/>
+                <a:ea typeface="Cambria" pitchFamily="34" charset="-122"/>
+                <a:cs typeface="Cambria" pitchFamily="34" charset="-120"/>
+              </a:rPr>
+              <a:t>416,12</a:t>
+            </a:r>
+            <a:endParaRPr lang="en-US" sz="1280" dirty="0"/>
+          </a:p>
+        </p:txBody>
+      </p:sp>
+      <p:sp>
+        <p:nvSpPr>
+          <p:cNvPr id="34" name="Text 32"/>
+          <p:cNvSpPr/>
+          <p:nvPr/>
+        </p:nvSpPr>
+        <p:spPr>
+          <a:xfrm>
+            <a:off x="3922776" y="4069080"/>
+            <a:ext cx="1874520" cy="438912"/>
+          </a:xfrm>
+          <a:prstGeom prst="rect">
+            <a:avLst/>
+          </a:prstGeom>
+          <a:noFill/>
+          <a:ln/>
+        </p:spPr>
+        <p:txBody>
+          <a:bodyPr wrap="square" lIns="0" tIns="0" rIns="0" bIns="0" rtlCol="0" anchor="ctr">
+            <a:normAutofit/>
+          </a:bodyPr>
+          <a:lstStyle/>
+          <a:p>
+            <a:pPr algn="ctr" indent="0" marL="0">
+              <a:lnSpc>
+                <a:spcPct val="125000"/>
+              </a:lnSpc>
+              <a:buNone/>
+            </a:pPr>
+            <a:r>
+              <a:rPr lang="en-US" sz="1280" dirty="0">
+                <a:solidFill>
+                  <a:srgbClr val="1A1A1A"/>
+                </a:solidFill>
+                <a:latin typeface="Cambria" pitchFamily="34" charset="0"/>
+                <a:ea typeface="Cambria" pitchFamily="34" charset="-122"/>
+                <a:cs typeface="Cambria" pitchFamily="34" charset="-120"/>
+              </a:rPr>
+              <a:t>430,05</a:t>
+            </a:r>
+            <a:endParaRPr lang="en-US" sz="1280" dirty="0"/>
+          </a:p>
+        </p:txBody>
+      </p:sp>
+      <p:sp>
+        <p:nvSpPr>
+          <p:cNvPr id="35" name="Text 33"/>
+          <p:cNvSpPr/>
+          <p:nvPr/>
+        </p:nvSpPr>
+        <p:spPr>
+          <a:xfrm>
+            <a:off x="5797296" y="4069080"/>
+            <a:ext cx="1874520" cy="438912"/>
+          </a:xfrm>
+          <a:prstGeom prst="rect">
+            <a:avLst/>
+          </a:prstGeom>
+          <a:noFill/>
+          <a:ln/>
+        </p:spPr>
+        <p:txBody>
+          <a:bodyPr wrap="square" lIns="0" tIns="0" rIns="0" bIns="0" rtlCol="0" anchor="ctr">
+            <a:normAutofit/>
+          </a:bodyPr>
+          <a:lstStyle/>
+          <a:p>
+            <a:pPr algn="ctr" indent="0" marL="0">
+              <a:lnSpc>
+                <a:spcPct val="125000"/>
+              </a:lnSpc>
+              <a:buNone/>
+            </a:pPr>
+            <a:r>
+              <a:rPr lang="en-US" sz="1280" b="1" dirty="0">
                 <a:solidFill>
                   <a:srgbClr val="4F417A"/>
                 </a:solidFill>
@@ -12116,66 +12316,22 @@
                 <a:ea typeface="Cambria" pitchFamily="34" charset="-122"/>
                 <a:cs typeface="Cambria" pitchFamily="34" charset="-120"/>
               </a:rPr>
-              <a:t>+11,97</a:t>
-            </a:r>
-            <a:endParaRPr lang="en-US" sz="1330" dirty="0"/>
-          </a:p>
-        </p:txBody>
-      </p:sp>
-      <p:sp>
-        <p:nvSpPr>
-          <p:cNvPr id="29" name="Text 27"/>
-          <p:cNvSpPr/>
-          <p:nvPr/>
-        </p:nvSpPr>
-        <p:spPr>
-          <a:xfrm>
-            <a:off x="4983480" y="4169664"/>
-            <a:ext cx="3246120" cy="457200"/>
-          </a:xfrm>
-          <a:prstGeom prst="rect">
-            <a:avLst/>
-          </a:prstGeom>
-          <a:noFill/>
-          <a:ln/>
-        </p:spPr>
-        <p:txBody>
-          <a:bodyPr wrap="square" lIns="0" tIns="0" rIns="0" bIns="0" rtlCol="0" anchor="ctr">
-            <a:normAutofit/>
-          </a:bodyPr>
-          <a:lstStyle/>
-          <a:p>
-            <a:pPr algn="ctr" indent="0" marL="0">
-              <a:lnSpc>
-                <a:spcPct val="125000"/>
-              </a:lnSpc>
-              <a:buNone/>
-            </a:pPr>
-            <a:r>
-              <a:rPr lang="en-US" sz="1330" dirty="0">
-                <a:solidFill>
-                  <a:srgbClr val="1A1A1A"/>
-                </a:solidFill>
-                <a:latin typeface="Cambria" pitchFamily="34" charset="0"/>
-                <a:ea typeface="Cambria" pitchFamily="34" charset="-122"/>
-                <a:cs typeface="Cambria" pitchFamily="34" charset="-120"/>
-              </a:rPr>
-              <a:t>[+8,24; +15,34]</a:t>
-            </a:r>
-            <a:endParaRPr lang="en-US" sz="1330" dirty="0"/>
-          </a:p>
-        </p:txBody>
-      </p:sp>
-      <p:sp>
-        <p:nvSpPr>
-          <p:cNvPr id="30" name="Shape 28"/>
-          <p:cNvSpPr/>
-          <p:nvPr/>
-        </p:nvSpPr>
-        <p:spPr>
-          <a:xfrm>
-            <a:off x="960120" y="4626864"/>
-            <a:ext cx="7269480" cy="0"/>
+              <a:t>442,02</a:t>
+            </a:r>
+            <a:endParaRPr lang="en-US" sz="1280" dirty="0"/>
+          </a:p>
+        </p:txBody>
+      </p:sp>
+      <p:sp>
+        <p:nvSpPr>
+          <p:cNvPr id="36" name="Shape 34"/>
+          <p:cNvSpPr/>
+          <p:nvPr/>
+        </p:nvSpPr>
+        <p:spPr>
+          <a:xfrm>
+            <a:off x="658368" y="4507992"/>
+            <a:ext cx="7013448" cy="0"/>
           </a:xfrm>
           <a:prstGeom prst="line">
             <a:avLst/>
@@ -12192,14 +12348,14 @@
       </p:sp>
       <p:sp>
         <p:nvSpPr>
-          <p:cNvPr id="31" name="Text 29"/>
-          <p:cNvSpPr/>
-          <p:nvPr/>
-        </p:nvSpPr>
-        <p:spPr>
-          <a:xfrm>
-            <a:off x="960120" y="4626864"/>
-            <a:ext cx="2148840" cy="457200"/>
+          <p:cNvPr id="37" name="Text 35"/>
+          <p:cNvSpPr/>
+          <p:nvPr/>
+        </p:nvSpPr>
+        <p:spPr>
+          <a:xfrm>
+            <a:off x="658368" y="4507992"/>
+            <a:ext cx="1783080" cy="438912"/>
           </a:xfrm>
           <a:prstGeom prst="rect">
             <a:avLst/>
@@ -12220,7 +12376,7 @@
               <a:buNone/>
             </a:pPr>
             <a:r>
-              <a:rPr lang="en-US" sz="1330" dirty="0">
+              <a:rPr lang="en-US" sz="1280" dirty="0">
                 <a:solidFill>
                   <a:srgbClr val="1A1A1A"/>
                 </a:solidFill>
@@ -12230,20 +12386,20 @@
               </a:rPr>
               <a:t>SPICE</a:t>
             </a:r>
-            <a:endParaRPr lang="en-US" sz="1330" dirty="0"/>
-          </a:p>
-        </p:txBody>
-      </p:sp>
-      <p:sp>
-        <p:nvSpPr>
-          <p:cNvPr id="32" name="Text 30"/>
-          <p:cNvSpPr/>
-          <p:nvPr/>
-        </p:nvSpPr>
-        <p:spPr>
-          <a:xfrm>
-            <a:off x="3108960" y="4626864"/>
-            <a:ext cx="1874520" cy="457200"/>
+            <a:endParaRPr lang="en-US" sz="1280" dirty="0"/>
+          </a:p>
+        </p:txBody>
+      </p:sp>
+      <p:sp>
+        <p:nvSpPr>
+          <p:cNvPr id="38" name="Text 36"/>
+          <p:cNvSpPr/>
+          <p:nvPr/>
+        </p:nvSpPr>
+        <p:spPr>
+          <a:xfrm>
+            <a:off x="2441448" y="4507992"/>
+            <a:ext cx="1481328" cy="438912"/>
           </a:xfrm>
           <a:prstGeom prst="rect">
             <a:avLst/>
@@ -12264,7 +12420,95 @@
               <a:buNone/>
             </a:pPr>
             <a:r>
-              <a:rPr lang="en-US" sz="1330" b="1" dirty="0">
+              <a:rPr lang="en-US" sz="1280" dirty="0">
+                <a:solidFill>
+                  <a:srgbClr val="1A1A1A"/>
+                </a:solidFill>
+                <a:latin typeface="Cambria" pitchFamily="34" charset="0"/>
+                <a:ea typeface="Cambria" pitchFamily="34" charset="-122"/>
+                <a:cs typeface="Cambria" pitchFamily="34" charset="-120"/>
+              </a:rPr>
+              <a:t>44,37</a:t>
+            </a:r>
+            <a:endParaRPr lang="en-US" sz="1280" dirty="0"/>
+          </a:p>
+        </p:txBody>
+      </p:sp>
+      <p:sp>
+        <p:nvSpPr>
+          <p:cNvPr id="39" name="Text 37"/>
+          <p:cNvSpPr/>
+          <p:nvPr/>
+        </p:nvSpPr>
+        <p:spPr>
+          <a:xfrm>
+            <a:off x="3922776" y="4507992"/>
+            <a:ext cx="1874520" cy="438912"/>
+          </a:xfrm>
+          <a:prstGeom prst="rect">
+            <a:avLst/>
+          </a:prstGeom>
+          <a:noFill/>
+          <a:ln/>
+        </p:spPr>
+        <p:txBody>
+          <a:bodyPr wrap="square" lIns="0" tIns="0" rIns="0" bIns="0" rtlCol="0" anchor="ctr">
+            <a:normAutofit/>
+          </a:bodyPr>
+          <a:lstStyle/>
+          <a:p>
+            <a:pPr algn="ctr" indent="0" marL="0">
+              <a:lnSpc>
+                <a:spcPct val="125000"/>
+              </a:lnSpc>
+              <a:buNone/>
+            </a:pPr>
+            <a:r>
+              <a:rPr lang="en-US" sz="1280" dirty="0">
+                <a:solidFill>
+                  <a:srgbClr val="1A1A1A"/>
+                </a:solidFill>
+                <a:latin typeface="Cambria" pitchFamily="34" charset="0"/>
+                <a:ea typeface="Cambria" pitchFamily="34" charset="-122"/>
+                <a:cs typeface="Cambria" pitchFamily="34" charset="-120"/>
+              </a:rPr>
+              <a:t>45,79</a:t>
+            </a:r>
+            <a:endParaRPr lang="en-US" sz="1280" dirty="0"/>
+          </a:p>
+        </p:txBody>
+      </p:sp>
+      <p:sp>
+        <p:nvSpPr>
+          <p:cNvPr id="40" name="Text 38"/>
+          <p:cNvSpPr/>
+          <p:nvPr/>
+        </p:nvSpPr>
+        <p:spPr>
+          <a:xfrm>
+            <a:off x="5797296" y="4507992"/>
+            <a:ext cx="1874520" cy="438912"/>
+          </a:xfrm>
+          <a:prstGeom prst="rect">
+            <a:avLst/>
+          </a:prstGeom>
+          <a:noFill/>
+          <a:ln/>
+        </p:spPr>
+        <p:txBody>
+          <a:bodyPr wrap="square" lIns="0" tIns="0" rIns="0" bIns="0" rtlCol="0" anchor="ctr">
+            <a:normAutofit/>
+          </a:bodyPr>
+          <a:lstStyle/>
+          <a:p>
+            <a:pPr algn="ctr" indent="0" marL="0">
+              <a:lnSpc>
+                <a:spcPct val="125000"/>
+              </a:lnSpc>
+              <a:buNone/>
+            </a:pPr>
+            <a:r>
+              <a:rPr lang="en-US" sz="1280" b="1" dirty="0">
                 <a:solidFill>
                   <a:srgbClr val="4F417A"/>
                 </a:solidFill>
@@ -12272,66 +12516,22 @@
                 <a:ea typeface="Cambria" pitchFamily="34" charset="-122"/>
                 <a:cs typeface="Cambria" pitchFamily="34" charset="-120"/>
               </a:rPr>
-              <a:t>+1,33</a:t>
-            </a:r>
-            <a:endParaRPr lang="en-US" sz="1330" dirty="0"/>
-          </a:p>
-        </p:txBody>
-      </p:sp>
-      <p:sp>
-        <p:nvSpPr>
-          <p:cNvPr id="33" name="Text 31"/>
-          <p:cNvSpPr/>
-          <p:nvPr/>
-        </p:nvSpPr>
-        <p:spPr>
-          <a:xfrm>
-            <a:off x="4983480" y="4626864"/>
-            <a:ext cx="3246120" cy="457200"/>
-          </a:xfrm>
-          <a:prstGeom prst="rect">
-            <a:avLst/>
-          </a:prstGeom>
-          <a:noFill/>
-          <a:ln/>
-        </p:spPr>
-        <p:txBody>
-          <a:bodyPr wrap="square" lIns="0" tIns="0" rIns="0" bIns="0" rtlCol="0" anchor="ctr">
-            <a:normAutofit/>
-          </a:bodyPr>
-          <a:lstStyle/>
-          <a:p>
-            <a:pPr algn="ctr" indent="0" marL="0">
-              <a:lnSpc>
-                <a:spcPct val="125000"/>
-              </a:lnSpc>
-              <a:buNone/>
-            </a:pPr>
-            <a:r>
-              <a:rPr lang="en-US" sz="1330" dirty="0">
-                <a:solidFill>
-                  <a:srgbClr val="1A1A1A"/>
-                </a:solidFill>
-                <a:latin typeface="Cambria" pitchFamily="34" charset="0"/>
-                <a:ea typeface="Cambria" pitchFamily="34" charset="-122"/>
-                <a:cs typeface="Cambria" pitchFamily="34" charset="-120"/>
-              </a:rPr>
-              <a:t>[+0,92; +1,75]</a:t>
-            </a:r>
-            <a:endParaRPr lang="en-US" sz="1330" dirty="0"/>
-          </a:p>
-        </p:txBody>
-      </p:sp>
-      <p:sp>
-        <p:nvSpPr>
-          <p:cNvPr id="34" name="Shape 32"/>
-          <p:cNvSpPr/>
-          <p:nvPr/>
-        </p:nvSpPr>
-        <p:spPr>
-          <a:xfrm>
-            <a:off x="960120" y="5084064"/>
-            <a:ext cx="7269480" cy="0"/>
+              <a:t>47,13</a:t>
+            </a:r>
+            <a:endParaRPr lang="en-US" sz="1280" dirty="0"/>
+          </a:p>
+        </p:txBody>
+      </p:sp>
+      <p:sp>
+        <p:nvSpPr>
+          <p:cNvPr id="41" name="Shape 39"/>
+          <p:cNvSpPr/>
+          <p:nvPr/>
+        </p:nvSpPr>
+        <p:spPr>
+          <a:xfrm>
+            <a:off x="658368" y="4946904"/>
+            <a:ext cx="7013448" cy="0"/>
           </a:xfrm>
           <a:prstGeom prst="line">
             <a:avLst/>
@@ -12348,14 +12548,14 @@
       </p:sp>
       <p:sp>
         <p:nvSpPr>
-          <p:cNvPr id="35" name="Text 33"/>
-          <p:cNvSpPr/>
-          <p:nvPr/>
-        </p:nvSpPr>
-        <p:spPr>
-          <a:xfrm>
-            <a:off x="960120" y="5084064"/>
-            <a:ext cx="2148840" cy="457200"/>
+          <p:cNvPr id="42" name="Text 40"/>
+          <p:cNvSpPr/>
+          <p:nvPr/>
+        </p:nvSpPr>
+        <p:spPr>
+          <a:xfrm>
+            <a:off x="658368" y="4946904"/>
+            <a:ext cx="1783080" cy="438912"/>
           </a:xfrm>
           <a:prstGeom prst="rect">
             <a:avLst/>
@@ -12376,7 +12576,7 @@
               <a:buNone/>
             </a:pPr>
             <a:r>
-              <a:rPr lang="en-US" sz="1330" dirty="0">
+              <a:rPr lang="en-US" sz="1280" dirty="0">
                 <a:solidFill>
                   <a:srgbClr val="1A1A1A"/>
                 </a:solidFill>
@@ -12386,20 +12586,20 @@
               </a:rPr>
               <a:t>chrF</a:t>
             </a:r>
-            <a:endParaRPr lang="en-US" sz="1330" dirty="0"/>
-          </a:p>
-        </p:txBody>
-      </p:sp>
-      <p:sp>
-        <p:nvSpPr>
-          <p:cNvPr id="36" name="Text 34"/>
-          <p:cNvSpPr/>
-          <p:nvPr/>
-        </p:nvSpPr>
-        <p:spPr>
-          <a:xfrm>
-            <a:off x="3108960" y="5084064"/>
-            <a:ext cx="1874520" cy="457200"/>
+            <a:endParaRPr lang="en-US" sz="1280" dirty="0"/>
+          </a:p>
+        </p:txBody>
+      </p:sp>
+      <p:sp>
+        <p:nvSpPr>
+          <p:cNvPr id="43" name="Text 41"/>
+          <p:cNvSpPr/>
+          <p:nvPr/>
+        </p:nvSpPr>
+        <p:spPr>
+          <a:xfrm>
+            <a:off x="2441448" y="4946904"/>
+            <a:ext cx="1481328" cy="438912"/>
           </a:xfrm>
           <a:prstGeom prst="rect">
             <a:avLst/>
@@ -12420,7 +12620,95 @@
               <a:buNone/>
             </a:pPr>
             <a:r>
-              <a:rPr lang="en-US" sz="1330" b="1" dirty="0">
+              <a:rPr lang="en-US" sz="1280" dirty="0">
+                <a:solidFill>
+                  <a:srgbClr val="1A1A1A"/>
+                </a:solidFill>
+                <a:latin typeface="Cambria" pitchFamily="34" charset="0"/>
+                <a:ea typeface="Cambria" pitchFamily="34" charset="-122"/>
+                <a:cs typeface="Cambria" pitchFamily="34" charset="-120"/>
+              </a:rPr>
+              <a:t>61,26</a:t>
+            </a:r>
+            <a:endParaRPr lang="en-US" sz="1280" dirty="0"/>
+          </a:p>
+        </p:txBody>
+      </p:sp>
+      <p:sp>
+        <p:nvSpPr>
+          <p:cNvPr id="44" name="Text 42"/>
+          <p:cNvSpPr/>
+          <p:nvPr/>
+        </p:nvSpPr>
+        <p:spPr>
+          <a:xfrm>
+            <a:off x="3922776" y="4946904"/>
+            <a:ext cx="1874520" cy="438912"/>
+          </a:xfrm>
+          <a:prstGeom prst="rect">
+            <a:avLst/>
+          </a:prstGeom>
+          <a:noFill/>
+          <a:ln/>
+        </p:spPr>
+        <p:txBody>
+          <a:bodyPr wrap="square" lIns="0" tIns="0" rIns="0" bIns="0" rtlCol="0" anchor="ctr">
+            <a:normAutofit/>
+          </a:bodyPr>
+          <a:lstStyle/>
+          <a:p>
+            <a:pPr algn="ctr" indent="0" marL="0">
+              <a:lnSpc>
+                <a:spcPct val="125000"/>
+              </a:lnSpc>
+              <a:buNone/>
+            </a:pPr>
+            <a:r>
+              <a:rPr lang="en-US" sz="1280" dirty="0">
+                <a:solidFill>
+                  <a:srgbClr val="1A1A1A"/>
+                </a:solidFill>
+                <a:latin typeface="Cambria" pitchFamily="34" charset="0"/>
+                <a:ea typeface="Cambria" pitchFamily="34" charset="-122"/>
+                <a:cs typeface="Cambria" pitchFamily="34" charset="-120"/>
+              </a:rPr>
+              <a:t>62,87</a:t>
+            </a:r>
+            <a:endParaRPr lang="en-US" sz="1280" dirty="0"/>
+          </a:p>
+        </p:txBody>
+      </p:sp>
+      <p:sp>
+        <p:nvSpPr>
+          <p:cNvPr id="45" name="Text 43"/>
+          <p:cNvSpPr/>
+          <p:nvPr/>
+        </p:nvSpPr>
+        <p:spPr>
+          <a:xfrm>
+            <a:off x="5797296" y="4946904"/>
+            <a:ext cx="1874520" cy="438912"/>
+          </a:xfrm>
+          <a:prstGeom prst="rect">
+            <a:avLst/>
+          </a:prstGeom>
+          <a:noFill/>
+          <a:ln/>
+        </p:spPr>
+        <p:txBody>
+          <a:bodyPr wrap="square" lIns="0" tIns="0" rIns="0" bIns="0" rtlCol="0" anchor="ctr">
+            <a:normAutofit/>
+          </a:bodyPr>
+          <a:lstStyle/>
+          <a:p>
+            <a:pPr algn="ctr" indent="0" marL="0">
+              <a:lnSpc>
+                <a:spcPct val="125000"/>
+              </a:lnSpc>
+              <a:buNone/>
+            </a:pPr>
+            <a:r>
+              <a:rPr lang="en-US" sz="1280" b="1" dirty="0">
                 <a:solidFill>
                   <a:srgbClr val="4F417A"/>
                 </a:solidFill>
@@ -12428,66 +12716,22 @@
                 <a:ea typeface="Cambria" pitchFamily="34" charset="-122"/>
                 <a:cs typeface="Cambria" pitchFamily="34" charset="-120"/>
               </a:rPr>
-              <a:t>+0,58</a:t>
-            </a:r>
-            <a:endParaRPr lang="en-US" sz="1330" dirty="0"/>
-          </a:p>
-        </p:txBody>
-      </p:sp>
-      <p:sp>
-        <p:nvSpPr>
-          <p:cNvPr id="37" name="Text 35"/>
-          <p:cNvSpPr/>
-          <p:nvPr/>
-        </p:nvSpPr>
-        <p:spPr>
-          <a:xfrm>
-            <a:off x="4983480" y="5084064"/>
-            <a:ext cx="3246120" cy="457200"/>
-          </a:xfrm>
-          <a:prstGeom prst="rect">
-            <a:avLst/>
-          </a:prstGeom>
-          <a:noFill/>
-          <a:ln/>
-        </p:spPr>
-        <p:txBody>
-          <a:bodyPr wrap="square" lIns="0" tIns="0" rIns="0" bIns="0" rtlCol="0" anchor="ctr">
-            <a:normAutofit/>
-          </a:bodyPr>
-          <a:lstStyle/>
-          <a:p>
-            <a:pPr algn="ctr" indent="0" marL="0">
-              <a:lnSpc>
-                <a:spcPct val="125000"/>
-              </a:lnSpc>
-              <a:buNone/>
-            </a:pPr>
-            <a:r>
-              <a:rPr lang="en-US" sz="1330" dirty="0">
-                <a:solidFill>
-                  <a:srgbClr val="1A1A1A"/>
-                </a:solidFill>
-                <a:latin typeface="Cambria" pitchFamily="34" charset="0"/>
-                <a:ea typeface="Cambria" pitchFamily="34" charset="-122"/>
-                <a:cs typeface="Cambria" pitchFamily="34" charset="-120"/>
-              </a:rPr>
-              <a:t>[+0,37; +0,80]</a:t>
-            </a:r>
-            <a:endParaRPr lang="en-US" sz="1330" dirty="0"/>
-          </a:p>
-        </p:txBody>
-      </p:sp>
-      <p:sp>
-        <p:nvSpPr>
-          <p:cNvPr id="38" name="Shape 36"/>
-          <p:cNvSpPr/>
-          <p:nvPr/>
-        </p:nvSpPr>
-        <p:spPr>
-          <a:xfrm>
-            <a:off x="960120" y="5541264"/>
-            <a:ext cx="7269480" cy="0"/>
+              <a:t>63,44</a:t>
+            </a:r>
+            <a:endParaRPr lang="en-US" sz="1280" dirty="0"/>
+          </a:p>
+        </p:txBody>
+      </p:sp>
+      <p:sp>
+        <p:nvSpPr>
+          <p:cNvPr id="46" name="Shape 44"/>
+          <p:cNvSpPr/>
+          <p:nvPr/>
+        </p:nvSpPr>
+        <p:spPr>
+          <a:xfrm>
+            <a:off x="658368" y="5385816"/>
+            <a:ext cx="7013448" cy="0"/>
           </a:xfrm>
           <a:prstGeom prst="line">
             <a:avLst/>
@@ -12504,14 +12748,14 @@
       </p:sp>
       <p:sp>
         <p:nvSpPr>
-          <p:cNvPr id="39" name="Text 37"/>
-          <p:cNvSpPr/>
-          <p:nvPr/>
-        </p:nvSpPr>
-        <p:spPr>
-          <a:xfrm>
-            <a:off x="960120" y="5541264"/>
-            <a:ext cx="2148840" cy="457200"/>
+          <p:cNvPr id="47" name="Text 45"/>
+          <p:cNvSpPr/>
+          <p:nvPr/>
+        </p:nvSpPr>
+        <p:spPr>
+          <a:xfrm>
+            <a:off x="658368" y="5385816"/>
+            <a:ext cx="1783080" cy="438912"/>
           </a:xfrm>
           <a:prstGeom prst="rect">
             <a:avLst/>
@@ -12532,7 +12776,7 @@
               <a:buNone/>
             </a:pPr>
             <a:r>
-              <a:rPr lang="en-US" sz="1330" dirty="0">
+              <a:rPr lang="en-US" sz="1280" dirty="0">
                 <a:solidFill>
                   <a:srgbClr val="1A1A1A"/>
                 </a:solidFill>
@@ -12542,20 +12786,20 @@
               </a:rPr>
               <a:t>BERTScore</a:t>
             </a:r>
-            <a:endParaRPr lang="en-US" sz="1330" dirty="0"/>
-          </a:p>
-        </p:txBody>
-      </p:sp>
-      <p:sp>
-        <p:nvSpPr>
-          <p:cNvPr id="40" name="Text 38"/>
-          <p:cNvSpPr/>
-          <p:nvPr/>
-        </p:nvSpPr>
-        <p:spPr>
-          <a:xfrm>
-            <a:off x="3108960" y="5541264"/>
-            <a:ext cx="1874520" cy="457200"/>
+            <a:endParaRPr lang="en-US" sz="1280" dirty="0"/>
+          </a:p>
+        </p:txBody>
+      </p:sp>
+      <p:sp>
+        <p:nvSpPr>
+          <p:cNvPr id="48" name="Text 46"/>
+          <p:cNvSpPr/>
+          <p:nvPr/>
+        </p:nvSpPr>
+        <p:spPr>
+          <a:xfrm>
+            <a:off x="2441448" y="5385816"/>
+            <a:ext cx="1481328" cy="438912"/>
           </a:xfrm>
           <a:prstGeom prst="rect">
             <a:avLst/>
@@ -12576,7 +12820,95 @@
               <a:buNone/>
             </a:pPr>
             <a:r>
-              <a:rPr lang="en-US" sz="1330" b="1" dirty="0">
+              <a:rPr lang="en-US" sz="1280" dirty="0">
+                <a:solidFill>
+                  <a:srgbClr val="1A1A1A"/>
+                </a:solidFill>
+                <a:latin typeface="Cambria" pitchFamily="34" charset="0"/>
+                <a:ea typeface="Cambria" pitchFamily="34" charset="-122"/>
+                <a:cs typeface="Cambria" pitchFamily="34" charset="-120"/>
+              </a:rPr>
+              <a:t>66,33</a:t>
+            </a:r>
+            <a:endParaRPr lang="en-US" sz="1280" dirty="0"/>
+          </a:p>
+        </p:txBody>
+      </p:sp>
+      <p:sp>
+        <p:nvSpPr>
+          <p:cNvPr id="49" name="Text 47"/>
+          <p:cNvSpPr/>
+          <p:nvPr/>
+        </p:nvSpPr>
+        <p:spPr>
+          <a:xfrm>
+            <a:off x="3922776" y="5385816"/>
+            <a:ext cx="1874520" cy="438912"/>
+          </a:xfrm>
+          <a:prstGeom prst="rect">
+            <a:avLst/>
+          </a:prstGeom>
+          <a:noFill/>
+          <a:ln/>
+        </p:spPr>
+        <p:txBody>
+          <a:bodyPr wrap="square" lIns="0" tIns="0" rIns="0" bIns="0" rtlCol="0" anchor="ctr">
+            <a:normAutofit/>
+          </a:bodyPr>
+          <a:lstStyle/>
+          <a:p>
+            <a:pPr algn="ctr" indent="0" marL="0">
+              <a:lnSpc>
+                <a:spcPct val="125000"/>
+              </a:lnSpc>
+              <a:buNone/>
+            </a:pPr>
+            <a:r>
+              <a:rPr lang="en-US" sz="1280" dirty="0">
+                <a:solidFill>
+                  <a:srgbClr val="1A1A1A"/>
+                </a:solidFill>
+                <a:latin typeface="Cambria" pitchFamily="34" charset="0"/>
+                <a:ea typeface="Cambria" pitchFamily="34" charset="-122"/>
+                <a:cs typeface="Cambria" pitchFamily="34" charset="-120"/>
+              </a:rPr>
+              <a:t>67,07</a:t>
+            </a:r>
+            <a:endParaRPr lang="en-US" sz="1280" dirty="0"/>
+          </a:p>
+        </p:txBody>
+      </p:sp>
+      <p:sp>
+        <p:nvSpPr>
+          <p:cNvPr id="50" name="Text 48"/>
+          <p:cNvSpPr/>
+          <p:nvPr/>
+        </p:nvSpPr>
+        <p:spPr>
+          <a:xfrm>
+            <a:off x="5797296" y="5385816"/>
+            <a:ext cx="1874520" cy="438912"/>
+          </a:xfrm>
+          <a:prstGeom prst="rect">
+            <a:avLst/>
+          </a:prstGeom>
+          <a:noFill/>
+          <a:ln/>
+        </p:spPr>
+        <p:txBody>
+          <a:bodyPr wrap="square" lIns="0" tIns="0" rIns="0" bIns="0" rtlCol="0" anchor="ctr">
+            <a:normAutofit/>
+          </a:bodyPr>
+          <a:lstStyle/>
+          <a:p>
+            <a:pPr algn="ctr" indent="0" marL="0">
+              <a:lnSpc>
+                <a:spcPct val="125000"/>
+              </a:lnSpc>
+              <a:buNone/>
+            </a:pPr>
+            <a:r>
+              <a:rPr lang="en-US" sz="1280" b="1" dirty="0">
                 <a:solidFill>
                   <a:srgbClr val="4F417A"/>
                 </a:solidFill>
@@ -12584,22 +12916,22 @@
                 <a:ea typeface="Cambria" pitchFamily="34" charset="-122"/>
                 <a:cs typeface="Cambria" pitchFamily="34" charset="-120"/>
               </a:rPr>
-              <a:t>+0,66</a:t>
-            </a:r>
-            <a:endParaRPr lang="en-US" sz="1330" dirty="0"/>
-          </a:p>
-        </p:txBody>
-      </p:sp>
-      <p:sp>
-        <p:nvSpPr>
-          <p:cNvPr id="41" name="Text 39"/>
-          <p:cNvSpPr/>
-          <p:nvPr/>
-        </p:nvSpPr>
-        <p:spPr>
-          <a:xfrm>
-            <a:off x="4983480" y="5541264"/>
-            <a:ext cx="3246120" cy="457200"/>
+              <a:t>67,73</a:t>
+            </a:r>
+            <a:endParaRPr lang="en-US" sz="1280" dirty="0"/>
+          </a:p>
+        </p:txBody>
+      </p:sp>
+      <p:sp>
+        <p:nvSpPr>
+          <p:cNvPr id="51" name="Text 49"/>
+          <p:cNvSpPr/>
+          <p:nvPr/>
+        </p:nvSpPr>
+        <p:spPr>
+          <a:xfrm>
+            <a:off x="502920" y="5879592"/>
+            <a:ext cx="8138160" cy="292608"/>
           </a:xfrm>
           <a:prstGeom prst="rect">
             <a:avLst/>
@@ -12620,23 +12952,23 @@
               <a:buNone/>
             </a:pPr>
             <a:r>
-              <a:rPr lang="en-US" sz="1330" dirty="0">
-                <a:solidFill>
-                  <a:srgbClr val="1A1A1A"/>
-                </a:solidFill>
-                <a:latin typeface="Cambria" pitchFamily="34" charset="0"/>
-                <a:ea typeface="Cambria" pitchFamily="34" charset="-122"/>
-                <a:cs typeface="Cambria" pitchFamily="34" charset="-120"/>
-              </a:rPr>
-              <a:t>[+0,46; +0,86]</a:t>
-            </a:r>
-            <a:endParaRPr lang="en-US" sz="1330" dirty="0"/>
-          </a:p>
-        </p:txBody>
-      </p:sp>
-      <p:sp>
-        <p:nvSpPr>
-          <p:cNvPr id="42" name="Shape 40"/>
+              <a:rPr lang="en-US" sz="1280" b="1" dirty="0">
+                <a:solidFill>
+                  <a:srgbClr val="25194B"/>
+                </a:solidFill>
+                <a:latin typeface="Cambria" pitchFamily="34" charset="0"/>
+                <a:ea typeface="Cambria" pitchFamily="34" charset="-122"/>
+                <a:cs typeface="Cambria" pitchFamily="34" charset="-120"/>
+              </a:rPr>
+              <a:t>6/6 độ đo có KTC nằm trên 0; METEOR chưa có KTC.</a:t>
+            </a:r>
+            <a:endParaRPr lang="en-US" sz="1280" dirty="0"/>
+          </a:p>
+        </p:txBody>
+      </p:sp>
+      <p:sp>
+        <p:nvSpPr>
+          <p:cNvPr id="52" name="Shape 50"/>
           <p:cNvSpPr/>
           <p:nvPr/>
         </p:nvSpPr>
@@ -12663,7 +12995,7 @@
       </p:sp>
       <p:sp>
         <p:nvSpPr>
-          <p:cNvPr id="43" name="Shape 41"/>
+          <p:cNvPr id="53" name="Shape 51"/>
           <p:cNvSpPr/>
           <p:nvPr/>
         </p:nvSpPr>
@@ -12690,7 +13022,7 @@
       </p:sp>
       <p:sp>
         <p:nvSpPr>
-          <p:cNvPr id="44" name="Shape 42"/>
+          <p:cNvPr id="54" name="Shape 52"/>
           <p:cNvSpPr/>
           <p:nvPr/>
         </p:nvSpPr>
@@ -12717,7 +13049,7 @@
       </p:sp>
       <p:sp>
         <p:nvSpPr>
-          <p:cNvPr id="45" name="Shape 43"/>
+          <p:cNvPr id="55" name="Shape 53"/>
           <p:cNvSpPr/>
           <p:nvPr/>
         </p:nvSpPr>
@@ -12744,7 +13076,7 @@
       </p:sp>
       <p:sp>
         <p:nvSpPr>
-          <p:cNvPr id="46" name="Text 44"/>
+          <p:cNvPr id="56" name="Text 54"/>
           <p:cNvSpPr/>
           <p:nvPr/>
         </p:nvSpPr>
@@ -12786,7 +13118,7 @@
       </p:sp>
       <p:sp>
         <p:nvSpPr>
-          <p:cNvPr id="47" name="Text 45"/>
+          <p:cNvPr id="57" name="Text 55"/>
           <p:cNvSpPr/>
           <p:nvPr/>
         </p:nvSpPr>
@@ -12828,7 +13160,7 @@
       </p:sp>
       <p:sp>
         <p:nvSpPr>
-          <p:cNvPr id="48" name="Text 46"/>
+          <p:cNvPr id="58" name="Text 56"/>
           <p:cNvSpPr/>
           <p:nvPr/>
         </p:nvSpPr>
@@ -12870,7 +13202,7 @@
       </p:sp>
       <p:sp>
         <p:nvSpPr>
-          <p:cNvPr id="49" name="Text 47"/>
+          <p:cNvPr id="59" name="Text 57"/>
           <p:cNvSpPr/>
           <p:nvPr/>
         </p:nvSpPr>
@@ -13022,26 +13354,28 @@
         <p:spPr>
           <a:xfrm>
             <a:off x="502920" y="877824"/>
-            <a:ext cx="8138160" cy="384048"/>
-          </a:xfrm>
-          <a:prstGeom prst="rect">
-            <a:avLst/>
-          </a:prstGeom>
-          <a:noFill/>
-          <a:ln/>
-        </p:spPr>
-        <p:txBody>
-          <a:bodyPr wrap="square" lIns="0" tIns="0" rIns="0" bIns="0" rtlCol="0" anchor="ctr"/>
-          <a:lstStyle/>
-          <a:p>
-            <a:pPr algn="ctr" indent="0" marL="0">
-              <a:lnSpc>
-                <a:spcPct val="125000"/>
-              </a:lnSpc>
-              <a:buNone/>
-            </a:pPr>
-            <a:r>
-              <a:rPr lang="en-US" sz="1650" b="1" dirty="0">
+            <a:ext cx="8138160" cy="457200"/>
+          </a:xfrm>
+          <a:prstGeom prst="rect">
+            <a:avLst/>
+          </a:prstGeom>
+          <a:noFill/>
+          <a:ln/>
+        </p:spPr>
+        <p:txBody>
+          <a:bodyPr wrap="square" lIns="0" tIns="0" rIns="0" bIns="0" rtlCol="0" anchor="ctr">
+            <a:normAutofit/>
+          </a:bodyPr>
+          <a:lstStyle/>
+          <a:p>
+            <a:pPr algn="ctr" indent="0" marL="0">
+              <a:lnSpc>
+                <a:spcPct val="125000"/>
+              </a:lnSpc>
+              <a:buNone/>
+            </a:pPr>
+            <a:r>
+              <a:rPr lang="en-US" sz="1620" b="1" dirty="0">
                 <a:solidFill>
                   <a:srgbClr val="25194B"/>
                 </a:solidFill>
@@ -13049,95 +13383,24 @@
                 <a:ea typeface="Cambria" pitchFamily="34" charset="-122"/>
                 <a:cs typeface="Cambria" pitchFamily="34" charset="-120"/>
               </a:rPr>
-              <a:t>Chênh lệch executability: GRPO-SPICE − S1</a:t>
-            </a:r>
-            <a:endParaRPr lang="en-US" sz="1650" dirty="0"/>
-          </a:p>
-        </p:txBody>
-      </p:sp>
-      <p:sp>
-        <p:nvSpPr>
-          <p:cNvPr id="5" name="Text 3"/>
-          <p:cNvSpPr/>
-          <p:nvPr/>
-        </p:nvSpPr>
-        <p:spPr>
-          <a:xfrm>
-            <a:off x="960120" y="1499616"/>
-            <a:ext cx="1764792" cy="365760"/>
-          </a:xfrm>
-          <a:prstGeom prst="rect">
-            <a:avLst/>
-          </a:prstGeom>
-          <a:noFill/>
-          <a:ln/>
-        </p:spPr>
-        <p:txBody>
-          <a:bodyPr wrap="square" lIns="0" tIns="0" rIns="0" bIns="0" rtlCol="0" anchor="ctr">
-            <a:normAutofit/>
-          </a:bodyPr>
-          <a:lstStyle/>
-          <a:p>
-            <a:pPr indent="0" marL="0">
-              <a:lnSpc>
-                <a:spcPct val="125000"/>
-              </a:lnSpc>
-              <a:buNone/>
-            </a:pPr>
-            <a:r>
-              <a:rPr lang="en-US" sz="1400" b="1" dirty="0">
-                <a:solidFill>
-                  <a:srgbClr val="1A1A1A"/>
-                </a:solidFill>
-                <a:latin typeface="Cambria" pitchFamily="34" charset="0"/>
-                <a:ea typeface="Cambria" pitchFamily="34" charset="-122"/>
-                <a:cs typeface="Cambria" pitchFamily="34" charset="-120"/>
-              </a:rPr>
-              <a:t>UGround</a:t>
-            </a:r>
-            <a:endParaRPr lang="en-US" sz="1400" dirty="0"/>
-          </a:p>
-        </p:txBody>
-      </p:sp>
-      <p:sp>
-        <p:nvSpPr>
-          <p:cNvPr id="6" name="Shape 4"/>
-          <p:cNvSpPr/>
-          <p:nvPr/>
-        </p:nvSpPr>
-        <p:spPr>
-          <a:xfrm>
-            <a:off x="2834640" y="1572768"/>
-            <a:ext cx="4425696" cy="256032"/>
-          </a:xfrm>
-          <a:prstGeom prst="roundRect">
-            <a:avLst/>
-          </a:prstGeom>
-          <a:solidFill>
-            <a:srgbClr val="ECEAF0"/>
-          </a:solidFill>
-          <a:ln w="12700">
-            <a:solidFill>
-              <a:srgbClr val="ECEAF0">
-                <a:alpha val="0"/>
-              </a:srgbClr>
-            </a:solidFill>
-            <a:prstDash val="solid"/>
-          </a:ln>
-        </p:spPr>
-      </p:sp>
-      <p:sp>
-        <p:nvSpPr>
-          <p:cNvPr id="7" name="Shape 5"/>
-          <p:cNvSpPr/>
-          <p:nvPr/>
-        </p:nvSpPr>
-        <p:spPr>
-          <a:xfrm>
-            <a:off x="2834640" y="1572768"/>
-            <a:ext cx="4035193" cy="256032"/>
-          </a:xfrm>
-          <a:prstGeom prst="roundRect">
+              <a:t>GRPO-SPICE cao hơn S1 khi executability được tính bằng bốn công cụ định vị khác nhau.</a:t>
+            </a:r>
+            <a:endParaRPr lang="en-US" sz="1620" dirty="0"/>
+          </a:p>
+        </p:txBody>
+      </p:sp>
+      <p:sp>
+        <p:nvSpPr>
+          <p:cNvPr id="5" name="Shape 3"/>
+          <p:cNvSpPr/>
+          <p:nvPr/>
+        </p:nvSpPr>
+        <p:spPr>
+          <a:xfrm>
+            <a:off x="1051560" y="1572768"/>
+            <a:ext cx="7040880" cy="502920"/>
+          </a:xfrm>
+          <a:prstGeom prst="rect">
             <a:avLst/>
           </a:prstGeom>
           <a:solidFill>
@@ -13155,14 +13418,102 @@
       </p:sp>
       <p:sp>
         <p:nvSpPr>
+          <p:cNvPr id="6" name="Text 4"/>
+          <p:cNvSpPr/>
+          <p:nvPr/>
+        </p:nvSpPr>
+        <p:spPr>
+          <a:xfrm>
+            <a:off x="1051560" y="1572768"/>
+            <a:ext cx="2834640" cy="502920"/>
+          </a:xfrm>
+          <a:prstGeom prst="rect">
+            <a:avLst/>
+          </a:prstGeom>
+          <a:noFill/>
+          <a:ln/>
+        </p:spPr>
+        <p:txBody>
+          <a:bodyPr wrap="square" lIns="0" tIns="0" rIns="0" bIns="0" rtlCol="0" anchor="ctr">
+            <a:normAutofit/>
+          </a:bodyPr>
+          <a:lstStyle/>
+          <a:p>
+            <a:pPr algn="l" indent="0" marL="0">
+              <a:lnSpc>
+                <a:spcPct val="125000"/>
+              </a:lnSpc>
+              <a:buNone/>
+            </a:pPr>
+            <a:r>
+              <a:rPr lang="en-US" sz="1350" b="1" dirty="0">
+                <a:solidFill>
+                  <a:srgbClr val="FFFFFF"/>
+                </a:solidFill>
+                <a:latin typeface="Cambria" pitchFamily="34" charset="0"/>
+                <a:ea typeface="Cambria" pitchFamily="34" charset="-122"/>
+                <a:cs typeface="Cambria" pitchFamily="34" charset="-120"/>
+              </a:rPr>
+              <a:t>Công cụ</a:t>
+            </a:r>
+            <a:endParaRPr lang="en-US" sz="1350" dirty="0"/>
+          </a:p>
+        </p:txBody>
+      </p:sp>
+      <p:sp>
+        <p:nvSpPr>
+          <p:cNvPr id="7" name="Text 5"/>
+          <p:cNvSpPr/>
+          <p:nvPr/>
+        </p:nvSpPr>
+        <p:spPr>
+          <a:xfrm>
+            <a:off x="3886200" y="1572768"/>
+            <a:ext cx="1828800" cy="502920"/>
+          </a:xfrm>
+          <a:prstGeom prst="rect">
+            <a:avLst/>
+          </a:prstGeom>
+          <a:noFill/>
+          <a:ln/>
+        </p:spPr>
+        <p:txBody>
+          <a:bodyPr wrap="square" lIns="0" tIns="0" rIns="0" bIns="0" rtlCol="0" anchor="ctr">
+            <a:normAutofit/>
+          </a:bodyPr>
+          <a:lstStyle/>
+          <a:p>
+            <a:pPr algn="ctr" indent="0" marL="0">
+              <a:lnSpc>
+                <a:spcPct val="125000"/>
+              </a:lnSpc>
+              <a:buNone/>
+            </a:pPr>
+            <a:r>
+              <a:rPr lang="en-US" sz="1350" b="1" dirty="0">
+                <a:solidFill>
+                  <a:srgbClr val="FFFFFF"/>
+                </a:solidFill>
+                <a:latin typeface="Cambria" pitchFamily="34" charset="0"/>
+                <a:ea typeface="Cambria" pitchFamily="34" charset="-122"/>
+                <a:cs typeface="Cambria" pitchFamily="34" charset="-120"/>
+              </a:rPr>
+              <a:t>GRPO-SPICE − S1</a:t>
+            </a:r>
+            <a:endParaRPr lang="en-US" sz="1350" dirty="0"/>
+          </a:p>
+        </p:txBody>
+      </p:sp>
+      <p:sp>
+        <p:nvSpPr>
           <p:cNvPr id="8" name="Text 6"/>
           <p:cNvSpPr/>
           <p:nvPr/>
         </p:nvSpPr>
         <p:spPr>
           <a:xfrm>
-            <a:off x="7406640" y="1490472"/>
-            <a:ext cx="777240" cy="384048"/>
+            <a:off x="5715000" y="1572768"/>
+            <a:ext cx="2377440" cy="502920"/>
           </a:xfrm>
           <a:prstGeom prst="rect">
             <a:avLst/>
@@ -13176,16 +13527,104 @@
           </a:bodyPr>
           <a:lstStyle/>
           <a:p>
-            <a:pPr algn="r" indent="0" marL="0">
-              <a:lnSpc>
-                <a:spcPct val="125000"/>
-              </a:lnSpc>
-              <a:buNone/>
-            </a:pPr>
-            <a:r>
-              <a:rPr lang="en-US" sz="1400" b="1" dirty="0">
-                <a:solidFill>
-                  <a:srgbClr val="25194B"/>
+            <a:pPr algn="ctr" indent="0" marL="0">
+              <a:lnSpc>
+                <a:spcPct val="125000"/>
+              </a:lnSpc>
+              <a:buNone/>
+            </a:pPr>
+            <a:r>
+              <a:rPr lang="en-US" sz="1350" b="1" dirty="0">
+                <a:solidFill>
+                  <a:srgbClr val="FFFFFF"/>
+                </a:solidFill>
+                <a:latin typeface="Cambria" pitchFamily="34" charset="0"/>
+                <a:ea typeface="Cambria" pitchFamily="34" charset="-122"/>
+                <a:cs typeface="Cambria" pitchFamily="34" charset="-120"/>
+              </a:rPr>
+              <a:t>KTC 95%</a:t>
+            </a:r>
+            <a:endParaRPr lang="en-US" sz="1350" dirty="0"/>
+          </a:p>
+        </p:txBody>
+      </p:sp>
+      <p:sp>
+        <p:nvSpPr>
+          <p:cNvPr id="9" name="Text 7"/>
+          <p:cNvSpPr/>
+          <p:nvPr/>
+        </p:nvSpPr>
+        <p:spPr>
+          <a:xfrm>
+            <a:off x="1051560" y="2075688"/>
+            <a:ext cx="2834640" cy="621792"/>
+          </a:xfrm>
+          <a:prstGeom prst="rect">
+            <a:avLst/>
+          </a:prstGeom>
+          <a:noFill/>
+          <a:ln/>
+        </p:spPr>
+        <p:txBody>
+          <a:bodyPr wrap="square" lIns="0" tIns="0" rIns="0" bIns="0" rtlCol="0" anchor="ctr">
+            <a:normAutofit/>
+          </a:bodyPr>
+          <a:lstStyle/>
+          <a:p>
+            <a:pPr algn="l" indent="0" marL="0">
+              <a:lnSpc>
+                <a:spcPct val="125000"/>
+              </a:lnSpc>
+              <a:buNone/>
+            </a:pPr>
+            <a:r>
+              <a:rPr lang="en-US" sz="1370" dirty="0">
+                <a:solidFill>
+                  <a:srgbClr val="1A1A1A"/>
+                </a:solidFill>
+                <a:latin typeface="Cambria" pitchFamily="34" charset="0"/>
+                <a:ea typeface="Cambria" pitchFamily="34" charset="-122"/>
+                <a:cs typeface="Cambria" pitchFamily="34" charset="-120"/>
+              </a:rPr>
+              <a:t>UGround</a:t>
+            </a:r>
+            <a:endParaRPr lang="en-US" sz="1370" dirty="0"/>
+          </a:p>
+        </p:txBody>
+      </p:sp>
+      <p:sp>
+        <p:nvSpPr>
+          <p:cNvPr id="10" name="Text 8"/>
+          <p:cNvSpPr/>
+          <p:nvPr/>
+        </p:nvSpPr>
+        <p:spPr>
+          <a:xfrm>
+            <a:off x="3886200" y="2075688"/>
+            <a:ext cx="1828800" cy="621792"/>
+          </a:xfrm>
+          <a:prstGeom prst="rect">
+            <a:avLst/>
+          </a:prstGeom>
+          <a:noFill/>
+          <a:ln/>
+        </p:spPr>
+        <p:txBody>
+          <a:bodyPr wrap="square" lIns="0" tIns="0" rIns="0" bIns="0" rtlCol="0" anchor="ctr">
+            <a:normAutofit/>
+          </a:bodyPr>
+          <a:lstStyle/>
+          <a:p>
+            <a:pPr algn="ctr" indent="0" marL="0">
+              <a:lnSpc>
+                <a:spcPct val="125000"/>
+              </a:lnSpc>
+              <a:buNone/>
+            </a:pPr>
+            <a:r>
+              <a:rPr lang="en-US" sz="1370" b="1" dirty="0">
+                <a:solidFill>
+                  <a:srgbClr val="4F417A"/>
                 </a:solidFill>
                 <a:latin typeface="Cambria" pitchFamily="34" charset="0"/>
                 <a:ea typeface="Cambria" pitchFamily="34" charset="-122"/>
@@ -13193,20 +13632,20 @@
               </a:rPr>
               <a:t>+1,55</a:t>
             </a:r>
-            <a:endParaRPr lang="en-US" sz="1400" dirty="0"/>
-          </a:p>
-        </p:txBody>
-      </p:sp>
-      <p:sp>
-        <p:nvSpPr>
-          <p:cNvPr id="9" name="Text 7"/>
-          <p:cNvSpPr/>
-          <p:nvPr/>
-        </p:nvSpPr>
-        <p:spPr>
-          <a:xfrm>
-            <a:off x="960120" y="2185416"/>
-            <a:ext cx="1764792" cy="365760"/>
+            <a:endParaRPr lang="en-US" sz="1370" dirty="0"/>
+          </a:p>
+        </p:txBody>
+      </p:sp>
+      <p:sp>
+        <p:nvSpPr>
+          <p:cNvPr id="11" name="Text 9"/>
+          <p:cNvSpPr/>
+          <p:nvPr/>
+        </p:nvSpPr>
+        <p:spPr>
+          <a:xfrm>
+            <a:off x="5715000" y="2075688"/>
+            <a:ext cx="2377440" cy="621792"/>
           </a:xfrm>
           <a:prstGeom prst="rect">
             <a:avLst/>
@@ -13220,14 +13659,14 @@
           </a:bodyPr>
           <a:lstStyle/>
           <a:p>
-            <a:pPr indent="0" marL="0">
-              <a:lnSpc>
-                <a:spcPct val="125000"/>
-              </a:lnSpc>
-              <a:buNone/>
-            </a:pPr>
-            <a:r>
-              <a:rPr lang="en-US" sz="1400" b="1" dirty="0">
+            <a:pPr algn="ctr" indent="0" marL="0">
+              <a:lnSpc>
+                <a:spcPct val="125000"/>
+              </a:lnSpc>
+              <a:buNone/>
+            </a:pPr>
+            <a:r>
+              <a:rPr lang="en-US" sz="1370" dirty="0">
                 <a:solidFill>
                   <a:srgbClr val="1A1A1A"/>
                 </a:solidFill>
@@ -13235,32 +13674,609 @@
                 <a:ea typeface="Cambria" pitchFamily="34" charset="-122"/>
                 <a:cs typeface="Cambria" pitchFamily="34" charset="-120"/>
               </a:rPr>
+              <a:t>[+0,80; +2,33]</a:t>
+            </a:r>
+            <a:endParaRPr lang="en-US" sz="1370" dirty="0"/>
+          </a:p>
+        </p:txBody>
+      </p:sp>
+      <p:sp>
+        <p:nvSpPr>
+          <p:cNvPr id="12" name="Shape 10"/>
+          <p:cNvSpPr/>
+          <p:nvPr/>
+        </p:nvSpPr>
+        <p:spPr>
+          <a:xfrm>
+            <a:off x="1051560" y="2697480"/>
+            <a:ext cx="7040880" cy="0"/>
+          </a:xfrm>
+          <a:prstGeom prst="line">
+            <a:avLst/>
+          </a:prstGeom>
+          <a:noFill/>
+          <a:ln w="12700">
+            <a:solidFill>
+              <a:srgbClr val="D9D6DF"/>
+            </a:solidFill>
+            <a:prstDash val="solid"/>
+            <a:tailEnd type="none"/>
+          </a:ln>
+        </p:spPr>
+      </p:sp>
+      <p:sp>
+        <p:nvSpPr>
+          <p:cNvPr id="13" name="Text 11"/>
+          <p:cNvSpPr/>
+          <p:nvPr/>
+        </p:nvSpPr>
+        <p:spPr>
+          <a:xfrm>
+            <a:off x="1051560" y="2697480"/>
+            <a:ext cx="2834640" cy="621792"/>
+          </a:xfrm>
+          <a:prstGeom prst="rect">
+            <a:avLst/>
+          </a:prstGeom>
+          <a:noFill/>
+          <a:ln/>
+        </p:spPr>
+        <p:txBody>
+          <a:bodyPr wrap="square" lIns="0" tIns="0" rIns="0" bIns="0" rtlCol="0" anchor="ctr">
+            <a:normAutofit/>
+          </a:bodyPr>
+          <a:lstStyle/>
+          <a:p>
+            <a:pPr algn="l" indent="0" marL="0">
+              <a:lnSpc>
+                <a:spcPct val="125000"/>
+              </a:lnSpc>
+              <a:buNone/>
+            </a:pPr>
+            <a:r>
+              <a:rPr lang="en-US" sz="1370" dirty="0">
+                <a:solidFill>
+                  <a:srgbClr val="1A1A1A"/>
+                </a:solidFill>
+                <a:latin typeface="Cambria" pitchFamily="34" charset="0"/>
+                <a:ea typeface="Cambria" pitchFamily="34" charset="-122"/>
+                <a:cs typeface="Cambria" pitchFamily="34" charset="-120"/>
+              </a:rPr>
               <a:t>UI-Venus</a:t>
             </a:r>
-            <a:endParaRPr lang="en-US" sz="1400" dirty="0"/>
-          </a:p>
-        </p:txBody>
-      </p:sp>
-      <p:sp>
-        <p:nvSpPr>
-          <p:cNvPr id="10" name="Shape 8"/>
-          <p:cNvSpPr/>
-          <p:nvPr/>
-        </p:nvSpPr>
-        <p:spPr>
-          <a:xfrm>
-            <a:off x="2834640" y="2258568"/>
-            <a:ext cx="4425696" cy="256032"/>
+            <a:endParaRPr lang="en-US" sz="1370" dirty="0"/>
+          </a:p>
+        </p:txBody>
+      </p:sp>
+      <p:sp>
+        <p:nvSpPr>
+          <p:cNvPr id="14" name="Text 12"/>
+          <p:cNvSpPr/>
+          <p:nvPr/>
+        </p:nvSpPr>
+        <p:spPr>
+          <a:xfrm>
+            <a:off x="3886200" y="2697480"/>
+            <a:ext cx="1828800" cy="621792"/>
+          </a:xfrm>
+          <a:prstGeom prst="rect">
+            <a:avLst/>
+          </a:prstGeom>
+          <a:noFill/>
+          <a:ln/>
+        </p:spPr>
+        <p:txBody>
+          <a:bodyPr wrap="square" lIns="0" tIns="0" rIns="0" bIns="0" rtlCol="0" anchor="ctr">
+            <a:normAutofit/>
+          </a:bodyPr>
+          <a:lstStyle/>
+          <a:p>
+            <a:pPr algn="ctr" indent="0" marL="0">
+              <a:lnSpc>
+                <a:spcPct val="125000"/>
+              </a:lnSpc>
+              <a:buNone/>
+            </a:pPr>
+            <a:r>
+              <a:rPr lang="en-US" sz="1370" b="1" dirty="0">
+                <a:solidFill>
+                  <a:srgbClr val="4F417A"/>
+                </a:solidFill>
+                <a:latin typeface="Cambria" pitchFamily="34" charset="0"/>
+                <a:ea typeface="Cambria" pitchFamily="34" charset="-122"/>
+                <a:cs typeface="Cambria" pitchFamily="34" charset="-120"/>
+              </a:rPr>
+              <a:t>+1,55</a:t>
+            </a:r>
+            <a:endParaRPr lang="en-US" sz="1370" dirty="0"/>
+          </a:p>
+        </p:txBody>
+      </p:sp>
+      <p:sp>
+        <p:nvSpPr>
+          <p:cNvPr id="15" name="Text 13"/>
+          <p:cNvSpPr/>
+          <p:nvPr/>
+        </p:nvSpPr>
+        <p:spPr>
+          <a:xfrm>
+            <a:off x="5715000" y="2697480"/>
+            <a:ext cx="2377440" cy="621792"/>
+          </a:xfrm>
+          <a:prstGeom prst="rect">
+            <a:avLst/>
+          </a:prstGeom>
+          <a:noFill/>
+          <a:ln/>
+        </p:spPr>
+        <p:txBody>
+          <a:bodyPr wrap="square" lIns="0" tIns="0" rIns="0" bIns="0" rtlCol="0" anchor="ctr">
+            <a:normAutofit/>
+          </a:bodyPr>
+          <a:lstStyle/>
+          <a:p>
+            <a:pPr algn="ctr" indent="0" marL="0">
+              <a:lnSpc>
+                <a:spcPct val="125000"/>
+              </a:lnSpc>
+              <a:buNone/>
+            </a:pPr>
+            <a:r>
+              <a:rPr lang="en-US" sz="1370" dirty="0">
+                <a:solidFill>
+                  <a:srgbClr val="1A1A1A"/>
+                </a:solidFill>
+                <a:latin typeface="Cambria" pitchFamily="34" charset="0"/>
+                <a:ea typeface="Cambria" pitchFamily="34" charset="-122"/>
+                <a:cs typeface="Cambria" pitchFamily="34" charset="-120"/>
+              </a:rPr>
+              <a:t>[+0,82; +2,30]</a:t>
+            </a:r>
+            <a:endParaRPr lang="en-US" sz="1370" dirty="0"/>
+          </a:p>
+        </p:txBody>
+      </p:sp>
+      <p:sp>
+        <p:nvSpPr>
+          <p:cNvPr id="16" name="Shape 14"/>
+          <p:cNvSpPr/>
+          <p:nvPr/>
+        </p:nvSpPr>
+        <p:spPr>
+          <a:xfrm>
+            <a:off x="1051560" y="3319272"/>
+            <a:ext cx="7040880" cy="0"/>
+          </a:xfrm>
+          <a:prstGeom prst="line">
+            <a:avLst/>
+          </a:prstGeom>
+          <a:noFill/>
+          <a:ln w="12700">
+            <a:solidFill>
+              <a:srgbClr val="D9D6DF"/>
+            </a:solidFill>
+            <a:prstDash val="solid"/>
+            <a:tailEnd type="none"/>
+          </a:ln>
+        </p:spPr>
+      </p:sp>
+      <p:sp>
+        <p:nvSpPr>
+          <p:cNvPr id="17" name="Text 15"/>
+          <p:cNvSpPr/>
+          <p:nvPr/>
+        </p:nvSpPr>
+        <p:spPr>
+          <a:xfrm>
+            <a:off x="1051560" y="3319272"/>
+            <a:ext cx="2834640" cy="621792"/>
+          </a:xfrm>
+          <a:prstGeom prst="rect">
+            <a:avLst/>
+          </a:prstGeom>
+          <a:noFill/>
+          <a:ln/>
+        </p:spPr>
+        <p:txBody>
+          <a:bodyPr wrap="square" lIns="0" tIns="0" rIns="0" bIns="0" rtlCol="0" anchor="ctr">
+            <a:normAutofit/>
+          </a:bodyPr>
+          <a:lstStyle/>
+          <a:p>
+            <a:pPr algn="l" indent="0" marL="0">
+              <a:lnSpc>
+                <a:spcPct val="125000"/>
+              </a:lnSpc>
+              <a:buNone/>
+            </a:pPr>
+            <a:r>
+              <a:rPr lang="en-US" sz="1370" dirty="0">
+                <a:solidFill>
+                  <a:srgbClr val="1A1A1A"/>
+                </a:solidFill>
+                <a:latin typeface="Cambria" pitchFamily="34" charset="0"/>
+                <a:ea typeface="Cambria" pitchFamily="34" charset="-122"/>
+                <a:cs typeface="Cambria" pitchFamily="34" charset="-120"/>
+              </a:rPr>
+              <a:t>Phi-Ground</a:t>
+            </a:r>
+            <a:endParaRPr lang="en-US" sz="1370" dirty="0"/>
+          </a:p>
+        </p:txBody>
+      </p:sp>
+      <p:sp>
+        <p:nvSpPr>
+          <p:cNvPr id="18" name="Text 16"/>
+          <p:cNvSpPr/>
+          <p:nvPr/>
+        </p:nvSpPr>
+        <p:spPr>
+          <a:xfrm>
+            <a:off x="3886200" y="3319272"/>
+            <a:ext cx="1828800" cy="621792"/>
+          </a:xfrm>
+          <a:prstGeom prst="rect">
+            <a:avLst/>
+          </a:prstGeom>
+          <a:noFill/>
+          <a:ln/>
+        </p:spPr>
+        <p:txBody>
+          <a:bodyPr wrap="square" lIns="0" tIns="0" rIns="0" bIns="0" rtlCol="0" anchor="ctr">
+            <a:normAutofit/>
+          </a:bodyPr>
+          <a:lstStyle/>
+          <a:p>
+            <a:pPr algn="ctr" indent="0" marL="0">
+              <a:lnSpc>
+                <a:spcPct val="125000"/>
+              </a:lnSpc>
+              <a:buNone/>
+            </a:pPr>
+            <a:r>
+              <a:rPr lang="en-US" sz="1370" b="1" dirty="0">
+                <a:solidFill>
+                  <a:srgbClr val="4F417A"/>
+                </a:solidFill>
+                <a:latin typeface="Cambria" pitchFamily="34" charset="0"/>
+                <a:ea typeface="Cambria" pitchFamily="34" charset="-122"/>
+                <a:cs typeface="Cambria" pitchFamily="34" charset="-120"/>
+              </a:rPr>
+              <a:t>+0,78</a:t>
+            </a:r>
+            <a:endParaRPr lang="en-US" sz="1370" dirty="0"/>
+          </a:p>
+        </p:txBody>
+      </p:sp>
+      <p:sp>
+        <p:nvSpPr>
+          <p:cNvPr id="19" name="Text 17"/>
+          <p:cNvSpPr/>
+          <p:nvPr/>
+        </p:nvSpPr>
+        <p:spPr>
+          <a:xfrm>
+            <a:off x="5715000" y="3319272"/>
+            <a:ext cx="2377440" cy="621792"/>
+          </a:xfrm>
+          <a:prstGeom prst="rect">
+            <a:avLst/>
+          </a:prstGeom>
+          <a:noFill/>
+          <a:ln/>
+        </p:spPr>
+        <p:txBody>
+          <a:bodyPr wrap="square" lIns="0" tIns="0" rIns="0" bIns="0" rtlCol="0" anchor="ctr">
+            <a:normAutofit/>
+          </a:bodyPr>
+          <a:lstStyle/>
+          <a:p>
+            <a:pPr algn="ctr" indent="0" marL="0">
+              <a:lnSpc>
+                <a:spcPct val="125000"/>
+              </a:lnSpc>
+              <a:buNone/>
+            </a:pPr>
+            <a:r>
+              <a:rPr lang="en-US" sz="1370" dirty="0">
+                <a:solidFill>
+                  <a:srgbClr val="1A1A1A"/>
+                </a:solidFill>
+                <a:latin typeface="Cambria" pitchFamily="34" charset="0"/>
+                <a:ea typeface="Cambria" pitchFamily="34" charset="-122"/>
+                <a:cs typeface="Cambria" pitchFamily="34" charset="-120"/>
+              </a:rPr>
+              <a:t>[+0,05; +1,51]</a:t>
+            </a:r>
+            <a:endParaRPr lang="en-US" sz="1370" dirty="0"/>
+          </a:p>
+        </p:txBody>
+      </p:sp>
+      <p:sp>
+        <p:nvSpPr>
+          <p:cNvPr id="20" name="Shape 18"/>
+          <p:cNvSpPr/>
+          <p:nvPr/>
+        </p:nvSpPr>
+        <p:spPr>
+          <a:xfrm>
+            <a:off x="1051560" y="3941064"/>
+            <a:ext cx="7040880" cy="0"/>
+          </a:xfrm>
+          <a:prstGeom prst="line">
+            <a:avLst/>
+          </a:prstGeom>
+          <a:noFill/>
+          <a:ln w="12700">
+            <a:solidFill>
+              <a:srgbClr val="D9D6DF"/>
+            </a:solidFill>
+            <a:prstDash val="solid"/>
+            <a:tailEnd type="none"/>
+          </a:ln>
+        </p:spPr>
+      </p:sp>
+      <p:sp>
+        <p:nvSpPr>
+          <p:cNvPr id="21" name="Text 19"/>
+          <p:cNvSpPr/>
+          <p:nvPr/>
+        </p:nvSpPr>
+        <p:spPr>
+          <a:xfrm>
+            <a:off x="1051560" y="3941064"/>
+            <a:ext cx="2834640" cy="621792"/>
+          </a:xfrm>
+          <a:prstGeom prst="rect">
+            <a:avLst/>
+          </a:prstGeom>
+          <a:noFill/>
+          <a:ln/>
+        </p:spPr>
+        <p:txBody>
+          <a:bodyPr wrap="square" lIns="0" tIns="0" rIns="0" bIns="0" rtlCol="0" anchor="ctr">
+            <a:normAutofit/>
+          </a:bodyPr>
+          <a:lstStyle/>
+          <a:p>
+            <a:pPr algn="l" indent="0" marL="0">
+              <a:lnSpc>
+                <a:spcPct val="125000"/>
+              </a:lnSpc>
+              <a:buNone/>
+            </a:pPr>
+            <a:r>
+              <a:rPr lang="en-US" sz="1370" dirty="0">
+                <a:solidFill>
+                  <a:srgbClr val="1A1A1A"/>
+                </a:solidFill>
+                <a:latin typeface="Cambria" pitchFamily="34" charset="0"/>
+                <a:ea typeface="Cambria" pitchFamily="34" charset="-122"/>
+                <a:cs typeface="Cambria" pitchFamily="34" charset="-120"/>
+              </a:rPr>
+              <a:t>Phi-4</a:t>
+            </a:r>
+            <a:endParaRPr lang="en-US" sz="1370" dirty="0"/>
+          </a:p>
+        </p:txBody>
+      </p:sp>
+      <p:sp>
+        <p:nvSpPr>
+          <p:cNvPr id="22" name="Text 20"/>
+          <p:cNvSpPr/>
+          <p:nvPr/>
+        </p:nvSpPr>
+        <p:spPr>
+          <a:xfrm>
+            <a:off x="3886200" y="3941064"/>
+            <a:ext cx="1828800" cy="621792"/>
+          </a:xfrm>
+          <a:prstGeom prst="rect">
+            <a:avLst/>
+          </a:prstGeom>
+          <a:noFill/>
+          <a:ln/>
+        </p:spPr>
+        <p:txBody>
+          <a:bodyPr wrap="square" lIns="0" tIns="0" rIns="0" bIns="0" rtlCol="0" anchor="ctr">
+            <a:normAutofit/>
+          </a:bodyPr>
+          <a:lstStyle/>
+          <a:p>
+            <a:pPr algn="ctr" indent="0" marL="0">
+              <a:lnSpc>
+                <a:spcPct val="125000"/>
+              </a:lnSpc>
+              <a:buNone/>
+            </a:pPr>
+            <a:r>
+              <a:rPr lang="en-US" sz="1370" b="1" dirty="0">
+                <a:solidFill>
+                  <a:srgbClr val="4F417A"/>
+                </a:solidFill>
+                <a:latin typeface="Cambria" pitchFamily="34" charset="0"/>
+                <a:ea typeface="Cambria" pitchFamily="34" charset="-122"/>
+                <a:cs typeface="Cambria" pitchFamily="34" charset="-120"/>
+              </a:rPr>
+              <a:t>+0,69</a:t>
+            </a:r>
+            <a:endParaRPr lang="en-US" sz="1370" dirty="0"/>
+          </a:p>
+        </p:txBody>
+      </p:sp>
+      <p:sp>
+        <p:nvSpPr>
+          <p:cNvPr id="23" name="Text 21"/>
+          <p:cNvSpPr/>
+          <p:nvPr/>
+        </p:nvSpPr>
+        <p:spPr>
+          <a:xfrm>
+            <a:off x="5715000" y="3941064"/>
+            <a:ext cx="2377440" cy="621792"/>
+          </a:xfrm>
+          <a:prstGeom prst="rect">
+            <a:avLst/>
+          </a:prstGeom>
+          <a:noFill/>
+          <a:ln/>
+        </p:spPr>
+        <p:txBody>
+          <a:bodyPr wrap="square" lIns="0" tIns="0" rIns="0" bIns="0" rtlCol="0" anchor="ctr">
+            <a:normAutofit/>
+          </a:bodyPr>
+          <a:lstStyle/>
+          <a:p>
+            <a:pPr algn="ctr" indent="0" marL="0">
+              <a:lnSpc>
+                <a:spcPct val="125000"/>
+              </a:lnSpc>
+              <a:buNone/>
+            </a:pPr>
+            <a:r>
+              <a:rPr lang="en-US" sz="1370" dirty="0">
+                <a:solidFill>
+                  <a:srgbClr val="1A1A1A"/>
+                </a:solidFill>
+                <a:latin typeface="Cambria" pitchFamily="34" charset="0"/>
+                <a:ea typeface="Cambria" pitchFamily="34" charset="-122"/>
+                <a:cs typeface="Cambria" pitchFamily="34" charset="-120"/>
+              </a:rPr>
+              <a:t>[+0,02; +1,40]</a:t>
+            </a:r>
+            <a:endParaRPr lang="en-US" sz="1370" dirty="0"/>
+          </a:p>
+        </p:txBody>
+      </p:sp>
+      <p:sp>
+        <p:nvSpPr>
+          <p:cNvPr id="24" name="Shape 22"/>
+          <p:cNvSpPr/>
+          <p:nvPr/>
+        </p:nvSpPr>
+        <p:spPr>
+          <a:xfrm>
+            <a:off x="1005840" y="4663440"/>
+            <a:ext cx="7132320" cy="768096"/>
           </a:xfrm>
           <a:prstGeom prst="roundRect">
             <a:avLst/>
           </a:prstGeom>
           <a:solidFill>
-            <a:srgbClr val="ECEAF0"/>
+            <a:srgbClr val="F3F2F5"/>
           </a:solidFill>
           <a:ln w="12700">
             <a:solidFill>
-              <a:srgbClr val="ECEAF0">
+              <a:srgbClr val="4F417A"/>
+            </a:solidFill>
+            <a:prstDash val="solid"/>
+          </a:ln>
+        </p:spPr>
+      </p:sp>
+      <p:sp>
+        <p:nvSpPr>
+          <p:cNvPr id="25" name="Text 23"/>
+          <p:cNvSpPr/>
+          <p:nvPr/>
+        </p:nvSpPr>
+        <p:spPr>
+          <a:xfrm>
+            <a:off x="1207008" y="4663440"/>
+            <a:ext cx="6729984" cy="768096"/>
+          </a:xfrm>
+          <a:prstGeom prst="rect">
+            <a:avLst/>
+          </a:prstGeom>
+          <a:noFill/>
+          <a:ln/>
+        </p:spPr>
+        <p:txBody>
+          <a:bodyPr wrap="square" lIns="0" tIns="0" rIns="0" bIns="0" rtlCol="0" anchor="ctr"/>
+          <a:lstStyle/>
+          <a:p>
+            <a:pPr algn="ctr" indent="0" marL="0">
+              <a:lnSpc>
+                <a:spcPct val="125000"/>
+              </a:lnSpc>
+              <a:buNone/>
+            </a:pPr>
+            <a:r>
+              <a:rPr lang="en-US" sz="1620" b="1" dirty="0">
+                <a:solidFill>
+                  <a:srgbClr val="25194B"/>
+                </a:solidFill>
+                <a:latin typeface="Cambria" pitchFamily="34" charset="0"/>
+                <a:ea typeface="Cambria" pitchFamily="34" charset="-122"/>
+                <a:cs typeface="Cambria" pitchFamily="34" charset="-120"/>
+              </a:rPr>
+              <a:t>Cả 4 khoảng tin cậy đều nằm trên 0.</a:t>
+            </a:r>
+            <a:endParaRPr lang="en-US" sz="1620" dirty="0"/>
+          </a:p>
+        </p:txBody>
+      </p:sp>
+      <p:sp>
+        <p:nvSpPr>
+          <p:cNvPr id="26" name="Text 24"/>
+          <p:cNvSpPr/>
+          <p:nvPr/>
+        </p:nvSpPr>
+        <p:spPr>
+          <a:xfrm>
+            <a:off x="502920" y="5623560"/>
+            <a:ext cx="8138160" cy="310896"/>
+          </a:xfrm>
+          <a:prstGeom prst="rect">
+            <a:avLst/>
+          </a:prstGeom>
+          <a:noFill/>
+          <a:ln/>
+        </p:spPr>
+        <p:txBody>
+          <a:bodyPr wrap="square" lIns="0" tIns="0" rIns="0" bIns="0" rtlCol="0" anchor="ctr"/>
+          <a:lstStyle/>
+          <a:p>
+            <a:pPr algn="ctr" indent="0" marL="0">
+              <a:lnSpc>
+                <a:spcPct val="125000"/>
+              </a:lnSpc>
+              <a:buNone/>
+            </a:pPr>
+            <a:r>
+              <a:rPr lang="en-US" sz="1280" dirty="0">
+                <a:solidFill>
+                  <a:srgbClr val="5A5A66"/>
+                </a:solidFill>
+                <a:latin typeface="Cambria" pitchFamily="34" charset="0"/>
+                <a:ea typeface="Cambria" pitchFamily="34" charset="-122"/>
+                <a:cs typeface="Cambria" pitchFamily="34" charset="-120"/>
+              </a:rPr>
+              <a:t>Phi-Ground và Phi-4 nằm ngoài họ Qwen.</a:t>
+            </a:r>
+            <a:endParaRPr lang="en-US" sz="1280" dirty="0"/>
+          </a:p>
+        </p:txBody>
+      </p:sp>
+      <p:sp>
+        <p:nvSpPr>
+          <p:cNvPr id="27" name="Shape 25"/>
+          <p:cNvSpPr/>
+          <p:nvPr/>
+        </p:nvSpPr>
+        <p:spPr>
+          <a:xfrm>
+            <a:off x="0" y="6620256"/>
+            <a:ext cx="2743200" cy="237744"/>
+          </a:xfrm>
+          <a:prstGeom prst="rect">
+            <a:avLst/>
+          </a:prstGeom>
+          <a:solidFill>
+            <a:srgbClr val="191132"/>
+          </a:solidFill>
+          <a:ln w="12700">
+            <a:solidFill>
+              <a:srgbClr val="191132">
                 <a:alpha val="0"/>
               </a:srgbClr>
             </a:solidFill>
@@ -13270,16 +14286,16 @@
       </p:sp>
       <p:sp>
         <p:nvSpPr>
-          <p:cNvPr id="11" name="Shape 9"/>
-          <p:cNvSpPr/>
-          <p:nvPr/>
-        </p:nvSpPr>
-        <p:spPr>
-          <a:xfrm>
-            <a:off x="2834640" y="2258568"/>
-            <a:ext cx="4035193" cy="256032"/>
-          </a:xfrm>
-          <a:prstGeom prst="roundRect">
+          <p:cNvPr id="28" name="Shape 26"/>
+          <p:cNvSpPr/>
+          <p:nvPr/>
+        </p:nvSpPr>
+        <p:spPr>
+          <a:xfrm>
+            <a:off x="2743200" y="6620256"/>
+            <a:ext cx="3383280" cy="237744"/>
+          </a:xfrm>
+          <a:prstGeom prst="rect">
             <a:avLst/>
           </a:prstGeom>
           <a:solidFill>
@@ -13297,131 +14313,16 @@
       </p:sp>
       <p:sp>
         <p:nvSpPr>
-          <p:cNvPr id="12" name="Text 10"/>
-          <p:cNvSpPr/>
-          <p:nvPr/>
-        </p:nvSpPr>
-        <p:spPr>
-          <a:xfrm>
-            <a:off x="7406640" y="2176272"/>
-            <a:ext cx="777240" cy="384048"/>
-          </a:xfrm>
-          <a:prstGeom prst="rect">
-            <a:avLst/>
-          </a:prstGeom>
-          <a:noFill/>
-          <a:ln/>
-        </p:spPr>
-        <p:txBody>
-          <a:bodyPr wrap="square" lIns="0" tIns="0" rIns="0" bIns="0" rtlCol="0" anchor="ctr">
-            <a:normAutofit/>
-          </a:bodyPr>
-          <a:lstStyle/>
-          <a:p>
-            <a:pPr algn="r" indent="0" marL="0">
-              <a:lnSpc>
-                <a:spcPct val="125000"/>
-              </a:lnSpc>
-              <a:buNone/>
-            </a:pPr>
-            <a:r>
-              <a:rPr lang="en-US" sz="1400" b="1" dirty="0">
-                <a:solidFill>
-                  <a:srgbClr val="25194B"/>
-                </a:solidFill>
-                <a:latin typeface="Cambria" pitchFamily="34" charset="0"/>
-                <a:ea typeface="Cambria" pitchFamily="34" charset="-122"/>
-                <a:cs typeface="Cambria" pitchFamily="34" charset="-120"/>
-              </a:rPr>
-              <a:t>+1,55</a:t>
-            </a:r>
-            <a:endParaRPr lang="en-US" sz="1400" dirty="0"/>
-          </a:p>
-        </p:txBody>
-      </p:sp>
-      <p:sp>
-        <p:nvSpPr>
-          <p:cNvPr id="13" name="Text 11"/>
-          <p:cNvSpPr/>
-          <p:nvPr/>
-        </p:nvSpPr>
-        <p:spPr>
-          <a:xfrm>
-            <a:off x="960120" y="2871216"/>
-            <a:ext cx="1764792" cy="365760"/>
-          </a:xfrm>
-          <a:prstGeom prst="rect">
-            <a:avLst/>
-          </a:prstGeom>
-          <a:noFill/>
-          <a:ln/>
-        </p:spPr>
-        <p:txBody>
-          <a:bodyPr wrap="square" lIns="0" tIns="0" rIns="0" bIns="0" rtlCol="0" anchor="ctr">
-            <a:normAutofit/>
-          </a:bodyPr>
-          <a:lstStyle/>
-          <a:p>
-            <a:pPr indent="0" marL="0">
-              <a:lnSpc>
-                <a:spcPct val="125000"/>
-              </a:lnSpc>
-              <a:buNone/>
-            </a:pPr>
-            <a:r>
-              <a:rPr lang="en-US" sz="1400" dirty="0">
-                <a:solidFill>
-                  <a:srgbClr val="1A1A1A"/>
-                </a:solidFill>
-                <a:latin typeface="Cambria" pitchFamily="34" charset="0"/>
-                <a:ea typeface="Cambria" pitchFamily="34" charset="-122"/>
-                <a:cs typeface="Cambria" pitchFamily="34" charset="-120"/>
-              </a:rPr>
-              <a:t>Phi-Ground</a:t>
-            </a:r>
-            <a:endParaRPr lang="en-US" sz="1400" dirty="0"/>
-          </a:p>
-        </p:txBody>
-      </p:sp>
-      <p:sp>
-        <p:nvSpPr>
-          <p:cNvPr id="14" name="Shape 12"/>
-          <p:cNvSpPr/>
-          <p:nvPr/>
-        </p:nvSpPr>
-        <p:spPr>
-          <a:xfrm>
-            <a:off x="2834640" y="2944368"/>
-            <a:ext cx="4425696" cy="256032"/>
-          </a:xfrm>
-          <a:prstGeom prst="roundRect">
-            <a:avLst/>
-          </a:prstGeom>
-          <a:solidFill>
-            <a:srgbClr val="ECEAF0"/>
-          </a:solidFill>
-          <a:ln w="12700">
-            <a:solidFill>
-              <a:srgbClr val="ECEAF0">
-                <a:alpha val="0"/>
-              </a:srgbClr>
-            </a:solidFill>
-            <a:prstDash val="solid"/>
-          </a:ln>
-        </p:spPr>
-      </p:sp>
-      <p:sp>
-        <p:nvSpPr>
-          <p:cNvPr id="15" name="Shape 13"/>
-          <p:cNvSpPr/>
-          <p:nvPr/>
-        </p:nvSpPr>
-        <p:spPr>
-          <a:xfrm>
-            <a:off x="2834640" y="2944368"/>
-            <a:ext cx="2030613" cy="256032"/>
-          </a:xfrm>
-          <a:prstGeom prst="roundRect">
+          <p:cNvPr id="29" name="Shape 27"/>
+          <p:cNvSpPr/>
+          <p:nvPr/>
+        </p:nvSpPr>
+        <p:spPr>
+          <a:xfrm>
+            <a:off x="6126480" y="6620256"/>
+            <a:ext cx="1737360" cy="237744"/>
+          </a:xfrm>
+          <a:prstGeom prst="rect">
             <a:avLst/>
           </a:prstGeom>
           <a:solidFill>
@@ -13439,131 +14340,16 @@
       </p:sp>
       <p:sp>
         <p:nvSpPr>
-          <p:cNvPr id="16" name="Text 14"/>
-          <p:cNvSpPr/>
-          <p:nvPr/>
-        </p:nvSpPr>
-        <p:spPr>
-          <a:xfrm>
-            <a:off x="7406640" y="2862072"/>
-            <a:ext cx="777240" cy="384048"/>
-          </a:xfrm>
-          <a:prstGeom prst="rect">
-            <a:avLst/>
-          </a:prstGeom>
-          <a:noFill/>
-          <a:ln/>
-        </p:spPr>
-        <p:txBody>
-          <a:bodyPr wrap="square" lIns="0" tIns="0" rIns="0" bIns="0" rtlCol="0" anchor="ctr">
-            <a:normAutofit/>
-          </a:bodyPr>
-          <a:lstStyle/>
-          <a:p>
-            <a:pPr algn="r" indent="0" marL="0">
-              <a:lnSpc>
-                <a:spcPct val="125000"/>
-              </a:lnSpc>
-              <a:buNone/>
-            </a:pPr>
-            <a:r>
-              <a:rPr lang="en-US" sz="1400" b="1" dirty="0">
-                <a:solidFill>
-                  <a:srgbClr val="4F417A"/>
-                </a:solidFill>
-                <a:latin typeface="Cambria" pitchFamily="34" charset="0"/>
-                <a:ea typeface="Cambria" pitchFamily="34" charset="-122"/>
-                <a:cs typeface="Cambria" pitchFamily="34" charset="-120"/>
-              </a:rPr>
-              <a:t>+0,78</a:t>
-            </a:r>
-            <a:endParaRPr lang="en-US" sz="1400" dirty="0"/>
-          </a:p>
-        </p:txBody>
-      </p:sp>
-      <p:sp>
-        <p:nvSpPr>
-          <p:cNvPr id="17" name="Text 15"/>
-          <p:cNvSpPr/>
-          <p:nvPr/>
-        </p:nvSpPr>
-        <p:spPr>
-          <a:xfrm>
-            <a:off x="960120" y="3557016"/>
-            <a:ext cx="1764792" cy="365760"/>
-          </a:xfrm>
-          <a:prstGeom prst="rect">
-            <a:avLst/>
-          </a:prstGeom>
-          <a:noFill/>
-          <a:ln/>
-        </p:spPr>
-        <p:txBody>
-          <a:bodyPr wrap="square" lIns="0" tIns="0" rIns="0" bIns="0" rtlCol="0" anchor="ctr">
-            <a:normAutofit/>
-          </a:bodyPr>
-          <a:lstStyle/>
-          <a:p>
-            <a:pPr indent="0" marL="0">
-              <a:lnSpc>
-                <a:spcPct val="125000"/>
-              </a:lnSpc>
-              <a:buNone/>
-            </a:pPr>
-            <a:r>
-              <a:rPr lang="en-US" sz="1400" dirty="0">
-                <a:solidFill>
-                  <a:srgbClr val="1A1A1A"/>
-                </a:solidFill>
-                <a:latin typeface="Cambria" pitchFamily="34" charset="0"/>
-                <a:ea typeface="Cambria" pitchFamily="34" charset="-122"/>
-                <a:cs typeface="Cambria" pitchFamily="34" charset="-120"/>
-              </a:rPr>
-              <a:t>Phi-4</a:t>
-            </a:r>
-            <a:endParaRPr lang="en-US" sz="1400" dirty="0"/>
-          </a:p>
-        </p:txBody>
-      </p:sp>
-      <p:sp>
-        <p:nvSpPr>
-          <p:cNvPr id="18" name="Shape 16"/>
-          <p:cNvSpPr/>
-          <p:nvPr/>
-        </p:nvSpPr>
-        <p:spPr>
-          <a:xfrm>
-            <a:off x="2834640" y="3630168"/>
-            <a:ext cx="4425696" cy="256032"/>
-          </a:xfrm>
-          <a:prstGeom prst="roundRect">
-            <a:avLst/>
-          </a:prstGeom>
-          <a:solidFill>
-            <a:srgbClr val="ECEAF0"/>
-          </a:solidFill>
-          <a:ln w="12700">
-            <a:solidFill>
-              <a:srgbClr val="ECEAF0">
-                <a:alpha val="0"/>
-              </a:srgbClr>
-            </a:solidFill>
-            <a:prstDash val="solid"/>
-          </a:ln>
-        </p:spPr>
-      </p:sp>
-      <p:sp>
-        <p:nvSpPr>
-          <p:cNvPr id="19" name="Shape 17"/>
-          <p:cNvSpPr/>
-          <p:nvPr/>
-        </p:nvSpPr>
-        <p:spPr>
-          <a:xfrm>
-            <a:off x="2834640" y="3630168"/>
-            <a:ext cx="1796312" cy="256032"/>
-          </a:xfrm>
-          <a:prstGeom prst="roundRect">
+          <p:cNvPr id="30" name="Shape 28"/>
+          <p:cNvSpPr/>
+          <p:nvPr/>
+        </p:nvSpPr>
+        <p:spPr>
+          <a:xfrm>
+            <a:off x="7863840" y="6620256"/>
+            <a:ext cx="1280160" cy="237744"/>
+          </a:xfrm>
+          <a:prstGeom prst="rect">
             <a:avLst/>
           </a:prstGeom>
           <a:solidFill>
@@ -13581,268 +14367,7 @@
       </p:sp>
       <p:sp>
         <p:nvSpPr>
-          <p:cNvPr id="20" name="Text 18"/>
-          <p:cNvSpPr/>
-          <p:nvPr/>
-        </p:nvSpPr>
-        <p:spPr>
-          <a:xfrm>
-            <a:off x="7406640" y="3547872"/>
-            <a:ext cx="777240" cy="384048"/>
-          </a:xfrm>
-          <a:prstGeom prst="rect">
-            <a:avLst/>
-          </a:prstGeom>
-          <a:noFill/>
-          <a:ln/>
-        </p:spPr>
-        <p:txBody>
-          <a:bodyPr wrap="square" lIns="0" tIns="0" rIns="0" bIns="0" rtlCol="0" anchor="ctr">
-            <a:normAutofit/>
-          </a:bodyPr>
-          <a:lstStyle/>
-          <a:p>
-            <a:pPr algn="r" indent="0" marL="0">
-              <a:lnSpc>
-                <a:spcPct val="125000"/>
-              </a:lnSpc>
-              <a:buNone/>
-            </a:pPr>
-            <a:r>
-              <a:rPr lang="en-US" sz="1400" b="1" dirty="0">
-                <a:solidFill>
-                  <a:srgbClr val="7A7099"/>
-                </a:solidFill>
-                <a:latin typeface="Cambria" pitchFamily="34" charset="0"/>
-                <a:ea typeface="Cambria" pitchFamily="34" charset="-122"/>
-                <a:cs typeface="Cambria" pitchFamily="34" charset="-120"/>
-              </a:rPr>
-              <a:t>+0,69</a:t>
-            </a:r>
-            <a:endParaRPr lang="en-US" sz="1400" dirty="0"/>
-          </a:p>
-        </p:txBody>
-      </p:sp>
-      <p:sp>
-        <p:nvSpPr>
-          <p:cNvPr id="21" name="Shape 19"/>
-          <p:cNvSpPr/>
-          <p:nvPr/>
-        </p:nvSpPr>
-        <p:spPr>
-          <a:xfrm>
-            <a:off x="960120" y="4462272"/>
-            <a:ext cx="7223760" cy="768096"/>
-          </a:xfrm>
-          <a:prstGeom prst="roundRect">
-            <a:avLst/>
-          </a:prstGeom>
-          <a:solidFill>
-            <a:srgbClr val="F3F2F5"/>
-          </a:solidFill>
-          <a:ln w="12700">
-            <a:solidFill>
-              <a:srgbClr val="4F417A"/>
-            </a:solidFill>
-            <a:prstDash val="solid"/>
-          </a:ln>
-        </p:spPr>
-      </p:sp>
-      <p:sp>
-        <p:nvSpPr>
-          <p:cNvPr id="22" name="Text 20"/>
-          <p:cNvSpPr/>
-          <p:nvPr/>
-        </p:nvSpPr>
-        <p:spPr>
-          <a:xfrm>
-            <a:off x="1188720" y="4462272"/>
-            <a:ext cx="6766560" cy="768096"/>
-          </a:xfrm>
-          <a:prstGeom prst="rect">
-            <a:avLst/>
-          </a:prstGeom>
-          <a:noFill/>
-          <a:ln/>
-        </p:spPr>
-        <p:txBody>
-          <a:bodyPr wrap="square" lIns="0" tIns="0" rIns="0" bIns="0" rtlCol="0" anchor="ctr"/>
-          <a:lstStyle/>
-          <a:p>
-            <a:pPr algn="ctr" indent="0" marL="0">
-              <a:lnSpc>
-                <a:spcPct val="125000"/>
-              </a:lnSpc>
-              <a:buNone/>
-            </a:pPr>
-            <a:r>
-              <a:rPr lang="en-US" sz="1680" b="1" dirty="0">
-                <a:solidFill>
-                  <a:srgbClr val="25194B"/>
-                </a:solidFill>
-                <a:latin typeface="Cambria" pitchFamily="34" charset="0"/>
-                <a:ea typeface="Cambria" pitchFamily="34" charset="-122"/>
-                <a:cs typeface="Cambria" pitchFamily="34" charset="-120"/>
-              </a:rPr>
-              <a:t>KTC của cả 4 chênh lệch đều nằm trên 0</a:t>
-            </a:r>
-            <a:endParaRPr lang="en-US" sz="1680" dirty="0"/>
-          </a:p>
-        </p:txBody>
-      </p:sp>
-      <p:sp>
-        <p:nvSpPr>
-          <p:cNvPr id="23" name="Text 21"/>
-          <p:cNvSpPr/>
-          <p:nvPr/>
-        </p:nvSpPr>
-        <p:spPr>
-          <a:xfrm>
-            <a:off x="502920" y="5532120"/>
-            <a:ext cx="8138160" cy="310896"/>
-          </a:xfrm>
-          <a:prstGeom prst="rect">
-            <a:avLst/>
-          </a:prstGeom>
-          <a:noFill/>
-          <a:ln/>
-        </p:spPr>
-        <p:txBody>
-          <a:bodyPr wrap="square" lIns="0" tIns="0" rIns="0" bIns="0" rtlCol="0" anchor="ctr"/>
-          <a:lstStyle/>
-          <a:p>
-            <a:pPr algn="ctr" indent="0" marL="0">
-              <a:lnSpc>
-                <a:spcPct val="125000"/>
-              </a:lnSpc>
-              <a:buNone/>
-            </a:pPr>
-            <a:r>
-              <a:rPr lang="en-US" sz="1280" dirty="0">
-                <a:solidFill>
-                  <a:srgbClr val="5A5A66"/>
-                </a:solidFill>
-                <a:latin typeface="Cambria" pitchFamily="34" charset="0"/>
-                <a:ea typeface="Cambria" pitchFamily="34" charset="-122"/>
-                <a:cs typeface="Cambria" pitchFamily="34" charset="-120"/>
-              </a:rPr>
-              <a:t>Phi-Ground và Phi-4 nằm ngoài họ Qwen.</a:t>
-            </a:r>
-            <a:endParaRPr lang="en-US" sz="1280" dirty="0"/>
-          </a:p>
-        </p:txBody>
-      </p:sp>
-      <p:sp>
-        <p:nvSpPr>
-          <p:cNvPr id="24" name="Shape 22"/>
-          <p:cNvSpPr/>
-          <p:nvPr/>
-        </p:nvSpPr>
-        <p:spPr>
-          <a:xfrm>
-            <a:off x="0" y="6620256"/>
-            <a:ext cx="2743200" cy="237744"/>
-          </a:xfrm>
-          <a:prstGeom prst="rect">
-            <a:avLst/>
-          </a:prstGeom>
-          <a:solidFill>
-            <a:srgbClr val="191132"/>
-          </a:solidFill>
-          <a:ln w="12700">
-            <a:solidFill>
-              <a:srgbClr val="191132">
-                <a:alpha val="0"/>
-              </a:srgbClr>
-            </a:solidFill>
-            <a:prstDash val="solid"/>
-          </a:ln>
-        </p:spPr>
-      </p:sp>
-      <p:sp>
-        <p:nvSpPr>
-          <p:cNvPr id="25" name="Shape 23"/>
-          <p:cNvSpPr/>
-          <p:nvPr/>
-        </p:nvSpPr>
-        <p:spPr>
-          <a:xfrm>
-            <a:off x="2743200" y="6620256"/>
-            <a:ext cx="3383280" cy="237744"/>
-          </a:xfrm>
-          <a:prstGeom prst="rect">
-            <a:avLst/>
-          </a:prstGeom>
-          <a:solidFill>
-            <a:srgbClr val="25194B"/>
-          </a:solidFill>
-          <a:ln w="12700">
-            <a:solidFill>
-              <a:srgbClr val="25194B">
-                <a:alpha val="0"/>
-              </a:srgbClr>
-            </a:solidFill>
-            <a:prstDash val="solid"/>
-          </a:ln>
-        </p:spPr>
-      </p:sp>
-      <p:sp>
-        <p:nvSpPr>
-          <p:cNvPr id="26" name="Shape 24"/>
-          <p:cNvSpPr/>
-          <p:nvPr/>
-        </p:nvSpPr>
-        <p:spPr>
-          <a:xfrm>
-            <a:off x="6126480" y="6620256"/>
-            <a:ext cx="1737360" cy="237744"/>
-          </a:xfrm>
-          <a:prstGeom prst="rect">
-            <a:avLst/>
-          </a:prstGeom>
-          <a:solidFill>
-            <a:srgbClr val="4F417A"/>
-          </a:solidFill>
-          <a:ln w="12700">
-            <a:solidFill>
-              <a:srgbClr val="4F417A">
-                <a:alpha val="0"/>
-              </a:srgbClr>
-            </a:solidFill>
-            <a:prstDash val="solid"/>
-          </a:ln>
-        </p:spPr>
-      </p:sp>
-      <p:sp>
-        <p:nvSpPr>
-          <p:cNvPr id="27" name="Shape 25"/>
-          <p:cNvSpPr/>
-          <p:nvPr/>
-        </p:nvSpPr>
-        <p:spPr>
-          <a:xfrm>
-            <a:off x="7863840" y="6620256"/>
-            <a:ext cx="1280160" cy="237744"/>
-          </a:xfrm>
-          <a:prstGeom prst="rect">
-            <a:avLst/>
-          </a:prstGeom>
-          <a:solidFill>
-            <a:srgbClr val="7A7099"/>
-          </a:solidFill>
-          <a:ln w="12700">
-            <a:solidFill>
-              <a:srgbClr val="7A7099">
-                <a:alpha val="0"/>
-              </a:srgbClr>
-            </a:solidFill>
-            <a:prstDash val="solid"/>
-          </a:ln>
-        </p:spPr>
-      </p:sp>
-      <p:sp>
-        <p:nvSpPr>
-          <p:cNvPr id="28" name="Text 26"/>
+          <p:cNvPr id="31" name="Text 29"/>
           <p:cNvSpPr/>
           <p:nvPr/>
         </p:nvSpPr>
@@ -13884,7 +14409,7 @@
       </p:sp>
       <p:sp>
         <p:nvSpPr>
-          <p:cNvPr id="29" name="Text 27"/>
+          <p:cNvPr id="32" name="Text 30"/>
           <p:cNvSpPr/>
           <p:nvPr/>
         </p:nvSpPr>
@@ -13926,7 +14451,7 @@
       </p:sp>
       <p:sp>
         <p:nvSpPr>
-          <p:cNvPr id="30" name="Text 28"/>
+          <p:cNvPr id="33" name="Text 31"/>
           <p:cNvSpPr/>
           <p:nvPr/>
         </p:nvSpPr>
@@ -13968,7 +14493,7 @@
       </p:sp>
       <p:sp>
         <p:nvSpPr>
-          <p:cNvPr id="31" name="Text 29"/>
+          <p:cNvPr id="34" name="Text 32"/>
           <p:cNvSpPr/>
           <p:nvPr/>
         </p:nvSpPr>
@@ -14155,68 +14680,351 @@
       </p:sp>
       <p:sp>
         <p:nvSpPr>
-          <p:cNvPr id="5" name="Text 3"/>
-          <p:cNvSpPr/>
-          <p:nvPr/>
-        </p:nvSpPr>
-        <p:spPr>
-          <a:xfrm>
-            <a:off x="960120" y="1618488"/>
-            <a:ext cx="1856232" cy="365760"/>
-          </a:xfrm>
-          <a:prstGeom prst="rect">
-            <a:avLst/>
-          </a:prstGeom>
-          <a:noFill/>
-          <a:ln/>
-        </p:spPr>
-        <p:txBody>
-          <a:bodyPr wrap="square" lIns="0" tIns="0" rIns="0" bIns="0" rtlCol="0" anchor="ctr">
-            <a:normAutofit/>
-          </a:bodyPr>
-          <a:lstStyle/>
-          <a:p>
-            <a:pPr indent="0" marL="0">
-              <a:lnSpc>
-                <a:spcPct val="125000"/>
-              </a:lnSpc>
-              <a:buNone/>
-            </a:pPr>
-            <a:r>
-              <a:rPr lang="en-US" sz="1440" dirty="0">
-                <a:solidFill>
-                  <a:srgbClr val="1A1A1A"/>
-                </a:solidFill>
-                <a:latin typeface="Cambria" pitchFamily="34" charset="0"/>
-                <a:ea typeface="Cambria" pitchFamily="34" charset="-122"/>
-                <a:cs typeface="Cambria" pitchFamily="34" charset="-120"/>
-              </a:rPr>
-              <a:t>S1</a:t>
-            </a:r>
-            <a:endParaRPr lang="en-US" sz="1440" dirty="0"/>
-          </a:p>
-        </p:txBody>
-      </p:sp>
-      <p:sp>
-        <p:nvSpPr>
-          <p:cNvPr id="6" name="Shape 4"/>
-          <p:cNvSpPr/>
-          <p:nvPr/>
-        </p:nvSpPr>
-        <p:spPr>
-          <a:xfrm>
-            <a:off x="2926080" y="1691640"/>
-            <a:ext cx="4242816" cy="256032"/>
+          <p:cNvPr id="5" name="Shape 3"/>
+          <p:cNvSpPr/>
+          <p:nvPr/>
+        </p:nvSpPr>
+        <p:spPr>
+          <a:xfrm>
+            <a:off x="1051560" y="1627632"/>
+            <a:ext cx="3017520" cy="1874520"/>
           </a:xfrm>
           <a:prstGeom prst="roundRect">
             <a:avLst/>
           </a:prstGeom>
           <a:solidFill>
-            <a:srgbClr val="ECEAF0"/>
+            <a:srgbClr val="F3F2F5"/>
           </a:solidFill>
           <a:ln w="12700">
             <a:solidFill>
-              <a:srgbClr val="ECEAF0">
+              <a:srgbClr val="7A7099"/>
+            </a:solidFill>
+            <a:prstDash val="solid"/>
+          </a:ln>
+        </p:spPr>
+      </p:sp>
+      <p:sp>
+        <p:nvSpPr>
+          <p:cNvPr id="6" name="Text 4"/>
+          <p:cNvSpPr/>
+          <p:nvPr/>
+        </p:nvSpPr>
+        <p:spPr>
+          <a:xfrm>
+            <a:off x="1234440" y="1901952"/>
+            <a:ext cx="2651760" cy="365760"/>
+          </a:xfrm>
+          <a:prstGeom prst="rect">
+            <a:avLst/>
+          </a:prstGeom>
+          <a:noFill/>
+          <a:ln/>
+        </p:spPr>
+        <p:txBody>
+          <a:bodyPr wrap="square" lIns="0" tIns="0" rIns="0" bIns="0" rtlCol="0" anchor="ctr"/>
+          <a:lstStyle/>
+          <a:p>
+            <a:pPr algn="ctr" indent="0" marL="0">
+              <a:lnSpc>
+                <a:spcPct val="125000"/>
+              </a:lnSpc>
+              <a:buNone/>
+            </a:pPr>
+            <a:r>
+              <a:rPr lang="en-US" sz="1700" b="1" dirty="0">
+                <a:solidFill>
+                  <a:srgbClr val="7A7099"/>
+                </a:solidFill>
+                <a:latin typeface="Cambria" pitchFamily="34" charset="0"/>
+                <a:ea typeface="Cambria" pitchFamily="34" charset="-122"/>
+                <a:cs typeface="Cambria" pitchFamily="34" charset="-120"/>
+              </a:rPr>
+              <a:t>S1</a:t>
+            </a:r>
+            <a:endParaRPr lang="en-US" sz="1700" dirty="0"/>
+          </a:p>
+        </p:txBody>
+      </p:sp>
+      <p:sp>
+        <p:nvSpPr>
+          <p:cNvPr id="7" name="Text 5"/>
+          <p:cNvSpPr/>
+          <p:nvPr/>
+        </p:nvSpPr>
+        <p:spPr>
+          <a:xfrm>
+            <a:off x="1234440" y="2331720"/>
+            <a:ext cx="2651760" cy="658368"/>
+          </a:xfrm>
+          <a:prstGeom prst="rect">
+            <a:avLst/>
+          </a:prstGeom>
+          <a:noFill/>
+          <a:ln/>
+        </p:spPr>
+        <p:txBody>
+          <a:bodyPr wrap="square" lIns="0" tIns="0" rIns="0" bIns="0" rtlCol="0" anchor="ctr"/>
+          <a:lstStyle/>
+          <a:p>
+            <a:pPr algn="ctr" indent="0" marL="0">
+              <a:lnSpc>
+                <a:spcPct val="125000"/>
+              </a:lnSpc>
+              <a:buNone/>
+            </a:pPr>
+            <a:r>
+              <a:rPr lang="en-US" sz="2800" b="1" dirty="0">
+                <a:solidFill>
+                  <a:srgbClr val="7A7099"/>
+                </a:solidFill>
+                <a:latin typeface="Cambria" pitchFamily="34" charset="0"/>
+                <a:ea typeface="Cambria" pitchFamily="34" charset="-122"/>
+                <a:cs typeface="Cambria" pitchFamily="34" charset="-120"/>
+              </a:rPr>
+              <a:t>54,96%</a:t>
+            </a:r>
+            <a:endParaRPr lang="en-US" sz="2800" dirty="0"/>
+          </a:p>
+        </p:txBody>
+      </p:sp>
+      <p:sp>
+        <p:nvSpPr>
+          <p:cNvPr id="8" name="Shape 6"/>
+          <p:cNvSpPr/>
+          <p:nvPr/>
+        </p:nvSpPr>
+        <p:spPr>
+          <a:xfrm>
+            <a:off x="5074920" y="1627632"/>
+            <a:ext cx="3017520" cy="1874520"/>
+          </a:xfrm>
+          <a:prstGeom prst="roundRect">
+            <a:avLst/>
+          </a:prstGeom>
+          <a:solidFill>
+            <a:srgbClr val="F3F2F5"/>
+          </a:solidFill>
+          <a:ln w="12700">
+            <a:solidFill>
+              <a:srgbClr val="4F417A"/>
+            </a:solidFill>
+            <a:prstDash val="solid"/>
+          </a:ln>
+        </p:spPr>
+      </p:sp>
+      <p:sp>
+        <p:nvSpPr>
+          <p:cNvPr id="9" name="Text 7"/>
+          <p:cNvSpPr/>
+          <p:nvPr/>
+        </p:nvSpPr>
+        <p:spPr>
+          <a:xfrm>
+            <a:off x="5257800" y="1901952"/>
+            <a:ext cx="2651760" cy="365760"/>
+          </a:xfrm>
+          <a:prstGeom prst="rect">
+            <a:avLst/>
+          </a:prstGeom>
+          <a:noFill/>
+          <a:ln/>
+        </p:spPr>
+        <p:txBody>
+          <a:bodyPr wrap="square" lIns="0" tIns="0" rIns="0" bIns="0" rtlCol="0" anchor="ctr"/>
+          <a:lstStyle/>
+          <a:p>
+            <a:pPr algn="ctr" indent="0" marL="0">
+              <a:lnSpc>
+                <a:spcPct val="125000"/>
+              </a:lnSpc>
+              <a:buNone/>
+            </a:pPr>
+            <a:r>
+              <a:rPr lang="en-US" sz="1700" b="1" dirty="0">
+                <a:solidFill>
+                  <a:srgbClr val="4F417A"/>
+                </a:solidFill>
+                <a:latin typeface="Cambria" pitchFamily="34" charset="0"/>
+                <a:ea typeface="Cambria" pitchFamily="34" charset="-122"/>
+                <a:cs typeface="Cambria" pitchFamily="34" charset="-120"/>
+              </a:rPr>
+              <a:t>GRPO-SPICE</a:t>
+            </a:r>
+            <a:endParaRPr lang="en-US" sz="1700" dirty="0"/>
+          </a:p>
+        </p:txBody>
+      </p:sp>
+      <p:sp>
+        <p:nvSpPr>
+          <p:cNvPr id="10" name="Text 8"/>
+          <p:cNvSpPr/>
+          <p:nvPr/>
+        </p:nvSpPr>
+        <p:spPr>
+          <a:xfrm>
+            <a:off x="5257800" y="2331720"/>
+            <a:ext cx="2651760" cy="658368"/>
+          </a:xfrm>
+          <a:prstGeom prst="rect">
+            <a:avLst/>
+          </a:prstGeom>
+          <a:noFill/>
+          <a:ln/>
+        </p:spPr>
+        <p:txBody>
+          <a:bodyPr wrap="square" lIns="0" tIns="0" rIns="0" bIns="0" rtlCol="0" anchor="ctr"/>
+          <a:lstStyle/>
+          <a:p>
+            <a:pPr algn="ctr" indent="0" marL="0">
+              <a:lnSpc>
+                <a:spcPct val="125000"/>
+              </a:lnSpc>
+              <a:buNone/>
+            </a:pPr>
+            <a:r>
+              <a:rPr lang="en-US" sz="2800" b="1" dirty="0">
+                <a:solidFill>
+                  <a:srgbClr val="4F417A"/>
+                </a:solidFill>
+                <a:latin typeface="Cambria" pitchFamily="34" charset="0"/>
+                <a:ea typeface="Cambria" pitchFamily="34" charset="-122"/>
+                <a:cs typeface="Cambria" pitchFamily="34" charset="-120"/>
+              </a:rPr>
+              <a:t>56,44%</a:t>
+            </a:r>
+            <a:endParaRPr lang="en-US" sz="2800" dirty="0"/>
+          </a:p>
+        </p:txBody>
+      </p:sp>
+      <p:sp>
+        <p:nvSpPr>
+          <p:cNvPr id="11" name="Shape 9"/>
+          <p:cNvSpPr/>
+          <p:nvPr/>
+        </p:nvSpPr>
+        <p:spPr>
+          <a:xfrm>
+            <a:off x="1005840" y="3977640"/>
+            <a:ext cx="7132320" cy="932688"/>
+          </a:xfrm>
+          <a:prstGeom prst="roundRect">
+            <a:avLst/>
+          </a:prstGeom>
+          <a:solidFill>
+            <a:srgbClr val="F3F2F5"/>
+          </a:solidFill>
+          <a:ln w="12700">
+            <a:solidFill>
+              <a:srgbClr val="4F417A"/>
+            </a:solidFill>
+            <a:prstDash val="solid"/>
+          </a:ln>
+        </p:spPr>
+      </p:sp>
+      <p:sp>
+        <p:nvSpPr>
+          <p:cNvPr id="12" name="Text 10"/>
+          <p:cNvSpPr/>
+          <p:nvPr/>
+        </p:nvSpPr>
+        <p:spPr>
+          <a:xfrm>
+            <a:off x="1234440" y="3977640"/>
+            <a:ext cx="6675120" cy="932688"/>
+          </a:xfrm>
+          <a:prstGeom prst="rect">
+            <a:avLst/>
+          </a:prstGeom>
+          <a:noFill/>
+          <a:ln/>
+        </p:spPr>
+        <p:txBody>
+          <a:bodyPr wrap="square" lIns="0" tIns="0" rIns="0" bIns="0" rtlCol="0" anchor="ctr"/>
+          <a:lstStyle/>
+          <a:p>
+            <a:pPr algn="ctr" indent="0" marL="0">
+              <a:lnSpc>
+                <a:spcPct val="125000"/>
+              </a:lnSpc>
+              <a:buNone/>
+            </a:pPr>
+            <a:r>
+              <a:rPr lang="en-US" sz="1800" b="1" dirty="0">
+                <a:solidFill>
+                  <a:srgbClr val="25194B"/>
+                </a:solidFill>
+                <a:latin typeface="Cambria" pitchFamily="34" charset="0"/>
+                <a:ea typeface="Cambria" pitchFamily="34" charset="-122"/>
+                <a:cs typeface="Cambria" pitchFamily="34" charset="-120"/>
+              </a:rPr>
+              <a:t>+1,48 điểm   ·   KTC 95% [+0,54; +2,43]</a:t>
+            </a:r>
+            <a:endParaRPr lang="en-US" sz="1800" dirty="0"/>
+          </a:p>
+        </p:txBody>
+      </p:sp>
+      <p:sp>
+        <p:nvSpPr>
+          <p:cNvPr id="13" name="Text 11"/>
+          <p:cNvSpPr/>
+          <p:nvPr/>
+        </p:nvSpPr>
+        <p:spPr>
+          <a:xfrm>
+            <a:off x="502920" y="5376672"/>
+            <a:ext cx="8138160" cy="402336"/>
+          </a:xfrm>
+          <a:prstGeom prst="rect">
+            <a:avLst/>
+          </a:prstGeom>
+          <a:noFill/>
+          <a:ln/>
+        </p:spPr>
+        <p:txBody>
+          <a:bodyPr wrap="square" lIns="0" tIns="0" rIns="0" bIns="0" rtlCol="0" anchor="ctr"/>
+          <a:lstStyle/>
+          <a:p>
+            <a:pPr algn="ctr" indent="0" marL="0">
+              <a:lnSpc>
+                <a:spcPct val="125000"/>
+              </a:lnSpc>
+              <a:buNone/>
+            </a:pPr>
+            <a:r>
+              <a:rPr lang="en-US" sz="1400" b="1" dirty="0">
+                <a:solidFill>
+                  <a:srgbClr val="25194B"/>
+                </a:solidFill>
+                <a:latin typeface="Cambria" pitchFamily="34" charset="0"/>
+                <a:ea typeface="Cambria" pitchFamily="34" charset="-122"/>
+                <a:cs typeface="Cambria" pitchFamily="34" charset="-120"/>
+              </a:rPr>
+              <a:t>Ưu thế vẫn được giữ khi lịch sử không còn là câu chuẩn.</a:t>
+            </a:r>
+            <a:endParaRPr lang="en-US" sz="1400" dirty="0"/>
+          </a:p>
+        </p:txBody>
+      </p:sp>
+      <p:sp>
+        <p:nvSpPr>
+          <p:cNvPr id="14" name="Shape 12"/>
+          <p:cNvSpPr/>
+          <p:nvPr/>
+        </p:nvSpPr>
+        <p:spPr>
+          <a:xfrm>
+            <a:off x="0" y="6620256"/>
+            <a:ext cx="2743200" cy="237744"/>
+          </a:xfrm>
+          <a:prstGeom prst="rect">
+            <a:avLst/>
+          </a:prstGeom>
+          <a:solidFill>
+            <a:srgbClr val="191132"/>
+          </a:solidFill>
+          <a:ln w="12700">
+            <a:solidFill>
+              <a:srgbClr val="191132">
                 <a:alpha val="0"/>
               </a:srgbClr>
             </a:solidFill>
@@ -14226,16 +15034,70 @@
       </p:sp>
       <p:sp>
         <p:nvSpPr>
-          <p:cNvPr id="7" name="Shape 5"/>
-          <p:cNvSpPr/>
-          <p:nvPr/>
-        </p:nvSpPr>
-        <p:spPr>
-          <a:xfrm>
-            <a:off x="2926080" y="1691640"/>
-            <a:ext cx="3886419" cy="256032"/>
-          </a:xfrm>
-          <a:prstGeom prst="roundRect">
+          <p:cNvPr id="15" name="Shape 13"/>
+          <p:cNvSpPr/>
+          <p:nvPr/>
+        </p:nvSpPr>
+        <p:spPr>
+          <a:xfrm>
+            <a:off x="2743200" y="6620256"/>
+            <a:ext cx="3383280" cy="237744"/>
+          </a:xfrm>
+          <a:prstGeom prst="rect">
+            <a:avLst/>
+          </a:prstGeom>
+          <a:solidFill>
+            <a:srgbClr val="25194B"/>
+          </a:solidFill>
+          <a:ln w="12700">
+            <a:solidFill>
+              <a:srgbClr val="25194B">
+                <a:alpha val="0"/>
+              </a:srgbClr>
+            </a:solidFill>
+            <a:prstDash val="solid"/>
+          </a:ln>
+        </p:spPr>
+      </p:sp>
+      <p:sp>
+        <p:nvSpPr>
+          <p:cNvPr id="16" name="Shape 14"/>
+          <p:cNvSpPr/>
+          <p:nvPr/>
+        </p:nvSpPr>
+        <p:spPr>
+          <a:xfrm>
+            <a:off x="6126480" y="6620256"/>
+            <a:ext cx="1737360" cy="237744"/>
+          </a:xfrm>
+          <a:prstGeom prst="rect">
+            <a:avLst/>
+          </a:prstGeom>
+          <a:solidFill>
+            <a:srgbClr val="4F417A"/>
+          </a:solidFill>
+          <a:ln w="12700">
+            <a:solidFill>
+              <a:srgbClr val="4F417A">
+                <a:alpha val="0"/>
+              </a:srgbClr>
+            </a:solidFill>
+            <a:prstDash val="solid"/>
+          </a:ln>
+        </p:spPr>
+      </p:sp>
+      <p:sp>
+        <p:nvSpPr>
+          <p:cNvPr id="17" name="Shape 15"/>
+          <p:cNvSpPr/>
+          <p:nvPr/>
+        </p:nvSpPr>
+        <p:spPr>
+          <a:xfrm>
+            <a:off x="7863840" y="6620256"/>
+            <a:ext cx="1280160" cy="237744"/>
+          </a:xfrm>
+          <a:prstGeom prst="rect">
             <a:avLst/>
           </a:prstGeom>
           <a:solidFill>
@@ -14253,410 +15115,7 @@
       </p:sp>
       <p:sp>
         <p:nvSpPr>
-          <p:cNvPr id="8" name="Text 6"/>
-          <p:cNvSpPr/>
-          <p:nvPr/>
-        </p:nvSpPr>
-        <p:spPr>
-          <a:xfrm>
-            <a:off x="7315200" y="1609344"/>
-            <a:ext cx="868680" cy="384048"/>
-          </a:xfrm>
-          <a:prstGeom prst="rect">
-            <a:avLst/>
-          </a:prstGeom>
-          <a:noFill/>
-          <a:ln/>
-        </p:spPr>
-        <p:txBody>
-          <a:bodyPr wrap="square" lIns="0" tIns="0" rIns="0" bIns="0" rtlCol="0" anchor="ctr">
-            <a:normAutofit/>
-          </a:bodyPr>
-          <a:lstStyle/>
-          <a:p>
-            <a:pPr algn="r" indent="0" marL="0">
-              <a:lnSpc>
-                <a:spcPct val="125000"/>
-              </a:lnSpc>
-              <a:buNone/>
-            </a:pPr>
-            <a:r>
-              <a:rPr lang="en-US" sz="1440" b="1" dirty="0">
-                <a:solidFill>
-                  <a:srgbClr val="7A7099"/>
-                </a:solidFill>
-                <a:latin typeface="Cambria" pitchFamily="34" charset="0"/>
-                <a:ea typeface="Cambria" pitchFamily="34" charset="-122"/>
-                <a:cs typeface="Cambria" pitchFamily="34" charset="-120"/>
-              </a:rPr>
-              <a:t>54,96%</a:t>
-            </a:r>
-            <a:endParaRPr lang="en-US" sz="1440" dirty="0"/>
-          </a:p>
-        </p:txBody>
-      </p:sp>
-      <p:sp>
-        <p:nvSpPr>
-          <p:cNvPr id="9" name="Text 7"/>
-          <p:cNvSpPr/>
-          <p:nvPr/>
-        </p:nvSpPr>
-        <p:spPr>
-          <a:xfrm>
-            <a:off x="960120" y="2551176"/>
-            <a:ext cx="1856232" cy="365760"/>
-          </a:xfrm>
-          <a:prstGeom prst="rect">
-            <a:avLst/>
-          </a:prstGeom>
-          <a:noFill/>
-          <a:ln/>
-        </p:spPr>
-        <p:txBody>
-          <a:bodyPr wrap="square" lIns="0" tIns="0" rIns="0" bIns="0" rtlCol="0" anchor="ctr">
-            <a:normAutofit/>
-          </a:bodyPr>
-          <a:lstStyle/>
-          <a:p>
-            <a:pPr indent="0" marL="0">
-              <a:lnSpc>
-                <a:spcPct val="125000"/>
-              </a:lnSpc>
-              <a:buNone/>
-            </a:pPr>
-            <a:r>
-              <a:rPr lang="en-US" sz="1440" b="1" dirty="0">
-                <a:solidFill>
-                  <a:srgbClr val="1A1A1A"/>
-                </a:solidFill>
-                <a:latin typeface="Cambria" pitchFamily="34" charset="0"/>
-                <a:ea typeface="Cambria" pitchFamily="34" charset="-122"/>
-                <a:cs typeface="Cambria" pitchFamily="34" charset="-120"/>
-              </a:rPr>
-              <a:t>GRPO-SPICE</a:t>
-            </a:r>
-            <a:endParaRPr lang="en-US" sz="1440" dirty="0"/>
-          </a:p>
-        </p:txBody>
-      </p:sp>
-      <p:sp>
-        <p:nvSpPr>
-          <p:cNvPr id="10" name="Shape 8"/>
-          <p:cNvSpPr/>
-          <p:nvPr/>
-        </p:nvSpPr>
-        <p:spPr>
-          <a:xfrm>
-            <a:off x="2926080" y="2624328"/>
-            <a:ext cx="4242816" cy="256032"/>
-          </a:xfrm>
-          <a:prstGeom prst="roundRect">
-            <a:avLst/>
-          </a:prstGeom>
-          <a:solidFill>
-            <a:srgbClr val="ECEAF0"/>
-          </a:solidFill>
-          <a:ln w="12700">
-            <a:solidFill>
-              <a:srgbClr val="ECEAF0">
-                <a:alpha val="0"/>
-              </a:srgbClr>
-            </a:solidFill>
-            <a:prstDash val="solid"/>
-          </a:ln>
-        </p:spPr>
-      </p:sp>
-      <p:sp>
-        <p:nvSpPr>
-          <p:cNvPr id="11" name="Shape 9"/>
-          <p:cNvSpPr/>
-          <p:nvPr/>
-        </p:nvSpPr>
-        <p:spPr>
-          <a:xfrm>
-            <a:off x="2926080" y="2624328"/>
-            <a:ext cx="3991076" cy="256032"/>
-          </a:xfrm>
-          <a:prstGeom prst="roundRect">
-            <a:avLst/>
-          </a:prstGeom>
-          <a:solidFill>
-            <a:srgbClr val="4F417A"/>
-          </a:solidFill>
-          <a:ln w="12700">
-            <a:solidFill>
-              <a:srgbClr val="4F417A">
-                <a:alpha val="0"/>
-              </a:srgbClr>
-            </a:solidFill>
-            <a:prstDash val="solid"/>
-          </a:ln>
-        </p:spPr>
-      </p:sp>
-      <p:sp>
-        <p:nvSpPr>
-          <p:cNvPr id="12" name="Text 10"/>
-          <p:cNvSpPr/>
-          <p:nvPr/>
-        </p:nvSpPr>
-        <p:spPr>
-          <a:xfrm>
-            <a:off x="7315200" y="2542032"/>
-            <a:ext cx="868680" cy="384048"/>
-          </a:xfrm>
-          <a:prstGeom prst="rect">
-            <a:avLst/>
-          </a:prstGeom>
-          <a:noFill/>
-          <a:ln/>
-        </p:spPr>
-        <p:txBody>
-          <a:bodyPr wrap="square" lIns="0" tIns="0" rIns="0" bIns="0" rtlCol="0" anchor="ctr">
-            <a:normAutofit/>
-          </a:bodyPr>
-          <a:lstStyle/>
-          <a:p>
-            <a:pPr algn="r" indent="0" marL="0">
-              <a:lnSpc>
-                <a:spcPct val="125000"/>
-              </a:lnSpc>
-              <a:buNone/>
-            </a:pPr>
-            <a:r>
-              <a:rPr lang="en-US" sz="1440" b="1" dirty="0">
-                <a:solidFill>
-                  <a:srgbClr val="4F417A"/>
-                </a:solidFill>
-                <a:latin typeface="Cambria" pitchFamily="34" charset="0"/>
-                <a:ea typeface="Cambria" pitchFamily="34" charset="-122"/>
-                <a:cs typeface="Cambria" pitchFamily="34" charset="-120"/>
-              </a:rPr>
-              <a:t>56,44%</a:t>
-            </a:r>
-            <a:endParaRPr lang="en-US" sz="1440" dirty="0"/>
-          </a:p>
-        </p:txBody>
-      </p:sp>
-      <p:sp>
-        <p:nvSpPr>
-          <p:cNvPr id="13" name="Shape 11"/>
-          <p:cNvSpPr/>
-          <p:nvPr/>
-        </p:nvSpPr>
-        <p:spPr>
-          <a:xfrm>
-            <a:off x="1005840" y="3886200"/>
-            <a:ext cx="7132320" cy="932688"/>
-          </a:xfrm>
-          <a:prstGeom prst="roundRect">
-            <a:avLst/>
-          </a:prstGeom>
-          <a:solidFill>
-            <a:srgbClr val="F3F2F5"/>
-          </a:solidFill>
-          <a:ln w="12700">
-            <a:solidFill>
-              <a:srgbClr val="4F417A"/>
-            </a:solidFill>
-            <a:prstDash val="solid"/>
-          </a:ln>
-        </p:spPr>
-      </p:sp>
-      <p:sp>
-        <p:nvSpPr>
-          <p:cNvPr id="14" name="Text 12"/>
-          <p:cNvSpPr/>
-          <p:nvPr/>
-        </p:nvSpPr>
-        <p:spPr>
-          <a:xfrm>
-            <a:off x="1234440" y="3886200"/>
-            <a:ext cx="6675120" cy="932688"/>
-          </a:xfrm>
-          <a:prstGeom prst="rect">
-            <a:avLst/>
-          </a:prstGeom>
-          <a:noFill/>
-          <a:ln/>
-        </p:spPr>
-        <p:txBody>
-          <a:bodyPr wrap="square" lIns="0" tIns="0" rIns="0" bIns="0" rtlCol="0" anchor="ctr"/>
-          <a:lstStyle/>
-          <a:p>
-            <a:pPr algn="ctr" indent="0" marL="0">
-              <a:lnSpc>
-                <a:spcPct val="125000"/>
-              </a:lnSpc>
-              <a:buNone/>
-            </a:pPr>
-            <a:r>
-              <a:rPr lang="en-US" sz="1800" b="1" dirty="0">
-                <a:solidFill>
-                  <a:srgbClr val="25194B"/>
-                </a:solidFill>
-                <a:latin typeface="Cambria" pitchFamily="34" charset="0"/>
-                <a:ea typeface="Cambria" pitchFamily="34" charset="-122"/>
-                <a:cs typeface="Cambria" pitchFamily="34" charset="-120"/>
-              </a:rPr>
-              <a:t>+1,48 điểm   ·   KTC 95% [+0,54; +2,43]</a:t>
-            </a:r>
-            <a:endParaRPr lang="en-US" sz="1800" dirty="0"/>
-          </a:p>
-        </p:txBody>
-      </p:sp>
-      <p:sp>
-        <p:nvSpPr>
-          <p:cNvPr id="15" name="Text 13"/>
-          <p:cNvSpPr/>
-          <p:nvPr/>
-        </p:nvSpPr>
-        <p:spPr>
-          <a:xfrm>
-            <a:off x="502920" y="5285232"/>
-            <a:ext cx="8138160" cy="402336"/>
-          </a:xfrm>
-          <a:prstGeom prst="rect">
-            <a:avLst/>
-          </a:prstGeom>
-          <a:noFill/>
-          <a:ln/>
-        </p:spPr>
-        <p:txBody>
-          <a:bodyPr wrap="square" lIns="0" tIns="0" rIns="0" bIns="0" rtlCol="0" anchor="ctr"/>
-          <a:lstStyle/>
-          <a:p>
-            <a:pPr algn="ctr" indent="0" marL="0">
-              <a:lnSpc>
-                <a:spcPct val="125000"/>
-              </a:lnSpc>
-              <a:buNone/>
-            </a:pPr>
-            <a:r>
-              <a:rPr lang="en-US" sz="1400" b="1" dirty="0">
-                <a:solidFill>
-                  <a:srgbClr val="25194B"/>
-                </a:solidFill>
-                <a:latin typeface="Cambria" pitchFamily="34" charset="0"/>
-                <a:ea typeface="Cambria" pitchFamily="34" charset="-122"/>
-                <a:cs typeface="Cambria" pitchFamily="34" charset="-120"/>
-              </a:rPr>
-              <a:t>Ưu thế vẫn được giữ khi lịch sử không còn là câu chuẩn.</a:t>
-            </a:r>
-            <a:endParaRPr lang="en-US" sz="1400" dirty="0"/>
-          </a:p>
-        </p:txBody>
-      </p:sp>
-      <p:sp>
-        <p:nvSpPr>
-          <p:cNvPr id="16" name="Shape 14"/>
-          <p:cNvSpPr/>
-          <p:nvPr/>
-        </p:nvSpPr>
-        <p:spPr>
-          <a:xfrm>
-            <a:off x="0" y="6620256"/>
-            <a:ext cx="2743200" cy="237744"/>
-          </a:xfrm>
-          <a:prstGeom prst="rect">
-            <a:avLst/>
-          </a:prstGeom>
-          <a:solidFill>
-            <a:srgbClr val="191132"/>
-          </a:solidFill>
-          <a:ln w="12700">
-            <a:solidFill>
-              <a:srgbClr val="191132">
-                <a:alpha val="0"/>
-              </a:srgbClr>
-            </a:solidFill>
-            <a:prstDash val="solid"/>
-          </a:ln>
-        </p:spPr>
-      </p:sp>
-      <p:sp>
-        <p:nvSpPr>
-          <p:cNvPr id="17" name="Shape 15"/>
-          <p:cNvSpPr/>
-          <p:nvPr/>
-        </p:nvSpPr>
-        <p:spPr>
-          <a:xfrm>
-            <a:off x="2743200" y="6620256"/>
-            <a:ext cx="3383280" cy="237744"/>
-          </a:xfrm>
-          <a:prstGeom prst="rect">
-            <a:avLst/>
-          </a:prstGeom>
-          <a:solidFill>
-            <a:srgbClr val="25194B"/>
-          </a:solidFill>
-          <a:ln w="12700">
-            <a:solidFill>
-              <a:srgbClr val="25194B">
-                <a:alpha val="0"/>
-              </a:srgbClr>
-            </a:solidFill>
-            <a:prstDash val="solid"/>
-          </a:ln>
-        </p:spPr>
-      </p:sp>
-      <p:sp>
-        <p:nvSpPr>
-          <p:cNvPr id="18" name="Shape 16"/>
-          <p:cNvSpPr/>
-          <p:nvPr/>
-        </p:nvSpPr>
-        <p:spPr>
-          <a:xfrm>
-            <a:off x="6126480" y="6620256"/>
-            <a:ext cx="1737360" cy="237744"/>
-          </a:xfrm>
-          <a:prstGeom prst="rect">
-            <a:avLst/>
-          </a:prstGeom>
-          <a:solidFill>
-            <a:srgbClr val="4F417A"/>
-          </a:solidFill>
-          <a:ln w="12700">
-            <a:solidFill>
-              <a:srgbClr val="4F417A">
-                <a:alpha val="0"/>
-              </a:srgbClr>
-            </a:solidFill>
-            <a:prstDash val="solid"/>
-          </a:ln>
-        </p:spPr>
-      </p:sp>
-      <p:sp>
-        <p:nvSpPr>
-          <p:cNvPr id="19" name="Shape 17"/>
-          <p:cNvSpPr/>
-          <p:nvPr/>
-        </p:nvSpPr>
-        <p:spPr>
-          <a:xfrm>
-            <a:off x="7863840" y="6620256"/>
-            <a:ext cx="1280160" cy="237744"/>
-          </a:xfrm>
-          <a:prstGeom prst="rect">
-            <a:avLst/>
-          </a:prstGeom>
-          <a:solidFill>
-            <a:srgbClr val="7A7099"/>
-          </a:solidFill>
-          <a:ln w="12700">
-            <a:solidFill>
-              <a:srgbClr val="7A7099">
-                <a:alpha val="0"/>
-              </a:srgbClr>
-            </a:solidFill>
-            <a:prstDash val="solid"/>
-          </a:ln>
-        </p:spPr>
-      </p:sp>
-      <p:sp>
-        <p:nvSpPr>
-          <p:cNvPr id="20" name="Text 18"/>
+          <p:cNvPr id="18" name="Text 16"/>
           <p:cNvSpPr/>
           <p:nvPr/>
         </p:nvSpPr>
@@ -14698,7 +15157,7 @@
       </p:sp>
       <p:sp>
         <p:nvSpPr>
-          <p:cNvPr id="21" name="Text 19"/>
+          <p:cNvPr id="19" name="Text 17"/>
           <p:cNvSpPr/>
           <p:nvPr/>
         </p:nvSpPr>
@@ -14740,7 +15199,7 @@
       </p:sp>
       <p:sp>
         <p:nvSpPr>
-          <p:cNvPr id="22" name="Text 20"/>
+          <p:cNvPr id="20" name="Text 18"/>
           <p:cNvSpPr/>
           <p:nvPr/>
         </p:nvSpPr>
@@ -14782,7 +15241,7 @@
       </p:sp>
       <p:sp>
         <p:nvSpPr>
-          <p:cNvPr id="23" name="Text 21"/>
+          <p:cNvPr id="21" name="Text 19"/>
           <p:cNvSpPr/>
           <p:nvPr/>
         </p:nvSpPr>

--- a/slides/LUAN_VAN_SLIDE_BAO_VE_CONCISE.pptx
+++ b/slides/LUAN_VAN_SLIDE_BAO_VE_CONCISE.pptx
@@ -4177,7 +4177,7 @@
                 <a:ea typeface="Cambria" pitchFamily="34" charset="-122"/>
                 <a:cs typeface="Cambria" pitchFamily="34" charset="-120"/>
               </a:rPr>
-              <a:t>Phương pháp đề xuất</a:t>
+              <a:t>3.1. Thành phần thứ nhất: GRPO-SPICE</a:t>
             </a:r>
             <a:endParaRPr lang="en-US" sz="1820" dirty="0"/>
           </a:p>
@@ -4750,7 +4750,7 @@
               <a:buNone/>
             </a:pPr>
             <a:r>
-              <a:rPr lang="en-US" sz="1440" b="1" dirty="0">
+              <a:rPr lang="en-US" sz="1460" b="1" dirty="0">
                 <a:solidFill>
                   <a:srgbClr val="25194B"/>
                 </a:solidFill>
@@ -4758,9 +4758,9 @@
                 <a:ea typeface="Cambria" pitchFamily="34" charset="-122"/>
                 <a:cs typeface="Cambria" pitchFamily="34" charset="-120"/>
               </a:rPr>
-              <a:t>500 bước cập nhật từ S1 · nhánh đối chứng dùng cùng cấu hình huấn luyện.</a:t>
-            </a:r>
-            <a:endParaRPr lang="en-US" sz="1440" dirty="0"/>
+              <a:t>GRPO-SPICE tối ưu trực tiếp câu hướng dẫn bằng tín hiệu SPICE.</a:t>
+            </a:r>
+            <a:endParaRPr lang="en-US" sz="1460" dirty="0"/>
           </a:p>
         </p:txBody>
       </p:sp>
@@ -5137,7 +5137,7 @@
                 <a:ea typeface="Cambria" pitchFamily="34" charset="-122"/>
                 <a:cs typeface="Cambria" pitchFamily="34" charset="-120"/>
               </a:rPr>
-              <a:t>Phương pháp đề xuất</a:t>
+              <a:t>3.2. Thành phần thứ hai: ACE</a:t>
             </a:r>
             <a:endParaRPr lang="en-US" sz="1820" dirty="0"/>
           </a:p>
@@ -5291,7 +5291,7 @@
               <a:buNone/>
             </a:pPr>
             <a:r>
-              <a:rPr lang="en-US" sz="1400" b="1" dirty="0">
+              <a:rPr lang="en-US" sz="1320" b="1" dirty="0">
                 <a:solidFill>
                   <a:srgbClr val="1A1A1A"/>
                 </a:solidFill>
@@ -5301,17 +5301,17 @@
               </a:rPr>
               <a:t>Truy hồi 4 câu</a:t>
             </a:r>
-            <a:endParaRPr lang="en-US" sz="1400" dirty="0"/>
-          </a:p>
-          <a:p>
-            <a:pPr algn="ctr" indent="0" marL="0">
-              <a:lnSpc>
-                <a:spcPct val="125000"/>
-              </a:lnSpc>
-              <a:buNone/>
-            </a:pPr>
-            <a:r>
-              <a:rPr lang="en-US" sz="1400" b="1" dirty="0">
+            <a:endParaRPr lang="en-US" sz="1320" dirty="0"/>
+          </a:p>
+          <a:p>
+            <a:pPr algn="ctr" indent="0" marL="0">
+              <a:lnSpc>
+                <a:spcPct val="125000"/>
+              </a:lnSpc>
+              <a:buNone/>
+            </a:pPr>
+            <a:r>
+              <a:rPr lang="en-US" sz="1320" b="1" dirty="0">
                 <a:solidFill>
                   <a:srgbClr val="1A1A1A"/>
                 </a:solidFill>
@@ -5319,9 +5319,9 @@
                 <a:ea typeface="Cambria" pitchFamily="34" charset="-122"/>
                 <a:cs typeface="Cambria" pitchFamily="34" charset="-120"/>
               </a:rPr>
-              <a:t>ví dụ từ train</a:t>
-            </a:r>
-            <a:endParaRPr lang="en-US" sz="1400" dirty="0"/>
+              <a:t>ví dụ từ tập huấn luyện</a:t>
+            </a:r>
+            <a:endParaRPr lang="en-US" sz="1320" dirty="0"/>
           </a:p>
         </p:txBody>
       </p:sp>
@@ -5614,7 +5614,7 @@
                 <a:ea typeface="Cambria" pitchFamily="34" charset="-122"/>
                 <a:cs typeface="Cambria" pitchFamily="34" charset="-120"/>
               </a:rPr>
-              <a:t>1 · Câu ứng viên phải giống hoàn toàn một trong bốn câu ví dụ được truy hồi.</a:t>
+              <a:t>1 · Câu ứng viên phải trùng với một trong bốn câu ví dụ được truy hồi.</a:t>
             </a:r>
             <a:endParaRPr lang="en-US" sz="1400" dirty="0"/>
           </a:p>
@@ -6200,7 +6200,7 @@
                 <a:ea typeface="Cambria" pitchFamily="34" charset="-122"/>
                 <a:cs typeface="Cambria" pitchFamily="34" charset="-120"/>
               </a:rPr>
-              <a:t>Thực nghiệm và kết quả</a:t>
+              <a:t>4. Thực nghiệm và kết quả</a:t>
             </a:r>
             <a:endParaRPr lang="en-US" sz="1820" dirty="0"/>
           </a:p>
@@ -6286,7 +6286,7 @@
                 <a:ea typeface="Cambria" pitchFamily="34" charset="-122"/>
                 <a:cs typeface="Cambria" pitchFamily="34" charset="-120"/>
               </a:rPr>
-              <a:t>3B · chưa tinh chỉnh</a:t>
+              <a:t>3B · Base</a:t>
             </a:r>
             <a:endParaRPr lang="en-US" sz="1390" dirty="0"/>
           </a:p>
@@ -6428,7 +6428,7 @@
                 <a:ea typeface="Cambria" pitchFamily="34" charset="-122"/>
                 <a:cs typeface="Cambria" pitchFamily="34" charset="-120"/>
               </a:rPr>
-              <a:t>7B · prompting</a:t>
+              <a:t>7B · Base</a:t>
             </a:r>
             <a:endParaRPr lang="en-US" sz="1390" dirty="0"/>
           </a:p>
@@ -6570,7 +6570,7 @@
                 <a:ea typeface="Cambria" pitchFamily="34" charset="-122"/>
                 <a:cs typeface="Cambria" pitchFamily="34" charset="-120"/>
               </a:rPr>
-              <a:t>3B · S1</a:t>
+              <a:t>3B · baseline S1</a:t>
             </a:r>
             <a:endParaRPr lang="en-US" sz="1390" dirty="0"/>
           </a:p>
@@ -6879,7 +6879,7 @@
                 <a:ea typeface="Cambria" pitchFamily="34" charset="-122"/>
                 <a:cs typeface="Cambria" pitchFamily="34" charset="-120"/>
               </a:rPr>
-              <a:t>3B + GRPO-SPICE cao hơn 7B prompting  +9,14 điểm</a:t>
+              <a:t>3B + GRPO-SPICE cao hơn 7B Base +9,14 điểm</a:t>
             </a:r>
             <a:endParaRPr lang="en-US" sz="1720" dirty="0"/>
           </a:p>
@@ -7302,7 +7302,7 @@
                 <a:ea typeface="Cambria" pitchFamily="34" charset="-122"/>
                 <a:cs typeface="Cambria" pitchFamily="34" charset="-120"/>
               </a:rPr>
-              <a:t>Thực nghiệm và kết quả</a:t>
+              <a:t>4.1. Vai trò của tín hiệu SPICE</a:t>
             </a:r>
             <a:endParaRPr lang="en-US" sz="1820" dirty="0"/>
           </a:p>
@@ -7317,7 +7317,7 @@
         <p:spPr>
           <a:xfrm>
             <a:off x="502920" y="868680"/>
-            <a:ext cx="8138160" cy="475488"/>
+            <a:ext cx="8138160" cy="530352"/>
           </a:xfrm>
           <a:prstGeom prst="rect">
             <a:avLst/>
@@ -7338,7 +7338,7 @@
               <a:buNone/>
             </a:pPr>
             <a:r>
-              <a:rPr lang="en-US" sz="1650" b="1" dirty="0">
+              <a:rPr lang="en-US" sz="1580" b="1" dirty="0">
                 <a:solidFill>
                   <a:srgbClr val="25194B"/>
                 </a:solidFill>
@@ -7346,9 +7346,9 @@
                 <a:ea typeface="Cambria" pitchFamily="34" charset="-122"/>
                 <a:cs typeface="Cambria" pitchFamily="34" charset="-120"/>
               </a:rPr>
-              <a:t>Cùng 500 bước GRPO, mức tăng chỉ xuất hiện khi điểm SPICE vẫn gắn với đúng mẫu.</a:t>
-            </a:r>
-            <a:endParaRPr lang="en-US" sz="1650" dirty="0"/>
+              <a:t>Cùng 500 bước GRPO, nhánh dùng SPICE từ mẫu khác vẫn ở mức S1; GRPO-SPICE tăng +1,55 điểm.</a:t>
+            </a:r>
+            <a:endParaRPr lang="en-US" sz="1580" dirty="0"/>
           </a:p>
         </p:txBody>
       </p:sp>
@@ -7409,7 +7409,7 @@
               <a:buNone/>
             </a:pPr>
             <a:r>
-              <a:rPr lang="en-US" sz="1380" b="1" dirty="0">
+              <a:rPr lang="en-US" sz="1350" b="1" dirty="0">
                 <a:solidFill>
                   <a:srgbClr val="FFFFFF"/>
                 </a:solidFill>
@@ -7417,9 +7417,9 @@
                 <a:ea typeface="Cambria" pitchFamily="34" charset="-122"/>
                 <a:cs typeface="Cambria" pitchFamily="34" charset="-120"/>
               </a:rPr>
-              <a:t>S1</a:t>
-            </a:r>
-            <a:endParaRPr lang="en-US" sz="1380" dirty="0"/>
+              <a:t>Baseline S1</a:t>
+            </a:r>
+            <a:endParaRPr lang="en-US" sz="1350" dirty="0"/>
           </a:p>
         </p:txBody>
       </p:sp>
@@ -7453,7 +7453,7 @@
               <a:buNone/>
             </a:pPr>
             <a:r>
-              <a:rPr lang="en-US" sz="1380" b="1" dirty="0">
+              <a:rPr lang="en-US" sz="1350" b="1" dirty="0">
                 <a:solidFill>
                   <a:srgbClr val="FFFFFF"/>
                 </a:solidFill>
@@ -7461,9 +7461,9 @@
                 <a:ea typeface="Cambria" pitchFamily="34" charset="-122"/>
                 <a:cs typeface="Cambria" pitchFamily="34" charset="-120"/>
               </a:rPr>
-              <a:t>GRPO + SPICE ghép ngẫu nhiên</a:t>
-            </a:r>
-            <a:endParaRPr lang="en-US" sz="1380" dirty="0"/>
+              <a:t>GRPO + SPICE từ mẫu khác</a:t>
+            </a:r>
+            <a:endParaRPr lang="en-US" sz="1350" dirty="0"/>
           </a:p>
         </p:txBody>
       </p:sp>
@@ -7497,7 +7497,7 @@
               <a:buNone/>
             </a:pPr>
             <a:r>
-              <a:rPr lang="en-US" sz="1380" b="1" dirty="0">
+              <a:rPr lang="en-US" sz="1350" b="1" dirty="0">
                 <a:solidFill>
                   <a:srgbClr val="FFFFFF"/>
                 </a:solidFill>
@@ -7507,7 +7507,7 @@
               </a:rPr>
               <a:t>GRPO-SPICE</a:t>
             </a:r>
-            <a:endParaRPr lang="en-US" sz="1380" dirty="0"/>
+            <a:endParaRPr lang="en-US" sz="1350" dirty="0"/>
           </a:p>
         </p:txBody>
       </p:sp>
@@ -7681,7 +7681,7 @@
                 <a:ea typeface="Cambria" pitchFamily="34" charset="-122"/>
                 <a:cs typeface="Cambria" pitchFamily="34" charset="-120"/>
               </a:rPr>
-              <a:t>Điểm SPICE của nhánh kiểm soát được ghép ngẫu nhiên sang mẫu khác.</a:t>
+              <a:t>Ở cột giữa, điểm SPICE được lấy từ một mẫu khác.</a:t>
             </a:r>
             <a:endParaRPr lang="en-US" sz="1340" dirty="0"/>
           </a:p>
@@ -7750,7 +7750,7 @@
                 <a:ea typeface="Cambria" pitchFamily="34" charset="-122"/>
                 <a:cs typeface="Cambria" pitchFamily="34" charset="-120"/>
               </a:rPr>
-              <a:t>GRPO-SPICE cao hơn nhánh kiểm soát +1,55 điểm · KTC 95% [+0,81; +2,30]</a:t>
+              <a:t>GRPO-SPICE cao hơn nhánh dùng SPICE từ mẫu khác +1,55 điểm · KTC 95% [+0,81; +2,30]</a:t>
             </a:r>
             <a:endParaRPr lang="en-US" sz="1600" dirty="0"/>
           </a:p>
@@ -7792,7 +7792,7 @@
                 <a:ea typeface="Cambria" pitchFamily="34" charset="-122"/>
                 <a:cs typeface="Cambria" pitchFamily="34" charset="-120"/>
               </a:rPr>
-              <a:t>6/6 độ đo chất lượng câu có KTC đều tăng so với nhánh kiểm soát.</a:t>
+              <a:t>6/6 độ đo chất lượng câu có KTC đều tăng trong cùng phép so sánh.</a:t>
             </a:r>
             <a:endParaRPr lang="en-US" sz="1380" dirty="0"/>
           </a:p>
@@ -8171,7 +8171,7 @@
                 <a:ea typeface="Cambria" pitchFamily="34" charset="-122"/>
                 <a:cs typeface="Cambria" pitchFamily="34" charset="-120"/>
               </a:rPr>
-              <a:t>Thực nghiệm và kết quả</a:t>
+              <a:t>4.2. Kết quả trên tập kiểm chính</a:t>
             </a:r>
             <a:endParaRPr lang="en-US" sz="1820" dirty="0"/>
           </a:p>
@@ -8213,7 +8213,7 @@
                 <a:ea typeface="Cambria" pitchFamily="34" charset="-122"/>
                 <a:cs typeface="Cambria" pitchFamily="34" charset="-120"/>
               </a:rPr>
-              <a:t>GRPO-SPICE đạt kết quả tốt nhất trên các độ đo chính.</a:t>
+              <a:t>GRPO-SPICE cao hơn baseline S1 trên các độ đo chính.</a:t>
             </a:r>
             <a:endParaRPr lang="en-US" sz="1670" dirty="0"/>
           </a:p>
@@ -8255,7 +8255,7 @@
         <p:spPr>
           <a:xfrm>
             <a:off x="585216" y="1389888"/>
-            <a:ext cx="7964424" cy="512064"/>
+            <a:ext cx="7973568" cy="566928"/>
           </a:xfrm>
           <a:prstGeom prst="rect">
             <a:avLst/>
@@ -8282,7 +8282,7 @@
         <p:spPr>
           <a:xfrm>
             <a:off x="585216" y="1389888"/>
-            <a:ext cx="1847088" cy="512064"/>
+            <a:ext cx="1847088" cy="566928"/>
           </a:xfrm>
           <a:prstGeom prst="rect">
             <a:avLst/>
@@ -8303,7 +8303,7 @@
               <a:buNone/>
             </a:pPr>
             <a:r>
-              <a:rPr lang="en-US" sz="1340" b="1" dirty="0">
+              <a:rPr lang="en-US" sz="1180" b="1" dirty="0">
                 <a:solidFill>
                   <a:srgbClr val="FFFFFF"/>
                 </a:solidFill>
@@ -8313,20 +8313,284 @@
               </a:rPr>
               <a:t>Mô hình</a:t>
             </a:r>
+            <a:endParaRPr lang="en-US" sz="1180" dirty="0"/>
+          </a:p>
+        </p:txBody>
+      </p:sp>
+      <p:sp>
+        <p:nvSpPr>
+          <p:cNvPr id="8" name="Text 6"/>
+          <p:cNvSpPr/>
+          <p:nvPr/>
+        </p:nvSpPr>
+        <p:spPr>
+          <a:xfrm>
+            <a:off x="2432304" y="1389888"/>
+            <a:ext cx="1417320" cy="566928"/>
+          </a:xfrm>
+          <a:prstGeom prst="rect">
+            <a:avLst/>
+          </a:prstGeom>
+          <a:noFill/>
+          <a:ln/>
+        </p:spPr>
+        <p:txBody>
+          <a:bodyPr wrap="square" lIns="0" tIns="0" rIns="0" bIns="0" rtlCol="0" anchor="ctr">
+            <a:normAutofit/>
+          </a:bodyPr>
+          <a:lstStyle/>
+          <a:p>
+            <a:pPr algn="ctr" indent="0" marL="0">
+              <a:lnSpc>
+                <a:spcPct val="125000"/>
+              </a:lnSpc>
+              <a:buNone/>
+            </a:pPr>
+            <a:r>
+              <a:rPr lang="en-US" sz="1180" b="1" dirty="0">
+                <a:solidFill>
+                  <a:srgbClr val="FFFFFF"/>
+                </a:solidFill>
+                <a:latin typeface="Cambria" pitchFamily="34" charset="0"/>
+                <a:ea typeface="Cambria" pitchFamily="34" charset="-122"/>
+                <a:cs typeface="Cambria" pitchFamily="34" charset="-120"/>
+              </a:rPr>
+              <a:t>Executability</a:t>
+            </a:r>
+            <a:endParaRPr lang="en-US" sz="1180" dirty="0"/>
+          </a:p>
+        </p:txBody>
+      </p:sp>
+      <p:sp>
+        <p:nvSpPr>
+          <p:cNvPr id="9" name="Text 7"/>
+          <p:cNvSpPr/>
+          <p:nvPr/>
+        </p:nvSpPr>
+        <p:spPr>
+          <a:xfrm>
+            <a:off x="3849624" y="1389888"/>
+            <a:ext cx="1261872" cy="566928"/>
+          </a:xfrm>
+          <a:prstGeom prst="rect">
+            <a:avLst/>
+          </a:prstGeom>
+          <a:noFill/>
+          <a:ln/>
+        </p:spPr>
+        <p:txBody>
+          <a:bodyPr wrap="square" lIns="0" tIns="0" rIns="0" bIns="0" rtlCol="0" anchor="ctr">
+            <a:normAutofit/>
+          </a:bodyPr>
+          <a:lstStyle/>
+          <a:p>
+            <a:pPr algn="ctr" indent="0" marL="0">
+              <a:lnSpc>
+                <a:spcPct val="125000"/>
+              </a:lnSpc>
+              <a:buNone/>
+            </a:pPr>
+            <a:r>
+              <a:rPr lang="en-US" sz="1180" b="1" dirty="0">
+                <a:solidFill>
+                  <a:srgbClr val="FFFFFF"/>
+                </a:solidFill>
+                <a:latin typeface="Cambria" pitchFamily="34" charset="0"/>
+                <a:ea typeface="Cambria" pitchFamily="34" charset="-122"/>
+                <a:cs typeface="Cambria" pitchFamily="34" charset="-120"/>
+              </a:rPr>
+              <a:t>Hộp phần tử</a:t>
+            </a:r>
+            <a:endParaRPr lang="en-US" sz="1180" dirty="0"/>
+          </a:p>
+        </p:txBody>
+      </p:sp>
+      <p:sp>
+        <p:nvSpPr>
+          <p:cNvPr id="10" name="Text 8"/>
+          <p:cNvSpPr/>
+          <p:nvPr/>
+        </p:nvSpPr>
+        <p:spPr>
+          <a:xfrm>
+            <a:off x="5111496" y="1389888"/>
+            <a:ext cx="1261872" cy="566928"/>
+          </a:xfrm>
+          <a:prstGeom prst="rect">
+            <a:avLst/>
+          </a:prstGeom>
+          <a:noFill/>
+          <a:ln/>
+        </p:spPr>
+        <p:txBody>
+          <a:bodyPr wrap="square" lIns="0" tIns="0" rIns="0" bIns="0" rtlCol="0" anchor="ctr">
+            <a:normAutofit/>
+          </a:bodyPr>
+          <a:lstStyle/>
+          <a:p>
+            <a:pPr algn="ctr" indent="0" marL="0">
+              <a:lnSpc>
+                <a:spcPct val="125000"/>
+              </a:lnSpc>
+              <a:buNone/>
+            </a:pPr>
+            <a:r>
+              <a:rPr lang="en-US" sz="1180" b="1" dirty="0">
+                <a:solidFill>
+                  <a:srgbClr val="FFFFFF"/>
+                </a:solidFill>
+                <a:latin typeface="Cambria" pitchFamily="34" charset="0"/>
+                <a:ea typeface="Cambria" pitchFamily="34" charset="-122"/>
+                <a:cs typeface="Cambria" pitchFamily="34" charset="-120"/>
+              </a:rPr>
+              <a:t>AitW đầy đủ</a:t>
+            </a:r>
+            <a:endParaRPr lang="en-US" sz="1180" dirty="0"/>
+          </a:p>
+        </p:txBody>
+      </p:sp>
+      <p:sp>
+        <p:nvSpPr>
+          <p:cNvPr id="11" name="Text 9"/>
+          <p:cNvSpPr/>
+          <p:nvPr/>
+        </p:nvSpPr>
+        <p:spPr>
+          <a:xfrm>
+            <a:off x="6373368" y="1389888"/>
+            <a:ext cx="960120" cy="566928"/>
+          </a:xfrm>
+          <a:prstGeom prst="rect">
+            <a:avLst/>
+          </a:prstGeom>
+          <a:noFill/>
+          <a:ln/>
+        </p:spPr>
+        <p:txBody>
+          <a:bodyPr wrap="square" lIns="0" tIns="0" rIns="0" bIns="0" rtlCol="0" anchor="ctr">
+            <a:normAutofit/>
+          </a:bodyPr>
+          <a:lstStyle/>
+          <a:p>
+            <a:pPr algn="ctr" indent="0" marL="0">
+              <a:lnSpc>
+                <a:spcPct val="125000"/>
+              </a:lnSpc>
+              <a:buNone/>
+            </a:pPr>
+            <a:r>
+              <a:rPr lang="en-US" sz="1180" b="1" dirty="0">
+                <a:solidFill>
+                  <a:srgbClr val="FFFFFF"/>
+                </a:solidFill>
+                <a:latin typeface="Cambria" pitchFamily="34" charset="0"/>
+                <a:ea typeface="Cambria" pitchFamily="34" charset="-122"/>
+                <a:cs typeface="Cambria" pitchFamily="34" charset="-120"/>
+              </a:rPr>
+              <a:t>SPICE</a:t>
+            </a:r>
+            <a:endParaRPr lang="en-US" sz="1180" dirty="0"/>
+          </a:p>
+        </p:txBody>
+      </p:sp>
+      <p:sp>
+        <p:nvSpPr>
+          <p:cNvPr id="12" name="Text 10"/>
+          <p:cNvSpPr/>
+          <p:nvPr/>
+        </p:nvSpPr>
+        <p:spPr>
+          <a:xfrm>
+            <a:off x="7333488" y="1389888"/>
+            <a:ext cx="1225296" cy="566928"/>
+          </a:xfrm>
+          <a:prstGeom prst="rect">
+            <a:avLst/>
+          </a:prstGeom>
+          <a:noFill/>
+          <a:ln/>
+        </p:spPr>
+        <p:txBody>
+          <a:bodyPr wrap="square" lIns="0" tIns="0" rIns="0" bIns="0" rtlCol="0" anchor="ctr">
+            <a:normAutofit/>
+          </a:bodyPr>
+          <a:lstStyle/>
+          <a:p>
+            <a:pPr algn="ctr" indent="0" marL="0">
+              <a:lnSpc>
+                <a:spcPct val="125000"/>
+              </a:lnSpc>
+              <a:buNone/>
+            </a:pPr>
+            <a:r>
+              <a:rPr lang="en-US" sz="1180" b="1" dirty="0">
+                <a:solidFill>
+                  <a:srgbClr val="FFFFFF"/>
+                </a:solidFill>
+                <a:latin typeface="Cambria" pitchFamily="34" charset="0"/>
+                <a:ea typeface="Cambria" pitchFamily="34" charset="-122"/>
+                <a:cs typeface="Cambria" pitchFamily="34" charset="-120"/>
+              </a:rPr>
+              <a:t>CIDEr-D</a:t>
+            </a:r>
+            <a:endParaRPr lang="en-US" sz="1180" dirty="0"/>
+          </a:p>
+        </p:txBody>
+      </p:sp>
+      <p:sp>
+        <p:nvSpPr>
+          <p:cNvPr id="13" name="Text 11"/>
+          <p:cNvSpPr/>
+          <p:nvPr/>
+        </p:nvSpPr>
+        <p:spPr>
+          <a:xfrm>
+            <a:off x="585216" y="1956816"/>
+            <a:ext cx="1847088" cy="603504"/>
+          </a:xfrm>
+          <a:prstGeom prst="rect">
+            <a:avLst/>
+          </a:prstGeom>
+          <a:noFill/>
+          <a:ln/>
+        </p:spPr>
+        <p:txBody>
+          <a:bodyPr wrap="square" lIns="0" tIns="0" rIns="0" bIns="0" rtlCol="0" anchor="ctr">
+            <a:normAutofit/>
+          </a:bodyPr>
+          <a:lstStyle/>
+          <a:p>
+            <a:pPr algn="l" indent="0" marL="0">
+              <a:lnSpc>
+                <a:spcPct val="125000"/>
+              </a:lnSpc>
+              <a:buNone/>
+            </a:pPr>
+            <a:r>
+              <a:rPr lang="en-US" sz="1340" dirty="0">
+                <a:solidFill>
+                  <a:srgbClr val="1A1A1A"/>
+                </a:solidFill>
+                <a:latin typeface="Cambria" pitchFamily="34" charset="0"/>
+                <a:ea typeface="Cambria" pitchFamily="34" charset="-122"/>
+                <a:cs typeface="Cambria" pitchFamily="34" charset="-120"/>
+              </a:rPr>
+              <a:t>Base</a:t>
+            </a:r>
             <a:endParaRPr lang="en-US" sz="1340" dirty="0"/>
           </a:p>
         </p:txBody>
       </p:sp>
       <p:sp>
         <p:nvSpPr>
-          <p:cNvPr id="8" name="Text 6"/>
-          <p:cNvSpPr/>
-          <p:nvPr/>
-        </p:nvSpPr>
-        <p:spPr>
-          <a:xfrm>
-            <a:off x="2432304" y="1389888"/>
-            <a:ext cx="1078992" cy="512064"/>
+          <p:cNvPr id="14" name="Text 12"/>
+          <p:cNvSpPr/>
+          <p:nvPr/>
+        </p:nvSpPr>
+        <p:spPr>
+          <a:xfrm>
+            <a:off x="2432304" y="1956816"/>
+            <a:ext cx="1417320" cy="603504"/>
           </a:xfrm>
           <a:prstGeom prst="rect">
             <a:avLst/>
@@ -8347,15 +8611,15 @@
               <a:buNone/>
             </a:pPr>
             <a:r>
-              <a:rPr lang="en-US" sz="1340" b="1" dirty="0">
-                <a:solidFill>
-                  <a:srgbClr val="FFFFFF"/>
-                </a:solidFill>
-                <a:latin typeface="Cambria" pitchFamily="34" charset="0"/>
-                <a:ea typeface="Cambria" pitchFamily="34" charset="-122"/>
-                <a:cs typeface="Cambria" pitchFamily="34" charset="-120"/>
-              </a:rPr>
-              <a:t>Exec.</a:t>
+              <a:rPr lang="en-US" sz="1340" dirty="0">
+                <a:solidFill>
+                  <a:srgbClr val="1A1A1A"/>
+                </a:solidFill>
+                <a:latin typeface="Cambria" pitchFamily="34" charset="0"/>
+                <a:ea typeface="Cambria" pitchFamily="34" charset="-122"/>
+                <a:cs typeface="Cambria" pitchFamily="34" charset="-120"/>
+              </a:rPr>
+              <a:t>47,59</a:t>
             </a:r>
             <a:endParaRPr lang="en-US" sz="1340" dirty="0"/>
           </a:p>
@@ -8363,14 +8627,14 @@
       </p:sp>
       <p:sp>
         <p:nvSpPr>
-          <p:cNvPr id="9" name="Text 7"/>
-          <p:cNvSpPr/>
-          <p:nvPr/>
-        </p:nvSpPr>
-        <p:spPr>
-          <a:xfrm>
-            <a:off x="3511296" y="1389888"/>
-            <a:ext cx="1078992" cy="512064"/>
+          <p:cNvPr id="15" name="Text 13"/>
+          <p:cNvSpPr/>
+          <p:nvPr/>
+        </p:nvSpPr>
+        <p:spPr>
+          <a:xfrm>
+            <a:off x="3849624" y="1956816"/>
+            <a:ext cx="1261872" cy="603504"/>
           </a:xfrm>
           <a:prstGeom prst="rect">
             <a:avLst/>
@@ -8391,15 +8655,15 @@
               <a:buNone/>
             </a:pPr>
             <a:r>
-              <a:rPr lang="en-US" sz="1340" b="1" dirty="0">
-                <a:solidFill>
-                  <a:srgbClr val="FFFFFF"/>
-                </a:solidFill>
-                <a:latin typeface="Cambria" pitchFamily="34" charset="0"/>
-                <a:ea typeface="Cambria" pitchFamily="34" charset="-122"/>
-                <a:cs typeface="Cambria" pitchFamily="34" charset="-120"/>
-              </a:rPr>
-              <a:t>Hộp</a:t>
+              <a:rPr lang="en-US" sz="1340" dirty="0">
+                <a:solidFill>
+                  <a:srgbClr val="1A1A1A"/>
+                </a:solidFill>
+                <a:latin typeface="Cambria" pitchFamily="34" charset="0"/>
+                <a:ea typeface="Cambria" pitchFamily="34" charset="-122"/>
+                <a:cs typeface="Cambria" pitchFamily="34" charset="-120"/>
+              </a:rPr>
+              <a:t>53,60</a:t>
             </a:r>
             <a:endParaRPr lang="en-US" sz="1340" dirty="0"/>
           </a:p>
@@ -8407,14 +8671,14 @@
       </p:sp>
       <p:sp>
         <p:nvSpPr>
-          <p:cNvPr id="10" name="Text 8"/>
-          <p:cNvSpPr/>
-          <p:nvPr/>
-        </p:nvSpPr>
-        <p:spPr>
-          <a:xfrm>
-            <a:off x="4590288" y="1389888"/>
-            <a:ext cx="1078992" cy="512064"/>
+          <p:cNvPr id="16" name="Text 14"/>
+          <p:cNvSpPr/>
+          <p:nvPr/>
+        </p:nvSpPr>
+        <p:spPr>
+          <a:xfrm>
+            <a:off x="5111496" y="1956816"/>
+            <a:ext cx="1261872" cy="603504"/>
           </a:xfrm>
           <a:prstGeom prst="rect">
             <a:avLst/>
@@ -8435,15 +8699,15 @@
               <a:buNone/>
             </a:pPr>
             <a:r>
-              <a:rPr lang="en-US" sz="1340" b="1" dirty="0">
-                <a:solidFill>
-                  <a:srgbClr val="FFFFFF"/>
-                </a:solidFill>
-                <a:latin typeface="Cambria" pitchFamily="34" charset="0"/>
-                <a:ea typeface="Cambria" pitchFamily="34" charset="-122"/>
-                <a:cs typeface="Cambria" pitchFamily="34" charset="-120"/>
-              </a:rPr>
-              <a:t>AitW</a:t>
+              <a:rPr lang="en-US" sz="1340" dirty="0">
+                <a:solidFill>
+                  <a:srgbClr val="1A1A1A"/>
+                </a:solidFill>
+                <a:latin typeface="Cambria" pitchFamily="34" charset="0"/>
+                <a:ea typeface="Cambria" pitchFamily="34" charset="-122"/>
+                <a:cs typeface="Cambria" pitchFamily="34" charset="-120"/>
+              </a:rPr>
+              <a:t>63,39</a:t>
             </a:r>
             <a:endParaRPr lang="en-US" sz="1340" dirty="0"/>
           </a:p>
@@ -8451,14 +8715,14 @@
       </p:sp>
       <p:sp>
         <p:nvSpPr>
-          <p:cNvPr id="11" name="Text 9"/>
-          <p:cNvSpPr/>
-          <p:nvPr/>
-        </p:nvSpPr>
-        <p:spPr>
-          <a:xfrm>
-            <a:off x="5669280" y="1389888"/>
-            <a:ext cx="1234440" cy="512064"/>
+          <p:cNvPr id="17" name="Text 15"/>
+          <p:cNvSpPr/>
+          <p:nvPr/>
+        </p:nvSpPr>
+        <p:spPr>
+          <a:xfrm>
+            <a:off x="6373368" y="1956816"/>
+            <a:ext cx="960120" cy="603504"/>
           </a:xfrm>
           <a:prstGeom prst="rect">
             <a:avLst/>
@@ -8479,15 +8743,15 @@
               <a:buNone/>
             </a:pPr>
             <a:r>
-              <a:rPr lang="en-US" sz="1340" b="1" dirty="0">
-                <a:solidFill>
-                  <a:srgbClr val="FFFFFF"/>
-                </a:solidFill>
-                <a:latin typeface="Cambria" pitchFamily="34" charset="0"/>
-                <a:ea typeface="Cambria" pitchFamily="34" charset="-122"/>
-                <a:cs typeface="Cambria" pitchFamily="34" charset="-120"/>
-              </a:rPr>
-              <a:t>SPICE</a:t>
+              <a:rPr lang="en-US" sz="1340" dirty="0">
+                <a:solidFill>
+                  <a:srgbClr val="1A1A1A"/>
+                </a:solidFill>
+                <a:latin typeface="Cambria" pitchFamily="34" charset="0"/>
+                <a:ea typeface="Cambria" pitchFamily="34" charset="-122"/>
+                <a:cs typeface="Cambria" pitchFamily="34" charset="-120"/>
+              </a:rPr>
+              <a:t>18,50</a:t>
             </a:r>
             <a:endParaRPr lang="en-US" sz="1340" dirty="0"/>
           </a:p>
@@ -8495,14 +8759,14 @@
       </p:sp>
       <p:sp>
         <p:nvSpPr>
-          <p:cNvPr id="12" name="Text 10"/>
-          <p:cNvSpPr/>
-          <p:nvPr/>
-        </p:nvSpPr>
-        <p:spPr>
-          <a:xfrm>
-            <a:off x="6903720" y="1389888"/>
-            <a:ext cx="1645920" cy="512064"/>
+          <p:cNvPr id="18" name="Text 16"/>
+          <p:cNvSpPr/>
+          <p:nvPr/>
+        </p:nvSpPr>
+        <p:spPr>
+          <a:xfrm>
+            <a:off x="7333488" y="1956816"/>
+            <a:ext cx="1225296" cy="603504"/>
           </a:xfrm>
           <a:prstGeom prst="rect">
             <a:avLst/>
@@ -8523,15 +8787,15 @@
               <a:buNone/>
             </a:pPr>
             <a:r>
-              <a:rPr lang="en-US" sz="1340" b="1" dirty="0">
-                <a:solidFill>
-                  <a:srgbClr val="FFFFFF"/>
-                </a:solidFill>
-                <a:latin typeface="Cambria" pitchFamily="34" charset="0"/>
-                <a:ea typeface="Cambria" pitchFamily="34" charset="-122"/>
-                <a:cs typeface="Cambria" pitchFamily="34" charset="-120"/>
-              </a:rPr>
-              <a:t>CIDEr-D</a:t>
+              <a:rPr lang="en-US" sz="1340" dirty="0">
+                <a:solidFill>
+                  <a:srgbClr val="1A1A1A"/>
+                </a:solidFill>
+                <a:latin typeface="Cambria" pitchFamily="34" charset="0"/>
+                <a:ea typeface="Cambria" pitchFamily="34" charset="-122"/>
+                <a:cs typeface="Cambria" pitchFamily="34" charset="-120"/>
+              </a:rPr>
+              <a:t>88,00</a:t>
             </a:r>
             <a:endParaRPr lang="en-US" sz="1340" dirty="0"/>
           </a:p>
@@ -8539,278 +8803,14 @@
       </p:sp>
       <p:sp>
         <p:nvSpPr>
-          <p:cNvPr id="13" name="Text 11"/>
-          <p:cNvSpPr/>
-          <p:nvPr/>
-        </p:nvSpPr>
-        <p:spPr>
-          <a:xfrm>
-            <a:off x="585216" y="1901952"/>
-            <a:ext cx="1847088" cy="603504"/>
-          </a:xfrm>
-          <a:prstGeom prst="rect">
-            <a:avLst/>
-          </a:prstGeom>
-          <a:noFill/>
-          <a:ln/>
-        </p:spPr>
-        <p:txBody>
-          <a:bodyPr wrap="square" lIns="0" tIns="0" rIns="0" bIns="0" rtlCol="0" anchor="ctr">
-            <a:normAutofit/>
-          </a:bodyPr>
-          <a:lstStyle/>
-          <a:p>
-            <a:pPr algn="l" indent="0" marL="0">
-              <a:lnSpc>
-                <a:spcPct val="125000"/>
-              </a:lnSpc>
-              <a:buNone/>
-            </a:pPr>
-            <a:r>
-              <a:rPr lang="en-US" sz="1400" dirty="0">
-                <a:solidFill>
-                  <a:srgbClr val="1A1A1A"/>
-                </a:solidFill>
-                <a:latin typeface="Cambria" pitchFamily="34" charset="0"/>
-                <a:ea typeface="Cambria" pitchFamily="34" charset="-122"/>
-                <a:cs typeface="Cambria" pitchFamily="34" charset="-120"/>
-              </a:rPr>
-              <a:t>Base</a:t>
-            </a:r>
-            <a:endParaRPr lang="en-US" sz="1400" dirty="0"/>
-          </a:p>
-        </p:txBody>
-      </p:sp>
-      <p:sp>
-        <p:nvSpPr>
-          <p:cNvPr id="14" name="Text 12"/>
-          <p:cNvSpPr/>
-          <p:nvPr/>
-        </p:nvSpPr>
-        <p:spPr>
-          <a:xfrm>
-            <a:off x="2432304" y="1901952"/>
-            <a:ext cx="1078992" cy="603504"/>
-          </a:xfrm>
-          <a:prstGeom prst="rect">
-            <a:avLst/>
-          </a:prstGeom>
-          <a:noFill/>
-          <a:ln/>
-        </p:spPr>
-        <p:txBody>
-          <a:bodyPr wrap="square" lIns="0" tIns="0" rIns="0" bIns="0" rtlCol="0" anchor="ctr">
-            <a:normAutofit/>
-          </a:bodyPr>
-          <a:lstStyle/>
-          <a:p>
-            <a:pPr algn="ctr" indent="0" marL="0">
-              <a:lnSpc>
-                <a:spcPct val="125000"/>
-              </a:lnSpc>
-              <a:buNone/>
-            </a:pPr>
-            <a:r>
-              <a:rPr lang="en-US" sz="1400" dirty="0">
-                <a:solidFill>
-                  <a:srgbClr val="1A1A1A"/>
-                </a:solidFill>
-                <a:latin typeface="Cambria" pitchFamily="34" charset="0"/>
-                <a:ea typeface="Cambria" pitchFamily="34" charset="-122"/>
-                <a:cs typeface="Cambria" pitchFamily="34" charset="-120"/>
-              </a:rPr>
-              <a:t>47,59</a:t>
-            </a:r>
-            <a:endParaRPr lang="en-US" sz="1400" dirty="0"/>
-          </a:p>
-        </p:txBody>
-      </p:sp>
-      <p:sp>
-        <p:nvSpPr>
-          <p:cNvPr id="15" name="Text 13"/>
-          <p:cNvSpPr/>
-          <p:nvPr/>
-        </p:nvSpPr>
-        <p:spPr>
-          <a:xfrm>
-            <a:off x="3511296" y="1901952"/>
-            <a:ext cx="1078992" cy="603504"/>
-          </a:xfrm>
-          <a:prstGeom prst="rect">
-            <a:avLst/>
-          </a:prstGeom>
-          <a:noFill/>
-          <a:ln/>
-        </p:spPr>
-        <p:txBody>
-          <a:bodyPr wrap="square" lIns="0" tIns="0" rIns="0" bIns="0" rtlCol="0" anchor="ctr">
-            <a:normAutofit/>
-          </a:bodyPr>
-          <a:lstStyle/>
-          <a:p>
-            <a:pPr algn="ctr" indent="0" marL="0">
-              <a:lnSpc>
-                <a:spcPct val="125000"/>
-              </a:lnSpc>
-              <a:buNone/>
-            </a:pPr>
-            <a:r>
-              <a:rPr lang="en-US" sz="1400" dirty="0">
-                <a:solidFill>
-                  <a:srgbClr val="1A1A1A"/>
-                </a:solidFill>
-                <a:latin typeface="Cambria" pitchFamily="34" charset="0"/>
-                <a:ea typeface="Cambria" pitchFamily="34" charset="-122"/>
-                <a:cs typeface="Cambria" pitchFamily="34" charset="-120"/>
-              </a:rPr>
-              <a:t>53,60</a:t>
-            </a:r>
-            <a:endParaRPr lang="en-US" sz="1400" dirty="0"/>
-          </a:p>
-        </p:txBody>
-      </p:sp>
-      <p:sp>
-        <p:nvSpPr>
-          <p:cNvPr id="16" name="Text 14"/>
-          <p:cNvSpPr/>
-          <p:nvPr/>
-        </p:nvSpPr>
-        <p:spPr>
-          <a:xfrm>
-            <a:off x="4590288" y="1901952"/>
-            <a:ext cx="1078992" cy="603504"/>
-          </a:xfrm>
-          <a:prstGeom prst="rect">
-            <a:avLst/>
-          </a:prstGeom>
-          <a:noFill/>
-          <a:ln/>
-        </p:spPr>
-        <p:txBody>
-          <a:bodyPr wrap="square" lIns="0" tIns="0" rIns="0" bIns="0" rtlCol="0" anchor="ctr">
-            <a:normAutofit/>
-          </a:bodyPr>
-          <a:lstStyle/>
-          <a:p>
-            <a:pPr algn="ctr" indent="0" marL="0">
-              <a:lnSpc>
-                <a:spcPct val="125000"/>
-              </a:lnSpc>
-              <a:buNone/>
-            </a:pPr>
-            <a:r>
-              <a:rPr lang="en-US" sz="1400" dirty="0">
-                <a:solidFill>
-                  <a:srgbClr val="1A1A1A"/>
-                </a:solidFill>
-                <a:latin typeface="Cambria" pitchFamily="34" charset="0"/>
-                <a:ea typeface="Cambria" pitchFamily="34" charset="-122"/>
-                <a:cs typeface="Cambria" pitchFamily="34" charset="-120"/>
-              </a:rPr>
-              <a:t>63,39</a:t>
-            </a:r>
-            <a:endParaRPr lang="en-US" sz="1400" dirty="0"/>
-          </a:p>
-        </p:txBody>
-      </p:sp>
-      <p:sp>
-        <p:nvSpPr>
-          <p:cNvPr id="17" name="Text 15"/>
-          <p:cNvSpPr/>
-          <p:nvPr/>
-        </p:nvSpPr>
-        <p:spPr>
-          <a:xfrm>
-            <a:off x="5669280" y="1901952"/>
-            <a:ext cx="1234440" cy="603504"/>
-          </a:xfrm>
-          <a:prstGeom prst="rect">
-            <a:avLst/>
-          </a:prstGeom>
-          <a:noFill/>
-          <a:ln/>
-        </p:spPr>
-        <p:txBody>
-          <a:bodyPr wrap="square" lIns="0" tIns="0" rIns="0" bIns="0" rtlCol="0" anchor="ctr">
-            <a:normAutofit/>
-          </a:bodyPr>
-          <a:lstStyle/>
-          <a:p>
-            <a:pPr algn="ctr" indent="0" marL="0">
-              <a:lnSpc>
-                <a:spcPct val="125000"/>
-              </a:lnSpc>
-              <a:buNone/>
-            </a:pPr>
-            <a:r>
-              <a:rPr lang="en-US" sz="1400" dirty="0">
-                <a:solidFill>
-                  <a:srgbClr val="1A1A1A"/>
-                </a:solidFill>
-                <a:latin typeface="Cambria" pitchFamily="34" charset="0"/>
-                <a:ea typeface="Cambria" pitchFamily="34" charset="-122"/>
-                <a:cs typeface="Cambria" pitchFamily="34" charset="-120"/>
-              </a:rPr>
-              <a:t>18,50</a:t>
-            </a:r>
-            <a:endParaRPr lang="en-US" sz="1400" dirty="0"/>
-          </a:p>
-        </p:txBody>
-      </p:sp>
-      <p:sp>
-        <p:nvSpPr>
-          <p:cNvPr id="18" name="Text 16"/>
-          <p:cNvSpPr/>
-          <p:nvPr/>
-        </p:nvSpPr>
-        <p:spPr>
-          <a:xfrm>
-            <a:off x="6903720" y="1901952"/>
-            <a:ext cx="1645920" cy="603504"/>
-          </a:xfrm>
-          <a:prstGeom prst="rect">
-            <a:avLst/>
-          </a:prstGeom>
-          <a:noFill/>
-          <a:ln/>
-        </p:spPr>
-        <p:txBody>
-          <a:bodyPr wrap="square" lIns="0" tIns="0" rIns="0" bIns="0" rtlCol="0" anchor="ctr">
-            <a:normAutofit/>
-          </a:bodyPr>
-          <a:lstStyle/>
-          <a:p>
-            <a:pPr algn="ctr" indent="0" marL="0">
-              <a:lnSpc>
-                <a:spcPct val="125000"/>
-              </a:lnSpc>
-              <a:buNone/>
-            </a:pPr>
-            <a:r>
-              <a:rPr lang="en-US" sz="1400" dirty="0">
-                <a:solidFill>
-                  <a:srgbClr val="1A1A1A"/>
-                </a:solidFill>
-                <a:latin typeface="Cambria" pitchFamily="34" charset="0"/>
-                <a:ea typeface="Cambria" pitchFamily="34" charset="-122"/>
-                <a:cs typeface="Cambria" pitchFamily="34" charset="-120"/>
-              </a:rPr>
-              <a:t>88,00</a:t>
-            </a:r>
-            <a:endParaRPr lang="en-US" sz="1400" dirty="0"/>
-          </a:p>
-        </p:txBody>
-      </p:sp>
-      <p:sp>
-        <p:nvSpPr>
           <p:cNvPr id="19" name="Shape 17"/>
           <p:cNvSpPr/>
           <p:nvPr/>
         </p:nvSpPr>
         <p:spPr>
           <a:xfrm>
-            <a:off x="585216" y="2505456"/>
-            <a:ext cx="7964424" cy="0"/>
+            <a:off x="585216" y="2560320"/>
+            <a:ext cx="7973568" cy="0"/>
           </a:xfrm>
           <a:prstGeom prst="line">
             <a:avLst/>
@@ -8833,7 +8833,7 @@
         </p:nvSpPr>
         <p:spPr>
           <a:xfrm>
-            <a:off x="585216" y="2505456"/>
+            <a:off x="585216" y="2560320"/>
             <a:ext cx="1847088" cy="603504"/>
           </a:xfrm>
           <a:prstGeom prst="rect">
@@ -8855,7 +8855,7 @@
               <a:buNone/>
             </a:pPr>
             <a:r>
-              <a:rPr lang="en-US" sz="1400" dirty="0">
+              <a:rPr lang="en-US" sz="1340" dirty="0">
                 <a:solidFill>
                   <a:srgbClr val="1A1A1A"/>
                 </a:solidFill>
@@ -8863,9 +8863,9 @@
                 <a:ea typeface="Cambria" pitchFamily="34" charset="-122"/>
                 <a:cs typeface="Cambria" pitchFamily="34" charset="-120"/>
               </a:rPr>
-              <a:t>S1</a:t>
-            </a:r>
-            <a:endParaRPr lang="en-US" sz="1400" dirty="0"/>
+              <a:t>Baseline S1</a:t>
+            </a:r>
+            <a:endParaRPr lang="en-US" sz="1340" dirty="0"/>
           </a:p>
         </p:txBody>
       </p:sp>
@@ -8877,8 +8877,8 @@
         </p:nvSpPr>
         <p:spPr>
           <a:xfrm>
-            <a:off x="2432304" y="2505456"/>
-            <a:ext cx="1078992" cy="603504"/>
+            <a:off x="2432304" y="2560320"/>
+            <a:ext cx="1417320" cy="603504"/>
           </a:xfrm>
           <a:prstGeom prst="rect">
             <a:avLst/>
@@ -8899,7 +8899,7 @@
               <a:buNone/>
             </a:pPr>
             <a:r>
-              <a:rPr lang="en-US" sz="1400" dirty="0">
+              <a:rPr lang="en-US" sz="1340" dirty="0">
                 <a:solidFill>
                   <a:srgbClr val="1A1A1A"/>
                 </a:solidFill>
@@ -8909,7 +8909,7 @@
               </a:rPr>
               <a:t>59,11</a:t>
             </a:r>
-            <a:endParaRPr lang="en-US" sz="1400" dirty="0"/>
+            <a:endParaRPr lang="en-US" sz="1340" dirty="0"/>
           </a:p>
         </p:txBody>
       </p:sp>
@@ -8921,8 +8921,8 @@
         </p:nvSpPr>
         <p:spPr>
           <a:xfrm>
-            <a:off x="3511296" y="2505456"/>
-            <a:ext cx="1078992" cy="603504"/>
+            <a:off x="3849624" y="2560320"/>
+            <a:ext cx="1261872" cy="603504"/>
           </a:xfrm>
           <a:prstGeom prst="rect">
             <a:avLst/>
@@ -8943,7 +8943,7 @@
               <a:buNone/>
             </a:pPr>
             <a:r>
-              <a:rPr lang="en-US" sz="1400" dirty="0">
+              <a:rPr lang="en-US" sz="1340" dirty="0">
                 <a:solidFill>
                   <a:srgbClr val="1A1A1A"/>
                 </a:solidFill>
@@ -8953,7 +8953,7 @@
               </a:rPr>
               <a:t>65,49</a:t>
             </a:r>
-            <a:endParaRPr lang="en-US" sz="1400" dirty="0"/>
+            <a:endParaRPr lang="en-US" sz="1340" dirty="0"/>
           </a:p>
         </p:txBody>
       </p:sp>
@@ -8965,8 +8965,8 @@
         </p:nvSpPr>
         <p:spPr>
           <a:xfrm>
-            <a:off x="4590288" y="2505456"/>
-            <a:ext cx="1078992" cy="603504"/>
+            <a:off x="5111496" y="2560320"/>
+            <a:ext cx="1261872" cy="603504"/>
           </a:xfrm>
           <a:prstGeom prst="rect">
             <a:avLst/>
@@ -8987,7 +8987,7 @@
               <a:buNone/>
             </a:pPr>
             <a:r>
-              <a:rPr lang="en-US" sz="1400" dirty="0">
+              <a:rPr lang="en-US" sz="1340" dirty="0">
                 <a:solidFill>
                   <a:srgbClr val="1A1A1A"/>
                 </a:solidFill>
@@ -8997,7 +8997,7 @@
               </a:rPr>
               <a:t>74,37</a:t>
             </a:r>
-            <a:endParaRPr lang="en-US" sz="1400" dirty="0"/>
+            <a:endParaRPr lang="en-US" sz="1340" dirty="0"/>
           </a:p>
         </p:txBody>
       </p:sp>
@@ -9009,8 +9009,8 @@
         </p:nvSpPr>
         <p:spPr>
           <a:xfrm>
-            <a:off x="5669280" y="2505456"/>
-            <a:ext cx="1234440" cy="603504"/>
+            <a:off x="6373368" y="2560320"/>
+            <a:ext cx="960120" cy="603504"/>
           </a:xfrm>
           <a:prstGeom prst="rect">
             <a:avLst/>
@@ -9031,7 +9031,7 @@
               <a:buNone/>
             </a:pPr>
             <a:r>
-              <a:rPr lang="en-US" sz="1400" dirty="0">
+              <a:rPr lang="en-US" sz="1340" dirty="0">
                 <a:solidFill>
                   <a:srgbClr val="1A1A1A"/>
                 </a:solidFill>
@@ -9041,7 +9041,7 @@
               </a:rPr>
               <a:t>44,37</a:t>
             </a:r>
-            <a:endParaRPr lang="en-US" sz="1400" dirty="0"/>
+            <a:endParaRPr lang="en-US" sz="1340" dirty="0"/>
           </a:p>
         </p:txBody>
       </p:sp>
@@ -9053,8 +9053,8 @@
         </p:nvSpPr>
         <p:spPr>
           <a:xfrm>
-            <a:off x="6903720" y="2505456"/>
-            <a:ext cx="1645920" cy="603504"/>
+            <a:off x="7333488" y="2560320"/>
+            <a:ext cx="1225296" cy="603504"/>
           </a:xfrm>
           <a:prstGeom prst="rect">
             <a:avLst/>
@@ -9075,7 +9075,7 @@
               <a:buNone/>
             </a:pPr>
             <a:r>
-              <a:rPr lang="en-US" sz="1400" dirty="0">
+              <a:rPr lang="en-US" sz="1340" dirty="0">
                 <a:solidFill>
                   <a:srgbClr val="1A1A1A"/>
                 </a:solidFill>
@@ -9085,7 +9085,7 @@
               </a:rPr>
               <a:t>416,12</a:t>
             </a:r>
-            <a:endParaRPr lang="en-US" sz="1400" dirty="0"/>
+            <a:endParaRPr lang="en-US" sz="1340" dirty="0"/>
           </a:p>
         </p:txBody>
       </p:sp>
@@ -9097,8 +9097,8 @@
         </p:nvSpPr>
         <p:spPr>
           <a:xfrm>
-            <a:off x="585216" y="3108960"/>
-            <a:ext cx="7964424" cy="0"/>
+            <a:off x="585216" y="3163824"/>
+            <a:ext cx="7973568" cy="0"/>
           </a:xfrm>
           <a:prstGeom prst="line">
             <a:avLst/>
@@ -9121,7 +9121,7 @@
         </p:nvSpPr>
         <p:spPr>
           <a:xfrm>
-            <a:off x="585216" y="3108960"/>
+            <a:off x="585216" y="3163824"/>
             <a:ext cx="1847088" cy="658368"/>
           </a:xfrm>
           <a:prstGeom prst="rect">
@@ -9143,7 +9143,7 @@
               <a:buNone/>
             </a:pPr>
             <a:r>
-              <a:rPr lang="en-US" sz="1400" b="1" dirty="0">
+              <a:rPr lang="en-US" sz="1340" b="1" dirty="0">
                 <a:solidFill>
                   <a:srgbClr val="4F417A"/>
                 </a:solidFill>
@@ -9153,7 +9153,7 @@
               </a:rPr>
               <a:t>GRPO-SPICE</a:t>
             </a:r>
-            <a:endParaRPr lang="en-US" sz="1400" dirty="0"/>
+            <a:endParaRPr lang="en-US" sz="1340" dirty="0"/>
           </a:p>
         </p:txBody>
       </p:sp>
@@ -9165,8 +9165,8 @@
         </p:nvSpPr>
         <p:spPr>
           <a:xfrm>
-            <a:off x="2432304" y="3108960"/>
-            <a:ext cx="1078992" cy="658368"/>
+            <a:off x="2432304" y="3163824"/>
+            <a:ext cx="1417320" cy="658368"/>
           </a:xfrm>
           <a:prstGeom prst="rect">
             <a:avLst/>
@@ -9187,7 +9187,7 @@
               <a:buNone/>
             </a:pPr>
             <a:r>
-              <a:rPr lang="en-US" sz="1400" b="1" dirty="0">
+              <a:rPr lang="en-US" sz="1340" b="1" dirty="0">
                 <a:solidFill>
                   <a:srgbClr val="4F417A"/>
                 </a:solidFill>
@@ -9197,7 +9197,7 @@
               </a:rPr>
               <a:t>60,65</a:t>
             </a:r>
-            <a:endParaRPr lang="en-US" sz="1400" dirty="0"/>
+            <a:endParaRPr lang="en-US" sz="1340" dirty="0"/>
           </a:p>
         </p:txBody>
       </p:sp>
@@ -9209,8 +9209,8 @@
         </p:nvSpPr>
         <p:spPr>
           <a:xfrm>
-            <a:off x="3511296" y="3108960"/>
-            <a:ext cx="1078992" cy="658368"/>
+            <a:off x="3849624" y="3163824"/>
+            <a:ext cx="1261872" cy="658368"/>
           </a:xfrm>
           <a:prstGeom prst="rect">
             <a:avLst/>
@@ -9231,7 +9231,7 @@
               <a:buNone/>
             </a:pPr>
             <a:r>
-              <a:rPr lang="en-US" sz="1400" b="1" dirty="0">
+              <a:rPr lang="en-US" sz="1340" b="1" dirty="0">
                 <a:solidFill>
                   <a:srgbClr val="4F417A"/>
                 </a:solidFill>
@@ -9241,7 +9241,7 @@
               </a:rPr>
               <a:t>67,02</a:t>
             </a:r>
-            <a:endParaRPr lang="en-US" sz="1400" dirty="0"/>
+            <a:endParaRPr lang="en-US" sz="1340" dirty="0"/>
           </a:p>
         </p:txBody>
       </p:sp>
@@ -9253,8 +9253,8 @@
         </p:nvSpPr>
         <p:spPr>
           <a:xfrm>
-            <a:off x="4590288" y="3108960"/>
-            <a:ext cx="1078992" cy="658368"/>
+            <a:off x="5111496" y="3163824"/>
+            <a:ext cx="1261872" cy="658368"/>
           </a:xfrm>
           <a:prstGeom prst="rect">
             <a:avLst/>
@@ -9275,7 +9275,7 @@
               <a:buNone/>
             </a:pPr>
             <a:r>
-              <a:rPr lang="en-US" sz="1400" b="1" dirty="0">
+              <a:rPr lang="en-US" sz="1340" b="1" dirty="0">
                 <a:solidFill>
                   <a:srgbClr val="4F417A"/>
                 </a:solidFill>
@@ -9285,7 +9285,7 @@
               </a:rPr>
               <a:t>76,25</a:t>
             </a:r>
-            <a:endParaRPr lang="en-US" sz="1400" dirty="0"/>
+            <a:endParaRPr lang="en-US" sz="1340" dirty="0"/>
           </a:p>
         </p:txBody>
       </p:sp>
@@ -9297,8 +9297,8 @@
         </p:nvSpPr>
         <p:spPr>
           <a:xfrm>
-            <a:off x="5669280" y="3108960"/>
-            <a:ext cx="1234440" cy="658368"/>
+            <a:off x="6373368" y="3163824"/>
+            <a:ext cx="960120" cy="658368"/>
           </a:xfrm>
           <a:prstGeom prst="rect">
             <a:avLst/>
@@ -9319,7 +9319,7 @@
               <a:buNone/>
             </a:pPr>
             <a:r>
-              <a:rPr lang="en-US" sz="1400" b="1" dirty="0">
+              <a:rPr lang="en-US" sz="1340" b="1" dirty="0">
                 <a:solidFill>
                   <a:srgbClr val="4F417A"/>
                 </a:solidFill>
@@ -9329,7 +9329,7 @@
               </a:rPr>
               <a:t>45,79</a:t>
             </a:r>
-            <a:endParaRPr lang="en-US" sz="1400" dirty="0"/>
+            <a:endParaRPr lang="en-US" sz="1340" dirty="0"/>
           </a:p>
         </p:txBody>
       </p:sp>
@@ -9341,8 +9341,8 @@
         </p:nvSpPr>
         <p:spPr>
           <a:xfrm>
-            <a:off x="6903720" y="3108960"/>
-            <a:ext cx="1645920" cy="658368"/>
+            <a:off x="7333488" y="3163824"/>
+            <a:ext cx="1225296" cy="658368"/>
           </a:xfrm>
           <a:prstGeom prst="rect">
             <a:avLst/>
@@ -9363,7 +9363,7 @@
               <a:buNone/>
             </a:pPr>
             <a:r>
-              <a:rPr lang="en-US" sz="1400" b="1" dirty="0">
+              <a:rPr lang="en-US" sz="1340" b="1" dirty="0">
                 <a:solidFill>
                   <a:srgbClr val="4F417A"/>
                 </a:solidFill>
@@ -9373,7 +9373,7 @@
               </a:rPr>
               <a:t>430,05</a:t>
             </a:r>
-            <a:endParaRPr lang="en-US" sz="1400" dirty="0"/>
+            <a:endParaRPr lang="en-US" sz="1340" dirty="0"/>
           </a:p>
         </p:txBody>
       </p:sp>
@@ -10052,7 +10052,7 @@
                 <a:ea typeface="Cambria" pitchFamily="34" charset="-122"/>
                 <a:cs typeface="Cambria" pitchFamily="34" charset="-120"/>
               </a:rPr>
-              <a:t>Thực nghiệm và kết quả</a:t>
+              <a:t>4.3. Kết quả trên tác vụ mới (ACU)</a:t>
             </a:r>
             <a:endParaRPr lang="en-US" sz="1820" dirty="0"/>
           </a:p>
@@ -10066,27 +10066,29 @@
         </p:nvSpPr>
         <p:spPr>
           <a:xfrm>
-            <a:off x="502920" y="859536"/>
-            <a:ext cx="8138160" cy="438912"/>
-          </a:xfrm>
-          <a:prstGeom prst="rect">
-            <a:avLst/>
-          </a:prstGeom>
-          <a:noFill/>
-          <a:ln/>
-        </p:spPr>
-        <p:txBody>
-          <a:bodyPr wrap="square" lIns="0" tIns="0" rIns="0" bIns="0" rtlCol="0" anchor="ctr"/>
-          <a:lstStyle/>
-          <a:p>
-            <a:pPr algn="ctr" indent="0" marL="0">
-              <a:lnSpc>
-                <a:spcPct val="125000"/>
-              </a:lnSpc>
-              <a:buNone/>
-            </a:pPr>
-            <a:r>
-              <a:rPr lang="en-US" sz="1650" b="1" dirty="0">
+            <a:off x="502920" y="822960"/>
+            <a:ext cx="8138160" cy="621792"/>
+          </a:xfrm>
+          <a:prstGeom prst="rect">
+            <a:avLst/>
+          </a:prstGeom>
+          <a:noFill/>
+          <a:ln/>
+        </p:spPr>
+        <p:txBody>
+          <a:bodyPr wrap="square" lIns="0" tIns="0" rIns="0" bIns="0" rtlCol="0" anchor="ctr">
+            <a:normAutofit/>
+          </a:bodyPr>
+          <a:lstStyle/>
+          <a:p>
+            <a:pPr algn="ctr" indent="0" marL="0">
+              <a:lnSpc>
+                <a:spcPct val="125000"/>
+              </a:lnSpc>
+              <a:buNone/>
+            </a:pPr>
+            <a:r>
+              <a:rPr lang="en-US" sz="1540" b="1" dirty="0">
                 <a:solidFill>
                   <a:srgbClr val="25194B"/>
                 </a:solidFill>
@@ -10094,9 +10096,9 @@
                 <a:ea typeface="Cambria" pitchFamily="34" charset="-122"/>
                 <a:cs typeface="Cambria" pitchFamily="34" charset="-120"/>
               </a:rPr>
-              <a:t>Mức tăng so với S1 trên 1.484 bước thuộc tác vụ mới</a:t>
-            </a:r>
-            <a:endParaRPr lang="en-US" sz="1650" dirty="0"/>
+              <a:t>ACU gồm 1.484 bước từ các tác vụ không xuất hiện trong huấn luyện SFT. Các số dưới đây là mức tăng so với baseline S1.</a:t>
+            </a:r>
+            <a:endParaRPr lang="en-US" sz="1540" dirty="0"/>
           </a:p>
         </p:txBody>
       </p:sp>
@@ -10280,7 +10282,7 @@
                 <a:ea typeface="Cambria" pitchFamily="34" charset="-122"/>
                 <a:cs typeface="Cambria" pitchFamily="34" charset="-120"/>
               </a:rPr>
-              <a:t>GRPO-SPICE · lượt 2</a:t>
+              <a:t>Chạy lại GRPO-SPICE</a:t>
             </a:r>
             <a:endParaRPr lang="en-US" sz="1420" dirty="0"/>
           </a:p>
@@ -11010,7 +11012,7 @@
                 <a:ea typeface="Cambria" pitchFamily="34" charset="-122"/>
                 <a:cs typeface="Cambria" pitchFamily="34" charset="-120"/>
               </a:rPr>
-              <a:t>Thực nghiệm và kết quả</a:t>
+              <a:t>4.4. Kết quả sau ACE</a:t>
             </a:r>
             <a:endParaRPr lang="en-US" sz="1820" dirty="0"/>
           </a:p>
@@ -11268,7 +11270,7 @@
                 <a:ea typeface="Cambria" pitchFamily="34" charset="-122"/>
                 <a:cs typeface="Cambria" pitchFamily="34" charset="-120"/>
               </a:rPr>
-              <a:t>chỉ số câu tăng</a:t>
+              <a:t>BLEU-4 · CIDEr-D · SPICE · …</a:t>
             </a:r>
             <a:endParaRPr lang="en-US" sz="1250" dirty="0"/>
           </a:p>
@@ -11292,17 +11294,19 @@
           <a:ln/>
         </p:spPr>
         <p:txBody>
-          <a:bodyPr wrap="square" lIns="0" tIns="0" rIns="0" bIns="0" rtlCol="0" anchor="ctr"/>
-          <a:lstStyle/>
-          <a:p>
-            <a:pPr algn="ctr" indent="0" marL="0">
-              <a:lnSpc>
-                <a:spcPct val="125000"/>
-              </a:lnSpc>
-              <a:buNone/>
-            </a:pPr>
-            <a:r>
-              <a:rPr lang="en-US" sz="1420" b="1" dirty="0">
+          <a:bodyPr wrap="square" lIns="0" tIns="0" rIns="0" bIns="0" rtlCol="0" anchor="ctr">
+            <a:normAutofit/>
+          </a:bodyPr>
+          <a:lstStyle/>
+          <a:p>
+            <a:pPr algn="ctr" indent="0" marL="0">
+              <a:lnSpc>
+                <a:spcPct val="125000"/>
+              </a:lnSpc>
+              <a:buNone/>
+            </a:pPr>
+            <a:r>
+              <a:rPr lang="en-US" sz="1400" b="1" dirty="0">
                 <a:solidFill>
                   <a:srgbClr val="25194B"/>
                 </a:solidFill>
@@ -11310,9 +11314,9 @@
                 <a:ea typeface="Cambria" pitchFamily="34" charset="-122"/>
                 <a:cs typeface="Cambria" pitchFamily="34" charset="-120"/>
               </a:rPr>
-              <a:t>ACE tiếp tục tăng các độ đo dựa trên câu chuẩn mà không làm giảm executability.</a:t>
-            </a:r>
-            <a:endParaRPr lang="en-US" sz="1420" dirty="0"/>
+              <a:t>ACE giữ executability ở mức tương đương GRPO-SPICE và tiếp tục tăng các độ đo dựa trên câu chuẩn.</a:t>
+            </a:r>
+            <a:endParaRPr lang="en-US" sz="1400" dirty="0"/>
           </a:p>
         </p:txBody>
       </p:sp>
@@ -11351,8 +11355,8 @@
         </p:nvSpPr>
         <p:spPr>
           <a:xfrm>
-            <a:off x="658368" y="2313432"/>
-            <a:ext cx="7013448" cy="438912"/>
+            <a:off x="512064" y="2313432"/>
+            <a:ext cx="7388352" cy="438912"/>
           </a:xfrm>
           <a:prstGeom prst="rect">
             <a:avLst/>
@@ -11378,8 +11382,8 @@
         </p:nvSpPr>
         <p:spPr>
           <a:xfrm>
-            <a:off x="658368" y="2313432"/>
-            <a:ext cx="1783080" cy="438912"/>
+            <a:off x="512064" y="2313432"/>
+            <a:ext cx="1554480" cy="438912"/>
           </a:xfrm>
           <a:prstGeom prst="rect">
             <a:avLst/>
@@ -11400,7 +11404,7 @@
               <a:buNone/>
             </a:pPr>
             <a:r>
-              <a:rPr lang="en-US" sz="1280" b="1" dirty="0">
+              <a:rPr lang="en-US" sz="1160" b="1" dirty="0">
                 <a:solidFill>
                   <a:srgbClr val="FFFFFF"/>
                 </a:solidFill>
@@ -11410,7 +11414,7 @@
               </a:rPr>
               <a:t>Chỉ số</a:t>
             </a:r>
-            <a:endParaRPr lang="en-US" sz="1280" dirty="0"/>
+            <a:endParaRPr lang="en-US" sz="1160" dirty="0"/>
           </a:p>
         </p:txBody>
       </p:sp>
@@ -11422,8 +11426,8 @@
         </p:nvSpPr>
         <p:spPr>
           <a:xfrm>
-            <a:off x="2441448" y="2313432"/>
-            <a:ext cx="1481328" cy="438912"/>
+            <a:off x="2066544" y="2313432"/>
+            <a:ext cx="1188720" cy="438912"/>
           </a:xfrm>
           <a:prstGeom prst="rect">
             <a:avLst/>
@@ -11444,7 +11448,7 @@
               <a:buNone/>
             </a:pPr>
             <a:r>
-              <a:rPr lang="en-US" sz="1280" b="1" dirty="0">
+              <a:rPr lang="en-US" sz="1160" b="1" dirty="0">
                 <a:solidFill>
                   <a:srgbClr val="FFFFFF"/>
                 </a:solidFill>
@@ -11452,9 +11456,9 @@
                 <a:ea typeface="Cambria" pitchFamily="34" charset="-122"/>
                 <a:cs typeface="Cambria" pitchFamily="34" charset="-120"/>
               </a:rPr>
-              <a:t>S1</a:t>
-            </a:r>
-            <a:endParaRPr lang="en-US" sz="1280" dirty="0"/>
+              <a:t>Base</a:t>
+            </a:r>
+            <a:endParaRPr lang="en-US" sz="1160" dirty="0"/>
           </a:p>
         </p:txBody>
       </p:sp>
@@ -11466,8 +11470,8 @@
         </p:nvSpPr>
         <p:spPr>
           <a:xfrm>
-            <a:off x="3922776" y="2313432"/>
-            <a:ext cx="1874520" cy="438912"/>
+            <a:off x="3255264" y="2313432"/>
+            <a:ext cx="1426464" cy="438912"/>
           </a:xfrm>
           <a:prstGeom prst="rect">
             <a:avLst/>
@@ -11488,7 +11492,7 @@
               <a:buNone/>
             </a:pPr>
             <a:r>
-              <a:rPr lang="en-US" sz="1280" b="1" dirty="0">
+              <a:rPr lang="en-US" sz="1160" b="1" dirty="0">
                 <a:solidFill>
                   <a:srgbClr val="FFFFFF"/>
                 </a:solidFill>
@@ -11496,22 +11500,66 @@
                 <a:ea typeface="Cambria" pitchFamily="34" charset="-122"/>
                 <a:cs typeface="Cambria" pitchFamily="34" charset="-120"/>
               </a:rPr>
+              <a:t>Baseline S1</a:t>
+            </a:r>
+            <a:endParaRPr lang="en-US" sz="1160" dirty="0"/>
+          </a:p>
+        </p:txBody>
+      </p:sp>
+      <p:sp>
+        <p:nvSpPr>
+          <p:cNvPr id="16" name="Text 14"/>
+          <p:cNvSpPr/>
+          <p:nvPr/>
+        </p:nvSpPr>
+        <p:spPr>
+          <a:xfrm>
+            <a:off x="4681728" y="2313432"/>
+            <a:ext cx="1609344" cy="438912"/>
+          </a:xfrm>
+          <a:prstGeom prst="rect">
+            <a:avLst/>
+          </a:prstGeom>
+          <a:noFill/>
+          <a:ln/>
+        </p:spPr>
+        <p:txBody>
+          <a:bodyPr wrap="square" lIns="0" tIns="0" rIns="0" bIns="0" rtlCol="0" anchor="ctr">
+            <a:normAutofit/>
+          </a:bodyPr>
+          <a:lstStyle/>
+          <a:p>
+            <a:pPr algn="ctr" indent="0" marL="0">
+              <a:lnSpc>
+                <a:spcPct val="125000"/>
+              </a:lnSpc>
+              <a:buNone/>
+            </a:pPr>
+            <a:r>
+              <a:rPr lang="en-US" sz="1160" b="1" dirty="0">
+                <a:solidFill>
+                  <a:srgbClr val="FFFFFF"/>
+                </a:solidFill>
+                <a:latin typeface="Cambria" pitchFamily="34" charset="0"/>
+                <a:ea typeface="Cambria" pitchFamily="34" charset="-122"/>
+                <a:cs typeface="Cambria" pitchFamily="34" charset="-120"/>
+              </a:rPr>
               <a:t>GRPO-SPICE</a:t>
             </a:r>
-            <a:endParaRPr lang="en-US" sz="1280" dirty="0"/>
-          </a:p>
-        </p:txBody>
-      </p:sp>
-      <p:sp>
-        <p:nvSpPr>
-          <p:cNvPr id="16" name="Text 14"/>
-          <p:cNvSpPr/>
-          <p:nvPr/>
-        </p:nvSpPr>
-        <p:spPr>
-          <a:xfrm>
-            <a:off x="5797296" y="2313432"/>
-            <a:ext cx="1874520" cy="438912"/>
+            <a:endParaRPr lang="en-US" sz="1160" dirty="0"/>
+          </a:p>
+        </p:txBody>
+      </p:sp>
+      <p:sp>
+        <p:nvSpPr>
+          <p:cNvPr id="17" name="Text 15"/>
+          <p:cNvSpPr/>
+          <p:nvPr/>
+        </p:nvSpPr>
+        <p:spPr>
+          <a:xfrm>
+            <a:off x="6291072" y="2313432"/>
+            <a:ext cx="1609344" cy="438912"/>
           </a:xfrm>
           <a:prstGeom prst="rect">
             <a:avLst/>
@@ -11532,7 +11580,7 @@
               <a:buNone/>
             </a:pPr>
             <a:r>
-              <a:rPr lang="en-US" sz="1280" b="1" dirty="0">
+              <a:rPr lang="en-US" sz="1160" b="1" dirty="0">
                 <a:solidFill>
                   <a:srgbClr val="FFFFFF"/>
                 </a:solidFill>
@@ -11542,20 +11590,20 @@
               </a:rPr>
               <a:t>ACE</a:t>
             </a:r>
-            <a:endParaRPr lang="en-US" sz="1280" dirty="0"/>
-          </a:p>
-        </p:txBody>
-      </p:sp>
-      <p:sp>
-        <p:nvSpPr>
-          <p:cNvPr id="17" name="Text 15"/>
-          <p:cNvSpPr/>
-          <p:nvPr/>
-        </p:nvSpPr>
-        <p:spPr>
-          <a:xfrm>
-            <a:off x="658368" y="2752344"/>
-            <a:ext cx="1783080" cy="438912"/>
+            <a:endParaRPr lang="en-US" sz="1160" dirty="0"/>
+          </a:p>
+        </p:txBody>
+      </p:sp>
+      <p:sp>
+        <p:nvSpPr>
+          <p:cNvPr id="18" name="Text 16"/>
+          <p:cNvSpPr/>
+          <p:nvPr/>
+        </p:nvSpPr>
+        <p:spPr>
+          <a:xfrm>
+            <a:off x="512064" y="2752344"/>
+            <a:ext cx="1554480" cy="438912"/>
           </a:xfrm>
           <a:prstGeom prst="rect">
             <a:avLst/>
@@ -11576,7 +11624,7 @@
               <a:buNone/>
             </a:pPr>
             <a:r>
-              <a:rPr lang="en-US" sz="1280" dirty="0">
+              <a:rPr lang="en-US" sz="1190" dirty="0">
                 <a:solidFill>
                   <a:srgbClr val="1A1A1A"/>
                 </a:solidFill>
@@ -11586,20 +11634,20 @@
               </a:rPr>
               <a:t>BLEU-4</a:t>
             </a:r>
-            <a:endParaRPr lang="en-US" sz="1280" dirty="0"/>
-          </a:p>
-        </p:txBody>
-      </p:sp>
-      <p:sp>
-        <p:nvSpPr>
-          <p:cNvPr id="18" name="Text 16"/>
-          <p:cNvSpPr/>
-          <p:nvPr/>
-        </p:nvSpPr>
-        <p:spPr>
-          <a:xfrm>
-            <a:off x="2441448" y="2752344"/>
-            <a:ext cx="1481328" cy="438912"/>
+            <a:endParaRPr lang="en-US" sz="1190" dirty="0"/>
+          </a:p>
+        </p:txBody>
+      </p:sp>
+      <p:sp>
+        <p:nvSpPr>
+          <p:cNvPr id="19" name="Text 17"/>
+          <p:cNvSpPr/>
+          <p:nvPr/>
+        </p:nvSpPr>
+        <p:spPr>
+          <a:xfrm>
+            <a:off x="2066544" y="2752344"/>
+            <a:ext cx="1188720" cy="438912"/>
           </a:xfrm>
           <a:prstGeom prst="rect">
             <a:avLst/>
@@ -11620,7 +11668,7 @@
               <a:buNone/>
             </a:pPr>
             <a:r>
-              <a:rPr lang="en-US" sz="1280" dirty="0">
+              <a:rPr lang="en-US" sz="1190" dirty="0">
                 <a:solidFill>
                   <a:srgbClr val="1A1A1A"/>
                 </a:solidFill>
@@ -11628,22 +11676,66 @@
                 <a:ea typeface="Cambria" pitchFamily="34" charset="-122"/>
                 <a:cs typeface="Cambria" pitchFamily="34" charset="-120"/>
               </a:rPr>
+              <a:t>15,34</a:t>
+            </a:r>
+            <a:endParaRPr lang="en-US" sz="1190" dirty="0"/>
+          </a:p>
+        </p:txBody>
+      </p:sp>
+      <p:sp>
+        <p:nvSpPr>
+          <p:cNvPr id="20" name="Text 18"/>
+          <p:cNvSpPr/>
+          <p:nvPr/>
+        </p:nvSpPr>
+        <p:spPr>
+          <a:xfrm>
+            <a:off x="3255264" y="2752344"/>
+            <a:ext cx="1426464" cy="438912"/>
+          </a:xfrm>
+          <a:prstGeom prst="rect">
+            <a:avLst/>
+          </a:prstGeom>
+          <a:noFill/>
+          <a:ln/>
+        </p:spPr>
+        <p:txBody>
+          <a:bodyPr wrap="square" lIns="0" tIns="0" rIns="0" bIns="0" rtlCol="0" anchor="ctr">
+            <a:normAutofit/>
+          </a:bodyPr>
+          <a:lstStyle/>
+          <a:p>
+            <a:pPr algn="ctr" indent="0" marL="0">
+              <a:lnSpc>
+                <a:spcPct val="125000"/>
+              </a:lnSpc>
+              <a:buNone/>
+            </a:pPr>
+            <a:r>
+              <a:rPr lang="en-US" sz="1190" dirty="0">
+                <a:solidFill>
+                  <a:srgbClr val="1A1A1A"/>
+                </a:solidFill>
+                <a:latin typeface="Cambria" pitchFamily="34" charset="0"/>
+                <a:ea typeface="Cambria" pitchFamily="34" charset="-122"/>
+                <a:cs typeface="Cambria" pitchFamily="34" charset="-120"/>
+              </a:rPr>
               <a:t>51,56</a:t>
             </a:r>
-            <a:endParaRPr lang="en-US" sz="1280" dirty="0"/>
-          </a:p>
-        </p:txBody>
-      </p:sp>
-      <p:sp>
-        <p:nvSpPr>
-          <p:cNvPr id="19" name="Text 17"/>
-          <p:cNvSpPr/>
-          <p:nvPr/>
-        </p:nvSpPr>
-        <p:spPr>
-          <a:xfrm>
-            <a:off x="3922776" y="2752344"/>
-            <a:ext cx="1874520" cy="438912"/>
+            <a:endParaRPr lang="en-US" sz="1190" dirty="0"/>
+          </a:p>
+        </p:txBody>
+      </p:sp>
+      <p:sp>
+        <p:nvSpPr>
+          <p:cNvPr id="21" name="Text 19"/>
+          <p:cNvSpPr/>
+          <p:nvPr/>
+        </p:nvSpPr>
+        <p:spPr>
+          <a:xfrm>
+            <a:off x="4681728" y="2752344"/>
+            <a:ext cx="1609344" cy="438912"/>
           </a:xfrm>
           <a:prstGeom prst="rect">
             <a:avLst/>
@@ -11664,7 +11756,7 @@
               <a:buNone/>
             </a:pPr>
             <a:r>
-              <a:rPr lang="en-US" sz="1280" dirty="0">
+              <a:rPr lang="en-US" sz="1190" dirty="0">
                 <a:solidFill>
                   <a:srgbClr val="1A1A1A"/>
                 </a:solidFill>
@@ -11674,20 +11766,20 @@
               </a:rPr>
               <a:t>52,36</a:t>
             </a:r>
-            <a:endParaRPr lang="en-US" sz="1280" dirty="0"/>
-          </a:p>
-        </p:txBody>
-      </p:sp>
-      <p:sp>
-        <p:nvSpPr>
-          <p:cNvPr id="20" name="Text 18"/>
-          <p:cNvSpPr/>
-          <p:nvPr/>
-        </p:nvSpPr>
-        <p:spPr>
-          <a:xfrm>
-            <a:off x="5797296" y="2752344"/>
-            <a:ext cx="1874520" cy="438912"/>
+            <a:endParaRPr lang="en-US" sz="1190" dirty="0"/>
+          </a:p>
+        </p:txBody>
+      </p:sp>
+      <p:sp>
+        <p:nvSpPr>
+          <p:cNvPr id="22" name="Text 20"/>
+          <p:cNvSpPr/>
+          <p:nvPr/>
+        </p:nvSpPr>
+        <p:spPr>
+          <a:xfrm>
+            <a:off x="6291072" y="2752344"/>
+            <a:ext cx="1609344" cy="438912"/>
           </a:xfrm>
           <a:prstGeom prst="rect">
             <a:avLst/>
@@ -11708,7 +11800,7 @@
               <a:buNone/>
             </a:pPr>
             <a:r>
-              <a:rPr lang="en-US" sz="1280" b="1" dirty="0">
+              <a:rPr lang="en-US" sz="1190" b="1" dirty="0">
                 <a:solidFill>
                   <a:srgbClr val="4F417A"/>
                 </a:solidFill>
@@ -11718,20 +11810,20 @@
               </a:rPr>
               <a:t>53,47</a:t>
             </a:r>
-            <a:endParaRPr lang="en-US" sz="1280" dirty="0"/>
-          </a:p>
-        </p:txBody>
-      </p:sp>
-      <p:sp>
-        <p:nvSpPr>
-          <p:cNvPr id="21" name="Shape 19"/>
-          <p:cNvSpPr/>
-          <p:nvPr/>
-        </p:nvSpPr>
-        <p:spPr>
-          <a:xfrm>
-            <a:off x="658368" y="3191256"/>
-            <a:ext cx="7013448" cy="0"/>
+            <a:endParaRPr lang="en-US" sz="1190" dirty="0"/>
+          </a:p>
+        </p:txBody>
+      </p:sp>
+      <p:sp>
+        <p:nvSpPr>
+          <p:cNvPr id="23" name="Shape 21"/>
+          <p:cNvSpPr/>
+          <p:nvPr/>
+        </p:nvSpPr>
+        <p:spPr>
+          <a:xfrm>
+            <a:off x="512064" y="3191256"/>
+            <a:ext cx="7388352" cy="0"/>
           </a:xfrm>
           <a:prstGeom prst="line">
             <a:avLst/>
@@ -11748,14 +11840,14 @@
       </p:sp>
       <p:sp>
         <p:nvSpPr>
-          <p:cNvPr id="22" name="Text 20"/>
-          <p:cNvSpPr/>
-          <p:nvPr/>
-        </p:nvSpPr>
-        <p:spPr>
-          <a:xfrm>
-            <a:off x="658368" y="3191256"/>
-            <a:ext cx="1783080" cy="438912"/>
+          <p:cNvPr id="24" name="Text 22"/>
+          <p:cNvSpPr/>
+          <p:nvPr/>
+        </p:nvSpPr>
+        <p:spPr>
+          <a:xfrm>
+            <a:off x="512064" y="3191256"/>
+            <a:ext cx="1554480" cy="438912"/>
           </a:xfrm>
           <a:prstGeom prst="rect">
             <a:avLst/>
@@ -11776,7 +11868,7 @@
               <a:buNone/>
             </a:pPr>
             <a:r>
-              <a:rPr lang="en-US" sz="1280" dirty="0">
+              <a:rPr lang="en-US" sz="1190" dirty="0">
                 <a:solidFill>
                   <a:srgbClr val="1A1A1A"/>
                 </a:solidFill>
@@ -11786,20 +11878,20 @@
               </a:rPr>
               <a:t>METEOR</a:t>
             </a:r>
-            <a:endParaRPr lang="en-US" sz="1280" dirty="0"/>
-          </a:p>
-        </p:txBody>
-      </p:sp>
-      <p:sp>
-        <p:nvSpPr>
-          <p:cNvPr id="23" name="Text 21"/>
-          <p:cNvSpPr/>
-          <p:nvPr/>
-        </p:nvSpPr>
-        <p:spPr>
-          <a:xfrm>
-            <a:off x="2441448" y="3191256"/>
-            <a:ext cx="1481328" cy="438912"/>
+            <a:endParaRPr lang="en-US" sz="1190" dirty="0"/>
+          </a:p>
+        </p:txBody>
+      </p:sp>
+      <p:sp>
+        <p:nvSpPr>
+          <p:cNvPr id="25" name="Text 23"/>
+          <p:cNvSpPr/>
+          <p:nvPr/>
+        </p:nvSpPr>
+        <p:spPr>
+          <a:xfrm>
+            <a:off x="2066544" y="3191256"/>
+            <a:ext cx="1188720" cy="438912"/>
           </a:xfrm>
           <a:prstGeom prst="rect">
             <a:avLst/>
@@ -11820,7 +11912,7 @@
               <a:buNone/>
             </a:pPr>
             <a:r>
-              <a:rPr lang="en-US" sz="1280" dirty="0">
+              <a:rPr lang="en-US" sz="1190" dirty="0">
                 <a:solidFill>
                   <a:srgbClr val="1A1A1A"/>
                 </a:solidFill>
@@ -11828,22 +11920,66 @@
                 <a:ea typeface="Cambria" pitchFamily="34" charset="-122"/>
                 <a:cs typeface="Cambria" pitchFamily="34" charset="-120"/>
               </a:rPr>
+              <a:t>24,58</a:t>
+            </a:r>
+            <a:endParaRPr lang="en-US" sz="1190" dirty="0"/>
+          </a:p>
+        </p:txBody>
+      </p:sp>
+      <p:sp>
+        <p:nvSpPr>
+          <p:cNvPr id="26" name="Text 24"/>
+          <p:cNvSpPr/>
+          <p:nvPr/>
+        </p:nvSpPr>
+        <p:spPr>
+          <a:xfrm>
+            <a:off x="3255264" y="3191256"/>
+            <a:ext cx="1426464" cy="438912"/>
+          </a:xfrm>
+          <a:prstGeom prst="rect">
+            <a:avLst/>
+          </a:prstGeom>
+          <a:noFill/>
+          <a:ln/>
+        </p:spPr>
+        <p:txBody>
+          <a:bodyPr wrap="square" lIns="0" tIns="0" rIns="0" bIns="0" rtlCol="0" anchor="ctr">
+            <a:normAutofit/>
+          </a:bodyPr>
+          <a:lstStyle/>
+          <a:p>
+            <a:pPr algn="ctr" indent="0" marL="0">
+              <a:lnSpc>
+                <a:spcPct val="125000"/>
+              </a:lnSpc>
+              <a:buNone/>
+            </a:pPr>
+            <a:r>
+              <a:rPr lang="en-US" sz="1190" dirty="0">
+                <a:solidFill>
+                  <a:srgbClr val="1A1A1A"/>
+                </a:solidFill>
+                <a:latin typeface="Cambria" pitchFamily="34" charset="0"/>
+                <a:ea typeface="Cambria" pitchFamily="34" charset="-122"/>
+                <a:cs typeface="Cambria" pitchFamily="34" charset="-120"/>
+              </a:rPr>
               <a:t>36,79</a:t>
             </a:r>
-            <a:endParaRPr lang="en-US" sz="1280" dirty="0"/>
-          </a:p>
-        </p:txBody>
-      </p:sp>
-      <p:sp>
-        <p:nvSpPr>
-          <p:cNvPr id="24" name="Text 22"/>
-          <p:cNvSpPr/>
-          <p:nvPr/>
-        </p:nvSpPr>
-        <p:spPr>
-          <a:xfrm>
-            <a:off x="3922776" y="3191256"/>
-            <a:ext cx="1874520" cy="438912"/>
+            <a:endParaRPr lang="en-US" sz="1190" dirty="0"/>
+          </a:p>
+        </p:txBody>
+      </p:sp>
+      <p:sp>
+        <p:nvSpPr>
+          <p:cNvPr id="27" name="Text 25"/>
+          <p:cNvSpPr/>
+          <p:nvPr/>
+        </p:nvSpPr>
+        <p:spPr>
+          <a:xfrm>
+            <a:off x="4681728" y="3191256"/>
+            <a:ext cx="1609344" cy="438912"/>
           </a:xfrm>
           <a:prstGeom prst="rect">
             <a:avLst/>
@@ -11864,7 +12000,7 @@
               <a:buNone/>
             </a:pPr>
             <a:r>
-              <a:rPr lang="en-US" sz="1280" dirty="0">
+              <a:rPr lang="en-US" sz="1190" dirty="0">
                 <a:solidFill>
                   <a:srgbClr val="1A1A1A"/>
                 </a:solidFill>
@@ -11874,20 +12010,20 @@
               </a:rPr>
               <a:t>37,92</a:t>
             </a:r>
-            <a:endParaRPr lang="en-US" sz="1280" dirty="0"/>
-          </a:p>
-        </p:txBody>
-      </p:sp>
-      <p:sp>
-        <p:nvSpPr>
-          <p:cNvPr id="25" name="Text 23"/>
-          <p:cNvSpPr/>
-          <p:nvPr/>
-        </p:nvSpPr>
-        <p:spPr>
-          <a:xfrm>
-            <a:off x="5797296" y="3191256"/>
-            <a:ext cx="1874520" cy="438912"/>
+            <a:endParaRPr lang="en-US" sz="1190" dirty="0"/>
+          </a:p>
+        </p:txBody>
+      </p:sp>
+      <p:sp>
+        <p:nvSpPr>
+          <p:cNvPr id="28" name="Text 26"/>
+          <p:cNvSpPr/>
+          <p:nvPr/>
+        </p:nvSpPr>
+        <p:spPr>
+          <a:xfrm>
+            <a:off x="6291072" y="3191256"/>
+            <a:ext cx="1609344" cy="438912"/>
           </a:xfrm>
           <a:prstGeom prst="rect">
             <a:avLst/>
@@ -11908,7 +12044,7 @@
               <a:buNone/>
             </a:pPr>
             <a:r>
-              <a:rPr lang="en-US" sz="1280" b="1" dirty="0">
+              <a:rPr lang="en-US" sz="1190" b="1" dirty="0">
                 <a:solidFill>
                   <a:srgbClr val="4F417A"/>
                 </a:solidFill>
@@ -11918,20 +12054,20 @@
               </a:rPr>
               <a:t>38,37</a:t>
             </a:r>
-            <a:endParaRPr lang="en-US" sz="1280" dirty="0"/>
-          </a:p>
-        </p:txBody>
-      </p:sp>
-      <p:sp>
-        <p:nvSpPr>
-          <p:cNvPr id="26" name="Shape 24"/>
-          <p:cNvSpPr/>
-          <p:nvPr/>
-        </p:nvSpPr>
-        <p:spPr>
-          <a:xfrm>
-            <a:off x="658368" y="3630168"/>
-            <a:ext cx="7013448" cy="0"/>
+            <a:endParaRPr lang="en-US" sz="1190" dirty="0"/>
+          </a:p>
+        </p:txBody>
+      </p:sp>
+      <p:sp>
+        <p:nvSpPr>
+          <p:cNvPr id="29" name="Shape 27"/>
+          <p:cNvSpPr/>
+          <p:nvPr/>
+        </p:nvSpPr>
+        <p:spPr>
+          <a:xfrm>
+            <a:off x="512064" y="3630168"/>
+            <a:ext cx="7388352" cy="0"/>
           </a:xfrm>
           <a:prstGeom prst="line">
             <a:avLst/>
@@ -11948,14 +12084,14 @@
       </p:sp>
       <p:sp>
         <p:nvSpPr>
-          <p:cNvPr id="27" name="Text 25"/>
-          <p:cNvSpPr/>
-          <p:nvPr/>
-        </p:nvSpPr>
-        <p:spPr>
-          <a:xfrm>
-            <a:off x="658368" y="3630168"/>
-            <a:ext cx="1783080" cy="438912"/>
+          <p:cNvPr id="30" name="Text 28"/>
+          <p:cNvSpPr/>
+          <p:nvPr/>
+        </p:nvSpPr>
+        <p:spPr>
+          <a:xfrm>
+            <a:off x="512064" y="3630168"/>
+            <a:ext cx="1554480" cy="438912"/>
           </a:xfrm>
           <a:prstGeom prst="rect">
             <a:avLst/>
@@ -11976,7 +12112,7 @@
               <a:buNone/>
             </a:pPr>
             <a:r>
-              <a:rPr lang="en-US" sz="1280" dirty="0">
+              <a:rPr lang="en-US" sz="1190" dirty="0">
                 <a:solidFill>
                   <a:srgbClr val="1A1A1A"/>
                 </a:solidFill>
@@ -11986,20 +12122,20 @@
               </a:rPr>
               <a:t>ROUGE-L</a:t>
             </a:r>
-            <a:endParaRPr lang="en-US" sz="1280" dirty="0"/>
-          </a:p>
-        </p:txBody>
-      </p:sp>
-      <p:sp>
-        <p:nvSpPr>
-          <p:cNvPr id="28" name="Text 26"/>
-          <p:cNvSpPr/>
-          <p:nvPr/>
-        </p:nvSpPr>
-        <p:spPr>
-          <a:xfrm>
-            <a:off x="2441448" y="3630168"/>
-            <a:ext cx="1481328" cy="438912"/>
+            <a:endParaRPr lang="en-US" sz="1190" dirty="0"/>
+          </a:p>
+        </p:txBody>
+      </p:sp>
+      <p:sp>
+        <p:nvSpPr>
+          <p:cNvPr id="31" name="Text 29"/>
+          <p:cNvSpPr/>
+          <p:nvPr/>
+        </p:nvSpPr>
+        <p:spPr>
+          <a:xfrm>
+            <a:off x="2066544" y="3630168"/>
+            <a:ext cx="1188720" cy="438912"/>
           </a:xfrm>
           <a:prstGeom prst="rect">
             <a:avLst/>
@@ -12020,7 +12156,7 @@
               <a:buNone/>
             </a:pPr>
             <a:r>
-              <a:rPr lang="en-US" sz="1280" dirty="0">
+              <a:rPr lang="en-US" sz="1190" dirty="0">
                 <a:solidFill>
                   <a:srgbClr val="1A1A1A"/>
                 </a:solidFill>
@@ -12028,22 +12164,66 @@
                 <a:ea typeface="Cambria" pitchFamily="34" charset="-122"/>
                 <a:cs typeface="Cambria" pitchFamily="34" charset="-120"/>
               </a:rPr>
+              <a:t>42,31</a:t>
+            </a:r>
+            <a:endParaRPr lang="en-US" sz="1190" dirty="0"/>
+          </a:p>
+        </p:txBody>
+      </p:sp>
+      <p:sp>
+        <p:nvSpPr>
+          <p:cNvPr id="32" name="Text 30"/>
+          <p:cNvSpPr/>
+          <p:nvPr/>
+        </p:nvSpPr>
+        <p:spPr>
+          <a:xfrm>
+            <a:off x="3255264" y="3630168"/>
+            <a:ext cx="1426464" cy="438912"/>
+          </a:xfrm>
+          <a:prstGeom prst="rect">
+            <a:avLst/>
+          </a:prstGeom>
+          <a:noFill/>
+          <a:ln/>
+        </p:spPr>
+        <p:txBody>
+          <a:bodyPr wrap="square" lIns="0" tIns="0" rIns="0" bIns="0" rtlCol="0" anchor="ctr">
+            <a:normAutofit/>
+          </a:bodyPr>
+          <a:lstStyle/>
+          <a:p>
+            <a:pPr algn="ctr" indent="0" marL="0">
+              <a:lnSpc>
+                <a:spcPct val="125000"/>
+              </a:lnSpc>
+              <a:buNone/>
+            </a:pPr>
+            <a:r>
+              <a:rPr lang="en-US" sz="1190" dirty="0">
+                <a:solidFill>
+                  <a:srgbClr val="1A1A1A"/>
+                </a:solidFill>
+                <a:latin typeface="Cambria" pitchFamily="34" charset="0"/>
+                <a:ea typeface="Cambria" pitchFamily="34" charset="-122"/>
+                <a:cs typeface="Cambria" pitchFamily="34" charset="-120"/>
+              </a:rPr>
               <a:t>67,35</a:t>
             </a:r>
-            <a:endParaRPr lang="en-US" sz="1280" dirty="0"/>
-          </a:p>
-        </p:txBody>
-      </p:sp>
-      <p:sp>
-        <p:nvSpPr>
-          <p:cNvPr id="29" name="Text 27"/>
-          <p:cNvSpPr/>
-          <p:nvPr/>
-        </p:nvSpPr>
-        <p:spPr>
-          <a:xfrm>
-            <a:off x="3922776" y="3630168"/>
-            <a:ext cx="1874520" cy="438912"/>
+            <a:endParaRPr lang="en-US" sz="1190" dirty="0"/>
+          </a:p>
+        </p:txBody>
+      </p:sp>
+      <p:sp>
+        <p:nvSpPr>
+          <p:cNvPr id="33" name="Text 31"/>
+          <p:cNvSpPr/>
+          <p:nvPr/>
+        </p:nvSpPr>
+        <p:spPr>
+          <a:xfrm>
+            <a:off x="4681728" y="3630168"/>
+            <a:ext cx="1609344" cy="438912"/>
           </a:xfrm>
           <a:prstGeom prst="rect">
             <a:avLst/>
@@ -12064,7 +12244,7 @@
               <a:buNone/>
             </a:pPr>
             <a:r>
-              <a:rPr lang="en-US" sz="1280" dirty="0">
+              <a:rPr lang="en-US" sz="1190" dirty="0">
                 <a:solidFill>
                   <a:srgbClr val="1A1A1A"/>
                 </a:solidFill>
@@ -12074,20 +12254,20 @@
               </a:rPr>
               <a:t>68,36</a:t>
             </a:r>
-            <a:endParaRPr lang="en-US" sz="1280" dirty="0"/>
-          </a:p>
-        </p:txBody>
-      </p:sp>
-      <p:sp>
-        <p:nvSpPr>
-          <p:cNvPr id="30" name="Text 28"/>
-          <p:cNvSpPr/>
-          <p:nvPr/>
-        </p:nvSpPr>
-        <p:spPr>
-          <a:xfrm>
-            <a:off x="5797296" y="3630168"/>
-            <a:ext cx="1874520" cy="438912"/>
+            <a:endParaRPr lang="en-US" sz="1190" dirty="0"/>
+          </a:p>
+        </p:txBody>
+      </p:sp>
+      <p:sp>
+        <p:nvSpPr>
+          <p:cNvPr id="34" name="Text 32"/>
+          <p:cNvSpPr/>
+          <p:nvPr/>
+        </p:nvSpPr>
+        <p:spPr>
+          <a:xfrm>
+            <a:off x="6291072" y="3630168"/>
+            <a:ext cx="1609344" cy="438912"/>
           </a:xfrm>
           <a:prstGeom prst="rect">
             <a:avLst/>
@@ -12108,7 +12288,7 @@
               <a:buNone/>
             </a:pPr>
             <a:r>
-              <a:rPr lang="en-US" sz="1280" b="1" dirty="0">
+              <a:rPr lang="en-US" sz="1190" b="1" dirty="0">
                 <a:solidFill>
                   <a:srgbClr val="4F417A"/>
                 </a:solidFill>
@@ -12118,20 +12298,20 @@
               </a:rPr>
               <a:t>69,11</a:t>
             </a:r>
-            <a:endParaRPr lang="en-US" sz="1280" dirty="0"/>
-          </a:p>
-        </p:txBody>
-      </p:sp>
-      <p:sp>
-        <p:nvSpPr>
-          <p:cNvPr id="31" name="Shape 29"/>
-          <p:cNvSpPr/>
-          <p:nvPr/>
-        </p:nvSpPr>
-        <p:spPr>
-          <a:xfrm>
-            <a:off x="658368" y="4069080"/>
-            <a:ext cx="7013448" cy="0"/>
+            <a:endParaRPr lang="en-US" sz="1190" dirty="0"/>
+          </a:p>
+        </p:txBody>
+      </p:sp>
+      <p:sp>
+        <p:nvSpPr>
+          <p:cNvPr id="35" name="Shape 33"/>
+          <p:cNvSpPr/>
+          <p:nvPr/>
+        </p:nvSpPr>
+        <p:spPr>
+          <a:xfrm>
+            <a:off x="512064" y="4069080"/>
+            <a:ext cx="7388352" cy="0"/>
           </a:xfrm>
           <a:prstGeom prst="line">
             <a:avLst/>
@@ -12148,14 +12328,14 @@
       </p:sp>
       <p:sp>
         <p:nvSpPr>
-          <p:cNvPr id="32" name="Text 30"/>
-          <p:cNvSpPr/>
-          <p:nvPr/>
-        </p:nvSpPr>
-        <p:spPr>
-          <a:xfrm>
-            <a:off x="658368" y="4069080"/>
-            <a:ext cx="1783080" cy="438912"/>
+          <p:cNvPr id="36" name="Text 34"/>
+          <p:cNvSpPr/>
+          <p:nvPr/>
+        </p:nvSpPr>
+        <p:spPr>
+          <a:xfrm>
+            <a:off x="512064" y="4069080"/>
+            <a:ext cx="1554480" cy="438912"/>
           </a:xfrm>
           <a:prstGeom prst="rect">
             <a:avLst/>
@@ -12176,7 +12356,7 @@
               <a:buNone/>
             </a:pPr>
             <a:r>
-              <a:rPr lang="en-US" sz="1280" dirty="0">
+              <a:rPr lang="en-US" sz="1190" dirty="0">
                 <a:solidFill>
                   <a:srgbClr val="1A1A1A"/>
                 </a:solidFill>
@@ -12186,20 +12366,20 @@
               </a:rPr>
               <a:t>CIDEr-D</a:t>
             </a:r>
-            <a:endParaRPr lang="en-US" sz="1280" dirty="0"/>
-          </a:p>
-        </p:txBody>
-      </p:sp>
-      <p:sp>
-        <p:nvSpPr>
-          <p:cNvPr id="33" name="Text 31"/>
-          <p:cNvSpPr/>
-          <p:nvPr/>
-        </p:nvSpPr>
-        <p:spPr>
-          <a:xfrm>
-            <a:off x="2441448" y="4069080"/>
-            <a:ext cx="1481328" cy="438912"/>
+            <a:endParaRPr lang="en-US" sz="1190" dirty="0"/>
+          </a:p>
+        </p:txBody>
+      </p:sp>
+      <p:sp>
+        <p:nvSpPr>
+          <p:cNvPr id="37" name="Text 35"/>
+          <p:cNvSpPr/>
+          <p:nvPr/>
+        </p:nvSpPr>
+        <p:spPr>
+          <a:xfrm>
+            <a:off x="2066544" y="4069080"/>
+            <a:ext cx="1188720" cy="438912"/>
           </a:xfrm>
           <a:prstGeom prst="rect">
             <a:avLst/>
@@ -12220,7 +12400,7 @@
               <a:buNone/>
             </a:pPr>
             <a:r>
-              <a:rPr lang="en-US" sz="1280" dirty="0">
+              <a:rPr lang="en-US" sz="1190" dirty="0">
                 <a:solidFill>
                   <a:srgbClr val="1A1A1A"/>
                 </a:solidFill>
@@ -12228,22 +12408,66 @@
                 <a:ea typeface="Cambria" pitchFamily="34" charset="-122"/>
                 <a:cs typeface="Cambria" pitchFamily="34" charset="-120"/>
               </a:rPr>
+              <a:t>88,01</a:t>
+            </a:r>
+            <a:endParaRPr lang="en-US" sz="1190" dirty="0"/>
+          </a:p>
+        </p:txBody>
+      </p:sp>
+      <p:sp>
+        <p:nvSpPr>
+          <p:cNvPr id="38" name="Text 36"/>
+          <p:cNvSpPr/>
+          <p:nvPr/>
+        </p:nvSpPr>
+        <p:spPr>
+          <a:xfrm>
+            <a:off x="3255264" y="4069080"/>
+            <a:ext cx="1426464" cy="438912"/>
+          </a:xfrm>
+          <a:prstGeom prst="rect">
+            <a:avLst/>
+          </a:prstGeom>
+          <a:noFill/>
+          <a:ln/>
+        </p:spPr>
+        <p:txBody>
+          <a:bodyPr wrap="square" lIns="0" tIns="0" rIns="0" bIns="0" rtlCol="0" anchor="ctr">
+            <a:normAutofit/>
+          </a:bodyPr>
+          <a:lstStyle/>
+          <a:p>
+            <a:pPr algn="ctr" indent="0" marL="0">
+              <a:lnSpc>
+                <a:spcPct val="125000"/>
+              </a:lnSpc>
+              <a:buNone/>
+            </a:pPr>
+            <a:r>
+              <a:rPr lang="en-US" sz="1190" dirty="0">
+                <a:solidFill>
+                  <a:srgbClr val="1A1A1A"/>
+                </a:solidFill>
+                <a:latin typeface="Cambria" pitchFamily="34" charset="0"/>
+                <a:ea typeface="Cambria" pitchFamily="34" charset="-122"/>
+                <a:cs typeface="Cambria" pitchFamily="34" charset="-120"/>
+              </a:rPr>
               <a:t>416,12</a:t>
             </a:r>
-            <a:endParaRPr lang="en-US" sz="1280" dirty="0"/>
-          </a:p>
-        </p:txBody>
-      </p:sp>
-      <p:sp>
-        <p:nvSpPr>
-          <p:cNvPr id="34" name="Text 32"/>
-          <p:cNvSpPr/>
-          <p:nvPr/>
-        </p:nvSpPr>
-        <p:spPr>
-          <a:xfrm>
-            <a:off x="3922776" y="4069080"/>
-            <a:ext cx="1874520" cy="438912"/>
+            <a:endParaRPr lang="en-US" sz="1190" dirty="0"/>
+          </a:p>
+        </p:txBody>
+      </p:sp>
+      <p:sp>
+        <p:nvSpPr>
+          <p:cNvPr id="39" name="Text 37"/>
+          <p:cNvSpPr/>
+          <p:nvPr/>
+        </p:nvSpPr>
+        <p:spPr>
+          <a:xfrm>
+            <a:off x="4681728" y="4069080"/>
+            <a:ext cx="1609344" cy="438912"/>
           </a:xfrm>
           <a:prstGeom prst="rect">
             <a:avLst/>
@@ -12264,7 +12488,7 @@
               <a:buNone/>
             </a:pPr>
             <a:r>
-              <a:rPr lang="en-US" sz="1280" dirty="0">
+              <a:rPr lang="en-US" sz="1190" dirty="0">
                 <a:solidFill>
                   <a:srgbClr val="1A1A1A"/>
                 </a:solidFill>
@@ -12274,20 +12498,20 @@
               </a:rPr>
               <a:t>430,05</a:t>
             </a:r>
-            <a:endParaRPr lang="en-US" sz="1280" dirty="0"/>
-          </a:p>
-        </p:txBody>
-      </p:sp>
-      <p:sp>
-        <p:nvSpPr>
-          <p:cNvPr id="35" name="Text 33"/>
-          <p:cNvSpPr/>
-          <p:nvPr/>
-        </p:nvSpPr>
-        <p:spPr>
-          <a:xfrm>
-            <a:off x="5797296" y="4069080"/>
-            <a:ext cx="1874520" cy="438912"/>
+            <a:endParaRPr lang="en-US" sz="1190" dirty="0"/>
+          </a:p>
+        </p:txBody>
+      </p:sp>
+      <p:sp>
+        <p:nvSpPr>
+          <p:cNvPr id="40" name="Text 38"/>
+          <p:cNvSpPr/>
+          <p:nvPr/>
+        </p:nvSpPr>
+        <p:spPr>
+          <a:xfrm>
+            <a:off x="6291072" y="4069080"/>
+            <a:ext cx="1609344" cy="438912"/>
           </a:xfrm>
           <a:prstGeom prst="rect">
             <a:avLst/>
@@ -12308,7 +12532,7 @@
               <a:buNone/>
             </a:pPr>
             <a:r>
-              <a:rPr lang="en-US" sz="1280" b="1" dirty="0">
+              <a:rPr lang="en-US" sz="1190" b="1" dirty="0">
                 <a:solidFill>
                   <a:srgbClr val="4F417A"/>
                 </a:solidFill>
@@ -12318,20 +12542,20 @@
               </a:rPr>
               <a:t>442,02</a:t>
             </a:r>
-            <a:endParaRPr lang="en-US" sz="1280" dirty="0"/>
-          </a:p>
-        </p:txBody>
-      </p:sp>
-      <p:sp>
-        <p:nvSpPr>
-          <p:cNvPr id="36" name="Shape 34"/>
-          <p:cNvSpPr/>
-          <p:nvPr/>
-        </p:nvSpPr>
-        <p:spPr>
-          <a:xfrm>
-            <a:off x="658368" y="4507992"/>
-            <a:ext cx="7013448" cy="0"/>
+            <a:endParaRPr lang="en-US" sz="1190" dirty="0"/>
+          </a:p>
+        </p:txBody>
+      </p:sp>
+      <p:sp>
+        <p:nvSpPr>
+          <p:cNvPr id="41" name="Shape 39"/>
+          <p:cNvSpPr/>
+          <p:nvPr/>
+        </p:nvSpPr>
+        <p:spPr>
+          <a:xfrm>
+            <a:off x="512064" y="4507992"/>
+            <a:ext cx="7388352" cy="0"/>
           </a:xfrm>
           <a:prstGeom prst="line">
             <a:avLst/>
@@ -12348,14 +12572,14 @@
       </p:sp>
       <p:sp>
         <p:nvSpPr>
-          <p:cNvPr id="37" name="Text 35"/>
-          <p:cNvSpPr/>
-          <p:nvPr/>
-        </p:nvSpPr>
-        <p:spPr>
-          <a:xfrm>
-            <a:off x="658368" y="4507992"/>
-            <a:ext cx="1783080" cy="438912"/>
+          <p:cNvPr id="42" name="Text 40"/>
+          <p:cNvSpPr/>
+          <p:nvPr/>
+        </p:nvSpPr>
+        <p:spPr>
+          <a:xfrm>
+            <a:off x="512064" y="4507992"/>
+            <a:ext cx="1554480" cy="438912"/>
           </a:xfrm>
           <a:prstGeom prst="rect">
             <a:avLst/>
@@ -12376,7 +12600,7 @@
               <a:buNone/>
             </a:pPr>
             <a:r>
-              <a:rPr lang="en-US" sz="1280" dirty="0">
+              <a:rPr lang="en-US" sz="1190" dirty="0">
                 <a:solidFill>
                   <a:srgbClr val="1A1A1A"/>
                 </a:solidFill>
@@ -12386,20 +12610,20 @@
               </a:rPr>
               <a:t>SPICE</a:t>
             </a:r>
-            <a:endParaRPr lang="en-US" sz="1280" dirty="0"/>
-          </a:p>
-        </p:txBody>
-      </p:sp>
-      <p:sp>
-        <p:nvSpPr>
-          <p:cNvPr id="38" name="Text 36"/>
-          <p:cNvSpPr/>
-          <p:nvPr/>
-        </p:nvSpPr>
-        <p:spPr>
-          <a:xfrm>
-            <a:off x="2441448" y="4507992"/>
-            <a:ext cx="1481328" cy="438912"/>
+            <a:endParaRPr lang="en-US" sz="1190" dirty="0"/>
+          </a:p>
+        </p:txBody>
+      </p:sp>
+      <p:sp>
+        <p:nvSpPr>
+          <p:cNvPr id="43" name="Text 41"/>
+          <p:cNvSpPr/>
+          <p:nvPr/>
+        </p:nvSpPr>
+        <p:spPr>
+          <a:xfrm>
+            <a:off x="2066544" y="4507992"/>
+            <a:ext cx="1188720" cy="438912"/>
           </a:xfrm>
           <a:prstGeom prst="rect">
             <a:avLst/>
@@ -12420,7 +12644,7 @@
               <a:buNone/>
             </a:pPr>
             <a:r>
-              <a:rPr lang="en-US" sz="1280" dirty="0">
+              <a:rPr lang="en-US" sz="1190" dirty="0">
                 <a:solidFill>
                   <a:srgbClr val="1A1A1A"/>
                 </a:solidFill>
@@ -12428,22 +12652,66 @@
                 <a:ea typeface="Cambria" pitchFamily="34" charset="-122"/>
                 <a:cs typeface="Cambria" pitchFamily="34" charset="-120"/>
               </a:rPr>
+              <a:t>18,48</a:t>
+            </a:r>
+            <a:endParaRPr lang="en-US" sz="1190" dirty="0"/>
+          </a:p>
+        </p:txBody>
+      </p:sp>
+      <p:sp>
+        <p:nvSpPr>
+          <p:cNvPr id="44" name="Text 42"/>
+          <p:cNvSpPr/>
+          <p:nvPr/>
+        </p:nvSpPr>
+        <p:spPr>
+          <a:xfrm>
+            <a:off x="3255264" y="4507992"/>
+            <a:ext cx="1426464" cy="438912"/>
+          </a:xfrm>
+          <a:prstGeom prst="rect">
+            <a:avLst/>
+          </a:prstGeom>
+          <a:noFill/>
+          <a:ln/>
+        </p:spPr>
+        <p:txBody>
+          <a:bodyPr wrap="square" lIns="0" tIns="0" rIns="0" bIns="0" rtlCol="0" anchor="ctr">
+            <a:normAutofit/>
+          </a:bodyPr>
+          <a:lstStyle/>
+          <a:p>
+            <a:pPr algn="ctr" indent="0" marL="0">
+              <a:lnSpc>
+                <a:spcPct val="125000"/>
+              </a:lnSpc>
+              <a:buNone/>
+            </a:pPr>
+            <a:r>
+              <a:rPr lang="en-US" sz="1190" dirty="0">
+                <a:solidFill>
+                  <a:srgbClr val="1A1A1A"/>
+                </a:solidFill>
+                <a:latin typeface="Cambria" pitchFamily="34" charset="0"/>
+                <a:ea typeface="Cambria" pitchFamily="34" charset="-122"/>
+                <a:cs typeface="Cambria" pitchFamily="34" charset="-120"/>
+              </a:rPr>
               <a:t>44,37</a:t>
             </a:r>
-            <a:endParaRPr lang="en-US" sz="1280" dirty="0"/>
-          </a:p>
-        </p:txBody>
-      </p:sp>
-      <p:sp>
-        <p:nvSpPr>
-          <p:cNvPr id="39" name="Text 37"/>
-          <p:cNvSpPr/>
-          <p:nvPr/>
-        </p:nvSpPr>
-        <p:spPr>
-          <a:xfrm>
-            <a:off x="3922776" y="4507992"/>
-            <a:ext cx="1874520" cy="438912"/>
+            <a:endParaRPr lang="en-US" sz="1190" dirty="0"/>
+          </a:p>
+        </p:txBody>
+      </p:sp>
+      <p:sp>
+        <p:nvSpPr>
+          <p:cNvPr id="45" name="Text 43"/>
+          <p:cNvSpPr/>
+          <p:nvPr/>
+        </p:nvSpPr>
+        <p:spPr>
+          <a:xfrm>
+            <a:off x="4681728" y="4507992"/>
+            <a:ext cx="1609344" cy="438912"/>
           </a:xfrm>
           <a:prstGeom prst="rect">
             <a:avLst/>
@@ -12464,7 +12732,7 @@
               <a:buNone/>
             </a:pPr>
             <a:r>
-              <a:rPr lang="en-US" sz="1280" dirty="0">
+              <a:rPr lang="en-US" sz="1190" dirty="0">
                 <a:solidFill>
                   <a:srgbClr val="1A1A1A"/>
                 </a:solidFill>
@@ -12474,20 +12742,20 @@
               </a:rPr>
               <a:t>45,79</a:t>
             </a:r>
-            <a:endParaRPr lang="en-US" sz="1280" dirty="0"/>
-          </a:p>
-        </p:txBody>
-      </p:sp>
-      <p:sp>
-        <p:nvSpPr>
-          <p:cNvPr id="40" name="Text 38"/>
-          <p:cNvSpPr/>
-          <p:nvPr/>
-        </p:nvSpPr>
-        <p:spPr>
-          <a:xfrm>
-            <a:off x="5797296" y="4507992"/>
-            <a:ext cx="1874520" cy="438912"/>
+            <a:endParaRPr lang="en-US" sz="1190" dirty="0"/>
+          </a:p>
+        </p:txBody>
+      </p:sp>
+      <p:sp>
+        <p:nvSpPr>
+          <p:cNvPr id="46" name="Text 44"/>
+          <p:cNvSpPr/>
+          <p:nvPr/>
+        </p:nvSpPr>
+        <p:spPr>
+          <a:xfrm>
+            <a:off x="6291072" y="4507992"/>
+            <a:ext cx="1609344" cy="438912"/>
           </a:xfrm>
           <a:prstGeom prst="rect">
             <a:avLst/>
@@ -12508,7 +12776,7 @@
               <a:buNone/>
             </a:pPr>
             <a:r>
-              <a:rPr lang="en-US" sz="1280" b="1" dirty="0">
+              <a:rPr lang="en-US" sz="1190" b="1" dirty="0">
                 <a:solidFill>
                   <a:srgbClr val="4F417A"/>
                 </a:solidFill>
@@ -12518,20 +12786,20 @@
               </a:rPr>
               <a:t>47,13</a:t>
             </a:r>
-            <a:endParaRPr lang="en-US" sz="1280" dirty="0"/>
-          </a:p>
-        </p:txBody>
-      </p:sp>
-      <p:sp>
-        <p:nvSpPr>
-          <p:cNvPr id="41" name="Shape 39"/>
-          <p:cNvSpPr/>
-          <p:nvPr/>
-        </p:nvSpPr>
-        <p:spPr>
-          <a:xfrm>
-            <a:off x="658368" y="4946904"/>
-            <a:ext cx="7013448" cy="0"/>
+            <a:endParaRPr lang="en-US" sz="1190" dirty="0"/>
+          </a:p>
+        </p:txBody>
+      </p:sp>
+      <p:sp>
+        <p:nvSpPr>
+          <p:cNvPr id="47" name="Shape 45"/>
+          <p:cNvSpPr/>
+          <p:nvPr/>
+        </p:nvSpPr>
+        <p:spPr>
+          <a:xfrm>
+            <a:off x="512064" y="4946904"/>
+            <a:ext cx="7388352" cy="0"/>
           </a:xfrm>
           <a:prstGeom prst="line">
             <a:avLst/>
@@ -12548,14 +12816,14 @@
       </p:sp>
       <p:sp>
         <p:nvSpPr>
-          <p:cNvPr id="42" name="Text 40"/>
-          <p:cNvSpPr/>
-          <p:nvPr/>
-        </p:nvSpPr>
-        <p:spPr>
-          <a:xfrm>
-            <a:off x="658368" y="4946904"/>
-            <a:ext cx="1783080" cy="438912"/>
+          <p:cNvPr id="48" name="Text 46"/>
+          <p:cNvSpPr/>
+          <p:nvPr/>
+        </p:nvSpPr>
+        <p:spPr>
+          <a:xfrm>
+            <a:off x="512064" y="4946904"/>
+            <a:ext cx="1554480" cy="438912"/>
           </a:xfrm>
           <a:prstGeom prst="rect">
             <a:avLst/>
@@ -12576,7 +12844,7 @@
               <a:buNone/>
             </a:pPr>
             <a:r>
-              <a:rPr lang="en-US" sz="1280" dirty="0">
+              <a:rPr lang="en-US" sz="1190" dirty="0">
                 <a:solidFill>
                   <a:srgbClr val="1A1A1A"/>
                 </a:solidFill>
@@ -12586,20 +12854,20 @@
               </a:rPr>
               <a:t>chrF</a:t>
             </a:r>
-            <a:endParaRPr lang="en-US" sz="1280" dirty="0"/>
-          </a:p>
-        </p:txBody>
-      </p:sp>
-      <p:sp>
-        <p:nvSpPr>
-          <p:cNvPr id="43" name="Text 41"/>
-          <p:cNvSpPr/>
-          <p:nvPr/>
-        </p:nvSpPr>
-        <p:spPr>
-          <a:xfrm>
-            <a:off x="2441448" y="4946904"/>
-            <a:ext cx="1481328" cy="438912"/>
+            <a:endParaRPr lang="en-US" sz="1190" dirty="0"/>
+          </a:p>
+        </p:txBody>
+      </p:sp>
+      <p:sp>
+        <p:nvSpPr>
+          <p:cNvPr id="49" name="Text 47"/>
+          <p:cNvSpPr/>
+          <p:nvPr/>
+        </p:nvSpPr>
+        <p:spPr>
+          <a:xfrm>
+            <a:off x="2066544" y="4946904"/>
+            <a:ext cx="1188720" cy="438912"/>
           </a:xfrm>
           <a:prstGeom prst="rect">
             <a:avLst/>
@@ -12620,7 +12888,7 @@
               <a:buNone/>
             </a:pPr>
             <a:r>
-              <a:rPr lang="en-US" sz="1280" dirty="0">
+              <a:rPr lang="en-US" sz="1190" dirty="0">
                 <a:solidFill>
                   <a:srgbClr val="1A1A1A"/>
                 </a:solidFill>
@@ -12628,22 +12896,66 @@
                 <a:ea typeface="Cambria" pitchFamily="34" charset="-122"/>
                 <a:cs typeface="Cambria" pitchFamily="34" charset="-120"/>
               </a:rPr>
+              <a:t>40,18</a:t>
+            </a:r>
+            <a:endParaRPr lang="en-US" sz="1190" dirty="0"/>
+          </a:p>
+        </p:txBody>
+      </p:sp>
+      <p:sp>
+        <p:nvSpPr>
+          <p:cNvPr id="50" name="Text 48"/>
+          <p:cNvSpPr/>
+          <p:nvPr/>
+        </p:nvSpPr>
+        <p:spPr>
+          <a:xfrm>
+            <a:off x="3255264" y="4946904"/>
+            <a:ext cx="1426464" cy="438912"/>
+          </a:xfrm>
+          <a:prstGeom prst="rect">
+            <a:avLst/>
+          </a:prstGeom>
+          <a:noFill/>
+          <a:ln/>
+        </p:spPr>
+        <p:txBody>
+          <a:bodyPr wrap="square" lIns="0" tIns="0" rIns="0" bIns="0" rtlCol="0" anchor="ctr">
+            <a:normAutofit/>
+          </a:bodyPr>
+          <a:lstStyle/>
+          <a:p>
+            <a:pPr algn="ctr" indent="0" marL="0">
+              <a:lnSpc>
+                <a:spcPct val="125000"/>
+              </a:lnSpc>
+              <a:buNone/>
+            </a:pPr>
+            <a:r>
+              <a:rPr lang="en-US" sz="1190" dirty="0">
+                <a:solidFill>
+                  <a:srgbClr val="1A1A1A"/>
+                </a:solidFill>
+                <a:latin typeface="Cambria" pitchFamily="34" charset="0"/>
+                <a:ea typeface="Cambria" pitchFamily="34" charset="-122"/>
+                <a:cs typeface="Cambria" pitchFamily="34" charset="-120"/>
+              </a:rPr>
               <a:t>61,26</a:t>
             </a:r>
-            <a:endParaRPr lang="en-US" sz="1280" dirty="0"/>
-          </a:p>
-        </p:txBody>
-      </p:sp>
-      <p:sp>
-        <p:nvSpPr>
-          <p:cNvPr id="44" name="Text 42"/>
-          <p:cNvSpPr/>
-          <p:nvPr/>
-        </p:nvSpPr>
-        <p:spPr>
-          <a:xfrm>
-            <a:off x="3922776" y="4946904"/>
-            <a:ext cx="1874520" cy="438912"/>
+            <a:endParaRPr lang="en-US" sz="1190" dirty="0"/>
+          </a:p>
+        </p:txBody>
+      </p:sp>
+      <p:sp>
+        <p:nvSpPr>
+          <p:cNvPr id="51" name="Text 49"/>
+          <p:cNvSpPr/>
+          <p:nvPr/>
+        </p:nvSpPr>
+        <p:spPr>
+          <a:xfrm>
+            <a:off x="4681728" y="4946904"/>
+            <a:ext cx="1609344" cy="438912"/>
           </a:xfrm>
           <a:prstGeom prst="rect">
             <a:avLst/>
@@ -12664,7 +12976,7 @@
               <a:buNone/>
             </a:pPr>
             <a:r>
-              <a:rPr lang="en-US" sz="1280" dirty="0">
+              <a:rPr lang="en-US" sz="1190" dirty="0">
                 <a:solidFill>
                   <a:srgbClr val="1A1A1A"/>
                 </a:solidFill>
@@ -12674,20 +12986,20 @@
               </a:rPr>
               <a:t>62,87</a:t>
             </a:r>
-            <a:endParaRPr lang="en-US" sz="1280" dirty="0"/>
-          </a:p>
-        </p:txBody>
-      </p:sp>
-      <p:sp>
-        <p:nvSpPr>
-          <p:cNvPr id="45" name="Text 43"/>
-          <p:cNvSpPr/>
-          <p:nvPr/>
-        </p:nvSpPr>
-        <p:spPr>
-          <a:xfrm>
-            <a:off x="5797296" y="4946904"/>
-            <a:ext cx="1874520" cy="438912"/>
+            <a:endParaRPr lang="en-US" sz="1190" dirty="0"/>
+          </a:p>
+        </p:txBody>
+      </p:sp>
+      <p:sp>
+        <p:nvSpPr>
+          <p:cNvPr id="52" name="Text 50"/>
+          <p:cNvSpPr/>
+          <p:nvPr/>
+        </p:nvSpPr>
+        <p:spPr>
+          <a:xfrm>
+            <a:off x="6291072" y="4946904"/>
+            <a:ext cx="1609344" cy="438912"/>
           </a:xfrm>
           <a:prstGeom prst="rect">
             <a:avLst/>
@@ -12708,7 +13020,7 @@
               <a:buNone/>
             </a:pPr>
             <a:r>
-              <a:rPr lang="en-US" sz="1280" b="1" dirty="0">
+              <a:rPr lang="en-US" sz="1190" b="1" dirty="0">
                 <a:solidFill>
                   <a:srgbClr val="4F417A"/>
                 </a:solidFill>
@@ -12718,20 +13030,20 @@
               </a:rPr>
               <a:t>63,44</a:t>
             </a:r>
-            <a:endParaRPr lang="en-US" sz="1280" dirty="0"/>
-          </a:p>
-        </p:txBody>
-      </p:sp>
-      <p:sp>
-        <p:nvSpPr>
-          <p:cNvPr id="46" name="Shape 44"/>
-          <p:cNvSpPr/>
-          <p:nvPr/>
-        </p:nvSpPr>
-        <p:spPr>
-          <a:xfrm>
-            <a:off x="658368" y="5385816"/>
-            <a:ext cx="7013448" cy="0"/>
+            <a:endParaRPr lang="en-US" sz="1190" dirty="0"/>
+          </a:p>
+        </p:txBody>
+      </p:sp>
+      <p:sp>
+        <p:nvSpPr>
+          <p:cNvPr id="53" name="Shape 51"/>
+          <p:cNvSpPr/>
+          <p:nvPr/>
+        </p:nvSpPr>
+        <p:spPr>
+          <a:xfrm>
+            <a:off x="512064" y="5385816"/>
+            <a:ext cx="7388352" cy="0"/>
           </a:xfrm>
           <a:prstGeom prst="line">
             <a:avLst/>
@@ -12748,14 +13060,14 @@
       </p:sp>
       <p:sp>
         <p:nvSpPr>
-          <p:cNvPr id="47" name="Text 45"/>
-          <p:cNvSpPr/>
-          <p:nvPr/>
-        </p:nvSpPr>
-        <p:spPr>
-          <a:xfrm>
-            <a:off x="658368" y="5385816"/>
-            <a:ext cx="1783080" cy="438912"/>
+          <p:cNvPr id="54" name="Text 52"/>
+          <p:cNvSpPr/>
+          <p:nvPr/>
+        </p:nvSpPr>
+        <p:spPr>
+          <a:xfrm>
+            <a:off x="512064" y="5385816"/>
+            <a:ext cx="1554480" cy="438912"/>
           </a:xfrm>
           <a:prstGeom prst="rect">
             <a:avLst/>
@@ -12776,7 +13088,7 @@
               <a:buNone/>
             </a:pPr>
             <a:r>
-              <a:rPr lang="en-US" sz="1280" dirty="0">
+              <a:rPr lang="en-US" sz="1190" dirty="0">
                 <a:solidFill>
                   <a:srgbClr val="1A1A1A"/>
                 </a:solidFill>
@@ -12786,20 +13098,20 @@
               </a:rPr>
               <a:t>BERTScore</a:t>
             </a:r>
-            <a:endParaRPr lang="en-US" sz="1280" dirty="0"/>
-          </a:p>
-        </p:txBody>
-      </p:sp>
-      <p:sp>
-        <p:nvSpPr>
-          <p:cNvPr id="48" name="Text 46"/>
-          <p:cNvSpPr/>
-          <p:nvPr/>
-        </p:nvSpPr>
-        <p:spPr>
-          <a:xfrm>
-            <a:off x="2441448" y="5385816"/>
-            <a:ext cx="1481328" cy="438912"/>
+            <a:endParaRPr lang="en-US" sz="1190" dirty="0"/>
+          </a:p>
+        </p:txBody>
+      </p:sp>
+      <p:sp>
+        <p:nvSpPr>
+          <p:cNvPr id="55" name="Text 53"/>
+          <p:cNvSpPr/>
+          <p:nvPr/>
+        </p:nvSpPr>
+        <p:spPr>
+          <a:xfrm>
+            <a:off x="2066544" y="5385816"/>
+            <a:ext cx="1188720" cy="438912"/>
           </a:xfrm>
           <a:prstGeom prst="rect">
             <a:avLst/>
@@ -12820,7 +13132,7 @@
               <a:buNone/>
             </a:pPr>
             <a:r>
-              <a:rPr lang="en-US" sz="1280" dirty="0">
+              <a:rPr lang="en-US" sz="1190" dirty="0">
                 <a:solidFill>
                   <a:srgbClr val="1A1A1A"/>
                 </a:solidFill>
@@ -12828,22 +13140,66 @@
                 <a:ea typeface="Cambria" pitchFamily="34" charset="-122"/>
                 <a:cs typeface="Cambria" pitchFamily="34" charset="-120"/>
               </a:rPr>
+              <a:t>40,10</a:t>
+            </a:r>
+            <a:endParaRPr lang="en-US" sz="1190" dirty="0"/>
+          </a:p>
+        </p:txBody>
+      </p:sp>
+      <p:sp>
+        <p:nvSpPr>
+          <p:cNvPr id="56" name="Text 54"/>
+          <p:cNvSpPr/>
+          <p:nvPr/>
+        </p:nvSpPr>
+        <p:spPr>
+          <a:xfrm>
+            <a:off x="3255264" y="5385816"/>
+            <a:ext cx="1426464" cy="438912"/>
+          </a:xfrm>
+          <a:prstGeom prst="rect">
+            <a:avLst/>
+          </a:prstGeom>
+          <a:noFill/>
+          <a:ln/>
+        </p:spPr>
+        <p:txBody>
+          <a:bodyPr wrap="square" lIns="0" tIns="0" rIns="0" bIns="0" rtlCol="0" anchor="ctr">
+            <a:normAutofit/>
+          </a:bodyPr>
+          <a:lstStyle/>
+          <a:p>
+            <a:pPr algn="ctr" indent="0" marL="0">
+              <a:lnSpc>
+                <a:spcPct val="125000"/>
+              </a:lnSpc>
+              <a:buNone/>
+            </a:pPr>
+            <a:r>
+              <a:rPr lang="en-US" sz="1190" dirty="0">
+                <a:solidFill>
+                  <a:srgbClr val="1A1A1A"/>
+                </a:solidFill>
+                <a:latin typeface="Cambria" pitchFamily="34" charset="0"/>
+                <a:ea typeface="Cambria" pitchFamily="34" charset="-122"/>
+                <a:cs typeface="Cambria" pitchFamily="34" charset="-120"/>
+              </a:rPr>
               <a:t>66,33</a:t>
             </a:r>
-            <a:endParaRPr lang="en-US" sz="1280" dirty="0"/>
-          </a:p>
-        </p:txBody>
-      </p:sp>
-      <p:sp>
-        <p:nvSpPr>
-          <p:cNvPr id="49" name="Text 47"/>
-          <p:cNvSpPr/>
-          <p:nvPr/>
-        </p:nvSpPr>
-        <p:spPr>
-          <a:xfrm>
-            <a:off x="3922776" y="5385816"/>
-            <a:ext cx="1874520" cy="438912"/>
+            <a:endParaRPr lang="en-US" sz="1190" dirty="0"/>
+          </a:p>
+        </p:txBody>
+      </p:sp>
+      <p:sp>
+        <p:nvSpPr>
+          <p:cNvPr id="57" name="Text 55"/>
+          <p:cNvSpPr/>
+          <p:nvPr/>
+        </p:nvSpPr>
+        <p:spPr>
+          <a:xfrm>
+            <a:off x="4681728" y="5385816"/>
+            <a:ext cx="1609344" cy="438912"/>
           </a:xfrm>
           <a:prstGeom prst="rect">
             <a:avLst/>
@@ -12864,7 +13220,7 @@
               <a:buNone/>
             </a:pPr>
             <a:r>
-              <a:rPr lang="en-US" sz="1280" dirty="0">
+              <a:rPr lang="en-US" sz="1190" dirty="0">
                 <a:solidFill>
                   <a:srgbClr val="1A1A1A"/>
                 </a:solidFill>
@@ -12874,20 +13230,20 @@
               </a:rPr>
               <a:t>67,07</a:t>
             </a:r>
-            <a:endParaRPr lang="en-US" sz="1280" dirty="0"/>
-          </a:p>
-        </p:txBody>
-      </p:sp>
-      <p:sp>
-        <p:nvSpPr>
-          <p:cNvPr id="50" name="Text 48"/>
-          <p:cNvSpPr/>
-          <p:nvPr/>
-        </p:nvSpPr>
-        <p:spPr>
-          <a:xfrm>
-            <a:off x="5797296" y="5385816"/>
-            <a:ext cx="1874520" cy="438912"/>
+            <a:endParaRPr lang="en-US" sz="1190" dirty="0"/>
+          </a:p>
+        </p:txBody>
+      </p:sp>
+      <p:sp>
+        <p:nvSpPr>
+          <p:cNvPr id="58" name="Text 56"/>
+          <p:cNvSpPr/>
+          <p:nvPr/>
+        </p:nvSpPr>
+        <p:spPr>
+          <a:xfrm>
+            <a:off x="6291072" y="5385816"/>
+            <a:ext cx="1609344" cy="438912"/>
           </a:xfrm>
           <a:prstGeom prst="rect">
             <a:avLst/>
@@ -12908,7 +13264,7 @@
               <a:buNone/>
             </a:pPr>
             <a:r>
-              <a:rPr lang="en-US" sz="1280" b="1" dirty="0">
+              <a:rPr lang="en-US" sz="1190" b="1" dirty="0">
                 <a:solidFill>
                   <a:srgbClr val="4F417A"/>
                 </a:solidFill>
@@ -12918,13 +13274,13 @@
               </a:rPr>
               <a:t>67,73</a:t>
             </a:r>
-            <a:endParaRPr lang="en-US" sz="1280" dirty="0"/>
-          </a:p>
-        </p:txBody>
-      </p:sp>
-      <p:sp>
-        <p:nvSpPr>
-          <p:cNvPr id="51" name="Text 49"/>
+            <a:endParaRPr lang="en-US" sz="1190" dirty="0"/>
+          </a:p>
+        </p:txBody>
+      </p:sp>
+      <p:sp>
+        <p:nvSpPr>
+          <p:cNvPr id="59" name="Text 57"/>
           <p:cNvSpPr/>
           <p:nvPr/>
         </p:nvSpPr>
@@ -12968,7 +13324,7 @@
       </p:sp>
       <p:sp>
         <p:nvSpPr>
-          <p:cNvPr id="52" name="Shape 50"/>
+          <p:cNvPr id="60" name="Shape 58"/>
           <p:cNvSpPr/>
           <p:nvPr/>
         </p:nvSpPr>
@@ -12995,7 +13351,7 @@
       </p:sp>
       <p:sp>
         <p:nvSpPr>
-          <p:cNvPr id="53" name="Shape 51"/>
+          <p:cNvPr id="61" name="Shape 59"/>
           <p:cNvSpPr/>
           <p:nvPr/>
         </p:nvSpPr>
@@ -13022,7 +13378,7 @@
       </p:sp>
       <p:sp>
         <p:nvSpPr>
-          <p:cNvPr id="54" name="Shape 52"/>
+          <p:cNvPr id="62" name="Shape 60"/>
           <p:cNvSpPr/>
           <p:nvPr/>
         </p:nvSpPr>
@@ -13049,7 +13405,7 @@
       </p:sp>
       <p:sp>
         <p:nvSpPr>
-          <p:cNvPr id="55" name="Shape 53"/>
+          <p:cNvPr id="63" name="Shape 61"/>
           <p:cNvSpPr/>
           <p:nvPr/>
         </p:nvSpPr>
@@ -13076,7 +13432,7 @@
       </p:sp>
       <p:sp>
         <p:nvSpPr>
-          <p:cNvPr id="56" name="Text 54"/>
+          <p:cNvPr id="64" name="Text 62"/>
           <p:cNvSpPr/>
           <p:nvPr/>
         </p:nvSpPr>
@@ -13118,7 +13474,7 @@
       </p:sp>
       <p:sp>
         <p:nvSpPr>
-          <p:cNvPr id="57" name="Text 55"/>
+          <p:cNvPr id="65" name="Text 63"/>
           <p:cNvSpPr/>
           <p:nvPr/>
         </p:nvSpPr>
@@ -13160,7 +13516,7 @@
       </p:sp>
       <p:sp>
         <p:nvSpPr>
-          <p:cNvPr id="58" name="Text 56"/>
+          <p:cNvPr id="66" name="Text 64"/>
           <p:cNvSpPr/>
           <p:nvPr/>
         </p:nvSpPr>
@@ -13202,7 +13558,7 @@
       </p:sp>
       <p:sp>
         <p:nvSpPr>
-          <p:cNvPr id="59" name="Text 57"/>
+          <p:cNvPr id="67" name="Text 65"/>
           <p:cNvSpPr/>
           <p:nvPr/>
         </p:nvSpPr>
@@ -13339,7 +13695,7 @@
                 <a:ea typeface="Cambria" pitchFamily="34" charset="-122"/>
                 <a:cs typeface="Cambria" pitchFamily="34" charset="-120"/>
               </a:rPr>
-              <a:t>Thực nghiệm và kết quả</a:t>
+              <a:t>4.5. Đối chiếu với bốn mô hình định vị</a:t>
             </a:r>
             <a:endParaRPr lang="en-US" sz="1820" dirty="0"/>
           </a:p>
@@ -13353,8 +13709,8 @@
         </p:nvSpPr>
         <p:spPr>
           <a:xfrm>
-            <a:off x="502920" y="877824"/>
-            <a:ext cx="8138160" cy="457200"/>
+            <a:off x="502920" y="822960"/>
+            <a:ext cx="8138160" cy="640080"/>
           </a:xfrm>
           <a:prstGeom prst="rect">
             <a:avLst/>
@@ -13375,7 +13731,7 @@
               <a:buNone/>
             </a:pPr>
             <a:r>
-              <a:rPr lang="en-US" sz="1620" b="1" dirty="0">
+              <a:rPr lang="en-US" sz="1520" b="1" dirty="0">
                 <a:solidFill>
                   <a:srgbClr val="25194B"/>
                 </a:solidFill>
@@ -13383,9 +13739,9 @@
                 <a:ea typeface="Cambria" pitchFamily="34" charset="-122"/>
                 <a:cs typeface="Cambria" pitchFamily="34" charset="-120"/>
               </a:rPr>
-              <a:t>GRPO-SPICE cao hơn S1 khi executability được tính bằng bốn công cụ định vị khác nhau.</a:t>
-            </a:r>
-            <a:endParaRPr lang="en-US" sz="1620" dirty="0"/>
+              <a:t>Để kiểm tra kết quả không phụ thuộc vào một mô hình định vị duy nhất, executability được tính lại bằng 4 mô hình: UGround, UI-Venus, Phi-Ground và Phi-4.</a:t>
+            </a:r>
+            <a:endParaRPr lang="en-US" sz="1520" dirty="0"/>
           </a:p>
         </p:txBody>
       </p:sp>
@@ -13446,7 +13802,7 @@
               <a:buNone/>
             </a:pPr>
             <a:r>
-              <a:rPr lang="en-US" sz="1350" b="1" dirty="0">
+              <a:rPr lang="en-US" sz="1320" b="1" dirty="0">
                 <a:solidFill>
                   <a:srgbClr val="FFFFFF"/>
                 </a:solidFill>
@@ -13454,9 +13810,9 @@
                 <a:ea typeface="Cambria" pitchFamily="34" charset="-122"/>
                 <a:cs typeface="Cambria" pitchFamily="34" charset="-120"/>
               </a:rPr>
-              <a:t>Công cụ</a:t>
-            </a:r>
-            <a:endParaRPr lang="en-US" sz="1350" dirty="0"/>
+              <a:t>Mô hình định vị</a:t>
+            </a:r>
+            <a:endParaRPr lang="en-US" sz="1320" dirty="0"/>
           </a:p>
         </p:txBody>
       </p:sp>
@@ -13490,7 +13846,7 @@
               <a:buNone/>
             </a:pPr>
             <a:r>
-              <a:rPr lang="en-US" sz="1350" b="1" dirty="0">
+              <a:rPr lang="en-US" sz="1320" b="1" dirty="0">
                 <a:solidFill>
                   <a:srgbClr val="FFFFFF"/>
                 </a:solidFill>
@@ -13498,9 +13854,9 @@
                 <a:ea typeface="Cambria" pitchFamily="34" charset="-122"/>
                 <a:cs typeface="Cambria" pitchFamily="34" charset="-120"/>
               </a:rPr>
-              <a:t>GRPO-SPICE − S1</a:t>
-            </a:r>
-            <a:endParaRPr lang="en-US" sz="1350" dirty="0"/>
+              <a:t>GRPO-SPICE − baseline S1</a:t>
+            </a:r>
+            <a:endParaRPr lang="en-US" sz="1320" dirty="0"/>
           </a:p>
         </p:txBody>
       </p:sp>
@@ -13534,7 +13890,7 @@
               <a:buNone/>
             </a:pPr>
             <a:r>
-              <a:rPr lang="en-US" sz="1350" b="1" dirty="0">
+              <a:rPr lang="en-US" sz="1320" b="1" dirty="0">
                 <a:solidFill>
                   <a:srgbClr val="FFFFFF"/>
                 </a:solidFill>
@@ -13544,7 +13900,7 @@
               </a:rPr>
               <a:t>KTC 95%</a:t>
             </a:r>
-            <a:endParaRPr lang="en-US" sz="1350" dirty="0"/>
+            <a:endParaRPr lang="en-US" sz="1320" dirty="0"/>
           </a:p>
         </p:txBody>
       </p:sp>
@@ -14191,17 +14547,19 @@
           <a:ln/>
         </p:spPr>
         <p:txBody>
-          <a:bodyPr wrap="square" lIns="0" tIns="0" rIns="0" bIns="0" rtlCol="0" anchor="ctr"/>
-          <a:lstStyle/>
-          <a:p>
-            <a:pPr algn="ctr" indent="0" marL="0">
-              <a:lnSpc>
-                <a:spcPct val="125000"/>
-              </a:lnSpc>
-              <a:buNone/>
-            </a:pPr>
-            <a:r>
-              <a:rPr lang="en-US" sz="1620" b="1" dirty="0">
+          <a:bodyPr wrap="square" lIns="0" tIns="0" rIns="0" bIns="0" rtlCol="0" anchor="ctr">
+            <a:normAutofit/>
+          </a:bodyPr>
+          <a:lstStyle/>
+          <a:p>
+            <a:pPr algn="ctr" indent="0" marL="0">
+              <a:lnSpc>
+                <a:spcPct val="125000"/>
+              </a:lnSpc>
+              <a:buNone/>
+            </a:pPr>
+            <a:r>
+              <a:rPr lang="en-US" sz="1550" b="1" dirty="0">
                 <a:solidFill>
                   <a:srgbClr val="25194B"/>
                 </a:solidFill>
@@ -14209,57 +14567,15 @@
                 <a:ea typeface="Cambria" pitchFamily="34" charset="-122"/>
                 <a:cs typeface="Cambria" pitchFamily="34" charset="-120"/>
               </a:rPr>
-              <a:t>Cả 4 khoảng tin cậy đều nằm trên 0.</a:t>
-            </a:r>
-            <a:endParaRPr lang="en-US" sz="1620" dirty="0"/>
-          </a:p>
-        </p:txBody>
-      </p:sp>
-      <p:sp>
-        <p:nvSpPr>
-          <p:cNvPr id="26" name="Text 24"/>
-          <p:cNvSpPr/>
-          <p:nvPr/>
-        </p:nvSpPr>
-        <p:spPr>
-          <a:xfrm>
-            <a:off x="502920" y="5623560"/>
-            <a:ext cx="8138160" cy="310896"/>
-          </a:xfrm>
-          <a:prstGeom prst="rect">
-            <a:avLst/>
-          </a:prstGeom>
-          <a:noFill/>
-          <a:ln/>
-        </p:spPr>
-        <p:txBody>
-          <a:bodyPr wrap="square" lIns="0" tIns="0" rIns="0" bIns="0" rtlCol="0" anchor="ctr"/>
-          <a:lstStyle/>
-          <a:p>
-            <a:pPr algn="ctr" indent="0" marL="0">
-              <a:lnSpc>
-                <a:spcPct val="125000"/>
-              </a:lnSpc>
-              <a:buNone/>
-            </a:pPr>
-            <a:r>
-              <a:rPr lang="en-US" sz="1280" dirty="0">
-                <a:solidFill>
-                  <a:srgbClr val="5A5A66"/>
-                </a:solidFill>
-                <a:latin typeface="Cambria" pitchFamily="34" charset="0"/>
-                <a:ea typeface="Cambria" pitchFamily="34" charset="-122"/>
-                <a:cs typeface="Cambria" pitchFamily="34" charset="-120"/>
-              </a:rPr>
-              <a:t>Phi-Ground và Phi-4 nằm ngoài họ Qwen.</a:t>
-            </a:r>
-            <a:endParaRPr lang="en-US" sz="1280" dirty="0"/>
-          </a:p>
-        </p:txBody>
-      </p:sp>
-      <p:sp>
-        <p:nvSpPr>
-          <p:cNvPr id="27" name="Shape 25"/>
+              <a:t>Cả 4 khoảng tin cậy đều nằm trên 0 → mức tăng không chỉ xuất hiện với một mô hình định vị.</a:t>
+            </a:r>
+            <a:endParaRPr lang="en-US" sz="1550" dirty="0"/>
+          </a:p>
+        </p:txBody>
+      </p:sp>
+      <p:sp>
+        <p:nvSpPr>
+          <p:cNvPr id="26" name="Shape 24"/>
           <p:cNvSpPr/>
           <p:nvPr/>
         </p:nvSpPr>
@@ -14286,7 +14602,7 @@
       </p:sp>
       <p:sp>
         <p:nvSpPr>
-          <p:cNvPr id="28" name="Shape 26"/>
+          <p:cNvPr id="27" name="Shape 25"/>
           <p:cNvSpPr/>
           <p:nvPr/>
         </p:nvSpPr>
@@ -14313,7 +14629,7 @@
       </p:sp>
       <p:sp>
         <p:nvSpPr>
-          <p:cNvPr id="29" name="Shape 27"/>
+          <p:cNvPr id="28" name="Shape 26"/>
           <p:cNvSpPr/>
           <p:nvPr/>
         </p:nvSpPr>
@@ -14340,7 +14656,7 @@
       </p:sp>
       <p:sp>
         <p:nvSpPr>
-          <p:cNvPr id="30" name="Shape 28"/>
+          <p:cNvPr id="29" name="Shape 27"/>
           <p:cNvSpPr/>
           <p:nvPr/>
         </p:nvSpPr>
@@ -14367,7 +14683,7 @@
       </p:sp>
       <p:sp>
         <p:nvSpPr>
-          <p:cNvPr id="31" name="Text 29"/>
+          <p:cNvPr id="30" name="Text 28"/>
           <p:cNvSpPr/>
           <p:nvPr/>
         </p:nvSpPr>
@@ -14409,7 +14725,7 @@
       </p:sp>
       <p:sp>
         <p:nvSpPr>
-          <p:cNvPr id="32" name="Text 30"/>
+          <p:cNvPr id="31" name="Text 29"/>
           <p:cNvSpPr/>
           <p:nvPr/>
         </p:nvSpPr>
@@ -14451,7 +14767,7 @@
       </p:sp>
       <p:sp>
         <p:nvSpPr>
-          <p:cNvPr id="33" name="Text 31"/>
+          <p:cNvPr id="32" name="Text 30"/>
           <p:cNvSpPr/>
           <p:nvPr/>
         </p:nvSpPr>
@@ -14493,7 +14809,7 @@
       </p:sp>
       <p:sp>
         <p:nvSpPr>
-          <p:cNvPr id="34" name="Text 32"/>
+          <p:cNvPr id="33" name="Text 31"/>
           <p:cNvSpPr/>
           <p:nvPr/>
         </p:nvSpPr>
@@ -14630,7 +14946,7 @@
                 <a:ea typeface="Cambria" pitchFamily="34" charset="-122"/>
                 <a:cs typeface="Cambria" pitchFamily="34" charset="-120"/>
               </a:rPr>
-              <a:t>Thực nghiệm và kết quả</a:t>
+              <a:t>4.6. Lịch sử do mô hình tự sinh</a:t>
             </a:r>
             <a:endParaRPr lang="en-US" sz="1820" dirty="0"/>
           </a:p>
@@ -14739,7 +15055,7 @@
                 <a:ea typeface="Cambria" pitchFamily="34" charset="-122"/>
                 <a:cs typeface="Cambria" pitchFamily="34" charset="-120"/>
               </a:rPr>
-              <a:t>S1</a:t>
+              <a:t>Baseline S1</a:t>
             </a:r>
             <a:endParaRPr lang="en-US" sz="1700" dirty="0"/>
           </a:p>
@@ -14971,27 +15287,29 @@
         </p:nvSpPr>
         <p:spPr>
           <a:xfrm>
-            <a:off x="502920" y="5376672"/>
-            <a:ext cx="8138160" cy="402336"/>
-          </a:xfrm>
-          <a:prstGeom prst="rect">
-            <a:avLst/>
-          </a:prstGeom>
-          <a:noFill/>
-          <a:ln/>
-        </p:spPr>
-        <p:txBody>
-          <a:bodyPr wrap="square" lIns="0" tIns="0" rIns="0" bIns="0" rtlCol="0" anchor="ctr"/>
-          <a:lstStyle/>
-          <a:p>
-            <a:pPr algn="ctr" indent="0" marL="0">
-              <a:lnSpc>
-                <a:spcPct val="125000"/>
-              </a:lnSpc>
-              <a:buNone/>
-            </a:pPr>
-            <a:r>
-              <a:rPr lang="en-US" sz="1400" b="1" dirty="0">
+            <a:off x="502920" y="5340096"/>
+            <a:ext cx="8138160" cy="457200"/>
+          </a:xfrm>
+          <a:prstGeom prst="rect">
+            <a:avLst/>
+          </a:prstGeom>
+          <a:noFill/>
+          <a:ln/>
+        </p:spPr>
+        <p:txBody>
+          <a:bodyPr wrap="square" lIns="0" tIns="0" rIns="0" bIns="0" rtlCol="0" anchor="ctr">
+            <a:normAutofit/>
+          </a:bodyPr>
+          <a:lstStyle/>
+          <a:p>
+            <a:pPr algn="ctr" indent="0" marL="0">
+              <a:lnSpc>
+                <a:spcPct val="125000"/>
+              </a:lnSpc>
+              <a:buNone/>
+            </a:pPr>
+            <a:r>
+              <a:rPr lang="en-US" sz="1380" b="1" dirty="0">
                 <a:solidFill>
                   <a:srgbClr val="25194B"/>
                 </a:solidFill>
@@ -14999,9 +15317,9 @@
                 <a:ea typeface="Cambria" pitchFamily="34" charset="-122"/>
                 <a:cs typeface="Cambria" pitchFamily="34" charset="-120"/>
               </a:rPr>
-              <a:t>Ưu thế vẫn được giữ khi lịch sử không còn là câu chuẩn.</a:t>
-            </a:r>
-            <a:endParaRPr lang="en-US" sz="1400" dirty="0"/>
+              <a:t>Mức tăng vẫn còn khi các bước trước do chính mô hình tạo ra, gần hơn với tình huống sử dụng thực tế.</a:t>
+            </a:r>
+            <a:endParaRPr lang="en-US" sz="1380" dirty="0"/>
           </a:p>
         </p:txBody>
       </p:sp>
@@ -15378,7 +15696,7 @@
                 <a:ea typeface="Cambria" pitchFamily="34" charset="-122"/>
                 <a:cs typeface="Cambria" pitchFamily="34" charset="-120"/>
               </a:rPr>
-              <a:t>Thực nghiệm và kết quả</a:t>
+              <a:t>4.7. Chuyển miền sang AitZ</a:t>
             </a:r>
             <a:endParaRPr lang="en-US" sz="1820" dirty="0"/>
           </a:p>
@@ -15392,27 +15710,29 @@
         </p:nvSpPr>
         <p:spPr>
           <a:xfrm>
-            <a:off x="502920" y="877824"/>
-            <a:ext cx="8138160" cy="402336"/>
-          </a:xfrm>
-          <a:prstGeom prst="rect">
-            <a:avLst/>
-          </a:prstGeom>
-          <a:noFill/>
-          <a:ln/>
-        </p:spPr>
-        <p:txBody>
-          <a:bodyPr wrap="square" lIns="0" tIns="0" rIns="0" bIns="0" rtlCol="0" anchor="ctr"/>
-          <a:lstStyle/>
-          <a:p>
-            <a:pPr algn="ctr" indent="0" marL="0">
-              <a:lnSpc>
-                <a:spcPct val="125000"/>
-              </a:lnSpc>
-              <a:buNone/>
-            </a:pPr>
-            <a:r>
-              <a:rPr lang="en-US" sz="1650" b="1" dirty="0">
+            <a:off x="502920" y="832104"/>
+            <a:ext cx="8138160" cy="548640"/>
+          </a:xfrm>
+          <a:prstGeom prst="rect">
+            <a:avLst/>
+          </a:prstGeom>
+          <a:noFill/>
+          <a:ln/>
+        </p:spPr>
+        <p:txBody>
+          <a:bodyPr wrap="square" lIns="0" tIns="0" rIns="0" bIns="0" rtlCol="0" anchor="ctr">
+            <a:normAutofit/>
+          </a:bodyPr>
+          <a:lstStyle/>
+          <a:p>
+            <a:pPr algn="ctr" indent="0" marL="0">
+              <a:lnSpc>
+                <a:spcPct val="125000"/>
+              </a:lnSpc>
+              <a:buNone/>
+            </a:pPr>
+            <a:r>
+              <a:rPr lang="en-US" sz="1600" b="1" dirty="0">
                 <a:solidFill>
                   <a:srgbClr val="25194B"/>
                 </a:solidFill>
@@ -15420,9 +15740,9 @@
                 <a:ea typeface="Cambria" pitchFamily="34" charset="-122"/>
                 <a:cs typeface="Cambria" pitchFamily="34" charset="-120"/>
               </a:rPr>
-              <a:t>Executability khi đổi sang phân phối AitZ</a:t>
-            </a:r>
-            <a:endParaRPr lang="en-US" sz="1650" dirty="0"/>
+              <a:t>AitZ là bộ dữ liệu giao diện khác, dùng để kiểm tra khả năng chuyển miền.</a:t>
+            </a:r>
+            <a:endParaRPr lang="en-US" sz="1600" dirty="0"/>
           </a:p>
         </p:txBody>
       </p:sp>
@@ -16205,7 +16525,7 @@
                 <a:ea typeface="Cambria" pitchFamily="34" charset="-122"/>
                 <a:cs typeface="Cambria" pitchFamily="34" charset="-120"/>
               </a:rPr>
-              <a:t>GRPO-SPICE − S1</a:t>
+              <a:t>GRPO-SPICE − baseline S1</a:t>
             </a:r>
             <a:endParaRPr lang="en-US" sz="1260" dirty="0"/>
           </a:p>
@@ -16317,7 +16637,9 @@
           <a:ln/>
         </p:spPr>
         <p:txBody>
-          <a:bodyPr wrap="square" lIns="0" tIns="0" rIns="0" bIns="0" rtlCol="0" anchor="ctr"/>
+          <a:bodyPr wrap="square" lIns="0" tIns="0" rIns="0" bIns="0" rtlCol="0" anchor="ctr">
+            <a:normAutofit/>
+          </a:bodyPr>
           <a:lstStyle/>
           <a:p>
             <a:pPr algn="ctr" indent="0" marL="0">
@@ -16335,7 +16657,7 @@
                 <a:ea typeface="Cambria" pitchFamily="34" charset="-122"/>
                 <a:cs typeface="Cambria" pitchFamily="34" charset="-120"/>
               </a:rPr>
-              <a:t>S1 chuyển miền tốt; GRPO-SPICE không còn hơn rõ S1.</a:t>
+              <a:t>S1 vẫn cao hơn Base; GRPO-SPICE không khác rõ S1 về executability.</a:t>
             </a:r>
             <a:endParaRPr lang="en-US" sz="1350" dirty="0"/>
           </a:p>
@@ -16714,7 +17036,7 @@
                 <a:ea typeface="Cambria" pitchFamily="34" charset="-122"/>
                 <a:cs typeface="Cambria" pitchFamily="34" charset="-120"/>
               </a:rPr>
-              <a:t>Giới thiệu</a:t>
+              <a:t>1. Tổng quan</a:t>
             </a:r>
             <a:endParaRPr lang="en-US" sz="1820" dirty="0"/>
           </a:p>
@@ -17339,7 +17661,7 @@
                 <a:ea typeface="Cambria" pitchFamily="34" charset="-122"/>
                 <a:cs typeface="Cambria" pitchFamily="34" charset="-120"/>
               </a:rPr>
-              <a:t>Thông tin OCR trên giao diện</a:t>
+              <a:t>Văn bản hiển thị trên giao diện</a:t>
             </a:r>
             <a:endParaRPr lang="en-US" sz="1450" dirty="0"/>
           </a:p>
@@ -17891,7 +18213,7 @@
                 <a:ea typeface="Cambria" pitchFamily="34" charset="-122"/>
                 <a:cs typeface="Cambria" pitchFamily="34" charset="-120"/>
               </a:rPr>
-              <a:t>Thực nghiệm và kết quả</a:t>
+              <a:t>4.8. Ví dụ định tính</a:t>
             </a:r>
             <a:endParaRPr lang="en-US" sz="1820" dirty="0"/>
           </a:p>
@@ -18711,7 +19033,7 @@
                 <a:ea typeface="Cambria" pitchFamily="34" charset="-122"/>
                 <a:cs typeface="Cambria" pitchFamily="34" charset="-120"/>
               </a:rPr>
-              <a:t>Thực nghiệm và kết quả</a:t>
+              <a:t>4.9. Biến thiên giữa hai seed</a:t>
             </a:r>
             <a:endParaRPr lang="en-US" sz="1820" dirty="0"/>
           </a:p>
@@ -18725,27 +19047,29 @@
         </p:nvSpPr>
         <p:spPr>
           <a:xfrm>
-            <a:off x="502920" y="877824"/>
-            <a:ext cx="8138160" cy="420624"/>
-          </a:xfrm>
-          <a:prstGeom prst="rect">
-            <a:avLst/>
-          </a:prstGeom>
-          <a:noFill/>
-          <a:ln/>
-        </p:spPr>
-        <p:txBody>
-          <a:bodyPr wrap="square" lIns="0" tIns="0" rIns="0" bIns="0" rtlCol="0" anchor="ctr"/>
-          <a:lstStyle/>
-          <a:p>
-            <a:pPr algn="ctr" indent="0" marL="0">
-              <a:lnSpc>
-                <a:spcPct val="125000"/>
-              </a:lnSpc>
-              <a:buNone/>
-            </a:pPr>
-            <a:r>
-              <a:rPr lang="en-US" sz="1650" b="1" dirty="0">
+            <a:off x="502920" y="841248"/>
+            <a:ext cx="8138160" cy="530352"/>
+          </a:xfrm>
+          <a:prstGeom prst="rect">
+            <a:avLst/>
+          </a:prstGeom>
+          <a:noFill/>
+          <a:ln/>
+        </p:spPr>
+        <p:txBody>
+          <a:bodyPr wrap="square" lIns="0" tIns="0" rIns="0" bIns="0" rtlCol="0" anchor="ctr">
+            <a:normAutofit/>
+          </a:bodyPr>
+          <a:lstStyle/>
+          <a:p>
+            <a:pPr algn="ctr" indent="0" marL="0">
+              <a:lnSpc>
+                <a:spcPct val="125000"/>
+              </a:lnSpc>
+              <a:buNone/>
+            </a:pPr>
+            <a:r>
+              <a:rPr lang="en-US" sz="1600" b="1" dirty="0">
                 <a:solidFill>
                   <a:srgbClr val="25194B"/>
                 </a:solidFill>
@@ -18753,9 +19077,9 @@
                 <a:ea typeface="Cambria" pitchFamily="34" charset="-122"/>
                 <a:cs typeface="Cambria" pitchFamily="34" charset="-120"/>
               </a:rPr>
-              <a:t>Bốn kiểm tra độc lập đều giữ cùng hướng kết quả.</a:t>
-            </a:r>
-            <a:endParaRPr lang="en-US" sz="1650" dirty="0"/>
+              <a:t>GRPO-SPICE cao hơn baseline S1 ở cả hai seed, nhưng độ lớn mức tăng thay đổi theo seed.</a:t>
+            </a:r>
+            <a:endParaRPr lang="en-US" sz="1600" dirty="0"/>
           </a:p>
         </p:txBody>
       </p:sp>
@@ -18767,8 +19091,8 @@
         </p:nvSpPr>
         <p:spPr>
           <a:xfrm>
-            <a:off x="658368" y="1481328"/>
-            <a:ext cx="7818120" cy="457200"/>
+            <a:off x="822960" y="1572768"/>
+            <a:ext cx="7763256" cy="512064"/>
           </a:xfrm>
           <a:prstGeom prst="rect">
             <a:avLst/>
@@ -18794,8 +19118,8 @@
         </p:nvSpPr>
         <p:spPr>
           <a:xfrm>
-            <a:off x="658368" y="1481328"/>
-            <a:ext cx="2331720" cy="457200"/>
+            <a:off x="822960" y="1572768"/>
+            <a:ext cx="2788920" cy="512064"/>
           </a:xfrm>
           <a:prstGeom prst="rect">
             <a:avLst/>
@@ -18816,7 +19140,7 @@
               <a:buNone/>
             </a:pPr>
             <a:r>
-              <a:rPr lang="en-US" sz="1260" b="1" dirty="0">
+              <a:rPr lang="en-US" sz="1290" b="1" dirty="0">
                 <a:solidFill>
                   <a:srgbClr val="FFFFFF"/>
                 </a:solidFill>
@@ -18824,9 +19148,9 @@
                 <a:ea typeface="Cambria" pitchFamily="34" charset="-122"/>
                 <a:cs typeface="Cambria" pitchFamily="34" charset="-120"/>
               </a:rPr>
-              <a:t>Kiểm tra</a:t>
-            </a:r>
-            <a:endParaRPr lang="en-US" sz="1260" dirty="0"/>
+              <a:t>Mô hình</a:t>
+            </a:r>
+            <a:endParaRPr lang="en-US" sz="1290" dirty="0"/>
           </a:p>
         </p:txBody>
       </p:sp>
@@ -18838,8 +19162,8 @@
         </p:nvSpPr>
         <p:spPr>
           <a:xfrm>
-            <a:off x="2990088" y="1481328"/>
-            <a:ext cx="3977640" cy="457200"/>
+            <a:off x="3611880" y="1572768"/>
+            <a:ext cx="1572768" cy="512064"/>
           </a:xfrm>
           <a:prstGeom prst="rect">
             <a:avLst/>
@@ -18853,6 +19177,138 @@
           </a:bodyPr>
           <a:lstStyle/>
           <a:p>
+            <a:pPr algn="ctr" indent="0" marL="0">
+              <a:lnSpc>
+                <a:spcPct val="125000"/>
+              </a:lnSpc>
+              <a:buNone/>
+            </a:pPr>
+            <a:r>
+              <a:rPr lang="en-US" sz="1290" b="1" dirty="0">
+                <a:solidFill>
+                  <a:srgbClr val="FFFFFF"/>
+                </a:solidFill>
+                <a:latin typeface="Cambria" pitchFamily="34" charset="0"/>
+                <a:ea typeface="Cambria" pitchFamily="34" charset="-122"/>
+                <a:cs typeface="Cambria" pitchFamily="34" charset="-120"/>
+              </a:rPr>
+              <a:t>Seed 101</a:t>
+            </a:r>
+            <a:endParaRPr lang="en-US" sz="1290" dirty="0"/>
+          </a:p>
+        </p:txBody>
+      </p:sp>
+      <p:sp>
+        <p:nvSpPr>
+          <p:cNvPr id="8" name="Text 6"/>
+          <p:cNvSpPr/>
+          <p:nvPr/>
+        </p:nvSpPr>
+        <p:spPr>
+          <a:xfrm>
+            <a:off x="5184648" y="1572768"/>
+            <a:ext cx="1572768" cy="512064"/>
+          </a:xfrm>
+          <a:prstGeom prst="rect">
+            <a:avLst/>
+          </a:prstGeom>
+          <a:noFill/>
+          <a:ln/>
+        </p:spPr>
+        <p:txBody>
+          <a:bodyPr wrap="square" lIns="0" tIns="0" rIns="0" bIns="0" rtlCol="0" anchor="ctr">
+            <a:normAutofit/>
+          </a:bodyPr>
+          <a:lstStyle/>
+          <a:p>
+            <a:pPr algn="ctr" indent="0" marL="0">
+              <a:lnSpc>
+                <a:spcPct val="125000"/>
+              </a:lnSpc>
+              <a:buNone/>
+            </a:pPr>
+            <a:r>
+              <a:rPr lang="en-US" sz="1290" b="1" dirty="0">
+                <a:solidFill>
+                  <a:srgbClr val="FFFFFF"/>
+                </a:solidFill>
+                <a:latin typeface="Cambria" pitchFamily="34" charset="0"/>
+                <a:ea typeface="Cambria" pitchFamily="34" charset="-122"/>
+                <a:cs typeface="Cambria" pitchFamily="34" charset="-120"/>
+              </a:rPr>
+              <a:t>Seed 202</a:t>
+            </a:r>
+            <a:endParaRPr lang="en-US" sz="1290" dirty="0"/>
+          </a:p>
+        </p:txBody>
+      </p:sp>
+      <p:sp>
+        <p:nvSpPr>
+          <p:cNvPr id="9" name="Text 7"/>
+          <p:cNvSpPr/>
+          <p:nvPr/>
+        </p:nvSpPr>
+        <p:spPr>
+          <a:xfrm>
+            <a:off x="6757416" y="1572768"/>
+            <a:ext cx="1828800" cy="512064"/>
+          </a:xfrm>
+          <a:prstGeom prst="rect">
+            <a:avLst/>
+          </a:prstGeom>
+          <a:noFill/>
+          <a:ln/>
+        </p:spPr>
+        <p:txBody>
+          <a:bodyPr wrap="square" lIns="0" tIns="0" rIns="0" bIns="0" rtlCol="0" anchor="ctr">
+            <a:normAutofit/>
+          </a:bodyPr>
+          <a:lstStyle/>
+          <a:p>
+            <a:pPr algn="ctr" indent="0" marL="0">
+              <a:lnSpc>
+                <a:spcPct val="125000"/>
+              </a:lnSpc>
+              <a:buNone/>
+            </a:pPr>
+            <a:r>
+              <a:rPr lang="en-US" sz="1290" b="1" dirty="0">
+                <a:solidFill>
+                  <a:srgbClr val="FFFFFF"/>
+                </a:solidFill>
+                <a:latin typeface="Cambria" pitchFamily="34" charset="0"/>
+                <a:ea typeface="Cambria" pitchFamily="34" charset="-122"/>
+                <a:cs typeface="Cambria" pitchFamily="34" charset="-120"/>
+              </a:rPr>
+              <a:t>Δ (202 − 101)</a:t>
+            </a:r>
+            <a:endParaRPr lang="en-US" sz="1290" dirty="0"/>
+          </a:p>
+        </p:txBody>
+      </p:sp>
+      <p:sp>
+        <p:nvSpPr>
+          <p:cNvPr id="10" name="Text 8"/>
+          <p:cNvSpPr/>
+          <p:nvPr/>
+        </p:nvSpPr>
+        <p:spPr>
+          <a:xfrm>
+            <a:off x="822960" y="2084832"/>
+            <a:ext cx="2788920" cy="713232"/>
+          </a:xfrm>
+          <a:prstGeom prst="rect">
+            <a:avLst/>
+          </a:prstGeom>
+          <a:noFill/>
+          <a:ln/>
+        </p:spPr>
+        <p:txBody>
+          <a:bodyPr wrap="square" lIns="0" tIns="0" rIns="0" bIns="0" rtlCol="0" anchor="ctr">
+            <a:normAutofit/>
+          </a:bodyPr>
+          <a:lstStyle/>
+          <a:p>
             <a:pPr algn="l" indent="0" marL="0">
               <a:lnSpc>
                 <a:spcPct val="125000"/>
@@ -18860,30 +19316,30 @@
               <a:buNone/>
             </a:pPr>
             <a:r>
-              <a:rPr lang="en-US" sz="1260" b="1" dirty="0">
-                <a:solidFill>
-                  <a:srgbClr val="FFFFFF"/>
-                </a:solidFill>
-                <a:latin typeface="Cambria" pitchFamily="34" charset="0"/>
-                <a:ea typeface="Cambria" pitchFamily="34" charset="-122"/>
-                <a:cs typeface="Cambria" pitchFamily="34" charset="-120"/>
-              </a:rPr>
-              <a:t>Bằng chứng</a:t>
-            </a:r>
-            <a:endParaRPr lang="en-US" sz="1260" dirty="0"/>
-          </a:p>
-        </p:txBody>
-      </p:sp>
-      <p:sp>
-        <p:nvSpPr>
-          <p:cNvPr id="8" name="Text 6"/>
-          <p:cNvSpPr/>
-          <p:nvPr/>
-        </p:nvSpPr>
-        <p:spPr>
-          <a:xfrm>
-            <a:off x="6967728" y="1481328"/>
-            <a:ext cx="1508760" cy="457200"/>
+              <a:rPr lang="en-US" sz="1400" dirty="0">
+                <a:solidFill>
+                  <a:srgbClr val="1A1A1A"/>
+                </a:solidFill>
+                <a:latin typeface="Cambria" pitchFamily="34" charset="0"/>
+                <a:ea typeface="Cambria" pitchFamily="34" charset="-122"/>
+                <a:cs typeface="Cambria" pitchFamily="34" charset="-120"/>
+              </a:rPr>
+              <a:t>Baseline S1</a:t>
+            </a:r>
+            <a:endParaRPr lang="en-US" sz="1400" dirty="0"/>
+          </a:p>
+        </p:txBody>
+      </p:sp>
+      <p:sp>
+        <p:nvSpPr>
+          <p:cNvPr id="11" name="Text 9"/>
+          <p:cNvSpPr/>
+          <p:nvPr/>
+        </p:nvSpPr>
+        <p:spPr>
+          <a:xfrm>
+            <a:off x="3611880" y="2084832"/>
+            <a:ext cx="1572768" cy="713232"/>
           </a:xfrm>
           <a:prstGeom prst="rect">
             <a:avLst/>
@@ -18904,30 +19360,30 @@
               <a:buNone/>
             </a:pPr>
             <a:r>
-              <a:rPr lang="en-US" sz="1260" b="1" dirty="0">
-                <a:solidFill>
-                  <a:srgbClr val="FFFFFF"/>
-                </a:solidFill>
-                <a:latin typeface="Cambria" pitchFamily="34" charset="0"/>
-                <a:ea typeface="Cambria" pitchFamily="34" charset="-122"/>
-                <a:cs typeface="Cambria" pitchFamily="34" charset="-120"/>
-              </a:rPr>
-              <a:t>Kết quả</a:t>
-            </a:r>
-            <a:endParaRPr lang="en-US" sz="1260" dirty="0"/>
-          </a:p>
-        </p:txBody>
-      </p:sp>
-      <p:sp>
-        <p:nvSpPr>
-          <p:cNvPr id="9" name="Text 7"/>
-          <p:cNvSpPr/>
-          <p:nvPr/>
-        </p:nvSpPr>
-        <p:spPr>
-          <a:xfrm>
-            <a:off x="658368" y="1938528"/>
-            <a:ext cx="2331720" cy="658368"/>
+              <a:rPr lang="en-US" sz="1400" dirty="0">
+                <a:solidFill>
+                  <a:srgbClr val="1A1A1A"/>
+                </a:solidFill>
+                <a:latin typeface="Cambria" pitchFamily="34" charset="0"/>
+                <a:ea typeface="Cambria" pitchFamily="34" charset="-122"/>
+                <a:cs typeface="Cambria" pitchFamily="34" charset="-120"/>
+              </a:rPr>
+              <a:t>59,11</a:t>
+            </a:r>
+            <a:endParaRPr lang="en-US" sz="1400" dirty="0"/>
+          </a:p>
+        </p:txBody>
+      </p:sp>
+      <p:sp>
+        <p:nvSpPr>
+          <p:cNvPr id="12" name="Text 10"/>
+          <p:cNvSpPr/>
+          <p:nvPr/>
+        </p:nvSpPr>
+        <p:spPr>
+          <a:xfrm>
+            <a:off x="5184648" y="2084832"/>
+            <a:ext cx="1572768" cy="713232"/>
           </a:xfrm>
           <a:prstGeom prst="rect">
             <a:avLst/>
@@ -18941,14 +19397,14 @@
           </a:bodyPr>
           <a:lstStyle/>
           <a:p>
-            <a:pPr algn="l" indent="0" marL="0">
-              <a:lnSpc>
-                <a:spcPct val="125000"/>
-              </a:lnSpc>
-              <a:buNone/>
-            </a:pPr>
-            <a:r>
-              <a:rPr lang="en-US" sz="1280" dirty="0">
+            <a:pPr algn="ctr" indent="0" marL="0">
+              <a:lnSpc>
+                <a:spcPct val="125000"/>
+              </a:lnSpc>
+              <a:buNone/>
+            </a:pPr>
+            <a:r>
+              <a:rPr lang="en-US" sz="1400" dirty="0">
                 <a:solidFill>
                   <a:srgbClr val="1A1A1A"/>
                 </a:solidFill>
@@ -18956,22 +19412,22 @@
                 <a:ea typeface="Cambria" pitchFamily="34" charset="-122"/>
                 <a:cs typeface="Cambria" pitchFamily="34" charset="-120"/>
               </a:rPr>
-              <a:t>Cùng số bước</a:t>
-            </a:r>
-            <a:endParaRPr lang="en-US" sz="1280" dirty="0"/>
-          </a:p>
-        </p:txBody>
-      </p:sp>
-      <p:sp>
-        <p:nvSpPr>
-          <p:cNvPr id="10" name="Text 8"/>
-          <p:cNvSpPr/>
-          <p:nvPr/>
-        </p:nvSpPr>
-        <p:spPr>
-          <a:xfrm>
-            <a:off x="2990088" y="1938528"/>
-            <a:ext cx="3977640" cy="658368"/>
+              <a:t>59,62</a:t>
+            </a:r>
+            <a:endParaRPr lang="en-US" sz="1400" dirty="0"/>
+          </a:p>
+        </p:txBody>
+      </p:sp>
+      <p:sp>
+        <p:nvSpPr>
+          <p:cNvPr id="13" name="Text 11"/>
+          <p:cNvSpPr/>
+          <p:nvPr/>
+        </p:nvSpPr>
+        <p:spPr>
+          <a:xfrm>
+            <a:off x="6757416" y="2084832"/>
+            <a:ext cx="1828800" cy="713232"/>
           </a:xfrm>
           <a:prstGeom prst="rect">
             <a:avLst/>
@@ -18985,81 +19441,37 @@
           </a:bodyPr>
           <a:lstStyle/>
           <a:p>
-            <a:pPr algn="l" indent="0" marL="0">
-              <a:lnSpc>
-                <a:spcPct val="125000"/>
-              </a:lnSpc>
-              <a:buNone/>
-            </a:pPr>
-            <a:r>
-              <a:rPr lang="en-US" sz="1280" dirty="0">
-                <a:solidFill>
-                  <a:srgbClr val="1A1A1A"/>
-                </a:solidFill>
-                <a:latin typeface="Cambria" pitchFamily="34" charset="0"/>
-                <a:ea typeface="Cambria" pitchFamily="34" charset="-122"/>
-                <a:cs typeface="Cambria" pitchFamily="34" charset="-120"/>
-              </a:rPr>
-              <a:t>Đối chứng cùng 500 bước vẫn ở mức S1.</a:t>
-            </a:r>
-            <a:endParaRPr lang="en-US" sz="1280" dirty="0"/>
-          </a:p>
-        </p:txBody>
-      </p:sp>
-      <p:sp>
-        <p:nvSpPr>
-          <p:cNvPr id="11" name="Text 9"/>
-          <p:cNvSpPr/>
-          <p:nvPr/>
-        </p:nvSpPr>
-        <p:spPr>
-          <a:xfrm>
-            <a:off x="6967728" y="1938528"/>
-            <a:ext cx="1508760" cy="658368"/>
-          </a:xfrm>
-          <a:prstGeom prst="rect">
-            <a:avLst/>
-          </a:prstGeom>
-          <a:noFill/>
-          <a:ln/>
-        </p:spPr>
-        <p:txBody>
-          <a:bodyPr wrap="square" lIns="0" tIns="0" rIns="0" bIns="0" rtlCol="0" anchor="ctr">
-            <a:normAutofit/>
-          </a:bodyPr>
-          <a:lstStyle/>
-          <a:p>
-            <a:pPr algn="ctr" indent="0" marL="0">
-              <a:lnSpc>
-                <a:spcPct val="125000"/>
-              </a:lnSpc>
-              <a:buNone/>
-            </a:pPr>
-            <a:r>
-              <a:rPr lang="en-US" sz="1280" b="1" dirty="0">
-                <a:solidFill>
-                  <a:srgbClr val="4F417A"/>
-                </a:solidFill>
-                <a:latin typeface="Cambria" pitchFamily="34" charset="0"/>
-                <a:ea typeface="Cambria" pitchFamily="34" charset="-122"/>
-                <a:cs typeface="Cambria" pitchFamily="34" charset="-120"/>
-              </a:rPr>
-              <a:t>Giữ</a:t>
-            </a:r>
-            <a:endParaRPr lang="en-US" sz="1280" dirty="0"/>
-          </a:p>
-        </p:txBody>
-      </p:sp>
-      <p:sp>
-        <p:nvSpPr>
-          <p:cNvPr id="12" name="Shape 10"/>
-          <p:cNvSpPr/>
-          <p:nvPr/>
-        </p:nvSpPr>
-        <p:spPr>
-          <a:xfrm>
-            <a:off x="658368" y="2596896"/>
-            <a:ext cx="7818120" cy="0"/>
+            <a:pPr algn="ctr" indent="0" marL="0">
+              <a:lnSpc>
+                <a:spcPct val="125000"/>
+              </a:lnSpc>
+              <a:buNone/>
+            </a:pPr>
+            <a:r>
+              <a:rPr lang="en-US" sz="1400" b="1" dirty="0">
+                <a:solidFill>
+                  <a:srgbClr val="7A7099"/>
+                </a:solidFill>
+                <a:latin typeface="Cambria" pitchFamily="34" charset="0"/>
+                <a:ea typeface="Cambria" pitchFamily="34" charset="-122"/>
+                <a:cs typeface="Cambria" pitchFamily="34" charset="-120"/>
+              </a:rPr>
+              <a:t>+0,52</a:t>
+            </a:r>
+            <a:endParaRPr lang="en-US" sz="1400" dirty="0"/>
+          </a:p>
+        </p:txBody>
+      </p:sp>
+      <p:sp>
+        <p:nvSpPr>
+          <p:cNvPr id="14" name="Shape 12"/>
+          <p:cNvSpPr/>
+          <p:nvPr/>
+        </p:nvSpPr>
+        <p:spPr>
+          <a:xfrm>
+            <a:off x="822960" y="2798064"/>
+            <a:ext cx="7763256" cy="0"/>
           </a:xfrm>
           <a:prstGeom prst="line">
             <a:avLst/>
@@ -19076,14 +19488,14 @@
       </p:sp>
       <p:sp>
         <p:nvSpPr>
-          <p:cNvPr id="13" name="Text 11"/>
-          <p:cNvSpPr/>
-          <p:nvPr/>
-        </p:nvSpPr>
-        <p:spPr>
-          <a:xfrm>
-            <a:off x="658368" y="2596896"/>
-            <a:ext cx="2331720" cy="658368"/>
+          <p:cNvPr id="15" name="Text 13"/>
+          <p:cNvSpPr/>
+          <p:nvPr/>
+        </p:nvSpPr>
+        <p:spPr>
+          <a:xfrm>
+            <a:off x="822960" y="2798064"/>
+            <a:ext cx="2788920" cy="713232"/>
           </a:xfrm>
           <a:prstGeom prst="rect">
             <a:avLst/>
@@ -19104,30 +19516,30 @@
               <a:buNone/>
             </a:pPr>
             <a:r>
-              <a:rPr lang="en-US" sz="1280" dirty="0">
-                <a:solidFill>
-                  <a:srgbClr val="1A1A1A"/>
-                </a:solidFill>
-                <a:latin typeface="Cambria" pitchFamily="34" charset="0"/>
-                <a:ea typeface="Cambria" pitchFamily="34" charset="-122"/>
-                <a:cs typeface="Cambria" pitchFamily="34" charset="-120"/>
-              </a:rPr>
-              <a:t>Lặp huấn luyện</a:t>
-            </a:r>
-            <a:endParaRPr lang="en-US" sz="1280" dirty="0"/>
-          </a:p>
-        </p:txBody>
-      </p:sp>
-      <p:sp>
-        <p:nvSpPr>
-          <p:cNvPr id="14" name="Text 12"/>
-          <p:cNvSpPr/>
-          <p:nvPr/>
-        </p:nvSpPr>
-        <p:spPr>
-          <a:xfrm>
-            <a:off x="2990088" y="2596896"/>
-            <a:ext cx="3977640" cy="658368"/>
+              <a:rPr lang="en-US" sz="1400" b="1" dirty="0">
+                <a:solidFill>
+                  <a:srgbClr val="4F417A"/>
+                </a:solidFill>
+                <a:latin typeface="Cambria" pitchFamily="34" charset="0"/>
+                <a:ea typeface="Cambria" pitchFamily="34" charset="-122"/>
+                <a:cs typeface="Cambria" pitchFamily="34" charset="-120"/>
+              </a:rPr>
+              <a:t>GRPO-SPICE</a:t>
+            </a:r>
+            <a:endParaRPr lang="en-US" sz="1400" dirty="0"/>
+          </a:p>
+        </p:txBody>
+      </p:sp>
+      <p:sp>
+        <p:nvSpPr>
+          <p:cNvPr id="16" name="Text 14"/>
+          <p:cNvSpPr/>
+          <p:nvPr/>
+        </p:nvSpPr>
+        <p:spPr>
+          <a:xfrm>
+            <a:off x="3611880" y="2798064"/>
+            <a:ext cx="1572768" cy="713232"/>
           </a:xfrm>
           <a:prstGeom prst="rect">
             <a:avLst/>
@@ -19141,37 +19553,37 @@
           </a:bodyPr>
           <a:lstStyle/>
           <a:p>
-            <a:pPr algn="l" indent="0" marL="0">
-              <a:lnSpc>
-                <a:spcPct val="125000"/>
-              </a:lnSpc>
-              <a:buNone/>
-            </a:pPr>
-            <a:r>
-              <a:rPr lang="en-US" sz="1280" dirty="0">
-                <a:solidFill>
-                  <a:srgbClr val="1A1A1A"/>
-                </a:solidFill>
-                <a:latin typeface="Cambria" pitchFamily="34" charset="0"/>
-                <a:ea typeface="Cambria" pitchFamily="34" charset="-122"/>
-                <a:cs typeface="Cambria" pitchFamily="34" charset="-120"/>
-              </a:rPr>
-              <a:t>Hai lượt GRPO đều cao hơn S1.</a:t>
-            </a:r>
-            <a:endParaRPr lang="en-US" sz="1280" dirty="0"/>
-          </a:p>
-        </p:txBody>
-      </p:sp>
-      <p:sp>
-        <p:nvSpPr>
-          <p:cNvPr id="15" name="Text 13"/>
-          <p:cNvSpPr/>
-          <p:nvPr/>
-        </p:nvSpPr>
-        <p:spPr>
-          <a:xfrm>
-            <a:off x="6967728" y="2596896"/>
-            <a:ext cx="1508760" cy="658368"/>
+            <a:pPr algn="ctr" indent="0" marL="0">
+              <a:lnSpc>
+                <a:spcPct val="125000"/>
+              </a:lnSpc>
+              <a:buNone/>
+            </a:pPr>
+            <a:r>
+              <a:rPr lang="en-US" sz="1400" b="1" dirty="0">
+                <a:solidFill>
+                  <a:srgbClr val="4F417A"/>
+                </a:solidFill>
+                <a:latin typeface="Cambria" pitchFamily="34" charset="0"/>
+                <a:ea typeface="Cambria" pitchFamily="34" charset="-122"/>
+                <a:cs typeface="Cambria" pitchFamily="34" charset="-120"/>
+              </a:rPr>
+              <a:t>60,65</a:t>
+            </a:r>
+            <a:endParaRPr lang="en-US" sz="1400" dirty="0"/>
+          </a:p>
+        </p:txBody>
+      </p:sp>
+      <p:sp>
+        <p:nvSpPr>
+          <p:cNvPr id="17" name="Text 15"/>
+          <p:cNvSpPr/>
+          <p:nvPr/>
+        </p:nvSpPr>
+        <p:spPr>
+          <a:xfrm>
+            <a:off x="5184648" y="2798064"/>
+            <a:ext cx="1572768" cy="713232"/>
           </a:xfrm>
           <a:prstGeom prst="rect">
             <a:avLst/>
@@ -19192,7 +19604,7 @@
               <a:buNone/>
             </a:pPr>
             <a:r>
-              <a:rPr lang="en-US" sz="1280" b="1" dirty="0">
+              <a:rPr lang="en-US" sz="1400" b="1" dirty="0">
                 <a:solidFill>
                   <a:srgbClr val="4F417A"/>
                 </a:solidFill>
@@ -19200,22 +19612,66 @@
                 <a:ea typeface="Cambria" pitchFamily="34" charset="-122"/>
                 <a:cs typeface="Cambria" pitchFamily="34" charset="-120"/>
               </a:rPr>
-              <a:t>Giữ</a:t>
-            </a:r>
-            <a:endParaRPr lang="en-US" sz="1280" dirty="0"/>
-          </a:p>
-        </p:txBody>
-      </p:sp>
-      <p:sp>
-        <p:nvSpPr>
-          <p:cNvPr id="16" name="Shape 14"/>
-          <p:cNvSpPr/>
-          <p:nvPr/>
-        </p:nvSpPr>
-        <p:spPr>
-          <a:xfrm>
-            <a:off x="658368" y="3255264"/>
-            <a:ext cx="7818120" cy="0"/>
+              <a:t>59,94</a:t>
+            </a:r>
+            <a:endParaRPr lang="en-US" sz="1400" dirty="0"/>
+          </a:p>
+        </p:txBody>
+      </p:sp>
+      <p:sp>
+        <p:nvSpPr>
+          <p:cNvPr id="18" name="Text 16"/>
+          <p:cNvSpPr/>
+          <p:nvPr/>
+        </p:nvSpPr>
+        <p:spPr>
+          <a:xfrm>
+            <a:off x="6757416" y="2798064"/>
+            <a:ext cx="1828800" cy="713232"/>
+          </a:xfrm>
+          <a:prstGeom prst="rect">
+            <a:avLst/>
+          </a:prstGeom>
+          <a:noFill/>
+          <a:ln/>
+        </p:spPr>
+        <p:txBody>
+          <a:bodyPr wrap="square" lIns="0" tIns="0" rIns="0" bIns="0" rtlCol="0" anchor="ctr">
+            <a:normAutofit/>
+          </a:bodyPr>
+          <a:lstStyle/>
+          <a:p>
+            <a:pPr algn="ctr" indent="0" marL="0">
+              <a:lnSpc>
+                <a:spcPct val="125000"/>
+              </a:lnSpc>
+              <a:buNone/>
+            </a:pPr>
+            <a:r>
+              <a:rPr lang="en-US" sz="1400" b="1" dirty="0">
+                <a:solidFill>
+                  <a:srgbClr val="4F417A"/>
+                </a:solidFill>
+                <a:latin typeface="Cambria" pitchFamily="34" charset="0"/>
+                <a:ea typeface="Cambria" pitchFamily="34" charset="-122"/>
+                <a:cs typeface="Cambria" pitchFamily="34" charset="-120"/>
+              </a:rPr>
+              <a:t>−0,72</a:t>
+            </a:r>
+            <a:endParaRPr lang="en-US" sz="1400" dirty="0"/>
+          </a:p>
+        </p:txBody>
+      </p:sp>
+      <p:sp>
+        <p:nvSpPr>
+          <p:cNvPr id="19" name="Shape 17"/>
+          <p:cNvSpPr/>
+          <p:nvPr/>
+        </p:nvSpPr>
+        <p:spPr>
+          <a:xfrm>
+            <a:off x="822960" y="3511296"/>
+            <a:ext cx="7763256" cy="0"/>
           </a:xfrm>
           <a:prstGeom prst="line">
             <a:avLst/>
@@ -19232,14 +19688,14 @@
       </p:sp>
       <p:sp>
         <p:nvSpPr>
-          <p:cNvPr id="17" name="Text 15"/>
-          <p:cNvSpPr/>
-          <p:nvPr/>
-        </p:nvSpPr>
-        <p:spPr>
-          <a:xfrm>
-            <a:off x="658368" y="3255264"/>
-            <a:ext cx="2331720" cy="658368"/>
+          <p:cNvPr id="20" name="Text 18"/>
+          <p:cNvSpPr/>
+          <p:nvPr/>
+        </p:nvSpPr>
+        <p:spPr>
+          <a:xfrm>
+            <a:off x="822960" y="3511296"/>
+            <a:ext cx="2788920" cy="749808"/>
           </a:xfrm>
           <a:prstGeom prst="rect">
             <a:avLst/>
@@ -19260,7 +19716,7 @@
               <a:buNone/>
             </a:pPr>
             <a:r>
-              <a:rPr lang="en-US" sz="1280" dirty="0">
+              <a:rPr lang="en-US" sz="1420" b="1" dirty="0">
                 <a:solidFill>
                   <a:srgbClr val="1A1A1A"/>
                 </a:solidFill>
@@ -19268,22 +19724,22 @@
                 <a:ea typeface="Cambria" pitchFamily="34" charset="-122"/>
                 <a:cs typeface="Cambria" pitchFamily="34" charset="-120"/>
               </a:rPr>
-              <a:t>Đổi công cụ đánh giá</a:t>
-            </a:r>
-            <a:endParaRPr lang="en-US" sz="1280" dirty="0"/>
-          </a:p>
-        </p:txBody>
-      </p:sp>
-      <p:sp>
-        <p:nvSpPr>
-          <p:cNvPr id="18" name="Text 16"/>
-          <p:cNvSpPr/>
-          <p:nvPr/>
-        </p:nvSpPr>
-        <p:spPr>
-          <a:xfrm>
-            <a:off x="2990088" y="3255264"/>
-            <a:ext cx="3977640" cy="658368"/>
+              <a:t>Δ GRPO-SPICE − S1</a:t>
+            </a:r>
+            <a:endParaRPr lang="en-US" sz="1420" dirty="0"/>
+          </a:p>
+        </p:txBody>
+      </p:sp>
+      <p:sp>
+        <p:nvSpPr>
+          <p:cNvPr id="21" name="Text 19"/>
+          <p:cNvSpPr/>
+          <p:nvPr/>
+        </p:nvSpPr>
+        <p:spPr>
+          <a:xfrm>
+            <a:off x="3611880" y="3511296"/>
+            <a:ext cx="1572768" cy="749808"/>
           </a:xfrm>
           <a:prstGeom prst="rect">
             <a:avLst/>
@@ -19297,14 +19753,102 @@
           </a:bodyPr>
           <a:lstStyle/>
           <a:p>
-            <a:pPr algn="l" indent="0" marL="0">
-              <a:lnSpc>
-                <a:spcPct val="125000"/>
-              </a:lnSpc>
-              <a:buNone/>
-            </a:pPr>
-            <a:r>
-              <a:rPr lang="en-US" sz="1280" dirty="0">
+            <a:pPr algn="ctr" indent="0" marL="0">
+              <a:lnSpc>
+                <a:spcPct val="125000"/>
+              </a:lnSpc>
+              <a:buNone/>
+            </a:pPr>
+            <a:r>
+              <a:rPr lang="en-US" sz="1420" b="1" dirty="0">
+                <a:solidFill>
+                  <a:srgbClr val="4F417A"/>
+                </a:solidFill>
+                <a:latin typeface="Cambria" pitchFamily="34" charset="0"/>
+                <a:ea typeface="Cambria" pitchFamily="34" charset="-122"/>
+                <a:cs typeface="Cambria" pitchFamily="34" charset="-120"/>
+              </a:rPr>
+              <a:t>+1,55</a:t>
+            </a:r>
+            <a:endParaRPr lang="en-US" sz="1420" dirty="0"/>
+          </a:p>
+        </p:txBody>
+      </p:sp>
+      <p:sp>
+        <p:nvSpPr>
+          <p:cNvPr id="22" name="Text 20"/>
+          <p:cNvSpPr/>
+          <p:nvPr/>
+        </p:nvSpPr>
+        <p:spPr>
+          <a:xfrm>
+            <a:off x="5184648" y="3511296"/>
+            <a:ext cx="1572768" cy="749808"/>
+          </a:xfrm>
+          <a:prstGeom prst="rect">
+            <a:avLst/>
+          </a:prstGeom>
+          <a:noFill/>
+          <a:ln/>
+        </p:spPr>
+        <p:txBody>
+          <a:bodyPr wrap="square" lIns="0" tIns="0" rIns="0" bIns="0" rtlCol="0" anchor="ctr">
+            <a:normAutofit/>
+          </a:bodyPr>
+          <a:lstStyle/>
+          <a:p>
+            <a:pPr algn="ctr" indent="0" marL="0">
+              <a:lnSpc>
+                <a:spcPct val="125000"/>
+              </a:lnSpc>
+              <a:buNone/>
+            </a:pPr>
+            <a:r>
+              <a:rPr lang="en-US" sz="1420" b="1" dirty="0">
+                <a:solidFill>
+                  <a:srgbClr val="4F417A"/>
+                </a:solidFill>
+                <a:latin typeface="Cambria" pitchFamily="34" charset="0"/>
+                <a:ea typeface="Cambria" pitchFamily="34" charset="-122"/>
+                <a:cs typeface="Cambria" pitchFamily="34" charset="-120"/>
+              </a:rPr>
+              <a:t>+0,31</a:t>
+            </a:r>
+            <a:endParaRPr lang="en-US" sz="1420" dirty="0"/>
+          </a:p>
+        </p:txBody>
+      </p:sp>
+      <p:sp>
+        <p:nvSpPr>
+          <p:cNvPr id="23" name="Text 21"/>
+          <p:cNvSpPr/>
+          <p:nvPr/>
+        </p:nvSpPr>
+        <p:spPr>
+          <a:xfrm>
+            <a:off x="6757416" y="3511296"/>
+            <a:ext cx="1828800" cy="749808"/>
+          </a:xfrm>
+          <a:prstGeom prst="rect">
+            <a:avLst/>
+          </a:prstGeom>
+          <a:noFill/>
+          <a:ln/>
+        </p:spPr>
+        <p:txBody>
+          <a:bodyPr wrap="square" lIns="0" tIns="0" rIns="0" bIns="0" rtlCol="0" anchor="ctr">
+            <a:normAutofit/>
+          </a:bodyPr>
+          <a:lstStyle/>
+          <a:p>
+            <a:pPr algn="ctr" indent="0" marL="0">
+              <a:lnSpc>
+                <a:spcPct val="125000"/>
+              </a:lnSpc>
+              <a:buNone/>
+            </a:pPr>
+            <a:r>
+              <a:rPr lang="en-US" sz="1420" dirty="0">
                 <a:solidFill>
                   <a:srgbClr val="1A1A1A"/>
                 </a:solidFill>
@@ -19312,209 +19856,9 @@
                 <a:ea typeface="Cambria" pitchFamily="34" charset="-122"/>
                 <a:cs typeface="Cambria" pitchFamily="34" charset="-120"/>
               </a:rPr>
-              <a:t>Cả 4 công cụ đều cho chênh lệch dương.</a:t>
-            </a:r>
-            <a:endParaRPr lang="en-US" sz="1280" dirty="0"/>
-          </a:p>
-        </p:txBody>
-      </p:sp>
-      <p:sp>
-        <p:nvSpPr>
-          <p:cNvPr id="19" name="Text 17"/>
-          <p:cNvSpPr/>
-          <p:nvPr/>
-        </p:nvSpPr>
-        <p:spPr>
-          <a:xfrm>
-            <a:off x="6967728" y="3255264"/>
-            <a:ext cx="1508760" cy="658368"/>
-          </a:xfrm>
-          <a:prstGeom prst="rect">
-            <a:avLst/>
-          </a:prstGeom>
-          <a:noFill/>
-          <a:ln/>
-        </p:spPr>
-        <p:txBody>
-          <a:bodyPr wrap="square" lIns="0" tIns="0" rIns="0" bIns="0" rtlCol="0" anchor="ctr">
-            <a:normAutofit/>
-          </a:bodyPr>
-          <a:lstStyle/>
-          <a:p>
-            <a:pPr algn="ctr" indent="0" marL="0">
-              <a:lnSpc>
-                <a:spcPct val="125000"/>
-              </a:lnSpc>
-              <a:buNone/>
-            </a:pPr>
-            <a:r>
-              <a:rPr lang="en-US" sz="1280" b="1" dirty="0">
-                <a:solidFill>
-                  <a:srgbClr val="4F417A"/>
-                </a:solidFill>
-                <a:latin typeface="Cambria" pitchFamily="34" charset="0"/>
-                <a:ea typeface="Cambria" pitchFamily="34" charset="-122"/>
-                <a:cs typeface="Cambria" pitchFamily="34" charset="-120"/>
-              </a:rPr>
-              <a:t>Giữ</a:t>
-            </a:r>
-            <a:endParaRPr lang="en-US" sz="1280" dirty="0"/>
-          </a:p>
-        </p:txBody>
-      </p:sp>
-      <p:sp>
-        <p:nvSpPr>
-          <p:cNvPr id="20" name="Shape 18"/>
-          <p:cNvSpPr/>
-          <p:nvPr/>
-        </p:nvSpPr>
-        <p:spPr>
-          <a:xfrm>
-            <a:off x="658368" y="3913632"/>
-            <a:ext cx="7818120" cy="0"/>
-          </a:xfrm>
-          <a:prstGeom prst="line">
-            <a:avLst/>
-          </a:prstGeom>
-          <a:noFill/>
-          <a:ln w="12700">
-            <a:solidFill>
-              <a:srgbClr val="D9D6DF"/>
-            </a:solidFill>
-            <a:prstDash val="solid"/>
-            <a:tailEnd type="none"/>
-          </a:ln>
-        </p:spPr>
-      </p:sp>
-      <p:sp>
-        <p:nvSpPr>
-          <p:cNvPr id="21" name="Text 19"/>
-          <p:cNvSpPr/>
-          <p:nvPr/>
-        </p:nvSpPr>
-        <p:spPr>
-          <a:xfrm>
-            <a:off x="658368" y="3913632"/>
-            <a:ext cx="2331720" cy="658368"/>
-          </a:xfrm>
-          <a:prstGeom prst="rect">
-            <a:avLst/>
-          </a:prstGeom>
-          <a:noFill/>
-          <a:ln/>
-        </p:spPr>
-        <p:txBody>
-          <a:bodyPr wrap="square" lIns="0" tIns="0" rIns="0" bIns="0" rtlCol="0" anchor="ctr">
-            <a:normAutofit/>
-          </a:bodyPr>
-          <a:lstStyle/>
-          <a:p>
-            <a:pPr algn="l" indent="0" marL="0">
-              <a:lnSpc>
-                <a:spcPct val="125000"/>
-              </a:lnSpc>
-              <a:buNone/>
-            </a:pPr>
-            <a:r>
-              <a:rPr lang="en-US" sz="1280" dirty="0">
-                <a:solidFill>
-                  <a:srgbClr val="1A1A1A"/>
-                </a:solidFill>
-                <a:latin typeface="Cambria" pitchFamily="34" charset="0"/>
-                <a:ea typeface="Cambria" pitchFamily="34" charset="-122"/>
-                <a:cs typeface="Cambria" pitchFamily="34" charset="-120"/>
-              </a:rPr>
-              <a:t>Tác vụ mới</a:t>
-            </a:r>
-            <a:endParaRPr lang="en-US" sz="1280" dirty="0"/>
-          </a:p>
-        </p:txBody>
-      </p:sp>
-      <p:sp>
-        <p:nvSpPr>
-          <p:cNvPr id="22" name="Text 20"/>
-          <p:cNvSpPr/>
-          <p:nvPr/>
-        </p:nvSpPr>
-        <p:spPr>
-          <a:xfrm>
-            <a:off x="2990088" y="3913632"/>
-            <a:ext cx="3977640" cy="658368"/>
-          </a:xfrm>
-          <a:prstGeom prst="rect">
-            <a:avLst/>
-          </a:prstGeom>
-          <a:noFill/>
-          <a:ln/>
-        </p:spPr>
-        <p:txBody>
-          <a:bodyPr wrap="square" lIns="0" tIns="0" rIns="0" bIns="0" rtlCol="0" anchor="ctr">
-            <a:normAutofit/>
-          </a:bodyPr>
-          <a:lstStyle/>
-          <a:p>
-            <a:pPr algn="l" indent="0" marL="0">
-              <a:lnSpc>
-                <a:spcPct val="125000"/>
-              </a:lnSpc>
-              <a:buNone/>
-            </a:pPr>
-            <a:r>
-              <a:rPr lang="en-US" sz="1280" dirty="0">
-                <a:solidFill>
-                  <a:srgbClr val="1A1A1A"/>
-                </a:solidFill>
-                <a:latin typeface="Cambria" pitchFamily="34" charset="0"/>
-                <a:ea typeface="Cambria" pitchFamily="34" charset="-122"/>
-                <a:cs typeface="Cambria" pitchFamily="34" charset="-120"/>
-              </a:rPr>
-              <a:t>ACU: GRPO-SPICE − S1 = +4,58 điểm.</a:t>
-            </a:r>
-            <a:endParaRPr lang="en-US" sz="1280" dirty="0"/>
-          </a:p>
-        </p:txBody>
-      </p:sp>
-      <p:sp>
-        <p:nvSpPr>
-          <p:cNvPr id="23" name="Text 21"/>
-          <p:cNvSpPr/>
-          <p:nvPr/>
-        </p:nvSpPr>
-        <p:spPr>
-          <a:xfrm>
-            <a:off x="6967728" y="3913632"/>
-            <a:ext cx="1508760" cy="658368"/>
-          </a:xfrm>
-          <a:prstGeom prst="rect">
-            <a:avLst/>
-          </a:prstGeom>
-          <a:noFill/>
-          <a:ln/>
-        </p:spPr>
-        <p:txBody>
-          <a:bodyPr wrap="square" lIns="0" tIns="0" rIns="0" bIns="0" rtlCol="0" anchor="ctr">
-            <a:normAutofit/>
-          </a:bodyPr>
-          <a:lstStyle/>
-          <a:p>
-            <a:pPr algn="ctr" indent="0" marL="0">
-              <a:lnSpc>
-                <a:spcPct val="125000"/>
-              </a:lnSpc>
-              <a:buNone/>
-            </a:pPr>
-            <a:r>
-              <a:rPr lang="en-US" sz="1280" b="1" dirty="0">
-                <a:solidFill>
-                  <a:srgbClr val="4F417A"/>
-                </a:solidFill>
-                <a:latin typeface="Cambria" pitchFamily="34" charset="0"/>
-                <a:ea typeface="Cambria" pitchFamily="34" charset="-122"/>
-                <a:cs typeface="Cambria" pitchFamily="34" charset="-120"/>
-              </a:rPr>
-              <a:t>Giữ</a:t>
-            </a:r>
-            <a:endParaRPr lang="en-US" sz="1280" dirty="0"/>
+              <a:t>—</a:t>
+            </a:r>
+            <a:endParaRPr lang="en-US" sz="1420" dirty="0"/>
           </a:p>
         </p:txBody>
       </p:sp>
@@ -19526,8 +19870,8 @@
         </p:nvSpPr>
         <p:spPr>
           <a:xfrm>
-            <a:off x="1005840" y="4919472"/>
-            <a:ext cx="7132320" cy="768096"/>
+            <a:off x="1005840" y="4663440"/>
+            <a:ext cx="7132320" cy="877824"/>
           </a:xfrm>
           <a:prstGeom prst="roundRect">
             <a:avLst/>
@@ -19551,8 +19895,8 @@
         </p:nvSpPr>
         <p:spPr>
           <a:xfrm>
-            <a:off x="1207008" y="4919472"/>
-            <a:ext cx="6729984" cy="768096"/>
+            <a:off x="1225296" y="4663440"/>
+            <a:ext cx="6693408" cy="877824"/>
           </a:xfrm>
           <a:prstGeom prst="rect">
             <a:avLst/>
@@ -19573,7 +19917,7 @@
               <a:buNone/>
             </a:pPr>
             <a:r>
-              <a:rPr lang="en-US" sz="1520" b="1" dirty="0">
+              <a:rPr lang="en-US" sz="1530" b="1" dirty="0">
                 <a:solidFill>
                   <a:srgbClr val="25194B"/>
                 </a:solidFill>
@@ -19581,9 +19925,9 @@
                 <a:ea typeface="Cambria" pitchFamily="34" charset="-122"/>
                 <a:cs typeface="Cambria" pitchFamily="34" charset="-120"/>
               </a:rPr>
-              <a:t>Mức tăng không chỉ xuất hiện ở một lượt chạy hay một công cụ đánh giá.</a:t>
-            </a:r>
-            <a:endParaRPr lang="en-US" sz="1520" dirty="0"/>
+              <a:t>Cả hai seed đều cùng hướng so với baseline S1; seed thứ hai cho mức tăng nhỏ hơn.</a:t>
+            </a:r>
+            <a:endParaRPr lang="en-US" sz="1530" dirty="0"/>
           </a:p>
         </p:txBody>
       </p:sp>
@@ -19960,7 +20304,7 @@
                 <a:ea typeface="Cambria" pitchFamily="34" charset="-122"/>
                 <a:cs typeface="Cambria" pitchFamily="34" charset="-120"/>
               </a:rPr>
-              <a:t>Kết luận</a:t>
+              <a:t>5. Kết luận</a:t>
             </a:r>
             <a:endParaRPr lang="en-US" sz="1820" dirty="0"/>
           </a:p>
@@ -20778,7 +21122,7 @@
                 <a:ea typeface="Cambria" pitchFamily="34" charset="-122"/>
                 <a:cs typeface="Cambria" pitchFamily="34" charset="-120"/>
               </a:rPr>
-              <a:t>Kết luận</a:t>
+              <a:t>5.1. Đóng góp chính</a:t>
             </a:r>
             <a:endParaRPr lang="en-US" sz="1820" dirty="0"/>
           </a:p>
@@ -21039,27 +21383,29 @@
         </p:nvSpPr>
         <p:spPr>
           <a:xfrm>
-            <a:off x="6281928" y="1371600"/>
-            <a:ext cx="2212848" cy="365760"/>
-          </a:xfrm>
-          <a:prstGeom prst="rect">
-            <a:avLst/>
-          </a:prstGeom>
-          <a:noFill/>
-          <a:ln/>
-        </p:spPr>
-        <p:txBody>
-          <a:bodyPr wrap="square" lIns="0" tIns="0" rIns="0" bIns="0" rtlCol="0" anchor="ctr"/>
-          <a:lstStyle/>
-          <a:p>
-            <a:pPr algn="ctr" indent="0" marL="0">
-              <a:lnSpc>
-                <a:spcPct val="125000"/>
-              </a:lnSpc>
-              <a:buNone/>
-            </a:pPr>
-            <a:r>
-              <a:rPr lang="en-US" sz="1700" b="1" dirty="0">
+            <a:off x="6281928" y="1335024"/>
+            <a:ext cx="2212848" cy="438912"/>
+          </a:xfrm>
+          <a:prstGeom prst="rect">
+            <a:avLst/>
+          </a:prstGeom>
+          <a:noFill/>
+          <a:ln/>
+        </p:spPr>
+        <p:txBody>
+          <a:bodyPr wrap="square" lIns="0" tIns="0" rIns="0" bIns="0" rtlCol="0" anchor="ctr">
+            <a:normAutofit/>
+          </a:bodyPr>
+          <a:lstStyle/>
+          <a:p>
+            <a:pPr algn="ctr" indent="0" marL="0">
+              <a:lnSpc>
+                <a:spcPct val="125000"/>
+              </a:lnSpc>
+              <a:buNone/>
+            </a:pPr>
+            <a:r>
+              <a:rPr lang="en-US" sz="1630" b="1" dirty="0">
                 <a:solidFill>
                   <a:srgbClr val="25194B"/>
                 </a:solidFill>
@@ -21067,9 +21413,9 @@
                 <a:ea typeface="Cambria" pitchFamily="34" charset="-122"/>
                 <a:cs typeface="Cambria" pitchFamily="34" charset="-120"/>
               </a:rPr>
-              <a:t>Bằng chứng</a:t>
-            </a:r>
-            <a:endParaRPr lang="en-US" sz="1700" dirty="0"/>
+              <a:t>Bằng chứng thực nghiệm</a:t>
+            </a:r>
+            <a:endParaRPr lang="en-US" sz="1630" dirty="0"/>
           </a:p>
         </p:txBody>
       </p:sp>
@@ -21103,7 +21449,7 @@
               <a:buNone/>
             </a:pPr>
             <a:r>
-              <a:rPr lang="en-US" sz="1530" dirty="0">
+              <a:rPr lang="en-US" sz="1510" dirty="0">
                 <a:solidFill>
                   <a:srgbClr val="1A1A1A"/>
                 </a:solidFill>
@@ -21111,9 +21457,9 @@
                 <a:ea typeface="Cambria" pitchFamily="34" charset="-122"/>
                 <a:cs typeface="Cambria" pitchFamily="34" charset="-120"/>
               </a:rPr>
-              <a:t>Đối chứng, lặp huấn luyện, nhiều công cụ đánh giá và tập bổ sung.</a:t>
-            </a:r>
-            <a:endParaRPr lang="en-US" sz="1530" dirty="0"/>
+              <a:t>Kết quả được giữ khi đổi công cụ định vị, chạy lại mô hình, xét tác vụ mới và lịch sử tự sinh.</a:t>
+            </a:r>
+            <a:endParaRPr lang="en-US" sz="1510" dirty="0"/>
           </a:p>
         </p:txBody>
       </p:sp>
@@ -21534,7 +21880,7 @@
                 <a:ea typeface="Cambria" pitchFamily="34" charset="-122"/>
                 <a:cs typeface="Cambria" pitchFamily="34" charset="-120"/>
               </a:rPr>
-              <a:t>Kết luận</a:t>
+              <a:t>5.2. Kết luận chung</a:t>
             </a:r>
             <a:endParaRPr lang="en-US" sz="1820" dirty="0"/>
           </a:p>
@@ -29036,7 +29382,7 @@
                 <a:ea typeface="Cambria" pitchFamily="34" charset="-122"/>
                 <a:cs typeface="Cambria" pitchFamily="34" charset="-120"/>
               </a:rPr>
-              <a:t>Giới thiệu</a:t>
+              <a:t>1.1. Yêu cầu của câu hướng dẫn</a:t>
             </a:r>
             <a:endParaRPr lang="en-US" sz="1820" dirty="0"/>
           </a:p>
@@ -31159,7 +31505,7 @@
                 <a:ea typeface="Cambria" pitchFamily="34" charset="-122"/>
                 <a:cs typeface="Cambria" pitchFamily="34" charset="-120"/>
               </a:rPr>
-              <a:t>Giới thiệu</a:t>
+              <a:t>1.2. Hạn chế của độ tương đồng</a:t>
             </a:r>
             <a:endParaRPr lang="en-US" sz="1820" dirty="0"/>
           </a:p>
@@ -31201,7 +31547,7 @@
                 <a:ea typeface="Cambria" pitchFamily="34" charset="-122"/>
                 <a:cs typeface="Cambria" pitchFamily="34" charset="-120"/>
               </a:rPr>
-              <a:t>Các thước đo dựa trên câu chuẩn và executability phản ánh hai khía cạnh bổ sung cho nhau.</a:t>
+              <a:t>Các độ đo chất lượng câu và khả năng làm theo phản ánh hai khía cạnh bổ sung cho nhau.</a:t>
             </a:r>
             <a:endParaRPr lang="en-US" sz="1700" dirty="0"/>
           </a:p>
@@ -31911,7 +32257,7 @@
                 <a:ea typeface="Cambria" pitchFamily="34" charset="-122"/>
                 <a:cs typeface="Cambria" pitchFamily="34" charset="-120"/>
               </a:rPr>
-              <a:t>Giới thiệu</a:t>
+              <a:t>1.3. Đóng góp chính</a:t>
             </a:r>
             <a:endParaRPr lang="en-US" sz="1820" dirty="0"/>
           </a:p>
@@ -32022,7 +32368,7 @@
                 <a:ea typeface="Cambria" pitchFamily="34" charset="-122"/>
                 <a:cs typeface="Cambria" pitchFamily="34" charset="-120"/>
               </a:rPr>
-              <a:t>GRPO-SPICE tối ưu câu hướng dẫn. ACE cải thiện câu sau sinh nhưng vẫn giữ executability.</a:t>
+              <a:t>GRPO-SPICE tối ưu câu hướng dẫn. ACE tiếp tục hiệu chỉnh câu ban đầu để cải thiện chất lượng mà vẫn giữ executability.</a:t>
             </a:r>
             <a:endParaRPr lang="en-US" sz="1510" dirty="0"/>
           </a:p>
@@ -32202,7 +32548,7 @@
                 <a:ea typeface="Cambria" pitchFamily="34" charset="-122"/>
                 <a:cs typeface="Cambria" pitchFamily="34" charset="-120"/>
               </a:rPr>
-              <a:t>3 · Phân tích thực nghiệm</a:t>
+              <a:t>3 · Bằng chứng thực nghiệm</a:t>
             </a:r>
             <a:endParaRPr lang="en-US" sz="1630" dirty="0"/>
           </a:p>
@@ -32246,7 +32592,7 @@
                 <a:ea typeface="Cambria" pitchFamily="34" charset="-122"/>
                 <a:cs typeface="Cambria" pitchFamily="34" charset="-120"/>
               </a:rPr>
-              <a:t>Đối chứng, lặp huấn luyện và nhiều điều kiện đánh giá được dùng để kiểm tra độ ổn định.</a:t>
+              <a:t>Kết quả được kiểm tra bằng cùng số bước huấn luyện, nhiều mô hình định vị, tác vụ mới và chuyển miền.</a:t>
             </a:r>
             <a:endParaRPr lang="en-US" sz="1500" dirty="0"/>
           </a:p>
@@ -32418,7 +32764,7 @@
                 <a:ea typeface="Cambria" pitchFamily="34" charset="-122"/>
                 <a:cs typeface="Cambria" pitchFamily="34" charset="-120"/>
               </a:rPr>
-              <a:t>điểm trên tác vụ chưa có trong tập dạy S1</a:t>
+              <a:t>điểm trên tác vụ chưa có trong huấn luyện có giám sát</a:t>
             </a:r>
             <a:endParaRPr lang="en-US" sz="1250" dirty="0"/>
           </a:p>
@@ -32504,7 +32850,7 @@
                 <a:ea typeface="Cambria" pitchFamily="34" charset="-122"/>
                 <a:cs typeface="Cambria" pitchFamily="34" charset="-120"/>
               </a:rPr>
-              <a:t>chỉ số câu tăng sau ACE</a:t>
+              <a:t>BLEU-4 · CIDEr-D · SPICE · …</a:t>
             </a:r>
             <a:endParaRPr lang="en-US" sz="1250" dirty="0"/>
           </a:p>
@@ -32883,7 +33229,7 @@
                 <a:ea typeface="Cambria" pitchFamily="34" charset="-122"/>
                 <a:cs typeface="Cambria" pitchFamily="34" charset="-120"/>
               </a:rPr>
-              <a:t>Dữ liệu và đánh giá</a:t>
+              <a:t>2. Dữ liệu và đánh giá</a:t>
             </a:r>
             <a:endParaRPr lang="en-US" sz="1820" dirty="0"/>
           </a:p>
@@ -33776,27 +34122,29 @@
         </p:nvSpPr>
         <p:spPr>
           <a:xfrm>
-            <a:off x="667512" y="4645152"/>
-            <a:ext cx="777240" cy="292608"/>
-          </a:xfrm>
-          <a:prstGeom prst="rect">
-            <a:avLst/>
-          </a:prstGeom>
-          <a:noFill/>
-          <a:ln/>
-        </p:spPr>
-        <p:txBody>
-          <a:bodyPr wrap="square" lIns="0" tIns="0" rIns="0" bIns="0" rtlCol="0" anchor="ctr"/>
-          <a:lstStyle/>
-          <a:p>
-            <a:pPr algn="ctr" indent="0" marL="0">
-              <a:lnSpc>
-                <a:spcPct val="125000"/>
-              </a:lnSpc>
-              <a:buNone/>
-            </a:pPr>
-            <a:r>
-              <a:rPr lang="en-US" sz="1600" b="1" dirty="0">
+            <a:off x="630936" y="4599432"/>
+            <a:ext cx="1417320" cy="384048"/>
+          </a:xfrm>
+          <a:prstGeom prst="rect">
+            <a:avLst/>
+          </a:prstGeom>
+          <a:noFill/>
+          <a:ln/>
+        </p:spPr>
+        <p:txBody>
+          <a:bodyPr wrap="square" lIns="0" tIns="0" rIns="0" bIns="0" rtlCol="0" anchor="ctr">
+            <a:normAutofit/>
+          </a:bodyPr>
+          <a:lstStyle/>
+          <a:p>
+            <a:pPr algn="ctr" indent="0" marL="0">
+              <a:lnSpc>
+                <a:spcPct val="125000"/>
+              </a:lnSpc>
+              <a:buNone/>
+            </a:pPr>
+            <a:r>
+              <a:rPr lang="en-US" sz="1460" b="1" dirty="0">
                 <a:solidFill>
                   <a:srgbClr val="25194B"/>
                 </a:solidFill>
@@ -33804,9 +34152,9 @@
                 <a:ea typeface="Cambria" pitchFamily="34" charset="-122"/>
                 <a:cs typeface="Cambria" pitchFamily="34" charset="-120"/>
               </a:rPr>
-              <a:t>ACU</a:t>
-            </a:r>
-            <a:endParaRPr lang="en-US" sz="1600" dirty="0"/>
+              <a:t>Tác vụ mới (ACU)</a:t>
+            </a:r>
+            <a:endParaRPr lang="en-US" sz="1460" dirty="0"/>
           </a:p>
         </p:txBody>
       </p:sp>
@@ -33818,8 +34166,8 @@
         </p:nvSpPr>
         <p:spPr>
           <a:xfrm>
-            <a:off x="1444752" y="4553712"/>
-            <a:ext cx="2761488" cy="658368"/>
+            <a:off x="1920240" y="4553712"/>
+            <a:ext cx="2286000" cy="658368"/>
           </a:xfrm>
           <a:prstGeom prst="rect">
             <a:avLst/>
@@ -33840,7 +34188,7 @@
               <a:buNone/>
             </a:pPr>
             <a:r>
-              <a:rPr lang="en-US" sz="1410" b="1" dirty="0">
+              <a:rPr lang="en-US" sz="1380" b="1" dirty="0">
                 <a:solidFill>
                   <a:srgbClr val="1A1A1A"/>
                 </a:solidFill>
@@ -33850,7 +34198,7 @@
               </a:rPr>
               <a:t>1.484 bước từ các tác vụ chưa có trong tập huấn luyện</a:t>
             </a:r>
-            <a:endParaRPr lang="en-US" sz="1410" dirty="0"/>
+            <a:endParaRPr lang="en-US" sz="1380" dirty="0"/>
           </a:p>
         </p:txBody>
       </p:sp>
@@ -33887,27 +34235,29 @@
         </p:nvSpPr>
         <p:spPr>
           <a:xfrm>
-            <a:off x="4919472" y="4645152"/>
-            <a:ext cx="777240" cy="292608"/>
-          </a:xfrm>
-          <a:prstGeom prst="rect">
-            <a:avLst/>
-          </a:prstGeom>
-          <a:noFill/>
-          <a:ln/>
-        </p:spPr>
-        <p:txBody>
-          <a:bodyPr wrap="square" lIns="0" tIns="0" rIns="0" bIns="0" rtlCol="0" anchor="ctr"/>
-          <a:lstStyle/>
-          <a:p>
-            <a:pPr algn="ctr" indent="0" marL="0">
-              <a:lnSpc>
-                <a:spcPct val="125000"/>
-              </a:lnSpc>
-              <a:buNone/>
-            </a:pPr>
-            <a:r>
-              <a:rPr lang="en-US" sz="1600" b="1" dirty="0">
+            <a:off x="4864608" y="4599432"/>
+            <a:ext cx="1508760" cy="384048"/>
+          </a:xfrm>
+          <a:prstGeom prst="rect">
+            <a:avLst/>
+          </a:prstGeom>
+          <a:noFill/>
+          <a:ln/>
+        </p:spPr>
+        <p:txBody>
+          <a:bodyPr wrap="square" lIns="0" tIns="0" rIns="0" bIns="0" rtlCol="0" anchor="ctr">
+            <a:normAutofit/>
+          </a:bodyPr>
+          <a:lstStyle/>
+          <a:p>
+            <a:pPr algn="ctr" indent="0" marL="0">
+              <a:lnSpc>
+                <a:spcPct val="125000"/>
+              </a:lnSpc>
+              <a:buNone/>
+            </a:pPr>
+            <a:r>
+              <a:rPr lang="en-US" sz="1460" b="1" dirty="0">
                 <a:solidFill>
                   <a:srgbClr val="25194B"/>
                 </a:solidFill>
@@ -33915,9 +34265,9 @@
                 <a:ea typeface="Cambria" pitchFamily="34" charset="-122"/>
                 <a:cs typeface="Cambria" pitchFamily="34" charset="-120"/>
               </a:rPr>
-              <a:t>AitZ</a:t>
-            </a:r>
-            <a:endParaRPr lang="en-US" sz="1600" dirty="0"/>
+              <a:t>Chuyển miền (AitZ)</a:t>
+            </a:r>
+            <a:endParaRPr lang="en-US" sz="1460" dirty="0"/>
           </a:p>
         </p:txBody>
       </p:sp>
@@ -33929,8 +34279,8 @@
         </p:nvSpPr>
         <p:spPr>
           <a:xfrm>
-            <a:off x="5687568" y="4553712"/>
-            <a:ext cx="2761488" cy="658368"/>
+            <a:off x="6263640" y="4553712"/>
+            <a:ext cx="2176272" cy="658368"/>
           </a:xfrm>
           <a:prstGeom prst="rect">
             <a:avLst/>
@@ -33951,7 +34301,7 @@
               <a:buNone/>
             </a:pPr>
             <a:r>
-              <a:rPr lang="en-US" sz="1410" b="1" dirty="0">
+              <a:rPr lang="en-US" sz="1380" b="1" dirty="0">
                 <a:solidFill>
                   <a:srgbClr val="1A1A1A"/>
                 </a:solidFill>
@@ -33959,9 +34309,9 @@
                 <a:ea typeface="Cambria" pitchFamily="34" charset="-122"/>
                 <a:cs typeface="Cambria" pitchFamily="34" charset="-120"/>
               </a:rPr>
-              <a:t>Kiểm tra khả năng chuyển miền sang phân phối dữ liệu khác</a:t>
-            </a:r>
-            <a:endParaRPr lang="en-US" sz="1410" dirty="0"/>
+              <a:t>Bộ dữ liệu giao diện khác để kiểm tra khả năng chuyển miền</a:t>
+            </a:r>
+            <a:endParaRPr lang="en-US" sz="1380" dirty="0"/>
           </a:p>
         </p:txBody>
       </p:sp>
@@ -34338,7 +34688,7 @@
                 <a:ea typeface="Cambria" pitchFamily="34" charset="-122"/>
                 <a:cs typeface="Cambria" pitchFamily="34" charset="-120"/>
               </a:rPr>
-              <a:t>Dữ liệu và đánh giá</a:t>
+              <a:t>2.1. Executability</a:t>
             </a:r>
             <a:endParaRPr lang="en-US" sz="1820" dirty="0"/>
           </a:p>
@@ -35404,7 +35754,7 @@
                 <a:ea typeface="Cambria" pitchFamily="34" charset="-122"/>
                 <a:cs typeface="Cambria" pitchFamily="34" charset="-120"/>
               </a:rPr>
-              <a:t>Dữ liệu và đánh giá</a:t>
+              <a:t>2.2. Kiểm tra độ tin cậy của executability</a:t>
             </a:r>
             <a:endParaRPr lang="en-US" sz="1820" dirty="0"/>
           </a:p>
@@ -35418,8 +35768,8 @@
         </p:nvSpPr>
         <p:spPr>
           <a:xfrm>
-            <a:off x="502920" y="868680"/>
-            <a:ext cx="8138160" cy="475488"/>
+            <a:off x="502920" y="832104"/>
+            <a:ext cx="8138160" cy="566928"/>
           </a:xfrm>
           <a:prstGeom prst="rect">
             <a:avLst/>
@@ -35440,7 +35790,7 @@
               <a:buNone/>
             </a:pPr>
             <a:r>
-              <a:rPr lang="en-US" sz="1660" b="1" dirty="0">
+              <a:rPr lang="en-US" sz="1600" b="1" dirty="0">
                 <a:solidFill>
                   <a:srgbClr val="25194B"/>
                 </a:solidFill>
@@ -35448,9 +35798,9 @@
                 <a:ea typeface="Cambria" pitchFamily="34" charset="-122"/>
                 <a:cs typeface="Cambria" pitchFamily="34" charset="-120"/>
               </a:rPr>
-              <a:t>Điểm giảm mạnh khi câu mất thông tin cần thiết để xác định đúng phần tử.</a:t>
-            </a:r>
-            <a:endParaRPr lang="en-US" sz="1660" dirty="0"/>
+              <a:t>Trên cùng một nhóm bước, câu càng thiếu thông tin để xác định đúng phần tử thì executability càng thấp.</a:t>
+            </a:r>
+            <a:endParaRPr lang="en-US" sz="1600" dirty="0"/>
           </a:p>
         </p:txBody>
       </p:sp>
@@ -35492,7 +35842,7 @@
                 <a:ea typeface="Cambria" pitchFamily="34" charset="-122"/>
                 <a:cs typeface="Cambria" pitchFamily="34" charset="-120"/>
               </a:rPr>
-              <a:t>Câu chuẩn</a:t>
+              <a:t>Câu chuẩn (đầy đủ thông tin)</a:t>
             </a:r>
             <a:endParaRPr lang="en-US" sz="1420" dirty="0"/>
           </a:p>
@@ -35534,7 +35884,7 @@
         <p:spPr>
           <a:xfrm>
             <a:off x="3108960" y="1691640"/>
-            <a:ext cx="3867672" cy="256032"/>
+            <a:ext cx="3826798" cy="256032"/>
           </a:xfrm>
           <a:prstGeom prst="roundRect">
             <a:avLst/>
@@ -35590,7 +35940,7 @@
                 <a:ea typeface="Cambria" pitchFamily="34" charset="-122"/>
                 <a:cs typeface="Cambria" pitchFamily="34" charset="-120"/>
               </a:rPr>
-              <a:t>75,7%</a:t>
+              <a:t>74,9%</a:t>
             </a:r>
             <a:endParaRPr lang="en-US" sz="1420" dirty="0"/>
           </a:p>
@@ -35634,7 +35984,7 @@
                 <a:ea typeface="Cambria" pitchFamily="34" charset="-122"/>
                 <a:cs typeface="Cambria" pitchFamily="34" charset="-120"/>
               </a:rPr>
-              <a:t>“Tap the button.”</a:t>
+              <a:t>Câu mơ hồ: “Tap the button.”</a:t>
             </a:r>
             <a:endParaRPr lang="en-US" sz="1420" dirty="0"/>
           </a:p>
@@ -35776,7 +36126,7 @@
                 <a:ea typeface="Cambria" pitchFamily="34" charset="-122"/>
                 <a:cs typeface="Cambria" pitchFamily="34" charset="-120"/>
               </a:rPr>
-              <a:t>Câu của màn hình khác</a:t>
+              <a:t>Câu sai màn hình</a:t>
             </a:r>
             <a:endParaRPr lang="en-US" sz="1420" dirty="0"/>
           </a:p>
@@ -35882,56 +36232,14 @@
       </p:sp>
       <p:sp>
         <p:nvSpPr>
-          <p:cNvPr id="17" name="Text 15"/>
-          <p:cNvSpPr/>
-          <p:nvPr/>
-        </p:nvSpPr>
-        <p:spPr>
-          <a:xfrm>
-            <a:off x="502920" y="4315968"/>
-            <a:ext cx="8138160" cy="274320"/>
-          </a:xfrm>
-          <a:prstGeom prst="rect">
-            <a:avLst/>
-          </a:prstGeom>
-          <a:noFill/>
-          <a:ln/>
-        </p:spPr>
-        <p:txBody>
-          <a:bodyPr wrap="square" lIns="0" tIns="0" rIns="0" bIns="0" rtlCol="0" anchor="ctr"/>
-          <a:lstStyle/>
-          <a:p>
-            <a:pPr algn="ctr" indent="0" marL="0">
-              <a:lnSpc>
-                <a:spcPct val="125000"/>
-              </a:lnSpc>
-              <a:buNone/>
-            </a:pPr>
-            <a:r>
-              <a:rPr lang="en-US" sz="1250" dirty="0">
-                <a:solidFill>
-                  <a:srgbClr val="5A5A66"/>
-                </a:solidFill>
-                <a:latin typeface="Cambria" pitchFamily="34" charset="0"/>
-                <a:ea typeface="Cambria" pitchFamily="34" charset="-122"/>
-                <a:cs typeface="Cambria" pitchFamily="34" charset="-120"/>
-              </a:rPr>
-              <a:t>Cùng mẫu 800 bước</a:t>
-            </a:r>
-            <a:endParaRPr lang="en-US" sz="1250" dirty="0"/>
-          </a:p>
-        </p:txBody>
-      </p:sp>
-      <p:sp>
-        <p:nvSpPr>
-          <p:cNvPr id="18" name="Shape 16"/>
-          <p:cNvSpPr/>
-          <p:nvPr/>
-        </p:nvSpPr>
-        <p:spPr>
-          <a:xfrm>
-            <a:off x="1051560" y="4773168"/>
-            <a:ext cx="7040880" cy="713232"/>
+          <p:cNvPr id="17" name="Shape 15"/>
+          <p:cNvSpPr/>
+          <p:nvPr/>
+        </p:nvSpPr>
+        <p:spPr>
+          <a:xfrm>
+            <a:off x="1051560" y="4498848"/>
+            <a:ext cx="7040880" cy="859536"/>
           </a:xfrm>
           <a:prstGeom prst="roundRect">
             <a:avLst/>
@@ -35949,14 +36257,14 @@
       </p:sp>
       <p:sp>
         <p:nvSpPr>
-          <p:cNvPr id="19" name="Text 17"/>
-          <p:cNvSpPr/>
-          <p:nvPr/>
-        </p:nvSpPr>
-        <p:spPr>
-          <a:xfrm>
-            <a:off x="1261872" y="4773168"/>
-            <a:ext cx="6620256" cy="713232"/>
+          <p:cNvPr id="18" name="Text 16"/>
+          <p:cNvSpPr/>
+          <p:nvPr/>
+        </p:nvSpPr>
+        <p:spPr>
+          <a:xfrm>
+            <a:off x="1261872" y="4498848"/>
+            <a:ext cx="6620256" cy="859536"/>
           </a:xfrm>
           <a:prstGeom prst="rect">
             <a:avLst/>
@@ -35977,7 +36285,7 @@
               <a:buNone/>
             </a:pPr>
             <a:r>
-              <a:rPr lang="en-US" sz="1530" b="1" dirty="0">
+              <a:rPr lang="en-US" sz="1540" b="1" dirty="0">
                 <a:solidFill>
                   <a:srgbClr val="25194B"/>
                 </a:solidFill>
@@ -35985,15 +36293,15 @@
                 <a:ea typeface="Cambria" pitchFamily="34" charset="-122"/>
                 <a:cs typeface="Cambria" pitchFamily="34" charset="-120"/>
               </a:rPr>
-              <a:t>Executability phản ứng đúng theo mức thông tin của câu hướng dẫn.</a:t>
-            </a:r>
-            <a:endParaRPr lang="en-US" sz="1530" dirty="0"/>
-          </a:p>
-        </p:txBody>
-      </p:sp>
-      <p:sp>
-        <p:nvSpPr>
-          <p:cNvPr id="20" name="Shape 18"/>
+              <a:t>Kết quả đúng kỳ vọng: 74,9% → 12,0% → 6,1%. Khi câu mơ hồ hoặc sai ngữ cảnh, executability giảm mạnh.</a:t>
+            </a:r>
+            <a:endParaRPr lang="en-US" sz="1540" dirty="0"/>
+          </a:p>
+        </p:txBody>
+      </p:sp>
+      <p:sp>
+        <p:nvSpPr>
+          <p:cNvPr id="19" name="Shape 17"/>
           <p:cNvSpPr/>
           <p:nvPr/>
         </p:nvSpPr>
@@ -36020,7 +36328,7 @@
       </p:sp>
       <p:sp>
         <p:nvSpPr>
-          <p:cNvPr id="21" name="Shape 19"/>
+          <p:cNvPr id="20" name="Shape 18"/>
           <p:cNvSpPr/>
           <p:nvPr/>
         </p:nvSpPr>
@@ -36047,7 +36355,7 @@
       </p:sp>
       <p:sp>
         <p:nvSpPr>
-          <p:cNvPr id="22" name="Shape 20"/>
+          <p:cNvPr id="21" name="Shape 19"/>
           <p:cNvSpPr/>
           <p:nvPr/>
         </p:nvSpPr>
@@ -36074,7 +36382,7 @@
       </p:sp>
       <p:sp>
         <p:nvSpPr>
-          <p:cNvPr id="23" name="Shape 21"/>
+          <p:cNvPr id="22" name="Shape 20"/>
           <p:cNvSpPr/>
           <p:nvPr/>
         </p:nvSpPr>
@@ -36101,7 +36409,7 @@
       </p:sp>
       <p:sp>
         <p:nvSpPr>
-          <p:cNvPr id="24" name="Text 22"/>
+          <p:cNvPr id="23" name="Text 21"/>
           <p:cNvSpPr/>
           <p:nvPr/>
         </p:nvSpPr>
@@ -36143,7 +36451,7 @@
       </p:sp>
       <p:sp>
         <p:nvSpPr>
-          <p:cNvPr id="25" name="Text 23"/>
+          <p:cNvPr id="24" name="Text 22"/>
           <p:cNvSpPr/>
           <p:nvPr/>
         </p:nvSpPr>
@@ -36185,7 +36493,7 @@
       </p:sp>
       <p:sp>
         <p:nvSpPr>
-          <p:cNvPr id="26" name="Text 24"/>
+          <p:cNvPr id="25" name="Text 23"/>
           <p:cNvSpPr/>
           <p:nvPr/>
         </p:nvSpPr>
@@ -36227,7 +36535,7 @@
       </p:sp>
       <p:sp>
         <p:nvSpPr>
-          <p:cNvPr id="27" name="Text 25"/>
+          <p:cNvPr id="26" name="Text 24"/>
           <p:cNvSpPr/>
           <p:nvPr/>
         </p:nvSpPr>
@@ -36364,7 +36672,7 @@
                 <a:ea typeface="Cambria" pitchFamily="34" charset="-122"/>
                 <a:cs typeface="Cambria" pitchFamily="34" charset="-120"/>
               </a:rPr>
-              <a:t>Phương pháp đề xuất</a:t>
+              <a:t>3. Phương pháp đề xuất</a:t>
             </a:r>
             <a:endParaRPr lang="en-US" sz="1820" dirty="0"/>
           </a:p>
@@ -36378,8 +36686,8 @@
         </p:nvSpPr>
         <p:spPr>
           <a:xfrm>
-            <a:off x="502920" y="1234440"/>
-            <a:ext cx="868680" cy="822960"/>
+            <a:off x="411480" y="1133856"/>
+            <a:ext cx="1389888" cy="1024128"/>
           </a:xfrm>
           <a:prstGeom prst="roundRect">
             <a:avLst/>
@@ -36403,8 +36711,8 @@
         </p:nvSpPr>
         <p:spPr>
           <a:xfrm>
-            <a:off x="502920" y="1234440"/>
-            <a:ext cx="868680" cy="822960"/>
+            <a:off x="411480" y="1133856"/>
+            <a:ext cx="1389888" cy="1024128"/>
           </a:xfrm>
           <a:prstGeom prst="rect">
             <a:avLst/>
@@ -36425,7 +36733,7 @@
               <a:buNone/>
             </a:pPr>
             <a:r>
-              <a:rPr lang="en-US" sz="1600" b="1" dirty="0">
+              <a:rPr lang="en-US" sz="1380" b="1" dirty="0">
                 <a:solidFill>
                   <a:srgbClr val="1A1A1A"/>
                 </a:solidFill>
@@ -36433,9 +36741,29 @@
                 <a:ea typeface="Cambria" pitchFamily="34" charset="-122"/>
                 <a:cs typeface="Cambria" pitchFamily="34" charset="-120"/>
               </a:rPr>
-              <a:t>S1</a:t>
-            </a:r>
-            <a:endParaRPr lang="en-US" sz="1600" dirty="0"/>
+              <a:t>Baseline S1</a:t>
+            </a:r>
+            <a:endParaRPr lang="en-US" sz="1380" dirty="0"/>
+          </a:p>
+          <a:p>
+            <a:pPr algn="ctr" indent="0" marL="0">
+              <a:lnSpc>
+                <a:spcPct val="125000"/>
+              </a:lnSpc>
+              <a:buNone/>
+            </a:pPr>
+            <a:r>
+              <a:rPr lang="en-US" sz="1380" b="1" dirty="0">
+                <a:solidFill>
+                  <a:srgbClr val="1A1A1A"/>
+                </a:solidFill>
+                <a:latin typeface="Cambria" pitchFamily="34" charset="0"/>
+                <a:ea typeface="Cambria" pitchFamily="34" charset="-122"/>
+                <a:cs typeface="Cambria" pitchFamily="34" charset="-120"/>
+              </a:rPr>
+              <a:t>(đã được SFT)</a:t>
+            </a:r>
+            <a:endParaRPr lang="en-US" sz="1380" dirty="0"/>
           </a:p>
         </p:txBody>
       </p:sp>
@@ -36447,8 +36775,8 @@
         </p:nvSpPr>
         <p:spPr>
           <a:xfrm>
-            <a:off x="1481328" y="1645920"/>
-            <a:ext cx="320040" cy="0"/>
+            <a:off x="1874520" y="1645920"/>
+            <a:ext cx="182880" cy="0"/>
           </a:xfrm>
           <a:prstGeom prst="line">
             <a:avLst/>
@@ -36471,8 +36799,8 @@
         </p:nvSpPr>
         <p:spPr>
           <a:xfrm>
-            <a:off x="1901952" y="1143000"/>
-            <a:ext cx="1965960" cy="1005840"/>
+            <a:off x="2121408" y="1143000"/>
+            <a:ext cx="1901952" cy="1005840"/>
           </a:xfrm>
           <a:prstGeom prst="roundRect">
             <a:avLst/>
@@ -36496,8 +36824,8 @@
         </p:nvSpPr>
         <p:spPr>
           <a:xfrm>
-            <a:off x="1901952" y="1143000"/>
-            <a:ext cx="1965960" cy="1005840"/>
+            <a:off x="2121408" y="1143000"/>
+            <a:ext cx="1901952" cy="1005840"/>
           </a:xfrm>
           <a:prstGeom prst="rect">
             <a:avLst/>
@@ -36560,8 +36888,8 @@
         </p:nvSpPr>
         <p:spPr>
           <a:xfrm>
-            <a:off x="3977640" y="1645920"/>
-            <a:ext cx="320040" cy="0"/>
+            <a:off x="4133088" y="1645920"/>
+            <a:ext cx="256032" cy="0"/>
           </a:xfrm>
           <a:prstGeom prst="line">
             <a:avLst/>
@@ -36584,8 +36912,8 @@
         </p:nvSpPr>
         <p:spPr>
           <a:xfrm>
-            <a:off x="4407408" y="1143000"/>
-            <a:ext cx="1965960" cy="1005840"/>
+            <a:off x="4480560" y="1143000"/>
+            <a:ext cx="1901952" cy="1005840"/>
           </a:xfrm>
           <a:prstGeom prst="roundRect">
             <a:avLst/>
@@ -36609,8 +36937,8 @@
         </p:nvSpPr>
         <p:spPr>
           <a:xfrm>
-            <a:off x="4407408" y="1143000"/>
-            <a:ext cx="1965960" cy="1005840"/>
+            <a:off x="4480560" y="1143000"/>
+            <a:ext cx="1901952" cy="1005840"/>
           </a:xfrm>
           <a:prstGeom prst="rect">
             <a:avLst/>
@@ -36674,7 +37002,7 @@
         <p:spPr>
           <a:xfrm>
             <a:off x="6492240" y="1645920"/>
-            <a:ext cx="320040" cy="0"/>
+            <a:ext cx="256032" cy="0"/>
           </a:xfrm>
           <a:prstGeom prst="line">
             <a:avLst/>
@@ -36697,8 +37025,8 @@
         </p:nvSpPr>
         <p:spPr>
           <a:xfrm>
-            <a:off x="6922008" y="1143000"/>
-            <a:ext cx="1719072" cy="1005840"/>
+            <a:off x="6839712" y="1143000"/>
+            <a:ext cx="1810512" cy="1005840"/>
           </a:xfrm>
           <a:prstGeom prst="roundRect">
             <a:avLst/>
@@ -36722,8 +37050,8 @@
         </p:nvSpPr>
         <p:spPr>
           <a:xfrm>
-            <a:off x="6922008" y="1143000"/>
-            <a:ext cx="1719072" cy="1005840"/>
+            <a:off x="6839712" y="1143000"/>
+            <a:ext cx="1810512" cy="1005840"/>
           </a:xfrm>
           <a:prstGeom prst="rect">
             <a:avLst/>
@@ -37164,7 +37492,9 @@
           <a:ln/>
         </p:spPr>
         <p:txBody>
-          <a:bodyPr wrap="square" lIns="0" tIns="0" rIns="0" bIns="0" rtlCol="0" anchor="ctr"/>
+          <a:bodyPr wrap="square" lIns="0" tIns="0" rIns="0" bIns="0" rtlCol="0" anchor="ctr">
+            <a:normAutofit/>
+          </a:bodyPr>
           <a:lstStyle/>
           <a:p>
             <a:pPr algn="ctr" indent="0" marL="0">
@@ -37182,7 +37512,7 @@
                 <a:ea typeface="Cambria" pitchFamily="34" charset="-122"/>
                 <a:cs typeface="Cambria" pitchFamily="34" charset="-120"/>
               </a:rPr>
-              <a:t>UGround không nằm trong hàm thưởng và không tham gia vào quá trình sinh câu.</a:t>
+              <a:t>Mô hình định vị chỉ được dùng để đánh giá câu hướng dẫn; không tham gia sinh câu hay cập nhật mô hình.</a:t>
             </a:r>
             <a:endParaRPr lang="en-US" sz="1420" dirty="0"/>
           </a:p>

--- a/slides/LUAN_VAN_SLIDE_BAO_VE_CONCISE.pptx
+++ b/slides/LUAN_VAN_SLIDE_BAO_VE_CONCISE.pptx
@@ -6376,7 +6376,7 @@
               <a:buNone/>
             </a:pPr>
             <a:r>
-              <a:rPr lang="en-US" sz="1390" b="1" dirty="0">
+              <a:rPr lang="en-US" sz="1390" dirty="0">
                 <a:solidFill>
                   <a:srgbClr val="7A7099"/>
                 </a:solidFill>
@@ -6518,7 +6518,7 @@
               <a:buNone/>
             </a:pPr>
             <a:r>
-              <a:rPr lang="en-US" sz="1390" b="1" dirty="0">
+              <a:rPr lang="en-US" sz="1390" dirty="0">
                 <a:solidFill>
                   <a:srgbClr val="7A7099"/>
                 </a:solidFill>
@@ -6660,7 +6660,7 @@
               <a:buNone/>
             </a:pPr>
             <a:r>
-              <a:rPr lang="en-US" sz="1390" b="1" dirty="0">
+              <a:rPr lang="en-US" sz="1390" dirty="0">
                 <a:solidFill>
                   <a:srgbClr val="4F417A"/>
                 </a:solidFill>
@@ -7338,7 +7338,7 @@
               <a:buNone/>
             </a:pPr>
             <a:r>
-              <a:rPr lang="en-US" sz="1580" b="1" dirty="0">
+              <a:rPr lang="en-US" sz="1580" dirty="0">
                 <a:solidFill>
                   <a:srgbClr val="25194B"/>
                 </a:solidFill>
@@ -7346,7 +7346,7 @@
                 <a:ea typeface="Cambria" pitchFamily="34" charset="-122"/>
                 <a:cs typeface="Cambria" pitchFamily="34" charset="-120"/>
               </a:rPr>
-              <a:t>Cùng 500 bước GRPO, nhánh dùng SPICE từ mẫu khác vẫn ở mức S1; GRPO-SPICE tăng +1,55 điểm.</a:t>
+              <a:t>Cùng 500 bước GRPO, nhánh dùng SPICE từ mẫu khác vẫn ở mức S1. GRPO-SPICE tăng +1,55 điểm.</a:t>
             </a:r>
             <a:endParaRPr lang="en-US" sz="1580" dirty="0"/>
           </a:p>
@@ -7750,7 +7750,7 @@
                 <a:ea typeface="Cambria" pitchFamily="34" charset="-122"/>
                 <a:cs typeface="Cambria" pitchFamily="34" charset="-120"/>
               </a:rPr>
-              <a:t>GRPO-SPICE cao hơn nhánh dùng SPICE từ mẫu khác +1,55 điểm · KTC 95% [+0,81; +2,30]</a:t>
+              <a:t>GRPO-SPICE cao hơn nhánh dùng SPICE từ mẫu khác +1,55 điểm · KTC 95% từ +0,81 đến +2,30</a:t>
             </a:r>
             <a:endParaRPr lang="en-US" sz="1600" dirty="0"/>
           </a:p>
@@ -7784,7 +7784,7 @@
               <a:buNone/>
             </a:pPr>
             <a:r>
-              <a:rPr lang="en-US" sz="1380" b="1" dirty="0">
+              <a:rPr lang="en-US" sz="1380" dirty="0">
                 <a:solidFill>
                   <a:srgbClr val="25194B"/>
                 </a:solidFill>
@@ -8205,7 +8205,7 @@
               <a:buNone/>
             </a:pPr>
             <a:r>
-              <a:rPr lang="en-US" sz="1670" b="1" dirty="0">
+              <a:rPr lang="en-US" sz="1670" dirty="0">
                 <a:solidFill>
                   <a:srgbClr val="25194B"/>
                 </a:solidFill>
@@ -9449,7 +9449,7 @@
               <a:buNone/>
             </a:pPr>
             <a:r>
-              <a:rPr lang="en-US" sz="1250" b="1" dirty="0">
+              <a:rPr lang="en-US" sz="1250" dirty="0">
                 <a:solidFill>
                   <a:srgbClr val="1A1A1A"/>
                 </a:solidFill>
@@ -9535,7 +9535,7 @@
               <a:buNone/>
             </a:pPr>
             <a:r>
-              <a:rPr lang="en-US" sz="1250" b="1" dirty="0">
+              <a:rPr lang="en-US" sz="1250" dirty="0">
                 <a:solidFill>
                   <a:srgbClr val="1A1A1A"/>
                 </a:solidFill>
@@ -9621,7 +9621,7 @@
               <a:buNone/>
             </a:pPr>
             <a:r>
-              <a:rPr lang="en-US" sz="1250" b="1" dirty="0">
+              <a:rPr lang="en-US" sz="1250" dirty="0">
                 <a:solidFill>
                   <a:srgbClr val="1A1A1A"/>
                 </a:solidFill>
@@ -9665,7 +9665,7 @@
               <a:buNone/>
             </a:pPr>
             <a:r>
-              <a:rPr lang="en-US" sz="1360" b="1" dirty="0">
+              <a:rPr lang="en-US" sz="1360" dirty="0">
                 <a:solidFill>
                   <a:srgbClr val="25194B"/>
                 </a:solidFill>
@@ -9673,7 +9673,7 @@
                 <a:ea typeface="Cambria" pitchFamily="34" charset="-122"/>
                 <a:cs typeface="Cambria" pitchFamily="34" charset="-120"/>
               </a:rPr>
-              <a:t>12/12 độ đo có KTC nằm trên 0; METEOR tăng nhưng chưa có KTC.</a:t>
+              <a:t>12/12 độ đo có KTC nằm trên 0. METEOR tăng nhưng chưa có KTC.</a:t>
             </a:r>
             <a:endParaRPr lang="en-US" sz="1360" dirty="0"/>
           </a:p>
@@ -10088,7 +10088,7 @@
               <a:buNone/>
             </a:pPr>
             <a:r>
-              <a:rPr lang="en-US" sz="1540" b="1" dirty="0">
+              <a:rPr lang="en-US" sz="1540" dirty="0">
                 <a:solidFill>
                   <a:srgbClr val="25194B"/>
                 </a:solidFill>
@@ -10372,7 +10372,7 @@
               <a:buNone/>
             </a:pPr>
             <a:r>
-              <a:rPr lang="en-US" sz="1420" b="1" dirty="0">
+              <a:rPr lang="en-US" sz="1420" dirty="0">
                 <a:solidFill>
                   <a:srgbClr val="4F417A"/>
                 </a:solidFill>
@@ -10556,7 +10556,7 @@
               <a:buNone/>
             </a:pPr>
             <a:r>
-              <a:rPr lang="en-US" sz="1370" b="1" dirty="0">
+              <a:rPr lang="en-US" sz="1370" dirty="0">
                 <a:solidFill>
                   <a:srgbClr val="25194B"/>
                 </a:solidFill>
@@ -10625,7 +10625,7 @@
               <a:buNone/>
             </a:pPr>
             <a:r>
-              <a:rPr lang="en-US" sz="1480" b="1" dirty="0">
+              <a:rPr lang="en-US" sz="1480" dirty="0">
                 <a:solidFill>
                   <a:srgbClr val="25194B"/>
                 </a:solidFill>
@@ -10633,7 +10633,7 @@
                 <a:ea typeface="Cambria" pitchFamily="34" charset="-122"/>
                 <a:cs typeface="Cambria" pitchFamily="34" charset="-120"/>
               </a:rPr>
-              <a:t>Tập kiểm chính + ACU: GRPO-SPICE − S1 = +2,30  [ +1,62; +2,99 ]</a:t>
+              <a:t>Tập kiểm chính + ACU: GRPO-SPICE − S1 = +2,30 · KTC 95% từ +1,62 đến +2,99</a:t>
             </a:r>
             <a:endParaRPr lang="en-US" sz="1480" dirty="0"/>
           </a:p>
@@ -11090,7 +11090,7 @@
               <a:buNone/>
             </a:pPr>
             <a:r>
-              <a:rPr lang="en-US" sz="1250" b="1" dirty="0">
+              <a:rPr lang="en-US" sz="1250" dirty="0">
                 <a:solidFill>
                   <a:srgbClr val="1A1A1A"/>
                 </a:solidFill>
@@ -11176,7 +11176,7 @@
               <a:buNone/>
             </a:pPr>
             <a:r>
-              <a:rPr lang="en-US" sz="1250" b="1" dirty="0">
+              <a:rPr lang="en-US" sz="1250" dirty="0">
                 <a:solidFill>
                   <a:srgbClr val="1A1A1A"/>
                 </a:solidFill>
@@ -11262,7 +11262,7 @@
               <a:buNone/>
             </a:pPr>
             <a:r>
-              <a:rPr lang="en-US" sz="1250" b="1" dirty="0">
+              <a:rPr lang="en-US" sz="1250" dirty="0">
                 <a:solidFill>
                   <a:srgbClr val="1A1A1A"/>
                 </a:solidFill>
@@ -11306,7 +11306,7 @@
               <a:buNone/>
             </a:pPr>
             <a:r>
-              <a:rPr lang="en-US" sz="1400" b="1" dirty="0">
+              <a:rPr lang="en-US" sz="1400" dirty="0">
                 <a:solidFill>
                   <a:srgbClr val="25194B"/>
                 </a:solidFill>
@@ -13308,7 +13308,7 @@
               <a:buNone/>
             </a:pPr>
             <a:r>
-              <a:rPr lang="en-US" sz="1280" b="1" dirty="0">
+              <a:rPr lang="en-US" sz="1280" dirty="0">
                 <a:solidFill>
                   <a:srgbClr val="25194B"/>
                 </a:solidFill>
@@ -13316,7 +13316,7 @@
                 <a:ea typeface="Cambria" pitchFamily="34" charset="-122"/>
                 <a:cs typeface="Cambria" pitchFamily="34" charset="-120"/>
               </a:rPr>
-              <a:t>6/6 độ đo có KTC nằm trên 0; METEOR chưa có KTC.</a:t>
+              <a:t>6/6 độ đo có KTC nằm trên 0. METEOR chưa có KTC.</a:t>
             </a:r>
             <a:endParaRPr lang="en-US" sz="1280" dirty="0"/>
           </a:p>
@@ -13710,28 +13710,28 @@
         <p:spPr>
           <a:xfrm>
             <a:off x="502920" y="822960"/>
-            <a:ext cx="8138160" cy="640080"/>
-          </a:xfrm>
-          <a:prstGeom prst="rect">
-            <a:avLst/>
-          </a:prstGeom>
-          <a:noFill/>
-          <a:ln/>
-        </p:spPr>
-        <p:txBody>
-          <a:bodyPr wrap="square" lIns="0" tIns="0" rIns="0" bIns="0" rtlCol="0" anchor="ctr">
-            <a:normAutofit/>
-          </a:bodyPr>
-          <a:lstStyle/>
-          <a:p>
-            <a:pPr algn="ctr" indent="0" marL="0">
-              <a:lnSpc>
-                <a:spcPct val="125000"/>
-              </a:lnSpc>
-              <a:buNone/>
-            </a:pPr>
-            <a:r>
-              <a:rPr lang="en-US" sz="1520" b="1" dirty="0">
+            <a:ext cx="8138160" cy="530352"/>
+          </a:xfrm>
+          <a:prstGeom prst="rect">
+            <a:avLst/>
+          </a:prstGeom>
+          <a:noFill/>
+          <a:ln/>
+        </p:spPr>
+        <p:txBody>
+          <a:bodyPr wrap="square" lIns="0" tIns="0" rIns="0" bIns="0" rtlCol="0" anchor="ctr">
+            <a:normAutofit/>
+          </a:bodyPr>
+          <a:lstStyle/>
+          <a:p>
+            <a:pPr algn="ctr" indent="0" marL="0">
+              <a:lnSpc>
+                <a:spcPct val="125000"/>
+              </a:lnSpc>
+              <a:buNone/>
+            </a:pPr>
+            <a:r>
+              <a:rPr lang="en-US" sz="1520" dirty="0">
                 <a:solidFill>
                   <a:srgbClr val="25194B"/>
                 </a:solidFill>
@@ -13739,7 +13739,7 @@
                 <a:ea typeface="Cambria" pitchFamily="34" charset="-122"/>
                 <a:cs typeface="Cambria" pitchFamily="34" charset="-120"/>
               </a:rPr>
-              <a:t>Để kiểm tra kết quả không phụ thuộc vào một mô hình định vị duy nhất, executability được tính lại bằng 4 mô hình: UGround, UI-Venus, Phi-Ground và Phi-4.</a:t>
+              <a:t>Executability được tính lại bằng bốn mô hình định vị để kiểm tra độ ổn định của kết quả.</a:t>
             </a:r>
             <a:endParaRPr lang="en-US" sz="1520" dirty="0"/>
           </a:p>
@@ -13753,8 +13753,8 @@
         </p:nvSpPr>
         <p:spPr>
           <a:xfrm>
-            <a:off x="1051560" y="1572768"/>
-            <a:ext cx="7040880" cy="502920"/>
+            <a:off x="566928" y="1481328"/>
+            <a:ext cx="7680960" cy="512064"/>
           </a:xfrm>
           <a:prstGeom prst="rect">
             <a:avLst/>
@@ -13780,8 +13780,8 @@
         </p:nvSpPr>
         <p:spPr>
           <a:xfrm>
-            <a:off x="1051560" y="1572768"/>
-            <a:ext cx="2834640" cy="502920"/>
+            <a:off x="566928" y="1481328"/>
+            <a:ext cx="2011680" cy="512064"/>
           </a:xfrm>
           <a:prstGeom prst="rect">
             <a:avLst/>
@@ -13802,7 +13802,7 @@
               <a:buNone/>
             </a:pPr>
             <a:r>
-              <a:rPr lang="en-US" sz="1320" b="1" dirty="0">
+              <a:rPr lang="en-US" sz="1240" b="1" dirty="0">
                 <a:solidFill>
                   <a:srgbClr val="FFFFFF"/>
                 </a:solidFill>
@@ -13810,7 +13810,227 @@
                 <a:ea typeface="Cambria" pitchFamily="34" charset="-122"/>
                 <a:cs typeface="Cambria" pitchFamily="34" charset="-120"/>
               </a:rPr>
-              <a:t>Mô hình định vị</a:t>
+              <a:t>Mô hình</a:t>
+            </a:r>
+            <a:endParaRPr lang="en-US" sz="1240" dirty="0"/>
+          </a:p>
+        </p:txBody>
+      </p:sp>
+      <p:sp>
+        <p:nvSpPr>
+          <p:cNvPr id="7" name="Text 5"/>
+          <p:cNvSpPr/>
+          <p:nvPr/>
+        </p:nvSpPr>
+        <p:spPr>
+          <a:xfrm>
+            <a:off x="2578608" y="1481328"/>
+            <a:ext cx="1417320" cy="512064"/>
+          </a:xfrm>
+          <a:prstGeom prst="rect">
+            <a:avLst/>
+          </a:prstGeom>
+          <a:noFill/>
+          <a:ln/>
+        </p:spPr>
+        <p:txBody>
+          <a:bodyPr wrap="square" lIns="0" tIns="0" rIns="0" bIns="0" rtlCol="0" anchor="ctr">
+            <a:normAutofit/>
+          </a:bodyPr>
+          <a:lstStyle/>
+          <a:p>
+            <a:pPr algn="ctr" indent="0" marL="0">
+              <a:lnSpc>
+                <a:spcPct val="125000"/>
+              </a:lnSpc>
+              <a:buNone/>
+            </a:pPr>
+            <a:r>
+              <a:rPr lang="en-US" sz="1240" b="1" dirty="0">
+                <a:solidFill>
+                  <a:srgbClr val="FFFFFF"/>
+                </a:solidFill>
+                <a:latin typeface="Cambria" pitchFamily="34" charset="0"/>
+                <a:ea typeface="Cambria" pitchFamily="34" charset="-122"/>
+                <a:cs typeface="Cambria" pitchFamily="34" charset="-120"/>
+              </a:rPr>
+              <a:t>UGround</a:t>
+            </a:r>
+            <a:endParaRPr lang="en-US" sz="1240" dirty="0"/>
+          </a:p>
+        </p:txBody>
+      </p:sp>
+      <p:sp>
+        <p:nvSpPr>
+          <p:cNvPr id="8" name="Text 6"/>
+          <p:cNvSpPr/>
+          <p:nvPr/>
+        </p:nvSpPr>
+        <p:spPr>
+          <a:xfrm>
+            <a:off x="3995928" y="1481328"/>
+            <a:ext cx="1417320" cy="512064"/>
+          </a:xfrm>
+          <a:prstGeom prst="rect">
+            <a:avLst/>
+          </a:prstGeom>
+          <a:noFill/>
+          <a:ln/>
+        </p:spPr>
+        <p:txBody>
+          <a:bodyPr wrap="square" lIns="0" tIns="0" rIns="0" bIns="0" rtlCol="0" anchor="ctr">
+            <a:normAutofit/>
+          </a:bodyPr>
+          <a:lstStyle/>
+          <a:p>
+            <a:pPr algn="ctr" indent="0" marL="0">
+              <a:lnSpc>
+                <a:spcPct val="125000"/>
+              </a:lnSpc>
+              <a:buNone/>
+            </a:pPr>
+            <a:r>
+              <a:rPr lang="en-US" sz="1240" b="1" dirty="0">
+                <a:solidFill>
+                  <a:srgbClr val="FFFFFF"/>
+                </a:solidFill>
+                <a:latin typeface="Cambria" pitchFamily="34" charset="0"/>
+                <a:ea typeface="Cambria" pitchFamily="34" charset="-122"/>
+                <a:cs typeface="Cambria" pitchFamily="34" charset="-120"/>
+              </a:rPr>
+              <a:t>UI-Venus</a:t>
+            </a:r>
+            <a:endParaRPr lang="en-US" sz="1240" dirty="0"/>
+          </a:p>
+        </p:txBody>
+      </p:sp>
+      <p:sp>
+        <p:nvSpPr>
+          <p:cNvPr id="9" name="Text 7"/>
+          <p:cNvSpPr/>
+          <p:nvPr/>
+        </p:nvSpPr>
+        <p:spPr>
+          <a:xfrm>
+            <a:off x="5413248" y="1481328"/>
+            <a:ext cx="1417320" cy="512064"/>
+          </a:xfrm>
+          <a:prstGeom prst="rect">
+            <a:avLst/>
+          </a:prstGeom>
+          <a:noFill/>
+          <a:ln/>
+        </p:spPr>
+        <p:txBody>
+          <a:bodyPr wrap="square" lIns="0" tIns="0" rIns="0" bIns="0" rtlCol="0" anchor="ctr">
+            <a:normAutofit/>
+          </a:bodyPr>
+          <a:lstStyle/>
+          <a:p>
+            <a:pPr algn="ctr" indent="0" marL="0">
+              <a:lnSpc>
+                <a:spcPct val="125000"/>
+              </a:lnSpc>
+              <a:buNone/>
+            </a:pPr>
+            <a:r>
+              <a:rPr lang="en-US" sz="1240" b="1" dirty="0">
+                <a:solidFill>
+                  <a:srgbClr val="FFFFFF"/>
+                </a:solidFill>
+                <a:latin typeface="Cambria" pitchFamily="34" charset="0"/>
+                <a:ea typeface="Cambria" pitchFamily="34" charset="-122"/>
+                <a:cs typeface="Cambria" pitchFamily="34" charset="-120"/>
+              </a:rPr>
+              <a:t>Phi-Ground</a:t>
+            </a:r>
+            <a:endParaRPr lang="en-US" sz="1240" dirty="0"/>
+          </a:p>
+        </p:txBody>
+      </p:sp>
+      <p:sp>
+        <p:nvSpPr>
+          <p:cNvPr id="10" name="Text 8"/>
+          <p:cNvSpPr/>
+          <p:nvPr/>
+        </p:nvSpPr>
+        <p:spPr>
+          <a:xfrm>
+            <a:off x="6830568" y="1481328"/>
+            <a:ext cx="1417320" cy="512064"/>
+          </a:xfrm>
+          <a:prstGeom prst="rect">
+            <a:avLst/>
+          </a:prstGeom>
+          <a:noFill/>
+          <a:ln/>
+        </p:spPr>
+        <p:txBody>
+          <a:bodyPr wrap="square" lIns="0" tIns="0" rIns="0" bIns="0" rtlCol="0" anchor="ctr">
+            <a:normAutofit/>
+          </a:bodyPr>
+          <a:lstStyle/>
+          <a:p>
+            <a:pPr algn="ctr" indent="0" marL="0">
+              <a:lnSpc>
+                <a:spcPct val="125000"/>
+              </a:lnSpc>
+              <a:buNone/>
+            </a:pPr>
+            <a:r>
+              <a:rPr lang="en-US" sz="1240" b="1" dirty="0">
+                <a:solidFill>
+                  <a:srgbClr val="FFFFFF"/>
+                </a:solidFill>
+                <a:latin typeface="Cambria" pitchFamily="34" charset="0"/>
+                <a:ea typeface="Cambria" pitchFamily="34" charset="-122"/>
+                <a:cs typeface="Cambria" pitchFamily="34" charset="-120"/>
+              </a:rPr>
+              <a:t>Phi-4</a:t>
+            </a:r>
+            <a:endParaRPr lang="en-US" sz="1240" dirty="0"/>
+          </a:p>
+        </p:txBody>
+      </p:sp>
+      <p:sp>
+        <p:nvSpPr>
+          <p:cNvPr id="11" name="Text 9"/>
+          <p:cNvSpPr/>
+          <p:nvPr/>
+        </p:nvSpPr>
+        <p:spPr>
+          <a:xfrm>
+            <a:off x="566928" y="1993392"/>
+            <a:ext cx="2011680" cy="621792"/>
+          </a:xfrm>
+          <a:prstGeom prst="rect">
+            <a:avLst/>
+          </a:prstGeom>
+          <a:noFill/>
+          <a:ln/>
+        </p:spPr>
+        <p:txBody>
+          <a:bodyPr wrap="square" lIns="0" tIns="0" rIns="0" bIns="0" rtlCol="0" anchor="ctr">
+            <a:normAutofit/>
+          </a:bodyPr>
+          <a:lstStyle/>
+          <a:p>
+            <a:pPr algn="l" indent="0" marL="0">
+              <a:lnSpc>
+                <a:spcPct val="125000"/>
+              </a:lnSpc>
+              <a:buNone/>
+            </a:pPr>
+            <a:r>
+              <a:rPr lang="en-US" sz="1320" dirty="0">
+                <a:solidFill>
+                  <a:srgbClr val="1A1A1A"/>
+                </a:solidFill>
+                <a:latin typeface="Cambria" pitchFamily="34" charset="0"/>
+                <a:ea typeface="Cambria" pitchFamily="34" charset="-122"/>
+                <a:cs typeface="Cambria" pitchFamily="34" charset="-120"/>
+              </a:rPr>
+              <a:t>Base</a:t>
             </a:r>
             <a:endParaRPr lang="en-US" sz="1320" dirty="0"/>
           </a:p>
@@ -13818,43 +14038,43 @@
       </p:sp>
       <p:sp>
         <p:nvSpPr>
-          <p:cNvPr id="7" name="Text 5"/>
-          <p:cNvSpPr/>
-          <p:nvPr/>
-        </p:nvSpPr>
-        <p:spPr>
-          <a:xfrm>
-            <a:off x="3886200" y="1572768"/>
-            <a:ext cx="1828800" cy="502920"/>
-          </a:xfrm>
-          <a:prstGeom prst="rect">
-            <a:avLst/>
-          </a:prstGeom>
-          <a:noFill/>
-          <a:ln/>
-        </p:spPr>
-        <p:txBody>
-          <a:bodyPr wrap="square" lIns="0" tIns="0" rIns="0" bIns="0" rtlCol="0" anchor="ctr">
-            <a:normAutofit/>
-          </a:bodyPr>
-          <a:lstStyle/>
-          <a:p>
-            <a:pPr algn="ctr" indent="0" marL="0">
-              <a:lnSpc>
-                <a:spcPct val="125000"/>
-              </a:lnSpc>
-              <a:buNone/>
-            </a:pPr>
-            <a:r>
-              <a:rPr lang="en-US" sz="1320" b="1" dirty="0">
-                <a:solidFill>
-                  <a:srgbClr val="FFFFFF"/>
-                </a:solidFill>
-                <a:latin typeface="Cambria" pitchFamily="34" charset="0"/>
-                <a:ea typeface="Cambria" pitchFamily="34" charset="-122"/>
-                <a:cs typeface="Cambria" pitchFamily="34" charset="-120"/>
-              </a:rPr>
-              <a:t>GRPO-SPICE − baseline S1</a:t>
+          <p:cNvPr id="12" name="Text 10"/>
+          <p:cNvSpPr/>
+          <p:nvPr/>
+        </p:nvSpPr>
+        <p:spPr>
+          <a:xfrm>
+            <a:off x="2578608" y="1993392"/>
+            <a:ext cx="1417320" cy="621792"/>
+          </a:xfrm>
+          <a:prstGeom prst="rect">
+            <a:avLst/>
+          </a:prstGeom>
+          <a:noFill/>
+          <a:ln/>
+        </p:spPr>
+        <p:txBody>
+          <a:bodyPr wrap="square" lIns="0" tIns="0" rIns="0" bIns="0" rtlCol="0" anchor="ctr">
+            <a:normAutofit/>
+          </a:bodyPr>
+          <a:lstStyle/>
+          <a:p>
+            <a:pPr algn="ctr" indent="0" marL="0">
+              <a:lnSpc>
+                <a:spcPct val="125000"/>
+              </a:lnSpc>
+              <a:buNone/>
+            </a:pPr>
+            <a:r>
+              <a:rPr lang="en-US" sz="1320" dirty="0">
+                <a:solidFill>
+                  <a:srgbClr val="1A1A1A"/>
+                </a:solidFill>
+                <a:latin typeface="Cambria" pitchFamily="34" charset="0"/>
+                <a:ea typeface="Cambria" pitchFamily="34" charset="-122"/>
+                <a:cs typeface="Cambria" pitchFamily="34" charset="-120"/>
+              </a:rPr>
+              <a:t>47,59</a:t>
             </a:r>
             <a:endParaRPr lang="en-US" sz="1320" dirty="0"/>
           </a:p>
@@ -13862,43 +14082,43 @@
       </p:sp>
       <p:sp>
         <p:nvSpPr>
-          <p:cNvPr id="8" name="Text 6"/>
-          <p:cNvSpPr/>
-          <p:nvPr/>
-        </p:nvSpPr>
-        <p:spPr>
-          <a:xfrm>
-            <a:off x="5715000" y="1572768"/>
-            <a:ext cx="2377440" cy="502920"/>
-          </a:xfrm>
-          <a:prstGeom prst="rect">
-            <a:avLst/>
-          </a:prstGeom>
-          <a:noFill/>
-          <a:ln/>
-        </p:spPr>
-        <p:txBody>
-          <a:bodyPr wrap="square" lIns="0" tIns="0" rIns="0" bIns="0" rtlCol="0" anchor="ctr">
-            <a:normAutofit/>
-          </a:bodyPr>
-          <a:lstStyle/>
-          <a:p>
-            <a:pPr algn="ctr" indent="0" marL="0">
-              <a:lnSpc>
-                <a:spcPct val="125000"/>
-              </a:lnSpc>
-              <a:buNone/>
-            </a:pPr>
-            <a:r>
-              <a:rPr lang="en-US" sz="1320" b="1" dirty="0">
-                <a:solidFill>
-                  <a:srgbClr val="FFFFFF"/>
-                </a:solidFill>
-                <a:latin typeface="Cambria" pitchFamily="34" charset="0"/>
-                <a:ea typeface="Cambria" pitchFamily="34" charset="-122"/>
-                <a:cs typeface="Cambria" pitchFamily="34" charset="-120"/>
-              </a:rPr>
-              <a:t>KTC 95%</a:t>
+          <p:cNvPr id="13" name="Text 11"/>
+          <p:cNvSpPr/>
+          <p:nvPr/>
+        </p:nvSpPr>
+        <p:spPr>
+          <a:xfrm>
+            <a:off x="3995928" y="1993392"/>
+            <a:ext cx="1417320" cy="621792"/>
+          </a:xfrm>
+          <a:prstGeom prst="rect">
+            <a:avLst/>
+          </a:prstGeom>
+          <a:noFill/>
+          <a:ln/>
+        </p:spPr>
+        <p:txBody>
+          <a:bodyPr wrap="square" lIns="0" tIns="0" rIns="0" bIns="0" rtlCol="0" anchor="ctr">
+            <a:normAutofit/>
+          </a:bodyPr>
+          <a:lstStyle/>
+          <a:p>
+            <a:pPr algn="ctr" indent="0" marL="0">
+              <a:lnSpc>
+                <a:spcPct val="125000"/>
+              </a:lnSpc>
+              <a:buNone/>
+            </a:pPr>
+            <a:r>
+              <a:rPr lang="en-US" sz="1320" dirty="0">
+                <a:solidFill>
+                  <a:srgbClr val="1A1A1A"/>
+                </a:solidFill>
+                <a:latin typeface="Cambria" pitchFamily="34" charset="0"/>
+                <a:ea typeface="Cambria" pitchFamily="34" charset="-122"/>
+                <a:cs typeface="Cambria" pitchFamily="34" charset="-120"/>
+              </a:rPr>
+              <a:t>—</a:t>
             </a:r>
             <a:endParaRPr lang="en-US" sz="1320" dirty="0"/>
           </a:p>
@@ -13906,35 +14126,35 @@
       </p:sp>
       <p:sp>
         <p:nvSpPr>
-          <p:cNvPr id="9" name="Text 7"/>
-          <p:cNvSpPr/>
-          <p:nvPr/>
-        </p:nvSpPr>
-        <p:spPr>
-          <a:xfrm>
-            <a:off x="1051560" y="2075688"/>
-            <a:ext cx="2834640" cy="621792"/>
-          </a:xfrm>
-          <a:prstGeom prst="rect">
-            <a:avLst/>
-          </a:prstGeom>
-          <a:noFill/>
-          <a:ln/>
-        </p:spPr>
-        <p:txBody>
-          <a:bodyPr wrap="square" lIns="0" tIns="0" rIns="0" bIns="0" rtlCol="0" anchor="ctr">
-            <a:normAutofit/>
-          </a:bodyPr>
-          <a:lstStyle/>
-          <a:p>
-            <a:pPr algn="l" indent="0" marL="0">
-              <a:lnSpc>
-                <a:spcPct val="125000"/>
-              </a:lnSpc>
-              <a:buNone/>
-            </a:pPr>
-            <a:r>
-              <a:rPr lang="en-US" sz="1370" dirty="0">
+          <p:cNvPr id="14" name="Text 12"/>
+          <p:cNvSpPr/>
+          <p:nvPr/>
+        </p:nvSpPr>
+        <p:spPr>
+          <a:xfrm>
+            <a:off x="5413248" y="1993392"/>
+            <a:ext cx="1417320" cy="621792"/>
+          </a:xfrm>
+          <a:prstGeom prst="rect">
+            <a:avLst/>
+          </a:prstGeom>
+          <a:noFill/>
+          <a:ln/>
+        </p:spPr>
+        <p:txBody>
+          <a:bodyPr wrap="square" lIns="0" tIns="0" rIns="0" bIns="0" rtlCol="0" anchor="ctr">
+            <a:normAutofit/>
+          </a:bodyPr>
+          <a:lstStyle/>
+          <a:p>
+            <a:pPr algn="ctr" indent="0" marL="0">
+              <a:lnSpc>
+                <a:spcPct val="125000"/>
+              </a:lnSpc>
+              <a:buNone/>
+            </a:pPr>
+            <a:r>
+              <a:rPr lang="en-US" sz="1320" dirty="0">
                 <a:solidFill>
                   <a:srgbClr val="1A1A1A"/>
                 </a:solidFill>
@@ -13942,87 +14162,43 @@
                 <a:ea typeface="Cambria" pitchFamily="34" charset="-122"/>
                 <a:cs typeface="Cambria" pitchFamily="34" charset="-120"/>
               </a:rPr>
-              <a:t>UGround</a:t>
-            </a:r>
-            <a:endParaRPr lang="en-US" sz="1370" dirty="0"/>
-          </a:p>
-        </p:txBody>
-      </p:sp>
-      <p:sp>
-        <p:nvSpPr>
-          <p:cNvPr id="10" name="Text 8"/>
-          <p:cNvSpPr/>
-          <p:nvPr/>
-        </p:nvSpPr>
-        <p:spPr>
-          <a:xfrm>
-            <a:off x="3886200" y="2075688"/>
-            <a:ext cx="1828800" cy="621792"/>
-          </a:xfrm>
-          <a:prstGeom prst="rect">
-            <a:avLst/>
-          </a:prstGeom>
-          <a:noFill/>
-          <a:ln/>
-        </p:spPr>
-        <p:txBody>
-          <a:bodyPr wrap="square" lIns="0" tIns="0" rIns="0" bIns="0" rtlCol="0" anchor="ctr">
-            <a:normAutofit/>
-          </a:bodyPr>
-          <a:lstStyle/>
-          <a:p>
-            <a:pPr algn="ctr" indent="0" marL="0">
-              <a:lnSpc>
-                <a:spcPct val="125000"/>
-              </a:lnSpc>
-              <a:buNone/>
-            </a:pPr>
-            <a:r>
-              <a:rPr lang="en-US" sz="1370" b="1" dirty="0">
-                <a:solidFill>
-                  <a:srgbClr val="4F417A"/>
-                </a:solidFill>
-                <a:latin typeface="Cambria" pitchFamily="34" charset="0"/>
-                <a:ea typeface="Cambria" pitchFamily="34" charset="-122"/>
-                <a:cs typeface="Cambria" pitchFamily="34" charset="-120"/>
-              </a:rPr>
-              <a:t>+1,55</a:t>
-            </a:r>
-            <a:endParaRPr lang="en-US" sz="1370" dirty="0"/>
-          </a:p>
-        </p:txBody>
-      </p:sp>
-      <p:sp>
-        <p:nvSpPr>
-          <p:cNvPr id="11" name="Text 9"/>
-          <p:cNvSpPr/>
-          <p:nvPr/>
-        </p:nvSpPr>
-        <p:spPr>
-          <a:xfrm>
-            <a:off x="5715000" y="2075688"/>
-            <a:ext cx="2377440" cy="621792"/>
-          </a:xfrm>
-          <a:prstGeom prst="rect">
-            <a:avLst/>
-          </a:prstGeom>
-          <a:noFill/>
-          <a:ln/>
-        </p:spPr>
-        <p:txBody>
-          <a:bodyPr wrap="square" lIns="0" tIns="0" rIns="0" bIns="0" rtlCol="0" anchor="ctr">
-            <a:normAutofit/>
-          </a:bodyPr>
-          <a:lstStyle/>
-          <a:p>
-            <a:pPr algn="ctr" indent="0" marL="0">
-              <a:lnSpc>
-                <a:spcPct val="125000"/>
-              </a:lnSpc>
-              <a:buNone/>
-            </a:pPr>
-            <a:r>
-              <a:rPr lang="en-US" sz="1370" dirty="0">
+              <a:t>40,80</a:t>
+            </a:r>
+            <a:endParaRPr lang="en-US" sz="1320" dirty="0"/>
+          </a:p>
+        </p:txBody>
+      </p:sp>
+      <p:sp>
+        <p:nvSpPr>
+          <p:cNvPr id="15" name="Text 13"/>
+          <p:cNvSpPr/>
+          <p:nvPr/>
+        </p:nvSpPr>
+        <p:spPr>
+          <a:xfrm>
+            <a:off x="6830568" y="1993392"/>
+            <a:ext cx="1417320" cy="621792"/>
+          </a:xfrm>
+          <a:prstGeom prst="rect">
+            <a:avLst/>
+          </a:prstGeom>
+          <a:noFill/>
+          <a:ln/>
+        </p:spPr>
+        <p:txBody>
+          <a:bodyPr wrap="square" lIns="0" tIns="0" rIns="0" bIns="0" rtlCol="0" anchor="ctr">
+            <a:normAutofit/>
+          </a:bodyPr>
+          <a:lstStyle/>
+          <a:p>
+            <a:pPr algn="ctr" indent="0" marL="0">
+              <a:lnSpc>
+                <a:spcPct val="125000"/>
+              </a:lnSpc>
+              <a:buNone/>
+            </a:pPr>
+            <a:r>
+              <a:rPr lang="en-US" sz="1320" dirty="0">
                 <a:solidFill>
                   <a:srgbClr val="1A1A1A"/>
                 </a:solidFill>
@@ -14030,22 +14206,22 @@
                 <a:ea typeface="Cambria" pitchFamily="34" charset="-122"/>
                 <a:cs typeface="Cambria" pitchFamily="34" charset="-120"/>
               </a:rPr>
-              <a:t>[+0,80; +2,33]</a:t>
-            </a:r>
-            <a:endParaRPr lang="en-US" sz="1370" dirty="0"/>
-          </a:p>
-        </p:txBody>
-      </p:sp>
-      <p:sp>
-        <p:nvSpPr>
-          <p:cNvPr id="12" name="Shape 10"/>
-          <p:cNvSpPr/>
-          <p:nvPr/>
-        </p:nvSpPr>
-        <p:spPr>
-          <a:xfrm>
-            <a:off x="1051560" y="2697480"/>
-            <a:ext cx="7040880" cy="0"/>
+              <a:t>38,23</a:t>
+            </a:r>
+            <a:endParaRPr lang="en-US" sz="1320" dirty="0"/>
+          </a:p>
+        </p:txBody>
+      </p:sp>
+      <p:sp>
+        <p:nvSpPr>
+          <p:cNvPr id="16" name="Shape 14"/>
+          <p:cNvSpPr/>
+          <p:nvPr/>
+        </p:nvSpPr>
+        <p:spPr>
+          <a:xfrm>
+            <a:off x="566928" y="2615184"/>
+            <a:ext cx="7680960" cy="0"/>
           </a:xfrm>
           <a:prstGeom prst="line">
             <a:avLst/>
@@ -14062,14 +14238,14 @@
       </p:sp>
       <p:sp>
         <p:nvSpPr>
-          <p:cNvPr id="13" name="Text 11"/>
-          <p:cNvSpPr/>
-          <p:nvPr/>
-        </p:nvSpPr>
-        <p:spPr>
-          <a:xfrm>
-            <a:off x="1051560" y="2697480"/>
-            <a:ext cx="2834640" cy="621792"/>
+          <p:cNvPr id="17" name="Text 15"/>
+          <p:cNvSpPr/>
+          <p:nvPr/>
+        </p:nvSpPr>
+        <p:spPr>
+          <a:xfrm>
+            <a:off x="566928" y="2615184"/>
+            <a:ext cx="2011680" cy="621792"/>
           </a:xfrm>
           <a:prstGeom prst="rect">
             <a:avLst/>
@@ -14090,7 +14266,7 @@
               <a:buNone/>
             </a:pPr>
             <a:r>
-              <a:rPr lang="en-US" sz="1370" dirty="0">
+              <a:rPr lang="en-US" sz="1320" dirty="0">
                 <a:solidFill>
                   <a:srgbClr val="1A1A1A"/>
                 </a:solidFill>
@@ -14098,87 +14274,43 @@
                 <a:ea typeface="Cambria" pitchFamily="34" charset="-122"/>
                 <a:cs typeface="Cambria" pitchFamily="34" charset="-120"/>
               </a:rPr>
-              <a:t>UI-Venus</a:t>
-            </a:r>
-            <a:endParaRPr lang="en-US" sz="1370" dirty="0"/>
-          </a:p>
-        </p:txBody>
-      </p:sp>
-      <p:sp>
-        <p:nvSpPr>
-          <p:cNvPr id="14" name="Text 12"/>
-          <p:cNvSpPr/>
-          <p:nvPr/>
-        </p:nvSpPr>
-        <p:spPr>
-          <a:xfrm>
-            <a:off x="3886200" y="2697480"/>
-            <a:ext cx="1828800" cy="621792"/>
-          </a:xfrm>
-          <a:prstGeom prst="rect">
-            <a:avLst/>
-          </a:prstGeom>
-          <a:noFill/>
-          <a:ln/>
-        </p:spPr>
-        <p:txBody>
-          <a:bodyPr wrap="square" lIns="0" tIns="0" rIns="0" bIns="0" rtlCol="0" anchor="ctr">
-            <a:normAutofit/>
-          </a:bodyPr>
-          <a:lstStyle/>
-          <a:p>
-            <a:pPr algn="ctr" indent="0" marL="0">
-              <a:lnSpc>
-                <a:spcPct val="125000"/>
-              </a:lnSpc>
-              <a:buNone/>
-            </a:pPr>
-            <a:r>
-              <a:rPr lang="en-US" sz="1370" b="1" dirty="0">
-                <a:solidFill>
-                  <a:srgbClr val="4F417A"/>
-                </a:solidFill>
-                <a:latin typeface="Cambria" pitchFamily="34" charset="0"/>
-                <a:ea typeface="Cambria" pitchFamily="34" charset="-122"/>
-                <a:cs typeface="Cambria" pitchFamily="34" charset="-120"/>
-              </a:rPr>
-              <a:t>+1,55</a:t>
-            </a:r>
-            <a:endParaRPr lang="en-US" sz="1370" dirty="0"/>
-          </a:p>
-        </p:txBody>
-      </p:sp>
-      <p:sp>
-        <p:nvSpPr>
-          <p:cNvPr id="15" name="Text 13"/>
-          <p:cNvSpPr/>
-          <p:nvPr/>
-        </p:nvSpPr>
-        <p:spPr>
-          <a:xfrm>
-            <a:off x="5715000" y="2697480"/>
-            <a:ext cx="2377440" cy="621792"/>
-          </a:xfrm>
-          <a:prstGeom prst="rect">
-            <a:avLst/>
-          </a:prstGeom>
-          <a:noFill/>
-          <a:ln/>
-        </p:spPr>
-        <p:txBody>
-          <a:bodyPr wrap="square" lIns="0" tIns="0" rIns="0" bIns="0" rtlCol="0" anchor="ctr">
-            <a:normAutofit/>
-          </a:bodyPr>
-          <a:lstStyle/>
-          <a:p>
-            <a:pPr algn="ctr" indent="0" marL="0">
-              <a:lnSpc>
-                <a:spcPct val="125000"/>
-              </a:lnSpc>
-              <a:buNone/>
-            </a:pPr>
-            <a:r>
-              <a:rPr lang="en-US" sz="1370" dirty="0">
+              <a:t>Baseline S1</a:t>
+            </a:r>
+            <a:endParaRPr lang="en-US" sz="1320" dirty="0"/>
+          </a:p>
+        </p:txBody>
+      </p:sp>
+      <p:sp>
+        <p:nvSpPr>
+          <p:cNvPr id="18" name="Text 16"/>
+          <p:cNvSpPr/>
+          <p:nvPr/>
+        </p:nvSpPr>
+        <p:spPr>
+          <a:xfrm>
+            <a:off x="2578608" y="2615184"/>
+            <a:ext cx="1417320" cy="621792"/>
+          </a:xfrm>
+          <a:prstGeom prst="rect">
+            <a:avLst/>
+          </a:prstGeom>
+          <a:noFill/>
+          <a:ln/>
+        </p:spPr>
+        <p:txBody>
+          <a:bodyPr wrap="square" lIns="0" tIns="0" rIns="0" bIns="0" rtlCol="0" anchor="ctr">
+            <a:normAutofit/>
+          </a:bodyPr>
+          <a:lstStyle/>
+          <a:p>
+            <a:pPr algn="ctr" indent="0" marL="0">
+              <a:lnSpc>
+                <a:spcPct val="125000"/>
+              </a:lnSpc>
+              <a:buNone/>
+            </a:pPr>
+            <a:r>
+              <a:rPr lang="en-US" sz="1320" dirty="0">
                 <a:solidFill>
                   <a:srgbClr val="1A1A1A"/>
                 </a:solidFill>
@@ -14186,22 +14318,154 @@
                 <a:ea typeface="Cambria" pitchFamily="34" charset="-122"/>
                 <a:cs typeface="Cambria" pitchFamily="34" charset="-120"/>
               </a:rPr>
-              <a:t>[+0,82; +2,30]</a:t>
-            </a:r>
-            <a:endParaRPr lang="en-US" sz="1370" dirty="0"/>
-          </a:p>
-        </p:txBody>
-      </p:sp>
-      <p:sp>
-        <p:nvSpPr>
-          <p:cNvPr id="16" name="Shape 14"/>
-          <p:cNvSpPr/>
-          <p:nvPr/>
-        </p:nvSpPr>
-        <p:spPr>
-          <a:xfrm>
-            <a:off x="1051560" y="3319272"/>
-            <a:ext cx="7040880" cy="0"/>
+              <a:t>59,11</a:t>
+            </a:r>
+            <a:endParaRPr lang="en-US" sz="1320" dirty="0"/>
+          </a:p>
+        </p:txBody>
+      </p:sp>
+      <p:sp>
+        <p:nvSpPr>
+          <p:cNvPr id="19" name="Text 17"/>
+          <p:cNvSpPr/>
+          <p:nvPr/>
+        </p:nvSpPr>
+        <p:spPr>
+          <a:xfrm>
+            <a:off x="3995928" y="2615184"/>
+            <a:ext cx="1417320" cy="621792"/>
+          </a:xfrm>
+          <a:prstGeom prst="rect">
+            <a:avLst/>
+          </a:prstGeom>
+          <a:noFill/>
+          <a:ln/>
+        </p:spPr>
+        <p:txBody>
+          <a:bodyPr wrap="square" lIns="0" tIns="0" rIns="0" bIns="0" rtlCol="0" anchor="ctr">
+            <a:normAutofit/>
+          </a:bodyPr>
+          <a:lstStyle/>
+          <a:p>
+            <a:pPr algn="ctr" indent="0" marL="0">
+              <a:lnSpc>
+                <a:spcPct val="125000"/>
+              </a:lnSpc>
+              <a:buNone/>
+            </a:pPr>
+            <a:r>
+              <a:rPr lang="en-US" sz="1320" dirty="0">
+                <a:solidFill>
+                  <a:srgbClr val="1A1A1A"/>
+                </a:solidFill>
+                <a:latin typeface="Cambria" pitchFamily="34" charset="0"/>
+                <a:ea typeface="Cambria" pitchFamily="34" charset="-122"/>
+                <a:cs typeface="Cambria" pitchFamily="34" charset="-120"/>
+              </a:rPr>
+              <a:t>54,51</a:t>
+            </a:r>
+            <a:endParaRPr lang="en-US" sz="1320" dirty="0"/>
+          </a:p>
+        </p:txBody>
+      </p:sp>
+      <p:sp>
+        <p:nvSpPr>
+          <p:cNvPr id="20" name="Text 18"/>
+          <p:cNvSpPr/>
+          <p:nvPr/>
+        </p:nvSpPr>
+        <p:spPr>
+          <a:xfrm>
+            <a:off x="5413248" y="2615184"/>
+            <a:ext cx="1417320" cy="621792"/>
+          </a:xfrm>
+          <a:prstGeom prst="rect">
+            <a:avLst/>
+          </a:prstGeom>
+          <a:noFill/>
+          <a:ln/>
+        </p:spPr>
+        <p:txBody>
+          <a:bodyPr wrap="square" lIns="0" tIns="0" rIns="0" bIns="0" rtlCol="0" anchor="ctr">
+            <a:normAutofit/>
+          </a:bodyPr>
+          <a:lstStyle/>
+          <a:p>
+            <a:pPr algn="ctr" indent="0" marL="0">
+              <a:lnSpc>
+                <a:spcPct val="125000"/>
+              </a:lnSpc>
+              <a:buNone/>
+            </a:pPr>
+            <a:r>
+              <a:rPr lang="en-US" sz="1320" dirty="0">
+                <a:solidFill>
+                  <a:srgbClr val="1A1A1A"/>
+                </a:solidFill>
+                <a:latin typeface="Cambria" pitchFamily="34" charset="0"/>
+                <a:ea typeface="Cambria" pitchFamily="34" charset="-122"/>
+                <a:cs typeface="Cambria" pitchFamily="34" charset="-120"/>
+              </a:rPr>
+              <a:t>46,96</a:t>
+            </a:r>
+            <a:endParaRPr lang="en-US" sz="1320" dirty="0"/>
+          </a:p>
+        </p:txBody>
+      </p:sp>
+      <p:sp>
+        <p:nvSpPr>
+          <p:cNvPr id="21" name="Text 19"/>
+          <p:cNvSpPr/>
+          <p:nvPr/>
+        </p:nvSpPr>
+        <p:spPr>
+          <a:xfrm>
+            <a:off x="6830568" y="2615184"/>
+            <a:ext cx="1417320" cy="621792"/>
+          </a:xfrm>
+          <a:prstGeom prst="rect">
+            <a:avLst/>
+          </a:prstGeom>
+          <a:noFill/>
+          <a:ln/>
+        </p:spPr>
+        <p:txBody>
+          <a:bodyPr wrap="square" lIns="0" tIns="0" rIns="0" bIns="0" rtlCol="0" anchor="ctr">
+            <a:normAutofit/>
+          </a:bodyPr>
+          <a:lstStyle/>
+          <a:p>
+            <a:pPr algn="ctr" indent="0" marL="0">
+              <a:lnSpc>
+                <a:spcPct val="125000"/>
+              </a:lnSpc>
+              <a:buNone/>
+            </a:pPr>
+            <a:r>
+              <a:rPr lang="en-US" sz="1320" dirty="0">
+                <a:solidFill>
+                  <a:srgbClr val="1A1A1A"/>
+                </a:solidFill>
+                <a:latin typeface="Cambria" pitchFamily="34" charset="0"/>
+                <a:ea typeface="Cambria" pitchFamily="34" charset="-122"/>
+                <a:cs typeface="Cambria" pitchFamily="34" charset="-120"/>
+              </a:rPr>
+              <a:t>44,63</a:t>
+            </a:r>
+            <a:endParaRPr lang="en-US" sz="1320" dirty="0"/>
+          </a:p>
+        </p:txBody>
+      </p:sp>
+      <p:sp>
+        <p:nvSpPr>
+          <p:cNvPr id="22" name="Shape 20"/>
+          <p:cNvSpPr/>
+          <p:nvPr/>
+        </p:nvSpPr>
+        <p:spPr>
+          <a:xfrm>
+            <a:off x="566928" y="3236976"/>
+            <a:ext cx="7680960" cy="0"/>
           </a:xfrm>
           <a:prstGeom prst="line">
             <a:avLst/>
@@ -14218,14 +14482,14 @@
       </p:sp>
       <p:sp>
         <p:nvSpPr>
-          <p:cNvPr id="17" name="Text 15"/>
-          <p:cNvSpPr/>
-          <p:nvPr/>
-        </p:nvSpPr>
-        <p:spPr>
-          <a:xfrm>
-            <a:off x="1051560" y="3319272"/>
-            <a:ext cx="2834640" cy="621792"/>
+          <p:cNvPr id="23" name="Text 21"/>
+          <p:cNvSpPr/>
+          <p:nvPr/>
+        </p:nvSpPr>
+        <p:spPr>
+          <a:xfrm>
+            <a:off x="566928" y="3236976"/>
+            <a:ext cx="2011680" cy="658368"/>
           </a:xfrm>
           <a:prstGeom prst="rect">
             <a:avLst/>
@@ -14246,51 +14510,7 @@
               <a:buNone/>
             </a:pPr>
             <a:r>
-              <a:rPr lang="en-US" sz="1370" dirty="0">
-                <a:solidFill>
-                  <a:srgbClr val="1A1A1A"/>
-                </a:solidFill>
-                <a:latin typeface="Cambria" pitchFamily="34" charset="0"/>
-                <a:ea typeface="Cambria" pitchFamily="34" charset="-122"/>
-                <a:cs typeface="Cambria" pitchFamily="34" charset="-120"/>
-              </a:rPr>
-              <a:t>Phi-Ground</a:t>
-            </a:r>
-            <a:endParaRPr lang="en-US" sz="1370" dirty="0"/>
-          </a:p>
-        </p:txBody>
-      </p:sp>
-      <p:sp>
-        <p:nvSpPr>
-          <p:cNvPr id="18" name="Text 16"/>
-          <p:cNvSpPr/>
-          <p:nvPr/>
-        </p:nvSpPr>
-        <p:spPr>
-          <a:xfrm>
-            <a:off x="3886200" y="3319272"/>
-            <a:ext cx="1828800" cy="621792"/>
-          </a:xfrm>
-          <a:prstGeom prst="rect">
-            <a:avLst/>
-          </a:prstGeom>
-          <a:noFill/>
-          <a:ln/>
-        </p:spPr>
-        <p:txBody>
-          <a:bodyPr wrap="square" lIns="0" tIns="0" rIns="0" bIns="0" rtlCol="0" anchor="ctr">
-            <a:normAutofit/>
-          </a:bodyPr>
-          <a:lstStyle/>
-          <a:p>
-            <a:pPr algn="ctr" indent="0" marL="0">
-              <a:lnSpc>
-                <a:spcPct val="125000"/>
-              </a:lnSpc>
-              <a:buNone/>
-            </a:pPr>
-            <a:r>
-              <a:rPr lang="en-US" sz="1370" b="1" dirty="0">
+              <a:rPr lang="en-US" sz="1320" b="1" dirty="0">
                 <a:solidFill>
                   <a:srgbClr val="4F417A"/>
                 </a:solidFill>
@@ -14298,66 +14518,198 @@
                 <a:ea typeface="Cambria" pitchFamily="34" charset="-122"/>
                 <a:cs typeface="Cambria" pitchFamily="34" charset="-120"/>
               </a:rPr>
-              <a:t>+0,78</a:t>
-            </a:r>
-            <a:endParaRPr lang="en-US" sz="1370" dirty="0"/>
-          </a:p>
-        </p:txBody>
-      </p:sp>
-      <p:sp>
-        <p:nvSpPr>
-          <p:cNvPr id="19" name="Text 17"/>
-          <p:cNvSpPr/>
-          <p:nvPr/>
-        </p:nvSpPr>
-        <p:spPr>
-          <a:xfrm>
-            <a:off x="5715000" y="3319272"/>
-            <a:ext cx="2377440" cy="621792"/>
-          </a:xfrm>
-          <a:prstGeom prst="rect">
-            <a:avLst/>
-          </a:prstGeom>
-          <a:noFill/>
-          <a:ln/>
-        </p:spPr>
-        <p:txBody>
-          <a:bodyPr wrap="square" lIns="0" tIns="0" rIns="0" bIns="0" rtlCol="0" anchor="ctr">
-            <a:normAutofit/>
-          </a:bodyPr>
-          <a:lstStyle/>
-          <a:p>
-            <a:pPr algn="ctr" indent="0" marL="0">
-              <a:lnSpc>
-                <a:spcPct val="125000"/>
-              </a:lnSpc>
-              <a:buNone/>
-            </a:pPr>
-            <a:r>
-              <a:rPr lang="en-US" sz="1370" dirty="0">
-                <a:solidFill>
-                  <a:srgbClr val="1A1A1A"/>
-                </a:solidFill>
-                <a:latin typeface="Cambria" pitchFamily="34" charset="0"/>
-                <a:ea typeface="Cambria" pitchFamily="34" charset="-122"/>
-                <a:cs typeface="Cambria" pitchFamily="34" charset="-120"/>
-              </a:rPr>
-              <a:t>[+0,05; +1,51]</a:t>
-            </a:r>
-            <a:endParaRPr lang="en-US" sz="1370" dirty="0"/>
-          </a:p>
-        </p:txBody>
-      </p:sp>
-      <p:sp>
-        <p:nvSpPr>
-          <p:cNvPr id="20" name="Shape 18"/>
-          <p:cNvSpPr/>
-          <p:nvPr/>
-        </p:nvSpPr>
-        <p:spPr>
-          <a:xfrm>
-            <a:off x="1051560" y="3941064"/>
-            <a:ext cx="7040880" cy="0"/>
+              <a:t>GRPO-SPICE</a:t>
+            </a:r>
+            <a:endParaRPr lang="en-US" sz="1320" dirty="0"/>
+          </a:p>
+        </p:txBody>
+      </p:sp>
+      <p:sp>
+        <p:nvSpPr>
+          <p:cNvPr id="24" name="Text 22"/>
+          <p:cNvSpPr/>
+          <p:nvPr/>
+        </p:nvSpPr>
+        <p:spPr>
+          <a:xfrm>
+            <a:off x="2578608" y="3236976"/>
+            <a:ext cx="1417320" cy="658368"/>
+          </a:xfrm>
+          <a:prstGeom prst="rect">
+            <a:avLst/>
+          </a:prstGeom>
+          <a:noFill/>
+          <a:ln/>
+        </p:spPr>
+        <p:txBody>
+          <a:bodyPr wrap="square" lIns="0" tIns="0" rIns="0" bIns="0" rtlCol="0" anchor="ctr">
+            <a:normAutofit/>
+          </a:bodyPr>
+          <a:lstStyle/>
+          <a:p>
+            <a:pPr algn="ctr" indent="0" marL="0">
+              <a:lnSpc>
+                <a:spcPct val="125000"/>
+              </a:lnSpc>
+              <a:buNone/>
+            </a:pPr>
+            <a:r>
+              <a:rPr lang="en-US" sz="1320" b="1" dirty="0">
+                <a:solidFill>
+                  <a:srgbClr val="4F417A"/>
+                </a:solidFill>
+                <a:latin typeface="Cambria" pitchFamily="34" charset="0"/>
+                <a:ea typeface="Cambria" pitchFamily="34" charset="-122"/>
+                <a:cs typeface="Cambria" pitchFamily="34" charset="-120"/>
+              </a:rPr>
+              <a:t>60,65</a:t>
+            </a:r>
+            <a:endParaRPr lang="en-US" sz="1320" dirty="0"/>
+          </a:p>
+        </p:txBody>
+      </p:sp>
+      <p:sp>
+        <p:nvSpPr>
+          <p:cNvPr id="25" name="Text 23"/>
+          <p:cNvSpPr/>
+          <p:nvPr/>
+        </p:nvSpPr>
+        <p:spPr>
+          <a:xfrm>
+            <a:off x="3995928" y="3236976"/>
+            <a:ext cx="1417320" cy="658368"/>
+          </a:xfrm>
+          <a:prstGeom prst="rect">
+            <a:avLst/>
+          </a:prstGeom>
+          <a:noFill/>
+          <a:ln/>
+        </p:spPr>
+        <p:txBody>
+          <a:bodyPr wrap="square" lIns="0" tIns="0" rIns="0" bIns="0" rtlCol="0" anchor="ctr">
+            <a:normAutofit/>
+          </a:bodyPr>
+          <a:lstStyle/>
+          <a:p>
+            <a:pPr algn="ctr" indent="0" marL="0">
+              <a:lnSpc>
+                <a:spcPct val="125000"/>
+              </a:lnSpc>
+              <a:buNone/>
+            </a:pPr>
+            <a:r>
+              <a:rPr lang="en-US" sz="1320" b="1" dirty="0">
+                <a:solidFill>
+                  <a:srgbClr val="4F417A"/>
+                </a:solidFill>
+                <a:latin typeface="Cambria" pitchFamily="34" charset="0"/>
+                <a:ea typeface="Cambria" pitchFamily="34" charset="-122"/>
+                <a:cs typeface="Cambria" pitchFamily="34" charset="-120"/>
+              </a:rPr>
+              <a:t>56,06</a:t>
+            </a:r>
+            <a:endParaRPr lang="en-US" sz="1320" dirty="0"/>
+          </a:p>
+        </p:txBody>
+      </p:sp>
+      <p:sp>
+        <p:nvSpPr>
+          <p:cNvPr id="26" name="Text 24"/>
+          <p:cNvSpPr/>
+          <p:nvPr/>
+        </p:nvSpPr>
+        <p:spPr>
+          <a:xfrm>
+            <a:off x="5413248" y="3236976"/>
+            <a:ext cx="1417320" cy="658368"/>
+          </a:xfrm>
+          <a:prstGeom prst="rect">
+            <a:avLst/>
+          </a:prstGeom>
+          <a:noFill/>
+          <a:ln/>
+        </p:spPr>
+        <p:txBody>
+          <a:bodyPr wrap="square" lIns="0" tIns="0" rIns="0" bIns="0" rtlCol="0" anchor="ctr">
+            <a:normAutofit/>
+          </a:bodyPr>
+          <a:lstStyle/>
+          <a:p>
+            <a:pPr algn="ctr" indent="0" marL="0">
+              <a:lnSpc>
+                <a:spcPct val="125000"/>
+              </a:lnSpc>
+              <a:buNone/>
+            </a:pPr>
+            <a:r>
+              <a:rPr lang="en-US" sz="1320" b="1" dirty="0">
+                <a:solidFill>
+                  <a:srgbClr val="4F417A"/>
+                </a:solidFill>
+                <a:latin typeface="Cambria" pitchFamily="34" charset="0"/>
+                <a:ea typeface="Cambria" pitchFamily="34" charset="-122"/>
+                <a:cs typeface="Cambria" pitchFamily="34" charset="-120"/>
+              </a:rPr>
+              <a:t>47,75</a:t>
+            </a:r>
+            <a:endParaRPr lang="en-US" sz="1320" dirty="0"/>
+          </a:p>
+        </p:txBody>
+      </p:sp>
+      <p:sp>
+        <p:nvSpPr>
+          <p:cNvPr id="27" name="Text 25"/>
+          <p:cNvSpPr/>
+          <p:nvPr/>
+        </p:nvSpPr>
+        <p:spPr>
+          <a:xfrm>
+            <a:off x="6830568" y="3236976"/>
+            <a:ext cx="1417320" cy="658368"/>
+          </a:xfrm>
+          <a:prstGeom prst="rect">
+            <a:avLst/>
+          </a:prstGeom>
+          <a:noFill/>
+          <a:ln/>
+        </p:spPr>
+        <p:txBody>
+          <a:bodyPr wrap="square" lIns="0" tIns="0" rIns="0" bIns="0" rtlCol="0" anchor="ctr">
+            <a:normAutofit/>
+          </a:bodyPr>
+          <a:lstStyle/>
+          <a:p>
+            <a:pPr algn="ctr" indent="0" marL="0">
+              <a:lnSpc>
+                <a:spcPct val="125000"/>
+              </a:lnSpc>
+              <a:buNone/>
+            </a:pPr>
+            <a:r>
+              <a:rPr lang="en-US" sz="1320" b="1" dirty="0">
+                <a:solidFill>
+                  <a:srgbClr val="4F417A"/>
+                </a:solidFill>
+                <a:latin typeface="Cambria" pitchFamily="34" charset="0"/>
+                <a:ea typeface="Cambria" pitchFamily="34" charset="-122"/>
+                <a:cs typeface="Cambria" pitchFamily="34" charset="-120"/>
+              </a:rPr>
+              <a:t>45,33</a:t>
+            </a:r>
+            <a:endParaRPr lang="en-US" sz="1320" dirty="0"/>
+          </a:p>
+        </p:txBody>
+      </p:sp>
+      <p:sp>
+        <p:nvSpPr>
+          <p:cNvPr id="28" name="Shape 26"/>
+          <p:cNvSpPr/>
+          <p:nvPr/>
+        </p:nvSpPr>
+        <p:spPr>
+          <a:xfrm>
+            <a:off x="566928" y="3895344"/>
+            <a:ext cx="7680960" cy="0"/>
           </a:xfrm>
           <a:prstGeom prst="line">
             <a:avLst/>
@@ -14374,14 +14726,14 @@
       </p:sp>
       <p:sp>
         <p:nvSpPr>
-          <p:cNvPr id="21" name="Text 19"/>
-          <p:cNvSpPr/>
-          <p:nvPr/>
-        </p:nvSpPr>
-        <p:spPr>
-          <a:xfrm>
-            <a:off x="1051560" y="3941064"/>
-            <a:ext cx="2834640" cy="621792"/>
+          <p:cNvPr id="29" name="Text 27"/>
+          <p:cNvSpPr/>
+          <p:nvPr/>
+        </p:nvSpPr>
+        <p:spPr>
+          <a:xfrm>
+            <a:off x="566928" y="3895344"/>
+            <a:ext cx="2011680" cy="658368"/>
           </a:xfrm>
           <a:prstGeom prst="rect">
             <a:avLst/>
@@ -14402,7 +14754,7 @@
               <a:buNone/>
             </a:pPr>
             <a:r>
-              <a:rPr lang="en-US" sz="1370" dirty="0">
+              <a:rPr lang="en-US" sz="1320" b="1" dirty="0">
                 <a:solidFill>
                   <a:srgbClr val="1A1A1A"/>
                 </a:solidFill>
@@ -14410,43 +14762,43 @@
                 <a:ea typeface="Cambria" pitchFamily="34" charset="-122"/>
                 <a:cs typeface="Cambria" pitchFamily="34" charset="-120"/>
               </a:rPr>
-              <a:t>Phi-4</a:t>
-            </a:r>
-            <a:endParaRPr lang="en-US" sz="1370" dirty="0"/>
-          </a:p>
-        </p:txBody>
-      </p:sp>
-      <p:sp>
-        <p:nvSpPr>
-          <p:cNvPr id="22" name="Text 20"/>
-          <p:cNvSpPr/>
-          <p:nvPr/>
-        </p:nvSpPr>
-        <p:spPr>
-          <a:xfrm>
-            <a:off x="3886200" y="3941064"/>
-            <a:ext cx="1828800" cy="621792"/>
-          </a:xfrm>
-          <a:prstGeom prst="rect">
-            <a:avLst/>
-          </a:prstGeom>
-          <a:noFill/>
-          <a:ln/>
-        </p:spPr>
-        <p:txBody>
-          <a:bodyPr wrap="square" lIns="0" tIns="0" rIns="0" bIns="0" rtlCol="0" anchor="ctr">
-            <a:normAutofit/>
-          </a:bodyPr>
-          <a:lstStyle/>
-          <a:p>
-            <a:pPr algn="ctr" indent="0" marL="0">
-              <a:lnSpc>
-                <a:spcPct val="125000"/>
-              </a:lnSpc>
-              <a:buNone/>
-            </a:pPr>
-            <a:r>
-              <a:rPr lang="en-US" sz="1370" b="1" dirty="0">
+              <a:t>Δ so với S1</a:t>
+            </a:r>
+            <a:endParaRPr lang="en-US" sz="1320" dirty="0"/>
+          </a:p>
+        </p:txBody>
+      </p:sp>
+      <p:sp>
+        <p:nvSpPr>
+          <p:cNvPr id="30" name="Text 28"/>
+          <p:cNvSpPr/>
+          <p:nvPr/>
+        </p:nvSpPr>
+        <p:spPr>
+          <a:xfrm>
+            <a:off x="2578608" y="3895344"/>
+            <a:ext cx="1417320" cy="658368"/>
+          </a:xfrm>
+          <a:prstGeom prst="rect">
+            <a:avLst/>
+          </a:prstGeom>
+          <a:noFill/>
+          <a:ln/>
+        </p:spPr>
+        <p:txBody>
+          <a:bodyPr wrap="square" lIns="0" tIns="0" rIns="0" bIns="0" rtlCol="0" anchor="ctr">
+            <a:normAutofit/>
+          </a:bodyPr>
+          <a:lstStyle/>
+          <a:p>
+            <a:pPr algn="ctr" indent="0" marL="0">
+              <a:lnSpc>
+                <a:spcPct val="125000"/>
+              </a:lnSpc>
+              <a:buNone/>
+            </a:pPr>
+            <a:r>
+              <a:rPr lang="en-US" sz="1320" b="1" dirty="0">
                 <a:solidFill>
                   <a:srgbClr val="4F417A"/>
                 </a:solidFill>
@@ -14454,112 +14806,175 @@
                 <a:ea typeface="Cambria" pitchFamily="34" charset="-122"/>
                 <a:cs typeface="Cambria" pitchFamily="34" charset="-120"/>
               </a:rPr>
+              <a:t>+1,55</a:t>
+            </a:r>
+            <a:endParaRPr lang="en-US" sz="1320" dirty="0"/>
+          </a:p>
+        </p:txBody>
+      </p:sp>
+      <p:sp>
+        <p:nvSpPr>
+          <p:cNvPr id="31" name="Text 29"/>
+          <p:cNvSpPr/>
+          <p:nvPr/>
+        </p:nvSpPr>
+        <p:spPr>
+          <a:xfrm>
+            <a:off x="3995928" y="3895344"/>
+            <a:ext cx="1417320" cy="658368"/>
+          </a:xfrm>
+          <a:prstGeom prst="rect">
+            <a:avLst/>
+          </a:prstGeom>
+          <a:noFill/>
+          <a:ln/>
+        </p:spPr>
+        <p:txBody>
+          <a:bodyPr wrap="square" lIns="0" tIns="0" rIns="0" bIns="0" rtlCol="0" anchor="ctr">
+            <a:normAutofit/>
+          </a:bodyPr>
+          <a:lstStyle/>
+          <a:p>
+            <a:pPr algn="ctr" indent="0" marL="0">
+              <a:lnSpc>
+                <a:spcPct val="125000"/>
+              </a:lnSpc>
+              <a:buNone/>
+            </a:pPr>
+            <a:r>
+              <a:rPr lang="en-US" sz="1320" b="1" dirty="0">
+                <a:solidFill>
+                  <a:srgbClr val="4F417A"/>
+                </a:solidFill>
+                <a:latin typeface="Cambria" pitchFamily="34" charset="0"/>
+                <a:ea typeface="Cambria" pitchFamily="34" charset="-122"/>
+                <a:cs typeface="Cambria" pitchFamily="34" charset="-120"/>
+              </a:rPr>
+              <a:t>+1,55</a:t>
+            </a:r>
+            <a:endParaRPr lang="en-US" sz="1320" dirty="0"/>
+          </a:p>
+        </p:txBody>
+      </p:sp>
+      <p:sp>
+        <p:nvSpPr>
+          <p:cNvPr id="32" name="Text 30"/>
+          <p:cNvSpPr/>
+          <p:nvPr/>
+        </p:nvSpPr>
+        <p:spPr>
+          <a:xfrm>
+            <a:off x="5413248" y="3895344"/>
+            <a:ext cx="1417320" cy="658368"/>
+          </a:xfrm>
+          <a:prstGeom prst="rect">
+            <a:avLst/>
+          </a:prstGeom>
+          <a:noFill/>
+          <a:ln/>
+        </p:spPr>
+        <p:txBody>
+          <a:bodyPr wrap="square" lIns="0" tIns="0" rIns="0" bIns="0" rtlCol="0" anchor="ctr">
+            <a:normAutofit/>
+          </a:bodyPr>
+          <a:lstStyle/>
+          <a:p>
+            <a:pPr algn="ctr" indent="0" marL="0">
+              <a:lnSpc>
+                <a:spcPct val="125000"/>
+              </a:lnSpc>
+              <a:buNone/>
+            </a:pPr>
+            <a:r>
+              <a:rPr lang="en-US" sz="1320" b="1" dirty="0">
+                <a:solidFill>
+                  <a:srgbClr val="4F417A"/>
+                </a:solidFill>
+                <a:latin typeface="Cambria" pitchFamily="34" charset="0"/>
+                <a:ea typeface="Cambria" pitchFamily="34" charset="-122"/>
+                <a:cs typeface="Cambria" pitchFamily="34" charset="-120"/>
+              </a:rPr>
+              <a:t>+0,78</a:t>
+            </a:r>
+            <a:endParaRPr lang="en-US" sz="1320" dirty="0"/>
+          </a:p>
+        </p:txBody>
+      </p:sp>
+      <p:sp>
+        <p:nvSpPr>
+          <p:cNvPr id="33" name="Text 31"/>
+          <p:cNvSpPr/>
+          <p:nvPr/>
+        </p:nvSpPr>
+        <p:spPr>
+          <a:xfrm>
+            <a:off x="6830568" y="3895344"/>
+            <a:ext cx="1417320" cy="658368"/>
+          </a:xfrm>
+          <a:prstGeom prst="rect">
+            <a:avLst/>
+          </a:prstGeom>
+          <a:noFill/>
+          <a:ln/>
+        </p:spPr>
+        <p:txBody>
+          <a:bodyPr wrap="square" lIns="0" tIns="0" rIns="0" bIns="0" rtlCol="0" anchor="ctr">
+            <a:normAutofit/>
+          </a:bodyPr>
+          <a:lstStyle/>
+          <a:p>
+            <a:pPr algn="ctr" indent="0" marL="0">
+              <a:lnSpc>
+                <a:spcPct val="125000"/>
+              </a:lnSpc>
+              <a:buNone/>
+            </a:pPr>
+            <a:r>
+              <a:rPr lang="en-US" sz="1320" b="1" dirty="0">
+                <a:solidFill>
+                  <a:srgbClr val="4F417A"/>
+                </a:solidFill>
+                <a:latin typeface="Cambria" pitchFamily="34" charset="0"/>
+                <a:ea typeface="Cambria" pitchFamily="34" charset="-122"/>
+                <a:cs typeface="Cambria" pitchFamily="34" charset="-120"/>
+              </a:rPr>
               <a:t>+0,69</a:t>
             </a:r>
-            <a:endParaRPr lang="en-US" sz="1370" dirty="0"/>
-          </a:p>
-        </p:txBody>
-      </p:sp>
-      <p:sp>
-        <p:nvSpPr>
-          <p:cNvPr id="23" name="Text 21"/>
-          <p:cNvSpPr/>
-          <p:nvPr/>
-        </p:nvSpPr>
-        <p:spPr>
-          <a:xfrm>
-            <a:off x="5715000" y="3941064"/>
-            <a:ext cx="2377440" cy="621792"/>
-          </a:xfrm>
-          <a:prstGeom prst="rect">
-            <a:avLst/>
-          </a:prstGeom>
-          <a:noFill/>
-          <a:ln/>
-        </p:spPr>
-        <p:txBody>
-          <a:bodyPr wrap="square" lIns="0" tIns="0" rIns="0" bIns="0" rtlCol="0" anchor="ctr">
-            <a:normAutofit/>
-          </a:bodyPr>
-          <a:lstStyle/>
-          <a:p>
-            <a:pPr algn="ctr" indent="0" marL="0">
-              <a:lnSpc>
-                <a:spcPct val="125000"/>
-              </a:lnSpc>
-              <a:buNone/>
-            </a:pPr>
-            <a:r>
-              <a:rPr lang="en-US" sz="1370" dirty="0">
-                <a:solidFill>
-                  <a:srgbClr val="1A1A1A"/>
-                </a:solidFill>
-                <a:latin typeface="Cambria" pitchFamily="34" charset="0"/>
-                <a:ea typeface="Cambria" pitchFamily="34" charset="-122"/>
-                <a:cs typeface="Cambria" pitchFamily="34" charset="-120"/>
-              </a:rPr>
-              <a:t>[+0,02; +1,40]</a:t>
-            </a:r>
-            <a:endParaRPr lang="en-US" sz="1370" dirty="0"/>
-          </a:p>
-        </p:txBody>
-      </p:sp>
-      <p:sp>
-        <p:nvSpPr>
-          <p:cNvPr id="24" name="Shape 22"/>
-          <p:cNvSpPr/>
-          <p:nvPr/>
-        </p:nvSpPr>
-        <p:spPr>
-          <a:xfrm>
-            <a:off x="1005840" y="4663440"/>
-            <a:ext cx="7132320" cy="768096"/>
-          </a:xfrm>
-          <a:prstGeom prst="roundRect">
-            <a:avLst/>
-          </a:prstGeom>
-          <a:solidFill>
-            <a:srgbClr val="F3F2F5"/>
-          </a:solidFill>
-          <a:ln w="12700">
-            <a:solidFill>
-              <a:srgbClr val="4F417A"/>
-            </a:solidFill>
-            <a:prstDash val="solid"/>
-          </a:ln>
-        </p:spPr>
-      </p:sp>
-      <p:sp>
-        <p:nvSpPr>
-          <p:cNvPr id="25" name="Text 23"/>
-          <p:cNvSpPr/>
-          <p:nvPr/>
-        </p:nvSpPr>
-        <p:spPr>
-          <a:xfrm>
-            <a:off x="1207008" y="4663440"/>
-            <a:ext cx="6729984" cy="768096"/>
-          </a:xfrm>
-          <a:prstGeom prst="rect">
-            <a:avLst/>
-          </a:prstGeom>
-          <a:noFill/>
-          <a:ln/>
-        </p:spPr>
-        <p:txBody>
-          <a:bodyPr wrap="square" lIns="0" tIns="0" rIns="0" bIns="0" rtlCol="0" anchor="ctr">
-            <a:normAutofit/>
-          </a:bodyPr>
-          <a:lstStyle/>
-          <a:p>
-            <a:pPr algn="ctr" indent="0" marL="0">
-              <a:lnSpc>
-                <a:spcPct val="125000"/>
-              </a:lnSpc>
-              <a:buNone/>
-            </a:pPr>
-            <a:r>
-              <a:rPr lang="en-US" sz="1550" b="1" dirty="0">
+            <a:endParaRPr lang="en-US" sz="1320" dirty="0"/>
+          </a:p>
+        </p:txBody>
+      </p:sp>
+      <p:sp>
+        <p:nvSpPr>
+          <p:cNvPr id="34" name="Text 32"/>
+          <p:cNvSpPr/>
+          <p:nvPr/>
+        </p:nvSpPr>
+        <p:spPr>
+          <a:xfrm>
+            <a:off x="502920" y="4846320"/>
+            <a:ext cx="8138160" cy="457200"/>
+          </a:xfrm>
+          <a:prstGeom prst="rect">
+            <a:avLst/>
+          </a:prstGeom>
+          <a:noFill/>
+          <a:ln/>
+        </p:spPr>
+        <p:txBody>
+          <a:bodyPr wrap="square" lIns="0" tIns="0" rIns="0" bIns="0" rtlCol="0" anchor="ctr">
+            <a:normAutofit/>
+          </a:bodyPr>
+          <a:lstStyle/>
+          <a:p>
+            <a:pPr algn="ctr" indent="0" marL="0">
+              <a:lnSpc>
+                <a:spcPct val="125000"/>
+              </a:lnSpc>
+              <a:buNone/>
+            </a:pPr>
+            <a:r>
+              <a:rPr lang="en-US" sz="1320" dirty="0">
                 <a:solidFill>
                   <a:srgbClr val="25194B"/>
                 </a:solidFill>
@@ -14567,15 +14982,15 @@
                 <a:ea typeface="Cambria" pitchFamily="34" charset="-122"/>
                 <a:cs typeface="Cambria" pitchFamily="34" charset="-120"/>
               </a:rPr>
-              <a:t>Cả 4 khoảng tin cậy đều nằm trên 0 → mức tăng không chỉ xuất hiện với một mô hình định vị.</a:t>
-            </a:r>
-            <a:endParaRPr lang="en-US" sz="1550" dirty="0"/>
-          </a:p>
-        </p:txBody>
-      </p:sp>
-      <p:sp>
-        <p:nvSpPr>
-          <p:cNvPr id="26" name="Shape 24"/>
+              <a:t>KTC 95% của bốn mức tăng đều nằm trên 0. Dấu —: chưa có kết quả Base đầy đủ.</a:t>
+            </a:r>
+            <a:endParaRPr lang="en-US" sz="1320" dirty="0"/>
+          </a:p>
+        </p:txBody>
+      </p:sp>
+      <p:sp>
+        <p:nvSpPr>
+          <p:cNvPr id="35" name="Shape 33"/>
           <p:cNvSpPr/>
           <p:nvPr/>
         </p:nvSpPr>
@@ -14602,7 +15017,7 @@
       </p:sp>
       <p:sp>
         <p:nvSpPr>
-          <p:cNvPr id="27" name="Shape 25"/>
+          <p:cNvPr id="36" name="Shape 34"/>
           <p:cNvSpPr/>
           <p:nvPr/>
         </p:nvSpPr>
@@ -14629,7 +15044,7 @@
       </p:sp>
       <p:sp>
         <p:nvSpPr>
-          <p:cNvPr id="28" name="Shape 26"/>
+          <p:cNvPr id="37" name="Shape 35"/>
           <p:cNvSpPr/>
           <p:nvPr/>
         </p:nvSpPr>
@@ -14656,7 +15071,7 @@
       </p:sp>
       <p:sp>
         <p:nvSpPr>
-          <p:cNvPr id="29" name="Shape 27"/>
+          <p:cNvPr id="38" name="Shape 36"/>
           <p:cNvSpPr/>
           <p:nvPr/>
         </p:nvSpPr>
@@ -14683,7 +15098,7 @@
       </p:sp>
       <p:sp>
         <p:nvSpPr>
-          <p:cNvPr id="30" name="Text 28"/>
+          <p:cNvPr id="39" name="Text 37"/>
           <p:cNvSpPr/>
           <p:nvPr/>
         </p:nvSpPr>
@@ -14725,7 +15140,7 @@
       </p:sp>
       <p:sp>
         <p:nvSpPr>
-          <p:cNvPr id="31" name="Text 29"/>
+          <p:cNvPr id="40" name="Text 38"/>
           <p:cNvSpPr/>
           <p:nvPr/>
         </p:nvSpPr>
@@ -14767,7 +15182,7 @@
       </p:sp>
       <p:sp>
         <p:nvSpPr>
-          <p:cNvPr id="32" name="Text 30"/>
+          <p:cNvPr id="41" name="Text 39"/>
           <p:cNvSpPr/>
           <p:nvPr/>
         </p:nvSpPr>
@@ -14809,7 +15224,7 @@
       </p:sp>
       <p:sp>
         <p:nvSpPr>
-          <p:cNvPr id="33" name="Text 31"/>
+          <p:cNvPr id="42" name="Text 40"/>
           <p:cNvSpPr/>
           <p:nvPr/>
         </p:nvSpPr>
@@ -14980,7 +15395,7 @@
               <a:buNone/>
             </a:pPr>
             <a:r>
-              <a:rPr lang="en-US" sz="1630" b="1" dirty="0">
+              <a:rPr lang="en-US" sz="1630" dirty="0">
                 <a:solidFill>
                   <a:srgbClr val="25194B"/>
                 </a:solidFill>
@@ -15265,7 +15680,7 @@
               <a:buNone/>
             </a:pPr>
             <a:r>
-              <a:rPr lang="en-US" sz="1800" b="1" dirty="0">
+              <a:rPr lang="en-US" sz="1800" dirty="0">
                 <a:solidFill>
                   <a:srgbClr val="25194B"/>
                 </a:solidFill>
@@ -15273,7 +15688,7 @@
                 <a:ea typeface="Cambria" pitchFamily="34" charset="-122"/>
                 <a:cs typeface="Cambria" pitchFamily="34" charset="-120"/>
               </a:rPr>
-              <a:t>+1,48 điểm   ·   KTC 95% [+0,54; +2,43]</a:t>
+              <a:t>+1,48 điểm · KTC 95% từ +0,54 đến +2,43</a:t>
             </a:r>
             <a:endParaRPr lang="en-US" sz="1800" dirty="0"/>
           </a:p>
@@ -15309,7 +15724,7 @@
               <a:buNone/>
             </a:pPr>
             <a:r>
-              <a:rPr lang="en-US" sz="1380" b="1" dirty="0">
+              <a:rPr lang="en-US" sz="1380" dirty="0">
                 <a:solidFill>
                   <a:srgbClr val="25194B"/>
                 </a:solidFill>
@@ -15732,7 +16147,7 @@
               <a:buNone/>
             </a:pPr>
             <a:r>
-              <a:rPr lang="en-US" sz="1600" b="1" dirty="0">
+              <a:rPr lang="en-US" sz="1600" dirty="0">
                 <a:solidFill>
                   <a:srgbClr val="25194B"/>
                 </a:solidFill>
@@ -15874,7 +16289,7 @@
               <a:buNone/>
             </a:pPr>
             <a:r>
-              <a:rPr lang="en-US" sz="1420" b="1" dirty="0">
+              <a:rPr lang="en-US" sz="1420" dirty="0">
                 <a:solidFill>
                   <a:srgbClr val="7A7099"/>
                 </a:solidFill>
@@ -16158,7 +16573,7 @@
               <a:buNone/>
             </a:pPr>
             <a:r>
-              <a:rPr lang="en-US" sz="1420" b="1" dirty="0">
+              <a:rPr lang="en-US" sz="1420" dirty="0">
                 <a:solidFill>
                   <a:srgbClr val="4F417A"/>
                 </a:solidFill>
@@ -16457,7 +16872,7 @@
                 <a:ea typeface="Cambria" pitchFamily="34" charset="-122"/>
                 <a:cs typeface="Cambria" pitchFamily="34" charset="-120"/>
               </a:rPr>
-              <a:t>[+1,51; +5,03]</a:t>
+              <a:t>KTC +1,51 đến +5,03</a:t>
             </a:r>
             <a:endParaRPr lang="en-US" sz="1260" dirty="0"/>
           </a:p>
@@ -16613,7 +17028,7 @@
                 <a:ea typeface="Cambria" pitchFamily="34" charset="-122"/>
                 <a:cs typeface="Cambria" pitchFamily="34" charset="-120"/>
               </a:rPr>
-              <a:t>[−1,39; +0,36]</a:t>
+              <a:t>KTC −1,39 đến +0,36</a:t>
             </a:r>
             <a:endParaRPr lang="en-US" sz="1260" dirty="0"/>
           </a:p>
@@ -16649,7 +17064,7 @@
               <a:buNone/>
             </a:pPr>
             <a:r>
-              <a:rPr lang="en-US" sz="1350" b="1" dirty="0">
+              <a:rPr lang="en-US" sz="1350" dirty="0">
                 <a:solidFill>
                   <a:srgbClr val="25194B"/>
                 </a:solidFill>
@@ -16657,7 +17072,7 @@
                 <a:ea typeface="Cambria" pitchFamily="34" charset="-122"/>
                 <a:cs typeface="Cambria" pitchFamily="34" charset="-120"/>
               </a:rPr>
-              <a:t>S1 vẫn cao hơn Base; GRPO-SPICE không khác rõ S1 về executability.</a:t>
+              <a:t>S1 vẫn cao hơn Base. GRPO-SPICE không khác rõ S1 về executability.</a:t>
             </a:r>
             <a:endParaRPr lang="en-US" sz="1350" dirty="0"/>
           </a:p>
@@ -17826,7 +18241,7 @@
               <a:buNone/>
             </a:pPr>
             <a:r>
-              <a:rPr lang="en-US" sz="1450" b="1" dirty="0">
+              <a:rPr lang="en-US" sz="1450" dirty="0">
                 <a:solidFill>
                   <a:srgbClr val="25194B"/>
                 </a:solidFill>
@@ -18646,7 +19061,7 @@
               <a:buNone/>
             </a:pPr>
             <a:r>
-              <a:rPr lang="en-US" sz="1380" b="1" dirty="0">
+              <a:rPr lang="en-US" sz="1380" dirty="0">
                 <a:solidFill>
                   <a:srgbClr val="25194B"/>
                 </a:solidFill>
@@ -19069,7 +19484,7 @@
               <a:buNone/>
             </a:pPr>
             <a:r>
-              <a:rPr lang="en-US" sz="1600" b="1" dirty="0">
+              <a:rPr lang="en-US" sz="1600" dirty="0">
                 <a:solidFill>
                   <a:srgbClr val="25194B"/>
                 </a:solidFill>
@@ -19077,7 +19492,7 @@
                 <a:ea typeface="Cambria" pitchFamily="34" charset="-122"/>
                 <a:cs typeface="Cambria" pitchFamily="34" charset="-120"/>
               </a:rPr>
-              <a:t>GRPO-SPICE cao hơn baseline S1 ở cả hai seed, nhưng độ lớn mức tăng thay đổi theo seed.</a:t>
+              <a:t>GRPO-SPICE cao hơn baseline S1 ở cả hai seed. Độ lớn mức tăng thay đổi theo seed.</a:t>
             </a:r>
             <a:endParaRPr lang="en-US" sz="1600" dirty="0"/>
           </a:p>
@@ -19516,9 +19931,9 @@
               <a:buNone/>
             </a:pPr>
             <a:r>
-              <a:rPr lang="en-US" sz="1400" b="1" dirty="0">
-                <a:solidFill>
-                  <a:srgbClr val="4F417A"/>
+              <a:rPr lang="en-US" sz="1400" dirty="0">
+                <a:solidFill>
+                  <a:srgbClr val="1A1A1A"/>
                 </a:solidFill>
                 <a:latin typeface="Cambria" pitchFamily="34" charset="0"/>
                 <a:ea typeface="Cambria" pitchFamily="34" charset="-122"/>
@@ -19648,9 +20063,9 @@
               <a:buNone/>
             </a:pPr>
             <a:r>
-              <a:rPr lang="en-US" sz="1400" b="1" dirty="0">
-                <a:solidFill>
-                  <a:srgbClr val="4F417A"/>
+              <a:rPr lang="en-US" sz="1400" dirty="0">
+                <a:solidFill>
+                  <a:srgbClr val="1A1A1A"/>
                 </a:solidFill>
                 <a:latin typeface="Cambria" pitchFamily="34" charset="0"/>
                 <a:ea typeface="Cambria" pitchFamily="34" charset="-122"/>
@@ -19716,7 +20131,7 @@
               <a:buNone/>
             </a:pPr>
             <a:r>
-              <a:rPr lang="en-US" sz="1420" b="1" dirty="0">
+              <a:rPr lang="en-US" sz="1420" dirty="0">
                 <a:solidFill>
                   <a:srgbClr val="1A1A1A"/>
                 </a:solidFill>
@@ -19917,7 +20332,7 @@
               <a:buNone/>
             </a:pPr>
             <a:r>
-              <a:rPr lang="en-US" sz="1530" b="1" dirty="0">
+              <a:rPr lang="en-US" sz="1530" dirty="0">
                 <a:solidFill>
                   <a:srgbClr val="25194B"/>
                 </a:solidFill>
@@ -19925,7 +20340,7 @@
                 <a:ea typeface="Cambria" pitchFamily="34" charset="-122"/>
                 <a:cs typeface="Cambria" pitchFamily="34" charset="-120"/>
               </a:rPr>
-              <a:t>Cả hai seed đều cùng hướng so với baseline S1; seed thứ hai cho mức tăng nhỏ hơn.</a:t>
+              <a:t>Cả hai seed đều cùng hướng so với baseline S1. Seed thứ hai cho mức tăng nhỏ hơn.</a:t>
             </a:r>
             <a:endParaRPr lang="en-US" sz="1530" dirty="0"/>
           </a:p>
@@ -21493,7 +21908,7 @@
               <a:buNone/>
             </a:pPr>
             <a:r>
-              <a:rPr lang="en-US" sz="1550" b="1" dirty="0">
+              <a:rPr lang="en-US" sz="1550" dirty="0">
                 <a:solidFill>
                   <a:srgbClr val="25194B"/>
                 </a:solidFill>
@@ -21958,7 +22373,7 @@
               <a:buNone/>
             </a:pPr>
             <a:r>
-              <a:rPr lang="en-US" sz="1250" b="1" dirty="0">
+              <a:rPr lang="en-US" sz="1250" dirty="0">
                 <a:solidFill>
                   <a:srgbClr val="1A1A1A"/>
                 </a:solidFill>
@@ -22044,7 +22459,7 @@
               <a:buNone/>
             </a:pPr>
             <a:r>
-              <a:rPr lang="en-US" sz="1250" b="1" dirty="0">
+              <a:rPr lang="en-US" sz="1250" dirty="0">
                 <a:solidFill>
                   <a:srgbClr val="1A1A1A"/>
                 </a:solidFill>
@@ -22130,7 +22545,7 @@
               <a:buNone/>
             </a:pPr>
             <a:r>
-              <a:rPr lang="en-US" sz="1250" b="1" dirty="0">
+              <a:rPr lang="en-US" sz="1250" dirty="0">
                 <a:solidFill>
                   <a:srgbClr val="1A1A1A"/>
                 </a:solidFill>
@@ -23154,7 +23569,7 @@
                 <a:ea typeface="Cambria" pitchFamily="34" charset="-122"/>
                 <a:cs typeface="Cambria" pitchFamily="34" charset="-120"/>
               </a:rPr>
-              <a:t>|px−gx| ≤ 0,14W; |py−gy| ≤ 0,14H.</a:t>
+              <a:t>|px−gx| ≤ 0,14W và |py−gy| ≤ 0,14H.</a:t>
             </a:r>
             <a:endParaRPr lang="en-US" sz="1550" dirty="0"/>
           </a:p>
@@ -27483,7 +27898,7 @@
                 <a:ea typeface="Cambria" pitchFamily="34" charset="-122"/>
                 <a:cs typeface="Cambria" pitchFamily="34" charset="-120"/>
               </a:rPr>
-              <a:t>[+0,80; +2,33]</a:t>
+              <a:t>+0,80 đến +2,33</a:t>
             </a:r>
             <a:endParaRPr lang="en-US" sz="1300" dirty="0"/>
           </a:p>
@@ -27639,7 +28054,7 @@
                 <a:ea typeface="Cambria" pitchFamily="34" charset="-122"/>
                 <a:cs typeface="Cambria" pitchFamily="34" charset="-120"/>
               </a:rPr>
-              <a:t>[+0,82; +2,30]</a:t>
+              <a:t>+0,82 đến +2,30</a:t>
             </a:r>
             <a:endParaRPr lang="en-US" sz="1300" dirty="0"/>
           </a:p>
@@ -27795,7 +28210,7 @@
                 <a:ea typeface="Cambria" pitchFamily="34" charset="-122"/>
                 <a:cs typeface="Cambria" pitchFamily="34" charset="-120"/>
               </a:rPr>
-              <a:t>[+0,05; +1,51]</a:t>
+              <a:t>+0,05 đến +1,51</a:t>
             </a:r>
             <a:endParaRPr lang="en-US" sz="1300" dirty="0"/>
           </a:p>
@@ -27951,7 +28366,7 @@
                 <a:ea typeface="Cambria" pitchFamily="34" charset="-122"/>
                 <a:cs typeface="Cambria" pitchFamily="34" charset="-120"/>
               </a:rPr>
-              <a:t>[+0,02; +1,40]</a:t>
+              <a:t>+0,02 đến +1,40</a:t>
             </a:r>
             <a:endParaRPr lang="en-US" sz="1300" dirty="0"/>
           </a:p>
@@ -29766,7 +30181,7 @@
               <a:buNone/>
             </a:pPr>
             <a:r>
-              <a:rPr lang="en-US" sz="1550" b="1" dirty="0">
+              <a:rPr lang="en-US" sz="1550" dirty="0">
                 <a:solidFill>
                   <a:srgbClr val="25194B"/>
                 </a:solidFill>
@@ -30912,7 +31327,7 @@
                 <a:ea typeface="Cambria" pitchFamily="34" charset="-122"/>
                 <a:cs typeface="Cambria" pitchFamily="34" charset="-120"/>
               </a:rPr>
-              <a:t>Khi thực sự chọn, chất lượng khá tốt; vấn đề nằm ở quyết định từ chối chọn.</a:t>
+              <a:t>Khi thực sự chọn, chất lượng khá tốt. Vấn đề nằm ở quyết định từ chối chọn.</a:t>
             </a:r>
             <a:endParaRPr lang="en-US" sz="1210" dirty="0"/>
           </a:p>
@@ -31068,7 +31483,7 @@
                 <a:ea typeface="Cambria" pitchFamily="34" charset="-122"/>
                 <a:cs typeface="Cambria" pitchFamily="34" charset="-120"/>
               </a:rPr>
-              <a:t>Bộ biên tập có ích khi vùng cắt đúng; khâu chọn vùng còn là điểm cần cải thiện.</a:t>
+              <a:t>Bộ biên tập có ích khi vùng cắt đúng. Khâu chọn vùng còn là điểm cần cải thiện.</a:t>
             </a:r>
             <a:endParaRPr lang="en-US" sz="1210" dirty="0"/>
           </a:p>
@@ -31870,7 +32285,7 @@
               <a:buNone/>
             </a:pPr>
             <a:r>
-              <a:rPr lang="en-US" sz="1600" b="1" dirty="0">
+              <a:rPr lang="en-US" sz="1600" dirty="0">
                 <a:solidFill>
                   <a:srgbClr val="25194B"/>
                 </a:solidFill>
@@ -32670,7 +33085,7 @@
               <a:buNone/>
             </a:pPr>
             <a:r>
-              <a:rPr lang="en-US" sz="1250" b="1" dirty="0">
+              <a:rPr lang="en-US" sz="1250" dirty="0">
                 <a:solidFill>
                   <a:srgbClr val="1A1A1A"/>
                 </a:solidFill>
@@ -32756,7 +33171,7 @@
               <a:buNone/>
             </a:pPr>
             <a:r>
-              <a:rPr lang="en-US" sz="1250" b="1" dirty="0">
+              <a:rPr lang="en-US" sz="1250" dirty="0">
                 <a:solidFill>
                   <a:srgbClr val="1A1A1A"/>
                 </a:solidFill>
@@ -32842,7 +33257,7 @@
               <a:buNone/>
             </a:pPr>
             <a:r>
-              <a:rPr lang="en-US" sz="1250" b="1" dirty="0">
+              <a:rPr lang="en-US" sz="1250" dirty="0">
                 <a:solidFill>
                   <a:srgbClr val="1A1A1A"/>
                 </a:solidFill>
@@ -33273,7 +33688,7 @@
                 <a:ea typeface="Cambria" pitchFamily="34" charset="-122"/>
                 <a:cs typeface="Cambria" pitchFamily="34" charset="-120"/>
               </a:rPr>
-              <a:t>Tập huấn luyện và tập kiểm tra chính được tách theo tác vụ; không có tác vụ xuất hiện ở cả hai phía.</a:t>
+              <a:t>Tập huấn luyện và tập kiểm tra chính được tách theo tác vụ. Không có tác vụ xuất hiện ở cả hai phía.</a:t>
             </a:r>
             <a:endParaRPr lang="en-US" sz="1650" dirty="0"/>
           </a:p>
@@ -35790,7 +36205,7 @@
               <a:buNone/>
             </a:pPr>
             <a:r>
-              <a:rPr lang="en-US" sz="1600" b="1" dirty="0">
+              <a:rPr lang="en-US" sz="1600" dirty="0">
                 <a:solidFill>
                   <a:srgbClr val="25194B"/>
                 </a:solidFill>
@@ -36074,7 +36489,7 @@
               <a:buNone/>
             </a:pPr>
             <a:r>
-              <a:rPr lang="en-US" sz="1420" b="1" dirty="0">
+              <a:rPr lang="en-US" sz="1420" dirty="0">
                 <a:solidFill>
                   <a:srgbClr val="4F417A"/>
                 </a:solidFill>
@@ -36216,7 +36631,7 @@
               <a:buNone/>
             </a:pPr>
             <a:r>
-              <a:rPr lang="en-US" sz="1420" b="1" dirty="0">
+              <a:rPr lang="en-US" sz="1420" dirty="0">
                 <a:solidFill>
                   <a:srgbClr val="7A7099"/>
                 </a:solidFill>
@@ -37504,7 +37919,7 @@
               <a:buNone/>
             </a:pPr>
             <a:r>
-              <a:rPr lang="en-US" sz="1420" b="1" dirty="0">
+              <a:rPr lang="en-US" sz="1420" dirty="0">
                 <a:solidFill>
                   <a:srgbClr val="25194B"/>
                 </a:solidFill>
@@ -37512,7 +37927,7 @@
                 <a:ea typeface="Cambria" pitchFamily="34" charset="-122"/>
                 <a:cs typeface="Cambria" pitchFamily="34" charset="-120"/>
               </a:rPr>
-              <a:t>Mô hình định vị chỉ được dùng để đánh giá câu hướng dẫn; không tham gia sinh câu hay cập nhật mô hình.</a:t>
+              <a:t>Mô hình định vị chỉ được dùng để đánh giá câu hướng dẫn. Mô hình này không tham gia sinh câu hay cập nhật mô hình.</a:t>
             </a:r>
             <a:endParaRPr lang="en-US" sz="1420" dirty="0"/>
           </a:p>
